--- a/Seminario de Sistemas/Clases/Clase 12 - Diagramas UML avanzados/Presentacion.pptx
+++ b/Seminario de Sistemas/Clases/Clase 12 - Diagramas UML avanzados/Presentacion.pptx
@@ -19,6 +19,12 @@
     <p:sldId id="267" r:id="rId18"/>
     <p:sldId id="268" r:id="rId19"/>
     <p:sldId id="269" r:id="rId20"/>
+    <p:sldId id="270" r:id="rId21"/>
+    <p:sldId id="271" r:id="rId22"/>
+    <p:sldId id="272" r:id="rId23"/>
+    <p:sldId id="273" r:id="rId24"/>
+    <p:sldId id="274" r:id="rId25"/>
+    <p:sldId id="275" r:id="rId26"/>
   </p:sldIdLst>
   <p:sldSz cx="12191695" cy="6858000" type="screen4x3"/>
   <p:notesSz cx="6858000" cy="9144000"/>
@@ -3619,111 +3625,21 @@
                 </a:solidFill>
                 <a:latin typeface="Calibri"/>
               </a:rPr>
-              <a:t>Taller PI — pasos guiados</a:t>
-            </a:r>
-          </a:p>
-        </p:txBody>
-      </p:sp>
-      <p:sp>
-        <p:nvSpPr>
-          <p:cNvPr id="5" name="Rounded Rectangle 4"/>
-          <p:cNvSpPr/>
-          <p:nvPr/>
-        </p:nvSpPr>
-        <p:spPr>
-          <a:xfrm>
-            <a:off x="457200" y="1234440"/>
-            <a:ext cx="11277295" cy="950976"/>
-          </a:xfrm>
-          <a:prstGeom prst="roundRect">
-            <a:avLst>
-              <a:gd name="adj" fmla="val 12000"/>
-            </a:avLst>
-          </a:prstGeom>
-          <a:solidFill>
-            <a:srgbClr val="F2F2F2"/>
-          </a:solidFill>
-          <a:ln>
-            <a:noFill/>
-          </a:ln>
-        </p:spPr>
-        <p:style>
-          <a:lnRef idx="1">
-            <a:schemeClr val="accent1"/>
-          </a:lnRef>
-          <a:fillRef idx="3">
-            <a:schemeClr val="accent1"/>
-          </a:fillRef>
-          <a:effectRef idx="2">
-            <a:schemeClr val="accent1"/>
-          </a:effectRef>
-          <a:fontRef idx="minor">
-            <a:schemeClr val="lt1"/>
-          </a:fontRef>
-        </p:style>
-        <p:txBody>
-          <a:bodyPr rtlCol="0" anchor="ctr"/>
-          <a:lstStyle/>
-          <a:p>
-            <a:pPr algn="ctr"/>
-          </a:p>
-        </p:txBody>
-      </p:sp>
-      <p:sp>
-        <p:nvSpPr>
-          <p:cNvPr id="6" name="Rounded Rectangle 5"/>
-          <p:cNvSpPr/>
-          <p:nvPr/>
-        </p:nvSpPr>
-        <p:spPr>
-          <a:xfrm>
-            <a:off x="594360" y="1490472"/>
-            <a:ext cx="438912" cy="438912"/>
-          </a:xfrm>
-          <a:prstGeom prst="roundRect">
-            <a:avLst>
-              <a:gd name="adj" fmla="val 12000"/>
-            </a:avLst>
-          </a:prstGeom>
-          <a:solidFill>
-            <a:srgbClr val="095292"/>
-          </a:solidFill>
-          <a:ln>
-            <a:noFill/>
-          </a:ln>
-        </p:spPr>
-        <p:style>
-          <a:lnRef idx="1">
-            <a:schemeClr val="accent1"/>
-          </a:lnRef>
-          <a:fillRef idx="3">
-            <a:schemeClr val="accent1"/>
-          </a:fillRef>
-          <a:effectRef idx="2">
-            <a:schemeClr val="accent1"/>
-          </a:effectRef>
-          <a:fontRef idx="minor">
-            <a:schemeClr val="lt1"/>
-          </a:fontRef>
-        </p:style>
-        <p:txBody>
-          <a:bodyPr rtlCol="0" anchor="ctr"/>
-          <a:lstStyle/>
-          <a:p>
-            <a:pPr algn="ctr"/>
-          </a:p>
-        </p:txBody>
-      </p:sp>
-      <p:sp>
-        <p:nvSpPr>
-          <p:cNvPr id="7" name="TextBox 6"/>
+              <a:t>Los flujos alternos tambien se modelan, y para eso existen los...</a:t>
+            </a:r>
+          </a:p>
+        </p:txBody>
+      </p:sp>
+      <p:sp>
+        <p:nvSpPr>
+          <p:cNvPr id="5" name="TextBox 4"/>
           <p:cNvSpPr txBox="1"/>
           <p:nvPr/>
         </p:nvSpPr>
         <p:spPr>
           <a:xfrm>
-            <a:off x="594360" y="1490472"/>
-            <a:ext cx="438912" cy="438912"/>
+            <a:off x="457200" y="1170432"/>
+            <a:ext cx="11277295" cy="5230368"/>
           </a:xfrm>
           <a:prstGeom prst="rect">
             <a:avLst/>
@@ -3731,677 +3647,127 @@
           <a:noFill/>
         </p:spPr>
         <p:txBody>
-          <a:bodyPr wrap="square" anchor="ctr"/>
-          <a:lstStyle/>
-          <a:p>
-            <a:pPr algn="ctr"/>
-            <a:r>
-              <a:rPr sz="1600" b="1" i="0">
-                <a:solidFill>
-                  <a:srgbClr val="FFFFFF"/>
-                </a:solidFill>
-                <a:latin typeface="Calibri"/>
-              </a:rPr>
-              <a:t>1</a:t>
-            </a:r>
-          </a:p>
-        </p:txBody>
-      </p:sp>
-      <p:sp>
-        <p:nvSpPr>
-          <p:cNvPr id="8" name="TextBox 7"/>
-          <p:cNvSpPr txBox="1"/>
-          <p:nvPr/>
-        </p:nvSpPr>
-        <p:spPr>
-          <a:xfrm>
-            <a:off x="1188720" y="1325880"/>
-            <a:ext cx="10271455" cy="786384"/>
-          </a:xfrm>
-          <a:prstGeom prst="rect">
-            <a:avLst/>
-          </a:prstGeom>
-          <a:noFill/>
-        </p:spPr>
-        <p:txBody>
-          <a:bodyPr wrap="square" anchor="ctr"/>
-          <a:lstStyle/>
-          <a:p>
-            <a:r>
-              <a:rPr sz="1400" b="1" i="0">
-                <a:solidFill>
-                  <a:srgbClr val="095292"/>
-                </a:solidFill>
-                <a:latin typeface="Calibri"/>
-              </a:rPr>
-              <a:t>Tomar el flujo principal escrito de CU-04 Agendar cita, y si todavia no esta especificado diligenciar primero la plantilla de la clase nueve, para luego numerar en el documento cual paso genera cual mensaje, de manera que quede una lista de entre seis y ocho mensajes antes de dibujar cualquier cosa.</a:t>
-            </a:r>
-          </a:p>
-        </p:txBody>
-      </p:sp>
-      <p:sp>
-        <p:nvSpPr>
-          <p:cNvPr id="9" name="Rounded Rectangle 8"/>
-          <p:cNvSpPr/>
-          <p:nvPr/>
-        </p:nvSpPr>
-        <p:spPr>
-          <a:xfrm>
-            <a:off x="457200" y="2276856"/>
-            <a:ext cx="11277295" cy="950976"/>
-          </a:xfrm>
-          <a:prstGeom prst="roundRect">
-            <a:avLst>
-              <a:gd name="adj" fmla="val 12000"/>
-            </a:avLst>
-          </a:prstGeom>
-          <a:solidFill>
-            <a:srgbClr val="E8F4FA"/>
-          </a:solidFill>
-          <a:ln>
-            <a:noFill/>
-          </a:ln>
-        </p:spPr>
-        <p:style>
-          <a:lnRef idx="1">
-            <a:schemeClr val="accent1"/>
-          </a:lnRef>
-          <a:fillRef idx="3">
-            <a:schemeClr val="accent1"/>
-          </a:fillRef>
-          <a:effectRef idx="2">
-            <a:schemeClr val="accent1"/>
-          </a:effectRef>
-          <a:fontRef idx="minor">
-            <a:schemeClr val="lt1"/>
-          </a:fontRef>
-        </p:style>
-        <p:txBody>
-          <a:bodyPr rtlCol="0" anchor="ctr"/>
-          <a:lstStyle/>
-          <a:p>
-            <a:pPr algn="ctr"/>
-          </a:p>
-        </p:txBody>
-      </p:sp>
-      <p:sp>
-        <p:nvSpPr>
-          <p:cNvPr id="10" name="Rounded Rectangle 9"/>
-          <p:cNvSpPr/>
-          <p:nvPr/>
-        </p:nvSpPr>
-        <p:spPr>
-          <a:xfrm>
-            <a:off x="594360" y="2532888"/>
-            <a:ext cx="438912" cy="438912"/>
-          </a:xfrm>
-          <a:prstGeom prst="roundRect">
-            <a:avLst>
-              <a:gd name="adj" fmla="val 12000"/>
-            </a:avLst>
-          </a:prstGeom>
-          <a:solidFill>
-            <a:srgbClr val="095292"/>
-          </a:solidFill>
-          <a:ln>
-            <a:noFill/>
-          </a:ln>
-        </p:spPr>
-        <p:style>
-          <a:lnRef idx="1">
-            <a:schemeClr val="accent1"/>
-          </a:lnRef>
-          <a:fillRef idx="3">
-            <a:schemeClr val="accent1"/>
-          </a:fillRef>
-          <a:effectRef idx="2">
-            <a:schemeClr val="accent1"/>
-          </a:effectRef>
-          <a:fontRef idx="minor">
-            <a:schemeClr val="lt1"/>
-          </a:fontRef>
-        </p:style>
-        <p:txBody>
-          <a:bodyPr rtlCol="0" anchor="ctr"/>
-          <a:lstStyle/>
-          <a:p>
-            <a:pPr algn="ctr"/>
-          </a:p>
-        </p:txBody>
-      </p:sp>
-      <p:sp>
-        <p:nvSpPr>
-          <p:cNvPr id="11" name="TextBox 10"/>
-          <p:cNvSpPr txBox="1"/>
-          <p:nvPr/>
-        </p:nvSpPr>
-        <p:spPr>
-          <a:xfrm>
-            <a:off x="594360" y="2532888"/>
-            <a:ext cx="438912" cy="438912"/>
-          </a:xfrm>
-          <a:prstGeom prst="rect">
-            <a:avLst/>
-          </a:prstGeom>
-          <a:noFill/>
-        </p:spPr>
-        <p:txBody>
-          <a:bodyPr wrap="square" anchor="ctr"/>
-          <a:lstStyle/>
-          <a:p>
-            <a:pPr algn="ctr"/>
-            <a:r>
-              <a:rPr sz="1600" b="1" i="0">
-                <a:solidFill>
-                  <a:srgbClr val="FFFFFF"/>
-                </a:solidFill>
-                <a:latin typeface="Calibri"/>
-              </a:rPr>
-              <a:t>2</a:t>
-            </a:r>
-          </a:p>
-        </p:txBody>
-      </p:sp>
-      <p:sp>
-        <p:nvSpPr>
-          <p:cNvPr id="12" name="TextBox 11"/>
-          <p:cNvSpPr txBox="1"/>
-          <p:nvPr/>
-        </p:nvSpPr>
-        <p:spPr>
-          <a:xfrm>
-            <a:off x="1188720" y="2368296"/>
-            <a:ext cx="10271455" cy="786384"/>
-          </a:xfrm>
-          <a:prstGeom prst="rect">
-            <a:avLst/>
-          </a:prstGeom>
-          <a:noFill/>
-        </p:spPr>
-        <p:txBody>
-          <a:bodyPr wrap="square" anchor="ctr"/>
-          <a:lstStyle/>
-          <a:p>
-            <a:r>
-              <a:rPr sz="1400" b="1" i="0">
-                <a:solidFill>
-                  <a:srgbClr val="095292"/>
-                </a:solidFill>
-                <a:latin typeface="Calibri"/>
-              </a:rPr>
-              <a:t>Dibujar el diagrama de secuencia en Mermaid Live Editor o draw.io con la recepcionista como actor y minimo tres participantes que correspondan a clases reales del diagrama de clases de VetCare, incluyendo las flechas de retorno con el dato que devuelven.</a:t>
-            </a:r>
-          </a:p>
-        </p:txBody>
-      </p:sp>
-      <p:sp>
-        <p:nvSpPr>
-          <p:cNvPr id="13" name="Rounded Rectangle 12"/>
-          <p:cNvSpPr/>
-          <p:nvPr/>
-        </p:nvSpPr>
-        <p:spPr>
-          <a:xfrm>
-            <a:off x="457200" y="3319272"/>
-            <a:ext cx="11277295" cy="950976"/>
-          </a:xfrm>
-          <a:prstGeom prst="roundRect">
-            <a:avLst>
-              <a:gd name="adj" fmla="val 12000"/>
-            </a:avLst>
-          </a:prstGeom>
-          <a:solidFill>
-            <a:srgbClr val="F2F2F2"/>
-          </a:solidFill>
-          <a:ln>
-            <a:noFill/>
-          </a:ln>
-        </p:spPr>
-        <p:style>
-          <a:lnRef idx="1">
-            <a:schemeClr val="accent1"/>
-          </a:lnRef>
-          <a:fillRef idx="3">
-            <a:schemeClr val="accent1"/>
-          </a:fillRef>
-          <a:effectRef idx="2">
-            <a:schemeClr val="accent1"/>
-          </a:effectRef>
-          <a:fontRef idx="minor">
-            <a:schemeClr val="lt1"/>
-          </a:fontRef>
-        </p:style>
-        <p:txBody>
-          <a:bodyPr rtlCol="0" anchor="ctr"/>
-          <a:lstStyle/>
-          <a:p>
-            <a:pPr algn="ctr"/>
-          </a:p>
-        </p:txBody>
-      </p:sp>
-      <p:sp>
-        <p:nvSpPr>
-          <p:cNvPr id="14" name="Rounded Rectangle 13"/>
-          <p:cNvSpPr/>
-          <p:nvPr/>
-        </p:nvSpPr>
-        <p:spPr>
-          <a:xfrm>
-            <a:off x="594360" y="3575304"/>
-            <a:ext cx="438912" cy="438912"/>
-          </a:xfrm>
-          <a:prstGeom prst="roundRect">
-            <a:avLst>
-              <a:gd name="adj" fmla="val 12000"/>
-            </a:avLst>
-          </a:prstGeom>
-          <a:solidFill>
-            <a:srgbClr val="095292"/>
-          </a:solidFill>
-          <a:ln>
-            <a:noFill/>
-          </a:ln>
-        </p:spPr>
-        <p:style>
-          <a:lnRef idx="1">
-            <a:schemeClr val="accent1"/>
-          </a:lnRef>
-          <a:fillRef idx="3">
-            <a:schemeClr val="accent1"/>
-          </a:fillRef>
-          <a:effectRef idx="2">
-            <a:schemeClr val="accent1"/>
-          </a:effectRef>
-          <a:fontRef idx="minor">
-            <a:schemeClr val="lt1"/>
-          </a:fontRef>
-        </p:style>
-        <p:txBody>
-          <a:bodyPr rtlCol="0" anchor="ctr"/>
-          <a:lstStyle/>
-          <a:p>
-            <a:pPr algn="ctr"/>
-          </a:p>
-        </p:txBody>
-      </p:sp>
-      <p:sp>
-        <p:nvSpPr>
-          <p:cNvPr id="15" name="TextBox 14"/>
-          <p:cNvSpPr txBox="1"/>
-          <p:nvPr/>
-        </p:nvSpPr>
-        <p:spPr>
-          <a:xfrm>
-            <a:off x="594360" y="3575304"/>
-            <a:ext cx="438912" cy="438912"/>
-          </a:xfrm>
-          <a:prstGeom prst="rect">
-            <a:avLst/>
-          </a:prstGeom>
-          <a:noFill/>
-        </p:spPr>
-        <p:txBody>
-          <a:bodyPr wrap="square" anchor="ctr"/>
-          <a:lstStyle/>
-          <a:p>
-            <a:pPr algn="ctr"/>
-            <a:r>
-              <a:rPr sz="1600" b="1" i="0">
-                <a:solidFill>
-                  <a:srgbClr val="FFFFFF"/>
-                </a:solidFill>
-                <a:latin typeface="Calibri"/>
-              </a:rPr>
-              <a:t>3</a:t>
-            </a:r>
-          </a:p>
-        </p:txBody>
-      </p:sp>
-      <p:sp>
-        <p:nvSpPr>
-          <p:cNvPr id="16" name="TextBox 15"/>
-          <p:cNvSpPr txBox="1"/>
-          <p:nvPr/>
-        </p:nvSpPr>
-        <p:spPr>
-          <a:xfrm>
-            <a:off x="1188720" y="3410712"/>
-            <a:ext cx="10271455" cy="786384"/>
-          </a:xfrm>
-          <a:prstGeom prst="rect">
-            <a:avLst/>
-          </a:prstGeom>
-          <a:noFill/>
-        </p:spPr>
-        <p:txBody>
-          <a:bodyPr wrap="square" anchor="ctr"/>
-          <a:lstStyle/>
-          <a:p>
-            <a:r>
-              <a:rPr sz="1500" b="1" i="0">
-                <a:solidFill>
-                  <a:srgbClr val="095292"/>
-                </a:solidFill>
-                <a:latin typeface="Calibri"/>
-              </a:rPr>
-              <a:t>Agregar un fragmento alt que modele el horario ocupado con sus dos condiciones de guarda escritas, y verificar que el camino del else corresponda a un flujo alterno documentado en la especificacion del caso de uso.</a:t>
-            </a:r>
-          </a:p>
-        </p:txBody>
-      </p:sp>
-      <p:sp>
-        <p:nvSpPr>
-          <p:cNvPr id="17" name="Rounded Rectangle 16"/>
-          <p:cNvSpPr/>
-          <p:nvPr/>
-        </p:nvSpPr>
-        <p:spPr>
-          <a:xfrm>
-            <a:off x="457200" y="4361688"/>
-            <a:ext cx="11277295" cy="950976"/>
-          </a:xfrm>
-          <a:prstGeom prst="roundRect">
-            <a:avLst>
-              <a:gd name="adj" fmla="val 12000"/>
-            </a:avLst>
-          </a:prstGeom>
-          <a:solidFill>
-            <a:srgbClr val="E8F4FA"/>
-          </a:solidFill>
-          <a:ln>
-            <a:noFill/>
-          </a:ln>
-        </p:spPr>
-        <p:style>
-          <a:lnRef idx="1">
-            <a:schemeClr val="accent1"/>
-          </a:lnRef>
-          <a:fillRef idx="3">
-            <a:schemeClr val="accent1"/>
-          </a:fillRef>
-          <a:effectRef idx="2">
-            <a:schemeClr val="accent1"/>
-          </a:effectRef>
-          <a:fontRef idx="minor">
-            <a:schemeClr val="lt1"/>
-          </a:fontRef>
-        </p:style>
-        <p:txBody>
-          <a:bodyPr rtlCol="0" anchor="ctr"/>
-          <a:lstStyle/>
-          <a:p>
-            <a:pPr algn="ctr"/>
-          </a:p>
-        </p:txBody>
-      </p:sp>
-      <p:sp>
-        <p:nvSpPr>
-          <p:cNvPr id="18" name="Rounded Rectangle 17"/>
-          <p:cNvSpPr/>
-          <p:nvPr/>
-        </p:nvSpPr>
-        <p:spPr>
-          <a:xfrm>
-            <a:off x="594360" y="4617720"/>
-            <a:ext cx="438912" cy="438912"/>
-          </a:xfrm>
-          <a:prstGeom prst="roundRect">
-            <a:avLst>
-              <a:gd name="adj" fmla="val 12000"/>
-            </a:avLst>
-          </a:prstGeom>
-          <a:solidFill>
-            <a:srgbClr val="095292"/>
-          </a:solidFill>
-          <a:ln>
-            <a:noFill/>
-          </a:ln>
-        </p:spPr>
-        <p:style>
-          <a:lnRef idx="1">
-            <a:schemeClr val="accent1"/>
-          </a:lnRef>
-          <a:fillRef idx="3">
-            <a:schemeClr val="accent1"/>
-          </a:fillRef>
-          <a:effectRef idx="2">
-            <a:schemeClr val="accent1"/>
-          </a:effectRef>
-          <a:fontRef idx="minor">
-            <a:schemeClr val="lt1"/>
-          </a:fontRef>
-        </p:style>
-        <p:txBody>
-          <a:bodyPr rtlCol="0" anchor="ctr"/>
-          <a:lstStyle/>
-          <a:p>
-            <a:pPr algn="ctr"/>
-          </a:p>
-        </p:txBody>
-      </p:sp>
-      <p:sp>
-        <p:nvSpPr>
-          <p:cNvPr id="19" name="TextBox 18"/>
-          <p:cNvSpPr txBox="1"/>
-          <p:nvPr/>
-        </p:nvSpPr>
-        <p:spPr>
-          <a:xfrm>
-            <a:off x="594360" y="4617720"/>
-            <a:ext cx="438912" cy="438912"/>
-          </a:xfrm>
-          <a:prstGeom prst="rect">
-            <a:avLst/>
-          </a:prstGeom>
-          <a:noFill/>
-        </p:spPr>
-        <p:txBody>
-          <a:bodyPr wrap="square" anchor="ctr"/>
-          <a:lstStyle/>
-          <a:p>
-            <a:pPr algn="ctr"/>
-            <a:r>
-              <a:rPr sz="1600" b="1" i="0">
-                <a:solidFill>
-                  <a:srgbClr val="FFFFFF"/>
-                </a:solidFill>
-                <a:latin typeface="Calibri"/>
-              </a:rPr>
-              <a:t>4</a:t>
-            </a:r>
-          </a:p>
-        </p:txBody>
-      </p:sp>
-      <p:sp>
-        <p:nvSpPr>
-          <p:cNvPr id="20" name="TextBox 19"/>
-          <p:cNvSpPr txBox="1"/>
-          <p:nvPr/>
-        </p:nvSpPr>
-        <p:spPr>
-          <a:xfrm>
-            <a:off x="1188720" y="4453128"/>
-            <a:ext cx="10271455" cy="786384"/>
-          </a:xfrm>
-          <a:prstGeom prst="rect">
-            <a:avLst/>
-          </a:prstGeom>
-          <a:noFill/>
-        </p:spPr>
-        <p:txBody>
-          <a:bodyPr wrap="square" anchor="ctr"/>
-          <a:lstStyle/>
-          <a:p>
-            <a:r>
-              <a:rPr sz="1500" b="1" i="0">
-                <a:solidFill>
-                  <a:srgbClr val="095292"/>
-                </a:solidFill>
-                <a:latin typeface="Calibri"/>
-              </a:rPr>
-              <a:t>Construir la tabla de mapeo mensaje a operacion con tres columnas, mensaje, clase destinataria y operacion que debe existir, y agregar al diagrama de clases toda operacion que hoy falte; ninguna fila puede quedar con la clase en blanco.</a:t>
-            </a:r>
-          </a:p>
-        </p:txBody>
-      </p:sp>
-      <p:sp>
-        <p:nvSpPr>
-          <p:cNvPr id="21" name="Rounded Rectangle 20"/>
-          <p:cNvSpPr/>
-          <p:nvPr/>
-        </p:nvSpPr>
-        <p:spPr>
-          <a:xfrm>
-            <a:off x="457200" y="5404104"/>
-            <a:ext cx="11277295" cy="950976"/>
-          </a:xfrm>
-          <a:prstGeom prst="roundRect">
-            <a:avLst>
-              <a:gd name="adj" fmla="val 12000"/>
-            </a:avLst>
-          </a:prstGeom>
-          <a:solidFill>
-            <a:srgbClr val="F2F2F2"/>
-          </a:solidFill>
-          <a:ln>
-            <a:noFill/>
-          </a:ln>
-        </p:spPr>
-        <p:style>
-          <a:lnRef idx="1">
-            <a:schemeClr val="accent1"/>
-          </a:lnRef>
-          <a:fillRef idx="3">
-            <a:schemeClr val="accent1"/>
-          </a:fillRef>
-          <a:effectRef idx="2">
-            <a:schemeClr val="accent1"/>
-          </a:effectRef>
-          <a:fontRef idx="minor">
-            <a:schemeClr val="lt1"/>
-          </a:fontRef>
-        </p:style>
-        <p:txBody>
-          <a:bodyPr rtlCol="0" anchor="ctr"/>
-          <a:lstStyle/>
-          <a:p>
-            <a:pPr algn="ctr"/>
-          </a:p>
-        </p:txBody>
-      </p:sp>
-      <p:sp>
-        <p:nvSpPr>
-          <p:cNvPr id="22" name="Rounded Rectangle 21"/>
-          <p:cNvSpPr/>
-          <p:nvPr/>
-        </p:nvSpPr>
-        <p:spPr>
-          <a:xfrm>
-            <a:off x="594360" y="5660136"/>
-            <a:ext cx="438912" cy="438912"/>
-          </a:xfrm>
-          <a:prstGeom prst="roundRect">
-            <a:avLst>
-              <a:gd name="adj" fmla="val 12000"/>
-            </a:avLst>
-          </a:prstGeom>
-          <a:solidFill>
-            <a:srgbClr val="095292"/>
-          </a:solidFill>
-          <a:ln>
-            <a:noFill/>
-          </a:ln>
-        </p:spPr>
-        <p:style>
-          <a:lnRef idx="1">
-            <a:schemeClr val="accent1"/>
-          </a:lnRef>
-          <a:fillRef idx="3">
-            <a:schemeClr val="accent1"/>
-          </a:fillRef>
-          <a:effectRef idx="2">
-            <a:schemeClr val="accent1"/>
-          </a:effectRef>
-          <a:fontRef idx="minor">
-            <a:schemeClr val="lt1"/>
-          </a:fontRef>
-        </p:style>
-        <p:txBody>
-          <a:bodyPr rtlCol="0" anchor="ctr"/>
-          <a:lstStyle/>
-          <a:p>
-            <a:pPr algn="ctr"/>
-          </a:p>
-        </p:txBody>
-      </p:sp>
-      <p:sp>
-        <p:nvSpPr>
-          <p:cNvPr id="23" name="TextBox 22"/>
-          <p:cNvSpPr txBox="1"/>
-          <p:nvPr/>
-        </p:nvSpPr>
-        <p:spPr>
-          <a:xfrm>
-            <a:off x="594360" y="5660136"/>
-            <a:ext cx="438912" cy="438912"/>
-          </a:xfrm>
-          <a:prstGeom prst="rect">
-            <a:avLst/>
-          </a:prstGeom>
-          <a:noFill/>
-        </p:spPr>
-        <p:txBody>
-          <a:bodyPr wrap="square" anchor="ctr"/>
-          <a:lstStyle/>
-          <a:p>
-            <a:pPr algn="ctr"/>
-            <a:r>
-              <a:rPr sz="1600" b="1" i="0">
-                <a:solidFill>
-                  <a:srgbClr val="FFFFFF"/>
-                </a:solidFill>
-                <a:latin typeface="Calibri"/>
-              </a:rPr>
-              <a:t>5</a:t>
-            </a:r>
-          </a:p>
-        </p:txBody>
-      </p:sp>
-      <p:sp>
-        <p:nvSpPr>
-          <p:cNvPr id="24" name="TextBox 23"/>
-          <p:cNvSpPr txBox="1"/>
-          <p:nvPr/>
-        </p:nvSpPr>
-        <p:spPr>
-          <a:xfrm>
-            <a:off x="1188720" y="5495544"/>
-            <a:ext cx="10271455" cy="786384"/>
-          </a:xfrm>
-          <a:prstGeom prst="rect">
-            <a:avLst/>
-          </a:prstGeom>
-          <a:noFill/>
-        </p:spPr>
-        <p:txBody>
-          <a:bodyPr wrap="square" anchor="ctr"/>
-          <a:lstStyle/>
-          <a:p>
-            <a:r>
-              <a:rPr sz="1400" b="1" i="0">
-                <a:solidFill>
-                  <a:srgbClr val="095292"/>
-                </a:solidFill>
-                <a:latin typeface="Calibri"/>
-              </a:rPr>
-              <a:t>Dibujar el diagrama de actividad del proceso de atencion en el consultorio con cuatro calles (Propietario, Recepcionista, Veterinario y Sistema VetCare), con minimo dos nodos de decision y una bifurcacion en paralelo, y exportar todo a PDF para subirlo a la plataforma del curso.</a:t>
-            </a:r>
-          </a:p>
-        </p:txBody>
-      </p:sp>
-      <p:sp>
-        <p:nvSpPr>
-          <p:cNvPr id="25" name="TextBox 24"/>
+          <a:bodyPr wrap="square">
+            <a:spAutoFit/>
+          </a:bodyPr>
+          <a:lstStyle/>
+          <a:p>
+            <a:pPr>
+              <a:spcAft>
+                <a:spcPts val="800"/>
+              </a:spcAft>
+            </a:pPr>
+            <a:r>
+              <a:rPr sz="2000" b="0" i="0">
+                <a:solidFill>
+                  <a:srgbClr val="333333"/>
+                </a:solidFill>
+                <a:latin typeface="Calibri"/>
+              </a:rPr>
+              <a:t>–   Los flujos alternos tambien se modelan, y para eso existen los fragmentos combinados, que son esos recuadros con una etiqueta en la esquina.</a:t>
+            </a:r>
+          </a:p>
+          <a:p>
+            <a:pPr>
+              <a:spcAft>
+                <a:spcPts val="800"/>
+              </a:spcAft>
+            </a:pPr>
+            <a:r>
+              <a:rPr sz="2000" b="0" i="0">
+                <a:solidFill>
+                  <a:srgbClr val="333333"/>
+                </a:solidFill>
+                <a:latin typeface="Calibri"/>
+              </a:rPr>
+              <a:t>–   El fragmento alt representa caminos excluyentes con sus condiciones de guarda escritas entre corchetes</a:t>
+            </a:r>
+          </a:p>
+          <a:p>
+            <a:pPr>
+              <a:spcAft>
+                <a:spcPts val="800"/>
+              </a:spcAft>
+            </a:pPr>
+            <a:r>
+              <a:rPr sz="2000" b="0" i="0">
+                <a:solidFill>
+                  <a:srgbClr val="333333"/>
+                </a:solidFill>
+                <a:latin typeface="Calibri"/>
+              </a:rPr>
+              <a:t>–   Y es el que usamos en VetCare para el horario ocupado: si hay disponibilidad se guarda la cita y se confirma, si no la hay el sistema ofrece alternativas del dia siguiente.</a:t>
+            </a:r>
+          </a:p>
+          <a:p>
+            <a:pPr>
+              <a:spcAft>
+                <a:spcPts val="800"/>
+              </a:spcAft>
+            </a:pPr>
+            <a:r>
+              <a:rPr sz="2000" b="0" i="0">
+                <a:solidFill>
+                  <a:srgbClr val="333333"/>
+                </a:solidFill>
+                <a:latin typeface="Calibri"/>
+              </a:rPr>
+              <a:t>–   El fragmento opt es un camino opcional que puede ocurrir o no, como enviar el recordatorio si el propietario autorizo mensajeria.</a:t>
+            </a:r>
+          </a:p>
+          <a:p>
+            <a:pPr>
+              <a:spcAft>
+                <a:spcPts val="800"/>
+              </a:spcAft>
+            </a:pPr>
+            <a:r>
+              <a:rPr sz="2000" b="0" i="0">
+                <a:solidFill>
+                  <a:srgbClr val="333333"/>
+                </a:solidFill>
+                <a:latin typeface="Calibri"/>
+              </a:rPr>
+              <a:t>–   El fragmento loop repite un bloque, por ejemplo mientras el veterinario agrega varias vacunas al expediente.</a:t>
+            </a:r>
+          </a:p>
+          <a:p>
+            <a:pPr>
+              <a:spcAft>
+                <a:spcPts val="800"/>
+              </a:spcAft>
+            </a:pPr>
+            <a:r>
+              <a:rPr sz="2000" b="0" i="0">
+                <a:solidFill>
+                  <a:srgbClr val="333333"/>
+                </a:solidFill>
+                <a:latin typeface="Calibri"/>
+              </a:rPr>
+              <a:t>–   La disciplina que hay que enseñar aqui es de alcance: un diagrama de secuencia no debe intentar mostrar los quince alternos posibles, porque se vuelve ilegible y nadie lo lee.</a:t>
+            </a:r>
+          </a:p>
+          <a:p>
+            <a:pPr>
+              <a:spcAft>
+                <a:spcPts val="800"/>
+              </a:spcAft>
+            </a:pPr>
+            <a:r>
+              <a:rPr sz="2000" b="0" i="0">
+                <a:solidFill>
+                  <a:srgbClr val="333333"/>
+                </a:solidFill>
+                <a:latin typeface="Calibri"/>
+              </a:rPr>
+              <a:t>–   La practica sana es dibujar el camino feliz completo mas uno o dos fragmentos que representen las decisiones criticas del negocio, y dejar el resto documentado en el texto de la especificacion, que para eso existe.</a:t>
+            </a:r>
+          </a:p>
+        </p:txBody>
+      </p:sp>
+      <p:sp>
+        <p:nvSpPr>
+          <p:cNvPr id="6" name="TextBox 5"/>
           <p:cNvSpPr txBox="1"/>
           <p:nvPr/>
         </p:nvSpPr>
@@ -4575,7 +3941,7 @@
                 </a:solidFill>
                 <a:latin typeface="Calibri"/>
               </a:rPr>
-              <a:t>Antes de entregar — autochequeo</a:t>
+              <a:t>Secuencia de CU-04 Agendar cita en sintaxis Mermaid</a:t>
             </a:r>
           </a:p>
         </p:txBody>
@@ -4589,7 +3955,7 @@
         <p:spPr>
           <a:xfrm>
             <a:off x="457200" y="1261872"/>
-            <a:ext cx="11277295" cy="566928"/>
+            <a:ext cx="11277295" cy="4773168"/>
           </a:xfrm>
           <a:prstGeom prst="roundRect">
             <a:avLst>
@@ -4597,7 +3963,7 @@
             </a:avLst>
           </a:prstGeom>
           <a:solidFill>
-            <a:srgbClr val="F2F2F2"/>
+            <a:srgbClr val="1E2A38"/>
           </a:solidFill>
           <a:ln>
             <a:noFill/>
@@ -4633,19 +3999,17 @@
         </p:nvSpPr>
         <p:spPr>
           <a:xfrm>
-            <a:off x="640080" y="1408175"/>
-            <a:ext cx="274320" cy="274320"/>
+            <a:off x="457200" y="1261872"/>
+            <a:ext cx="11277295" cy="320040"/>
           </a:xfrm>
           <a:prstGeom prst="rect">
             <a:avLst/>
           </a:prstGeom>
           <a:solidFill>
-            <a:srgbClr val="FFFFFF"/>
+            <a:srgbClr val="095292"/>
           </a:solidFill>
           <a:ln>
-            <a:solidFill>
-              <a:srgbClr val="333333"/>
-            </a:solidFill>
+            <a:noFill/>
           </a:ln>
         </p:spPr>
         <p:style>
@@ -4672,44 +4036,33 @@
       </p:sp>
       <p:sp>
         <p:nvSpPr>
-          <p:cNvPr id="7" name="Rectangle 6"/>
-          <p:cNvSpPr/>
-          <p:nvPr/>
-        </p:nvSpPr>
-        <p:spPr>
-          <a:xfrm>
-            <a:off x="640080" y="1408175"/>
-            <a:ext cx="73152" cy="274320"/>
-          </a:xfrm>
-          <a:prstGeom prst="rect">
-            <a:avLst/>
-          </a:prstGeom>
-          <a:solidFill>
-            <a:srgbClr val="269CCB"/>
-          </a:solidFill>
-          <a:ln>
-            <a:noFill/>
-          </a:ln>
-        </p:spPr>
-        <p:style>
-          <a:lnRef idx="1">
-            <a:schemeClr val="accent1"/>
-          </a:lnRef>
-          <a:fillRef idx="3">
-            <a:schemeClr val="accent1"/>
-          </a:fillRef>
-          <a:effectRef idx="2">
-            <a:schemeClr val="accent1"/>
-          </a:effectRef>
-          <a:fontRef idx="minor">
-            <a:schemeClr val="lt1"/>
-          </a:fontRef>
-        </p:style>
-        <p:txBody>
-          <a:bodyPr rtlCol="0" anchor="ctr"/>
-          <a:lstStyle/>
-          <a:p>
-            <a:pPr algn="ctr"/>
+          <p:cNvPr id="7" name="TextBox 6"/>
+          <p:cNvSpPr txBox="1"/>
+          <p:nvPr/>
+        </p:nvSpPr>
+        <p:spPr>
+          <a:xfrm>
+            <a:off x="685800" y="1307592"/>
+            <a:ext cx="10820095" cy="256032"/>
+          </a:xfrm>
+          <a:prstGeom prst="rect">
+            <a:avLst/>
+          </a:prstGeom>
+          <a:noFill/>
+        </p:spPr>
+        <p:txBody>
+          <a:bodyPr wrap="square" anchor="ctr"/>
+          <a:lstStyle/>
+          <a:p>
+            <a:r>
+              <a:rPr sz="1000" b="1" i="0">
+                <a:solidFill>
+                  <a:srgbClr val="269CCB"/>
+                </a:solidFill>
+                <a:latin typeface="Calibri"/>
+              </a:rPr>
+              <a:t>● ● ●</a:t>
+            </a:r>
           </a:p>
         </p:txBody>
       </p:sp>
@@ -4721,8 +4074,8 @@
         </p:nvSpPr>
         <p:spPr>
           <a:xfrm>
-            <a:off x="1097280" y="1353312"/>
-            <a:ext cx="10362895" cy="402336"/>
+            <a:off x="777240" y="1719072"/>
+            <a:ext cx="5181447" cy="4133087"/>
           </a:xfrm>
           <a:prstGeom prst="rect">
             <a:avLst/>
@@ -4730,354 +4083,377 @@
           <a:noFill/>
         </p:spPr>
         <p:txBody>
-          <a:bodyPr wrap="square" anchor="ctr"/>
-          <a:lstStyle/>
-          <a:p>
-            <a:r>
-              <a:rPr sz="1500" b="0" i="0">
-                <a:solidFill>
-                  <a:srgbClr val="333333"/>
-                </a:solidFill>
-                <a:latin typeface="Calibri"/>
-              </a:rPr>
-              <a:t>Si sigue las flechas de su diagrama de arriba hacia abajo, obtiene exactamente el mismo relato que ya escribio en el flujo principal del caso de uso?</a:t>
-            </a:r>
-          </a:p>
-        </p:txBody>
-      </p:sp>
-      <p:sp>
-        <p:nvSpPr>
-          <p:cNvPr id="9" name="Rounded Rectangle 8"/>
-          <p:cNvSpPr/>
-          <p:nvPr/>
-        </p:nvSpPr>
-        <p:spPr>
-          <a:xfrm>
-            <a:off x="457200" y="1938528"/>
-            <a:ext cx="11277295" cy="566928"/>
-          </a:xfrm>
-          <a:prstGeom prst="roundRect">
-            <a:avLst>
-              <a:gd name="adj" fmla="val 12000"/>
-            </a:avLst>
-          </a:prstGeom>
-          <a:solidFill>
-            <a:srgbClr val="F2F2F2"/>
-          </a:solidFill>
-          <a:ln>
-            <a:noFill/>
-          </a:ln>
-        </p:spPr>
-        <p:style>
-          <a:lnRef idx="1">
-            <a:schemeClr val="accent1"/>
-          </a:lnRef>
-          <a:fillRef idx="3">
-            <a:schemeClr val="accent1"/>
-          </a:fillRef>
-          <a:effectRef idx="2">
-            <a:schemeClr val="accent1"/>
-          </a:effectRef>
-          <a:fontRef idx="minor">
-            <a:schemeClr val="lt1"/>
-          </a:fontRef>
-        </p:style>
-        <p:txBody>
-          <a:bodyPr rtlCol="0" anchor="ctr"/>
+          <a:bodyPr wrap="square">
+            <a:spAutoFit/>
+          </a:bodyPr>
+          <a:lstStyle/>
+          <a:p>
+            <a:pPr>
+              <a:spcAft>
+                <a:spcPts val="400"/>
+              </a:spcAft>
+            </a:pPr>
+            <a:r>
+              <a:rPr sz="1400" b="0" i="0">
+                <a:solidFill>
+                  <a:srgbClr val="FFFFFF"/>
+                </a:solidFill>
+                <a:latin typeface="Calibri"/>
+              </a:rPr>
+              <a:t>sequenceDiagram</a:t>
+            </a:r>
+          </a:p>
+          <a:p>
+            <a:pPr>
+              <a:spcAft>
+                <a:spcPts val="400"/>
+              </a:spcAft>
+            </a:pPr>
+            <a:r>
+              <a:rPr sz="1400" b="0" i="0">
+                <a:solidFill>
+                  <a:srgbClr val="FFFFFF"/>
+                </a:solidFill>
+                <a:latin typeface="Calibri"/>
+              </a:rPr>
+              <a:t>    actor Recepcionista</a:t>
+            </a:r>
+          </a:p>
+          <a:p>
+            <a:pPr>
+              <a:spcAft>
+                <a:spcPts val="400"/>
+              </a:spcAft>
+            </a:pPr>
+            <a:r>
+              <a:rPr sz="1400" b="0" i="0">
+                <a:solidFill>
+                  <a:srgbClr val="FFFFFF"/>
+                </a:solidFill>
+                <a:latin typeface="Calibri"/>
+              </a:rPr>
+              <a:t>    participant UI as :PantallaAgenda</a:t>
+            </a:r>
+          </a:p>
+          <a:p>
+            <a:pPr>
+              <a:spcAft>
+                <a:spcPts val="400"/>
+              </a:spcAft>
+            </a:pPr>
+            <a:r>
+              <a:rPr sz="1400" b="0" i="0">
+                <a:solidFill>
+                  <a:srgbClr val="FFFFFF"/>
+                </a:solidFill>
+                <a:latin typeface="Calibri"/>
+              </a:rPr>
+              <a:t>    participant CTRL as :ControlAgenda</a:t>
+            </a:r>
+          </a:p>
+          <a:p>
+            <a:pPr>
+              <a:spcAft>
+                <a:spcPts val="400"/>
+              </a:spcAft>
+            </a:pPr>
+            <a:r>
+              <a:rPr sz="1400" b="0" i="0">
+                <a:solidFill>
+                  <a:srgbClr val="FFFFFF"/>
+                </a:solidFill>
+                <a:latin typeface="Calibri"/>
+              </a:rPr>
+              <a:t>    participant REPM as :RepositorioMascotas</a:t>
+            </a:r>
+          </a:p>
+          <a:p>
+            <a:pPr>
+              <a:spcAft>
+                <a:spcPts val="400"/>
+              </a:spcAft>
+            </a:pPr>
+            <a:r>
+              <a:rPr sz="1400" b="0" i="0">
+                <a:solidFill>
+                  <a:srgbClr val="FFFFFF"/>
+                </a:solidFill>
+                <a:latin typeface="Calibri"/>
+              </a:rPr>
+              <a:t>    participant REPC as :RepositorioCitas</a:t>
+            </a:r>
+          </a:p>
+          <a:p>
+            <a:pPr>
+              <a:spcAft>
+                <a:spcPts val="400"/>
+              </a:spcAft>
+            </a:pPr>
+            <a:r>
+              <a:rPr sz="1400" b="0" i="0">
+                <a:solidFill>
+                  <a:srgbClr val="FFFFFF"/>
+                </a:solidFill>
+                <a:latin typeface="Calibri"/>
+              </a:rPr>
+              <a:t>    Recepcionista-&gt;&gt;UI: solicitarAgendamiento(codigoMascota, fecha)</a:t>
+            </a:r>
+          </a:p>
+          <a:p>
+            <a:pPr>
+              <a:spcAft>
+                <a:spcPts val="400"/>
+              </a:spcAft>
+            </a:pPr>
+            <a:r>
+              <a:rPr sz="1400" b="0" i="0">
+                <a:solidFill>
+                  <a:srgbClr val="FFFFFF"/>
+                </a:solidFill>
+                <a:latin typeface="Calibri"/>
+              </a:rPr>
+              <a:t>    UI-&gt;&gt;CTRL: agendarCita(codigoMascota, fecha, idVeterinario)</a:t>
+            </a:r>
+          </a:p>
+          <a:p>
+            <a:pPr>
+              <a:spcAft>
+                <a:spcPts val="400"/>
+              </a:spcAft>
+            </a:pPr>
+            <a:r>
+              <a:rPr sz="1400" b="0" i="0">
+                <a:solidFill>
+                  <a:srgbClr val="FFFFFF"/>
+                </a:solidFill>
+                <a:latin typeface="Calibri"/>
+              </a:rPr>
+              <a:t>    CTRL-&gt;&gt;REPM: existePorCodigo(codigoMascota)</a:t>
+            </a:r>
+          </a:p>
+          <a:p>
+            <a:pPr>
+              <a:spcAft>
+                <a:spcPts val="400"/>
+              </a:spcAft>
+            </a:pPr>
+            <a:r>
+              <a:rPr sz="1400" b="0" i="0">
+                <a:solidFill>
+                  <a:srgbClr val="FFFFFF"/>
+                </a:solidFill>
+                <a:latin typeface="Calibri"/>
+              </a:rPr>
+              <a:t>    REPM--&gt;&gt;CTRL: mascota</a:t>
+            </a:r>
+          </a:p>
+        </p:txBody>
+      </p:sp>
+      <p:sp>
+        <p:nvSpPr>
+          <p:cNvPr id="9" name="TextBox 8"/>
+          <p:cNvSpPr txBox="1"/>
+          <p:nvPr/>
+        </p:nvSpPr>
+        <p:spPr>
+          <a:xfrm>
+            <a:off x="6233007" y="1719072"/>
+            <a:ext cx="5181447" cy="4133087"/>
+          </a:xfrm>
+          <a:prstGeom prst="rect">
+            <a:avLst/>
+          </a:prstGeom>
+          <a:noFill/>
+        </p:spPr>
+        <p:txBody>
+          <a:bodyPr wrap="square">
+            <a:spAutoFit/>
+          </a:bodyPr>
+          <a:lstStyle/>
+          <a:p>
+            <a:pPr>
+              <a:spcAft>
+                <a:spcPts val="400"/>
+              </a:spcAft>
+            </a:pPr>
+            <a:r>
+              <a:rPr sz="1400" b="0" i="0">
+                <a:solidFill>
+                  <a:srgbClr val="FFFFFF"/>
+                </a:solidFill>
+                <a:latin typeface="Calibri"/>
+              </a:rPr>
+              <a:t>    CTRL-&gt;&gt;REPC: consultarDisponibilidad(idVeterinario, fecha)</a:t>
+            </a:r>
+          </a:p>
+          <a:p>
+            <a:pPr>
+              <a:spcAft>
+                <a:spcPts val="400"/>
+              </a:spcAft>
+            </a:pPr>
+            <a:r>
+              <a:rPr sz="1400" b="0" i="0">
+                <a:solidFill>
+                  <a:srgbClr val="FFFFFF"/>
+                </a:solidFill>
+                <a:latin typeface="Calibri"/>
+              </a:rPr>
+              <a:t>    REPC--&gt;&gt;CTRL: horariosLibres</a:t>
+            </a:r>
+          </a:p>
+          <a:p>
+            <a:pPr>
+              <a:spcAft>
+                <a:spcPts val="400"/>
+              </a:spcAft>
+            </a:pPr>
+            <a:r>
+              <a:rPr sz="1400" b="0" i="0">
+                <a:solidFill>
+                  <a:srgbClr val="FFFFFF"/>
+                </a:solidFill>
+                <a:latin typeface="Calibri"/>
+              </a:rPr>
+              <a:t>    alt hay horario libre</a:t>
+            </a:r>
+          </a:p>
+          <a:p>
+            <a:pPr>
+              <a:spcAft>
+                <a:spcPts val="400"/>
+              </a:spcAft>
+            </a:pPr>
+            <a:r>
+              <a:rPr sz="1400" b="0" i="0">
+                <a:solidFill>
+                  <a:srgbClr val="FFFFFF"/>
+                </a:solidFill>
+                <a:latin typeface="Calibri"/>
+              </a:rPr>
+              <a:t>        CTRL-&gt;&gt;REPC: guardarCita(cita)</a:t>
+            </a:r>
+          </a:p>
+          <a:p>
+            <a:pPr>
+              <a:spcAft>
+                <a:spcPts val="400"/>
+              </a:spcAft>
+            </a:pPr>
+            <a:r>
+              <a:rPr sz="1400" b="0" i="0">
+                <a:solidFill>
+                  <a:srgbClr val="FFFFFF"/>
+                </a:solidFill>
+                <a:latin typeface="Calibri"/>
+              </a:rPr>
+              <a:t>        REPC--&gt;&gt;CTRL: idCita</a:t>
+            </a:r>
+          </a:p>
+          <a:p>
+            <a:pPr>
+              <a:spcAft>
+                <a:spcPts val="400"/>
+              </a:spcAft>
+            </a:pPr>
+            <a:r>
+              <a:rPr sz="1400" b="0" i="0">
+                <a:solidFill>
+                  <a:srgbClr val="FFFFFF"/>
+                </a:solidFill>
+                <a:latin typeface="Calibri"/>
+              </a:rPr>
+              <a:t>        CTRL--&gt;&gt;UI: confirmacion(idCita)</a:t>
+            </a:r>
+          </a:p>
+          <a:p>
+            <a:pPr>
+              <a:spcAft>
+                <a:spcPts val="400"/>
+              </a:spcAft>
+            </a:pPr>
+            <a:r>
+              <a:rPr sz="1400" b="0" i="0">
+                <a:solidFill>
+                  <a:srgbClr val="FFFFFF"/>
+                </a:solidFill>
+                <a:latin typeface="Calibri"/>
+              </a:rPr>
+              <a:t>    else no hay horario libre</a:t>
+            </a:r>
+          </a:p>
+          <a:p>
+            <a:pPr>
+              <a:spcAft>
+                <a:spcPts val="400"/>
+              </a:spcAft>
+            </a:pPr>
+            <a:r>
+              <a:rPr sz="1400" b="0" i="0">
+                <a:solidFill>
+                  <a:srgbClr val="FFFFFF"/>
+                </a:solidFill>
+                <a:latin typeface="Calibri"/>
+              </a:rPr>
+              <a:t>        CTRL--&gt;&gt;UI: alternativas(dia siguiente)</a:t>
+            </a:r>
+          </a:p>
+          <a:p>
+            <a:pPr>
+              <a:spcAft>
+                <a:spcPts val="400"/>
+              </a:spcAft>
+            </a:pPr>
+            <a:r>
+              <a:rPr sz="1400" b="0" i="0">
+                <a:solidFill>
+                  <a:srgbClr val="FFFFFF"/>
+                </a:solidFill>
+                <a:latin typeface="Calibri"/>
+              </a:rPr>
+              <a:t>    end</a:t>
+            </a:r>
+          </a:p>
+        </p:txBody>
+      </p:sp>
+      <p:sp>
+        <p:nvSpPr>
+          <p:cNvPr id="10" name="TextBox 9"/>
+          <p:cNvSpPr txBox="1"/>
+          <p:nvPr/>
+        </p:nvSpPr>
+        <p:spPr>
+          <a:xfrm>
+            <a:off x="457200" y="6080760"/>
+            <a:ext cx="11277295" cy="320040"/>
+          </a:xfrm>
+          <a:prstGeom prst="rect">
+            <a:avLst/>
+          </a:prstGeom>
+          <a:noFill/>
+        </p:spPr>
+        <p:txBody>
+          <a:bodyPr wrap="square">
+            <a:spAutoFit/>
+          </a:bodyPr>
           <a:lstStyle/>
           <a:p>
             <a:pPr algn="ctr"/>
-          </a:p>
-        </p:txBody>
-      </p:sp>
-      <p:sp>
-        <p:nvSpPr>
-          <p:cNvPr id="10" name="Rectangle 9"/>
-          <p:cNvSpPr/>
-          <p:nvPr/>
-        </p:nvSpPr>
-        <p:spPr>
-          <a:xfrm>
-            <a:off x="640080" y="2084832"/>
-            <a:ext cx="274320" cy="274320"/>
-          </a:xfrm>
-          <a:prstGeom prst="rect">
-            <a:avLst/>
-          </a:prstGeom>
-          <a:solidFill>
-            <a:srgbClr val="FFFFFF"/>
-          </a:solidFill>
-          <a:ln>
-            <a:solidFill>
-              <a:srgbClr val="333333"/>
-            </a:solidFill>
-          </a:ln>
-        </p:spPr>
-        <p:style>
-          <a:lnRef idx="1">
-            <a:schemeClr val="accent1"/>
-          </a:lnRef>
-          <a:fillRef idx="3">
-            <a:schemeClr val="accent1"/>
-          </a:fillRef>
-          <a:effectRef idx="2">
-            <a:schemeClr val="accent1"/>
-          </a:effectRef>
-          <a:fontRef idx="minor">
-            <a:schemeClr val="lt1"/>
-          </a:fontRef>
-        </p:style>
-        <p:txBody>
-          <a:bodyPr rtlCol="0" anchor="ctr"/>
-          <a:lstStyle/>
-          <a:p>
-            <a:pPr algn="ctr"/>
-          </a:p>
-        </p:txBody>
-      </p:sp>
-      <p:sp>
-        <p:nvSpPr>
-          <p:cNvPr id="11" name="Rectangle 10"/>
-          <p:cNvSpPr/>
-          <p:nvPr/>
-        </p:nvSpPr>
-        <p:spPr>
-          <a:xfrm>
-            <a:off x="640080" y="2084832"/>
-            <a:ext cx="73152" cy="274320"/>
-          </a:xfrm>
-          <a:prstGeom prst="rect">
-            <a:avLst/>
-          </a:prstGeom>
-          <a:solidFill>
-            <a:srgbClr val="269CCB"/>
-          </a:solidFill>
-          <a:ln>
-            <a:noFill/>
-          </a:ln>
-        </p:spPr>
-        <p:style>
-          <a:lnRef idx="1">
-            <a:schemeClr val="accent1"/>
-          </a:lnRef>
-          <a:fillRef idx="3">
-            <a:schemeClr val="accent1"/>
-          </a:fillRef>
-          <a:effectRef idx="2">
-            <a:schemeClr val="accent1"/>
-          </a:effectRef>
-          <a:fontRef idx="minor">
-            <a:schemeClr val="lt1"/>
-          </a:fontRef>
-        </p:style>
-        <p:txBody>
-          <a:bodyPr rtlCol="0" anchor="ctr"/>
-          <a:lstStyle/>
-          <a:p>
-            <a:pPr algn="ctr"/>
-          </a:p>
-        </p:txBody>
-      </p:sp>
-      <p:sp>
-        <p:nvSpPr>
-          <p:cNvPr id="12" name="TextBox 11"/>
-          <p:cNvSpPr txBox="1"/>
-          <p:nvPr/>
-        </p:nvSpPr>
-        <p:spPr>
-          <a:xfrm>
-            <a:off x="1097280" y="2029968"/>
-            <a:ext cx="10362895" cy="402336"/>
-          </a:xfrm>
-          <a:prstGeom prst="rect">
-            <a:avLst/>
-          </a:prstGeom>
-          <a:noFill/>
-        </p:spPr>
-        <p:txBody>
-          <a:bodyPr wrap="square" anchor="ctr"/>
-          <a:lstStyle/>
-          <a:p>
-            <a:r>
-              <a:rPr sz="1500" b="0" i="0">
-                <a:solidFill>
-                  <a:srgbClr val="333333"/>
-                </a:solidFill>
-                <a:latin typeface="Calibri"/>
-              </a:rPr>
-              <a:t>Cada participante de su diagrama existe como clase en el modelo, o dibujo cajas como Base de datos y Sistema que nadie puede implementar?</a:t>
-            </a:r>
-          </a:p>
-        </p:txBody>
-      </p:sp>
-      <p:sp>
-        <p:nvSpPr>
-          <p:cNvPr id="13" name="Rounded Rectangle 12"/>
-          <p:cNvSpPr/>
-          <p:nvPr/>
-        </p:nvSpPr>
-        <p:spPr>
-          <a:xfrm>
-            <a:off x="457200" y="2615184"/>
-            <a:ext cx="11277295" cy="566928"/>
-          </a:xfrm>
-          <a:prstGeom prst="roundRect">
-            <a:avLst>
-              <a:gd name="adj" fmla="val 12000"/>
-            </a:avLst>
-          </a:prstGeom>
-          <a:solidFill>
-            <a:srgbClr val="F2F2F2"/>
-          </a:solidFill>
-          <a:ln>
-            <a:noFill/>
-          </a:ln>
-        </p:spPr>
-        <p:style>
-          <a:lnRef idx="1">
-            <a:schemeClr val="accent1"/>
-          </a:lnRef>
-          <a:fillRef idx="3">
-            <a:schemeClr val="accent1"/>
-          </a:fillRef>
-          <a:effectRef idx="2">
-            <a:schemeClr val="accent1"/>
-          </a:effectRef>
-          <a:fontRef idx="minor">
-            <a:schemeClr val="lt1"/>
-          </a:fontRef>
-        </p:style>
-        <p:txBody>
-          <a:bodyPr rtlCol="0" anchor="ctr"/>
-          <a:lstStyle/>
-          <a:p>
-            <a:pPr algn="ctr"/>
-          </a:p>
-        </p:txBody>
-      </p:sp>
-      <p:sp>
-        <p:nvSpPr>
-          <p:cNvPr id="14" name="Rectangle 13"/>
-          <p:cNvSpPr/>
-          <p:nvPr/>
-        </p:nvSpPr>
-        <p:spPr>
-          <a:xfrm>
-            <a:off x="640080" y="2761488"/>
-            <a:ext cx="274320" cy="274320"/>
-          </a:xfrm>
-          <a:prstGeom prst="rect">
-            <a:avLst/>
-          </a:prstGeom>
-          <a:solidFill>
-            <a:srgbClr val="FFFFFF"/>
-          </a:solidFill>
-          <a:ln>
-            <a:solidFill>
-              <a:srgbClr val="333333"/>
-            </a:solidFill>
-          </a:ln>
-        </p:spPr>
-        <p:style>
-          <a:lnRef idx="1">
-            <a:schemeClr val="accent1"/>
-          </a:lnRef>
-          <a:fillRef idx="3">
-            <a:schemeClr val="accent1"/>
-          </a:fillRef>
-          <a:effectRef idx="2">
-            <a:schemeClr val="accent1"/>
-          </a:effectRef>
-          <a:fontRef idx="minor">
-            <a:schemeClr val="lt1"/>
-          </a:fontRef>
-        </p:style>
-        <p:txBody>
-          <a:bodyPr rtlCol="0" anchor="ctr"/>
-          <a:lstStyle/>
-          <a:p>
-            <a:pPr algn="ctr"/>
-          </a:p>
-        </p:txBody>
-      </p:sp>
-      <p:sp>
-        <p:nvSpPr>
-          <p:cNvPr id="15" name="Rectangle 14"/>
-          <p:cNvSpPr/>
-          <p:nvPr/>
-        </p:nvSpPr>
-        <p:spPr>
-          <a:xfrm>
-            <a:off x="640080" y="2761488"/>
-            <a:ext cx="73152" cy="274320"/>
-          </a:xfrm>
-          <a:prstGeom prst="rect">
-            <a:avLst/>
-          </a:prstGeom>
-          <a:solidFill>
-            <a:srgbClr val="269CCB"/>
-          </a:solidFill>
-          <a:ln>
-            <a:noFill/>
-          </a:ln>
-        </p:spPr>
-        <p:style>
-          <a:lnRef idx="1">
-            <a:schemeClr val="accent1"/>
-          </a:lnRef>
-          <a:fillRef idx="3">
-            <a:schemeClr val="accent1"/>
-          </a:fillRef>
-          <a:effectRef idx="2">
-            <a:schemeClr val="accent1"/>
-          </a:effectRef>
-          <a:fontRef idx="minor">
-            <a:schemeClr val="lt1"/>
-          </a:fontRef>
-        </p:style>
-        <p:txBody>
-          <a:bodyPr rtlCol="0" anchor="ctr"/>
-          <a:lstStyle/>
-          <a:p>
-            <a:pPr algn="ctr"/>
-          </a:p>
-        </p:txBody>
-      </p:sp>
-      <p:sp>
-        <p:nvSpPr>
-          <p:cNvPr id="16" name="TextBox 15"/>
-          <p:cNvSpPr txBox="1"/>
-          <p:nvPr/>
-        </p:nvSpPr>
-        <p:spPr>
-          <a:xfrm>
-            <a:off x="1097280" y="2706624"/>
-            <a:ext cx="10362895" cy="402336"/>
-          </a:xfrm>
-          <a:prstGeom prst="rect">
-            <a:avLst/>
-          </a:prstGeom>
-          <a:noFill/>
-        </p:spPr>
-        <p:txBody>
-          <a:bodyPr wrap="square" anchor="ctr"/>
-          <a:lstStyle/>
-          <a:p>
-            <a:r>
-              <a:rPr sz="1500" b="0" i="0">
-                <a:solidFill>
-                  <a:srgbClr val="333333"/>
-                </a:solidFill>
-                <a:latin typeface="Calibri"/>
-              </a:rPr>
-              <a:t>En su diagrama de actividad se puede saber, mirando solo la calle, quien es responsable de cada paso y cual de esos pasos ocurre sin tocar el computador?</a:t>
-            </a:r>
-          </a:p>
-        </p:txBody>
-      </p:sp>
-      <p:sp>
-        <p:nvSpPr>
-          <p:cNvPr id="17" name="TextBox 16"/>
+            <a:r>
+              <a:rPr sz="1200" b="0" i="1">
+                <a:solidFill>
+                  <a:srgbClr val="666666"/>
+                </a:solidFill>
+                <a:latin typeface="Calibri"/>
+              </a:rPr>
+              <a:t>Cada flecha tiene que corresponder a una operacion existente en el diagrama de clases: si no existe, o falta la operacion o sobra la flecha.</a:t>
+            </a:r>
+          </a:p>
+        </p:txBody>
+      </p:sp>
+      <p:sp>
+        <p:nvSpPr>
+          <p:cNvPr id="11" name="TextBox 10"/>
           <p:cNvSpPr txBox="1"/>
           <p:nvPr/>
         </p:nvSpPr>
@@ -5251,7 +4627,7 @@
                 </a:solidFill>
                 <a:latin typeface="Calibri"/>
               </a:rPr>
-              <a:t>Criterios de exito / entregable</a:t>
+              <a:t>Demo del dia</a:t>
             </a:r>
           </a:p>
         </p:txBody>
@@ -5299,7 +4675,7 @@
                 </a:solidFill>
                 <a:latin typeface="Calibri"/>
               </a:rPr>
-              <a:t>Entregable:</a:t>
+              <a:t>Herramienta:</a:t>
             </a:r>
             <a:r>
               <a:rPr sz="2000" b="0" i="0">
@@ -5308,7 +4684,7 @@
                 </a:solidFill>
                 <a:latin typeface="Calibri"/>
               </a:rPr>
-              <a:t> Un PDF con el diagrama de secuencia de Agendar cita incluyendo el fragmento alt para horario ocupado, el diagrama de actividad del proceso de atencion con calles por rol, y la tabla que mapea cada mensaje del diagrama de secuencia a una operacion del diagrama de clases, subido a la plataforma del curso.</a:t>
+              <a:t> draw.io · Mermaid Live Editor</a:t>
             </a:r>
           </a:p>
           <a:p>
@@ -5333,7 +4709,7 @@
                 </a:solidFill>
                 <a:latin typeface="Calibri"/>
               </a:rPr>
-              <a:t>Exito:</a:t>
+              <a:t>Demo:</a:t>
             </a:r>
             <a:r>
               <a:rPr sz="2000" b="0" i="0">
@@ -5342,7 +4718,7 @@
                 </a:solidFill>
                 <a:latin typeface="Calibri"/>
               </a:rPr>
-              <a:t> El diagrama de secuencia reproduce el orden exacto del flujo principal de CU-04 y no inventa pasos que no esten en la especificacion.</a:t>
+              <a:t> El docente toma el flujo principal ya escrito de CU-04 Agendar cita y lo convierte linea por linea en mensajes de un diagrama de secuencia en Mermaid, mostrando en vivo que cada mensaje necesita una clase dueña que lo pueda responder.</a:t>
             </a:r>
           </a:p>
           <a:p>
@@ -5358,127 +4734,7 @@
                 </a:solidFill>
                 <a:latin typeface="Calibri"/>
               </a:rPr>
-              <a:t>–   </a:t>
-            </a:r>
-            <a:r>
-              <a:rPr sz="2000" b="1" i="0">
-                <a:solidFill>
-                  <a:srgbClr val="333333"/>
-                </a:solidFill>
-                <a:latin typeface="Calibri"/>
-              </a:rPr>
-              <a:t>Exito:</a:t>
-            </a:r>
-            <a:r>
-              <a:rPr sz="2000" b="0" i="0">
-                <a:solidFill>
-                  <a:srgbClr val="333333"/>
-                </a:solidFill>
-                <a:latin typeface="Calibri"/>
-              </a:rPr>
-              <a:t> Todos los participantes del diagrama corresponden a actores legitimos o a clases existentes en el diagrama de clases, y aparecen las flechas de retorno con el dato que devuelven.</a:t>
-            </a:r>
-          </a:p>
-          <a:p>
-            <a:pPr>
-              <a:spcAft>
-                <a:spcPts val="800"/>
-              </a:spcAft>
-            </a:pPr>
-            <a:r>
-              <a:rPr sz="2000" b="0" i="0">
-                <a:solidFill>
-                  <a:srgbClr val="333333"/>
-                </a:solidFill>
-                <a:latin typeface="Calibri"/>
-              </a:rPr>
-              <a:t>–   </a:t>
-            </a:r>
-            <a:r>
-              <a:rPr sz="2000" b="1" i="0">
-                <a:solidFill>
-                  <a:srgbClr val="333333"/>
-                </a:solidFill>
-                <a:latin typeface="Calibri"/>
-              </a:rPr>
-              <a:t>Exito:</a:t>
-            </a:r>
-            <a:r>
-              <a:rPr sz="2000" b="0" i="0">
-                <a:solidFill>
-                  <a:srgbClr val="333333"/>
-                </a:solidFill>
-                <a:latin typeface="Calibri"/>
-              </a:rPr>
-              <a:t> Existe al menos un fragmento alt con sus dos condiciones de guarda escritas, coherente con un flujo alterno ya documentado.</a:t>
-            </a:r>
-          </a:p>
-          <a:p>
-            <a:pPr>
-              <a:spcAft>
-                <a:spcPts val="800"/>
-              </a:spcAft>
-            </a:pPr>
-            <a:r>
-              <a:rPr sz="2000" b="0" i="0">
-                <a:solidFill>
-                  <a:srgbClr val="333333"/>
-                </a:solidFill>
-                <a:latin typeface="Calibri"/>
-              </a:rPr>
-              <a:t>–   </a:t>
-            </a:r>
-            <a:r>
-              <a:rPr sz="2000" b="1" i="0">
-                <a:solidFill>
-                  <a:srgbClr val="333333"/>
-                </a:solidFill>
-                <a:latin typeface="Calibri"/>
-              </a:rPr>
-              <a:t>Exito:</a:t>
-            </a:r>
-            <a:r>
-              <a:rPr sz="2000" b="0" i="0">
-                <a:solidFill>
-                  <a:srgbClr val="333333"/>
-                </a:solidFill>
-                <a:latin typeface="Calibri"/>
-              </a:rPr>
-              <a:t> El diagrama de actividad tiene calles por rol, minimo dos decisiones con condiciones entre corchetes y una bifurcacion en paralelo, y la tabla de mapeo mensaje a operacion no tiene filas incompletas.</a:t>
-            </a:r>
-          </a:p>
-          <a:p>
-            <a:pPr>
-              <a:spcAft>
-                <a:spcPts val="800"/>
-              </a:spcAft>
-            </a:pPr>
-            <a:r>
-              <a:rPr sz="2000" b="0" i="0">
-                <a:solidFill>
-                  <a:srgbClr val="333333"/>
-                </a:solidFill>
-                <a:latin typeface="Calibri"/>
-              </a:rPr>
-              <a:t>–   </a:t>
-            </a:r>
-            <a:r>
-              <a:rPr sz="2000" b="1" i="0">
-                <a:solidFill>
-                  <a:srgbClr val="333333"/>
-                </a:solidFill>
-                <a:latin typeface="Calibri"/>
-              </a:rPr>
-              <a:t>Entrega en la plataforma del curso</a:t>
-            </a:r>
-            <a:r>
-              <a:rPr sz="2000" b="0" i="0">
-                <a:solidFill>
-                  <a:srgbClr val="333333"/>
-                </a:solidFill>
-                <a:latin typeface="Calibri"/>
-              </a:rPr>
-              <a:t> — en la fecha que indique el docente.</a:t>
+              <a:t>–   Mismo dominio VetCare — no otro ejemplo. Aqui se diseña, no se programa.</a:t>
             </a:r>
           </a:p>
         </p:txBody>
@@ -5553,7 +4809,7 @@
         <p:spPr>
           <a:xfrm>
             <a:off x="0" y="0"/>
-            <a:ext cx="12191695" cy="960120"/>
+            <a:ext cx="12191695" cy="1170432"/>
           </a:xfrm>
           <a:prstGeom prst="rect">
             <a:avLst/>
@@ -5595,7 +4851,7 @@
         </p:nvSpPr>
         <p:spPr>
           <a:xfrm>
-            <a:off x="0" y="960120"/>
+            <a:off x="0" y="1170432"/>
             <a:ext cx="12191695" cy="41148"/>
           </a:xfrm>
           <a:prstGeom prst="rect">
@@ -5639,7 +4895,7 @@
         <p:spPr>
           <a:xfrm>
             <a:off x="457200" y="164592"/>
-            <a:ext cx="11277295" cy="502920"/>
+            <a:ext cx="11277295" cy="384048"/>
           </a:xfrm>
           <a:prstGeom prst="rect">
             <a:avLst/>
@@ -5659,21 +4915,55 @@
                 </a:solidFill>
                 <a:latin typeface="Calibri"/>
               </a:rPr>
-              <a:t>Para el PI esta semana</a:t>
-            </a:r>
-          </a:p>
-        </p:txBody>
-      </p:sp>
-      <p:sp>
-        <p:nvSpPr>
-          <p:cNvPr id="5" name="Rounded Rectangle 4"/>
+              <a:t>Herramientas de hoy</a:t>
+            </a:r>
+          </a:p>
+        </p:txBody>
+      </p:sp>
+      <p:sp>
+        <p:nvSpPr>
+          <p:cNvPr id="5" name="TextBox 4"/>
+          <p:cNvSpPr txBox="1"/>
+          <p:nvPr/>
+        </p:nvSpPr>
+        <p:spPr>
+          <a:xfrm>
+            <a:off x="457200" y="566928"/>
+            <a:ext cx="11277295" cy="411480"/>
+          </a:xfrm>
+          <a:prstGeom prst="rect">
+            <a:avLst/>
+          </a:prstGeom>
+          <a:noFill/>
+        </p:spPr>
+        <p:txBody>
+          <a:bodyPr wrap="square">
+            <a:spAutoFit/>
+          </a:bodyPr>
+          <a:lstStyle/>
+          <a:p>
+            <a:r>
+              <a:rPr sz="1400" b="0" i="0">
+                <a:solidFill>
+                  <a:srgbClr val="B8D8EE"/>
+                </a:solidFill>
+                <a:latin typeface="Calibri"/>
+              </a:rPr>
+              <a:t>Gratis · funcionan en el navegador</a:t>
+            </a:r>
+          </a:p>
+        </p:txBody>
+      </p:sp>
+      <p:sp>
+        <p:nvSpPr>
+          <p:cNvPr id="6" name="Rounded Rectangle 5"/>
           <p:cNvSpPr/>
           <p:nvPr/>
         </p:nvSpPr>
         <p:spPr>
           <a:xfrm>
-            <a:off x="457200" y="1261872"/>
-            <a:ext cx="11277295" cy="1051560"/>
+            <a:off x="457200" y="1591056"/>
+            <a:ext cx="3624986" cy="2331720"/>
           </a:xfrm>
           <a:prstGeom prst="roundRect">
             <a:avLst>
@@ -5681,7 +4971,7 @@
             </a:avLst>
           </a:prstGeom>
           <a:solidFill>
-            <a:srgbClr val="E8F4FA"/>
+            <a:srgbClr val="F2F2F2"/>
           </a:solidFill>
           <a:ln>
             <a:noFill/>
@@ -5711,20 +5001,20 @@
       </p:sp>
       <p:sp>
         <p:nvSpPr>
-          <p:cNvPr id="6" name="Rectangle 5"/>
+          <p:cNvPr id="7" name="Rectangle 6"/>
           <p:cNvSpPr/>
           <p:nvPr/>
         </p:nvSpPr>
         <p:spPr>
           <a:xfrm>
-            <a:off x="457200" y="1261872"/>
-            <a:ext cx="128016" cy="1051560"/>
+            <a:off x="457200" y="1591056"/>
+            <a:ext cx="3624986" cy="64008"/>
           </a:xfrm>
           <a:prstGeom prst="rect">
             <a:avLst/>
           </a:prstGeom>
           <a:solidFill>
-            <a:srgbClr val="269CCB"/>
+            <a:srgbClr val="095292"/>
           </a:solidFill>
           <a:ln>
             <a:noFill/>
@@ -5754,109 +5044,14 @@
       </p:sp>
       <p:sp>
         <p:nvSpPr>
-          <p:cNvPr id="7" name="TextBox 6"/>
-          <p:cNvSpPr txBox="1"/>
-          <p:nvPr/>
-        </p:nvSpPr>
-        <p:spPr>
-          <a:xfrm>
-            <a:off x="777240" y="1399031"/>
-            <a:ext cx="10774375" cy="822959"/>
-          </a:xfrm>
-          <a:prstGeom prst="rect">
-            <a:avLst/>
-          </a:prstGeom>
-          <a:noFill/>
-        </p:spPr>
-        <p:txBody>
-          <a:bodyPr wrap="square">
-            <a:spAutoFit/>
-          </a:bodyPr>
-          <a:lstStyle/>
-          <a:p>
-            <a:r>
-              <a:rPr sz="1200" b="1" i="0">
-                <a:solidFill>
-                  <a:srgbClr val="269CCB"/>
-                </a:solidFill>
-                <a:latin typeface="Calibri"/>
-              </a:rPr>
-              <a:t>Info</a:t>
-            </a:r>
-          </a:p>
-          <a:p>
-            <a:pPr>
-              <a:spcBef>
-                <a:spcPts val="400"/>
-              </a:spcBef>
-            </a:pPr>
-            <a:r>
-              <a:rPr sz="1400" b="0" i="0">
-                <a:solidFill>
-                  <a:srgbClr val="333333"/>
-                </a:solidFill>
-                <a:latin typeface="Calibri"/>
-              </a:rPr>
-              <a:t>Hito: Queda modelada la dinamica de VetCare: el diagrama de secuencia del caso de uso Agendar cita y el diagrama de actividad del proceso de atencion en el consultorio.</a:t>
-            </a:r>
-          </a:p>
-        </p:txBody>
-      </p:sp>
-      <p:sp>
-        <p:nvSpPr>
-          <p:cNvPr id="8" name="Rounded Rectangle 7"/>
+          <p:cNvPr id="8" name="Rectangle 7"/>
           <p:cNvSpPr/>
           <p:nvPr/>
         </p:nvSpPr>
         <p:spPr>
           <a:xfrm>
-            <a:off x="457200" y="2478024"/>
-            <a:ext cx="11277295" cy="1051560"/>
-          </a:xfrm>
-          <a:prstGeom prst="roundRect">
-            <a:avLst>
-              <a:gd name="adj" fmla="val 12000"/>
-            </a:avLst>
-          </a:prstGeom>
-          <a:solidFill>
-            <a:srgbClr val="FFF8E1"/>
-          </a:solidFill>
-          <a:ln>
-            <a:noFill/>
-          </a:ln>
-        </p:spPr>
-        <p:style>
-          <a:lnRef idx="1">
-            <a:schemeClr val="accent1"/>
-          </a:lnRef>
-          <a:fillRef idx="3">
-            <a:schemeClr val="accent1"/>
-          </a:fillRef>
-          <a:effectRef idx="2">
-            <a:schemeClr val="accent1"/>
-          </a:effectRef>
-          <a:fontRef idx="minor">
-            <a:schemeClr val="lt1"/>
-          </a:fontRef>
-        </p:style>
-        <p:txBody>
-          <a:bodyPr rtlCol="0" anchor="ctr"/>
-          <a:lstStyle/>
-          <a:p>
-            <a:pPr algn="ctr"/>
-          </a:p>
-        </p:txBody>
-      </p:sp>
-      <p:sp>
-        <p:nvSpPr>
-          <p:cNvPr id="9" name="Rectangle 8"/>
-          <p:cNvSpPr/>
-          <p:nvPr/>
-        </p:nvSpPr>
-        <p:spPr>
-          <a:xfrm>
-            <a:off x="457200" y="2478024"/>
-            <a:ext cx="128016" cy="1051560"/>
+            <a:off x="457200" y="1655064"/>
+            <a:ext cx="3624986" cy="27432"/>
           </a:xfrm>
           <a:prstGeom prst="rect">
             <a:avLst/>
@@ -5890,6 +5085,30 @@
           </a:p>
         </p:txBody>
       </p:sp>
+      <p:pic>
+        <p:nvPicPr>
+          <p:cNvPr id="9" name="Picture 8" descr="drawio.png"/>
+          <p:cNvPicPr>
+            <a:picLocks noChangeAspect="1"/>
+          </p:cNvPicPr>
+          <p:nvPr/>
+        </p:nvPicPr>
+        <p:blipFill>
+          <a:blip r:embed="rId2"/>
+          <a:stretch>
+            <a:fillRect/>
+          </a:stretch>
+        </p:blipFill>
+        <p:spPr>
+          <a:xfrm>
+            <a:off x="1643329" y="1847087"/>
+            <a:ext cx="1252728" cy="1252728"/>
+          </a:xfrm>
+          <a:prstGeom prst="rect">
+            <a:avLst/>
+          </a:prstGeom>
+        </p:spPr>
+      </p:pic>
       <p:sp>
         <p:nvSpPr>
           <p:cNvPr id="10" name="TextBox 9"/>
@@ -5898,8 +5117,8 @@
         </p:nvSpPr>
         <p:spPr>
           <a:xfrm>
-            <a:off x="777240" y="2615184"/>
-            <a:ext cx="10774375" cy="822959"/>
+            <a:off x="530352" y="3191256"/>
+            <a:ext cx="3478682" cy="621792"/>
           </a:xfrm>
           <a:prstGeom prst="rect">
             <a:avLst/>
@@ -5907,35 +5126,34 @@
           <a:noFill/>
         </p:spPr>
         <p:txBody>
-          <a:bodyPr wrap="square">
-            <a:spAutoFit/>
-          </a:bodyPr>
-          <a:lstStyle/>
-          <a:p>
-            <a:r>
-              <a:rPr sz="1200" b="1" i="0">
-                <a:solidFill>
-                  <a:srgbClr val="FFD000"/>
-                </a:solidFill>
-                <a:latin typeface="Calibri"/>
-              </a:rPr>
-              <a:t>Aclaración</a:t>
-            </a:r>
-          </a:p>
-          <a:p>
-            <a:pPr>
+          <a:bodyPr wrap="square" anchor="t"/>
+          <a:lstStyle/>
+          <a:p>
+            <a:pPr algn="ctr"/>
+            <a:r>
+              <a:rPr sz="1300" b="1" i="0">
+                <a:solidFill>
+                  <a:srgbClr val="095292"/>
+                </a:solidFill>
+                <a:latin typeface="Calibri"/>
+              </a:rPr>
+              <a:t>Draw.Io</a:t>
+            </a:r>
+          </a:p>
+          <a:p>
+            <a:pPr algn="ctr">
               <a:spcBef>
-                <a:spcPts val="400"/>
+                <a:spcPts val="200"/>
               </a:spcBef>
             </a:pPr>
             <a:r>
-              <a:rPr sz="1400" b="0" i="0">
-                <a:solidFill>
-                  <a:srgbClr val="333333"/>
-                </a:solidFill>
-                <a:latin typeface="Calibri"/>
-              </a:rPr>
-              <a:t>Enunciado completo: Clases/Proyecto Integrador/ (VetCare).</a:t>
+              <a:rPr sz="1000" b="0" i="0">
+                <a:solidFill>
+                  <a:srgbClr val="666666"/>
+                </a:solidFill>
+                <a:latin typeface="Calibri"/>
+              </a:rPr>
+              <a:t>Diagramas UML y de contexto</a:t>
             </a:r>
           </a:p>
         </p:txBody>
@@ -5948,8 +5166,8 @@
         </p:nvSpPr>
         <p:spPr>
           <a:xfrm>
-            <a:off x="457200" y="3694176"/>
-            <a:ext cx="11277295" cy="1051560"/>
+            <a:off x="4283354" y="1591056"/>
+            <a:ext cx="3624986" cy="2331720"/>
           </a:xfrm>
           <a:prstGeom prst="roundRect">
             <a:avLst>
@@ -5957,7 +5175,7 @@
             </a:avLst>
           </a:prstGeom>
           <a:solidFill>
-            <a:srgbClr val="FBE4E4"/>
+            <a:srgbClr val="F2F2F2"/>
           </a:solidFill>
           <a:ln>
             <a:noFill/>
@@ -5993,14 +5211,14 @@
         </p:nvSpPr>
         <p:spPr>
           <a:xfrm>
-            <a:off x="457200" y="3694176"/>
-            <a:ext cx="128016" cy="1051560"/>
+            <a:off x="4283354" y="1591056"/>
+            <a:ext cx="3624986" cy="64008"/>
           </a:xfrm>
           <a:prstGeom prst="rect">
             <a:avLst/>
           </a:prstGeom>
           <a:solidFill>
-            <a:srgbClr val="A02030"/>
+            <a:srgbClr val="095292"/>
           </a:solidFill>
           <a:ln>
             <a:noFill/>
@@ -6030,14 +5248,81 @@
       </p:sp>
       <p:sp>
         <p:nvSpPr>
-          <p:cNvPr id="13" name="TextBox 12"/>
+          <p:cNvPr id="13" name="Rectangle 12"/>
+          <p:cNvSpPr/>
+          <p:nvPr/>
+        </p:nvSpPr>
+        <p:spPr>
+          <a:xfrm>
+            <a:off x="4283354" y="1655064"/>
+            <a:ext cx="3624986" cy="27432"/>
+          </a:xfrm>
+          <a:prstGeom prst="rect">
+            <a:avLst/>
+          </a:prstGeom>
+          <a:solidFill>
+            <a:srgbClr val="FFD000"/>
+          </a:solidFill>
+          <a:ln>
+            <a:noFill/>
+          </a:ln>
+        </p:spPr>
+        <p:style>
+          <a:lnRef idx="1">
+            <a:schemeClr val="accent1"/>
+          </a:lnRef>
+          <a:fillRef idx="3">
+            <a:schemeClr val="accent1"/>
+          </a:fillRef>
+          <a:effectRef idx="2">
+            <a:schemeClr val="accent1"/>
+          </a:effectRef>
+          <a:fontRef idx="minor">
+            <a:schemeClr val="lt1"/>
+          </a:fontRef>
+        </p:style>
+        <p:txBody>
+          <a:bodyPr rtlCol="0" anchor="ctr"/>
+          <a:lstStyle/>
+          <a:p>
+            <a:pPr algn="ctr"/>
+          </a:p>
+        </p:txBody>
+      </p:sp>
+      <p:pic>
+        <p:nvPicPr>
+          <p:cNvPr id="14" name="Picture 13" descr="mermaid.png"/>
+          <p:cNvPicPr>
+            <a:picLocks noChangeAspect="1"/>
+          </p:cNvPicPr>
+          <p:nvPr/>
+        </p:nvPicPr>
+        <p:blipFill>
+          <a:blip r:embed="rId3"/>
+          <a:stretch>
+            <a:fillRect/>
+          </a:stretch>
+        </p:blipFill>
+        <p:spPr>
+          <a:xfrm>
+            <a:off x="5469483" y="1847087"/>
+            <a:ext cx="1252728" cy="1252728"/>
+          </a:xfrm>
+          <a:prstGeom prst="rect">
+            <a:avLst/>
+          </a:prstGeom>
+        </p:spPr>
+      </p:pic>
+      <p:sp>
+        <p:nvSpPr>
+          <p:cNvPr id="15" name="TextBox 14"/>
           <p:cNvSpPr txBox="1"/>
           <p:nvPr/>
         </p:nvSpPr>
         <p:spPr>
           <a:xfrm>
-            <a:off x="777240" y="3831336"/>
-            <a:ext cx="10774375" cy="822959"/>
+            <a:off x="4356506" y="3191256"/>
+            <a:ext cx="3478682" cy="621792"/>
           </a:xfrm>
           <a:prstGeom prst="rect">
             <a:avLst/>
@@ -6045,42 +5330,245 @@
           <a:noFill/>
         </p:spPr>
         <p:txBody>
-          <a:bodyPr wrap="square">
-            <a:spAutoFit/>
-          </a:bodyPr>
-          <a:lstStyle/>
-          <a:p>
-            <a:r>
-              <a:rPr sz="1200" b="1" i="0">
-                <a:solidFill>
-                  <a:srgbClr val="A02030"/>
-                </a:solidFill>
-                <a:latin typeface="Calibri"/>
-              </a:rPr>
-              <a:t>Atención</a:t>
-            </a:r>
-          </a:p>
-          <a:p>
-            <a:pPr>
+          <a:bodyPr wrap="square" anchor="t"/>
+          <a:lstStyle/>
+          <a:p>
+            <a:pPr algn="ctr"/>
+            <a:r>
+              <a:rPr sz="1300" b="1" i="0">
+                <a:solidFill>
+                  <a:srgbClr val="095292"/>
+                </a:solidFill>
+                <a:latin typeface="Calibri"/>
+              </a:rPr>
+              <a:t>Mermaid</a:t>
+            </a:r>
+          </a:p>
+          <a:p>
+            <a:pPr algn="ctr">
               <a:spcBef>
-                <a:spcPts val="400"/>
+                <a:spcPts val="200"/>
               </a:spcBef>
             </a:pPr>
             <a:r>
-              <a:rPr sz="1400" b="0" i="0">
-                <a:solidFill>
-                  <a:srgbClr val="333333"/>
-                </a:solidFill>
-                <a:latin typeface="Calibri"/>
-              </a:rPr>
-              <a:t>Entrega del taller, si el docente lo asigna · en la fecha que indique el docente.</a:t>
-            </a:r>
-          </a:p>
-        </p:txBody>
-      </p:sp>
-      <p:sp>
-        <p:nvSpPr>
-          <p:cNvPr id="14" name="TextBox 13"/>
+              <a:rPr sz="1000" b="0" i="0">
+                <a:solidFill>
+                  <a:srgbClr val="666666"/>
+                </a:solidFill>
+                <a:latin typeface="Calibri"/>
+              </a:rPr>
+              <a:t>Diagramas como texto versionable</a:t>
+            </a:r>
+          </a:p>
+        </p:txBody>
+      </p:sp>
+      <p:sp>
+        <p:nvSpPr>
+          <p:cNvPr id="16" name="Rounded Rectangle 15"/>
+          <p:cNvSpPr/>
+          <p:nvPr/>
+        </p:nvSpPr>
+        <p:spPr>
+          <a:xfrm>
+            <a:off x="8109508" y="1591056"/>
+            <a:ext cx="3624986" cy="2331720"/>
+          </a:xfrm>
+          <a:prstGeom prst="roundRect">
+            <a:avLst>
+              <a:gd name="adj" fmla="val 12000"/>
+            </a:avLst>
+          </a:prstGeom>
+          <a:solidFill>
+            <a:srgbClr val="F2F2F2"/>
+          </a:solidFill>
+          <a:ln>
+            <a:noFill/>
+          </a:ln>
+        </p:spPr>
+        <p:style>
+          <a:lnRef idx="1">
+            <a:schemeClr val="accent1"/>
+          </a:lnRef>
+          <a:fillRef idx="3">
+            <a:schemeClr val="accent1"/>
+          </a:fillRef>
+          <a:effectRef idx="2">
+            <a:schemeClr val="accent1"/>
+          </a:effectRef>
+          <a:fontRef idx="minor">
+            <a:schemeClr val="lt1"/>
+          </a:fontRef>
+        </p:style>
+        <p:txBody>
+          <a:bodyPr rtlCol="0" anchor="ctr"/>
+          <a:lstStyle/>
+          <a:p>
+            <a:pPr algn="ctr"/>
+          </a:p>
+        </p:txBody>
+      </p:sp>
+      <p:sp>
+        <p:nvSpPr>
+          <p:cNvPr id="17" name="Rectangle 16"/>
+          <p:cNvSpPr/>
+          <p:nvPr/>
+        </p:nvSpPr>
+        <p:spPr>
+          <a:xfrm>
+            <a:off x="8109508" y="1591056"/>
+            <a:ext cx="3624986" cy="64008"/>
+          </a:xfrm>
+          <a:prstGeom prst="rect">
+            <a:avLst/>
+          </a:prstGeom>
+          <a:solidFill>
+            <a:srgbClr val="095292"/>
+          </a:solidFill>
+          <a:ln>
+            <a:noFill/>
+          </a:ln>
+        </p:spPr>
+        <p:style>
+          <a:lnRef idx="1">
+            <a:schemeClr val="accent1"/>
+          </a:lnRef>
+          <a:fillRef idx="3">
+            <a:schemeClr val="accent1"/>
+          </a:fillRef>
+          <a:effectRef idx="2">
+            <a:schemeClr val="accent1"/>
+          </a:effectRef>
+          <a:fontRef idx="minor">
+            <a:schemeClr val="lt1"/>
+          </a:fontRef>
+        </p:style>
+        <p:txBody>
+          <a:bodyPr rtlCol="0" anchor="ctr"/>
+          <a:lstStyle/>
+          <a:p>
+            <a:pPr algn="ctr"/>
+          </a:p>
+        </p:txBody>
+      </p:sp>
+      <p:sp>
+        <p:nvSpPr>
+          <p:cNvPr id="18" name="Rectangle 17"/>
+          <p:cNvSpPr/>
+          <p:nvPr/>
+        </p:nvSpPr>
+        <p:spPr>
+          <a:xfrm>
+            <a:off x="8109508" y="1655064"/>
+            <a:ext cx="3624986" cy="27432"/>
+          </a:xfrm>
+          <a:prstGeom prst="rect">
+            <a:avLst/>
+          </a:prstGeom>
+          <a:solidFill>
+            <a:srgbClr val="FFD000"/>
+          </a:solidFill>
+          <a:ln>
+            <a:noFill/>
+          </a:ln>
+        </p:spPr>
+        <p:style>
+          <a:lnRef idx="1">
+            <a:schemeClr val="accent1"/>
+          </a:lnRef>
+          <a:fillRef idx="3">
+            <a:schemeClr val="accent1"/>
+          </a:fillRef>
+          <a:effectRef idx="2">
+            <a:schemeClr val="accent1"/>
+          </a:effectRef>
+          <a:fontRef idx="minor">
+            <a:schemeClr val="lt1"/>
+          </a:fontRef>
+        </p:style>
+        <p:txBody>
+          <a:bodyPr rtlCol="0" anchor="ctr"/>
+          <a:lstStyle/>
+          <a:p>
+            <a:pPr algn="ctr"/>
+          </a:p>
+        </p:txBody>
+      </p:sp>
+      <p:pic>
+        <p:nvPicPr>
+          <p:cNvPr id="19" name="Picture 18" descr="examlab.png"/>
+          <p:cNvPicPr>
+            <a:picLocks noChangeAspect="1"/>
+          </p:cNvPicPr>
+          <p:nvPr/>
+        </p:nvPicPr>
+        <p:blipFill>
+          <a:blip r:embed="rId4"/>
+          <a:stretch>
+            <a:fillRect/>
+          </a:stretch>
+        </p:blipFill>
+        <p:spPr>
+          <a:xfrm>
+            <a:off x="9295638" y="1847087"/>
+            <a:ext cx="1252728" cy="1252728"/>
+          </a:xfrm>
+          <a:prstGeom prst="rect">
+            <a:avLst/>
+          </a:prstGeom>
+        </p:spPr>
+      </p:pic>
+      <p:sp>
+        <p:nvSpPr>
+          <p:cNvPr id="20" name="TextBox 19"/>
+          <p:cNvSpPr txBox="1"/>
+          <p:nvPr/>
+        </p:nvSpPr>
+        <p:spPr>
+          <a:xfrm>
+            <a:off x="8182660" y="3191256"/>
+            <a:ext cx="3478682" cy="621792"/>
+          </a:xfrm>
+          <a:prstGeom prst="rect">
+            <a:avLst/>
+          </a:prstGeom>
+          <a:noFill/>
+        </p:spPr>
+        <p:txBody>
+          <a:bodyPr wrap="square" anchor="t"/>
+          <a:lstStyle/>
+          <a:p>
+            <a:pPr algn="ctr"/>
+            <a:r>
+              <a:rPr sz="1300" b="1" i="0">
+                <a:solidFill>
+                  <a:srgbClr val="095292"/>
+                </a:solidFill>
+                <a:latin typeface="Calibri"/>
+              </a:rPr>
+              <a:t>la plataforma del curso</a:t>
+            </a:r>
+          </a:p>
+          <a:p>
+            <a:pPr algn="ctr">
+              <a:spcBef>
+                <a:spcPts val="200"/>
+              </a:spcBef>
+            </a:pPr>
+            <a:r>
+              <a:rPr sz="1000" b="0" i="0">
+                <a:solidFill>
+                  <a:srgbClr val="666666"/>
+                </a:solidFill>
+                <a:latin typeface="Calibri"/>
+              </a:rPr>
+              <a:t>Entrega del taller · en la fecha que indique el docente</a:t>
+            </a:r>
+          </a:p>
+        </p:txBody>
+      </p:sp>
+      <p:sp>
+        <p:nvSpPr>
+          <p:cNvPr id="21" name="TextBox 20"/>
           <p:cNvSpPr txBox="1"/>
           <p:nvPr/>
         </p:nvSpPr>
@@ -6148,7 +5636,1695 @@
         <p:spPr>
           <a:xfrm>
             <a:off x="0" y="0"/>
-            <a:ext cx="12191695" cy="164592"/>
+            <a:ext cx="12191695" cy="960120"/>
+          </a:xfrm>
+          <a:prstGeom prst="rect">
+            <a:avLst/>
+          </a:prstGeom>
+          <a:solidFill>
+            <a:srgbClr val="095292"/>
+          </a:solidFill>
+          <a:ln>
+            <a:noFill/>
+          </a:ln>
+        </p:spPr>
+        <p:style>
+          <a:lnRef idx="1">
+            <a:schemeClr val="accent1"/>
+          </a:lnRef>
+          <a:fillRef idx="3">
+            <a:schemeClr val="accent1"/>
+          </a:fillRef>
+          <a:effectRef idx="2">
+            <a:schemeClr val="accent1"/>
+          </a:effectRef>
+          <a:fontRef idx="minor">
+            <a:schemeClr val="lt1"/>
+          </a:fontRef>
+        </p:style>
+        <p:txBody>
+          <a:bodyPr rtlCol="0" anchor="ctr"/>
+          <a:lstStyle/>
+          <a:p>
+            <a:pPr algn="ctr"/>
+          </a:p>
+        </p:txBody>
+      </p:sp>
+      <p:sp>
+        <p:nvSpPr>
+          <p:cNvPr id="3" name="Rectangle 2"/>
+          <p:cNvSpPr/>
+          <p:nvPr/>
+        </p:nvSpPr>
+        <p:spPr>
+          <a:xfrm>
+            <a:off x="0" y="960120"/>
+            <a:ext cx="12191695" cy="41148"/>
+          </a:xfrm>
+          <a:prstGeom prst="rect">
+            <a:avLst/>
+          </a:prstGeom>
+          <a:solidFill>
+            <a:srgbClr val="FFD000"/>
+          </a:solidFill>
+          <a:ln>
+            <a:noFill/>
+          </a:ln>
+        </p:spPr>
+        <p:style>
+          <a:lnRef idx="1">
+            <a:schemeClr val="accent1"/>
+          </a:lnRef>
+          <a:fillRef idx="3">
+            <a:schemeClr val="accent1"/>
+          </a:fillRef>
+          <a:effectRef idx="2">
+            <a:schemeClr val="accent1"/>
+          </a:effectRef>
+          <a:fontRef idx="minor">
+            <a:schemeClr val="lt1"/>
+          </a:fontRef>
+        </p:style>
+        <p:txBody>
+          <a:bodyPr rtlCol="0" anchor="ctr"/>
+          <a:lstStyle/>
+          <a:p>
+            <a:pPr algn="ctr"/>
+          </a:p>
+        </p:txBody>
+      </p:sp>
+      <p:sp>
+        <p:nvSpPr>
+          <p:cNvPr id="4" name="TextBox 3"/>
+          <p:cNvSpPr txBox="1"/>
+          <p:nvPr/>
+        </p:nvSpPr>
+        <p:spPr>
+          <a:xfrm>
+            <a:off x="457200" y="164592"/>
+            <a:ext cx="11277295" cy="502920"/>
+          </a:xfrm>
+          <a:prstGeom prst="rect">
+            <a:avLst/>
+          </a:prstGeom>
+          <a:noFill/>
+        </p:spPr>
+        <p:txBody>
+          <a:bodyPr wrap="square">
+            <a:spAutoFit/>
+          </a:bodyPr>
+          <a:lstStyle/>
+          <a:p>
+            <a:r>
+              <a:rPr sz="2600" b="1" i="0">
+                <a:solidFill>
+                  <a:srgbClr val="FFFFFF"/>
+                </a:solidFill>
+                <a:latin typeface="Calibri"/>
+              </a:rPr>
+              <a:t>Taller PI — por que importa</a:t>
+            </a:r>
+          </a:p>
+        </p:txBody>
+      </p:sp>
+      <p:sp>
+        <p:nvSpPr>
+          <p:cNvPr id="5" name="TextBox 4"/>
+          <p:cNvSpPr txBox="1"/>
+          <p:nvPr/>
+        </p:nvSpPr>
+        <p:spPr>
+          <a:xfrm>
+            <a:off x="457200" y="1170432"/>
+            <a:ext cx="11277295" cy="5230368"/>
+          </a:xfrm>
+          <a:prstGeom prst="rect">
+            <a:avLst/>
+          </a:prstGeom>
+          <a:noFill/>
+        </p:spPr>
+        <p:txBody>
+          <a:bodyPr wrap="square">
+            <a:spAutoFit/>
+          </a:bodyPr>
+          <a:lstStyle/>
+          <a:p>
+            <a:pPr>
+              <a:spcAft>
+                <a:spcPts val="800"/>
+              </a:spcAft>
+            </a:pPr>
+            <a:r>
+              <a:rPr sz="2000" b="0" i="0">
+                <a:solidFill>
+                  <a:srgbClr val="333333"/>
+                </a:solidFill>
+                <a:latin typeface="Calibri"/>
+              </a:rPr>
+              <a:t>–   </a:t>
+            </a:r>
+            <a:r>
+              <a:rPr sz="2000" b="1" i="0">
+                <a:solidFill>
+                  <a:srgbClr val="333333"/>
+                </a:solidFill>
+                <a:latin typeface="Calibri"/>
+              </a:rPr>
+              <a:t>Por que importa al PI:</a:t>
+            </a:r>
+            <a:r>
+              <a:rPr sz="2000" b="0" i="0">
+                <a:solidFill>
+                  <a:srgbClr val="333333"/>
+                </a:solidFill>
+                <a:latin typeface="Calibri"/>
+              </a:rPr>
+              <a:t> los casos de uso dicen que hace VetCare y el diagrama de clases dice de que esta hecho, pero solo los diagramas de secuencia y actividad muestran como colaboran las piezas en el tiempo, que es lo que necesita quien vaya a construirlo.</a:t>
+            </a:r>
+          </a:p>
+          <a:p>
+            <a:pPr>
+              <a:spcAft>
+                <a:spcPts val="800"/>
+              </a:spcAft>
+            </a:pPr>
+            <a:r>
+              <a:rPr sz="2000" b="0" i="0">
+                <a:solidFill>
+                  <a:srgbClr val="333333"/>
+                </a:solidFill>
+                <a:latin typeface="Calibri"/>
+              </a:rPr>
+              <a:t>–   Dibujar la secuencia es la forma mas barata de descubrir que al diagrama de clases le faltan operaciones, porque cada flecha exige un dueño que la pueda responder.</a:t>
+            </a:r>
+          </a:p>
+          <a:p>
+            <a:pPr>
+              <a:spcAft>
+                <a:spcPts val="800"/>
+              </a:spcAft>
+            </a:pPr>
+            <a:r>
+              <a:rPr sz="2000" b="0" i="0">
+                <a:solidFill>
+                  <a:srgbClr val="333333"/>
+                </a:solidFill>
+                <a:latin typeface="Calibri"/>
+              </a:rPr>
+              <a:t>–   El diagrama de actividad es el unico artefacto del paquete que muestra el trabajo humano de la clinica Huellitas, incluidas las esperas y las decisiones que ocurren fuera del computador.</a:t>
+            </a:r>
+          </a:p>
+        </p:txBody>
+      </p:sp>
+      <p:sp>
+        <p:nvSpPr>
+          <p:cNvPr id="6" name="TextBox 5"/>
+          <p:cNvSpPr txBox="1"/>
+          <p:nvPr/>
+        </p:nvSpPr>
+        <p:spPr>
+          <a:xfrm>
+            <a:off x="11185855" y="6473952"/>
+            <a:ext cx="640080" cy="274320"/>
+          </a:xfrm>
+          <a:prstGeom prst="rect">
+            <a:avLst/>
+          </a:prstGeom>
+          <a:noFill/>
+        </p:spPr>
+        <p:txBody>
+          <a:bodyPr wrap="square">
+            <a:spAutoFit/>
+          </a:bodyPr>
+          <a:lstStyle/>
+          <a:p>
+            <a:pPr algn="r"/>
+            <a:r>
+              <a:rPr sz="1100" b="0" i="0">
+                <a:solidFill>
+                  <a:srgbClr val="666666"/>
+                </a:solidFill>
+                <a:latin typeface="Calibri"/>
+              </a:rPr>
+              <a:t>14</a:t>
+            </a:r>
+          </a:p>
+        </p:txBody>
+      </p:sp>
+    </p:spTree>
+  </p:cSld>
+  <p:clrMapOvr>
+    <a:masterClrMapping/>
+  </p:clrMapOvr>
+</p:sld>
+</file>
+
+<file path=ppt/slides/slide15.xml><?xml version="1.0" encoding="utf-8"?>
+<p:sld xmlns:a="http://schemas.openxmlformats.org/drawingml/2006/main" xmlns:p="http://schemas.openxmlformats.org/presentationml/2006/main" xmlns:r="http://schemas.openxmlformats.org/officeDocument/2006/relationships">
+  <p:cSld>
+    <p:bg>
+      <p:bgPr>
+        <a:solidFill>
+          <a:srgbClr val="FFFFFF"/>
+        </a:solidFill>
+        <a:effectLst/>
+      </p:bgPr>
+    </p:bg>
+    <p:spTree>
+      <p:nvGrpSpPr>
+        <p:cNvPr id="1" name=""/>
+        <p:cNvGrpSpPr/>
+        <p:nvPr/>
+      </p:nvGrpSpPr>
+      <p:grpSpPr/>
+      <p:sp>
+        <p:nvSpPr>
+          <p:cNvPr id="2" name="Rectangle 1"/>
+          <p:cNvSpPr/>
+          <p:nvPr/>
+        </p:nvSpPr>
+        <p:spPr>
+          <a:xfrm>
+            <a:off x="0" y="0"/>
+            <a:ext cx="12191695" cy="960120"/>
+          </a:xfrm>
+          <a:prstGeom prst="rect">
+            <a:avLst/>
+          </a:prstGeom>
+          <a:solidFill>
+            <a:srgbClr val="095292"/>
+          </a:solidFill>
+          <a:ln>
+            <a:noFill/>
+          </a:ln>
+        </p:spPr>
+        <p:style>
+          <a:lnRef idx="1">
+            <a:schemeClr val="accent1"/>
+          </a:lnRef>
+          <a:fillRef idx="3">
+            <a:schemeClr val="accent1"/>
+          </a:fillRef>
+          <a:effectRef idx="2">
+            <a:schemeClr val="accent1"/>
+          </a:effectRef>
+          <a:fontRef idx="minor">
+            <a:schemeClr val="lt1"/>
+          </a:fontRef>
+        </p:style>
+        <p:txBody>
+          <a:bodyPr rtlCol="0" anchor="ctr"/>
+          <a:lstStyle/>
+          <a:p>
+            <a:pPr algn="ctr"/>
+          </a:p>
+        </p:txBody>
+      </p:sp>
+      <p:sp>
+        <p:nvSpPr>
+          <p:cNvPr id="3" name="Rectangle 2"/>
+          <p:cNvSpPr/>
+          <p:nvPr/>
+        </p:nvSpPr>
+        <p:spPr>
+          <a:xfrm>
+            <a:off x="0" y="960120"/>
+            <a:ext cx="12191695" cy="41148"/>
+          </a:xfrm>
+          <a:prstGeom prst="rect">
+            <a:avLst/>
+          </a:prstGeom>
+          <a:solidFill>
+            <a:srgbClr val="FFD000"/>
+          </a:solidFill>
+          <a:ln>
+            <a:noFill/>
+          </a:ln>
+        </p:spPr>
+        <p:style>
+          <a:lnRef idx="1">
+            <a:schemeClr val="accent1"/>
+          </a:lnRef>
+          <a:fillRef idx="3">
+            <a:schemeClr val="accent1"/>
+          </a:fillRef>
+          <a:effectRef idx="2">
+            <a:schemeClr val="accent1"/>
+          </a:effectRef>
+          <a:fontRef idx="minor">
+            <a:schemeClr val="lt1"/>
+          </a:fontRef>
+        </p:style>
+        <p:txBody>
+          <a:bodyPr rtlCol="0" anchor="ctr"/>
+          <a:lstStyle/>
+          <a:p>
+            <a:pPr algn="ctr"/>
+          </a:p>
+        </p:txBody>
+      </p:sp>
+      <p:sp>
+        <p:nvSpPr>
+          <p:cNvPr id="4" name="TextBox 3"/>
+          <p:cNvSpPr txBox="1"/>
+          <p:nvPr/>
+        </p:nvSpPr>
+        <p:spPr>
+          <a:xfrm>
+            <a:off x="457200" y="164592"/>
+            <a:ext cx="11277295" cy="502920"/>
+          </a:xfrm>
+          <a:prstGeom prst="rect">
+            <a:avLst/>
+          </a:prstGeom>
+          <a:noFill/>
+        </p:spPr>
+        <p:txBody>
+          <a:bodyPr wrap="square">
+            <a:spAutoFit/>
+          </a:bodyPr>
+          <a:lstStyle/>
+          <a:p>
+            <a:r>
+              <a:rPr sz="2600" b="1" i="0">
+                <a:solidFill>
+                  <a:srgbClr val="FFFFFF"/>
+                </a:solidFill>
+                <a:latin typeface="Calibri"/>
+              </a:rPr>
+              <a:t>Taller PI — punto de partida</a:t>
+            </a:r>
+          </a:p>
+        </p:txBody>
+      </p:sp>
+      <p:sp>
+        <p:nvSpPr>
+          <p:cNvPr id="5" name="TextBox 4"/>
+          <p:cNvSpPr txBox="1"/>
+          <p:nvPr/>
+        </p:nvSpPr>
+        <p:spPr>
+          <a:xfrm>
+            <a:off x="457200" y="1170432"/>
+            <a:ext cx="11277295" cy="5230368"/>
+          </a:xfrm>
+          <a:prstGeom prst="rect">
+            <a:avLst/>
+          </a:prstGeom>
+          <a:noFill/>
+        </p:spPr>
+        <p:txBody>
+          <a:bodyPr wrap="square">
+            <a:spAutoFit/>
+          </a:bodyPr>
+          <a:lstStyle/>
+          <a:p>
+            <a:pPr>
+              <a:spcAft>
+                <a:spcPts val="800"/>
+              </a:spcAft>
+            </a:pPr>
+            <a:r>
+              <a:rPr sz="2000" b="0" i="0">
+                <a:solidFill>
+                  <a:srgbClr val="333333"/>
+                </a:solidFill>
+                <a:latin typeface="Calibri"/>
+              </a:rPr>
+              <a:t>–   VetCare ya tiene casos de uso especificados y un diagrama de clases con multiplicidades, pero ningun documento explica el orden en que los objetos se comunican para cumplir un caso de uso.</a:t>
+            </a:r>
+          </a:p>
+          <a:p>
+            <a:pPr>
+              <a:spcAft>
+                <a:spcPts val="800"/>
+              </a:spcAft>
+            </a:pPr>
+            <a:r>
+              <a:rPr sz="2000" b="0" i="0">
+                <a:solidFill>
+                  <a:srgbClr val="333333"/>
+                </a:solidFill>
+                <a:latin typeface="Calibri"/>
+              </a:rPr>
+              <a:t>–   En Huellitas, agendar una cita depende de la disponibilidad del veterinario y hoy eso se resuelve preguntando en voz alta al fondo del consultorio, sin ninguna regla escrita.</a:t>
+            </a:r>
+          </a:p>
+          <a:p>
+            <a:pPr>
+              <a:spcAft>
+                <a:spcPts val="800"/>
+              </a:spcAft>
+            </a:pPr>
+            <a:r>
+              <a:rPr sz="2000" b="0" i="0">
+                <a:solidFill>
+                  <a:srgbClr val="333333"/>
+                </a:solidFill>
+                <a:latin typeface="Calibri"/>
+              </a:rPr>
+              <a:t>–   El equipo tiende a dibujar cajas y flechas por intuicion, sin volver a mirar el flujo principal que ya habia escrito hace tres sesiones.</a:t>
+            </a:r>
+          </a:p>
+        </p:txBody>
+      </p:sp>
+      <p:sp>
+        <p:nvSpPr>
+          <p:cNvPr id="6" name="TextBox 5"/>
+          <p:cNvSpPr txBox="1"/>
+          <p:nvPr/>
+        </p:nvSpPr>
+        <p:spPr>
+          <a:xfrm>
+            <a:off x="11185855" y="6473952"/>
+            <a:ext cx="640080" cy="274320"/>
+          </a:xfrm>
+          <a:prstGeom prst="rect">
+            <a:avLst/>
+          </a:prstGeom>
+          <a:noFill/>
+        </p:spPr>
+        <p:txBody>
+          <a:bodyPr wrap="square">
+            <a:spAutoFit/>
+          </a:bodyPr>
+          <a:lstStyle/>
+          <a:p>
+            <a:pPr algn="r"/>
+            <a:r>
+              <a:rPr sz="1100" b="0" i="0">
+                <a:solidFill>
+                  <a:srgbClr val="666666"/>
+                </a:solidFill>
+                <a:latin typeface="Calibri"/>
+              </a:rPr>
+              <a:t>15</a:t>
+            </a:r>
+          </a:p>
+        </p:txBody>
+      </p:sp>
+    </p:spTree>
+  </p:cSld>
+  <p:clrMapOvr>
+    <a:masterClrMapping/>
+  </p:clrMapOvr>
+</p:sld>
+</file>
+
+<file path=ppt/slides/slide16.xml><?xml version="1.0" encoding="utf-8"?>
+<p:sld xmlns:a="http://schemas.openxmlformats.org/drawingml/2006/main" xmlns:p="http://schemas.openxmlformats.org/presentationml/2006/main" xmlns:r="http://schemas.openxmlformats.org/officeDocument/2006/relationships">
+  <p:cSld>
+    <p:bg>
+      <p:bgPr>
+        <a:solidFill>
+          <a:srgbClr val="FFFFFF"/>
+        </a:solidFill>
+        <a:effectLst/>
+      </p:bgPr>
+    </p:bg>
+    <p:spTree>
+      <p:nvGrpSpPr>
+        <p:cNvPr id="1" name=""/>
+        <p:cNvGrpSpPr/>
+        <p:nvPr/>
+      </p:nvGrpSpPr>
+      <p:grpSpPr/>
+      <p:sp>
+        <p:nvSpPr>
+          <p:cNvPr id="2" name="Rectangle 1"/>
+          <p:cNvSpPr/>
+          <p:nvPr/>
+        </p:nvSpPr>
+        <p:spPr>
+          <a:xfrm>
+            <a:off x="0" y="0"/>
+            <a:ext cx="12191695" cy="960120"/>
+          </a:xfrm>
+          <a:prstGeom prst="rect">
+            <a:avLst/>
+          </a:prstGeom>
+          <a:solidFill>
+            <a:srgbClr val="095292"/>
+          </a:solidFill>
+          <a:ln>
+            <a:noFill/>
+          </a:ln>
+        </p:spPr>
+        <p:style>
+          <a:lnRef idx="1">
+            <a:schemeClr val="accent1"/>
+          </a:lnRef>
+          <a:fillRef idx="3">
+            <a:schemeClr val="accent1"/>
+          </a:fillRef>
+          <a:effectRef idx="2">
+            <a:schemeClr val="accent1"/>
+          </a:effectRef>
+          <a:fontRef idx="minor">
+            <a:schemeClr val="lt1"/>
+          </a:fontRef>
+        </p:style>
+        <p:txBody>
+          <a:bodyPr rtlCol="0" anchor="ctr"/>
+          <a:lstStyle/>
+          <a:p>
+            <a:pPr algn="ctr"/>
+          </a:p>
+        </p:txBody>
+      </p:sp>
+      <p:sp>
+        <p:nvSpPr>
+          <p:cNvPr id="3" name="Rectangle 2"/>
+          <p:cNvSpPr/>
+          <p:nvPr/>
+        </p:nvSpPr>
+        <p:spPr>
+          <a:xfrm>
+            <a:off x="0" y="960120"/>
+            <a:ext cx="12191695" cy="41148"/>
+          </a:xfrm>
+          <a:prstGeom prst="rect">
+            <a:avLst/>
+          </a:prstGeom>
+          <a:solidFill>
+            <a:srgbClr val="FFD000"/>
+          </a:solidFill>
+          <a:ln>
+            <a:noFill/>
+          </a:ln>
+        </p:spPr>
+        <p:style>
+          <a:lnRef idx="1">
+            <a:schemeClr val="accent1"/>
+          </a:lnRef>
+          <a:fillRef idx="3">
+            <a:schemeClr val="accent1"/>
+          </a:fillRef>
+          <a:effectRef idx="2">
+            <a:schemeClr val="accent1"/>
+          </a:effectRef>
+          <a:fontRef idx="minor">
+            <a:schemeClr val="lt1"/>
+          </a:fontRef>
+        </p:style>
+        <p:txBody>
+          <a:bodyPr rtlCol="0" anchor="ctr"/>
+          <a:lstStyle/>
+          <a:p>
+            <a:pPr algn="ctr"/>
+          </a:p>
+        </p:txBody>
+      </p:sp>
+      <p:sp>
+        <p:nvSpPr>
+          <p:cNvPr id="4" name="TextBox 3"/>
+          <p:cNvSpPr txBox="1"/>
+          <p:nvPr/>
+        </p:nvSpPr>
+        <p:spPr>
+          <a:xfrm>
+            <a:off x="457200" y="164592"/>
+            <a:ext cx="11277295" cy="502920"/>
+          </a:xfrm>
+          <a:prstGeom prst="rect">
+            <a:avLst/>
+          </a:prstGeom>
+          <a:noFill/>
+        </p:spPr>
+        <p:txBody>
+          <a:bodyPr wrap="square">
+            <a:spAutoFit/>
+          </a:bodyPr>
+          <a:lstStyle/>
+          <a:p>
+            <a:r>
+              <a:rPr sz="2600" b="1" i="0">
+                <a:solidFill>
+                  <a:srgbClr val="FFFFFF"/>
+                </a:solidFill>
+                <a:latin typeface="Calibri"/>
+              </a:rPr>
+              <a:t>Taller PI — pasos guiados</a:t>
+            </a:r>
+          </a:p>
+        </p:txBody>
+      </p:sp>
+      <p:sp>
+        <p:nvSpPr>
+          <p:cNvPr id="5" name="Rounded Rectangle 4"/>
+          <p:cNvSpPr/>
+          <p:nvPr/>
+        </p:nvSpPr>
+        <p:spPr>
+          <a:xfrm>
+            <a:off x="457200" y="1234440"/>
+            <a:ext cx="11277295" cy="950976"/>
+          </a:xfrm>
+          <a:prstGeom prst="roundRect">
+            <a:avLst>
+              <a:gd name="adj" fmla="val 12000"/>
+            </a:avLst>
+          </a:prstGeom>
+          <a:solidFill>
+            <a:srgbClr val="F2F2F2"/>
+          </a:solidFill>
+          <a:ln>
+            <a:noFill/>
+          </a:ln>
+        </p:spPr>
+        <p:style>
+          <a:lnRef idx="1">
+            <a:schemeClr val="accent1"/>
+          </a:lnRef>
+          <a:fillRef idx="3">
+            <a:schemeClr val="accent1"/>
+          </a:fillRef>
+          <a:effectRef idx="2">
+            <a:schemeClr val="accent1"/>
+          </a:effectRef>
+          <a:fontRef idx="minor">
+            <a:schemeClr val="lt1"/>
+          </a:fontRef>
+        </p:style>
+        <p:txBody>
+          <a:bodyPr rtlCol="0" anchor="ctr"/>
+          <a:lstStyle/>
+          <a:p>
+            <a:pPr algn="ctr"/>
+          </a:p>
+        </p:txBody>
+      </p:sp>
+      <p:sp>
+        <p:nvSpPr>
+          <p:cNvPr id="6" name="Rounded Rectangle 5"/>
+          <p:cNvSpPr/>
+          <p:nvPr/>
+        </p:nvSpPr>
+        <p:spPr>
+          <a:xfrm>
+            <a:off x="594360" y="1490472"/>
+            <a:ext cx="438912" cy="438912"/>
+          </a:xfrm>
+          <a:prstGeom prst="roundRect">
+            <a:avLst>
+              <a:gd name="adj" fmla="val 12000"/>
+            </a:avLst>
+          </a:prstGeom>
+          <a:solidFill>
+            <a:srgbClr val="095292"/>
+          </a:solidFill>
+          <a:ln>
+            <a:noFill/>
+          </a:ln>
+        </p:spPr>
+        <p:style>
+          <a:lnRef idx="1">
+            <a:schemeClr val="accent1"/>
+          </a:lnRef>
+          <a:fillRef idx="3">
+            <a:schemeClr val="accent1"/>
+          </a:fillRef>
+          <a:effectRef idx="2">
+            <a:schemeClr val="accent1"/>
+          </a:effectRef>
+          <a:fontRef idx="minor">
+            <a:schemeClr val="lt1"/>
+          </a:fontRef>
+        </p:style>
+        <p:txBody>
+          <a:bodyPr rtlCol="0" anchor="ctr"/>
+          <a:lstStyle/>
+          <a:p>
+            <a:pPr algn="ctr"/>
+          </a:p>
+        </p:txBody>
+      </p:sp>
+      <p:sp>
+        <p:nvSpPr>
+          <p:cNvPr id="7" name="TextBox 6"/>
+          <p:cNvSpPr txBox="1"/>
+          <p:nvPr/>
+        </p:nvSpPr>
+        <p:spPr>
+          <a:xfrm>
+            <a:off x="594360" y="1490472"/>
+            <a:ext cx="438912" cy="438912"/>
+          </a:xfrm>
+          <a:prstGeom prst="rect">
+            <a:avLst/>
+          </a:prstGeom>
+          <a:noFill/>
+        </p:spPr>
+        <p:txBody>
+          <a:bodyPr wrap="square" anchor="ctr"/>
+          <a:lstStyle/>
+          <a:p>
+            <a:pPr algn="ctr"/>
+            <a:r>
+              <a:rPr sz="1600" b="1" i="0">
+                <a:solidFill>
+                  <a:srgbClr val="FFFFFF"/>
+                </a:solidFill>
+                <a:latin typeface="Calibri"/>
+              </a:rPr>
+              <a:t>1</a:t>
+            </a:r>
+          </a:p>
+        </p:txBody>
+      </p:sp>
+      <p:sp>
+        <p:nvSpPr>
+          <p:cNvPr id="8" name="TextBox 7"/>
+          <p:cNvSpPr txBox="1"/>
+          <p:nvPr/>
+        </p:nvSpPr>
+        <p:spPr>
+          <a:xfrm>
+            <a:off x="1188720" y="1325880"/>
+            <a:ext cx="10271455" cy="786384"/>
+          </a:xfrm>
+          <a:prstGeom prst="rect">
+            <a:avLst/>
+          </a:prstGeom>
+          <a:noFill/>
+        </p:spPr>
+        <p:txBody>
+          <a:bodyPr wrap="square" anchor="ctr"/>
+          <a:lstStyle/>
+          <a:p>
+            <a:r>
+              <a:rPr sz="1400" b="1" i="0">
+                <a:solidFill>
+                  <a:srgbClr val="095292"/>
+                </a:solidFill>
+                <a:latin typeface="Calibri"/>
+              </a:rPr>
+              <a:t>Tomar el flujo principal escrito de CU-04 Agendar cita, y si todavia no esta especificado diligenciar primero la plantilla de la clase nueve, para luego numerar en el documento cual paso genera cual mensaje, de manera que quede una lista de entre seis y ocho mensajes antes de dibujar cualquier cosa.</a:t>
+            </a:r>
+          </a:p>
+        </p:txBody>
+      </p:sp>
+      <p:sp>
+        <p:nvSpPr>
+          <p:cNvPr id="9" name="Rounded Rectangle 8"/>
+          <p:cNvSpPr/>
+          <p:nvPr/>
+        </p:nvSpPr>
+        <p:spPr>
+          <a:xfrm>
+            <a:off x="457200" y="2276856"/>
+            <a:ext cx="11277295" cy="950976"/>
+          </a:xfrm>
+          <a:prstGeom prst="roundRect">
+            <a:avLst>
+              <a:gd name="adj" fmla="val 12000"/>
+            </a:avLst>
+          </a:prstGeom>
+          <a:solidFill>
+            <a:srgbClr val="E8F4FA"/>
+          </a:solidFill>
+          <a:ln>
+            <a:noFill/>
+          </a:ln>
+        </p:spPr>
+        <p:style>
+          <a:lnRef idx="1">
+            <a:schemeClr val="accent1"/>
+          </a:lnRef>
+          <a:fillRef idx="3">
+            <a:schemeClr val="accent1"/>
+          </a:fillRef>
+          <a:effectRef idx="2">
+            <a:schemeClr val="accent1"/>
+          </a:effectRef>
+          <a:fontRef idx="minor">
+            <a:schemeClr val="lt1"/>
+          </a:fontRef>
+        </p:style>
+        <p:txBody>
+          <a:bodyPr rtlCol="0" anchor="ctr"/>
+          <a:lstStyle/>
+          <a:p>
+            <a:pPr algn="ctr"/>
+          </a:p>
+        </p:txBody>
+      </p:sp>
+      <p:sp>
+        <p:nvSpPr>
+          <p:cNvPr id="10" name="Rounded Rectangle 9"/>
+          <p:cNvSpPr/>
+          <p:nvPr/>
+        </p:nvSpPr>
+        <p:spPr>
+          <a:xfrm>
+            <a:off x="594360" y="2532888"/>
+            <a:ext cx="438912" cy="438912"/>
+          </a:xfrm>
+          <a:prstGeom prst="roundRect">
+            <a:avLst>
+              <a:gd name="adj" fmla="val 12000"/>
+            </a:avLst>
+          </a:prstGeom>
+          <a:solidFill>
+            <a:srgbClr val="095292"/>
+          </a:solidFill>
+          <a:ln>
+            <a:noFill/>
+          </a:ln>
+        </p:spPr>
+        <p:style>
+          <a:lnRef idx="1">
+            <a:schemeClr val="accent1"/>
+          </a:lnRef>
+          <a:fillRef idx="3">
+            <a:schemeClr val="accent1"/>
+          </a:fillRef>
+          <a:effectRef idx="2">
+            <a:schemeClr val="accent1"/>
+          </a:effectRef>
+          <a:fontRef idx="minor">
+            <a:schemeClr val="lt1"/>
+          </a:fontRef>
+        </p:style>
+        <p:txBody>
+          <a:bodyPr rtlCol="0" anchor="ctr"/>
+          <a:lstStyle/>
+          <a:p>
+            <a:pPr algn="ctr"/>
+          </a:p>
+        </p:txBody>
+      </p:sp>
+      <p:sp>
+        <p:nvSpPr>
+          <p:cNvPr id="11" name="TextBox 10"/>
+          <p:cNvSpPr txBox="1"/>
+          <p:nvPr/>
+        </p:nvSpPr>
+        <p:spPr>
+          <a:xfrm>
+            <a:off x="594360" y="2532888"/>
+            <a:ext cx="438912" cy="438912"/>
+          </a:xfrm>
+          <a:prstGeom prst="rect">
+            <a:avLst/>
+          </a:prstGeom>
+          <a:noFill/>
+        </p:spPr>
+        <p:txBody>
+          <a:bodyPr wrap="square" anchor="ctr"/>
+          <a:lstStyle/>
+          <a:p>
+            <a:pPr algn="ctr"/>
+            <a:r>
+              <a:rPr sz="1600" b="1" i="0">
+                <a:solidFill>
+                  <a:srgbClr val="FFFFFF"/>
+                </a:solidFill>
+                <a:latin typeface="Calibri"/>
+              </a:rPr>
+              <a:t>2</a:t>
+            </a:r>
+          </a:p>
+        </p:txBody>
+      </p:sp>
+      <p:sp>
+        <p:nvSpPr>
+          <p:cNvPr id="12" name="TextBox 11"/>
+          <p:cNvSpPr txBox="1"/>
+          <p:nvPr/>
+        </p:nvSpPr>
+        <p:spPr>
+          <a:xfrm>
+            <a:off x="1188720" y="2368296"/>
+            <a:ext cx="10271455" cy="786384"/>
+          </a:xfrm>
+          <a:prstGeom prst="rect">
+            <a:avLst/>
+          </a:prstGeom>
+          <a:noFill/>
+        </p:spPr>
+        <p:txBody>
+          <a:bodyPr wrap="square" anchor="ctr"/>
+          <a:lstStyle/>
+          <a:p>
+            <a:r>
+              <a:rPr sz="1400" b="1" i="0">
+                <a:solidFill>
+                  <a:srgbClr val="095292"/>
+                </a:solidFill>
+                <a:latin typeface="Calibri"/>
+              </a:rPr>
+              <a:t>Dibujar el diagrama de secuencia en Mermaid Live Editor o draw.io con la recepcionista como actor y minimo tres participantes que correspondan a clases reales del diagrama de clases de VetCare, incluyendo las flechas de retorno con el dato que devuelven.</a:t>
+            </a:r>
+          </a:p>
+        </p:txBody>
+      </p:sp>
+      <p:sp>
+        <p:nvSpPr>
+          <p:cNvPr id="13" name="Rounded Rectangle 12"/>
+          <p:cNvSpPr/>
+          <p:nvPr/>
+        </p:nvSpPr>
+        <p:spPr>
+          <a:xfrm>
+            <a:off x="457200" y="3319272"/>
+            <a:ext cx="11277295" cy="950976"/>
+          </a:xfrm>
+          <a:prstGeom prst="roundRect">
+            <a:avLst>
+              <a:gd name="adj" fmla="val 12000"/>
+            </a:avLst>
+          </a:prstGeom>
+          <a:solidFill>
+            <a:srgbClr val="F2F2F2"/>
+          </a:solidFill>
+          <a:ln>
+            <a:noFill/>
+          </a:ln>
+        </p:spPr>
+        <p:style>
+          <a:lnRef idx="1">
+            <a:schemeClr val="accent1"/>
+          </a:lnRef>
+          <a:fillRef idx="3">
+            <a:schemeClr val="accent1"/>
+          </a:fillRef>
+          <a:effectRef idx="2">
+            <a:schemeClr val="accent1"/>
+          </a:effectRef>
+          <a:fontRef idx="minor">
+            <a:schemeClr val="lt1"/>
+          </a:fontRef>
+        </p:style>
+        <p:txBody>
+          <a:bodyPr rtlCol="0" anchor="ctr"/>
+          <a:lstStyle/>
+          <a:p>
+            <a:pPr algn="ctr"/>
+          </a:p>
+        </p:txBody>
+      </p:sp>
+      <p:sp>
+        <p:nvSpPr>
+          <p:cNvPr id="14" name="Rounded Rectangle 13"/>
+          <p:cNvSpPr/>
+          <p:nvPr/>
+        </p:nvSpPr>
+        <p:spPr>
+          <a:xfrm>
+            <a:off x="594360" y="3575304"/>
+            <a:ext cx="438912" cy="438912"/>
+          </a:xfrm>
+          <a:prstGeom prst="roundRect">
+            <a:avLst>
+              <a:gd name="adj" fmla="val 12000"/>
+            </a:avLst>
+          </a:prstGeom>
+          <a:solidFill>
+            <a:srgbClr val="095292"/>
+          </a:solidFill>
+          <a:ln>
+            <a:noFill/>
+          </a:ln>
+        </p:spPr>
+        <p:style>
+          <a:lnRef idx="1">
+            <a:schemeClr val="accent1"/>
+          </a:lnRef>
+          <a:fillRef idx="3">
+            <a:schemeClr val="accent1"/>
+          </a:fillRef>
+          <a:effectRef idx="2">
+            <a:schemeClr val="accent1"/>
+          </a:effectRef>
+          <a:fontRef idx="minor">
+            <a:schemeClr val="lt1"/>
+          </a:fontRef>
+        </p:style>
+        <p:txBody>
+          <a:bodyPr rtlCol="0" anchor="ctr"/>
+          <a:lstStyle/>
+          <a:p>
+            <a:pPr algn="ctr"/>
+          </a:p>
+        </p:txBody>
+      </p:sp>
+      <p:sp>
+        <p:nvSpPr>
+          <p:cNvPr id="15" name="TextBox 14"/>
+          <p:cNvSpPr txBox="1"/>
+          <p:nvPr/>
+        </p:nvSpPr>
+        <p:spPr>
+          <a:xfrm>
+            <a:off x="594360" y="3575304"/>
+            <a:ext cx="438912" cy="438912"/>
+          </a:xfrm>
+          <a:prstGeom prst="rect">
+            <a:avLst/>
+          </a:prstGeom>
+          <a:noFill/>
+        </p:spPr>
+        <p:txBody>
+          <a:bodyPr wrap="square" anchor="ctr"/>
+          <a:lstStyle/>
+          <a:p>
+            <a:pPr algn="ctr"/>
+            <a:r>
+              <a:rPr sz="1600" b="1" i="0">
+                <a:solidFill>
+                  <a:srgbClr val="FFFFFF"/>
+                </a:solidFill>
+                <a:latin typeface="Calibri"/>
+              </a:rPr>
+              <a:t>3</a:t>
+            </a:r>
+          </a:p>
+        </p:txBody>
+      </p:sp>
+      <p:sp>
+        <p:nvSpPr>
+          <p:cNvPr id="16" name="TextBox 15"/>
+          <p:cNvSpPr txBox="1"/>
+          <p:nvPr/>
+        </p:nvSpPr>
+        <p:spPr>
+          <a:xfrm>
+            <a:off x="1188720" y="3410712"/>
+            <a:ext cx="10271455" cy="786384"/>
+          </a:xfrm>
+          <a:prstGeom prst="rect">
+            <a:avLst/>
+          </a:prstGeom>
+          <a:noFill/>
+        </p:spPr>
+        <p:txBody>
+          <a:bodyPr wrap="square" anchor="ctr"/>
+          <a:lstStyle/>
+          <a:p>
+            <a:r>
+              <a:rPr sz="1500" b="1" i="0">
+                <a:solidFill>
+                  <a:srgbClr val="095292"/>
+                </a:solidFill>
+                <a:latin typeface="Calibri"/>
+              </a:rPr>
+              <a:t>Agregar un fragmento alt que modele el horario ocupado con sus dos condiciones de guarda escritas, y verificar que el camino del else corresponda a un flujo alterno documentado en la especificacion del caso de uso.</a:t>
+            </a:r>
+          </a:p>
+        </p:txBody>
+      </p:sp>
+      <p:sp>
+        <p:nvSpPr>
+          <p:cNvPr id="17" name="Rounded Rectangle 16"/>
+          <p:cNvSpPr/>
+          <p:nvPr/>
+        </p:nvSpPr>
+        <p:spPr>
+          <a:xfrm>
+            <a:off x="457200" y="4361688"/>
+            <a:ext cx="11277295" cy="950976"/>
+          </a:xfrm>
+          <a:prstGeom prst="roundRect">
+            <a:avLst>
+              <a:gd name="adj" fmla="val 12000"/>
+            </a:avLst>
+          </a:prstGeom>
+          <a:solidFill>
+            <a:srgbClr val="E8F4FA"/>
+          </a:solidFill>
+          <a:ln>
+            <a:noFill/>
+          </a:ln>
+        </p:spPr>
+        <p:style>
+          <a:lnRef idx="1">
+            <a:schemeClr val="accent1"/>
+          </a:lnRef>
+          <a:fillRef idx="3">
+            <a:schemeClr val="accent1"/>
+          </a:fillRef>
+          <a:effectRef idx="2">
+            <a:schemeClr val="accent1"/>
+          </a:effectRef>
+          <a:fontRef idx="minor">
+            <a:schemeClr val="lt1"/>
+          </a:fontRef>
+        </p:style>
+        <p:txBody>
+          <a:bodyPr rtlCol="0" anchor="ctr"/>
+          <a:lstStyle/>
+          <a:p>
+            <a:pPr algn="ctr"/>
+          </a:p>
+        </p:txBody>
+      </p:sp>
+      <p:sp>
+        <p:nvSpPr>
+          <p:cNvPr id="18" name="Rounded Rectangle 17"/>
+          <p:cNvSpPr/>
+          <p:nvPr/>
+        </p:nvSpPr>
+        <p:spPr>
+          <a:xfrm>
+            <a:off x="594360" y="4617720"/>
+            <a:ext cx="438912" cy="438912"/>
+          </a:xfrm>
+          <a:prstGeom prst="roundRect">
+            <a:avLst>
+              <a:gd name="adj" fmla="val 12000"/>
+            </a:avLst>
+          </a:prstGeom>
+          <a:solidFill>
+            <a:srgbClr val="095292"/>
+          </a:solidFill>
+          <a:ln>
+            <a:noFill/>
+          </a:ln>
+        </p:spPr>
+        <p:style>
+          <a:lnRef idx="1">
+            <a:schemeClr val="accent1"/>
+          </a:lnRef>
+          <a:fillRef idx="3">
+            <a:schemeClr val="accent1"/>
+          </a:fillRef>
+          <a:effectRef idx="2">
+            <a:schemeClr val="accent1"/>
+          </a:effectRef>
+          <a:fontRef idx="minor">
+            <a:schemeClr val="lt1"/>
+          </a:fontRef>
+        </p:style>
+        <p:txBody>
+          <a:bodyPr rtlCol="0" anchor="ctr"/>
+          <a:lstStyle/>
+          <a:p>
+            <a:pPr algn="ctr"/>
+          </a:p>
+        </p:txBody>
+      </p:sp>
+      <p:sp>
+        <p:nvSpPr>
+          <p:cNvPr id="19" name="TextBox 18"/>
+          <p:cNvSpPr txBox="1"/>
+          <p:nvPr/>
+        </p:nvSpPr>
+        <p:spPr>
+          <a:xfrm>
+            <a:off x="594360" y="4617720"/>
+            <a:ext cx="438912" cy="438912"/>
+          </a:xfrm>
+          <a:prstGeom prst="rect">
+            <a:avLst/>
+          </a:prstGeom>
+          <a:noFill/>
+        </p:spPr>
+        <p:txBody>
+          <a:bodyPr wrap="square" anchor="ctr"/>
+          <a:lstStyle/>
+          <a:p>
+            <a:pPr algn="ctr"/>
+            <a:r>
+              <a:rPr sz="1600" b="1" i="0">
+                <a:solidFill>
+                  <a:srgbClr val="FFFFFF"/>
+                </a:solidFill>
+                <a:latin typeface="Calibri"/>
+              </a:rPr>
+              <a:t>4</a:t>
+            </a:r>
+          </a:p>
+        </p:txBody>
+      </p:sp>
+      <p:sp>
+        <p:nvSpPr>
+          <p:cNvPr id="20" name="TextBox 19"/>
+          <p:cNvSpPr txBox="1"/>
+          <p:nvPr/>
+        </p:nvSpPr>
+        <p:spPr>
+          <a:xfrm>
+            <a:off x="1188720" y="4453128"/>
+            <a:ext cx="10271455" cy="786384"/>
+          </a:xfrm>
+          <a:prstGeom prst="rect">
+            <a:avLst/>
+          </a:prstGeom>
+          <a:noFill/>
+        </p:spPr>
+        <p:txBody>
+          <a:bodyPr wrap="square" anchor="ctr"/>
+          <a:lstStyle/>
+          <a:p>
+            <a:r>
+              <a:rPr sz="1500" b="1" i="0">
+                <a:solidFill>
+                  <a:srgbClr val="095292"/>
+                </a:solidFill>
+                <a:latin typeface="Calibri"/>
+              </a:rPr>
+              <a:t>Construir la tabla de mapeo mensaje a operacion con tres columnas, mensaje, clase destinataria y operacion que debe existir, y agregar al diagrama de clases toda operacion que hoy falte; ninguna fila puede quedar con la clase en blanco.</a:t>
+            </a:r>
+          </a:p>
+        </p:txBody>
+      </p:sp>
+      <p:sp>
+        <p:nvSpPr>
+          <p:cNvPr id="21" name="Rounded Rectangle 20"/>
+          <p:cNvSpPr/>
+          <p:nvPr/>
+        </p:nvSpPr>
+        <p:spPr>
+          <a:xfrm>
+            <a:off x="457200" y="5404104"/>
+            <a:ext cx="11277295" cy="950976"/>
+          </a:xfrm>
+          <a:prstGeom prst="roundRect">
+            <a:avLst>
+              <a:gd name="adj" fmla="val 12000"/>
+            </a:avLst>
+          </a:prstGeom>
+          <a:solidFill>
+            <a:srgbClr val="F2F2F2"/>
+          </a:solidFill>
+          <a:ln>
+            <a:noFill/>
+          </a:ln>
+        </p:spPr>
+        <p:style>
+          <a:lnRef idx="1">
+            <a:schemeClr val="accent1"/>
+          </a:lnRef>
+          <a:fillRef idx="3">
+            <a:schemeClr val="accent1"/>
+          </a:fillRef>
+          <a:effectRef idx="2">
+            <a:schemeClr val="accent1"/>
+          </a:effectRef>
+          <a:fontRef idx="minor">
+            <a:schemeClr val="lt1"/>
+          </a:fontRef>
+        </p:style>
+        <p:txBody>
+          <a:bodyPr rtlCol="0" anchor="ctr"/>
+          <a:lstStyle/>
+          <a:p>
+            <a:pPr algn="ctr"/>
+          </a:p>
+        </p:txBody>
+      </p:sp>
+      <p:sp>
+        <p:nvSpPr>
+          <p:cNvPr id="22" name="Rounded Rectangle 21"/>
+          <p:cNvSpPr/>
+          <p:nvPr/>
+        </p:nvSpPr>
+        <p:spPr>
+          <a:xfrm>
+            <a:off x="594360" y="5660136"/>
+            <a:ext cx="438912" cy="438912"/>
+          </a:xfrm>
+          <a:prstGeom prst="roundRect">
+            <a:avLst>
+              <a:gd name="adj" fmla="val 12000"/>
+            </a:avLst>
+          </a:prstGeom>
+          <a:solidFill>
+            <a:srgbClr val="095292"/>
+          </a:solidFill>
+          <a:ln>
+            <a:noFill/>
+          </a:ln>
+        </p:spPr>
+        <p:style>
+          <a:lnRef idx="1">
+            <a:schemeClr val="accent1"/>
+          </a:lnRef>
+          <a:fillRef idx="3">
+            <a:schemeClr val="accent1"/>
+          </a:fillRef>
+          <a:effectRef idx="2">
+            <a:schemeClr val="accent1"/>
+          </a:effectRef>
+          <a:fontRef idx="minor">
+            <a:schemeClr val="lt1"/>
+          </a:fontRef>
+        </p:style>
+        <p:txBody>
+          <a:bodyPr rtlCol="0" anchor="ctr"/>
+          <a:lstStyle/>
+          <a:p>
+            <a:pPr algn="ctr"/>
+          </a:p>
+        </p:txBody>
+      </p:sp>
+      <p:sp>
+        <p:nvSpPr>
+          <p:cNvPr id="23" name="TextBox 22"/>
+          <p:cNvSpPr txBox="1"/>
+          <p:nvPr/>
+        </p:nvSpPr>
+        <p:spPr>
+          <a:xfrm>
+            <a:off x="594360" y="5660136"/>
+            <a:ext cx="438912" cy="438912"/>
+          </a:xfrm>
+          <a:prstGeom prst="rect">
+            <a:avLst/>
+          </a:prstGeom>
+          <a:noFill/>
+        </p:spPr>
+        <p:txBody>
+          <a:bodyPr wrap="square" anchor="ctr"/>
+          <a:lstStyle/>
+          <a:p>
+            <a:pPr algn="ctr"/>
+            <a:r>
+              <a:rPr sz="1600" b="1" i="0">
+                <a:solidFill>
+                  <a:srgbClr val="FFFFFF"/>
+                </a:solidFill>
+                <a:latin typeface="Calibri"/>
+              </a:rPr>
+              <a:t>5</a:t>
+            </a:r>
+          </a:p>
+        </p:txBody>
+      </p:sp>
+      <p:sp>
+        <p:nvSpPr>
+          <p:cNvPr id="24" name="TextBox 23"/>
+          <p:cNvSpPr txBox="1"/>
+          <p:nvPr/>
+        </p:nvSpPr>
+        <p:spPr>
+          <a:xfrm>
+            <a:off x="1188720" y="5495544"/>
+            <a:ext cx="10271455" cy="786384"/>
+          </a:xfrm>
+          <a:prstGeom prst="rect">
+            <a:avLst/>
+          </a:prstGeom>
+          <a:noFill/>
+        </p:spPr>
+        <p:txBody>
+          <a:bodyPr wrap="square" anchor="ctr"/>
+          <a:lstStyle/>
+          <a:p>
+            <a:r>
+              <a:rPr sz="1400" b="1" i="0">
+                <a:solidFill>
+                  <a:srgbClr val="095292"/>
+                </a:solidFill>
+                <a:latin typeface="Calibri"/>
+              </a:rPr>
+              <a:t>Dibujar el diagrama de actividad del proceso de atencion en el consultorio con cuatro calles (Propietario, Recepcionista, Veterinario y Sistema VetCare), con minimo dos nodos de decision y una bifurcacion en paralelo, y exportar todo a PDF para subirlo a la plataforma del curso.</a:t>
+            </a:r>
+          </a:p>
+        </p:txBody>
+      </p:sp>
+      <p:sp>
+        <p:nvSpPr>
+          <p:cNvPr id="25" name="TextBox 24"/>
+          <p:cNvSpPr txBox="1"/>
+          <p:nvPr/>
+        </p:nvSpPr>
+        <p:spPr>
+          <a:xfrm>
+            <a:off x="11185855" y="6473952"/>
+            <a:ext cx="640080" cy="274320"/>
+          </a:xfrm>
+          <a:prstGeom prst="rect">
+            <a:avLst/>
+          </a:prstGeom>
+          <a:noFill/>
+        </p:spPr>
+        <p:txBody>
+          <a:bodyPr wrap="square">
+            <a:spAutoFit/>
+          </a:bodyPr>
+          <a:lstStyle/>
+          <a:p>
+            <a:pPr algn="r"/>
+            <a:r>
+              <a:rPr sz="1100" b="0" i="0">
+                <a:solidFill>
+                  <a:srgbClr val="666666"/>
+                </a:solidFill>
+                <a:latin typeface="Calibri"/>
+              </a:rPr>
+              <a:t>16</a:t>
+            </a:r>
+          </a:p>
+        </p:txBody>
+      </p:sp>
+    </p:spTree>
+  </p:cSld>
+  <p:clrMapOvr>
+    <a:masterClrMapping/>
+  </p:clrMapOvr>
+</p:sld>
+</file>
+
+<file path=ppt/slides/slide17.xml><?xml version="1.0" encoding="utf-8"?>
+<p:sld xmlns:a="http://schemas.openxmlformats.org/drawingml/2006/main" xmlns:p="http://schemas.openxmlformats.org/presentationml/2006/main" xmlns:r="http://schemas.openxmlformats.org/officeDocument/2006/relationships">
+  <p:cSld>
+    <p:bg>
+      <p:bgPr>
+        <a:solidFill>
+          <a:srgbClr val="FFFFFF"/>
+        </a:solidFill>
+        <a:effectLst/>
+      </p:bgPr>
+    </p:bg>
+    <p:spTree>
+      <p:nvGrpSpPr>
+        <p:cNvPr id="1" name=""/>
+        <p:cNvGrpSpPr/>
+        <p:nvPr/>
+      </p:nvGrpSpPr>
+      <p:grpSpPr/>
+      <p:sp>
+        <p:nvSpPr>
+          <p:cNvPr id="2" name="Rectangle 1"/>
+          <p:cNvSpPr/>
+          <p:nvPr/>
+        </p:nvSpPr>
+        <p:spPr>
+          <a:xfrm>
+            <a:off x="0" y="0"/>
+            <a:ext cx="12191695" cy="960120"/>
+          </a:xfrm>
+          <a:prstGeom prst="rect">
+            <a:avLst/>
+          </a:prstGeom>
+          <a:solidFill>
+            <a:srgbClr val="095292"/>
+          </a:solidFill>
+          <a:ln>
+            <a:noFill/>
+          </a:ln>
+        </p:spPr>
+        <p:style>
+          <a:lnRef idx="1">
+            <a:schemeClr val="accent1"/>
+          </a:lnRef>
+          <a:fillRef idx="3">
+            <a:schemeClr val="accent1"/>
+          </a:fillRef>
+          <a:effectRef idx="2">
+            <a:schemeClr val="accent1"/>
+          </a:effectRef>
+          <a:fontRef idx="minor">
+            <a:schemeClr val="lt1"/>
+          </a:fontRef>
+        </p:style>
+        <p:txBody>
+          <a:bodyPr rtlCol="0" anchor="ctr"/>
+          <a:lstStyle/>
+          <a:p>
+            <a:pPr algn="ctr"/>
+          </a:p>
+        </p:txBody>
+      </p:sp>
+      <p:sp>
+        <p:nvSpPr>
+          <p:cNvPr id="3" name="Rectangle 2"/>
+          <p:cNvSpPr/>
+          <p:nvPr/>
+        </p:nvSpPr>
+        <p:spPr>
+          <a:xfrm>
+            <a:off x="0" y="960120"/>
+            <a:ext cx="12191695" cy="41148"/>
+          </a:xfrm>
+          <a:prstGeom prst="rect">
+            <a:avLst/>
+          </a:prstGeom>
+          <a:solidFill>
+            <a:srgbClr val="FFD000"/>
+          </a:solidFill>
+          <a:ln>
+            <a:noFill/>
+          </a:ln>
+        </p:spPr>
+        <p:style>
+          <a:lnRef idx="1">
+            <a:schemeClr val="accent1"/>
+          </a:lnRef>
+          <a:fillRef idx="3">
+            <a:schemeClr val="accent1"/>
+          </a:fillRef>
+          <a:effectRef idx="2">
+            <a:schemeClr val="accent1"/>
+          </a:effectRef>
+          <a:fontRef idx="minor">
+            <a:schemeClr val="lt1"/>
+          </a:fontRef>
+        </p:style>
+        <p:txBody>
+          <a:bodyPr rtlCol="0" anchor="ctr"/>
+          <a:lstStyle/>
+          <a:p>
+            <a:pPr algn="ctr"/>
+          </a:p>
+        </p:txBody>
+      </p:sp>
+      <p:sp>
+        <p:nvSpPr>
+          <p:cNvPr id="4" name="TextBox 3"/>
+          <p:cNvSpPr txBox="1"/>
+          <p:nvPr/>
+        </p:nvSpPr>
+        <p:spPr>
+          <a:xfrm>
+            <a:off x="457200" y="164592"/>
+            <a:ext cx="11277295" cy="502920"/>
+          </a:xfrm>
+          <a:prstGeom prst="rect">
+            <a:avLst/>
+          </a:prstGeom>
+          <a:noFill/>
+        </p:spPr>
+        <p:txBody>
+          <a:bodyPr wrap="square">
+            <a:spAutoFit/>
+          </a:bodyPr>
+          <a:lstStyle/>
+          <a:p>
+            <a:r>
+              <a:rPr sz="2600" b="1" i="0">
+                <a:solidFill>
+                  <a:srgbClr val="FFFFFF"/>
+                </a:solidFill>
+                <a:latin typeface="Calibri"/>
+              </a:rPr>
+              <a:t>Antes de entregar — autochequeo</a:t>
+            </a:r>
+          </a:p>
+        </p:txBody>
+      </p:sp>
+      <p:sp>
+        <p:nvSpPr>
+          <p:cNvPr id="5" name="Rounded Rectangle 4"/>
+          <p:cNvSpPr/>
+          <p:nvPr/>
+        </p:nvSpPr>
+        <p:spPr>
+          <a:xfrm>
+            <a:off x="457200" y="1261872"/>
+            <a:ext cx="11277295" cy="566928"/>
+          </a:xfrm>
+          <a:prstGeom prst="roundRect">
+            <a:avLst>
+              <a:gd name="adj" fmla="val 12000"/>
+            </a:avLst>
+          </a:prstGeom>
+          <a:solidFill>
+            <a:srgbClr val="F2F2F2"/>
+          </a:solidFill>
+          <a:ln>
+            <a:noFill/>
+          </a:ln>
+        </p:spPr>
+        <p:style>
+          <a:lnRef idx="1">
+            <a:schemeClr val="accent1"/>
+          </a:lnRef>
+          <a:fillRef idx="3">
+            <a:schemeClr val="accent1"/>
+          </a:fillRef>
+          <a:effectRef idx="2">
+            <a:schemeClr val="accent1"/>
+          </a:effectRef>
+          <a:fontRef idx="minor">
+            <a:schemeClr val="lt1"/>
+          </a:fontRef>
+        </p:style>
+        <p:txBody>
+          <a:bodyPr rtlCol="0" anchor="ctr"/>
+          <a:lstStyle/>
+          <a:p>
+            <a:pPr algn="ctr"/>
+          </a:p>
+        </p:txBody>
+      </p:sp>
+      <p:sp>
+        <p:nvSpPr>
+          <p:cNvPr id="6" name="Rectangle 5"/>
+          <p:cNvSpPr/>
+          <p:nvPr/>
+        </p:nvSpPr>
+        <p:spPr>
+          <a:xfrm>
+            <a:off x="640080" y="1408175"/>
+            <a:ext cx="274320" cy="274320"/>
+          </a:xfrm>
+          <a:prstGeom prst="rect">
+            <a:avLst/>
+          </a:prstGeom>
+          <a:solidFill>
+            <a:srgbClr val="FFFFFF"/>
+          </a:solidFill>
+          <a:ln>
+            <a:solidFill>
+              <a:srgbClr val="333333"/>
+            </a:solidFill>
+          </a:ln>
+        </p:spPr>
+        <p:style>
+          <a:lnRef idx="1">
+            <a:schemeClr val="accent1"/>
+          </a:lnRef>
+          <a:fillRef idx="3">
+            <a:schemeClr val="accent1"/>
+          </a:fillRef>
+          <a:effectRef idx="2">
+            <a:schemeClr val="accent1"/>
+          </a:effectRef>
+          <a:fontRef idx="minor">
+            <a:schemeClr val="lt1"/>
+          </a:fontRef>
+        </p:style>
+        <p:txBody>
+          <a:bodyPr rtlCol="0" anchor="ctr"/>
+          <a:lstStyle/>
+          <a:p>
+            <a:pPr algn="ctr"/>
+          </a:p>
+        </p:txBody>
+      </p:sp>
+      <p:sp>
+        <p:nvSpPr>
+          <p:cNvPr id="7" name="Rectangle 6"/>
+          <p:cNvSpPr/>
+          <p:nvPr/>
+        </p:nvSpPr>
+        <p:spPr>
+          <a:xfrm>
+            <a:off x="640080" y="1408175"/>
+            <a:ext cx="73152" cy="274320"/>
           </a:xfrm>
           <a:prstGeom prst="rect">
             <a:avLst/>
@@ -6182,40 +7358,16 @@
           </a:p>
         </p:txBody>
       </p:sp>
-      <p:pic>
-        <p:nvPicPr>
-          <p:cNvPr id="3" name="Picture 2" descr="logo_uniajc_color.png"/>
-          <p:cNvPicPr>
-            <a:picLocks noChangeAspect="1"/>
-          </p:cNvPicPr>
-          <p:nvPr/>
-        </p:nvPicPr>
-        <p:blipFill>
-          <a:blip r:embed="rId2"/>
-          <a:stretch>
-            <a:fillRect/>
-          </a:stretch>
-        </p:blipFill>
-        <p:spPr>
-          <a:xfrm>
-            <a:off x="10271455" y="5998464"/>
-            <a:ext cx="1463040" cy="643233"/>
-          </a:xfrm>
-          <a:prstGeom prst="rect">
-            <a:avLst/>
-          </a:prstGeom>
-        </p:spPr>
-      </p:pic>
-      <p:sp>
-        <p:nvSpPr>
-          <p:cNvPr id="4" name="TextBox 3"/>
+      <p:sp>
+        <p:nvSpPr>
+          <p:cNvPr id="8" name="TextBox 7"/>
           <p:cNvSpPr txBox="1"/>
           <p:nvPr/>
         </p:nvSpPr>
         <p:spPr>
           <a:xfrm>
-            <a:off x="457200" y="1737360"/>
-            <a:ext cx="11277295" cy="1097280"/>
+            <a:off x="1097280" y="1353312"/>
+            <a:ext cx="10362895" cy="402336"/>
           </a:xfrm>
           <a:prstGeom prst="rect">
             <a:avLst/>
@@ -6226,29 +7378,358 @@
           <a:bodyPr wrap="square" anchor="ctr"/>
           <a:lstStyle/>
           <a:p>
+            <a:r>
+              <a:rPr sz="1500" b="0" i="0">
+                <a:solidFill>
+                  <a:srgbClr val="333333"/>
+                </a:solidFill>
+                <a:latin typeface="Calibri"/>
+              </a:rPr>
+              <a:t>Si sigue las flechas de su diagrama de arriba hacia abajo, obtiene exactamente el mismo relato que ya escribio en el flujo principal del caso de uso?</a:t>
+            </a:r>
+          </a:p>
+        </p:txBody>
+      </p:sp>
+      <p:sp>
+        <p:nvSpPr>
+          <p:cNvPr id="9" name="Rounded Rectangle 8"/>
+          <p:cNvSpPr/>
+          <p:nvPr/>
+        </p:nvSpPr>
+        <p:spPr>
+          <a:xfrm>
+            <a:off x="457200" y="1938528"/>
+            <a:ext cx="11277295" cy="566928"/>
+          </a:xfrm>
+          <a:prstGeom prst="roundRect">
+            <a:avLst>
+              <a:gd name="adj" fmla="val 12000"/>
+            </a:avLst>
+          </a:prstGeom>
+          <a:solidFill>
+            <a:srgbClr val="F2F2F2"/>
+          </a:solidFill>
+          <a:ln>
+            <a:noFill/>
+          </a:ln>
+        </p:spPr>
+        <p:style>
+          <a:lnRef idx="1">
+            <a:schemeClr val="accent1"/>
+          </a:lnRef>
+          <a:fillRef idx="3">
+            <a:schemeClr val="accent1"/>
+          </a:fillRef>
+          <a:effectRef idx="2">
+            <a:schemeClr val="accent1"/>
+          </a:effectRef>
+          <a:fontRef idx="minor">
+            <a:schemeClr val="lt1"/>
+          </a:fontRef>
+        </p:style>
+        <p:txBody>
+          <a:bodyPr rtlCol="0" anchor="ctr"/>
+          <a:lstStyle/>
+          <a:p>
             <a:pPr algn="ctr"/>
-            <a:r>
-              <a:rPr sz="3400" b="1" i="0">
-                <a:solidFill>
-                  <a:srgbClr val="095292"/>
-                </a:solidFill>
-                <a:latin typeface="Calibri"/>
-              </a:rPr>
-              <a:t>Clase 12 · VetCare avanza</a:t>
-            </a:r>
-          </a:p>
-        </p:txBody>
-      </p:sp>
-      <p:sp>
-        <p:nvSpPr>
-          <p:cNvPr id="5" name="TextBox 4"/>
+          </a:p>
+        </p:txBody>
+      </p:sp>
+      <p:sp>
+        <p:nvSpPr>
+          <p:cNvPr id="10" name="Rectangle 9"/>
+          <p:cNvSpPr/>
+          <p:nvPr/>
+        </p:nvSpPr>
+        <p:spPr>
+          <a:xfrm>
+            <a:off x="640080" y="2084832"/>
+            <a:ext cx="274320" cy="274320"/>
+          </a:xfrm>
+          <a:prstGeom prst="rect">
+            <a:avLst/>
+          </a:prstGeom>
+          <a:solidFill>
+            <a:srgbClr val="FFFFFF"/>
+          </a:solidFill>
+          <a:ln>
+            <a:solidFill>
+              <a:srgbClr val="333333"/>
+            </a:solidFill>
+          </a:ln>
+        </p:spPr>
+        <p:style>
+          <a:lnRef idx="1">
+            <a:schemeClr val="accent1"/>
+          </a:lnRef>
+          <a:fillRef idx="3">
+            <a:schemeClr val="accent1"/>
+          </a:fillRef>
+          <a:effectRef idx="2">
+            <a:schemeClr val="accent1"/>
+          </a:effectRef>
+          <a:fontRef idx="minor">
+            <a:schemeClr val="lt1"/>
+          </a:fontRef>
+        </p:style>
+        <p:txBody>
+          <a:bodyPr rtlCol="0" anchor="ctr"/>
+          <a:lstStyle/>
+          <a:p>
+            <a:pPr algn="ctr"/>
+          </a:p>
+        </p:txBody>
+      </p:sp>
+      <p:sp>
+        <p:nvSpPr>
+          <p:cNvPr id="11" name="Rectangle 10"/>
+          <p:cNvSpPr/>
+          <p:nvPr/>
+        </p:nvSpPr>
+        <p:spPr>
+          <a:xfrm>
+            <a:off x="640080" y="2084832"/>
+            <a:ext cx="73152" cy="274320"/>
+          </a:xfrm>
+          <a:prstGeom prst="rect">
+            <a:avLst/>
+          </a:prstGeom>
+          <a:solidFill>
+            <a:srgbClr val="269CCB"/>
+          </a:solidFill>
+          <a:ln>
+            <a:noFill/>
+          </a:ln>
+        </p:spPr>
+        <p:style>
+          <a:lnRef idx="1">
+            <a:schemeClr val="accent1"/>
+          </a:lnRef>
+          <a:fillRef idx="3">
+            <a:schemeClr val="accent1"/>
+          </a:fillRef>
+          <a:effectRef idx="2">
+            <a:schemeClr val="accent1"/>
+          </a:effectRef>
+          <a:fontRef idx="minor">
+            <a:schemeClr val="lt1"/>
+          </a:fontRef>
+        </p:style>
+        <p:txBody>
+          <a:bodyPr rtlCol="0" anchor="ctr"/>
+          <a:lstStyle/>
+          <a:p>
+            <a:pPr algn="ctr"/>
+          </a:p>
+        </p:txBody>
+      </p:sp>
+      <p:sp>
+        <p:nvSpPr>
+          <p:cNvPr id="12" name="TextBox 11"/>
           <p:cNvSpPr txBox="1"/>
           <p:nvPr/>
         </p:nvSpPr>
         <p:spPr>
           <a:xfrm>
-            <a:off x="457200" y="3017520"/>
-            <a:ext cx="11277295" cy="1645920"/>
+            <a:off x="1097280" y="2029968"/>
+            <a:ext cx="10362895" cy="402336"/>
+          </a:xfrm>
+          <a:prstGeom prst="rect">
+            <a:avLst/>
+          </a:prstGeom>
+          <a:noFill/>
+        </p:spPr>
+        <p:txBody>
+          <a:bodyPr wrap="square" anchor="ctr"/>
+          <a:lstStyle/>
+          <a:p>
+            <a:r>
+              <a:rPr sz="1500" b="0" i="0">
+                <a:solidFill>
+                  <a:srgbClr val="333333"/>
+                </a:solidFill>
+                <a:latin typeface="Calibri"/>
+              </a:rPr>
+              <a:t>Cada participante de su diagrama existe como clase en el modelo, o dibujo cajas como Base de datos y Sistema que nadie puede implementar?</a:t>
+            </a:r>
+          </a:p>
+        </p:txBody>
+      </p:sp>
+      <p:sp>
+        <p:nvSpPr>
+          <p:cNvPr id="13" name="Rounded Rectangle 12"/>
+          <p:cNvSpPr/>
+          <p:nvPr/>
+        </p:nvSpPr>
+        <p:spPr>
+          <a:xfrm>
+            <a:off x="457200" y="2615184"/>
+            <a:ext cx="11277295" cy="566928"/>
+          </a:xfrm>
+          <a:prstGeom prst="roundRect">
+            <a:avLst>
+              <a:gd name="adj" fmla="val 12000"/>
+            </a:avLst>
+          </a:prstGeom>
+          <a:solidFill>
+            <a:srgbClr val="F2F2F2"/>
+          </a:solidFill>
+          <a:ln>
+            <a:noFill/>
+          </a:ln>
+        </p:spPr>
+        <p:style>
+          <a:lnRef idx="1">
+            <a:schemeClr val="accent1"/>
+          </a:lnRef>
+          <a:fillRef idx="3">
+            <a:schemeClr val="accent1"/>
+          </a:fillRef>
+          <a:effectRef idx="2">
+            <a:schemeClr val="accent1"/>
+          </a:effectRef>
+          <a:fontRef idx="minor">
+            <a:schemeClr val="lt1"/>
+          </a:fontRef>
+        </p:style>
+        <p:txBody>
+          <a:bodyPr rtlCol="0" anchor="ctr"/>
+          <a:lstStyle/>
+          <a:p>
+            <a:pPr algn="ctr"/>
+          </a:p>
+        </p:txBody>
+      </p:sp>
+      <p:sp>
+        <p:nvSpPr>
+          <p:cNvPr id="14" name="Rectangle 13"/>
+          <p:cNvSpPr/>
+          <p:nvPr/>
+        </p:nvSpPr>
+        <p:spPr>
+          <a:xfrm>
+            <a:off x="640080" y="2761488"/>
+            <a:ext cx="274320" cy="274320"/>
+          </a:xfrm>
+          <a:prstGeom prst="rect">
+            <a:avLst/>
+          </a:prstGeom>
+          <a:solidFill>
+            <a:srgbClr val="FFFFFF"/>
+          </a:solidFill>
+          <a:ln>
+            <a:solidFill>
+              <a:srgbClr val="333333"/>
+            </a:solidFill>
+          </a:ln>
+        </p:spPr>
+        <p:style>
+          <a:lnRef idx="1">
+            <a:schemeClr val="accent1"/>
+          </a:lnRef>
+          <a:fillRef idx="3">
+            <a:schemeClr val="accent1"/>
+          </a:fillRef>
+          <a:effectRef idx="2">
+            <a:schemeClr val="accent1"/>
+          </a:effectRef>
+          <a:fontRef idx="minor">
+            <a:schemeClr val="lt1"/>
+          </a:fontRef>
+        </p:style>
+        <p:txBody>
+          <a:bodyPr rtlCol="0" anchor="ctr"/>
+          <a:lstStyle/>
+          <a:p>
+            <a:pPr algn="ctr"/>
+          </a:p>
+        </p:txBody>
+      </p:sp>
+      <p:sp>
+        <p:nvSpPr>
+          <p:cNvPr id="15" name="Rectangle 14"/>
+          <p:cNvSpPr/>
+          <p:nvPr/>
+        </p:nvSpPr>
+        <p:spPr>
+          <a:xfrm>
+            <a:off x="640080" y="2761488"/>
+            <a:ext cx="73152" cy="274320"/>
+          </a:xfrm>
+          <a:prstGeom prst="rect">
+            <a:avLst/>
+          </a:prstGeom>
+          <a:solidFill>
+            <a:srgbClr val="269CCB"/>
+          </a:solidFill>
+          <a:ln>
+            <a:noFill/>
+          </a:ln>
+        </p:spPr>
+        <p:style>
+          <a:lnRef idx="1">
+            <a:schemeClr val="accent1"/>
+          </a:lnRef>
+          <a:fillRef idx="3">
+            <a:schemeClr val="accent1"/>
+          </a:fillRef>
+          <a:effectRef idx="2">
+            <a:schemeClr val="accent1"/>
+          </a:effectRef>
+          <a:fontRef idx="minor">
+            <a:schemeClr val="lt1"/>
+          </a:fontRef>
+        </p:style>
+        <p:txBody>
+          <a:bodyPr rtlCol="0" anchor="ctr"/>
+          <a:lstStyle/>
+          <a:p>
+            <a:pPr algn="ctr"/>
+          </a:p>
+        </p:txBody>
+      </p:sp>
+      <p:sp>
+        <p:nvSpPr>
+          <p:cNvPr id="16" name="TextBox 15"/>
+          <p:cNvSpPr txBox="1"/>
+          <p:nvPr/>
+        </p:nvSpPr>
+        <p:spPr>
+          <a:xfrm>
+            <a:off x="1097280" y="2706624"/>
+            <a:ext cx="10362895" cy="402336"/>
+          </a:xfrm>
+          <a:prstGeom prst="rect">
+            <a:avLst/>
+          </a:prstGeom>
+          <a:noFill/>
+        </p:spPr>
+        <p:txBody>
+          <a:bodyPr wrap="square" anchor="ctr"/>
+          <a:lstStyle/>
+          <a:p>
+            <a:r>
+              <a:rPr sz="1500" b="0" i="0">
+                <a:solidFill>
+                  <a:srgbClr val="333333"/>
+                </a:solidFill>
+                <a:latin typeface="Calibri"/>
+              </a:rPr>
+              <a:t>En su diagrama de actividad se puede saber, mirando solo la calle, quien es responsable de cada paso y cual de esos pasos ocurre sin tocar el computador?</a:t>
+            </a:r>
+          </a:p>
+        </p:txBody>
+      </p:sp>
+      <p:sp>
+        <p:nvSpPr>
+          <p:cNvPr id="17" name="TextBox 16"/>
+          <p:cNvSpPr txBox="1"/>
+          <p:nvPr/>
+        </p:nvSpPr>
+        <p:spPr>
+          <a:xfrm>
+            <a:off x="11185855" y="6473952"/>
+            <a:ext cx="640080" cy="274320"/>
           </a:xfrm>
           <a:prstGeom prst="rect">
             <a:avLst/>
@@ -6261,65 +7742,141 @@
           </a:bodyPr>
           <a:lstStyle/>
           <a:p>
-            <a:pPr algn="ctr">
-              <a:spcAft>
-                <a:spcPts val="600"/>
-              </a:spcAft>
-            </a:pPr>
-            <a:r>
-              <a:rPr sz="1600" b="0" i="0">
-                <a:solidFill>
-                  <a:srgbClr val="333333"/>
-                </a:solidFill>
-                <a:latin typeface="Calibri"/>
-              </a:rPr>
-              <a:t>Queda modelada la dinamica de VetCare: el diagrama de secuencia del caso de uso Agendar cita y el diagrama de actividad del proceso de atencion en el consultorio.</a:t>
-            </a:r>
-          </a:p>
-          <a:p>
-            <a:pPr algn="ctr">
-              <a:spcAft>
-                <a:spcPts val="600"/>
-              </a:spcAft>
-            </a:pPr>
-            <a:r>
-              <a:rPr sz="1600" b="0" i="0">
-                <a:solidFill>
-                  <a:srgbClr val="333333"/>
-                </a:solidFill>
-                <a:latin typeface="Calibri"/>
-              </a:rPr>
-              <a:t>Entregable: Un PDF con el diagrama de secuencia de Agendar cita incluyendo el fragmento alt para horario ocupado, el diagrama de actividad del proceso de atencion con calles por rol, y la tabla que mapea cada mensaje del diagrama de secuencia a una operacion del diagrama de clases, subido a la plataforma del curso.</a:t>
-            </a:r>
-          </a:p>
-          <a:p>
-            <a:pPr algn="ctr">
-              <a:spcAft>
-                <a:spcPts val="600"/>
-              </a:spcAft>
-            </a:pPr>
-            <a:r>
-              <a:rPr sz="1600" b="0" i="0">
-                <a:solidFill>
-                  <a:srgbClr val="333333"/>
-                </a:solidFill>
-                <a:latin typeface="Calibri"/>
-              </a:rPr>
-              <a:t>Siguiente clase: continuamos el hilo del PI</a:t>
-            </a:r>
-          </a:p>
-        </p:txBody>
-      </p:sp>
-      <p:sp>
-        <p:nvSpPr>
-          <p:cNvPr id="6" name="TextBox 5"/>
+            <a:pPr algn="r"/>
+            <a:r>
+              <a:rPr sz="1100" b="0" i="0">
+                <a:solidFill>
+                  <a:srgbClr val="666666"/>
+                </a:solidFill>
+                <a:latin typeface="Calibri"/>
+              </a:rPr>
+              <a:t>17</a:t>
+            </a:r>
+          </a:p>
+        </p:txBody>
+      </p:sp>
+    </p:spTree>
+  </p:cSld>
+  <p:clrMapOvr>
+    <a:masterClrMapping/>
+  </p:clrMapOvr>
+</p:sld>
+</file>
+
+<file path=ppt/slides/slide18.xml><?xml version="1.0" encoding="utf-8"?>
+<p:sld xmlns:a="http://schemas.openxmlformats.org/drawingml/2006/main" xmlns:p="http://schemas.openxmlformats.org/presentationml/2006/main" xmlns:r="http://schemas.openxmlformats.org/officeDocument/2006/relationships">
+  <p:cSld>
+    <p:bg>
+      <p:bgPr>
+        <a:solidFill>
+          <a:srgbClr val="FFFFFF"/>
+        </a:solidFill>
+        <a:effectLst/>
+      </p:bgPr>
+    </p:bg>
+    <p:spTree>
+      <p:nvGrpSpPr>
+        <p:cNvPr id="1" name=""/>
+        <p:cNvGrpSpPr/>
+        <p:nvPr/>
+      </p:nvGrpSpPr>
+      <p:grpSpPr/>
+      <p:sp>
+        <p:nvSpPr>
+          <p:cNvPr id="2" name="Rectangle 1"/>
+          <p:cNvSpPr/>
+          <p:nvPr/>
+        </p:nvSpPr>
+        <p:spPr>
+          <a:xfrm>
+            <a:off x="0" y="0"/>
+            <a:ext cx="12191695" cy="960120"/>
+          </a:xfrm>
+          <a:prstGeom prst="rect">
+            <a:avLst/>
+          </a:prstGeom>
+          <a:solidFill>
+            <a:srgbClr val="095292"/>
+          </a:solidFill>
+          <a:ln>
+            <a:noFill/>
+          </a:ln>
+        </p:spPr>
+        <p:style>
+          <a:lnRef idx="1">
+            <a:schemeClr val="accent1"/>
+          </a:lnRef>
+          <a:fillRef idx="3">
+            <a:schemeClr val="accent1"/>
+          </a:fillRef>
+          <a:effectRef idx="2">
+            <a:schemeClr val="accent1"/>
+          </a:effectRef>
+          <a:fontRef idx="minor">
+            <a:schemeClr val="lt1"/>
+          </a:fontRef>
+        </p:style>
+        <p:txBody>
+          <a:bodyPr rtlCol="0" anchor="ctr"/>
+          <a:lstStyle/>
+          <a:p>
+            <a:pPr algn="ctr"/>
+          </a:p>
+        </p:txBody>
+      </p:sp>
+      <p:sp>
+        <p:nvSpPr>
+          <p:cNvPr id="3" name="Rectangle 2"/>
+          <p:cNvSpPr/>
+          <p:nvPr/>
+        </p:nvSpPr>
+        <p:spPr>
+          <a:xfrm>
+            <a:off x="0" y="960120"/>
+            <a:ext cx="12191695" cy="41148"/>
+          </a:xfrm>
+          <a:prstGeom prst="rect">
+            <a:avLst/>
+          </a:prstGeom>
+          <a:solidFill>
+            <a:srgbClr val="FFD000"/>
+          </a:solidFill>
+          <a:ln>
+            <a:noFill/>
+          </a:ln>
+        </p:spPr>
+        <p:style>
+          <a:lnRef idx="1">
+            <a:schemeClr val="accent1"/>
+          </a:lnRef>
+          <a:fillRef idx="3">
+            <a:schemeClr val="accent1"/>
+          </a:fillRef>
+          <a:effectRef idx="2">
+            <a:schemeClr val="accent1"/>
+          </a:effectRef>
+          <a:fontRef idx="minor">
+            <a:schemeClr val="lt1"/>
+          </a:fontRef>
+        </p:style>
+        <p:txBody>
+          <a:bodyPr rtlCol="0" anchor="ctr"/>
+          <a:lstStyle/>
+          <a:p>
+            <a:pPr algn="ctr"/>
+          </a:p>
+        </p:txBody>
+      </p:sp>
+      <p:sp>
+        <p:nvSpPr>
+          <p:cNvPr id="4" name="TextBox 3"/>
           <p:cNvSpPr txBox="1"/>
           <p:nvPr/>
         </p:nvSpPr>
         <p:spPr>
           <a:xfrm>
-            <a:off x="457200" y="4754880"/>
-            <a:ext cx="11277295" cy="640080"/>
+            <a:off x="457200" y="164592"/>
+            <a:ext cx="11277295" cy="502920"/>
           </a:xfrm>
           <a:prstGeom prst="rect">
             <a:avLst/>
@@ -6332,15 +7889,871 @@
           </a:bodyPr>
           <a:lstStyle/>
           <a:p>
+            <a:r>
+              <a:rPr sz="2600" b="1" i="0">
+                <a:solidFill>
+                  <a:srgbClr val="FFFFFF"/>
+                </a:solidFill>
+                <a:latin typeface="Calibri"/>
+              </a:rPr>
+              <a:t>Criterios de exito / entregable</a:t>
+            </a:r>
+          </a:p>
+        </p:txBody>
+      </p:sp>
+      <p:sp>
+        <p:nvSpPr>
+          <p:cNvPr id="5" name="TextBox 4"/>
+          <p:cNvSpPr txBox="1"/>
+          <p:nvPr/>
+        </p:nvSpPr>
+        <p:spPr>
+          <a:xfrm>
+            <a:off x="457200" y="1170432"/>
+            <a:ext cx="11277295" cy="5230368"/>
+          </a:xfrm>
+          <a:prstGeom prst="rect">
+            <a:avLst/>
+          </a:prstGeom>
+          <a:noFill/>
+        </p:spPr>
+        <p:txBody>
+          <a:bodyPr wrap="square">
+            <a:spAutoFit/>
+          </a:bodyPr>
+          <a:lstStyle/>
+          <a:p>
+            <a:pPr>
+              <a:spcAft>
+                <a:spcPts val="800"/>
+              </a:spcAft>
+            </a:pPr>
+            <a:r>
+              <a:rPr sz="2000" b="0" i="0">
+                <a:solidFill>
+                  <a:srgbClr val="333333"/>
+                </a:solidFill>
+                <a:latin typeface="Calibri"/>
+              </a:rPr>
+              <a:t>–   </a:t>
+            </a:r>
+            <a:r>
+              <a:rPr sz="2000" b="1" i="0">
+                <a:solidFill>
+                  <a:srgbClr val="333333"/>
+                </a:solidFill>
+                <a:latin typeface="Calibri"/>
+              </a:rPr>
+              <a:t>Entregable:</a:t>
+            </a:r>
+            <a:r>
+              <a:rPr sz="2000" b="0" i="0">
+                <a:solidFill>
+                  <a:srgbClr val="333333"/>
+                </a:solidFill>
+                <a:latin typeface="Calibri"/>
+              </a:rPr>
+              <a:t> Un PDF con el diagrama de secuencia de Agendar cita incluyendo el fragmento alt para horario ocupado, el diagrama de actividad del proceso de atencion con calles por rol, y la tabla que mapea cada mensaje del diagrama de secuencia a una operacion del diagrama de clases, subido a la plataforma del curso.</a:t>
+            </a:r>
+          </a:p>
+          <a:p>
+            <a:pPr>
+              <a:spcAft>
+                <a:spcPts val="800"/>
+              </a:spcAft>
+            </a:pPr>
+            <a:r>
+              <a:rPr sz="2000" b="0" i="0">
+                <a:solidFill>
+                  <a:srgbClr val="333333"/>
+                </a:solidFill>
+                <a:latin typeface="Calibri"/>
+              </a:rPr>
+              <a:t>–   </a:t>
+            </a:r>
+            <a:r>
+              <a:rPr sz="2000" b="1" i="0">
+                <a:solidFill>
+                  <a:srgbClr val="333333"/>
+                </a:solidFill>
+                <a:latin typeface="Calibri"/>
+              </a:rPr>
+              <a:t>Exito:</a:t>
+            </a:r>
+            <a:r>
+              <a:rPr sz="2000" b="0" i="0">
+                <a:solidFill>
+                  <a:srgbClr val="333333"/>
+                </a:solidFill>
+                <a:latin typeface="Calibri"/>
+              </a:rPr>
+              <a:t> El diagrama de secuencia reproduce el orden exacto del flujo principal de CU-04 y no inventa pasos que no esten en la especificacion.</a:t>
+            </a:r>
+          </a:p>
+          <a:p>
+            <a:pPr>
+              <a:spcAft>
+                <a:spcPts val="800"/>
+              </a:spcAft>
+            </a:pPr>
+            <a:r>
+              <a:rPr sz="2000" b="0" i="0">
+                <a:solidFill>
+                  <a:srgbClr val="333333"/>
+                </a:solidFill>
+                <a:latin typeface="Calibri"/>
+              </a:rPr>
+              <a:t>–   </a:t>
+            </a:r>
+            <a:r>
+              <a:rPr sz="2000" b="1" i="0">
+                <a:solidFill>
+                  <a:srgbClr val="333333"/>
+                </a:solidFill>
+                <a:latin typeface="Calibri"/>
+              </a:rPr>
+              <a:t>Exito:</a:t>
+            </a:r>
+            <a:r>
+              <a:rPr sz="2000" b="0" i="0">
+                <a:solidFill>
+                  <a:srgbClr val="333333"/>
+                </a:solidFill>
+                <a:latin typeface="Calibri"/>
+              </a:rPr>
+              <a:t> Todos los participantes del diagrama corresponden a actores legitimos o a clases existentes en el diagrama de clases, y aparecen las flechas de retorno con el dato que devuelven.</a:t>
+            </a:r>
+          </a:p>
+          <a:p>
+            <a:pPr>
+              <a:spcAft>
+                <a:spcPts val="800"/>
+              </a:spcAft>
+            </a:pPr>
+            <a:r>
+              <a:rPr sz="2000" b="0" i="0">
+                <a:solidFill>
+                  <a:srgbClr val="333333"/>
+                </a:solidFill>
+                <a:latin typeface="Calibri"/>
+              </a:rPr>
+              <a:t>–   </a:t>
+            </a:r>
+            <a:r>
+              <a:rPr sz="2000" b="1" i="0">
+                <a:solidFill>
+                  <a:srgbClr val="333333"/>
+                </a:solidFill>
+                <a:latin typeface="Calibri"/>
+              </a:rPr>
+              <a:t>Exito:</a:t>
+            </a:r>
+            <a:r>
+              <a:rPr sz="2000" b="0" i="0">
+                <a:solidFill>
+                  <a:srgbClr val="333333"/>
+                </a:solidFill>
+                <a:latin typeface="Calibri"/>
+              </a:rPr>
+              <a:t> Existe al menos un fragmento alt con sus dos condiciones de guarda escritas, coherente con un flujo alterno ya documentado.</a:t>
+            </a:r>
+          </a:p>
+          <a:p>
+            <a:pPr>
+              <a:spcAft>
+                <a:spcPts val="800"/>
+              </a:spcAft>
+            </a:pPr>
+            <a:r>
+              <a:rPr sz="2000" b="0" i="0">
+                <a:solidFill>
+                  <a:srgbClr val="333333"/>
+                </a:solidFill>
+                <a:latin typeface="Calibri"/>
+              </a:rPr>
+              <a:t>–   </a:t>
+            </a:r>
+            <a:r>
+              <a:rPr sz="2000" b="1" i="0">
+                <a:solidFill>
+                  <a:srgbClr val="333333"/>
+                </a:solidFill>
+                <a:latin typeface="Calibri"/>
+              </a:rPr>
+              <a:t>Exito:</a:t>
+            </a:r>
+            <a:r>
+              <a:rPr sz="2000" b="0" i="0">
+                <a:solidFill>
+                  <a:srgbClr val="333333"/>
+                </a:solidFill>
+                <a:latin typeface="Calibri"/>
+              </a:rPr>
+              <a:t> El diagrama de actividad tiene calles por rol, minimo dos decisiones con condiciones entre corchetes y una bifurcacion en paralelo, y la tabla de mapeo mensaje a operacion no tiene filas incompletas.</a:t>
+            </a:r>
+          </a:p>
+          <a:p>
+            <a:pPr>
+              <a:spcAft>
+                <a:spcPts val="800"/>
+              </a:spcAft>
+            </a:pPr>
+            <a:r>
+              <a:rPr sz="2000" b="0" i="0">
+                <a:solidFill>
+                  <a:srgbClr val="333333"/>
+                </a:solidFill>
+                <a:latin typeface="Calibri"/>
+              </a:rPr>
+              <a:t>–   </a:t>
+            </a:r>
+            <a:r>
+              <a:rPr sz="2000" b="1" i="0">
+                <a:solidFill>
+                  <a:srgbClr val="333333"/>
+                </a:solidFill>
+                <a:latin typeface="Calibri"/>
+              </a:rPr>
+              <a:t>Entrega en la plataforma del curso</a:t>
+            </a:r>
+            <a:r>
+              <a:rPr sz="2000" b="0" i="0">
+                <a:solidFill>
+                  <a:srgbClr val="333333"/>
+                </a:solidFill>
+                <a:latin typeface="Calibri"/>
+              </a:rPr>
+              <a:t> — en la fecha que indique el docente.</a:t>
+            </a:r>
+          </a:p>
+        </p:txBody>
+      </p:sp>
+      <p:sp>
+        <p:nvSpPr>
+          <p:cNvPr id="6" name="TextBox 5"/>
+          <p:cNvSpPr txBox="1"/>
+          <p:nvPr/>
+        </p:nvSpPr>
+        <p:spPr>
+          <a:xfrm>
+            <a:off x="11185855" y="6473952"/>
+            <a:ext cx="640080" cy="274320"/>
+          </a:xfrm>
+          <a:prstGeom prst="rect">
+            <a:avLst/>
+          </a:prstGeom>
+          <a:noFill/>
+        </p:spPr>
+        <p:txBody>
+          <a:bodyPr wrap="square">
+            <a:spAutoFit/>
+          </a:bodyPr>
+          <a:lstStyle/>
+          <a:p>
+            <a:pPr algn="r"/>
+            <a:r>
+              <a:rPr sz="1100" b="0" i="0">
+                <a:solidFill>
+                  <a:srgbClr val="666666"/>
+                </a:solidFill>
+                <a:latin typeface="Calibri"/>
+              </a:rPr>
+              <a:t>18</a:t>
+            </a:r>
+          </a:p>
+        </p:txBody>
+      </p:sp>
+    </p:spTree>
+  </p:cSld>
+  <p:clrMapOvr>
+    <a:masterClrMapping/>
+  </p:clrMapOvr>
+</p:sld>
+</file>
+
+<file path=ppt/slides/slide19.xml><?xml version="1.0" encoding="utf-8"?>
+<p:sld xmlns:a="http://schemas.openxmlformats.org/drawingml/2006/main" xmlns:p="http://schemas.openxmlformats.org/presentationml/2006/main" xmlns:r="http://schemas.openxmlformats.org/officeDocument/2006/relationships">
+  <p:cSld>
+    <p:bg>
+      <p:bgPr>
+        <a:solidFill>
+          <a:srgbClr val="FFFFFF"/>
+        </a:solidFill>
+        <a:effectLst/>
+      </p:bgPr>
+    </p:bg>
+    <p:spTree>
+      <p:nvGrpSpPr>
+        <p:cNvPr id="1" name=""/>
+        <p:cNvGrpSpPr/>
+        <p:nvPr/>
+      </p:nvGrpSpPr>
+      <p:grpSpPr/>
+      <p:sp>
+        <p:nvSpPr>
+          <p:cNvPr id="2" name="Rectangle 1"/>
+          <p:cNvSpPr/>
+          <p:nvPr/>
+        </p:nvSpPr>
+        <p:spPr>
+          <a:xfrm>
+            <a:off x="0" y="0"/>
+            <a:ext cx="12191695" cy="960120"/>
+          </a:xfrm>
+          <a:prstGeom prst="rect">
+            <a:avLst/>
+          </a:prstGeom>
+          <a:solidFill>
+            <a:srgbClr val="095292"/>
+          </a:solidFill>
+          <a:ln>
+            <a:noFill/>
+          </a:ln>
+        </p:spPr>
+        <p:style>
+          <a:lnRef idx="1">
+            <a:schemeClr val="accent1"/>
+          </a:lnRef>
+          <a:fillRef idx="3">
+            <a:schemeClr val="accent1"/>
+          </a:fillRef>
+          <a:effectRef idx="2">
+            <a:schemeClr val="accent1"/>
+          </a:effectRef>
+          <a:fontRef idx="minor">
+            <a:schemeClr val="lt1"/>
+          </a:fontRef>
+        </p:style>
+        <p:txBody>
+          <a:bodyPr rtlCol="0" anchor="ctr"/>
+          <a:lstStyle/>
+          <a:p>
             <a:pPr algn="ctr"/>
-            <a:r>
-              <a:rPr sz="2000" b="1" i="0">
+          </a:p>
+        </p:txBody>
+      </p:sp>
+      <p:sp>
+        <p:nvSpPr>
+          <p:cNvPr id="3" name="Rectangle 2"/>
+          <p:cNvSpPr/>
+          <p:nvPr/>
+        </p:nvSpPr>
+        <p:spPr>
+          <a:xfrm>
+            <a:off x="0" y="960120"/>
+            <a:ext cx="12191695" cy="41148"/>
+          </a:xfrm>
+          <a:prstGeom prst="rect">
+            <a:avLst/>
+          </a:prstGeom>
+          <a:solidFill>
+            <a:srgbClr val="FFD000"/>
+          </a:solidFill>
+          <a:ln>
+            <a:noFill/>
+          </a:ln>
+        </p:spPr>
+        <p:style>
+          <a:lnRef idx="1">
+            <a:schemeClr val="accent1"/>
+          </a:lnRef>
+          <a:fillRef idx="3">
+            <a:schemeClr val="accent1"/>
+          </a:fillRef>
+          <a:effectRef idx="2">
+            <a:schemeClr val="accent1"/>
+          </a:effectRef>
+          <a:fontRef idx="minor">
+            <a:schemeClr val="lt1"/>
+          </a:fontRef>
+        </p:style>
+        <p:txBody>
+          <a:bodyPr rtlCol="0" anchor="ctr"/>
+          <a:lstStyle/>
+          <a:p>
+            <a:pPr algn="ctr"/>
+          </a:p>
+        </p:txBody>
+      </p:sp>
+      <p:sp>
+        <p:nvSpPr>
+          <p:cNvPr id="4" name="TextBox 3"/>
+          <p:cNvSpPr txBox="1"/>
+          <p:nvPr/>
+        </p:nvSpPr>
+        <p:spPr>
+          <a:xfrm>
+            <a:off x="457200" y="164592"/>
+            <a:ext cx="11277295" cy="502920"/>
+          </a:xfrm>
+          <a:prstGeom prst="rect">
+            <a:avLst/>
+          </a:prstGeom>
+          <a:noFill/>
+        </p:spPr>
+        <p:txBody>
+          <a:bodyPr wrap="square">
+            <a:spAutoFit/>
+          </a:bodyPr>
+          <a:lstStyle/>
+          <a:p>
+            <a:r>
+              <a:rPr sz="2600" b="1" i="0">
+                <a:solidFill>
+                  <a:srgbClr val="FFFFFF"/>
+                </a:solidFill>
+                <a:latin typeface="Calibri"/>
+              </a:rPr>
+              <a:t>Para el PI esta semana</a:t>
+            </a:r>
+          </a:p>
+        </p:txBody>
+      </p:sp>
+      <p:sp>
+        <p:nvSpPr>
+          <p:cNvPr id="5" name="Rounded Rectangle 4"/>
+          <p:cNvSpPr/>
+          <p:nvPr/>
+        </p:nvSpPr>
+        <p:spPr>
+          <a:xfrm>
+            <a:off x="457200" y="1261872"/>
+            <a:ext cx="11277295" cy="1051560"/>
+          </a:xfrm>
+          <a:prstGeom prst="roundRect">
+            <a:avLst>
+              <a:gd name="adj" fmla="val 12000"/>
+            </a:avLst>
+          </a:prstGeom>
+          <a:solidFill>
+            <a:srgbClr val="E8F4FA"/>
+          </a:solidFill>
+          <a:ln>
+            <a:noFill/>
+          </a:ln>
+        </p:spPr>
+        <p:style>
+          <a:lnRef idx="1">
+            <a:schemeClr val="accent1"/>
+          </a:lnRef>
+          <a:fillRef idx="3">
+            <a:schemeClr val="accent1"/>
+          </a:fillRef>
+          <a:effectRef idx="2">
+            <a:schemeClr val="accent1"/>
+          </a:effectRef>
+          <a:fontRef idx="minor">
+            <a:schemeClr val="lt1"/>
+          </a:fontRef>
+        </p:style>
+        <p:txBody>
+          <a:bodyPr rtlCol="0" anchor="ctr"/>
+          <a:lstStyle/>
+          <a:p>
+            <a:pPr algn="ctr"/>
+          </a:p>
+        </p:txBody>
+      </p:sp>
+      <p:sp>
+        <p:nvSpPr>
+          <p:cNvPr id="6" name="Rectangle 5"/>
+          <p:cNvSpPr/>
+          <p:nvPr/>
+        </p:nvSpPr>
+        <p:spPr>
+          <a:xfrm>
+            <a:off x="457200" y="1261872"/>
+            <a:ext cx="128016" cy="1051560"/>
+          </a:xfrm>
+          <a:prstGeom prst="rect">
+            <a:avLst/>
+          </a:prstGeom>
+          <a:solidFill>
+            <a:srgbClr val="269CCB"/>
+          </a:solidFill>
+          <a:ln>
+            <a:noFill/>
+          </a:ln>
+        </p:spPr>
+        <p:style>
+          <a:lnRef idx="1">
+            <a:schemeClr val="accent1"/>
+          </a:lnRef>
+          <a:fillRef idx="3">
+            <a:schemeClr val="accent1"/>
+          </a:fillRef>
+          <a:effectRef idx="2">
+            <a:schemeClr val="accent1"/>
+          </a:effectRef>
+          <a:fontRef idx="minor">
+            <a:schemeClr val="lt1"/>
+          </a:fontRef>
+        </p:style>
+        <p:txBody>
+          <a:bodyPr rtlCol="0" anchor="ctr"/>
+          <a:lstStyle/>
+          <a:p>
+            <a:pPr algn="ctr"/>
+          </a:p>
+        </p:txBody>
+      </p:sp>
+      <p:sp>
+        <p:nvSpPr>
+          <p:cNvPr id="7" name="TextBox 6"/>
+          <p:cNvSpPr txBox="1"/>
+          <p:nvPr/>
+        </p:nvSpPr>
+        <p:spPr>
+          <a:xfrm>
+            <a:off x="777240" y="1399031"/>
+            <a:ext cx="10774375" cy="822959"/>
+          </a:xfrm>
+          <a:prstGeom prst="rect">
+            <a:avLst/>
+          </a:prstGeom>
+          <a:noFill/>
+        </p:spPr>
+        <p:txBody>
+          <a:bodyPr wrap="square">
+            <a:spAutoFit/>
+          </a:bodyPr>
+          <a:lstStyle/>
+          <a:p>
+            <a:r>
+              <a:rPr sz="1200" b="1" i="0">
                 <a:solidFill>
                   <a:srgbClr val="269CCB"/>
                 </a:solidFill>
                 <a:latin typeface="Calibri"/>
               </a:rPr>
-              <a:t>Teoria al servicio del proyecto</a:t>
+              <a:t>Info</a:t>
+            </a:r>
+          </a:p>
+          <a:p>
+            <a:pPr>
+              <a:spcBef>
+                <a:spcPts val="400"/>
+              </a:spcBef>
+            </a:pPr>
+            <a:r>
+              <a:rPr sz="1400" b="0" i="0">
+                <a:solidFill>
+                  <a:srgbClr val="333333"/>
+                </a:solidFill>
+                <a:latin typeface="Calibri"/>
+              </a:rPr>
+              <a:t>Hito: Queda modelada la dinamica de VetCare: el diagrama de secuencia del caso de uso Agendar cita y el diagrama de actividad del proceso de atencion en el consultorio.</a:t>
+            </a:r>
+          </a:p>
+        </p:txBody>
+      </p:sp>
+      <p:sp>
+        <p:nvSpPr>
+          <p:cNvPr id="8" name="Rounded Rectangle 7"/>
+          <p:cNvSpPr/>
+          <p:nvPr/>
+        </p:nvSpPr>
+        <p:spPr>
+          <a:xfrm>
+            <a:off x="457200" y="2478024"/>
+            <a:ext cx="11277295" cy="1051560"/>
+          </a:xfrm>
+          <a:prstGeom prst="roundRect">
+            <a:avLst>
+              <a:gd name="adj" fmla="val 12000"/>
+            </a:avLst>
+          </a:prstGeom>
+          <a:solidFill>
+            <a:srgbClr val="FFF8E1"/>
+          </a:solidFill>
+          <a:ln>
+            <a:noFill/>
+          </a:ln>
+        </p:spPr>
+        <p:style>
+          <a:lnRef idx="1">
+            <a:schemeClr val="accent1"/>
+          </a:lnRef>
+          <a:fillRef idx="3">
+            <a:schemeClr val="accent1"/>
+          </a:fillRef>
+          <a:effectRef idx="2">
+            <a:schemeClr val="accent1"/>
+          </a:effectRef>
+          <a:fontRef idx="minor">
+            <a:schemeClr val="lt1"/>
+          </a:fontRef>
+        </p:style>
+        <p:txBody>
+          <a:bodyPr rtlCol="0" anchor="ctr"/>
+          <a:lstStyle/>
+          <a:p>
+            <a:pPr algn="ctr"/>
+          </a:p>
+        </p:txBody>
+      </p:sp>
+      <p:sp>
+        <p:nvSpPr>
+          <p:cNvPr id="9" name="Rectangle 8"/>
+          <p:cNvSpPr/>
+          <p:nvPr/>
+        </p:nvSpPr>
+        <p:spPr>
+          <a:xfrm>
+            <a:off x="457200" y="2478024"/>
+            <a:ext cx="128016" cy="1051560"/>
+          </a:xfrm>
+          <a:prstGeom prst="rect">
+            <a:avLst/>
+          </a:prstGeom>
+          <a:solidFill>
+            <a:srgbClr val="FFD000"/>
+          </a:solidFill>
+          <a:ln>
+            <a:noFill/>
+          </a:ln>
+        </p:spPr>
+        <p:style>
+          <a:lnRef idx="1">
+            <a:schemeClr val="accent1"/>
+          </a:lnRef>
+          <a:fillRef idx="3">
+            <a:schemeClr val="accent1"/>
+          </a:fillRef>
+          <a:effectRef idx="2">
+            <a:schemeClr val="accent1"/>
+          </a:effectRef>
+          <a:fontRef idx="minor">
+            <a:schemeClr val="lt1"/>
+          </a:fontRef>
+        </p:style>
+        <p:txBody>
+          <a:bodyPr rtlCol="0" anchor="ctr"/>
+          <a:lstStyle/>
+          <a:p>
+            <a:pPr algn="ctr"/>
+          </a:p>
+        </p:txBody>
+      </p:sp>
+      <p:sp>
+        <p:nvSpPr>
+          <p:cNvPr id="10" name="TextBox 9"/>
+          <p:cNvSpPr txBox="1"/>
+          <p:nvPr/>
+        </p:nvSpPr>
+        <p:spPr>
+          <a:xfrm>
+            <a:off x="777240" y="2615184"/>
+            <a:ext cx="10774375" cy="822959"/>
+          </a:xfrm>
+          <a:prstGeom prst="rect">
+            <a:avLst/>
+          </a:prstGeom>
+          <a:noFill/>
+        </p:spPr>
+        <p:txBody>
+          <a:bodyPr wrap="square">
+            <a:spAutoFit/>
+          </a:bodyPr>
+          <a:lstStyle/>
+          <a:p>
+            <a:r>
+              <a:rPr sz="1200" b="1" i="0">
+                <a:solidFill>
+                  <a:srgbClr val="FFD000"/>
+                </a:solidFill>
+                <a:latin typeface="Calibri"/>
+              </a:rPr>
+              <a:t>Aclaración</a:t>
+            </a:r>
+          </a:p>
+          <a:p>
+            <a:pPr>
+              <a:spcBef>
+                <a:spcPts val="400"/>
+              </a:spcBef>
+            </a:pPr>
+            <a:r>
+              <a:rPr sz="1400" b="0" i="0">
+                <a:solidFill>
+                  <a:srgbClr val="333333"/>
+                </a:solidFill>
+                <a:latin typeface="Calibri"/>
+              </a:rPr>
+              <a:t>Enunciado completo: Clases/Proyecto Integrador/ (VetCare).</a:t>
+            </a:r>
+          </a:p>
+        </p:txBody>
+      </p:sp>
+      <p:sp>
+        <p:nvSpPr>
+          <p:cNvPr id="11" name="Rounded Rectangle 10"/>
+          <p:cNvSpPr/>
+          <p:nvPr/>
+        </p:nvSpPr>
+        <p:spPr>
+          <a:xfrm>
+            <a:off x="457200" y="3694176"/>
+            <a:ext cx="11277295" cy="1051560"/>
+          </a:xfrm>
+          <a:prstGeom prst="roundRect">
+            <a:avLst>
+              <a:gd name="adj" fmla="val 12000"/>
+            </a:avLst>
+          </a:prstGeom>
+          <a:solidFill>
+            <a:srgbClr val="FBE4E4"/>
+          </a:solidFill>
+          <a:ln>
+            <a:noFill/>
+          </a:ln>
+        </p:spPr>
+        <p:style>
+          <a:lnRef idx="1">
+            <a:schemeClr val="accent1"/>
+          </a:lnRef>
+          <a:fillRef idx="3">
+            <a:schemeClr val="accent1"/>
+          </a:fillRef>
+          <a:effectRef idx="2">
+            <a:schemeClr val="accent1"/>
+          </a:effectRef>
+          <a:fontRef idx="minor">
+            <a:schemeClr val="lt1"/>
+          </a:fontRef>
+        </p:style>
+        <p:txBody>
+          <a:bodyPr rtlCol="0" anchor="ctr"/>
+          <a:lstStyle/>
+          <a:p>
+            <a:pPr algn="ctr"/>
+          </a:p>
+        </p:txBody>
+      </p:sp>
+      <p:sp>
+        <p:nvSpPr>
+          <p:cNvPr id="12" name="Rectangle 11"/>
+          <p:cNvSpPr/>
+          <p:nvPr/>
+        </p:nvSpPr>
+        <p:spPr>
+          <a:xfrm>
+            <a:off x="457200" y="3694176"/>
+            <a:ext cx="128016" cy="1051560"/>
+          </a:xfrm>
+          <a:prstGeom prst="rect">
+            <a:avLst/>
+          </a:prstGeom>
+          <a:solidFill>
+            <a:srgbClr val="A02030"/>
+          </a:solidFill>
+          <a:ln>
+            <a:noFill/>
+          </a:ln>
+        </p:spPr>
+        <p:style>
+          <a:lnRef idx="1">
+            <a:schemeClr val="accent1"/>
+          </a:lnRef>
+          <a:fillRef idx="3">
+            <a:schemeClr val="accent1"/>
+          </a:fillRef>
+          <a:effectRef idx="2">
+            <a:schemeClr val="accent1"/>
+          </a:effectRef>
+          <a:fontRef idx="minor">
+            <a:schemeClr val="lt1"/>
+          </a:fontRef>
+        </p:style>
+        <p:txBody>
+          <a:bodyPr rtlCol="0" anchor="ctr"/>
+          <a:lstStyle/>
+          <a:p>
+            <a:pPr algn="ctr"/>
+          </a:p>
+        </p:txBody>
+      </p:sp>
+      <p:sp>
+        <p:nvSpPr>
+          <p:cNvPr id="13" name="TextBox 12"/>
+          <p:cNvSpPr txBox="1"/>
+          <p:nvPr/>
+        </p:nvSpPr>
+        <p:spPr>
+          <a:xfrm>
+            <a:off x="777240" y="3831336"/>
+            <a:ext cx="10774375" cy="822959"/>
+          </a:xfrm>
+          <a:prstGeom prst="rect">
+            <a:avLst/>
+          </a:prstGeom>
+          <a:noFill/>
+        </p:spPr>
+        <p:txBody>
+          <a:bodyPr wrap="square">
+            <a:spAutoFit/>
+          </a:bodyPr>
+          <a:lstStyle/>
+          <a:p>
+            <a:r>
+              <a:rPr sz="1200" b="1" i="0">
+                <a:solidFill>
+                  <a:srgbClr val="A02030"/>
+                </a:solidFill>
+                <a:latin typeface="Calibri"/>
+              </a:rPr>
+              <a:t>Atención</a:t>
+            </a:r>
+          </a:p>
+          <a:p>
+            <a:pPr>
+              <a:spcBef>
+                <a:spcPts val="400"/>
+              </a:spcBef>
+            </a:pPr>
+            <a:r>
+              <a:rPr sz="1400" b="0" i="0">
+                <a:solidFill>
+                  <a:srgbClr val="333333"/>
+                </a:solidFill>
+                <a:latin typeface="Calibri"/>
+              </a:rPr>
+              <a:t>Entrega del taller, si el docente lo asigna · en la fecha que indique el docente.</a:t>
+            </a:r>
+          </a:p>
+        </p:txBody>
+      </p:sp>
+      <p:sp>
+        <p:nvSpPr>
+          <p:cNvPr id="14" name="TextBox 13"/>
+          <p:cNvSpPr txBox="1"/>
+          <p:nvPr/>
+        </p:nvSpPr>
+        <p:spPr>
+          <a:xfrm>
+            <a:off x="11185855" y="6473952"/>
+            <a:ext cx="640080" cy="274320"/>
+          </a:xfrm>
+          <a:prstGeom prst="rect">
+            <a:avLst/>
+          </a:prstGeom>
+          <a:noFill/>
+        </p:spPr>
+        <p:txBody>
+          <a:bodyPr wrap="square">
+            <a:spAutoFit/>
+          </a:bodyPr>
+          <a:lstStyle/>
+          <a:p>
+            <a:pPr algn="r"/>
+            <a:r>
+              <a:rPr sz="1100" b="0" i="0">
+                <a:solidFill>
+                  <a:srgbClr val="666666"/>
+                </a:solidFill>
+                <a:latin typeface="Calibri"/>
+              </a:rPr>
+              <a:t>19</a:t>
             </a:r>
           </a:p>
         </p:txBody>
@@ -6684,6 +9097,238 @@
 </p:sld>
 </file>
 
+<file path=ppt/slides/slide20.xml><?xml version="1.0" encoding="utf-8"?>
+<p:sld xmlns:a="http://schemas.openxmlformats.org/drawingml/2006/main" xmlns:p="http://schemas.openxmlformats.org/presentationml/2006/main" xmlns:r="http://schemas.openxmlformats.org/officeDocument/2006/relationships">
+  <p:cSld>
+    <p:bg>
+      <p:bgPr>
+        <a:solidFill>
+          <a:srgbClr val="FFFFFF"/>
+        </a:solidFill>
+        <a:effectLst/>
+      </p:bgPr>
+    </p:bg>
+    <p:spTree>
+      <p:nvGrpSpPr>
+        <p:cNvPr id="1" name=""/>
+        <p:cNvGrpSpPr/>
+        <p:nvPr/>
+      </p:nvGrpSpPr>
+      <p:grpSpPr/>
+      <p:sp>
+        <p:nvSpPr>
+          <p:cNvPr id="2" name="Rectangle 1"/>
+          <p:cNvSpPr/>
+          <p:nvPr/>
+        </p:nvSpPr>
+        <p:spPr>
+          <a:xfrm>
+            <a:off x="0" y="0"/>
+            <a:ext cx="12191695" cy="164592"/>
+          </a:xfrm>
+          <a:prstGeom prst="rect">
+            <a:avLst/>
+          </a:prstGeom>
+          <a:solidFill>
+            <a:srgbClr val="269CCB"/>
+          </a:solidFill>
+          <a:ln>
+            <a:noFill/>
+          </a:ln>
+        </p:spPr>
+        <p:style>
+          <a:lnRef idx="1">
+            <a:schemeClr val="accent1"/>
+          </a:lnRef>
+          <a:fillRef idx="3">
+            <a:schemeClr val="accent1"/>
+          </a:fillRef>
+          <a:effectRef idx="2">
+            <a:schemeClr val="accent1"/>
+          </a:effectRef>
+          <a:fontRef idx="minor">
+            <a:schemeClr val="lt1"/>
+          </a:fontRef>
+        </p:style>
+        <p:txBody>
+          <a:bodyPr rtlCol="0" anchor="ctr"/>
+          <a:lstStyle/>
+          <a:p>
+            <a:pPr algn="ctr"/>
+          </a:p>
+        </p:txBody>
+      </p:sp>
+      <p:pic>
+        <p:nvPicPr>
+          <p:cNvPr id="3" name="Picture 2" descr="logo_uniajc_color.png"/>
+          <p:cNvPicPr>
+            <a:picLocks noChangeAspect="1"/>
+          </p:cNvPicPr>
+          <p:nvPr/>
+        </p:nvPicPr>
+        <p:blipFill>
+          <a:blip r:embed="rId2"/>
+          <a:stretch>
+            <a:fillRect/>
+          </a:stretch>
+        </p:blipFill>
+        <p:spPr>
+          <a:xfrm>
+            <a:off x="10271455" y="5998464"/>
+            <a:ext cx="1463040" cy="643233"/>
+          </a:xfrm>
+          <a:prstGeom prst="rect">
+            <a:avLst/>
+          </a:prstGeom>
+        </p:spPr>
+      </p:pic>
+      <p:sp>
+        <p:nvSpPr>
+          <p:cNvPr id="4" name="TextBox 3"/>
+          <p:cNvSpPr txBox="1"/>
+          <p:nvPr/>
+        </p:nvSpPr>
+        <p:spPr>
+          <a:xfrm>
+            <a:off x="457200" y="1737360"/>
+            <a:ext cx="11277295" cy="1097280"/>
+          </a:xfrm>
+          <a:prstGeom prst="rect">
+            <a:avLst/>
+          </a:prstGeom>
+          <a:noFill/>
+        </p:spPr>
+        <p:txBody>
+          <a:bodyPr wrap="square" anchor="ctr"/>
+          <a:lstStyle/>
+          <a:p>
+            <a:pPr algn="ctr"/>
+            <a:r>
+              <a:rPr sz="3400" b="1" i="0">
+                <a:solidFill>
+                  <a:srgbClr val="095292"/>
+                </a:solidFill>
+                <a:latin typeface="Calibri"/>
+              </a:rPr>
+              <a:t>Clase 12 · VetCare avanza</a:t>
+            </a:r>
+          </a:p>
+        </p:txBody>
+      </p:sp>
+      <p:sp>
+        <p:nvSpPr>
+          <p:cNvPr id="5" name="TextBox 4"/>
+          <p:cNvSpPr txBox="1"/>
+          <p:nvPr/>
+        </p:nvSpPr>
+        <p:spPr>
+          <a:xfrm>
+            <a:off x="457200" y="3017520"/>
+            <a:ext cx="11277295" cy="1645920"/>
+          </a:xfrm>
+          <a:prstGeom prst="rect">
+            <a:avLst/>
+          </a:prstGeom>
+          <a:noFill/>
+        </p:spPr>
+        <p:txBody>
+          <a:bodyPr wrap="square">
+            <a:spAutoFit/>
+          </a:bodyPr>
+          <a:lstStyle/>
+          <a:p>
+            <a:pPr algn="ctr">
+              <a:spcAft>
+                <a:spcPts val="600"/>
+              </a:spcAft>
+            </a:pPr>
+            <a:r>
+              <a:rPr sz="1600" b="0" i="0">
+                <a:solidFill>
+                  <a:srgbClr val="333333"/>
+                </a:solidFill>
+                <a:latin typeface="Calibri"/>
+              </a:rPr>
+              <a:t>Queda modelada la dinamica de VetCare: el diagrama de secuencia del caso de uso Agendar cita y el diagrama de actividad del proceso de atencion en el consultorio.</a:t>
+            </a:r>
+          </a:p>
+          <a:p>
+            <a:pPr algn="ctr">
+              <a:spcAft>
+                <a:spcPts val="600"/>
+              </a:spcAft>
+            </a:pPr>
+            <a:r>
+              <a:rPr sz="1600" b="0" i="0">
+                <a:solidFill>
+                  <a:srgbClr val="333333"/>
+                </a:solidFill>
+                <a:latin typeface="Calibri"/>
+              </a:rPr>
+              <a:t>Entregable: Un PDF con el diagrama de secuencia de Agendar cita incluyendo el fragmento alt para horario ocupado, el diagrama de actividad del proceso de atencion con calles por rol, y la tabla que mapea cada mensaje del diagrama de secuencia a una operacion del diagrama de clases, subido a la plataforma del curso.</a:t>
+            </a:r>
+          </a:p>
+          <a:p>
+            <a:pPr algn="ctr">
+              <a:spcAft>
+                <a:spcPts val="600"/>
+              </a:spcAft>
+            </a:pPr>
+            <a:r>
+              <a:rPr sz="1600" b="0" i="0">
+                <a:solidFill>
+                  <a:srgbClr val="333333"/>
+                </a:solidFill>
+                <a:latin typeface="Calibri"/>
+              </a:rPr>
+              <a:t>Siguiente clase: continuamos el hilo del PI</a:t>
+            </a:r>
+          </a:p>
+        </p:txBody>
+      </p:sp>
+      <p:sp>
+        <p:nvSpPr>
+          <p:cNvPr id="6" name="TextBox 5"/>
+          <p:cNvSpPr txBox="1"/>
+          <p:nvPr/>
+        </p:nvSpPr>
+        <p:spPr>
+          <a:xfrm>
+            <a:off x="457200" y="4754880"/>
+            <a:ext cx="11277295" cy="640080"/>
+          </a:xfrm>
+          <a:prstGeom prst="rect">
+            <a:avLst/>
+          </a:prstGeom>
+          <a:noFill/>
+        </p:spPr>
+        <p:txBody>
+          <a:bodyPr wrap="square">
+            <a:spAutoFit/>
+          </a:bodyPr>
+          <a:lstStyle/>
+          <a:p>
+            <a:pPr algn="ctr"/>
+            <a:r>
+              <a:rPr sz="2000" b="1" i="0">
+                <a:solidFill>
+                  <a:srgbClr val="269CCB"/>
+                </a:solidFill>
+                <a:latin typeface="Calibri"/>
+              </a:rPr>
+              <a:t>Teoria al servicio del proyecto</a:t>
+            </a:r>
+          </a:p>
+        </p:txBody>
+      </p:sp>
+    </p:spTree>
+  </p:cSld>
+  <p:clrMapOvr>
+    <a:masterClrMapping/>
+  </p:clrMapOvr>
+</p:sld>
+</file>
+
 <file path=ppt/slides/slide3.xml><?xml version="1.0" encoding="utf-8"?>
 <p:sld xmlns:a="http://schemas.openxmlformats.org/drawingml/2006/main" xmlns:p="http://schemas.openxmlformats.org/presentationml/2006/main" xmlns:r="http://schemas.openxmlformats.org/officeDocument/2006/relationships">
   <p:cSld>
@@ -7669,7 +10314,7 @@
                 </a:solidFill>
                 <a:latin typeface="Calibri"/>
               </a:rPr>
-              <a:t>Teoria Core</a:t>
+              <a:t>Hasta ahora todos los modelos de VetCare han sido estaticos: el... (1/2)</a:t>
             </a:r>
           </a:p>
         </p:txBody>
@@ -7708,7 +10353,7 @@
                 </a:solidFill>
                 <a:latin typeface="Calibri"/>
               </a:rPr>
-              <a:t>–   Hasta ahora todos los modelos de VetCare han sido estaticos: el diagrama de clases dice que existe una clase Cita…</a:t>
+              <a:t>–   Hasta ahora todos los modelos de VetCare han sido estaticos: el diagrama de clases dice que existe una clase Cita con sus atributos, y la especificacion de caso de uso dice que la recepcionista agenda.</a:t>
             </a:r>
           </a:p>
           <a:p>
@@ -7724,7 +10369,7 @@
                 </a:solidFill>
                 <a:latin typeface="Calibri"/>
               </a:rPr>
-              <a:t>–   El diagrama de actividad responde a otra pregunta completamente distinta: no quien le habla a quien, sino en que…</a:t>
+              <a:t>–   Lo que ninguno de los dos muestra es la conversacion interna del sistema en el momento exacto en que eso ocurre.</a:t>
             </a:r>
           </a:p>
           <a:p>
@@ -7740,7 +10385,7 @@
                 </a:solidFill>
                 <a:latin typeface="Calibri"/>
               </a:rPr>
-              <a:t>–   La pregunta practica es cuando usar cada uno, y la respuesta se decide por el tipo de duda que se quiere resolver</a:t>
+              <a:t>–   Para eso existe el diagrama de secuencia, que es un modelo del tiempo: arriba se dibujan los participantes, de cada uno baja una linea de vida y el tiempo transcurre hacia abajo, de modo que el orden vertical de las flechas es el orden real de los eventos.</a:t>
             </a:r>
           </a:p>
           <a:p>
@@ -7756,23 +10401,7 @@
                 </a:solidFill>
                 <a:latin typeface="Calibri"/>
               </a:rPr>
-              <a:t>–   Estos diagramas no se inventan desde cero: se derivan de lo que ya esta escrito, y ahi esta la parte que separa a…</a:t>
-            </a:r>
-          </a:p>
-          <a:p>
-            <a:pPr>
-              <a:spcAft>
-                <a:spcPts val="800"/>
-              </a:spcAft>
-            </a:pPr>
-            <a:r>
-              <a:rPr sz="2000" b="0" i="0">
-                <a:solidFill>
-                  <a:srgbClr val="333333"/>
-                </a:solidFill>
-                <a:latin typeface="Calibri"/>
-              </a:rPr>
-              <a:t>–   Los flujos alternos tambien se modelan, y para eso existen los fragmentos combinados, que son esos recuadros con…</a:t>
+              <a:t>–   Cada flecha es un mensaje, es decir, la peticion de un objeto a otro para que haga algo; la flecha llena representa una llamada sincrona, donde quien pide se queda esperando la respuesta, y la flecha punteada representa el retorno con el resultado.</a:t>
             </a:r>
           </a:p>
         </p:txBody>
@@ -7953,141 +10582,21 @@
                 </a:solidFill>
                 <a:latin typeface="Calibri"/>
               </a:rPr>
-              <a:t>Secuencia de CU-04 Agendar cita en sintaxis Mermaid</a:t>
-            </a:r>
-          </a:p>
-        </p:txBody>
-      </p:sp>
-      <p:sp>
-        <p:nvSpPr>
-          <p:cNvPr id="5" name="Rounded Rectangle 4"/>
-          <p:cNvSpPr/>
-          <p:nvPr/>
-        </p:nvSpPr>
-        <p:spPr>
-          <a:xfrm>
-            <a:off x="457200" y="1261872"/>
-            <a:ext cx="11277295" cy="4773168"/>
-          </a:xfrm>
-          <a:prstGeom prst="roundRect">
-            <a:avLst>
-              <a:gd name="adj" fmla="val 12000"/>
-            </a:avLst>
-          </a:prstGeom>
-          <a:solidFill>
-            <a:srgbClr val="1E2A38"/>
-          </a:solidFill>
-          <a:ln>
-            <a:noFill/>
-          </a:ln>
-        </p:spPr>
-        <p:style>
-          <a:lnRef idx="1">
-            <a:schemeClr val="accent1"/>
-          </a:lnRef>
-          <a:fillRef idx="3">
-            <a:schemeClr val="accent1"/>
-          </a:fillRef>
-          <a:effectRef idx="2">
-            <a:schemeClr val="accent1"/>
-          </a:effectRef>
-          <a:fontRef idx="minor">
-            <a:schemeClr val="lt1"/>
-          </a:fontRef>
-        </p:style>
-        <p:txBody>
-          <a:bodyPr rtlCol="0" anchor="ctr"/>
-          <a:lstStyle/>
-          <a:p>
-            <a:pPr algn="ctr"/>
-          </a:p>
-        </p:txBody>
-      </p:sp>
-      <p:sp>
-        <p:nvSpPr>
-          <p:cNvPr id="6" name="Rectangle 5"/>
-          <p:cNvSpPr/>
-          <p:nvPr/>
-        </p:nvSpPr>
-        <p:spPr>
-          <a:xfrm>
-            <a:off x="457200" y="1261872"/>
-            <a:ext cx="11277295" cy="320040"/>
-          </a:xfrm>
-          <a:prstGeom prst="rect">
-            <a:avLst/>
-          </a:prstGeom>
-          <a:solidFill>
-            <a:srgbClr val="095292"/>
-          </a:solidFill>
-          <a:ln>
-            <a:noFill/>
-          </a:ln>
-        </p:spPr>
-        <p:style>
-          <a:lnRef idx="1">
-            <a:schemeClr val="accent1"/>
-          </a:lnRef>
-          <a:fillRef idx="3">
-            <a:schemeClr val="accent1"/>
-          </a:fillRef>
-          <a:effectRef idx="2">
-            <a:schemeClr val="accent1"/>
-          </a:effectRef>
-          <a:fontRef idx="minor">
-            <a:schemeClr val="lt1"/>
-          </a:fontRef>
-        </p:style>
-        <p:txBody>
-          <a:bodyPr rtlCol="0" anchor="ctr"/>
-          <a:lstStyle/>
-          <a:p>
-            <a:pPr algn="ctr"/>
-          </a:p>
-        </p:txBody>
-      </p:sp>
-      <p:sp>
-        <p:nvSpPr>
-          <p:cNvPr id="7" name="TextBox 6"/>
+              <a:t>Hasta ahora todos los modelos de VetCare han sido estaticos: el... (2/2)</a:t>
+            </a:r>
+          </a:p>
+        </p:txBody>
+      </p:sp>
+      <p:sp>
+        <p:nvSpPr>
+          <p:cNvPr id="5" name="TextBox 4"/>
           <p:cNvSpPr txBox="1"/>
           <p:nvPr/>
         </p:nvSpPr>
         <p:spPr>
           <a:xfrm>
-            <a:off x="685800" y="1307592"/>
-            <a:ext cx="10820095" cy="256032"/>
-          </a:xfrm>
-          <a:prstGeom prst="rect">
-            <a:avLst/>
-          </a:prstGeom>
-          <a:noFill/>
-        </p:spPr>
-        <p:txBody>
-          <a:bodyPr wrap="square" anchor="ctr"/>
-          <a:lstStyle/>
-          <a:p>
-            <a:r>
-              <a:rPr sz="1000" b="1" i="0">
-                <a:solidFill>
-                  <a:srgbClr val="269CCB"/>
-                </a:solidFill>
-                <a:latin typeface="Calibri"/>
-              </a:rPr>
-              <a:t>● ● ●</a:t>
-            </a:r>
-          </a:p>
-        </p:txBody>
-      </p:sp>
-      <p:sp>
-        <p:nvSpPr>
-          <p:cNvPr id="8" name="TextBox 7"/>
-          <p:cNvSpPr txBox="1"/>
-          <p:nvPr/>
-        </p:nvSpPr>
-        <p:spPr>
-          <a:xfrm>
-            <a:off x="777240" y="1719072"/>
-            <a:ext cx="5181447" cy="4133087"/>
+            <a:off x="457200" y="1170432"/>
+            <a:ext cx="11277295" cy="5230368"/>
           </a:xfrm>
           <a:prstGeom prst="rect">
             <a:avLst/>
@@ -8102,370 +10611,56 @@
           <a:p>
             <a:pPr>
               <a:spcAft>
-                <a:spcPts val="400"/>
+                <a:spcPts val="800"/>
               </a:spcAft>
             </a:pPr>
             <a:r>
-              <a:rPr sz="1400" b="0" i="0">
-                <a:solidFill>
-                  <a:srgbClr val="FFFFFF"/>
-                </a:solidFill>
-                <a:latin typeface="Calibri"/>
-              </a:rPr>
-              <a:t>sequenceDiagram</a:t>
+              <a:rPr sz="2000" b="0" i="0">
+                <a:solidFill>
+                  <a:srgbClr val="333333"/>
+                </a:solidFill>
+                <a:latin typeface="Calibri"/>
+              </a:rPr>
+              <a:t>–   Sobre la linea de vida se dibujan barras de activacion que muestran durante cuanto tiempo ese objeto esta trabajando.</a:t>
             </a:r>
           </a:p>
           <a:p>
             <a:pPr>
               <a:spcAft>
-                <a:spcPts val="400"/>
+                <a:spcPts val="800"/>
               </a:spcAft>
             </a:pPr>
             <a:r>
-              <a:rPr sz="1400" b="0" i="0">
-                <a:solidFill>
-                  <a:srgbClr val="FFFFFF"/>
-                </a:solidFill>
-                <a:latin typeface="Calibri"/>
-              </a:rPr>
-              <a:t>    actor Recepcionista</a:t>
+              <a:rPr sz="2000" b="0" i="0">
+                <a:solidFill>
+                  <a:srgbClr val="333333"/>
+                </a:solidFill>
+                <a:latin typeface="Calibri"/>
+              </a:rPr>
+              <a:t>–   En VetCare, agendar una cita se ve como una cadena corta y clara: la recepcionista le habla a la pantalla de agenda, la pantalla le habla al control de agenda</a:t>
             </a:r>
           </a:p>
           <a:p>
             <a:pPr>
               <a:spcAft>
-                <a:spcPts val="400"/>
+                <a:spcPts val="800"/>
               </a:spcAft>
             </a:pPr>
             <a:r>
-              <a:rPr sz="1400" b="0" i="0">
-                <a:solidFill>
-                  <a:srgbClr val="FFFFFF"/>
-                </a:solidFill>
-                <a:latin typeface="Calibri"/>
-              </a:rPr>
-              <a:t>    participant UI as :PantallaAgenda</a:t>
-            </a:r>
-          </a:p>
-          <a:p>
-            <a:pPr>
-              <a:spcAft>
-                <a:spcPts val="400"/>
-              </a:spcAft>
-            </a:pPr>
-            <a:r>
-              <a:rPr sz="1400" b="0" i="0">
-                <a:solidFill>
-                  <a:srgbClr val="FFFFFF"/>
-                </a:solidFill>
-                <a:latin typeface="Calibri"/>
-              </a:rPr>
-              <a:t>    participant CTRL as :ControlAgenda</a:t>
-            </a:r>
-          </a:p>
-          <a:p>
-            <a:pPr>
-              <a:spcAft>
-                <a:spcPts val="400"/>
-              </a:spcAft>
-            </a:pPr>
-            <a:r>
-              <a:rPr sz="1400" b="0" i="0">
-                <a:solidFill>
-                  <a:srgbClr val="FFFFFF"/>
-                </a:solidFill>
-                <a:latin typeface="Calibri"/>
-              </a:rPr>
-              <a:t>    participant REPM as :RepositorioMascotas</a:t>
-            </a:r>
-          </a:p>
-          <a:p>
-            <a:pPr>
-              <a:spcAft>
-                <a:spcPts val="400"/>
-              </a:spcAft>
-            </a:pPr>
-            <a:r>
-              <a:rPr sz="1400" b="0" i="0">
-                <a:solidFill>
-                  <a:srgbClr val="FFFFFF"/>
-                </a:solidFill>
-                <a:latin typeface="Calibri"/>
-              </a:rPr>
-              <a:t>    participant REPC as :RepositorioCitas</a:t>
-            </a:r>
-          </a:p>
-          <a:p>
-            <a:pPr>
-              <a:spcAft>
-                <a:spcPts val="400"/>
-              </a:spcAft>
-            </a:pPr>
-            <a:r>
-              <a:rPr sz="1400" b="0" i="0">
-                <a:solidFill>
-                  <a:srgbClr val="FFFFFF"/>
-                </a:solidFill>
-                <a:latin typeface="Calibri"/>
-              </a:rPr>
-              <a:t>    Recepcionista-&gt;&gt;UI: solicitarAgendamiento(codigoMascota, fecha)</a:t>
-            </a:r>
-          </a:p>
-          <a:p>
-            <a:pPr>
-              <a:spcAft>
-                <a:spcPts val="400"/>
-              </a:spcAft>
-            </a:pPr>
-            <a:r>
-              <a:rPr sz="1400" b="0" i="0">
-                <a:solidFill>
-                  <a:srgbClr val="FFFFFF"/>
-                </a:solidFill>
-                <a:latin typeface="Calibri"/>
-              </a:rPr>
-              <a:t>    UI-&gt;&gt;CTRL: agendarCita(codigoMascota, fecha, idVeterinario)</a:t>
-            </a:r>
-          </a:p>
-          <a:p>
-            <a:pPr>
-              <a:spcAft>
-                <a:spcPts val="400"/>
-              </a:spcAft>
-            </a:pPr>
-            <a:r>
-              <a:rPr sz="1400" b="0" i="0">
-                <a:solidFill>
-                  <a:srgbClr val="FFFFFF"/>
-                </a:solidFill>
-                <a:latin typeface="Calibri"/>
-              </a:rPr>
-              <a:t>    CTRL-&gt;&gt;REPM: existePorCodigo(codigoMascota)</a:t>
-            </a:r>
-          </a:p>
-          <a:p>
-            <a:pPr>
-              <a:spcAft>
-                <a:spcPts val="400"/>
-              </a:spcAft>
-            </a:pPr>
-            <a:r>
-              <a:rPr sz="1400" b="0" i="0">
-                <a:solidFill>
-                  <a:srgbClr val="FFFFFF"/>
-                </a:solidFill>
-                <a:latin typeface="Calibri"/>
-              </a:rPr>
-              <a:t>    REPM--&gt;&gt;CTRL: mascota</a:t>
-            </a:r>
-          </a:p>
-        </p:txBody>
-      </p:sp>
-      <p:sp>
-        <p:nvSpPr>
-          <p:cNvPr id="9" name="TextBox 8"/>
-          <p:cNvSpPr txBox="1"/>
-          <p:nvPr/>
-        </p:nvSpPr>
-        <p:spPr>
-          <a:xfrm>
-            <a:off x="6233007" y="1719072"/>
-            <a:ext cx="5181447" cy="4133087"/>
-          </a:xfrm>
-          <a:prstGeom prst="rect">
-            <a:avLst/>
-          </a:prstGeom>
-          <a:noFill/>
-        </p:spPr>
-        <p:txBody>
-          <a:bodyPr wrap="square">
-            <a:spAutoFit/>
-          </a:bodyPr>
-          <a:lstStyle/>
-          <a:p>
-            <a:pPr>
-              <a:spcAft>
-                <a:spcPts val="400"/>
-              </a:spcAft>
-            </a:pPr>
-            <a:r>
-              <a:rPr sz="1400" b="0" i="0">
-                <a:solidFill>
-                  <a:srgbClr val="FFFFFF"/>
-                </a:solidFill>
-                <a:latin typeface="Calibri"/>
-              </a:rPr>
-              <a:t>    CTRL-&gt;&gt;REPC: consultarDisponibilidad(idVeterinario, fecha)</a:t>
-            </a:r>
-          </a:p>
-          <a:p>
-            <a:pPr>
-              <a:spcAft>
-                <a:spcPts val="400"/>
-              </a:spcAft>
-            </a:pPr>
-            <a:r>
-              <a:rPr sz="1400" b="0" i="0">
-                <a:solidFill>
-                  <a:srgbClr val="FFFFFF"/>
-                </a:solidFill>
-                <a:latin typeface="Calibri"/>
-              </a:rPr>
-              <a:t>    REPC--&gt;&gt;CTRL: horariosLibres</a:t>
-            </a:r>
-          </a:p>
-          <a:p>
-            <a:pPr>
-              <a:spcAft>
-                <a:spcPts val="400"/>
-              </a:spcAft>
-            </a:pPr>
-            <a:r>
-              <a:rPr sz="1400" b="0" i="0">
-                <a:solidFill>
-                  <a:srgbClr val="FFFFFF"/>
-                </a:solidFill>
-                <a:latin typeface="Calibri"/>
-              </a:rPr>
-              <a:t>    alt hay horario libre</a:t>
-            </a:r>
-          </a:p>
-          <a:p>
-            <a:pPr>
-              <a:spcAft>
-                <a:spcPts val="400"/>
-              </a:spcAft>
-            </a:pPr>
-            <a:r>
-              <a:rPr sz="1400" b="0" i="0">
-                <a:solidFill>
-                  <a:srgbClr val="FFFFFF"/>
-                </a:solidFill>
-                <a:latin typeface="Calibri"/>
-              </a:rPr>
-              <a:t>        CTRL-&gt;&gt;REPC: guardarCita(cita)</a:t>
-            </a:r>
-          </a:p>
-          <a:p>
-            <a:pPr>
-              <a:spcAft>
-                <a:spcPts val="400"/>
-              </a:spcAft>
-            </a:pPr>
-            <a:r>
-              <a:rPr sz="1400" b="0" i="0">
-                <a:solidFill>
-                  <a:srgbClr val="FFFFFF"/>
-                </a:solidFill>
-                <a:latin typeface="Calibri"/>
-              </a:rPr>
-              <a:t>        REPC--&gt;&gt;CTRL: idCita</a:t>
-            </a:r>
-          </a:p>
-          <a:p>
-            <a:pPr>
-              <a:spcAft>
-                <a:spcPts val="400"/>
-              </a:spcAft>
-            </a:pPr>
-            <a:r>
-              <a:rPr sz="1400" b="0" i="0">
-                <a:solidFill>
-                  <a:srgbClr val="FFFFFF"/>
-                </a:solidFill>
-                <a:latin typeface="Calibri"/>
-              </a:rPr>
-              <a:t>        CTRL--&gt;&gt;UI: confirmacion(idCita)</a:t>
-            </a:r>
-          </a:p>
-          <a:p>
-            <a:pPr>
-              <a:spcAft>
-                <a:spcPts val="400"/>
-              </a:spcAft>
-            </a:pPr>
-            <a:r>
-              <a:rPr sz="1400" b="0" i="0">
-                <a:solidFill>
-                  <a:srgbClr val="FFFFFF"/>
-                </a:solidFill>
-                <a:latin typeface="Calibri"/>
-              </a:rPr>
-              <a:t>    else no hay horario libre</a:t>
-            </a:r>
-          </a:p>
-          <a:p>
-            <a:pPr>
-              <a:spcAft>
-                <a:spcPts val="400"/>
-              </a:spcAft>
-            </a:pPr>
-            <a:r>
-              <a:rPr sz="1400" b="0" i="0">
-                <a:solidFill>
-                  <a:srgbClr val="FFFFFF"/>
-                </a:solidFill>
-                <a:latin typeface="Calibri"/>
-              </a:rPr>
-              <a:t>        CTRL--&gt;&gt;UI: alternativas(dia siguiente)</a:t>
-            </a:r>
-          </a:p>
-          <a:p>
-            <a:pPr>
-              <a:spcAft>
-                <a:spcPts val="400"/>
-              </a:spcAft>
-            </a:pPr>
-            <a:r>
-              <a:rPr sz="1400" b="0" i="0">
-                <a:solidFill>
-                  <a:srgbClr val="FFFFFF"/>
-                </a:solidFill>
-                <a:latin typeface="Calibri"/>
-              </a:rPr>
-              <a:t>    end</a:t>
-            </a:r>
-          </a:p>
-        </p:txBody>
-      </p:sp>
-      <p:sp>
-        <p:nvSpPr>
-          <p:cNvPr id="10" name="TextBox 9"/>
-          <p:cNvSpPr txBox="1"/>
-          <p:nvPr/>
-        </p:nvSpPr>
-        <p:spPr>
-          <a:xfrm>
-            <a:off x="457200" y="6080760"/>
-            <a:ext cx="11277295" cy="320040"/>
-          </a:xfrm>
-          <a:prstGeom prst="rect">
-            <a:avLst/>
-          </a:prstGeom>
-          <a:noFill/>
-        </p:spPr>
-        <p:txBody>
-          <a:bodyPr wrap="square">
-            <a:spAutoFit/>
-          </a:bodyPr>
-          <a:lstStyle/>
-          <a:p>
-            <a:pPr algn="ctr"/>
-            <a:r>
-              <a:rPr sz="1200" b="0" i="1">
-                <a:solidFill>
-                  <a:srgbClr val="666666"/>
-                </a:solidFill>
-                <a:latin typeface="Calibri"/>
-              </a:rPr>
-              <a:t>Cada flecha tiene que corresponder a una operacion existente en el diagrama de clases: si no existe, o falta la operacion o sobra la flecha.</a:t>
-            </a:r>
-          </a:p>
-        </p:txBody>
-      </p:sp>
-      <p:sp>
-        <p:nvSpPr>
-          <p:cNvPr id="11" name="TextBox 10"/>
+              <a:rPr sz="2000" b="0" i="0">
+                <a:solidFill>
+                  <a:srgbClr val="333333"/>
+                </a:solidFill>
+                <a:latin typeface="Calibri"/>
+              </a:rPr>
+              <a:t>–   El control verifica la mascota, le pregunta al repositorio de citas por la disponibilidad y devuelve una confirmacion con el identificador de la cita.</a:t>
+            </a:r>
+          </a:p>
+        </p:txBody>
+      </p:sp>
+      <p:sp>
+        <p:nvSpPr>
+          <p:cNvPr id="6" name="TextBox 5"/>
           <p:cNvSpPr txBox="1"/>
           <p:nvPr/>
         </p:nvSpPr>
@@ -8639,7 +10834,7 @@
                 </a:solidFill>
                 <a:latin typeface="Calibri"/>
               </a:rPr>
-              <a:t>Demo del dia</a:t>
+              <a:t>El diagrama de actividad responde a otra pregunta completamente... (1/2)</a:t>
             </a:r>
           </a:p>
         </p:txBody>
@@ -8678,25 +10873,7 @@
                 </a:solidFill>
                 <a:latin typeface="Calibri"/>
               </a:rPr>
-              <a:t>–   </a:t>
-            </a:r>
-            <a:r>
-              <a:rPr sz="2000" b="1" i="0">
-                <a:solidFill>
-                  <a:srgbClr val="333333"/>
-                </a:solidFill>
-                <a:latin typeface="Calibri"/>
-              </a:rPr>
-              <a:t>Herramienta:</a:t>
-            </a:r>
-            <a:r>
-              <a:rPr sz="2000" b="0" i="0">
-                <a:solidFill>
-                  <a:srgbClr val="333333"/>
-                </a:solidFill>
-                <a:latin typeface="Calibri"/>
-              </a:rPr>
-              <a:t> draw.io · Mermaid Live Editor</a:t>
+              <a:t>–   El diagrama de actividad responde a otra pregunta completamente distinta: no quien le habla a quien, sino en que orden ocurre el trabajo y quien es responsable de cada paso, incluyendo pasos que suceden fuera del computador.</a:t>
             </a:r>
           </a:p>
           <a:p>
@@ -8712,25 +10889,7 @@
                 </a:solidFill>
                 <a:latin typeface="Calibri"/>
               </a:rPr>
-              <a:t>–   </a:t>
-            </a:r>
-            <a:r>
-              <a:rPr sz="2000" b="1" i="0">
-                <a:solidFill>
-                  <a:srgbClr val="333333"/>
-                </a:solidFill>
-                <a:latin typeface="Calibri"/>
-              </a:rPr>
-              <a:t>Demo:</a:t>
-            </a:r>
-            <a:r>
-              <a:rPr sz="2000" b="0" i="0">
-                <a:solidFill>
-                  <a:srgbClr val="333333"/>
-                </a:solidFill>
-                <a:latin typeface="Calibri"/>
-              </a:rPr>
-              <a:t> El docente toma el flujo principal ya escrito de CU-04 Agendar cita y lo convierte linea por linea en mensajes de un diagrama de secuencia en Mermaid, mostrando en vivo que cada mensaje necesita una clase dueña que lo pueda responder.</a:t>
+              <a:t>–   Sus elementos son nodo inicial, acciones, nodos de decision con condiciones escritas entre corchetes, nodos de union, barras de bifurcacion y sincronizacion para el trabajo que ocurre en paralelo, y nodo final.</a:t>
             </a:r>
           </a:p>
           <a:p>
@@ -8746,7 +10905,7 @@
                 </a:solidFill>
                 <a:latin typeface="Calibri"/>
               </a:rPr>
-              <a:t>–   Mismo dominio VetCare — no otro ejemplo. Aqui se diseña, no se programa.</a:t>
+              <a:t>–   La herramienta que lo vuelve realmente util en un proyecto como VetCare son las particiones o calles: una franja por cada rol, de modo que al mirar el dibujo se sabe de un vistazo que hace el Propietario</a:t>
             </a:r>
           </a:p>
         </p:txBody>
@@ -8821,7 +10980,7 @@
         <p:spPr>
           <a:xfrm>
             <a:off x="0" y="0"/>
-            <a:ext cx="12191695" cy="1170432"/>
+            <a:ext cx="12191695" cy="960120"/>
           </a:xfrm>
           <a:prstGeom prst="rect">
             <a:avLst/>
@@ -8863,7 +11022,7 @@
         </p:nvSpPr>
         <p:spPr>
           <a:xfrm>
-            <a:off x="0" y="1170432"/>
+            <a:off x="0" y="960120"/>
             <a:ext cx="12191695" cy="41148"/>
           </a:xfrm>
           <a:prstGeom prst="rect">
@@ -8907,7 +11066,7 @@
         <p:spPr>
           <a:xfrm>
             <a:off x="457200" y="164592"/>
-            <a:ext cx="11277295" cy="384048"/>
+            <a:ext cx="11277295" cy="502920"/>
           </a:xfrm>
           <a:prstGeom prst="rect">
             <a:avLst/>
@@ -8927,7 +11086,7 @@
                 </a:solidFill>
                 <a:latin typeface="Calibri"/>
               </a:rPr>
-              <a:t>Herramientas de hoy</a:t>
+              <a:t>El diagrama de actividad responde a otra pregunta completamente... (2/2)</a:t>
             </a:r>
           </a:p>
         </p:txBody>
@@ -8940,8 +11099,8 @@
         </p:nvSpPr>
         <p:spPr>
           <a:xfrm>
-            <a:off x="457200" y="566928"/>
-            <a:ext cx="11277295" cy="411480"/>
+            <a:off x="457200" y="1170432"/>
+            <a:ext cx="11277295" cy="5230368"/>
           </a:xfrm>
           <a:prstGeom prst="rect">
             <a:avLst/>
@@ -8954,633 +11113,74 @@
           </a:bodyPr>
           <a:lstStyle/>
           <a:p>
-            <a:r>
-              <a:rPr sz="1400" b="0" i="0">
-                <a:solidFill>
-                  <a:srgbClr val="B8D8EE"/>
-                </a:solidFill>
-                <a:latin typeface="Calibri"/>
-              </a:rPr>
-              <a:t>Gratis · funcionan en el navegador</a:t>
-            </a:r>
-          </a:p>
-        </p:txBody>
-      </p:sp>
-      <p:sp>
-        <p:nvSpPr>
-          <p:cNvPr id="6" name="Rounded Rectangle 5"/>
-          <p:cNvSpPr/>
-          <p:nvPr/>
-        </p:nvSpPr>
-        <p:spPr>
-          <a:xfrm>
-            <a:off x="457200" y="1591056"/>
-            <a:ext cx="3624986" cy="2331720"/>
-          </a:xfrm>
-          <a:prstGeom prst="roundRect">
-            <a:avLst>
-              <a:gd name="adj" fmla="val 12000"/>
-            </a:avLst>
-          </a:prstGeom>
-          <a:solidFill>
-            <a:srgbClr val="F2F2F2"/>
-          </a:solidFill>
-          <a:ln>
-            <a:noFill/>
-          </a:ln>
-        </p:spPr>
-        <p:style>
-          <a:lnRef idx="1">
-            <a:schemeClr val="accent1"/>
-          </a:lnRef>
-          <a:fillRef idx="3">
-            <a:schemeClr val="accent1"/>
-          </a:fillRef>
-          <a:effectRef idx="2">
-            <a:schemeClr val="accent1"/>
-          </a:effectRef>
-          <a:fontRef idx="minor">
-            <a:schemeClr val="lt1"/>
-          </a:fontRef>
-        </p:style>
-        <p:txBody>
-          <a:bodyPr rtlCol="0" anchor="ctr"/>
-          <a:lstStyle/>
-          <a:p>
-            <a:pPr algn="ctr"/>
-          </a:p>
-        </p:txBody>
-      </p:sp>
-      <p:sp>
-        <p:nvSpPr>
-          <p:cNvPr id="7" name="Rectangle 6"/>
-          <p:cNvSpPr/>
-          <p:nvPr/>
-        </p:nvSpPr>
-        <p:spPr>
-          <a:xfrm>
-            <a:off x="457200" y="1591056"/>
-            <a:ext cx="3624986" cy="64008"/>
-          </a:xfrm>
-          <a:prstGeom prst="rect">
-            <a:avLst/>
-          </a:prstGeom>
-          <a:solidFill>
-            <a:srgbClr val="095292"/>
-          </a:solidFill>
-          <a:ln>
-            <a:noFill/>
-          </a:ln>
-        </p:spPr>
-        <p:style>
-          <a:lnRef idx="1">
-            <a:schemeClr val="accent1"/>
-          </a:lnRef>
-          <a:fillRef idx="3">
-            <a:schemeClr val="accent1"/>
-          </a:fillRef>
-          <a:effectRef idx="2">
-            <a:schemeClr val="accent1"/>
-          </a:effectRef>
-          <a:fontRef idx="minor">
-            <a:schemeClr val="lt1"/>
-          </a:fontRef>
-        </p:style>
-        <p:txBody>
-          <a:bodyPr rtlCol="0" anchor="ctr"/>
-          <a:lstStyle/>
-          <a:p>
-            <a:pPr algn="ctr"/>
-          </a:p>
-        </p:txBody>
-      </p:sp>
-      <p:sp>
-        <p:nvSpPr>
-          <p:cNvPr id="8" name="Rectangle 7"/>
-          <p:cNvSpPr/>
-          <p:nvPr/>
-        </p:nvSpPr>
-        <p:spPr>
-          <a:xfrm>
-            <a:off x="457200" y="1655064"/>
-            <a:ext cx="3624986" cy="27432"/>
-          </a:xfrm>
-          <a:prstGeom prst="rect">
-            <a:avLst/>
-          </a:prstGeom>
-          <a:solidFill>
-            <a:srgbClr val="FFD000"/>
-          </a:solidFill>
-          <a:ln>
-            <a:noFill/>
-          </a:ln>
-        </p:spPr>
-        <p:style>
-          <a:lnRef idx="1">
-            <a:schemeClr val="accent1"/>
-          </a:lnRef>
-          <a:fillRef idx="3">
-            <a:schemeClr val="accent1"/>
-          </a:fillRef>
-          <a:effectRef idx="2">
-            <a:schemeClr val="accent1"/>
-          </a:effectRef>
-          <a:fontRef idx="minor">
-            <a:schemeClr val="lt1"/>
-          </a:fontRef>
-        </p:style>
-        <p:txBody>
-          <a:bodyPr rtlCol="0" anchor="ctr"/>
-          <a:lstStyle/>
-          <a:p>
-            <a:pPr algn="ctr"/>
-          </a:p>
-        </p:txBody>
-      </p:sp>
-      <p:pic>
-        <p:nvPicPr>
-          <p:cNvPr id="9" name="Picture 8" descr="drawio.png"/>
-          <p:cNvPicPr>
-            <a:picLocks noChangeAspect="1"/>
-          </p:cNvPicPr>
-          <p:nvPr/>
-        </p:nvPicPr>
-        <p:blipFill>
-          <a:blip r:embed="rId2"/>
-          <a:stretch>
-            <a:fillRect/>
-          </a:stretch>
-        </p:blipFill>
-        <p:spPr>
-          <a:xfrm>
-            <a:off x="1643329" y="1847087"/>
-            <a:ext cx="1252728" cy="1252728"/>
-          </a:xfrm>
-          <a:prstGeom prst="rect">
-            <a:avLst/>
-          </a:prstGeom>
-        </p:spPr>
-      </p:pic>
-      <p:sp>
-        <p:nvSpPr>
-          <p:cNvPr id="10" name="TextBox 9"/>
-          <p:cNvSpPr txBox="1"/>
-          <p:nvPr/>
-        </p:nvSpPr>
-        <p:spPr>
-          <a:xfrm>
-            <a:off x="530352" y="3191256"/>
-            <a:ext cx="3478682" cy="621792"/>
-          </a:xfrm>
-          <a:prstGeom prst="rect">
-            <a:avLst/>
-          </a:prstGeom>
-          <a:noFill/>
-        </p:spPr>
-        <p:txBody>
-          <a:bodyPr wrap="square" anchor="t"/>
-          <a:lstStyle/>
-          <a:p>
-            <a:pPr algn="ctr"/>
-            <a:r>
-              <a:rPr sz="1300" b="1" i="0">
-                <a:solidFill>
-                  <a:srgbClr val="095292"/>
-                </a:solidFill>
-                <a:latin typeface="Calibri"/>
-              </a:rPr>
-              <a:t>Draw.Io</a:t>
-            </a:r>
-          </a:p>
-          <a:p>
-            <a:pPr algn="ctr">
-              <a:spcBef>
-                <a:spcPts val="200"/>
-              </a:spcBef>
+            <a:pPr>
+              <a:spcAft>
+                <a:spcPts val="800"/>
+              </a:spcAft>
             </a:pPr>
             <a:r>
-              <a:rPr sz="1000" b="0" i="0">
-                <a:solidFill>
-                  <a:srgbClr val="666666"/>
-                </a:solidFill>
-                <a:latin typeface="Calibri"/>
-              </a:rPr>
-              <a:t>Diagramas UML y de contexto</a:t>
-            </a:r>
-          </a:p>
-        </p:txBody>
-      </p:sp>
-      <p:sp>
-        <p:nvSpPr>
-          <p:cNvPr id="11" name="Rounded Rectangle 10"/>
-          <p:cNvSpPr/>
-          <p:nvPr/>
-        </p:nvSpPr>
-        <p:spPr>
-          <a:xfrm>
-            <a:off x="4283354" y="1591056"/>
-            <a:ext cx="3624986" cy="2331720"/>
-          </a:xfrm>
-          <a:prstGeom prst="roundRect">
-            <a:avLst>
-              <a:gd name="adj" fmla="val 12000"/>
-            </a:avLst>
-          </a:prstGeom>
-          <a:solidFill>
-            <a:srgbClr val="F2F2F2"/>
-          </a:solidFill>
-          <a:ln>
-            <a:noFill/>
-          </a:ln>
-        </p:spPr>
-        <p:style>
-          <a:lnRef idx="1">
-            <a:schemeClr val="accent1"/>
-          </a:lnRef>
-          <a:fillRef idx="3">
-            <a:schemeClr val="accent1"/>
-          </a:fillRef>
-          <a:effectRef idx="2">
-            <a:schemeClr val="accent1"/>
-          </a:effectRef>
-          <a:fontRef idx="minor">
-            <a:schemeClr val="lt1"/>
-          </a:fontRef>
-        </p:style>
-        <p:txBody>
-          <a:bodyPr rtlCol="0" anchor="ctr"/>
-          <a:lstStyle/>
-          <a:p>
-            <a:pPr algn="ctr"/>
-          </a:p>
-        </p:txBody>
-      </p:sp>
-      <p:sp>
-        <p:nvSpPr>
-          <p:cNvPr id="12" name="Rectangle 11"/>
-          <p:cNvSpPr/>
-          <p:nvPr/>
-        </p:nvSpPr>
-        <p:spPr>
-          <a:xfrm>
-            <a:off x="4283354" y="1591056"/>
-            <a:ext cx="3624986" cy="64008"/>
-          </a:xfrm>
-          <a:prstGeom prst="rect">
-            <a:avLst/>
-          </a:prstGeom>
-          <a:solidFill>
-            <a:srgbClr val="095292"/>
-          </a:solidFill>
-          <a:ln>
-            <a:noFill/>
-          </a:ln>
-        </p:spPr>
-        <p:style>
-          <a:lnRef idx="1">
-            <a:schemeClr val="accent1"/>
-          </a:lnRef>
-          <a:fillRef idx="3">
-            <a:schemeClr val="accent1"/>
-          </a:fillRef>
-          <a:effectRef idx="2">
-            <a:schemeClr val="accent1"/>
-          </a:effectRef>
-          <a:fontRef idx="minor">
-            <a:schemeClr val="lt1"/>
-          </a:fontRef>
-        </p:style>
-        <p:txBody>
-          <a:bodyPr rtlCol="0" anchor="ctr"/>
-          <a:lstStyle/>
-          <a:p>
-            <a:pPr algn="ctr"/>
-          </a:p>
-        </p:txBody>
-      </p:sp>
-      <p:sp>
-        <p:nvSpPr>
-          <p:cNvPr id="13" name="Rectangle 12"/>
-          <p:cNvSpPr/>
-          <p:nvPr/>
-        </p:nvSpPr>
-        <p:spPr>
-          <a:xfrm>
-            <a:off x="4283354" y="1655064"/>
-            <a:ext cx="3624986" cy="27432"/>
-          </a:xfrm>
-          <a:prstGeom prst="rect">
-            <a:avLst/>
-          </a:prstGeom>
-          <a:solidFill>
-            <a:srgbClr val="FFD000"/>
-          </a:solidFill>
-          <a:ln>
-            <a:noFill/>
-          </a:ln>
-        </p:spPr>
-        <p:style>
-          <a:lnRef idx="1">
-            <a:schemeClr val="accent1"/>
-          </a:lnRef>
-          <a:fillRef idx="3">
-            <a:schemeClr val="accent1"/>
-          </a:fillRef>
-          <a:effectRef idx="2">
-            <a:schemeClr val="accent1"/>
-          </a:effectRef>
-          <a:fontRef idx="minor">
-            <a:schemeClr val="lt1"/>
-          </a:fontRef>
-        </p:style>
-        <p:txBody>
-          <a:bodyPr rtlCol="0" anchor="ctr"/>
-          <a:lstStyle/>
-          <a:p>
-            <a:pPr algn="ctr"/>
-          </a:p>
-        </p:txBody>
-      </p:sp>
-      <p:pic>
-        <p:nvPicPr>
-          <p:cNvPr id="14" name="Picture 13" descr="mermaid.png"/>
-          <p:cNvPicPr>
-            <a:picLocks noChangeAspect="1"/>
-          </p:cNvPicPr>
-          <p:nvPr/>
-        </p:nvPicPr>
-        <p:blipFill>
-          <a:blip r:embed="rId3"/>
-          <a:stretch>
-            <a:fillRect/>
-          </a:stretch>
-        </p:blipFill>
-        <p:spPr>
-          <a:xfrm>
-            <a:off x="5469483" y="1847087"/>
-            <a:ext cx="1252728" cy="1252728"/>
-          </a:xfrm>
-          <a:prstGeom prst="rect">
-            <a:avLst/>
-          </a:prstGeom>
-        </p:spPr>
-      </p:pic>
-      <p:sp>
-        <p:nvSpPr>
-          <p:cNvPr id="15" name="TextBox 14"/>
-          <p:cNvSpPr txBox="1"/>
-          <p:nvPr/>
-        </p:nvSpPr>
-        <p:spPr>
-          <a:xfrm>
-            <a:off x="4356506" y="3191256"/>
-            <a:ext cx="3478682" cy="621792"/>
-          </a:xfrm>
-          <a:prstGeom prst="rect">
-            <a:avLst/>
-          </a:prstGeom>
-          <a:noFill/>
-        </p:spPr>
-        <p:txBody>
-          <a:bodyPr wrap="square" anchor="t"/>
-          <a:lstStyle/>
-          <a:p>
-            <a:pPr algn="ctr"/>
-            <a:r>
-              <a:rPr sz="1300" b="1" i="0">
-                <a:solidFill>
-                  <a:srgbClr val="095292"/>
-                </a:solidFill>
-                <a:latin typeface="Calibri"/>
-              </a:rPr>
-              <a:t>Mermaid</a:t>
-            </a:r>
-          </a:p>
-          <a:p>
-            <a:pPr algn="ctr">
-              <a:spcBef>
-                <a:spcPts val="200"/>
-              </a:spcBef>
+              <a:rPr sz="2000" b="0" i="0">
+                <a:solidFill>
+                  <a:srgbClr val="333333"/>
+                </a:solidFill>
+                <a:latin typeface="Calibri"/>
+              </a:rPr>
+              <a:t>–   Que hace la Recepcionista, que hace el Veterinario y que hace el sistema.</a:t>
+            </a:r>
+          </a:p>
+          <a:p>
+            <a:pPr>
+              <a:spcAft>
+                <a:spcPts val="800"/>
+              </a:spcAft>
             </a:pPr>
             <a:r>
-              <a:rPr sz="1000" b="0" i="0">
-                <a:solidFill>
-                  <a:srgbClr val="666666"/>
-                </a:solidFill>
-                <a:latin typeface="Calibri"/>
-              </a:rPr>
-              <a:t>Diagramas como texto versionable</a:t>
-            </a:r>
-          </a:p>
-        </p:txBody>
-      </p:sp>
-      <p:sp>
-        <p:nvSpPr>
-          <p:cNvPr id="16" name="Rounded Rectangle 15"/>
-          <p:cNvSpPr/>
-          <p:nvPr/>
-        </p:nvSpPr>
-        <p:spPr>
-          <a:xfrm>
-            <a:off x="8109508" y="1591056"/>
-            <a:ext cx="3624986" cy="2331720"/>
-          </a:xfrm>
-          <a:prstGeom prst="roundRect">
-            <a:avLst>
-              <a:gd name="adj" fmla="val 12000"/>
-            </a:avLst>
-          </a:prstGeom>
-          <a:solidFill>
-            <a:srgbClr val="F2F2F2"/>
-          </a:solidFill>
-          <a:ln>
-            <a:noFill/>
-          </a:ln>
-        </p:spPr>
-        <p:style>
-          <a:lnRef idx="1">
-            <a:schemeClr val="accent1"/>
-          </a:lnRef>
-          <a:fillRef idx="3">
-            <a:schemeClr val="accent1"/>
-          </a:fillRef>
-          <a:effectRef idx="2">
-            <a:schemeClr val="accent1"/>
-          </a:effectRef>
-          <a:fontRef idx="minor">
-            <a:schemeClr val="lt1"/>
-          </a:fontRef>
-        </p:style>
-        <p:txBody>
-          <a:bodyPr rtlCol="0" anchor="ctr"/>
-          <a:lstStyle/>
-          <a:p>
-            <a:pPr algn="ctr"/>
-          </a:p>
-        </p:txBody>
-      </p:sp>
-      <p:sp>
-        <p:nvSpPr>
-          <p:cNvPr id="17" name="Rectangle 16"/>
-          <p:cNvSpPr/>
-          <p:nvPr/>
-        </p:nvSpPr>
-        <p:spPr>
-          <a:xfrm>
-            <a:off x="8109508" y="1591056"/>
-            <a:ext cx="3624986" cy="64008"/>
-          </a:xfrm>
-          <a:prstGeom prst="rect">
-            <a:avLst/>
-          </a:prstGeom>
-          <a:solidFill>
-            <a:srgbClr val="095292"/>
-          </a:solidFill>
-          <a:ln>
-            <a:noFill/>
-          </a:ln>
-        </p:spPr>
-        <p:style>
-          <a:lnRef idx="1">
-            <a:schemeClr val="accent1"/>
-          </a:lnRef>
-          <a:fillRef idx="3">
-            <a:schemeClr val="accent1"/>
-          </a:fillRef>
-          <a:effectRef idx="2">
-            <a:schemeClr val="accent1"/>
-          </a:effectRef>
-          <a:fontRef idx="minor">
-            <a:schemeClr val="lt1"/>
-          </a:fontRef>
-        </p:style>
-        <p:txBody>
-          <a:bodyPr rtlCol="0" anchor="ctr"/>
-          <a:lstStyle/>
-          <a:p>
-            <a:pPr algn="ctr"/>
-          </a:p>
-        </p:txBody>
-      </p:sp>
-      <p:sp>
-        <p:nvSpPr>
-          <p:cNvPr id="18" name="Rectangle 17"/>
-          <p:cNvSpPr/>
-          <p:nvPr/>
-        </p:nvSpPr>
-        <p:spPr>
-          <a:xfrm>
-            <a:off x="8109508" y="1655064"/>
-            <a:ext cx="3624986" cy="27432"/>
-          </a:xfrm>
-          <a:prstGeom prst="rect">
-            <a:avLst/>
-          </a:prstGeom>
-          <a:solidFill>
-            <a:srgbClr val="FFD000"/>
-          </a:solidFill>
-          <a:ln>
-            <a:noFill/>
-          </a:ln>
-        </p:spPr>
-        <p:style>
-          <a:lnRef idx="1">
-            <a:schemeClr val="accent1"/>
-          </a:lnRef>
-          <a:fillRef idx="3">
-            <a:schemeClr val="accent1"/>
-          </a:fillRef>
-          <a:effectRef idx="2">
-            <a:schemeClr val="accent1"/>
-          </a:effectRef>
-          <a:fontRef idx="minor">
-            <a:schemeClr val="lt1"/>
-          </a:fontRef>
-        </p:style>
-        <p:txBody>
-          <a:bodyPr rtlCol="0" anchor="ctr"/>
-          <a:lstStyle/>
-          <a:p>
-            <a:pPr algn="ctr"/>
-          </a:p>
-        </p:txBody>
-      </p:sp>
-      <p:pic>
-        <p:nvPicPr>
-          <p:cNvPr id="19" name="Picture 18" descr="examlab.png"/>
-          <p:cNvPicPr>
-            <a:picLocks noChangeAspect="1"/>
-          </p:cNvPicPr>
-          <p:nvPr/>
-        </p:nvPicPr>
-        <p:blipFill>
-          <a:blip r:embed="rId4"/>
-          <a:stretch>
-            <a:fillRect/>
-          </a:stretch>
-        </p:blipFill>
-        <p:spPr>
-          <a:xfrm>
-            <a:off x="9295638" y="1847087"/>
-            <a:ext cx="1252728" cy="1252728"/>
-          </a:xfrm>
-          <a:prstGeom prst="rect">
-            <a:avLst/>
-          </a:prstGeom>
-        </p:spPr>
-      </p:pic>
-      <p:sp>
-        <p:nvSpPr>
-          <p:cNvPr id="20" name="TextBox 19"/>
-          <p:cNvSpPr txBox="1"/>
-          <p:nvPr/>
-        </p:nvSpPr>
-        <p:spPr>
-          <a:xfrm>
-            <a:off x="8182660" y="3191256"/>
-            <a:ext cx="3478682" cy="621792"/>
-          </a:xfrm>
-          <a:prstGeom prst="rect">
-            <a:avLst/>
-          </a:prstGeom>
-          <a:noFill/>
-        </p:spPr>
-        <p:txBody>
-          <a:bodyPr wrap="square" anchor="t"/>
-          <a:lstStyle/>
-          <a:p>
-            <a:pPr algn="ctr"/>
-            <a:r>
-              <a:rPr sz="1300" b="1" i="0">
-                <a:solidFill>
-                  <a:srgbClr val="095292"/>
-                </a:solidFill>
-                <a:latin typeface="Calibri"/>
-              </a:rPr>
-              <a:t>la plataforma del curso</a:t>
-            </a:r>
-          </a:p>
-          <a:p>
-            <a:pPr algn="ctr">
-              <a:spcBef>
-                <a:spcPts val="200"/>
-              </a:spcBef>
+              <a:rPr sz="2000" b="0" i="0">
+                <a:solidFill>
+                  <a:srgbClr val="333333"/>
+                </a:solidFill>
+                <a:latin typeface="Calibri"/>
+              </a:rPr>
+              <a:t>–   Eso permite modelar el proceso completo de atencion en Huellitas: el propietario llega y pregunta, la recepcionista verifica la cita, si no la tiene se decide entre esperar o reagendar</a:t>
+            </a:r>
+          </a:p>
+          <a:p>
+            <a:pPr>
+              <a:spcAft>
+                <a:spcPts val="800"/>
+              </a:spcAft>
             </a:pPr>
             <a:r>
-              <a:rPr sz="1000" b="0" i="0">
-                <a:solidFill>
-                  <a:srgbClr val="666666"/>
-                </a:solidFill>
-                <a:latin typeface="Calibri"/>
-              </a:rPr>
-              <a:t>Entrega del taller · en la fecha que indique el docente</a:t>
-            </a:r>
-          </a:p>
-        </p:txBody>
-      </p:sp>
-      <p:sp>
-        <p:nvSpPr>
-          <p:cNvPr id="21" name="TextBox 20"/>
+              <a:rPr sz="2000" b="0" i="0">
+                <a:solidFill>
+                  <a:srgbClr val="333333"/>
+                </a:solidFill>
+                <a:latin typeface="Calibri"/>
+              </a:rPr>
+              <a:t>–   El veterinario atiende, registra la consulta y si formula medicamentos el flujo se abre en dos ramas paralelas, una de facturacion y otra de programacion del control.</a:t>
+            </a:r>
+          </a:p>
+          <a:p>
+            <a:pPr>
+              <a:spcAft>
+                <a:spcPts val="800"/>
+              </a:spcAft>
+            </a:pPr>
+            <a:r>
+              <a:rPr sz="2000" b="0" i="0">
+                <a:solidFill>
+                  <a:srgbClr val="333333"/>
+                </a:solidFill>
+                <a:latin typeface="Calibri"/>
+              </a:rPr>
+              <a:t>–   Ese dibujo revela algo que ni los casos de uso ni las clases muestran: donde estan los cuellos de botella del proceso real de la clinica.</a:t>
+            </a:r>
+          </a:p>
+        </p:txBody>
+      </p:sp>
+      <p:sp>
+        <p:nvSpPr>
+          <p:cNvPr id="6" name="TextBox 5"/>
           <p:cNvSpPr txBox="1"/>
           <p:nvPr/>
         </p:nvSpPr>
@@ -9754,7 +11354,7 @@
                 </a:solidFill>
                 <a:latin typeface="Calibri"/>
               </a:rPr>
-              <a:t>Taller PI — por que importa</a:t>
+              <a:t>La pregunta practica es cuando usar cada uno, y la respuesta se decide...</a:t>
             </a:r>
           </a:p>
         </p:txBody>
@@ -9787,31 +11387,13 @@
               </a:spcAft>
             </a:pPr>
             <a:r>
-              <a:rPr sz="2000" b="0" i="0">
+              <a:rPr sz="1900" b="0" i="0">
                 <a:solidFill>
                   <a:srgbClr val="333333"/>
                 </a:solidFill>
                 <a:latin typeface="Calibri"/>
               </a:rPr>
-              <a:t>–   </a:t>
-            </a:r>
-            <a:r>
-              <a:rPr sz="2000" b="1" i="0">
-                <a:solidFill>
-                  <a:srgbClr val="333333"/>
-                </a:solidFill>
-                <a:latin typeface="Calibri"/>
-              </a:rPr>
-              <a:t>Por que importa al PI:</a:t>
-            </a:r>
-            <a:r>
-              <a:rPr sz="2000" b="0" i="0">
-                <a:solidFill>
-                  <a:srgbClr val="333333"/>
-                </a:solidFill>
-                <a:latin typeface="Calibri"/>
-              </a:rPr>
-              <a:t> los casos de uso dicen que hace VetCare y el diagrama de clases dice de que esta hecho, pero solo los diagramas de secuencia y actividad muestran como colaboran las piezas en el tiempo, que es lo que necesita quien vaya a construirlo.</a:t>
+              <a:t>–   La pregunta practica es cuando usar cada uno, y la respuesta se decide por el tipo de duda que se quiere resolver.</a:t>
             </a:r>
           </a:p>
           <a:p>
@@ -9821,13 +11403,13 @@
               </a:spcAft>
             </a:pPr>
             <a:r>
-              <a:rPr sz="2000" b="0" i="0">
+              <a:rPr sz="1900" b="0" i="0">
                 <a:solidFill>
                   <a:srgbClr val="333333"/>
                 </a:solidFill>
                 <a:latin typeface="Calibri"/>
               </a:rPr>
-              <a:t>–   Dibujar la secuencia es la forma mas barata de descubrir que al diagrama de clases le faltan operaciones, porque cada flecha exige un dueño que la pueda responder.</a:t>
+              <a:t>–   Si la duda es de responsabilidades, es decir, cual objeto deberia encargarse de esto y con quien tiene que hablar para lograrlo, el diagrama correcto es el de secuencia</a:t>
             </a:r>
           </a:p>
           <a:p>
@@ -9837,13 +11419,77 @@
               </a:spcAft>
             </a:pPr>
             <a:r>
-              <a:rPr sz="2000" b="0" i="0">
+              <a:rPr sz="1900" b="0" i="0">
                 <a:solidFill>
                   <a:srgbClr val="333333"/>
                 </a:solidFill>
                 <a:latin typeface="Calibri"/>
               </a:rPr>
-              <a:t>–   El diagrama de actividad es el unico artefacto del paquete que muestra el trabajo humano de la clinica Huellitas, incluidas las esperas y las decisiones que ocurren fuera del computador.</a:t>
+              <a:t>–   Porque obliga a que cada mensaje tenga un destinatario concreto y por lo tanto una clase que lo sepa atender.</a:t>
+            </a:r>
+          </a:p>
+          <a:p>
+            <a:pPr>
+              <a:spcAft>
+                <a:spcPts val="800"/>
+              </a:spcAft>
+            </a:pPr>
+            <a:r>
+              <a:rPr sz="1900" b="0" i="0">
+                <a:solidFill>
+                  <a:srgbClr val="333333"/>
+                </a:solidFill>
+                <a:latin typeface="Calibri"/>
+              </a:rPr>
+              <a:t>–   Si la duda es de proceso, es decir, en que orden hace la gente las cosas, donde se decide algo y que pasa en paralelo, el diagrama correcto es el de actividad</a:t>
+            </a:r>
+          </a:p>
+          <a:p>
+            <a:pPr>
+              <a:spcAft>
+                <a:spcPts val="800"/>
+              </a:spcAft>
+            </a:pPr>
+            <a:r>
+              <a:rPr sz="1900" b="0" i="0">
+                <a:solidFill>
+                  <a:srgbClr val="333333"/>
+                </a:solidFill>
+                <a:latin typeface="Calibri"/>
+              </a:rPr>
+              <a:t>–   Porque admite pasos manuales, decisiones del negocio y actores humanos que no son objetos de software.</a:t>
+            </a:r>
+          </a:p>
+          <a:p>
+            <a:pPr>
+              <a:spcAft>
+                <a:spcPts val="800"/>
+              </a:spcAft>
+            </a:pPr>
+            <a:r>
+              <a:rPr sz="1900" b="0" i="0">
+                <a:solidFill>
+                  <a:srgbClr val="333333"/>
+                </a:solidFill>
+                <a:latin typeface="Calibri"/>
+              </a:rPr>
+              <a:t>–   Una regla practica para el aula: el diagrama de secuencia se dibuja para un caso de uso y suele cubrir su flujo principal; el diagrama de actividad se dibuja para un proceso de negocio que puede atravesar varios casos de uso.</a:t>
+            </a:r>
+          </a:p>
+          <a:p>
+            <a:pPr>
+              <a:spcAft>
+                <a:spcPts val="800"/>
+              </a:spcAft>
+            </a:pPr>
+            <a:r>
+              <a:rPr sz="1900" b="0" i="0">
+                <a:solidFill>
+                  <a:srgbClr val="333333"/>
+                </a:solidFill>
+                <a:latin typeface="Calibri"/>
+              </a:rPr>
+              <a:t>–   En VetCare, CU-04 Agendar cita se modela con secuencia; la atencion completa desde que el propietario entra por la puerta hasta que sale con la factura se modela con actividad, porque incluye conversaciones y esperas que ningun objeto del sistema ejecuta.</a:t>
             </a:r>
           </a:p>
         </p:txBody>
@@ -10024,7 +11670,7 @@
                 </a:solidFill>
                 <a:latin typeface="Calibri"/>
               </a:rPr>
-              <a:t>Taller PI — punto de partida</a:t>
+              <a:t>Estos diagramas no se inventan desde cero: se derivan de lo que ya esta...</a:t>
             </a:r>
           </a:p>
         </p:txBody>
@@ -10063,7 +11709,7 @@
                 </a:solidFill>
                 <a:latin typeface="Calibri"/>
               </a:rPr>
-              <a:t>–   VetCare ya tiene casos de uso especificados y un diagrama de clases con multiplicidades, pero ningun documento explica el orden en que los objetos se comunican para cumplir un caso de uso.</a:t>
+              <a:t>–   Estos diagramas no se inventan desde cero: se derivan de lo que ya esta escrito, y ahi esta la parte que separa a un estudiante que entendio de uno que solo dibujo.</a:t>
             </a:r>
           </a:p>
           <a:p>
@@ -10079,7 +11725,7 @@
                 </a:solidFill>
                 <a:latin typeface="Calibri"/>
               </a:rPr>
-              <a:t>–   En Huellitas, agendar una cita depende de la disponibilidad del veterinario y hoy eso se resuelve preguntando en voz alta al fondo del consultorio, sin ninguna regla escrita.</a:t>
+              <a:t>–   Cada paso del flujo principal del caso de uso se convierte en uno o varios mensajes del diagrama de secuencia, en el mismo orden y con los mismos nombres del glosario canonico que se fijo en la auditoria de la clase once.</a:t>
             </a:r>
           </a:p>
           <a:p>
@@ -10095,7 +11741,71 @@
                 </a:solidFill>
                 <a:latin typeface="Calibri"/>
               </a:rPr>
-              <a:t>–   El equipo tiende a dibujar cajas y flechas por intuicion, sin volver a mirar el flujo principal que ya habia escrito hace tres sesiones.</a:t>
+              <a:t>–   Si el paso 2 de CU-04 dice que el sistema verifica la disponibilidad del veterinario para esa fecha, entonces debe existir un mensaje llamado consultarDisponibilidad dirigido a algun participante</a:t>
+            </a:r>
+          </a:p>
+          <a:p>
+            <a:pPr>
+              <a:spcAft>
+                <a:spcPts val="800"/>
+              </a:spcAft>
+            </a:pPr>
+            <a:r>
+              <a:rPr sz="2000" b="0" i="0">
+                <a:solidFill>
+                  <a:srgbClr val="333333"/>
+                </a:solidFill>
+                <a:latin typeface="Calibri"/>
+              </a:rPr>
+              <a:t>–   Y ese participante debe ser una clase que exista en el diagrama de clases.</a:t>
+            </a:r>
+          </a:p>
+          <a:p>
+            <a:pPr>
+              <a:spcAft>
+                <a:spcPts val="800"/>
+              </a:spcAft>
+            </a:pPr>
+            <a:r>
+              <a:rPr sz="2000" b="0" i="0">
+                <a:solidFill>
+                  <a:srgbClr val="333333"/>
+                </a:solidFill>
+                <a:latin typeface="Calibri"/>
+              </a:rPr>
+              <a:t>–   Aqui aparece el hallazgo tipico y valiosisimo: al dibujar la secuencia el equipo descubre que envio un mensaje a una clase que no tiene esa operacion, o peor, a una clase que no existe.</a:t>
+            </a:r>
+          </a:p>
+          <a:p>
+            <a:pPr>
+              <a:spcAft>
+                <a:spcPts val="800"/>
+              </a:spcAft>
+            </a:pPr>
+            <a:r>
+              <a:rPr sz="2000" b="0" i="0">
+                <a:solidFill>
+                  <a:srgbClr val="333333"/>
+                </a:solidFill>
+                <a:latin typeface="Calibri"/>
+              </a:rPr>
+              <a:t>–   Eso no es un fracaso del diagrama de secuencia, es su mayor utilidad, porque es la unica manera barata de detectar que el modelo estatico estaba incompleto.</a:t>
+            </a:r>
+          </a:p>
+          <a:p>
+            <a:pPr>
+              <a:spcAft>
+                <a:spcPts val="800"/>
+              </a:spcAft>
+            </a:pPr>
+            <a:r>
+              <a:rPr sz="2000" b="0" i="0">
+                <a:solidFill>
+                  <a:srgbClr val="333333"/>
+                </a:solidFill>
+                <a:latin typeface="Calibri"/>
+              </a:rPr>
+              <a:t>–   Por eso el entregable de hoy incluye la tabla de mapeo mensaje a operacion: obliga a cerrar el circulo entre lo dinamico y lo estatico.</a:t>
             </a:r>
           </a:p>
         </p:txBody>

--- a/Seminario de Sistemas/Clases/Clase 12 - Diagramas UML avanzados/Presentacion.pptx
+++ b/Seminario de Sistemas/Clases/Clase 12 - Diagramas UML avanzados/Presentacion.pptx
@@ -25,6 +25,8 @@
     <p:sldId id="273" r:id="rId24"/>
     <p:sldId id="274" r:id="rId25"/>
     <p:sldId id="275" r:id="rId26"/>
+    <p:sldId id="276" r:id="rId27"/>
+    <p:sldId id="277" r:id="rId28"/>
   </p:sldIdLst>
   <p:sldSz cx="12191695" cy="6858000" type="screen4x3"/>
   <p:notesSz cx="6858000" cy="9144000"/>
@@ -3625,7 +3627,7 @@
                 </a:solidFill>
                 <a:latin typeface="Calibri"/>
               </a:rPr>
-              <a:t>Los flujos alternos tambien se modelan, y para eso existen los...</a:t>
+              <a:t>Estos diagramas no se inventan desde cero: se derivan de lo que ya esta...</a:t>
             </a:r>
           </a:p>
         </p:txBody>
@@ -3664,7 +3666,7 @@
                 </a:solidFill>
                 <a:latin typeface="Calibri"/>
               </a:rPr>
-              <a:t>–   Los flujos alternos tambien se modelan, y para eso existen los fragmentos combinados, que son esos recuadros con una etiqueta en la esquina.</a:t>
+              <a:t>–   Estos diagramas no se inventan desde cero: se derivan de lo que ya esta escrito, y ahi esta la parte que separa a un estudiante que entendio de uno que solo dibujo.</a:t>
             </a:r>
           </a:p>
           <a:p>
@@ -3680,7 +3682,7 @@
                 </a:solidFill>
                 <a:latin typeface="Calibri"/>
               </a:rPr>
-              <a:t>–   El fragmento alt representa caminos excluyentes con sus condiciones de guarda escritas entre corchetes</a:t>
+              <a:t>–   Si el paso 2 de CU-04 dice que el sistema verifica la disponibilidad del veterinario para esa fecha, entonces debe existir un mensaje llamado consultarDisponibilidad dirigido a algun participante</a:t>
             </a:r>
           </a:p>
           <a:p>
@@ -3696,7 +3698,7 @@
                 </a:solidFill>
                 <a:latin typeface="Calibri"/>
               </a:rPr>
-              <a:t>–   Y es el que usamos en VetCare para el horario ocupado: si hay disponibilidad se guarda la cita y se confirma, si no la hay el sistema ofrece alternativas del dia siguiente.</a:t>
+              <a:t>–   Y ese participante debe ser una clase que exista en el diagrama de clases.</a:t>
             </a:r>
           </a:p>
           <a:p>
@@ -3712,55 +3714,7 @@
                 </a:solidFill>
                 <a:latin typeface="Calibri"/>
               </a:rPr>
-              <a:t>–   El fragmento opt es un camino opcional que puede ocurrir o no, como enviar el recordatorio si el propietario autorizo mensajeria.</a:t>
-            </a:r>
-          </a:p>
-          <a:p>
-            <a:pPr>
-              <a:spcAft>
-                <a:spcPts val="800"/>
-              </a:spcAft>
-            </a:pPr>
-            <a:r>
-              <a:rPr sz="2000" b="0" i="0">
-                <a:solidFill>
-                  <a:srgbClr val="333333"/>
-                </a:solidFill>
-                <a:latin typeface="Calibri"/>
-              </a:rPr>
-              <a:t>–   El fragmento loop repite un bloque, por ejemplo mientras el veterinario agrega varias vacunas al expediente.</a:t>
-            </a:r>
-          </a:p>
-          <a:p>
-            <a:pPr>
-              <a:spcAft>
-                <a:spcPts val="800"/>
-              </a:spcAft>
-            </a:pPr>
-            <a:r>
-              <a:rPr sz="2000" b="0" i="0">
-                <a:solidFill>
-                  <a:srgbClr val="333333"/>
-                </a:solidFill>
-                <a:latin typeface="Calibri"/>
-              </a:rPr>
-              <a:t>–   La disciplina que hay que enseñar aqui es de alcance: un diagrama de secuencia no debe intentar mostrar los quince alternos posibles, porque se vuelve ilegible y nadie lo lee.</a:t>
-            </a:r>
-          </a:p>
-          <a:p>
-            <a:pPr>
-              <a:spcAft>
-                <a:spcPts val="800"/>
-              </a:spcAft>
-            </a:pPr>
-            <a:r>
-              <a:rPr sz="2000" b="0" i="0">
-                <a:solidFill>
-                  <a:srgbClr val="333333"/>
-                </a:solidFill>
-                <a:latin typeface="Calibri"/>
-              </a:rPr>
-              <a:t>–   La practica sana es dibujar el camino feliz completo mas uno o dos fragmentos que representen las decisiones criticas del negocio, y dejar el resto documentado en el texto de la especificacion, que para eso existe.</a:t>
+              <a:t>–   Aqui aparece el hallazgo tipico y valiosisimo: al dibujar la secuencia el equipo descubre que envio un mensaje a una clase que no tiene esa operacion, o peor, a una clase que no existe.</a:t>
             </a:r>
           </a:p>
         </p:txBody>
@@ -3941,141 +3895,21 @@
                 </a:solidFill>
                 <a:latin typeface="Calibri"/>
               </a:rPr>
-              <a:t>Secuencia de CU-04 Agendar cita en sintaxis Mermaid</a:t>
-            </a:r>
-          </a:p>
-        </p:txBody>
-      </p:sp>
-      <p:sp>
-        <p:nvSpPr>
-          <p:cNvPr id="5" name="Rounded Rectangle 4"/>
-          <p:cNvSpPr/>
-          <p:nvPr/>
-        </p:nvSpPr>
-        <p:spPr>
-          <a:xfrm>
-            <a:off x="457200" y="1261872"/>
-            <a:ext cx="11277295" cy="4773168"/>
-          </a:xfrm>
-          <a:prstGeom prst="roundRect">
-            <a:avLst>
-              <a:gd name="adj" fmla="val 12000"/>
-            </a:avLst>
-          </a:prstGeom>
-          <a:solidFill>
-            <a:srgbClr val="1E2A38"/>
-          </a:solidFill>
-          <a:ln>
-            <a:noFill/>
-          </a:ln>
-        </p:spPr>
-        <p:style>
-          <a:lnRef idx="1">
-            <a:schemeClr val="accent1"/>
-          </a:lnRef>
-          <a:fillRef idx="3">
-            <a:schemeClr val="accent1"/>
-          </a:fillRef>
-          <a:effectRef idx="2">
-            <a:schemeClr val="accent1"/>
-          </a:effectRef>
-          <a:fontRef idx="minor">
-            <a:schemeClr val="lt1"/>
-          </a:fontRef>
-        </p:style>
-        <p:txBody>
-          <a:bodyPr rtlCol="0" anchor="ctr"/>
-          <a:lstStyle/>
-          <a:p>
-            <a:pPr algn="ctr"/>
-          </a:p>
-        </p:txBody>
-      </p:sp>
-      <p:sp>
-        <p:nvSpPr>
-          <p:cNvPr id="6" name="Rectangle 5"/>
-          <p:cNvSpPr/>
-          <p:nvPr/>
-        </p:nvSpPr>
-        <p:spPr>
-          <a:xfrm>
-            <a:off x="457200" y="1261872"/>
-            <a:ext cx="11277295" cy="320040"/>
-          </a:xfrm>
-          <a:prstGeom prst="rect">
-            <a:avLst/>
-          </a:prstGeom>
-          <a:solidFill>
-            <a:srgbClr val="095292"/>
-          </a:solidFill>
-          <a:ln>
-            <a:noFill/>
-          </a:ln>
-        </p:spPr>
-        <p:style>
-          <a:lnRef idx="1">
-            <a:schemeClr val="accent1"/>
-          </a:lnRef>
-          <a:fillRef idx="3">
-            <a:schemeClr val="accent1"/>
-          </a:fillRef>
-          <a:effectRef idx="2">
-            <a:schemeClr val="accent1"/>
-          </a:effectRef>
-          <a:fontRef idx="minor">
-            <a:schemeClr val="lt1"/>
-          </a:fontRef>
-        </p:style>
-        <p:txBody>
-          <a:bodyPr rtlCol="0" anchor="ctr"/>
-          <a:lstStyle/>
-          <a:p>
-            <a:pPr algn="ctr"/>
-          </a:p>
-        </p:txBody>
-      </p:sp>
-      <p:sp>
-        <p:nvSpPr>
-          <p:cNvPr id="7" name="TextBox 6"/>
+              <a:t>Los flujos alternos tambien se modelan, y para eso existen los... (1/2)</a:t>
+            </a:r>
+          </a:p>
+        </p:txBody>
+      </p:sp>
+      <p:sp>
+        <p:nvSpPr>
+          <p:cNvPr id="5" name="TextBox 4"/>
           <p:cNvSpPr txBox="1"/>
           <p:nvPr/>
         </p:nvSpPr>
         <p:spPr>
           <a:xfrm>
-            <a:off x="685800" y="1307592"/>
-            <a:ext cx="10820095" cy="256032"/>
-          </a:xfrm>
-          <a:prstGeom prst="rect">
-            <a:avLst/>
-          </a:prstGeom>
-          <a:noFill/>
-        </p:spPr>
-        <p:txBody>
-          <a:bodyPr wrap="square" anchor="ctr"/>
-          <a:lstStyle/>
-          <a:p>
-            <a:r>
-              <a:rPr sz="1000" b="1" i="0">
-                <a:solidFill>
-                  <a:srgbClr val="269CCB"/>
-                </a:solidFill>
-                <a:latin typeface="Calibri"/>
-              </a:rPr>
-              <a:t>● ● ●</a:t>
-            </a:r>
-          </a:p>
-        </p:txBody>
-      </p:sp>
-      <p:sp>
-        <p:nvSpPr>
-          <p:cNvPr id="8" name="TextBox 7"/>
-          <p:cNvSpPr txBox="1"/>
-          <p:nvPr/>
-        </p:nvSpPr>
-        <p:spPr>
-          <a:xfrm>
-            <a:off x="777240" y="1719072"/>
-            <a:ext cx="5181447" cy="4133087"/>
+            <a:off x="457200" y="1170432"/>
+            <a:ext cx="11277295" cy="5230368"/>
           </a:xfrm>
           <a:prstGeom prst="rect">
             <a:avLst/>
@@ -4090,370 +3924,72 @@
           <a:p>
             <a:pPr>
               <a:spcAft>
-                <a:spcPts val="400"/>
+                <a:spcPts val="800"/>
               </a:spcAft>
             </a:pPr>
             <a:r>
-              <a:rPr sz="1400" b="0" i="0">
-                <a:solidFill>
-                  <a:srgbClr val="FFFFFF"/>
-                </a:solidFill>
-                <a:latin typeface="Calibri"/>
-              </a:rPr>
-              <a:t>sequenceDiagram</a:t>
+              <a:rPr sz="2000" b="0" i="0">
+                <a:solidFill>
+                  <a:srgbClr val="333333"/>
+                </a:solidFill>
+                <a:latin typeface="Calibri"/>
+              </a:rPr>
+              <a:t>–   Los flujos alternos tambien se modelan, y para eso existen los fragmentos combinados, que son esos recuadros con una etiqueta en la esquina.</a:t>
             </a:r>
           </a:p>
           <a:p>
             <a:pPr>
               <a:spcAft>
-                <a:spcPts val="400"/>
+                <a:spcPts val="800"/>
               </a:spcAft>
             </a:pPr>
             <a:r>
-              <a:rPr sz="1400" b="0" i="0">
-                <a:solidFill>
-                  <a:srgbClr val="FFFFFF"/>
-                </a:solidFill>
-                <a:latin typeface="Calibri"/>
-              </a:rPr>
-              <a:t>    actor Recepcionista</a:t>
+              <a:rPr sz="2000" b="0" i="0">
+                <a:solidFill>
+                  <a:srgbClr val="333333"/>
+                </a:solidFill>
+                <a:latin typeface="Calibri"/>
+              </a:rPr>
+              <a:t>–   El fragmento alt representa caminos excluyentes con sus condiciones de guarda escritas entre corchetes</a:t>
             </a:r>
           </a:p>
           <a:p>
             <a:pPr>
               <a:spcAft>
-                <a:spcPts val="400"/>
+                <a:spcPts val="800"/>
               </a:spcAft>
             </a:pPr>
             <a:r>
-              <a:rPr sz="1400" b="0" i="0">
-                <a:solidFill>
-                  <a:srgbClr val="FFFFFF"/>
-                </a:solidFill>
-                <a:latin typeface="Calibri"/>
-              </a:rPr>
-              <a:t>    participant UI as :PantallaAgenda</a:t>
+              <a:rPr sz="2000" b="0" i="0">
+                <a:solidFill>
+                  <a:srgbClr val="333333"/>
+                </a:solidFill>
+                <a:latin typeface="Calibri"/>
+              </a:rPr>
+              <a:t>–   Y es el que usamos en VetCare para el horario ocupado: si hay disponibilidad se guarda la cita y se confirma, si no la hay el sistema ofrece alternativas del dia siguiente.</a:t>
             </a:r>
           </a:p>
           <a:p>
             <a:pPr>
               <a:spcAft>
-                <a:spcPts val="400"/>
+                <a:spcPts val="800"/>
               </a:spcAft>
             </a:pPr>
             <a:r>
-              <a:rPr sz="1400" b="0" i="0">
-                <a:solidFill>
-                  <a:srgbClr val="FFFFFF"/>
-                </a:solidFill>
-                <a:latin typeface="Calibri"/>
-              </a:rPr>
-              <a:t>    participant CTRL as :ControlAgenda</a:t>
-            </a:r>
-          </a:p>
-          <a:p>
-            <a:pPr>
-              <a:spcAft>
-                <a:spcPts val="400"/>
-              </a:spcAft>
-            </a:pPr>
-            <a:r>
-              <a:rPr sz="1400" b="0" i="0">
-                <a:solidFill>
-                  <a:srgbClr val="FFFFFF"/>
-                </a:solidFill>
-                <a:latin typeface="Calibri"/>
-              </a:rPr>
-              <a:t>    participant REPM as :RepositorioMascotas</a:t>
-            </a:r>
-          </a:p>
-          <a:p>
-            <a:pPr>
-              <a:spcAft>
-                <a:spcPts val="400"/>
-              </a:spcAft>
-            </a:pPr>
-            <a:r>
-              <a:rPr sz="1400" b="0" i="0">
-                <a:solidFill>
-                  <a:srgbClr val="FFFFFF"/>
-                </a:solidFill>
-                <a:latin typeface="Calibri"/>
-              </a:rPr>
-              <a:t>    participant REPC as :RepositorioCitas</a:t>
-            </a:r>
-          </a:p>
-          <a:p>
-            <a:pPr>
-              <a:spcAft>
-                <a:spcPts val="400"/>
-              </a:spcAft>
-            </a:pPr>
-            <a:r>
-              <a:rPr sz="1400" b="0" i="0">
-                <a:solidFill>
-                  <a:srgbClr val="FFFFFF"/>
-                </a:solidFill>
-                <a:latin typeface="Calibri"/>
-              </a:rPr>
-              <a:t>    Recepcionista-&gt;&gt;UI: solicitarAgendamiento(codigoMascota, fecha)</a:t>
-            </a:r>
-          </a:p>
-          <a:p>
-            <a:pPr>
-              <a:spcAft>
-                <a:spcPts val="400"/>
-              </a:spcAft>
-            </a:pPr>
-            <a:r>
-              <a:rPr sz="1400" b="0" i="0">
-                <a:solidFill>
-                  <a:srgbClr val="FFFFFF"/>
-                </a:solidFill>
-                <a:latin typeface="Calibri"/>
-              </a:rPr>
-              <a:t>    UI-&gt;&gt;CTRL: agendarCita(codigoMascota, fecha, idVeterinario)</a:t>
-            </a:r>
-          </a:p>
-          <a:p>
-            <a:pPr>
-              <a:spcAft>
-                <a:spcPts val="400"/>
-              </a:spcAft>
-            </a:pPr>
-            <a:r>
-              <a:rPr sz="1400" b="0" i="0">
-                <a:solidFill>
-                  <a:srgbClr val="FFFFFF"/>
-                </a:solidFill>
-                <a:latin typeface="Calibri"/>
-              </a:rPr>
-              <a:t>    CTRL-&gt;&gt;REPM: existePorCodigo(codigoMascota)</a:t>
-            </a:r>
-          </a:p>
-          <a:p>
-            <a:pPr>
-              <a:spcAft>
-                <a:spcPts val="400"/>
-              </a:spcAft>
-            </a:pPr>
-            <a:r>
-              <a:rPr sz="1400" b="0" i="0">
-                <a:solidFill>
-                  <a:srgbClr val="FFFFFF"/>
-                </a:solidFill>
-                <a:latin typeface="Calibri"/>
-              </a:rPr>
-              <a:t>    REPM--&gt;&gt;CTRL: mascota</a:t>
-            </a:r>
-          </a:p>
-        </p:txBody>
-      </p:sp>
-      <p:sp>
-        <p:nvSpPr>
-          <p:cNvPr id="9" name="TextBox 8"/>
-          <p:cNvSpPr txBox="1"/>
-          <p:nvPr/>
-        </p:nvSpPr>
-        <p:spPr>
-          <a:xfrm>
-            <a:off x="6233007" y="1719072"/>
-            <a:ext cx="5181447" cy="4133087"/>
-          </a:xfrm>
-          <a:prstGeom prst="rect">
-            <a:avLst/>
-          </a:prstGeom>
-          <a:noFill/>
-        </p:spPr>
-        <p:txBody>
-          <a:bodyPr wrap="square">
-            <a:spAutoFit/>
-          </a:bodyPr>
-          <a:lstStyle/>
-          <a:p>
-            <a:pPr>
-              <a:spcAft>
-                <a:spcPts val="400"/>
-              </a:spcAft>
-            </a:pPr>
-            <a:r>
-              <a:rPr sz="1400" b="0" i="0">
-                <a:solidFill>
-                  <a:srgbClr val="FFFFFF"/>
-                </a:solidFill>
-                <a:latin typeface="Calibri"/>
-              </a:rPr>
-              <a:t>    CTRL-&gt;&gt;REPC: consultarDisponibilidad(idVeterinario, fecha)</a:t>
-            </a:r>
-          </a:p>
-          <a:p>
-            <a:pPr>
-              <a:spcAft>
-                <a:spcPts val="400"/>
-              </a:spcAft>
-            </a:pPr>
-            <a:r>
-              <a:rPr sz="1400" b="0" i="0">
-                <a:solidFill>
-                  <a:srgbClr val="FFFFFF"/>
-                </a:solidFill>
-                <a:latin typeface="Calibri"/>
-              </a:rPr>
-              <a:t>    REPC--&gt;&gt;CTRL: horariosLibres</a:t>
-            </a:r>
-          </a:p>
-          <a:p>
-            <a:pPr>
-              <a:spcAft>
-                <a:spcPts val="400"/>
-              </a:spcAft>
-            </a:pPr>
-            <a:r>
-              <a:rPr sz="1400" b="0" i="0">
-                <a:solidFill>
-                  <a:srgbClr val="FFFFFF"/>
-                </a:solidFill>
-                <a:latin typeface="Calibri"/>
-              </a:rPr>
-              <a:t>    alt hay horario libre</a:t>
-            </a:r>
-          </a:p>
-          <a:p>
-            <a:pPr>
-              <a:spcAft>
-                <a:spcPts val="400"/>
-              </a:spcAft>
-            </a:pPr>
-            <a:r>
-              <a:rPr sz="1400" b="0" i="0">
-                <a:solidFill>
-                  <a:srgbClr val="FFFFFF"/>
-                </a:solidFill>
-                <a:latin typeface="Calibri"/>
-              </a:rPr>
-              <a:t>        CTRL-&gt;&gt;REPC: guardarCita(cita)</a:t>
-            </a:r>
-          </a:p>
-          <a:p>
-            <a:pPr>
-              <a:spcAft>
-                <a:spcPts val="400"/>
-              </a:spcAft>
-            </a:pPr>
-            <a:r>
-              <a:rPr sz="1400" b="0" i="0">
-                <a:solidFill>
-                  <a:srgbClr val="FFFFFF"/>
-                </a:solidFill>
-                <a:latin typeface="Calibri"/>
-              </a:rPr>
-              <a:t>        REPC--&gt;&gt;CTRL: idCita</a:t>
-            </a:r>
-          </a:p>
-          <a:p>
-            <a:pPr>
-              <a:spcAft>
-                <a:spcPts val="400"/>
-              </a:spcAft>
-            </a:pPr>
-            <a:r>
-              <a:rPr sz="1400" b="0" i="0">
-                <a:solidFill>
-                  <a:srgbClr val="FFFFFF"/>
-                </a:solidFill>
-                <a:latin typeface="Calibri"/>
-              </a:rPr>
-              <a:t>        CTRL--&gt;&gt;UI: confirmacion(idCita)</a:t>
-            </a:r>
-          </a:p>
-          <a:p>
-            <a:pPr>
-              <a:spcAft>
-                <a:spcPts val="400"/>
-              </a:spcAft>
-            </a:pPr>
-            <a:r>
-              <a:rPr sz="1400" b="0" i="0">
-                <a:solidFill>
-                  <a:srgbClr val="FFFFFF"/>
-                </a:solidFill>
-                <a:latin typeface="Calibri"/>
-              </a:rPr>
-              <a:t>    else no hay horario libre</a:t>
-            </a:r>
-          </a:p>
-          <a:p>
-            <a:pPr>
-              <a:spcAft>
-                <a:spcPts val="400"/>
-              </a:spcAft>
-            </a:pPr>
-            <a:r>
-              <a:rPr sz="1400" b="0" i="0">
-                <a:solidFill>
-                  <a:srgbClr val="FFFFFF"/>
-                </a:solidFill>
-                <a:latin typeface="Calibri"/>
-              </a:rPr>
-              <a:t>        CTRL--&gt;&gt;UI: alternativas(dia siguiente)</a:t>
-            </a:r>
-          </a:p>
-          <a:p>
-            <a:pPr>
-              <a:spcAft>
-                <a:spcPts val="400"/>
-              </a:spcAft>
-            </a:pPr>
-            <a:r>
-              <a:rPr sz="1400" b="0" i="0">
-                <a:solidFill>
-                  <a:srgbClr val="FFFFFF"/>
-                </a:solidFill>
-                <a:latin typeface="Calibri"/>
-              </a:rPr>
-              <a:t>    end</a:t>
-            </a:r>
-          </a:p>
-        </p:txBody>
-      </p:sp>
-      <p:sp>
-        <p:nvSpPr>
-          <p:cNvPr id="10" name="TextBox 9"/>
-          <p:cNvSpPr txBox="1"/>
-          <p:nvPr/>
-        </p:nvSpPr>
-        <p:spPr>
-          <a:xfrm>
-            <a:off x="457200" y="6080760"/>
-            <a:ext cx="11277295" cy="320040"/>
-          </a:xfrm>
-          <a:prstGeom prst="rect">
-            <a:avLst/>
-          </a:prstGeom>
-          <a:noFill/>
-        </p:spPr>
-        <p:txBody>
-          <a:bodyPr wrap="square">
-            <a:spAutoFit/>
-          </a:bodyPr>
-          <a:lstStyle/>
-          <a:p>
-            <a:pPr algn="ctr"/>
-            <a:r>
-              <a:rPr sz="1200" b="0" i="1">
-                <a:solidFill>
-                  <a:srgbClr val="666666"/>
-                </a:solidFill>
-                <a:latin typeface="Calibri"/>
-              </a:rPr>
-              <a:t>Cada flecha tiene que corresponder a una operacion existente en el diagrama de clases: si no existe, o falta la operacion o sobra la flecha.</a:t>
-            </a:r>
-          </a:p>
-        </p:txBody>
-      </p:sp>
-      <p:sp>
-        <p:nvSpPr>
-          <p:cNvPr id="11" name="TextBox 10"/>
+              <a:rPr sz="2000" b="0" i="0">
+                <a:solidFill>
+                  <a:srgbClr val="333333"/>
+                </a:solidFill>
+                <a:latin typeface="Calibri"/>
+              </a:rPr>
+              <a:t>–   El fragmento opt es un camino opcional que puede ocurrir o no, como enviar el recordatorio si el propietario autorizo mensajeria.</a:t>
+            </a:r>
+          </a:p>
+        </p:txBody>
+      </p:sp>
+      <p:sp>
+        <p:nvSpPr>
+          <p:cNvPr id="6" name="TextBox 5"/>
           <p:cNvSpPr txBox="1"/>
           <p:nvPr/>
         </p:nvSpPr>
@@ -4627,7 +4163,7 @@
                 </a:solidFill>
                 <a:latin typeface="Calibri"/>
               </a:rPr>
-              <a:t>Demo del dia</a:t>
+              <a:t>Los flujos alternos tambien se modelan, y para eso existen los... (2/2)</a:t>
             </a:r>
           </a:p>
         </p:txBody>
@@ -4666,25 +4202,7 @@
                 </a:solidFill>
                 <a:latin typeface="Calibri"/>
               </a:rPr>
-              <a:t>–   </a:t>
-            </a:r>
-            <a:r>
-              <a:rPr sz="2000" b="1" i="0">
-                <a:solidFill>
-                  <a:srgbClr val="333333"/>
-                </a:solidFill>
-                <a:latin typeface="Calibri"/>
-              </a:rPr>
-              <a:t>Herramienta:</a:t>
-            </a:r>
-            <a:r>
-              <a:rPr sz="2000" b="0" i="0">
-                <a:solidFill>
-                  <a:srgbClr val="333333"/>
-                </a:solidFill>
-                <a:latin typeface="Calibri"/>
-              </a:rPr>
-              <a:t> draw.io · Mermaid Live Editor</a:t>
+              <a:t>–   El fragmento loop repite un bloque, por ejemplo mientras el veterinario agrega varias vacunas al expediente.</a:t>
             </a:r>
           </a:p>
           <a:p>
@@ -4700,25 +4218,7 @@
                 </a:solidFill>
                 <a:latin typeface="Calibri"/>
               </a:rPr>
-              <a:t>–   </a:t>
-            </a:r>
-            <a:r>
-              <a:rPr sz="2000" b="1" i="0">
-                <a:solidFill>
-                  <a:srgbClr val="333333"/>
-                </a:solidFill>
-                <a:latin typeface="Calibri"/>
-              </a:rPr>
-              <a:t>Demo:</a:t>
-            </a:r>
-            <a:r>
-              <a:rPr sz="2000" b="0" i="0">
-                <a:solidFill>
-                  <a:srgbClr val="333333"/>
-                </a:solidFill>
-                <a:latin typeface="Calibri"/>
-              </a:rPr>
-              <a:t> El docente toma el flujo principal ya escrito de CU-04 Agendar cita y lo convierte linea por linea en mensajes de un diagrama de secuencia en Mermaid, mostrando en vivo que cada mensaje necesita una clase dueña que lo pueda responder.</a:t>
+              <a:t>–   La disciplina que hay que enseñar aqui es de alcance: un diagrama de secuencia no debe intentar mostrar los quince alternos posibles, porque se vuelve ilegible y nadie lo lee.</a:t>
             </a:r>
           </a:p>
           <a:p>
@@ -4734,7 +4234,7 @@
                 </a:solidFill>
                 <a:latin typeface="Calibri"/>
               </a:rPr>
-              <a:t>–   Mismo dominio VetCare — no otro ejemplo. Aqui se diseña, no se programa.</a:t>
+              <a:t>–   La practica sana es dibujar el camino feliz completo mas uno o dos fragmentos que representen las decisiones criticas del negocio, y dejar el resto documentado en el texto de la especificacion, que para eso existe.</a:t>
             </a:r>
           </a:p>
         </p:txBody>
@@ -4809,7 +4309,7 @@
         <p:spPr>
           <a:xfrm>
             <a:off x="0" y="0"/>
-            <a:ext cx="12191695" cy="1170432"/>
+            <a:ext cx="12191695" cy="960120"/>
           </a:xfrm>
           <a:prstGeom prst="rect">
             <a:avLst/>
@@ -4851,7 +4351,7 @@
         </p:nvSpPr>
         <p:spPr>
           <a:xfrm>
-            <a:off x="0" y="1170432"/>
+            <a:off x="0" y="960120"/>
             <a:ext cx="12191695" cy="41148"/>
           </a:xfrm>
           <a:prstGeom prst="rect">
@@ -4895,7 +4395,7 @@
         <p:spPr>
           <a:xfrm>
             <a:off x="457200" y="164592"/>
-            <a:ext cx="11277295" cy="384048"/>
+            <a:ext cx="11277295" cy="502920"/>
           </a:xfrm>
           <a:prstGeom prst="rect">
             <a:avLst/>
@@ -4915,55 +4415,21 @@
                 </a:solidFill>
                 <a:latin typeface="Calibri"/>
               </a:rPr>
-              <a:t>Herramientas de hoy</a:t>
-            </a:r>
-          </a:p>
-        </p:txBody>
-      </p:sp>
-      <p:sp>
-        <p:nvSpPr>
-          <p:cNvPr id="5" name="TextBox 4"/>
-          <p:cNvSpPr txBox="1"/>
-          <p:nvPr/>
-        </p:nvSpPr>
-        <p:spPr>
-          <a:xfrm>
-            <a:off x="457200" y="566928"/>
-            <a:ext cx="11277295" cy="411480"/>
-          </a:xfrm>
-          <a:prstGeom prst="rect">
-            <a:avLst/>
-          </a:prstGeom>
-          <a:noFill/>
-        </p:spPr>
-        <p:txBody>
-          <a:bodyPr wrap="square">
-            <a:spAutoFit/>
-          </a:bodyPr>
-          <a:lstStyle/>
-          <a:p>
-            <a:r>
-              <a:rPr sz="1400" b="0" i="0">
-                <a:solidFill>
-                  <a:srgbClr val="B8D8EE"/>
-                </a:solidFill>
-                <a:latin typeface="Calibri"/>
-              </a:rPr>
-              <a:t>Gratis · funcionan en el navegador</a:t>
-            </a:r>
-          </a:p>
-        </p:txBody>
-      </p:sp>
-      <p:sp>
-        <p:nvSpPr>
-          <p:cNvPr id="6" name="Rounded Rectangle 5"/>
+              <a:t>Secuencia de CU-04 Agendar cita en sintaxis Mermaid</a:t>
+            </a:r>
+          </a:p>
+        </p:txBody>
+      </p:sp>
+      <p:sp>
+        <p:nvSpPr>
+          <p:cNvPr id="5" name="Rounded Rectangle 4"/>
           <p:cNvSpPr/>
           <p:nvPr/>
         </p:nvSpPr>
         <p:spPr>
           <a:xfrm>
-            <a:off x="457200" y="1591056"/>
-            <a:ext cx="3624986" cy="2331720"/>
+            <a:off x="457200" y="1261872"/>
+            <a:ext cx="11277295" cy="4773168"/>
           </a:xfrm>
           <a:prstGeom prst="roundRect">
             <a:avLst>
@@ -4971,7 +4437,7 @@
             </a:avLst>
           </a:prstGeom>
           <a:solidFill>
-            <a:srgbClr val="F2F2F2"/>
+            <a:srgbClr val="1E2A38"/>
           </a:solidFill>
           <a:ln>
             <a:noFill/>
@@ -5001,14 +4467,14 @@
       </p:sp>
       <p:sp>
         <p:nvSpPr>
-          <p:cNvPr id="7" name="Rectangle 6"/>
+          <p:cNvPr id="6" name="Rectangle 5"/>
           <p:cNvSpPr/>
           <p:nvPr/>
         </p:nvSpPr>
         <p:spPr>
           <a:xfrm>
-            <a:off x="457200" y="1591056"/>
-            <a:ext cx="3624986" cy="64008"/>
+            <a:off x="457200" y="1261872"/>
+            <a:ext cx="11277295" cy="320040"/>
           </a:xfrm>
           <a:prstGeom prst="rect">
             <a:avLst/>
@@ -5044,71 +4510,386 @@
       </p:sp>
       <p:sp>
         <p:nvSpPr>
-          <p:cNvPr id="8" name="Rectangle 7"/>
-          <p:cNvSpPr/>
-          <p:nvPr/>
-        </p:nvSpPr>
-        <p:spPr>
-          <a:xfrm>
-            <a:off x="457200" y="1655064"/>
-            <a:ext cx="3624986" cy="27432"/>
-          </a:xfrm>
-          <a:prstGeom prst="rect">
-            <a:avLst/>
-          </a:prstGeom>
-          <a:solidFill>
-            <a:srgbClr val="FFD000"/>
-          </a:solidFill>
-          <a:ln>
-            <a:noFill/>
-          </a:ln>
-        </p:spPr>
-        <p:style>
-          <a:lnRef idx="1">
-            <a:schemeClr val="accent1"/>
-          </a:lnRef>
-          <a:fillRef idx="3">
-            <a:schemeClr val="accent1"/>
-          </a:fillRef>
-          <a:effectRef idx="2">
-            <a:schemeClr val="accent1"/>
-          </a:effectRef>
-          <a:fontRef idx="minor">
-            <a:schemeClr val="lt1"/>
-          </a:fontRef>
-        </p:style>
-        <p:txBody>
-          <a:bodyPr rtlCol="0" anchor="ctr"/>
-          <a:lstStyle/>
-          <a:p>
-            <a:pPr algn="ctr"/>
-          </a:p>
-        </p:txBody>
-      </p:sp>
-      <p:pic>
-        <p:nvPicPr>
-          <p:cNvPr id="9" name="Picture 8" descr="drawio.png"/>
-          <p:cNvPicPr>
-            <a:picLocks noChangeAspect="1"/>
-          </p:cNvPicPr>
-          <p:nvPr/>
-        </p:nvPicPr>
-        <p:blipFill>
-          <a:blip r:embed="rId2"/>
-          <a:stretch>
-            <a:fillRect/>
-          </a:stretch>
-        </p:blipFill>
-        <p:spPr>
-          <a:xfrm>
-            <a:off x="1643329" y="1847087"/>
-            <a:ext cx="1252728" cy="1252728"/>
-          </a:xfrm>
-          <a:prstGeom prst="rect">
-            <a:avLst/>
-          </a:prstGeom>
-        </p:spPr>
-      </p:pic>
+          <p:cNvPr id="7" name="TextBox 6"/>
+          <p:cNvSpPr txBox="1"/>
+          <p:nvPr/>
+        </p:nvSpPr>
+        <p:spPr>
+          <a:xfrm>
+            <a:off x="685800" y="1307592"/>
+            <a:ext cx="10820095" cy="256032"/>
+          </a:xfrm>
+          <a:prstGeom prst="rect">
+            <a:avLst/>
+          </a:prstGeom>
+          <a:noFill/>
+        </p:spPr>
+        <p:txBody>
+          <a:bodyPr wrap="square" anchor="ctr"/>
+          <a:lstStyle/>
+          <a:p>
+            <a:r>
+              <a:rPr sz="1000" b="1" i="0">
+                <a:solidFill>
+                  <a:srgbClr val="269CCB"/>
+                </a:solidFill>
+                <a:latin typeface="Calibri"/>
+              </a:rPr>
+              <a:t>● ● ●</a:t>
+            </a:r>
+          </a:p>
+        </p:txBody>
+      </p:sp>
+      <p:sp>
+        <p:nvSpPr>
+          <p:cNvPr id="8" name="TextBox 7"/>
+          <p:cNvSpPr txBox="1"/>
+          <p:nvPr/>
+        </p:nvSpPr>
+        <p:spPr>
+          <a:xfrm>
+            <a:off x="777240" y="1719072"/>
+            <a:ext cx="5181447" cy="4133087"/>
+          </a:xfrm>
+          <a:prstGeom prst="rect">
+            <a:avLst/>
+          </a:prstGeom>
+          <a:noFill/>
+        </p:spPr>
+        <p:txBody>
+          <a:bodyPr wrap="square">
+            <a:spAutoFit/>
+          </a:bodyPr>
+          <a:lstStyle/>
+          <a:p>
+            <a:pPr>
+              <a:spcAft>
+                <a:spcPts val="400"/>
+              </a:spcAft>
+            </a:pPr>
+            <a:r>
+              <a:rPr sz="1400" b="0" i="0">
+                <a:solidFill>
+                  <a:srgbClr val="FFFFFF"/>
+                </a:solidFill>
+                <a:latin typeface="Calibri"/>
+              </a:rPr>
+              <a:t>sequenceDiagram</a:t>
+            </a:r>
+          </a:p>
+          <a:p>
+            <a:pPr>
+              <a:spcAft>
+                <a:spcPts val="400"/>
+              </a:spcAft>
+            </a:pPr>
+            <a:r>
+              <a:rPr sz="1400" b="0" i="0">
+                <a:solidFill>
+                  <a:srgbClr val="FFFFFF"/>
+                </a:solidFill>
+                <a:latin typeface="Calibri"/>
+              </a:rPr>
+              <a:t>    actor Recepcionista</a:t>
+            </a:r>
+          </a:p>
+          <a:p>
+            <a:pPr>
+              <a:spcAft>
+                <a:spcPts val="400"/>
+              </a:spcAft>
+            </a:pPr>
+            <a:r>
+              <a:rPr sz="1400" b="0" i="0">
+                <a:solidFill>
+                  <a:srgbClr val="FFFFFF"/>
+                </a:solidFill>
+                <a:latin typeface="Calibri"/>
+              </a:rPr>
+              <a:t>    participant UI as :PantallaAgenda</a:t>
+            </a:r>
+          </a:p>
+          <a:p>
+            <a:pPr>
+              <a:spcAft>
+                <a:spcPts val="400"/>
+              </a:spcAft>
+            </a:pPr>
+            <a:r>
+              <a:rPr sz="1400" b="0" i="0">
+                <a:solidFill>
+                  <a:srgbClr val="FFFFFF"/>
+                </a:solidFill>
+                <a:latin typeface="Calibri"/>
+              </a:rPr>
+              <a:t>    participant CTRL as :ControlAgenda</a:t>
+            </a:r>
+          </a:p>
+          <a:p>
+            <a:pPr>
+              <a:spcAft>
+                <a:spcPts val="400"/>
+              </a:spcAft>
+            </a:pPr>
+            <a:r>
+              <a:rPr sz="1400" b="0" i="0">
+                <a:solidFill>
+                  <a:srgbClr val="FFFFFF"/>
+                </a:solidFill>
+                <a:latin typeface="Calibri"/>
+              </a:rPr>
+              <a:t>    participant REPM as :RepositorioMascotas</a:t>
+            </a:r>
+          </a:p>
+          <a:p>
+            <a:pPr>
+              <a:spcAft>
+                <a:spcPts val="400"/>
+              </a:spcAft>
+            </a:pPr>
+            <a:r>
+              <a:rPr sz="1400" b="0" i="0">
+                <a:solidFill>
+                  <a:srgbClr val="FFFFFF"/>
+                </a:solidFill>
+                <a:latin typeface="Calibri"/>
+              </a:rPr>
+              <a:t>    participant REPC as :RepositorioCitas</a:t>
+            </a:r>
+          </a:p>
+          <a:p>
+            <a:pPr>
+              <a:spcAft>
+                <a:spcPts val="400"/>
+              </a:spcAft>
+            </a:pPr>
+            <a:r>
+              <a:rPr sz="1400" b="0" i="0">
+                <a:solidFill>
+                  <a:srgbClr val="FFFFFF"/>
+                </a:solidFill>
+                <a:latin typeface="Calibri"/>
+              </a:rPr>
+              <a:t>    Recepcionista-&gt;&gt;UI: solicitarAgendamiento(codigoMascota, fecha)</a:t>
+            </a:r>
+          </a:p>
+          <a:p>
+            <a:pPr>
+              <a:spcAft>
+                <a:spcPts val="400"/>
+              </a:spcAft>
+            </a:pPr>
+            <a:r>
+              <a:rPr sz="1400" b="0" i="0">
+                <a:solidFill>
+                  <a:srgbClr val="FFFFFF"/>
+                </a:solidFill>
+                <a:latin typeface="Calibri"/>
+              </a:rPr>
+              <a:t>    UI-&gt;&gt;CTRL: agendarCita(codigoMascota, fecha, idVeterinario)</a:t>
+            </a:r>
+          </a:p>
+          <a:p>
+            <a:pPr>
+              <a:spcAft>
+                <a:spcPts val="400"/>
+              </a:spcAft>
+            </a:pPr>
+            <a:r>
+              <a:rPr sz="1400" b="0" i="0">
+                <a:solidFill>
+                  <a:srgbClr val="FFFFFF"/>
+                </a:solidFill>
+                <a:latin typeface="Calibri"/>
+              </a:rPr>
+              <a:t>    CTRL-&gt;&gt;REPM: existePorCodigo(codigoMascota)</a:t>
+            </a:r>
+          </a:p>
+          <a:p>
+            <a:pPr>
+              <a:spcAft>
+                <a:spcPts val="400"/>
+              </a:spcAft>
+            </a:pPr>
+            <a:r>
+              <a:rPr sz="1400" b="0" i="0">
+                <a:solidFill>
+                  <a:srgbClr val="FFFFFF"/>
+                </a:solidFill>
+                <a:latin typeface="Calibri"/>
+              </a:rPr>
+              <a:t>    REPM--&gt;&gt;CTRL: mascota</a:t>
+            </a:r>
+          </a:p>
+        </p:txBody>
+      </p:sp>
+      <p:sp>
+        <p:nvSpPr>
+          <p:cNvPr id="9" name="TextBox 8"/>
+          <p:cNvSpPr txBox="1"/>
+          <p:nvPr/>
+        </p:nvSpPr>
+        <p:spPr>
+          <a:xfrm>
+            <a:off x="6233007" y="1719072"/>
+            <a:ext cx="5181447" cy="4133087"/>
+          </a:xfrm>
+          <a:prstGeom prst="rect">
+            <a:avLst/>
+          </a:prstGeom>
+          <a:noFill/>
+        </p:spPr>
+        <p:txBody>
+          <a:bodyPr wrap="square">
+            <a:spAutoFit/>
+          </a:bodyPr>
+          <a:lstStyle/>
+          <a:p>
+            <a:pPr>
+              <a:spcAft>
+                <a:spcPts val="400"/>
+              </a:spcAft>
+            </a:pPr>
+            <a:r>
+              <a:rPr sz="1400" b="0" i="0">
+                <a:solidFill>
+                  <a:srgbClr val="FFFFFF"/>
+                </a:solidFill>
+                <a:latin typeface="Calibri"/>
+              </a:rPr>
+              <a:t>    CTRL-&gt;&gt;REPC: consultarDisponibilidad(idVeterinario, fecha)</a:t>
+            </a:r>
+          </a:p>
+          <a:p>
+            <a:pPr>
+              <a:spcAft>
+                <a:spcPts val="400"/>
+              </a:spcAft>
+            </a:pPr>
+            <a:r>
+              <a:rPr sz="1400" b="0" i="0">
+                <a:solidFill>
+                  <a:srgbClr val="FFFFFF"/>
+                </a:solidFill>
+                <a:latin typeface="Calibri"/>
+              </a:rPr>
+              <a:t>    REPC--&gt;&gt;CTRL: horariosLibres</a:t>
+            </a:r>
+          </a:p>
+          <a:p>
+            <a:pPr>
+              <a:spcAft>
+                <a:spcPts val="400"/>
+              </a:spcAft>
+            </a:pPr>
+            <a:r>
+              <a:rPr sz="1400" b="0" i="0">
+                <a:solidFill>
+                  <a:srgbClr val="FFFFFF"/>
+                </a:solidFill>
+                <a:latin typeface="Calibri"/>
+              </a:rPr>
+              <a:t>    alt hay horario libre</a:t>
+            </a:r>
+          </a:p>
+          <a:p>
+            <a:pPr>
+              <a:spcAft>
+                <a:spcPts val="400"/>
+              </a:spcAft>
+            </a:pPr>
+            <a:r>
+              <a:rPr sz="1400" b="0" i="0">
+                <a:solidFill>
+                  <a:srgbClr val="FFFFFF"/>
+                </a:solidFill>
+                <a:latin typeface="Calibri"/>
+              </a:rPr>
+              <a:t>        CTRL-&gt;&gt;REPC: guardarCita(cita)</a:t>
+            </a:r>
+          </a:p>
+          <a:p>
+            <a:pPr>
+              <a:spcAft>
+                <a:spcPts val="400"/>
+              </a:spcAft>
+            </a:pPr>
+            <a:r>
+              <a:rPr sz="1400" b="0" i="0">
+                <a:solidFill>
+                  <a:srgbClr val="FFFFFF"/>
+                </a:solidFill>
+                <a:latin typeface="Calibri"/>
+              </a:rPr>
+              <a:t>        REPC--&gt;&gt;CTRL: idCita</a:t>
+            </a:r>
+          </a:p>
+          <a:p>
+            <a:pPr>
+              <a:spcAft>
+                <a:spcPts val="400"/>
+              </a:spcAft>
+            </a:pPr>
+            <a:r>
+              <a:rPr sz="1400" b="0" i="0">
+                <a:solidFill>
+                  <a:srgbClr val="FFFFFF"/>
+                </a:solidFill>
+                <a:latin typeface="Calibri"/>
+              </a:rPr>
+              <a:t>        CTRL--&gt;&gt;UI: confirmacion(idCita)</a:t>
+            </a:r>
+          </a:p>
+          <a:p>
+            <a:pPr>
+              <a:spcAft>
+                <a:spcPts val="400"/>
+              </a:spcAft>
+            </a:pPr>
+            <a:r>
+              <a:rPr sz="1400" b="0" i="0">
+                <a:solidFill>
+                  <a:srgbClr val="FFFFFF"/>
+                </a:solidFill>
+                <a:latin typeface="Calibri"/>
+              </a:rPr>
+              <a:t>    else no hay horario libre</a:t>
+            </a:r>
+          </a:p>
+          <a:p>
+            <a:pPr>
+              <a:spcAft>
+                <a:spcPts val="400"/>
+              </a:spcAft>
+            </a:pPr>
+            <a:r>
+              <a:rPr sz="1400" b="0" i="0">
+                <a:solidFill>
+                  <a:srgbClr val="FFFFFF"/>
+                </a:solidFill>
+                <a:latin typeface="Calibri"/>
+              </a:rPr>
+              <a:t>        CTRL--&gt;&gt;UI: alternativas(dia siguiente)</a:t>
+            </a:r>
+          </a:p>
+          <a:p>
+            <a:pPr>
+              <a:spcAft>
+                <a:spcPts val="400"/>
+              </a:spcAft>
+            </a:pPr>
+            <a:r>
+              <a:rPr sz="1400" b="0" i="0">
+                <a:solidFill>
+                  <a:srgbClr val="FFFFFF"/>
+                </a:solidFill>
+                <a:latin typeface="Calibri"/>
+              </a:rPr>
+              <a:t>    end</a:t>
+            </a:r>
+          </a:p>
+        </p:txBody>
+      </p:sp>
       <p:sp>
         <p:nvSpPr>
           <p:cNvPr id="10" name="TextBox 9"/>
@@ -5117,8 +4898,8 @@
         </p:nvSpPr>
         <p:spPr>
           <a:xfrm>
-            <a:off x="530352" y="3191256"/>
-            <a:ext cx="3478682" cy="621792"/>
+            <a:off x="457200" y="6080760"/>
+            <a:ext cx="11277295" cy="320040"/>
           </a:xfrm>
           <a:prstGeom prst="rect">
             <a:avLst/>
@@ -5126,449 +4907,27 @@
           <a:noFill/>
         </p:spPr>
         <p:txBody>
-          <a:bodyPr wrap="square" anchor="t"/>
+          <a:bodyPr wrap="square">
+            <a:spAutoFit/>
+          </a:bodyPr>
           <a:lstStyle/>
           <a:p>
             <a:pPr algn="ctr"/>
             <a:r>
-              <a:rPr sz="1300" b="1" i="0">
-                <a:solidFill>
-                  <a:srgbClr val="095292"/>
-                </a:solidFill>
-                <a:latin typeface="Calibri"/>
-              </a:rPr>
-              <a:t>Draw.Io</a:t>
-            </a:r>
-          </a:p>
-          <a:p>
-            <a:pPr algn="ctr">
-              <a:spcBef>
-                <a:spcPts val="200"/>
-              </a:spcBef>
-            </a:pPr>
-            <a:r>
-              <a:rPr sz="1000" b="0" i="0">
+              <a:rPr sz="1200" b="0" i="1">
                 <a:solidFill>
                   <a:srgbClr val="666666"/>
                 </a:solidFill>
                 <a:latin typeface="Calibri"/>
               </a:rPr>
-              <a:t>Diagramas UML y de contexto</a:t>
-            </a:r>
-          </a:p>
-        </p:txBody>
-      </p:sp>
-      <p:sp>
-        <p:nvSpPr>
-          <p:cNvPr id="11" name="Rounded Rectangle 10"/>
-          <p:cNvSpPr/>
-          <p:nvPr/>
-        </p:nvSpPr>
-        <p:spPr>
-          <a:xfrm>
-            <a:off x="4283354" y="1591056"/>
-            <a:ext cx="3624986" cy="2331720"/>
-          </a:xfrm>
-          <a:prstGeom prst="roundRect">
-            <a:avLst>
-              <a:gd name="adj" fmla="val 12000"/>
-            </a:avLst>
-          </a:prstGeom>
-          <a:solidFill>
-            <a:srgbClr val="F2F2F2"/>
-          </a:solidFill>
-          <a:ln>
-            <a:noFill/>
-          </a:ln>
-        </p:spPr>
-        <p:style>
-          <a:lnRef idx="1">
-            <a:schemeClr val="accent1"/>
-          </a:lnRef>
-          <a:fillRef idx="3">
-            <a:schemeClr val="accent1"/>
-          </a:fillRef>
-          <a:effectRef idx="2">
-            <a:schemeClr val="accent1"/>
-          </a:effectRef>
-          <a:fontRef idx="minor">
-            <a:schemeClr val="lt1"/>
-          </a:fontRef>
-        </p:style>
-        <p:txBody>
-          <a:bodyPr rtlCol="0" anchor="ctr"/>
-          <a:lstStyle/>
-          <a:p>
-            <a:pPr algn="ctr"/>
-          </a:p>
-        </p:txBody>
-      </p:sp>
-      <p:sp>
-        <p:nvSpPr>
-          <p:cNvPr id="12" name="Rectangle 11"/>
-          <p:cNvSpPr/>
-          <p:nvPr/>
-        </p:nvSpPr>
-        <p:spPr>
-          <a:xfrm>
-            <a:off x="4283354" y="1591056"/>
-            <a:ext cx="3624986" cy="64008"/>
-          </a:xfrm>
-          <a:prstGeom prst="rect">
-            <a:avLst/>
-          </a:prstGeom>
-          <a:solidFill>
-            <a:srgbClr val="095292"/>
-          </a:solidFill>
-          <a:ln>
-            <a:noFill/>
-          </a:ln>
-        </p:spPr>
-        <p:style>
-          <a:lnRef idx="1">
-            <a:schemeClr val="accent1"/>
-          </a:lnRef>
-          <a:fillRef idx="3">
-            <a:schemeClr val="accent1"/>
-          </a:fillRef>
-          <a:effectRef idx="2">
-            <a:schemeClr val="accent1"/>
-          </a:effectRef>
-          <a:fontRef idx="minor">
-            <a:schemeClr val="lt1"/>
-          </a:fontRef>
-        </p:style>
-        <p:txBody>
-          <a:bodyPr rtlCol="0" anchor="ctr"/>
-          <a:lstStyle/>
-          <a:p>
-            <a:pPr algn="ctr"/>
-          </a:p>
-        </p:txBody>
-      </p:sp>
-      <p:sp>
-        <p:nvSpPr>
-          <p:cNvPr id="13" name="Rectangle 12"/>
-          <p:cNvSpPr/>
-          <p:nvPr/>
-        </p:nvSpPr>
-        <p:spPr>
-          <a:xfrm>
-            <a:off x="4283354" y="1655064"/>
-            <a:ext cx="3624986" cy="27432"/>
-          </a:xfrm>
-          <a:prstGeom prst="rect">
-            <a:avLst/>
-          </a:prstGeom>
-          <a:solidFill>
-            <a:srgbClr val="FFD000"/>
-          </a:solidFill>
-          <a:ln>
-            <a:noFill/>
-          </a:ln>
-        </p:spPr>
-        <p:style>
-          <a:lnRef idx="1">
-            <a:schemeClr val="accent1"/>
-          </a:lnRef>
-          <a:fillRef idx="3">
-            <a:schemeClr val="accent1"/>
-          </a:fillRef>
-          <a:effectRef idx="2">
-            <a:schemeClr val="accent1"/>
-          </a:effectRef>
-          <a:fontRef idx="minor">
-            <a:schemeClr val="lt1"/>
-          </a:fontRef>
-        </p:style>
-        <p:txBody>
-          <a:bodyPr rtlCol="0" anchor="ctr"/>
-          <a:lstStyle/>
-          <a:p>
-            <a:pPr algn="ctr"/>
-          </a:p>
-        </p:txBody>
-      </p:sp>
-      <p:pic>
-        <p:nvPicPr>
-          <p:cNvPr id="14" name="Picture 13" descr="mermaid.png"/>
-          <p:cNvPicPr>
-            <a:picLocks noChangeAspect="1"/>
-          </p:cNvPicPr>
-          <p:nvPr/>
-        </p:nvPicPr>
-        <p:blipFill>
-          <a:blip r:embed="rId3"/>
-          <a:stretch>
-            <a:fillRect/>
-          </a:stretch>
-        </p:blipFill>
-        <p:spPr>
-          <a:xfrm>
-            <a:off x="5469483" y="1847087"/>
-            <a:ext cx="1252728" cy="1252728"/>
-          </a:xfrm>
-          <a:prstGeom prst="rect">
-            <a:avLst/>
-          </a:prstGeom>
-        </p:spPr>
-      </p:pic>
-      <p:sp>
-        <p:nvSpPr>
-          <p:cNvPr id="15" name="TextBox 14"/>
-          <p:cNvSpPr txBox="1"/>
-          <p:nvPr/>
-        </p:nvSpPr>
-        <p:spPr>
-          <a:xfrm>
-            <a:off x="4356506" y="3191256"/>
-            <a:ext cx="3478682" cy="621792"/>
-          </a:xfrm>
-          <a:prstGeom prst="rect">
-            <a:avLst/>
-          </a:prstGeom>
-          <a:noFill/>
-        </p:spPr>
-        <p:txBody>
-          <a:bodyPr wrap="square" anchor="t"/>
-          <a:lstStyle/>
-          <a:p>
-            <a:pPr algn="ctr"/>
-            <a:r>
-              <a:rPr sz="1300" b="1" i="0">
-                <a:solidFill>
-                  <a:srgbClr val="095292"/>
-                </a:solidFill>
-                <a:latin typeface="Calibri"/>
-              </a:rPr>
-              <a:t>Mermaid</a:t>
-            </a:r>
-          </a:p>
-          <a:p>
-            <a:pPr algn="ctr">
-              <a:spcBef>
-                <a:spcPts val="200"/>
-              </a:spcBef>
-            </a:pPr>
-            <a:r>
-              <a:rPr sz="1000" b="0" i="0">
-                <a:solidFill>
-                  <a:srgbClr val="666666"/>
-                </a:solidFill>
-                <a:latin typeface="Calibri"/>
-              </a:rPr>
-              <a:t>Diagramas como texto versionable</a:t>
-            </a:r>
-          </a:p>
-        </p:txBody>
-      </p:sp>
-      <p:sp>
-        <p:nvSpPr>
-          <p:cNvPr id="16" name="Rounded Rectangle 15"/>
-          <p:cNvSpPr/>
-          <p:nvPr/>
-        </p:nvSpPr>
-        <p:spPr>
-          <a:xfrm>
-            <a:off x="8109508" y="1591056"/>
-            <a:ext cx="3624986" cy="2331720"/>
-          </a:xfrm>
-          <a:prstGeom prst="roundRect">
-            <a:avLst>
-              <a:gd name="adj" fmla="val 12000"/>
-            </a:avLst>
-          </a:prstGeom>
-          <a:solidFill>
-            <a:srgbClr val="F2F2F2"/>
-          </a:solidFill>
-          <a:ln>
-            <a:noFill/>
-          </a:ln>
-        </p:spPr>
-        <p:style>
-          <a:lnRef idx="1">
-            <a:schemeClr val="accent1"/>
-          </a:lnRef>
-          <a:fillRef idx="3">
-            <a:schemeClr val="accent1"/>
-          </a:fillRef>
-          <a:effectRef idx="2">
-            <a:schemeClr val="accent1"/>
-          </a:effectRef>
-          <a:fontRef idx="minor">
-            <a:schemeClr val="lt1"/>
-          </a:fontRef>
-        </p:style>
-        <p:txBody>
-          <a:bodyPr rtlCol="0" anchor="ctr"/>
-          <a:lstStyle/>
-          <a:p>
-            <a:pPr algn="ctr"/>
-          </a:p>
-        </p:txBody>
-      </p:sp>
-      <p:sp>
-        <p:nvSpPr>
-          <p:cNvPr id="17" name="Rectangle 16"/>
-          <p:cNvSpPr/>
-          <p:nvPr/>
-        </p:nvSpPr>
-        <p:spPr>
-          <a:xfrm>
-            <a:off x="8109508" y="1591056"/>
-            <a:ext cx="3624986" cy="64008"/>
-          </a:xfrm>
-          <a:prstGeom prst="rect">
-            <a:avLst/>
-          </a:prstGeom>
-          <a:solidFill>
-            <a:srgbClr val="095292"/>
-          </a:solidFill>
-          <a:ln>
-            <a:noFill/>
-          </a:ln>
-        </p:spPr>
-        <p:style>
-          <a:lnRef idx="1">
-            <a:schemeClr val="accent1"/>
-          </a:lnRef>
-          <a:fillRef idx="3">
-            <a:schemeClr val="accent1"/>
-          </a:fillRef>
-          <a:effectRef idx="2">
-            <a:schemeClr val="accent1"/>
-          </a:effectRef>
-          <a:fontRef idx="minor">
-            <a:schemeClr val="lt1"/>
-          </a:fontRef>
-        </p:style>
-        <p:txBody>
-          <a:bodyPr rtlCol="0" anchor="ctr"/>
-          <a:lstStyle/>
-          <a:p>
-            <a:pPr algn="ctr"/>
-          </a:p>
-        </p:txBody>
-      </p:sp>
-      <p:sp>
-        <p:nvSpPr>
-          <p:cNvPr id="18" name="Rectangle 17"/>
-          <p:cNvSpPr/>
-          <p:nvPr/>
-        </p:nvSpPr>
-        <p:spPr>
-          <a:xfrm>
-            <a:off x="8109508" y="1655064"/>
-            <a:ext cx="3624986" cy="27432"/>
-          </a:xfrm>
-          <a:prstGeom prst="rect">
-            <a:avLst/>
-          </a:prstGeom>
-          <a:solidFill>
-            <a:srgbClr val="FFD000"/>
-          </a:solidFill>
-          <a:ln>
-            <a:noFill/>
-          </a:ln>
-        </p:spPr>
-        <p:style>
-          <a:lnRef idx="1">
-            <a:schemeClr val="accent1"/>
-          </a:lnRef>
-          <a:fillRef idx="3">
-            <a:schemeClr val="accent1"/>
-          </a:fillRef>
-          <a:effectRef idx="2">
-            <a:schemeClr val="accent1"/>
-          </a:effectRef>
-          <a:fontRef idx="minor">
-            <a:schemeClr val="lt1"/>
-          </a:fontRef>
-        </p:style>
-        <p:txBody>
-          <a:bodyPr rtlCol="0" anchor="ctr"/>
-          <a:lstStyle/>
-          <a:p>
-            <a:pPr algn="ctr"/>
-          </a:p>
-        </p:txBody>
-      </p:sp>
-      <p:pic>
-        <p:nvPicPr>
-          <p:cNvPr id="19" name="Picture 18" descr="examlab.png"/>
-          <p:cNvPicPr>
-            <a:picLocks noChangeAspect="1"/>
-          </p:cNvPicPr>
-          <p:nvPr/>
-        </p:nvPicPr>
-        <p:blipFill>
-          <a:blip r:embed="rId4"/>
-          <a:stretch>
-            <a:fillRect/>
-          </a:stretch>
-        </p:blipFill>
-        <p:spPr>
-          <a:xfrm>
-            <a:off x="9295638" y="1847087"/>
-            <a:ext cx="1252728" cy="1252728"/>
-          </a:xfrm>
-          <a:prstGeom prst="rect">
-            <a:avLst/>
-          </a:prstGeom>
-        </p:spPr>
-      </p:pic>
-      <p:sp>
-        <p:nvSpPr>
-          <p:cNvPr id="20" name="TextBox 19"/>
-          <p:cNvSpPr txBox="1"/>
-          <p:nvPr/>
-        </p:nvSpPr>
-        <p:spPr>
-          <a:xfrm>
-            <a:off x="8182660" y="3191256"/>
-            <a:ext cx="3478682" cy="621792"/>
-          </a:xfrm>
-          <a:prstGeom prst="rect">
-            <a:avLst/>
-          </a:prstGeom>
-          <a:noFill/>
-        </p:spPr>
-        <p:txBody>
-          <a:bodyPr wrap="square" anchor="t"/>
-          <a:lstStyle/>
-          <a:p>
-            <a:pPr algn="ctr"/>
-            <a:r>
-              <a:rPr sz="1300" b="1" i="0">
-                <a:solidFill>
-                  <a:srgbClr val="095292"/>
-                </a:solidFill>
-                <a:latin typeface="Calibri"/>
-              </a:rPr>
-              <a:t>la plataforma del curso</a:t>
-            </a:r>
-          </a:p>
-          <a:p>
-            <a:pPr algn="ctr">
-              <a:spcBef>
-                <a:spcPts val="200"/>
-              </a:spcBef>
-            </a:pPr>
-            <a:r>
-              <a:rPr sz="1000" b="0" i="0">
-                <a:solidFill>
-                  <a:srgbClr val="666666"/>
-                </a:solidFill>
-                <a:latin typeface="Calibri"/>
-              </a:rPr>
-              <a:t>Entrega del taller · en la fecha que indique el docente</a:t>
-            </a:r>
-          </a:p>
-        </p:txBody>
-      </p:sp>
-      <p:sp>
-        <p:nvSpPr>
-          <p:cNvPr id="21" name="TextBox 20"/>
+              <a:t>Cada flecha tiene que corresponder a una operacion existente en el diagrama de clases: si no existe, o falta la operacion o sobra la flecha.</a:t>
+            </a:r>
+          </a:p>
+        </p:txBody>
+      </p:sp>
+      <p:sp>
+        <p:nvSpPr>
+          <p:cNvPr id="11" name="TextBox 10"/>
           <p:cNvSpPr txBox="1"/>
           <p:nvPr/>
         </p:nvSpPr>
@@ -5742,7 +5101,7 @@
                 </a:solidFill>
                 <a:latin typeface="Calibri"/>
               </a:rPr>
-              <a:t>Taller PI — por que importa</a:t>
+              <a:t>Demo del dia</a:t>
             </a:r>
           </a:p>
         </p:txBody>
@@ -5790,7 +5149,7 @@
                 </a:solidFill>
                 <a:latin typeface="Calibri"/>
               </a:rPr>
-              <a:t>Por que importa al PI:</a:t>
+              <a:t>Herramienta:</a:t>
             </a:r>
             <a:r>
               <a:rPr sz="2000" b="0" i="0">
@@ -5799,7 +5158,7 @@
                 </a:solidFill>
                 <a:latin typeface="Calibri"/>
               </a:rPr>
-              <a:t> los casos de uso dicen que hace VetCare y el diagrama de clases dice de que esta hecho, pero solo los diagramas de secuencia y actividad muestran como colaboran las piezas en el tiempo, que es lo que necesita quien vaya a construirlo.</a:t>
+              <a:t> draw.io · Mermaid Live Editor</a:t>
             </a:r>
           </a:p>
           <a:p>
@@ -5815,7 +5174,25 @@
                 </a:solidFill>
                 <a:latin typeface="Calibri"/>
               </a:rPr>
-              <a:t>–   Dibujar la secuencia es la forma mas barata de descubrir que al diagrama de clases le faltan operaciones, porque cada flecha exige un dueño que la pueda responder.</a:t>
+              <a:t>–   </a:t>
+            </a:r>
+            <a:r>
+              <a:rPr sz="2000" b="1" i="0">
+                <a:solidFill>
+                  <a:srgbClr val="333333"/>
+                </a:solidFill>
+                <a:latin typeface="Calibri"/>
+              </a:rPr>
+              <a:t>Demo:</a:t>
+            </a:r>
+            <a:r>
+              <a:rPr sz="2000" b="0" i="0">
+                <a:solidFill>
+                  <a:srgbClr val="333333"/>
+                </a:solidFill>
+                <a:latin typeface="Calibri"/>
+              </a:rPr>
+              <a:t> El docente toma el flujo principal ya escrito de CU-04 Agendar cita y lo convierte linea por linea en mensajes de un diagrama de secuencia en Mermaid, mostrando en vivo que cada mensaje necesita una clase dueña que lo pueda responder.</a:t>
             </a:r>
           </a:p>
           <a:p>
@@ -5831,7 +5208,7 @@
                 </a:solidFill>
                 <a:latin typeface="Calibri"/>
               </a:rPr>
-              <a:t>–   El diagrama de actividad es el unico artefacto del paquete que muestra el trabajo humano de la clinica Huellitas, incluidas las esperas y las decisiones que ocurren fuera del computador.</a:t>
+              <a:t>–   Mismo dominio VetCare — no otro ejemplo. Aqui se diseña, no se programa.</a:t>
             </a:r>
           </a:p>
         </p:txBody>
@@ -5906,7 +5283,7 @@
         <p:spPr>
           <a:xfrm>
             <a:off x="0" y="0"/>
-            <a:ext cx="12191695" cy="960120"/>
+            <a:ext cx="12191695" cy="1170432"/>
           </a:xfrm>
           <a:prstGeom prst="rect">
             <a:avLst/>
@@ -5948,7 +5325,7 @@
         </p:nvSpPr>
         <p:spPr>
           <a:xfrm>
-            <a:off x="0" y="960120"/>
+            <a:off x="0" y="1170432"/>
             <a:ext cx="12191695" cy="41148"/>
           </a:xfrm>
           <a:prstGeom prst="rect">
@@ -5992,7 +5369,7 @@
         <p:spPr>
           <a:xfrm>
             <a:off x="457200" y="164592"/>
-            <a:ext cx="11277295" cy="502920"/>
+            <a:ext cx="11277295" cy="384048"/>
           </a:xfrm>
           <a:prstGeom prst="rect">
             <a:avLst/>
@@ -6012,7 +5389,7 @@
                 </a:solidFill>
                 <a:latin typeface="Calibri"/>
               </a:rPr>
-              <a:t>Taller PI — punto de partida</a:t>
+              <a:t>Herramientas de hoy</a:t>
             </a:r>
           </a:p>
         </p:txBody>
@@ -6025,8 +5402,8 @@
         </p:nvSpPr>
         <p:spPr>
           <a:xfrm>
-            <a:off x="457200" y="1170432"/>
-            <a:ext cx="11277295" cy="5230368"/>
+            <a:off x="457200" y="566928"/>
+            <a:ext cx="11277295" cy="411480"/>
           </a:xfrm>
           <a:prstGeom prst="rect">
             <a:avLst/>
@@ -6039,58 +5416,633 @@
           </a:bodyPr>
           <a:lstStyle/>
           <a:p>
-            <a:pPr>
-              <a:spcAft>
-                <a:spcPts val="800"/>
-              </a:spcAft>
+            <a:r>
+              <a:rPr sz="1400" b="0" i="0">
+                <a:solidFill>
+                  <a:srgbClr val="B8D8EE"/>
+                </a:solidFill>
+                <a:latin typeface="Calibri"/>
+              </a:rPr>
+              <a:t>Gratis · funcionan en el navegador</a:t>
+            </a:r>
+          </a:p>
+        </p:txBody>
+      </p:sp>
+      <p:sp>
+        <p:nvSpPr>
+          <p:cNvPr id="6" name="Rounded Rectangle 5"/>
+          <p:cNvSpPr/>
+          <p:nvPr/>
+        </p:nvSpPr>
+        <p:spPr>
+          <a:xfrm>
+            <a:off x="457200" y="1591056"/>
+            <a:ext cx="3624986" cy="2331720"/>
+          </a:xfrm>
+          <a:prstGeom prst="roundRect">
+            <a:avLst>
+              <a:gd name="adj" fmla="val 12000"/>
+            </a:avLst>
+          </a:prstGeom>
+          <a:solidFill>
+            <a:srgbClr val="F2F2F2"/>
+          </a:solidFill>
+          <a:ln>
+            <a:noFill/>
+          </a:ln>
+        </p:spPr>
+        <p:style>
+          <a:lnRef idx="1">
+            <a:schemeClr val="accent1"/>
+          </a:lnRef>
+          <a:fillRef idx="3">
+            <a:schemeClr val="accent1"/>
+          </a:fillRef>
+          <a:effectRef idx="2">
+            <a:schemeClr val="accent1"/>
+          </a:effectRef>
+          <a:fontRef idx="minor">
+            <a:schemeClr val="lt1"/>
+          </a:fontRef>
+        </p:style>
+        <p:txBody>
+          <a:bodyPr rtlCol="0" anchor="ctr"/>
+          <a:lstStyle/>
+          <a:p>
+            <a:pPr algn="ctr"/>
+          </a:p>
+        </p:txBody>
+      </p:sp>
+      <p:sp>
+        <p:nvSpPr>
+          <p:cNvPr id="7" name="Rectangle 6"/>
+          <p:cNvSpPr/>
+          <p:nvPr/>
+        </p:nvSpPr>
+        <p:spPr>
+          <a:xfrm>
+            <a:off x="457200" y="1591056"/>
+            <a:ext cx="3624986" cy="64008"/>
+          </a:xfrm>
+          <a:prstGeom prst="rect">
+            <a:avLst/>
+          </a:prstGeom>
+          <a:solidFill>
+            <a:srgbClr val="095292"/>
+          </a:solidFill>
+          <a:ln>
+            <a:noFill/>
+          </a:ln>
+        </p:spPr>
+        <p:style>
+          <a:lnRef idx="1">
+            <a:schemeClr val="accent1"/>
+          </a:lnRef>
+          <a:fillRef idx="3">
+            <a:schemeClr val="accent1"/>
+          </a:fillRef>
+          <a:effectRef idx="2">
+            <a:schemeClr val="accent1"/>
+          </a:effectRef>
+          <a:fontRef idx="minor">
+            <a:schemeClr val="lt1"/>
+          </a:fontRef>
+        </p:style>
+        <p:txBody>
+          <a:bodyPr rtlCol="0" anchor="ctr"/>
+          <a:lstStyle/>
+          <a:p>
+            <a:pPr algn="ctr"/>
+          </a:p>
+        </p:txBody>
+      </p:sp>
+      <p:sp>
+        <p:nvSpPr>
+          <p:cNvPr id="8" name="Rectangle 7"/>
+          <p:cNvSpPr/>
+          <p:nvPr/>
+        </p:nvSpPr>
+        <p:spPr>
+          <a:xfrm>
+            <a:off x="457200" y="1655064"/>
+            <a:ext cx="3624986" cy="27432"/>
+          </a:xfrm>
+          <a:prstGeom prst="rect">
+            <a:avLst/>
+          </a:prstGeom>
+          <a:solidFill>
+            <a:srgbClr val="FFD000"/>
+          </a:solidFill>
+          <a:ln>
+            <a:noFill/>
+          </a:ln>
+        </p:spPr>
+        <p:style>
+          <a:lnRef idx="1">
+            <a:schemeClr val="accent1"/>
+          </a:lnRef>
+          <a:fillRef idx="3">
+            <a:schemeClr val="accent1"/>
+          </a:fillRef>
+          <a:effectRef idx="2">
+            <a:schemeClr val="accent1"/>
+          </a:effectRef>
+          <a:fontRef idx="minor">
+            <a:schemeClr val="lt1"/>
+          </a:fontRef>
+        </p:style>
+        <p:txBody>
+          <a:bodyPr rtlCol="0" anchor="ctr"/>
+          <a:lstStyle/>
+          <a:p>
+            <a:pPr algn="ctr"/>
+          </a:p>
+        </p:txBody>
+      </p:sp>
+      <p:pic>
+        <p:nvPicPr>
+          <p:cNvPr id="9" name="Picture 8" descr="drawio.png"/>
+          <p:cNvPicPr>
+            <a:picLocks noChangeAspect="1"/>
+          </p:cNvPicPr>
+          <p:nvPr/>
+        </p:nvPicPr>
+        <p:blipFill>
+          <a:blip r:embed="rId2"/>
+          <a:stretch>
+            <a:fillRect/>
+          </a:stretch>
+        </p:blipFill>
+        <p:spPr>
+          <a:xfrm>
+            <a:off x="1643329" y="1847087"/>
+            <a:ext cx="1252728" cy="1252728"/>
+          </a:xfrm>
+          <a:prstGeom prst="rect">
+            <a:avLst/>
+          </a:prstGeom>
+        </p:spPr>
+      </p:pic>
+      <p:sp>
+        <p:nvSpPr>
+          <p:cNvPr id="10" name="TextBox 9"/>
+          <p:cNvSpPr txBox="1"/>
+          <p:nvPr/>
+        </p:nvSpPr>
+        <p:spPr>
+          <a:xfrm>
+            <a:off x="530352" y="3191256"/>
+            <a:ext cx="3478682" cy="621792"/>
+          </a:xfrm>
+          <a:prstGeom prst="rect">
+            <a:avLst/>
+          </a:prstGeom>
+          <a:noFill/>
+        </p:spPr>
+        <p:txBody>
+          <a:bodyPr wrap="square" anchor="t"/>
+          <a:lstStyle/>
+          <a:p>
+            <a:pPr algn="ctr"/>
+            <a:r>
+              <a:rPr sz="1300" b="1" i="0">
+                <a:solidFill>
+                  <a:srgbClr val="095292"/>
+                </a:solidFill>
+                <a:latin typeface="Calibri"/>
+              </a:rPr>
+              <a:t>Draw.Io</a:t>
+            </a:r>
+          </a:p>
+          <a:p>
+            <a:pPr algn="ctr">
+              <a:spcBef>
+                <a:spcPts val="200"/>
+              </a:spcBef>
             </a:pPr>
             <a:r>
-              <a:rPr sz="2000" b="0" i="0">
-                <a:solidFill>
-                  <a:srgbClr val="333333"/>
-                </a:solidFill>
-                <a:latin typeface="Calibri"/>
-              </a:rPr>
-              <a:t>–   VetCare ya tiene casos de uso especificados y un diagrama de clases con multiplicidades, pero ningun documento explica el orden en que los objetos se comunican para cumplir un caso de uso.</a:t>
-            </a:r>
-          </a:p>
-          <a:p>
-            <a:pPr>
-              <a:spcAft>
-                <a:spcPts val="800"/>
-              </a:spcAft>
+              <a:rPr sz="1000" b="0" i="0">
+                <a:solidFill>
+                  <a:srgbClr val="666666"/>
+                </a:solidFill>
+                <a:latin typeface="Calibri"/>
+              </a:rPr>
+              <a:t>Diagramas UML y de contexto</a:t>
+            </a:r>
+          </a:p>
+        </p:txBody>
+      </p:sp>
+      <p:sp>
+        <p:nvSpPr>
+          <p:cNvPr id="11" name="Rounded Rectangle 10"/>
+          <p:cNvSpPr/>
+          <p:nvPr/>
+        </p:nvSpPr>
+        <p:spPr>
+          <a:xfrm>
+            <a:off x="4283354" y="1591056"/>
+            <a:ext cx="3624986" cy="2331720"/>
+          </a:xfrm>
+          <a:prstGeom prst="roundRect">
+            <a:avLst>
+              <a:gd name="adj" fmla="val 12000"/>
+            </a:avLst>
+          </a:prstGeom>
+          <a:solidFill>
+            <a:srgbClr val="F2F2F2"/>
+          </a:solidFill>
+          <a:ln>
+            <a:noFill/>
+          </a:ln>
+        </p:spPr>
+        <p:style>
+          <a:lnRef idx="1">
+            <a:schemeClr val="accent1"/>
+          </a:lnRef>
+          <a:fillRef idx="3">
+            <a:schemeClr val="accent1"/>
+          </a:fillRef>
+          <a:effectRef idx="2">
+            <a:schemeClr val="accent1"/>
+          </a:effectRef>
+          <a:fontRef idx="minor">
+            <a:schemeClr val="lt1"/>
+          </a:fontRef>
+        </p:style>
+        <p:txBody>
+          <a:bodyPr rtlCol="0" anchor="ctr"/>
+          <a:lstStyle/>
+          <a:p>
+            <a:pPr algn="ctr"/>
+          </a:p>
+        </p:txBody>
+      </p:sp>
+      <p:sp>
+        <p:nvSpPr>
+          <p:cNvPr id="12" name="Rectangle 11"/>
+          <p:cNvSpPr/>
+          <p:nvPr/>
+        </p:nvSpPr>
+        <p:spPr>
+          <a:xfrm>
+            <a:off x="4283354" y="1591056"/>
+            <a:ext cx="3624986" cy="64008"/>
+          </a:xfrm>
+          <a:prstGeom prst="rect">
+            <a:avLst/>
+          </a:prstGeom>
+          <a:solidFill>
+            <a:srgbClr val="095292"/>
+          </a:solidFill>
+          <a:ln>
+            <a:noFill/>
+          </a:ln>
+        </p:spPr>
+        <p:style>
+          <a:lnRef idx="1">
+            <a:schemeClr val="accent1"/>
+          </a:lnRef>
+          <a:fillRef idx="3">
+            <a:schemeClr val="accent1"/>
+          </a:fillRef>
+          <a:effectRef idx="2">
+            <a:schemeClr val="accent1"/>
+          </a:effectRef>
+          <a:fontRef idx="minor">
+            <a:schemeClr val="lt1"/>
+          </a:fontRef>
+        </p:style>
+        <p:txBody>
+          <a:bodyPr rtlCol="0" anchor="ctr"/>
+          <a:lstStyle/>
+          <a:p>
+            <a:pPr algn="ctr"/>
+          </a:p>
+        </p:txBody>
+      </p:sp>
+      <p:sp>
+        <p:nvSpPr>
+          <p:cNvPr id="13" name="Rectangle 12"/>
+          <p:cNvSpPr/>
+          <p:nvPr/>
+        </p:nvSpPr>
+        <p:spPr>
+          <a:xfrm>
+            <a:off x="4283354" y="1655064"/>
+            <a:ext cx="3624986" cy="27432"/>
+          </a:xfrm>
+          <a:prstGeom prst="rect">
+            <a:avLst/>
+          </a:prstGeom>
+          <a:solidFill>
+            <a:srgbClr val="FFD000"/>
+          </a:solidFill>
+          <a:ln>
+            <a:noFill/>
+          </a:ln>
+        </p:spPr>
+        <p:style>
+          <a:lnRef idx="1">
+            <a:schemeClr val="accent1"/>
+          </a:lnRef>
+          <a:fillRef idx="3">
+            <a:schemeClr val="accent1"/>
+          </a:fillRef>
+          <a:effectRef idx="2">
+            <a:schemeClr val="accent1"/>
+          </a:effectRef>
+          <a:fontRef idx="minor">
+            <a:schemeClr val="lt1"/>
+          </a:fontRef>
+        </p:style>
+        <p:txBody>
+          <a:bodyPr rtlCol="0" anchor="ctr"/>
+          <a:lstStyle/>
+          <a:p>
+            <a:pPr algn="ctr"/>
+          </a:p>
+        </p:txBody>
+      </p:sp>
+      <p:pic>
+        <p:nvPicPr>
+          <p:cNvPr id="14" name="Picture 13" descr="mermaid.png"/>
+          <p:cNvPicPr>
+            <a:picLocks noChangeAspect="1"/>
+          </p:cNvPicPr>
+          <p:nvPr/>
+        </p:nvPicPr>
+        <p:blipFill>
+          <a:blip r:embed="rId3"/>
+          <a:stretch>
+            <a:fillRect/>
+          </a:stretch>
+        </p:blipFill>
+        <p:spPr>
+          <a:xfrm>
+            <a:off x="5469483" y="1847087"/>
+            <a:ext cx="1252728" cy="1252728"/>
+          </a:xfrm>
+          <a:prstGeom prst="rect">
+            <a:avLst/>
+          </a:prstGeom>
+        </p:spPr>
+      </p:pic>
+      <p:sp>
+        <p:nvSpPr>
+          <p:cNvPr id="15" name="TextBox 14"/>
+          <p:cNvSpPr txBox="1"/>
+          <p:nvPr/>
+        </p:nvSpPr>
+        <p:spPr>
+          <a:xfrm>
+            <a:off x="4356506" y="3191256"/>
+            <a:ext cx="3478682" cy="621792"/>
+          </a:xfrm>
+          <a:prstGeom prst="rect">
+            <a:avLst/>
+          </a:prstGeom>
+          <a:noFill/>
+        </p:spPr>
+        <p:txBody>
+          <a:bodyPr wrap="square" anchor="t"/>
+          <a:lstStyle/>
+          <a:p>
+            <a:pPr algn="ctr"/>
+            <a:r>
+              <a:rPr sz="1300" b="1" i="0">
+                <a:solidFill>
+                  <a:srgbClr val="095292"/>
+                </a:solidFill>
+                <a:latin typeface="Calibri"/>
+              </a:rPr>
+              <a:t>Mermaid</a:t>
+            </a:r>
+          </a:p>
+          <a:p>
+            <a:pPr algn="ctr">
+              <a:spcBef>
+                <a:spcPts val="200"/>
+              </a:spcBef>
             </a:pPr>
             <a:r>
-              <a:rPr sz="2000" b="0" i="0">
-                <a:solidFill>
-                  <a:srgbClr val="333333"/>
-                </a:solidFill>
-                <a:latin typeface="Calibri"/>
-              </a:rPr>
-              <a:t>–   En Huellitas, agendar una cita depende de la disponibilidad del veterinario y hoy eso se resuelve preguntando en voz alta al fondo del consultorio, sin ninguna regla escrita.</a:t>
-            </a:r>
-          </a:p>
-          <a:p>
-            <a:pPr>
-              <a:spcAft>
-                <a:spcPts val="800"/>
-              </a:spcAft>
+              <a:rPr sz="1000" b="0" i="0">
+                <a:solidFill>
+                  <a:srgbClr val="666666"/>
+                </a:solidFill>
+                <a:latin typeface="Calibri"/>
+              </a:rPr>
+              <a:t>Diagramas como texto versionable</a:t>
+            </a:r>
+          </a:p>
+        </p:txBody>
+      </p:sp>
+      <p:sp>
+        <p:nvSpPr>
+          <p:cNvPr id="16" name="Rounded Rectangle 15"/>
+          <p:cNvSpPr/>
+          <p:nvPr/>
+        </p:nvSpPr>
+        <p:spPr>
+          <a:xfrm>
+            <a:off x="8109508" y="1591056"/>
+            <a:ext cx="3624986" cy="2331720"/>
+          </a:xfrm>
+          <a:prstGeom prst="roundRect">
+            <a:avLst>
+              <a:gd name="adj" fmla="val 12000"/>
+            </a:avLst>
+          </a:prstGeom>
+          <a:solidFill>
+            <a:srgbClr val="F2F2F2"/>
+          </a:solidFill>
+          <a:ln>
+            <a:noFill/>
+          </a:ln>
+        </p:spPr>
+        <p:style>
+          <a:lnRef idx="1">
+            <a:schemeClr val="accent1"/>
+          </a:lnRef>
+          <a:fillRef idx="3">
+            <a:schemeClr val="accent1"/>
+          </a:fillRef>
+          <a:effectRef idx="2">
+            <a:schemeClr val="accent1"/>
+          </a:effectRef>
+          <a:fontRef idx="minor">
+            <a:schemeClr val="lt1"/>
+          </a:fontRef>
+        </p:style>
+        <p:txBody>
+          <a:bodyPr rtlCol="0" anchor="ctr"/>
+          <a:lstStyle/>
+          <a:p>
+            <a:pPr algn="ctr"/>
+          </a:p>
+        </p:txBody>
+      </p:sp>
+      <p:sp>
+        <p:nvSpPr>
+          <p:cNvPr id="17" name="Rectangle 16"/>
+          <p:cNvSpPr/>
+          <p:nvPr/>
+        </p:nvSpPr>
+        <p:spPr>
+          <a:xfrm>
+            <a:off x="8109508" y="1591056"/>
+            <a:ext cx="3624986" cy="64008"/>
+          </a:xfrm>
+          <a:prstGeom prst="rect">
+            <a:avLst/>
+          </a:prstGeom>
+          <a:solidFill>
+            <a:srgbClr val="095292"/>
+          </a:solidFill>
+          <a:ln>
+            <a:noFill/>
+          </a:ln>
+        </p:spPr>
+        <p:style>
+          <a:lnRef idx="1">
+            <a:schemeClr val="accent1"/>
+          </a:lnRef>
+          <a:fillRef idx="3">
+            <a:schemeClr val="accent1"/>
+          </a:fillRef>
+          <a:effectRef idx="2">
+            <a:schemeClr val="accent1"/>
+          </a:effectRef>
+          <a:fontRef idx="minor">
+            <a:schemeClr val="lt1"/>
+          </a:fontRef>
+        </p:style>
+        <p:txBody>
+          <a:bodyPr rtlCol="0" anchor="ctr"/>
+          <a:lstStyle/>
+          <a:p>
+            <a:pPr algn="ctr"/>
+          </a:p>
+        </p:txBody>
+      </p:sp>
+      <p:sp>
+        <p:nvSpPr>
+          <p:cNvPr id="18" name="Rectangle 17"/>
+          <p:cNvSpPr/>
+          <p:nvPr/>
+        </p:nvSpPr>
+        <p:spPr>
+          <a:xfrm>
+            <a:off x="8109508" y="1655064"/>
+            <a:ext cx="3624986" cy="27432"/>
+          </a:xfrm>
+          <a:prstGeom prst="rect">
+            <a:avLst/>
+          </a:prstGeom>
+          <a:solidFill>
+            <a:srgbClr val="FFD000"/>
+          </a:solidFill>
+          <a:ln>
+            <a:noFill/>
+          </a:ln>
+        </p:spPr>
+        <p:style>
+          <a:lnRef idx="1">
+            <a:schemeClr val="accent1"/>
+          </a:lnRef>
+          <a:fillRef idx="3">
+            <a:schemeClr val="accent1"/>
+          </a:fillRef>
+          <a:effectRef idx="2">
+            <a:schemeClr val="accent1"/>
+          </a:effectRef>
+          <a:fontRef idx="minor">
+            <a:schemeClr val="lt1"/>
+          </a:fontRef>
+        </p:style>
+        <p:txBody>
+          <a:bodyPr rtlCol="0" anchor="ctr"/>
+          <a:lstStyle/>
+          <a:p>
+            <a:pPr algn="ctr"/>
+          </a:p>
+        </p:txBody>
+      </p:sp>
+      <p:pic>
+        <p:nvPicPr>
+          <p:cNvPr id="19" name="Picture 18" descr="examlab.png"/>
+          <p:cNvPicPr>
+            <a:picLocks noChangeAspect="1"/>
+          </p:cNvPicPr>
+          <p:nvPr/>
+        </p:nvPicPr>
+        <p:blipFill>
+          <a:blip r:embed="rId4"/>
+          <a:stretch>
+            <a:fillRect/>
+          </a:stretch>
+        </p:blipFill>
+        <p:spPr>
+          <a:xfrm>
+            <a:off x="9295638" y="1847087"/>
+            <a:ext cx="1252728" cy="1252728"/>
+          </a:xfrm>
+          <a:prstGeom prst="rect">
+            <a:avLst/>
+          </a:prstGeom>
+        </p:spPr>
+      </p:pic>
+      <p:sp>
+        <p:nvSpPr>
+          <p:cNvPr id="20" name="TextBox 19"/>
+          <p:cNvSpPr txBox="1"/>
+          <p:nvPr/>
+        </p:nvSpPr>
+        <p:spPr>
+          <a:xfrm>
+            <a:off x="8182660" y="3191256"/>
+            <a:ext cx="3478682" cy="621792"/>
+          </a:xfrm>
+          <a:prstGeom prst="rect">
+            <a:avLst/>
+          </a:prstGeom>
+          <a:noFill/>
+        </p:spPr>
+        <p:txBody>
+          <a:bodyPr wrap="square" anchor="t"/>
+          <a:lstStyle/>
+          <a:p>
+            <a:pPr algn="ctr"/>
+            <a:r>
+              <a:rPr sz="1300" b="1" i="0">
+                <a:solidFill>
+                  <a:srgbClr val="095292"/>
+                </a:solidFill>
+                <a:latin typeface="Calibri"/>
+              </a:rPr>
+              <a:t>la plataforma del curso</a:t>
+            </a:r>
+          </a:p>
+          <a:p>
+            <a:pPr algn="ctr">
+              <a:spcBef>
+                <a:spcPts val="200"/>
+              </a:spcBef>
             </a:pPr>
             <a:r>
-              <a:rPr sz="2000" b="0" i="0">
-                <a:solidFill>
-                  <a:srgbClr val="333333"/>
-                </a:solidFill>
-                <a:latin typeface="Calibri"/>
-              </a:rPr>
-              <a:t>–   El equipo tiende a dibujar cajas y flechas por intuicion, sin volver a mirar el flujo principal que ya habia escrito hace tres sesiones.</a:t>
-            </a:r>
-          </a:p>
-        </p:txBody>
-      </p:sp>
-      <p:sp>
-        <p:nvSpPr>
-          <p:cNvPr id="6" name="TextBox 5"/>
+              <a:rPr sz="1000" b="0" i="0">
+                <a:solidFill>
+                  <a:srgbClr val="666666"/>
+                </a:solidFill>
+                <a:latin typeface="Calibri"/>
+              </a:rPr>
+              <a:t>Entrega del taller · en la fecha que indique el docente</a:t>
+            </a:r>
+          </a:p>
+        </p:txBody>
+      </p:sp>
+      <p:sp>
+        <p:nvSpPr>
+          <p:cNvPr id="21" name="TextBox 20"/>
           <p:cNvSpPr txBox="1"/>
           <p:nvPr/>
         </p:nvSpPr>
@@ -6264,111 +6216,21 @@
                 </a:solidFill>
                 <a:latin typeface="Calibri"/>
               </a:rPr>
-              <a:t>Taller PI — pasos guiados</a:t>
-            </a:r>
-          </a:p>
-        </p:txBody>
-      </p:sp>
-      <p:sp>
-        <p:nvSpPr>
-          <p:cNvPr id="5" name="Rounded Rectangle 4"/>
-          <p:cNvSpPr/>
-          <p:nvPr/>
-        </p:nvSpPr>
-        <p:spPr>
-          <a:xfrm>
-            <a:off x="457200" y="1234440"/>
-            <a:ext cx="11277295" cy="950976"/>
-          </a:xfrm>
-          <a:prstGeom prst="roundRect">
-            <a:avLst>
-              <a:gd name="adj" fmla="val 12000"/>
-            </a:avLst>
-          </a:prstGeom>
-          <a:solidFill>
-            <a:srgbClr val="F2F2F2"/>
-          </a:solidFill>
-          <a:ln>
-            <a:noFill/>
-          </a:ln>
-        </p:spPr>
-        <p:style>
-          <a:lnRef idx="1">
-            <a:schemeClr val="accent1"/>
-          </a:lnRef>
-          <a:fillRef idx="3">
-            <a:schemeClr val="accent1"/>
-          </a:fillRef>
-          <a:effectRef idx="2">
-            <a:schemeClr val="accent1"/>
-          </a:effectRef>
-          <a:fontRef idx="minor">
-            <a:schemeClr val="lt1"/>
-          </a:fontRef>
-        </p:style>
-        <p:txBody>
-          <a:bodyPr rtlCol="0" anchor="ctr"/>
-          <a:lstStyle/>
-          <a:p>
-            <a:pPr algn="ctr"/>
-          </a:p>
-        </p:txBody>
-      </p:sp>
-      <p:sp>
-        <p:nvSpPr>
-          <p:cNvPr id="6" name="Rounded Rectangle 5"/>
-          <p:cNvSpPr/>
-          <p:nvPr/>
-        </p:nvSpPr>
-        <p:spPr>
-          <a:xfrm>
-            <a:off x="594360" y="1490472"/>
-            <a:ext cx="438912" cy="438912"/>
-          </a:xfrm>
-          <a:prstGeom prst="roundRect">
-            <a:avLst>
-              <a:gd name="adj" fmla="val 12000"/>
-            </a:avLst>
-          </a:prstGeom>
-          <a:solidFill>
-            <a:srgbClr val="095292"/>
-          </a:solidFill>
-          <a:ln>
-            <a:noFill/>
-          </a:ln>
-        </p:spPr>
-        <p:style>
-          <a:lnRef idx="1">
-            <a:schemeClr val="accent1"/>
-          </a:lnRef>
-          <a:fillRef idx="3">
-            <a:schemeClr val="accent1"/>
-          </a:fillRef>
-          <a:effectRef idx="2">
-            <a:schemeClr val="accent1"/>
-          </a:effectRef>
-          <a:fontRef idx="minor">
-            <a:schemeClr val="lt1"/>
-          </a:fontRef>
-        </p:style>
-        <p:txBody>
-          <a:bodyPr rtlCol="0" anchor="ctr"/>
-          <a:lstStyle/>
-          <a:p>
-            <a:pPr algn="ctr"/>
-          </a:p>
-        </p:txBody>
-      </p:sp>
-      <p:sp>
-        <p:nvSpPr>
-          <p:cNvPr id="7" name="TextBox 6"/>
+              <a:t>Taller PI — por que importa</a:t>
+            </a:r>
+          </a:p>
+        </p:txBody>
+      </p:sp>
+      <p:sp>
+        <p:nvSpPr>
+          <p:cNvPr id="5" name="TextBox 4"/>
           <p:cNvSpPr txBox="1"/>
           <p:nvPr/>
         </p:nvSpPr>
         <p:spPr>
           <a:xfrm>
-            <a:off x="594360" y="1490472"/>
-            <a:ext cx="438912" cy="438912"/>
+            <a:off x="457200" y="1170432"/>
+            <a:ext cx="11277295" cy="5230368"/>
           </a:xfrm>
           <a:prstGeom prst="rect">
             <a:avLst/>
@@ -6376,677 +6238,81 @@
           <a:noFill/>
         </p:spPr>
         <p:txBody>
-          <a:bodyPr wrap="square" anchor="ctr"/>
-          <a:lstStyle/>
-          <a:p>
-            <a:pPr algn="ctr"/>
-            <a:r>
-              <a:rPr sz="1600" b="1" i="0">
-                <a:solidFill>
-                  <a:srgbClr val="FFFFFF"/>
-                </a:solidFill>
-                <a:latin typeface="Calibri"/>
-              </a:rPr>
-              <a:t>1</a:t>
-            </a:r>
-          </a:p>
-        </p:txBody>
-      </p:sp>
-      <p:sp>
-        <p:nvSpPr>
-          <p:cNvPr id="8" name="TextBox 7"/>
-          <p:cNvSpPr txBox="1"/>
-          <p:nvPr/>
-        </p:nvSpPr>
-        <p:spPr>
-          <a:xfrm>
-            <a:off x="1188720" y="1325880"/>
-            <a:ext cx="10271455" cy="786384"/>
-          </a:xfrm>
-          <a:prstGeom prst="rect">
-            <a:avLst/>
-          </a:prstGeom>
-          <a:noFill/>
-        </p:spPr>
-        <p:txBody>
-          <a:bodyPr wrap="square" anchor="ctr"/>
-          <a:lstStyle/>
-          <a:p>
-            <a:r>
-              <a:rPr sz="1400" b="1" i="0">
-                <a:solidFill>
-                  <a:srgbClr val="095292"/>
-                </a:solidFill>
-                <a:latin typeface="Calibri"/>
-              </a:rPr>
-              <a:t>Tomar el flujo principal escrito de CU-04 Agendar cita, y si todavia no esta especificado diligenciar primero la plantilla de la clase nueve, para luego numerar en el documento cual paso genera cual mensaje, de manera que quede una lista de entre seis y ocho mensajes antes de dibujar cualquier cosa.</a:t>
-            </a:r>
-          </a:p>
-        </p:txBody>
-      </p:sp>
-      <p:sp>
-        <p:nvSpPr>
-          <p:cNvPr id="9" name="Rounded Rectangle 8"/>
-          <p:cNvSpPr/>
-          <p:nvPr/>
-        </p:nvSpPr>
-        <p:spPr>
-          <a:xfrm>
-            <a:off x="457200" y="2276856"/>
-            <a:ext cx="11277295" cy="950976"/>
-          </a:xfrm>
-          <a:prstGeom prst="roundRect">
-            <a:avLst>
-              <a:gd name="adj" fmla="val 12000"/>
-            </a:avLst>
-          </a:prstGeom>
-          <a:solidFill>
-            <a:srgbClr val="E8F4FA"/>
-          </a:solidFill>
-          <a:ln>
-            <a:noFill/>
-          </a:ln>
-        </p:spPr>
-        <p:style>
-          <a:lnRef idx="1">
-            <a:schemeClr val="accent1"/>
-          </a:lnRef>
-          <a:fillRef idx="3">
-            <a:schemeClr val="accent1"/>
-          </a:fillRef>
-          <a:effectRef idx="2">
-            <a:schemeClr val="accent1"/>
-          </a:effectRef>
-          <a:fontRef idx="minor">
-            <a:schemeClr val="lt1"/>
-          </a:fontRef>
-        </p:style>
-        <p:txBody>
-          <a:bodyPr rtlCol="0" anchor="ctr"/>
-          <a:lstStyle/>
-          <a:p>
-            <a:pPr algn="ctr"/>
-          </a:p>
-        </p:txBody>
-      </p:sp>
-      <p:sp>
-        <p:nvSpPr>
-          <p:cNvPr id="10" name="Rounded Rectangle 9"/>
-          <p:cNvSpPr/>
-          <p:nvPr/>
-        </p:nvSpPr>
-        <p:spPr>
-          <a:xfrm>
-            <a:off x="594360" y="2532888"/>
-            <a:ext cx="438912" cy="438912"/>
-          </a:xfrm>
-          <a:prstGeom prst="roundRect">
-            <a:avLst>
-              <a:gd name="adj" fmla="val 12000"/>
-            </a:avLst>
-          </a:prstGeom>
-          <a:solidFill>
-            <a:srgbClr val="095292"/>
-          </a:solidFill>
-          <a:ln>
-            <a:noFill/>
-          </a:ln>
-        </p:spPr>
-        <p:style>
-          <a:lnRef idx="1">
-            <a:schemeClr val="accent1"/>
-          </a:lnRef>
-          <a:fillRef idx="3">
-            <a:schemeClr val="accent1"/>
-          </a:fillRef>
-          <a:effectRef idx="2">
-            <a:schemeClr val="accent1"/>
-          </a:effectRef>
-          <a:fontRef idx="minor">
-            <a:schemeClr val="lt1"/>
-          </a:fontRef>
-        </p:style>
-        <p:txBody>
-          <a:bodyPr rtlCol="0" anchor="ctr"/>
-          <a:lstStyle/>
-          <a:p>
-            <a:pPr algn="ctr"/>
-          </a:p>
-        </p:txBody>
-      </p:sp>
-      <p:sp>
-        <p:nvSpPr>
-          <p:cNvPr id="11" name="TextBox 10"/>
-          <p:cNvSpPr txBox="1"/>
-          <p:nvPr/>
-        </p:nvSpPr>
-        <p:spPr>
-          <a:xfrm>
-            <a:off x="594360" y="2532888"/>
-            <a:ext cx="438912" cy="438912"/>
-          </a:xfrm>
-          <a:prstGeom prst="rect">
-            <a:avLst/>
-          </a:prstGeom>
-          <a:noFill/>
-        </p:spPr>
-        <p:txBody>
-          <a:bodyPr wrap="square" anchor="ctr"/>
-          <a:lstStyle/>
-          <a:p>
-            <a:pPr algn="ctr"/>
-            <a:r>
-              <a:rPr sz="1600" b="1" i="0">
-                <a:solidFill>
-                  <a:srgbClr val="FFFFFF"/>
-                </a:solidFill>
-                <a:latin typeface="Calibri"/>
-              </a:rPr>
-              <a:t>2</a:t>
-            </a:r>
-          </a:p>
-        </p:txBody>
-      </p:sp>
-      <p:sp>
-        <p:nvSpPr>
-          <p:cNvPr id="12" name="TextBox 11"/>
-          <p:cNvSpPr txBox="1"/>
-          <p:nvPr/>
-        </p:nvSpPr>
-        <p:spPr>
-          <a:xfrm>
-            <a:off x="1188720" y="2368296"/>
-            <a:ext cx="10271455" cy="786384"/>
-          </a:xfrm>
-          <a:prstGeom prst="rect">
-            <a:avLst/>
-          </a:prstGeom>
-          <a:noFill/>
-        </p:spPr>
-        <p:txBody>
-          <a:bodyPr wrap="square" anchor="ctr"/>
-          <a:lstStyle/>
-          <a:p>
-            <a:r>
-              <a:rPr sz="1400" b="1" i="0">
-                <a:solidFill>
-                  <a:srgbClr val="095292"/>
-                </a:solidFill>
-                <a:latin typeface="Calibri"/>
-              </a:rPr>
-              <a:t>Dibujar el diagrama de secuencia en Mermaid Live Editor o draw.io con la recepcionista como actor y minimo tres participantes que correspondan a clases reales del diagrama de clases de VetCare, incluyendo las flechas de retorno con el dato que devuelven.</a:t>
-            </a:r>
-          </a:p>
-        </p:txBody>
-      </p:sp>
-      <p:sp>
-        <p:nvSpPr>
-          <p:cNvPr id="13" name="Rounded Rectangle 12"/>
-          <p:cNvSpPr/>
-          <p:nvPr/>
-        </p:nvSpPr>
-        <p:spPr>
-          <a:xfrm>
-            <a:off x="457200" y="3319272"/>
-            <a:ext cx="11277295" cy="950976"/>
-          </a:xfrm>
-          <a:prstGeom prst="roundRect">
-            <a:avLst>
-              <a:gd name="adj" fmla="val 12000"/>
-            </a:avLst>
-          </a:prstGeom>
-          <a:solidFill>
-            <a:srgbClr val="F2F2F2"/>
-          </a:solidFill>
-          <a:ln>
-            <a:noFill/>
-          </a:ln>
-        </p:spPr>
-        <p:style>
-          <a:lnRef idx="1">
-            <a:schemeClr val="accent1"/>
-          </a:lnRef>
-          <a:fillRef idx="3">
-            <a:schemeClr val="accent1"/>
-          </a:fillRef>
-          <a:effectRef idx="2">
-            <a:schemeClr val="accent1"/>
-          </a:effectRef>
-          <a:fontRef idx="minor">
-            <a:schemeClr val="lt1"/>
-          </a:fontRef>
-        </p:style>
-        <p:txBody>
-          <a:bodyPr rtlCol="0" anchor="ctr"/>
-          <a:lstStyle/>
-          <a:p>
-            <a:pPr algn="ctr"/>
-          </a:p>
-        </p:txBody>
-      </p:sp>
-      <p:sp>
-        <p:nvSpPr>
-          <p:cNvPr id="14" name="Rounded Rectangle 13"/>
-          <p:cNvSpPr/>
-          <p:nvPr/>
-        </p:nvSpPr>
-        <p:spPr>
-          <a:xfrm>
-            <a:off x="594360" y="3575304"/>
-            <a:ext cx="438912" cy="438912"/>
-          </a:xfrm>
-          <a:prstGeom prst="roundRect">
-            <a:avLst>
-              <a:gd name="adj" fmla="val 12000"/>
-            </a:avLst>
-          </a:prstGeom>
-          <a:solidFill>
-            <a:srgbClr val="095292"/>
-          </a:solidFill>
-          <a:ln>
-            <a:noFill/>
-          </a:ln>
-        </p:spPr>
-        <p:style>
-          <a:lnRef idx="1">
-            <a:schemeClr val="accent1"/>
-          </a:lnRef>
-          <a:fillRef idx="3">
-            <a:schemeClr val="accent1"/>
-          </a:fillRef>
-          <a:effectRef idx="2">
-            <a:schemeClr val="accent1"/>
-          </a:effectRef>
-          <a:fontRef idx="minor">
-            <a:schemeClr val="lt1"/>
-          </a:fontRef>
-        </p:style>
-        <p:txBody>
-          <a:bodyPr rtlCol="0" anchor="ctr"/>
-          <a:lstStyle/>
-          <a:p>
-            <a:pPr algn="ctr"/>
-          </a:p>
-        </p:txBody>
-      </p:sp>
-      <p:sp>
-        <p:nvSpPr>
-          <p:cNvPr id="15" name="TextBox 14"/>
-          <p:cNvSpPr txBox="1"/>
-          <p:nvPr/>
-        </p:nvSpPr>
-        <p:spPr>
-          <a:xfrm>
-            <a:off x="594360" y="3575304"/>
-            <a:ext cx="438912" cy="438912"/>
-          </a:xfrm>
-          <a:prstGeom prst="rect">
-            <a:avLst/>
-          </a:prstGeom>
-          <a:noFill/>
-        </p:spPr>
-        <p:txBody>
-          <a:bodyPr wrap="square" anchor="ctr"/>
-          <a:lstStyle/>
-          <a:p>
-            <a:pPr algn="ctr"/>
-            <a:r>
-              <a:rPr sz="1600" b="1" i="0">
-                <a:solidFill>
-                  <a:srgbClr val="FFFFFF"/>
-                </a:solidFill>
-                <a:latin typeface="Calibri"/>
-              </a:rPr>
-              <a:t>3</a:t>
-            </a:r>
-          </a:p>
-        </p:txBody>
-      </p:sp>
-      <p:sp>
-        <p:nvSpPr>
-          <p:cNvPr id="16" name="TextBox 15"/>
-          <p:cNvSpPr txBox="1"/>
-          <p:nvPr/>
-        </p:nvSpPr>
-        <p:spPr>
-          <a:xfrm>
-            <a:off x="1188720" y="3410712"/>
-            <a:ext cx="10271455" cy="786384"/>
-          </a:xfrm>
-          <a:prstGeom prst="rect">
-            <a:avLst/>
-          </a:prstGeom>
-          <a:noFill/>
-        </p:spPr>
-        <p:txBody>
-          <a:bodyPr wrap="square" anchor="ctr"/>
-          <a:lstStyle/>
-          <a:p>
-            <a:r>
-              <a:rPr sz="1500" b="1" i="0">
-                <a:solidFill>
-                  <a:srgbClr val="095292"/>
-                </a:solidFill>
-                <a:latin typeface="Calibri"/>
-              </a:rPr>
-              <a:t>Agregar un fragmento alt que modele el horario ocupado con sus dos condiciones de guarda escritas, y verificar que el camino del else corresponda a un flujo alterno documentado en la especificacion del caso de uso.</a:t>
-            </a:r>
-          </a:p>
-        </p:txBody>
-      </p:sp>
-      <p:sp>
-        <p:nvSpPr>
-          <p:cNvPr id="17" name="Rounded Rectangle 16"/>
-          <p:cNvSpPr/>
-          <p:nvPr/>
-        </p:nvSpPr>
-        <p:spPr>
-          <a:xfrm>
-            <a:off x="457200" y="4361688"/>
-            <a:ext cx="11277295" cy="950976"/>
-          </a:xfrm>
-          <a:prstGeom prst="roundRect">
-            <a:avLst>
-              <a:gd name="adj" fmla="val 12000"/>
-            </a:avLst>
-          </a:prstGeom>
-          <a:solidFill>
-            <a:srgbClr val="E8F4FA"/>
-          </a:solidFill>
-          <a:ln>
-            <a:noFill/>
-          </a:ln>
-        </p:spPr>
-        <p:style>
-          <a:lnRef idx="1">
-            <a:schemeClr val="accent1"/>
-          </a:lnRef>
-          <a:fillRef idx="3">
-            <a:schemeClr val="accent1"/>
-          </a:fillRef>
-          <a:effectRef idx="2">
-            <a:schemeClr val="accent1"/>
-          </a:effectRef>
-          <a:fontRef idx="minor">
-            <a:schemeClr val="lt1"/>
-          </a:fontRef>
-        </p:style>
-        <p:txBody>
-          <a:bodyPr rtlCol="0" anchor="ctr"/>
-          <a:lstStyle/>
-          <a:p>
-            <a:pPr algn="ctr"/>
-          </a:p>
-        </p:txBody>
-      </p:sp>
-      <p:sp>
-        <p:nvSpPr>
-          <p:cNvPr id="18" name="Rounded Rectangle 17"/>
-          <p:cNvSpPr/>
-          <p:nvPr/>
-        </p:nvSpPr>
-        <p:spPr>
-          <a:xfrm>
-            <a:off x="594360" y="4617720"/>
-            <a:ext cx="438912" cy="438912"/>
-          </a:xfrm>
-          <a:prstGeom prst="roundRect">
-            <a:avLst>
-              <a:gd name="adj" fmla="val 12000"/>
-            </a:avLst>
-          </a:prstGeom>
-          <a:solidFill>
-            <a:srgbClr val="095292"/>
-          </a:solidFill>
-          <a:ln>
-            <a:noFill/>
-          </a:ln>
-        </p:spPr>
-        <p:style>
-          <a:lnRef idx="1">
-            <a:schemeClr val="accent1"/>
-          </a:lnRef>
-          <a:fillRef idx="3">
-            <a:schemeClr val="accent1"/>
-          </a:fillRef>
-          <a:effectRef idx="2">
-            <a:schemeClr val="accent1"/>
-          </a:effectRef>
-          <a:fontRef idx="minor">
-            <a:schemeClr val="lt1"/>
-          </a:fontRef>
-        </p:style>
-        <p:txBody>
-          <a:bodyPr rtlCol="0" anchor="ctr"/>
-          <a:lstStyle/>
-          <a:p>
-            <a:pPr algn="ctr"/>
-          </a:p>
-        </p:txBody>
-      </p:sp>
-      <p:sp>
-        <p:nvSpPr>
-          <p:cNvPr id="19" name="TextBox 18"/>
-          <p:cNvSpPr txBox="1"/>
-          <p:nvPr/>
-        </p:nvSpPr>
-        <p:spPr>
-          <a:xfrm>
-            <a:off x="594360" y="4617720"/>
-            <a:ext cx="438912" cy="438912"/>
-          </a:xfrm>
-          <a:prstGeom prst="rect">
-            <a:avLst/>
-          </a:prstGeom>
-          <a:noFill/>
-        </p:spPr>
-        <p:txBody>
-          <a:bodyPr wrap="square" anchor="ctr"/>
-          <a:lstStyle/>
-          <a:p>
-            <a:pPr algn="ctr"/>
-            <a:r>
-              <a:rPr sz="1600" b="1" i="0">
-                <a:solidFill>
-                  <a:srgbClr val="FFFFFF"/>
-                </a:solidFill>
-                <a:latin typeface="Calibri"/>
-              </a:rPr>
-              <a:t>4</a:t>
-            </a:r>
-          </a:p>
-        </p:txBody>
-      </p:sp>
-      <p:sp>
-        <p:nvSpPr>
-          <p:cNvPr id="20" name="TextBox 19"/>
-          <p:cNvSpPr txBox="1"/>
-          <p:nvPr/>
-        </p:nvSpPr>
-        <p:spPr>
-          <a:xfrm>
-            <a:off x="1188720" y="4453128"/>
-            <a:ext cx="10271455" cy="786384"/>
-          </a:xfrm>
-          <a:prstGeom prst="rect">
-            <a:avLst/>
-          </a:prstGeom>
-          <a:noFill/>
-        </p:spPr>
-        <p:txBody>
-          <a:bodyPr wrap="square" anchor="ctr"/>
-          <a:lstStyle/>
-          <a:p>
-            <a:r>
-              <a:rPr sz="1500" b="1" i="0">
-                <a:solidFill>
-                  <a:srgbClr val="095292"/>
-                </a:solidFill>
-                <a:latin typeface="Calibri"/>
-              </a:rPr>
-              <a:t>Construir la tabla de mapeo mensaje a operacion con tres columnas, mensaje, clase destinataria y operacion que debe existir, y agregar al diagrama de clases toda operacion que hoy falte; ninguna fila puede quedar con la clase en blanco.</a:t>
-            </a:r>
-          </a:p>
-        </p:txBody>
-      </p:sp>
-      <p:sp>
-        <p:nvSpPr>
-          <p:cNvPr id="21" name="Rounded Rectangle 20"/>
-          <p:cNvSpPr/>
-          <p:nvPr/>
-        </p:nvSpPr>
-        <p:spPr>
-          <a:xfrm>
-            <a:off x="457200" y="5404104"/>
-            <a:ext cx="11277295" cy="950976"/>
-          </a:xfrm>
-          <a:prstGeom prst="roundRect">
-            <a:avLst>
-              <a:gd name="adj" fmla="val 12000"/>
-            </a:avLst>
-          </a:prstGeom>
-          <a:solidFill>
-            <a:srgbClr val="F2F2F2"/>
-          </a:solidFill>
-          <a:ln>
-            <a:noFill/>
-          </a:ln>
-        </p:spPr>
-        <p:style>
-          <a:lnRef idx="1">
-            <a:schemeClr val="accent1"/>
-          </a:lnRef>
-          <a:fillRef idx="3">
-            <a:schemeClr val="accent1"/>
-          </a:fillRef>
-          <a:effectRef idx="2">
-            <a:schemeClr val="accent1"/>
-          </a:effectRef>
-          <a:fontRef idx="minor">
-            <a:schemeClr val="lt1"/>
-          </a:fontRef>
-        </p:style>
-        <p:txBody>
-          <a:bodyPr rtlCol="0" anchor="ctr"/>
-          <a:lstStyle/>
-          <a:p>
-            <a:pPr algn="ctr"/>
-          </a:p>
-        </p:txBody>
-      </p:sp>
-      <p:sp>
-        <p:nvSpPr>
-          <p:cNvPr id="22" name="Rounded Rectangle 21"/>
-          <p:cNvSpPr/>
-          <p:nvPr/>
-        </p:nvSpPr>
-        <p:spPr>
-          <a:xfrm>
-            <a:off x="594360" y="5660136"/>
-            <a:ext cx="438912" cy="438912"/>
-          </a:xfrm>
-          <a:prstGeom prst="roundRect">
-            <a:avLst>
-              <a:gd name="adj" fmla="val 12000"/>
-            </a:avLst>
-          </a:prstGeom>
-          <a:solidFill>
-            <a:srgbClr val="095292"/>
-          </a:solidFill>
-          <a:ln>
-            <a:noFill/>
-          </a:ln>
-        </p:spPr>
-        <p:style>
-          <a:lnRef idx="1">
-            <a:schemeClr val="accent1"/>
-          </a:lnRef>
-          <a:fillRef idx="3">
-            <a:schemeClr val="accent1"/>
-          </a:fillRef>
-          <a:effectRef idx="2">
-            <a:schemeClr val="accent1"/>
-          </a:effectRef>
-          <a:fontRef idx="minor">
-            <a:schemeClr val="lt1"/>
-          </a:fontRef>
-        </p:style>
-        <p:txBody>
-          <a:bodyPr rtlCol="0" anchor="ctr"/>
-          <a:lstStyle/>
-          <a:p>
-            <a:pPr algn="ctr"/>
-          </a:p>
-        </p:txBody>
-      </p:sp>
-      <p:sp>
-        <p:nvSpPr>
-          <p:cNvPr id="23" name="TextBox 22"/>
-          <p:cNvSpPr txBox="1"/>
-          <p:nvPr/>
-        </p:nvSpPr>
-        <p:spPr>
-          <a:xfrm>
-            <a:off x="594360" y="5660136"/>
-            <a:ext cx="438912" cy="438912"/>
-          </a:xfrm>
-          <a:prstGeom prst="rect">
-            <a:avLst/>
-          </a:prstGeom>
-          <a:noFill/>
-        </p:spPr>
-        <p:txBody>
-          <a:bodyPr wrap="square" anchor="ctr"/>
-          <a:lstStyle/>
-          <a:p>
-            <a:pPr algn="ctr"/>
-            <a:r>
-              <a:rPr sz="1600" b="1" i="0">
-                <a:solidFill>
-                  <a:srgbClr val="FFFFFF"/>
-                </a:solidFill>
-                <a:latin typeface="Calibri"/>
-              </a:rPr>
-              <a:t>5</a:t>
-            </a:r>
-          </a:p>
-        </p:txBody>
-      </p:sp>
-      <p:sp>
-        <p:nvSpPr>
-          <p:cNvPr id="24" name="TextBox 23"/>
-          <p:cNvSpPr txBox="1"/>
-          <p:nvPr/>
-        </p:nvSpPr>
-        <p:spPr>
-          <a:xfrm>
-            <a:off x="1188720" y="5495544"/>
-            <a:ext cx="10271455" cy="786384"/>
-          </a:xfrm>
-          <a:prstGeom prst="rect">
-            <a:avLst/>
-          </a:prstGeom>
-          <a:noFill/>
-        </p:spPr>
-        <p:txBody>
-          <a:bodyPr wrap="square" anchor="ctr"/>
-          <a:lstStyle/>
-          <a:p>
-            <a:r>
-              <a:rPr sz="1400" b="1" i="0">
-                <a:solidFill>
-                  <a:srgbClr val="095292"/>
-                </a:solidFill>
-                <a:latin typeface="Calibri"/>
-              </a:rPr>
-              <a:t>Dibujar el diagrama de actividad del proceso de atencion en el consultorio con cuatro calles (Propietario, Recepcionista, Veterinario y Sistema VetCare), con minimo dos nodos de decision y una bifurcacion en paralelo, y exportar todo a PDF para subirlo a la plataforma del curso.</a:t>
-            </a:r>
-          </a:p>
-        </p:txBody>
-      </p:sp>
-      <p:sp>
-        <p:nvSpPr>
-          <p:cNvPr id="25" name="TextBox 24"/>
+          <a:bodyPr wrap="square">
+            <a:spAutoFit/>
+          </a:bodyPr>
+          <a:lstStyle/>
+          <a:p>
+            <a:pPr>
+              <a:spcAft>
+                <a:spcPts val="800"/>
+              </a:spcAft>
+            </a:pPr>
+            <a:r>
+              <a:rPr sz="2000" b="0" i="0">
+                <a:solidFill>
+                  <a:srgbClr val="333333"/>
+                </a:solidFill>
+                <a:latin typeface="Calibri"/>
+              </a:rPr>
+              <a:t>–   </a:t>
+            </a:r>
+            <a:r>
+              <a:rPr sz="2000" b="1" i="0">
+                <a:solidFill>
+                  <a:srgbClr val="333333"/>
+                </a:solidFill>
+                <a:latin typeface="Calibri"/>
+              </a:rPr>
+              <a:t>Por que importa al PI:</a:t>
+            </a:r>
+            <a:r>
+              <a:rPr sz="2000" b="0" i="0">
+                <a:solidFill>
+                  <a:srgbClr val="333333"/>
+                </a:solidFill>
+                <a:latin typeface="Calibri"/>
+              </a:rPr>
+              <a:t> los casos de uso dicen que hace VetCare y el diagrama de clases dice de que esta hecho, pero solo los diagramas de secuencia y actividad muestran como colaboran las piezas en el tiempo, que es lo que necesita quien vaya a construirlo.</a:t>
+            </a:r>
+          </a:p>
+          <a:p>
+            <a:pPr>
+              <a:spcAft>
+                <a:spcPts val="800"/>
+              </a:spcAft>
+            </a:pPr>
+            <a:r>
+              <a:rPr sz="2000" b="0" i="0">
+                <a:solidFill>
+                  <a:srgbClr val="333333"/>
+                </a:solidFill>
+                <a:latin typeface="Calibri"/>
+              </a:rPr>
+              <a:t>–   Dibujar la secuencia es la forma mas barata de descubrir que al diagrama de clases le faltan operaciones, porque cada flecha exige un dueño que la pueda responder.</a:t>
+            </a:r>
+          </a:p>
+          <a:p>
+            <a:pPr>
+              <a:spcAft>
+                <a:spcPts val="800"/>
+              </a:spcAft>
+            </a:pPr>
+            <a:r>
+              <a:rPr sz="2000" b="0" i="0">
+                <a:solidFill>
+                  <a:srgbClr val="333333"/>
+                </a:solidFill>
+                <a:latin typeface="Calibri"/>
+              </a:rPr>
+              <a:t>–   El diagrama de actividad es el unico artefacto del paquete que muestra el trabajo humano de la clinica Huellitas, incluidas las esperas y las decisiones que ocurren fuera del computador.</a:t>
+            </a:r>
+          </a:p>
+        </p:txBody>
+      </p:sp>
+      <p:sp>
+        <p:nvSpPr>
+          <p:cNvPr id="6" name="TextBox 5"/>
           <p:cNvSpPr txBox="1"/>
           <p:nvPr/>
         </p:nvSpPr>
@@ -7220,154 +6486,21 @@
                 </a:solidFill>
                 <a:latin typeface="Calibri"/>
               </a:rPr>
-              <a:t>Antes de entregar — autochequeo</a:t>
-            </a:r>
-          </a:p>
-        </p:txBody>
-      </p:sp>
-      <p:sp>
-        <p:nvSpPr>
-          <p:cNvPr id="5" name="Rounded Rectangle 4"/>
-          <p:cNvSpPr/>
-          <p:nvPr/>
-        </p:nvSpPr>
-        <p:spPr>
-          <a:xfrm>
-            <a:off x="457200" y="1261872"/>
-            <a:ext cx="11277295" cy="566928"/>
-          </a:xfrm>
-          <a:prstGeom prst="roundRect">
-            <a:avLst>
-              <a:gd name="adj" fmla="val 12000"/>
-            </a:avLst>
-          </a:prstGeom>
-          <a:solidFill>
-            <a:srgbClr val="F2F2F2"/>
-          </a:solidFill>
-          <a:ln>
-            <a:noFill/>
-          </a:ln>
-        </p:spPr>
-        <p:style>
-          <a:lnRef idx="1">
-            <a:schemeClr val="accent1"/>
-          </a:lnRef>
-          <a:fillRef idx="3">
-            <a:schemeClr val="accent1"/>
-          </a:fillRef>
-          <a:effectRef idx="2">
-            <a:schemeClr val="accent1"/>
-          </a:effectRef>
-          <a:fontRef idx="minor">
-            <a:schemeClr val="lt1"/>
-          </a:fontRef>
-        </p:style>
-        <p:txBody>
-          <a:bodyPr rtlCol="0" anchor="ctr"/>
-          <a:lstStyle/>
-          <a:p>
-            <a:pPr algn="ctr"/>
-          </a:p>
-        </p:txBody>
-      </p:sp>
-      <p:sp>
-        <p:nvSpPr>
-          <p:cNvPr id="6" name="Rectangle 5"/>
-          <p:cNvSpPr/>
-          <p:nvPr/>
-        </p:nvSpPr>
-        <p:spPr>
-          <a:xfrm>
-            <a:off x="640080" y="1408175"/>
-            <a:ext cx="274320" cy="274320"/>
-          </a:xfrm>
-          <a:prstGeom prst="rect">
-            <a:avLst/>
-          </a:prstGeom>
-          <a:solidFill>
-            <a:srgbClr val="FFFFFF"/>
-          </a:solidFill>
-          <a:ln>
-            <a:solidFill>
-              <a:srgbClr val="333333"/>
-            </a:solidFill>
-          </a:ln>
-        </p:spPr>
-        <p:style>
-          <a:lnRef idx="1">
-            <a:schemeClr val="accent1"/>
-          </a:lnRef>
-          <a:fillRef idx="3">
-            <a:schemeClr val="accent1"/>
-          </a:fillRef>
-          <a:effectRef idx="2">
-            <a:schemeClr val="accent1"/>
-          </a:effectRef>
-          <a:fontRef idx="minor">
-            <a:schemeClr val="lt1"/>
-          </a:fontRef>
-        </p:style>
-        <p:txBody>
-          <a:bodyPr rtlCol="0" anchor="ctr"/>
-          <a:lstStyle/>
-          <a:p>
-            <a:pPr algn="ctr"/>
-          </a:p>
-        </p:txBody>
-      </p:sp>
-      <p:sp>
-        <p:nvSpPr>
-          <p:cNvPr id="7" name="Rectangle 6"/>
-          <p:cNvSpPr/>
-          <p:nvPr/>
-        </p:nvSpPr>
-        <p:spPr>
-          <a:xfrm>
-            <a:off x="640080" y="1408175"/>
-            <a:ext cx="73152" cy="274320"/>
-          </a:xfrm>
-          <a:prstGeom prst="rect">
-            <a:avLst/>
-          </a:prstGeom>
-          <a:solidFill>
-            <a:srgbClr val="269CCB"/>
-          </a:solidFill>
-          <a:ln>
-            <a:noFill/>
-          </a:ln>
-        </p:spPr>
-        <p:style>
-          <a:lnRef idx="1">
-            <a:schemeClr val="accent1"/>
-          </a:lnRef>
-          <a:fillRef idx="3">
-            <a:schemeClr val="accent1"/>
-          </a:fillRef>
-          <a:effectRef idx="2">
-            <a:schemeClr val="accent1"/>
-          </a:effectRef>
-          <a:fontRef idx="minor">
-            <a:schemeClr val="lt1"/>
-          </a:fontRef>
-        </p:style>
-        <p:txBody>
-          <a:bodyPr rtlCol="0" anchor="ctr"/>
-          <a:lstStyle/>
-          <a:p>
-            <a:pPr algn="ctr"/>
-          </a:p>
-        </p:txBody>
-      </p:sp>
-      <p:sp>
-        <p:nvSpPr>
-          <p:cNvPr id="8" name="TextBox 7"/>
+              <a:t>Taller PI — punto de partida</a:t>
+            </a:r>
+          </a:p>
+        </p:txBody>
+      </p:sp>
+      <p:sp>
+        <p:nvSpPr>
+          <p:cNvPr id="5" name="TextBox 4"/>
           <p:cNvSpPr txBox="1"/>
           <p:nvPr/>
         </p:nvSpPr>
         <p:spPr>
           <a:xfrm>
-            <a:off x="1097280" y="1353312"/>
-            <a:ext cx="10362895" cy="402336"/>
+            <a:off x="457200" y="1170432"/>
+            <a:ext cx="11277295" cy="5230368"/>
           </a:xfrm>
           <a:prstGeom prst="rect">
             <a:avLst/>
@@ -7375,354 +6508,63 @@
           <a:noFill/>
         </p:spPr>
         <p:txBody>
-          <a:bodyPr wrap="square" anchor="ctr"/>
-          <a:lstStyle/>
-          <a:p>
-            <a:r>
-              <a:rPr sz="1500" b="0" i="0">
+          <a:bodyPr wrap="square">
+            <a:spAutoFit/>
+          </a:bodyPr>
+          <a:lstStyle/>
+          <a:p>
+            <a:pPr>
+              <a:spcAft>
+                <a:spcPts val="800"/>
+              </a:spcAft>
+            </a:pPr>
+            <a:r>
+              <a:rPr sz="2000" b="0" i="0">
                 <a:solidFill>
                   <a:srgbClr val="333333"/>
                 </a:solidFill>
                 <a:latin typeface="Calibri"/>
               </a:rPr>
-              <a:t>Si sigue las flechas de su diagrama de arriba hacia abajo, obtiene exactamente el mismo relato que ya escribio en el flujo principal del caso de uso?</a:t>
-            </a:r>
-          </a:p>
-        </p:txBody>
-      </p:sp>
-      <p:sp>
-        <p:nvSpPr>
-          <p:cNvPr id="9" name="Rounded Rectangle 8"/>
-          <p:cNvSpPr/>
-          <p:nvPr/>
-        </p:nvSpPr>
-        <p:spPr>
-          <a:xfrm>
-            <a:off x="457200" y="1938528"/>
-            <a:ext cx="11277295" cy="566928"/>
-          </a:xfrm>
-          <a:prstGeom prst="roundRect">
-            <a:avLst>
-              <a:gd name="adj" fmla="val 12000"/>
-            </a:avLst>
-          </a:prstGeom>
-          <a:solidFill>
-            <a:srgbClr val="F2F2F2"/>
-          </a:solidFill>
-          <a:ln>
-            <a:noFill/>
-          </a:ln>
-        </p:spPr>
-        <p:style>
-          <a:lnRef idx="1">
-            <a:schemeClr val="accent1"/>
-          </a:lnRef>
-          <a:fillRef idx="3">
-            <a:schemeClr val="accent1"/>
-          </a:fillRef>
-          <a:effectRef idx="2">
-            <a:schemeClr val="accent1"/>
-          </a:effectRef>
-          <a:fontRef idx="minor">
-            <a:schemeClr val="lt1"/>
-          </a:fontRef>
-        </p:style>
-        <p:txBody>
-          <a:bodyPr rtlCol="0" anchor="ctr"/>
-          <a:lstStyle/>
-          <a:p>
-            <a:pPr algn="ctr"/>
-          </a:p>
-        </p:txBody>
-      </p:sp>
-      <p:sp>
-        <p:nvSpPr>
-          <p:cNvPr id="10" name="Rectangle 9"/>
-          <p:cNvSpPr/>
-          <p:nvPr/>
-        </p:nvSpPr>
-        <p:spPr>
-          <a:xfrm>
-            <a:off x="640080" y="2084832"/>
-            <a:ext cx="274320" cy="274320"/>
-          </a:xfrm>
-          <a:prstGeom prst="rect">
-            <a:avLst/>
-          </a:prstGeom>
-          <a:solidFill>
-            <a:srgbClr val="FFFFFF"/>
-          </a:solidFill>
-          <a:ln>
-            <a:solidFill>
-              <a:srgbClr val="333333"/>
-            </a:solidFill>
-          </a:ln>
-        </p:spPr>
-        <p:style>
-          <a:lnRef idx="1">
-            <a:schemeClr val="accent1"/>
-          </a:lnRef>
-          <a:fillRef idx="3">
-            <a:schemeClr val="accent1"/>
-          </a:fillRef>
-          <a:effectRef idx="2">
-            <a:schemeClr val="accent1"/>
-          </a:effectRef>
-          <a:fontRef idx="minor">
-            <a:schemeClr val="lt1"/>
-          </a:fontRef>
-        </p:style>
-        <p:txBody>
-          <a:bodyPr rtlCol="0" anchor="ctr"/>
-          <a:lstStyle/>
-          <a:p>
-            <a:pPr algn="ctr"/>
-          </a:p>
-        </p:txBody>
-      </p:sp>
-      <p:sp>
-        <p:nvSpPr>
-          <p:cNvPr id="11" name="Rectangle 10"/>
-          <p:cNvSpPr/>
-          <p:nvPr/>
-        </p:nvSpPr>
-        <p:spPr>
-          <a:xfrm>
-            <a:off x="640080" y="2084832"/>
-            <a:ext cx="73152" cy="274320"/>
-          </a:xfrm>
-          <a:prstGeom prst="rect">
-            <a:avLst/>
-          </a:prstGeom>
-          <a:solidFill>
-            <a:srgbClr val="269CCB"/>
-          </a:solidFill>
-          <a:ln>
-            <a:noFill/>
-          </a:ln>
-        </p:spPr>
-        <p:style>
-          <a:lnRef idx="1">
-            <a:schemeClr val="accent1"/>
-          </a:lnRef>
-          <a:fillRef idx="3">
-            <a:schemeClr val="accent1"/>
-          </a:fillRef>
-          <a:effectRef idx="2">
-            <a:schemeClr val="accent1"/>
-          </a:effectRef>
-          <a:fontRef idx="minor">
-            <a:schemeClr val="lt1"/>
-          </a:fontRef>
-        </p:style>
-        <p:txBody>
-          <a:bodyPr rtlCol="0" anchor="ctr"/>
-          <a:lstStyle/>
-          <a:p>
-            <a:pPr algn="ctr"/>
-          </a:p>
-        </p:txBody>
-      </p:sp>
-      <p:sp>
-        <p:nvSpPr>
-          <p:cNvPr id="12" name="TextBox 11"/>
-          <p:cNvSpPr txBox="1"/>
-          <p:nvPr/>
-        </p:nvSpPr>
-        <p:spPr>
-          <a:xfrm>
-            <a:off x="1097280" y="2029968"/>
-            <a:ext cx="10362895" cy="402336"/>
-          </a:xfrm>
-          <a:prstGeom prst="rect">
-            <a:avLst/>
-          </a:prstGeom>
-          <a:noFill/>
-        </p:spPr>
-        <p:txBody>
-          <a:bodyPr wrap="square" anchor="ctr"/>
-          <a:lstStyle/>
-          <a:p>
-            <a:r>
-              <a:rPr sz="1500" b="0" i="0">
+              <a:t>–   VetCare ya tiene casos de uso especificados y un diagrama de clases con multiplicidades, pero ningun documento explica el orden en que los objetos se comunican para cumplir un caso de uso.</a:t>
+            </a:r>
+          </a:p>
+          <a:p>
+            <a:pPr>
+              <a:spcAft>
+                <a:spcPts val="800"/>
+              </a:spcAft>
+            </a:pPr>
+            <a:r>
+              <a:rPr sz="2000" b="0" i="0">
                 <a:solidFill>
                   <a:srgbClr val="333333"/>
                 </a:solidFill>
                 <a:latin typeface="Calibri"/>
               </a:rPr>
-              <a:t>Cada participante de su diagrama existe como clase en el modelo, o dibujo cajas como Base de datos y Sistema que nadie puede implementar?</a:t>
-            </a:r>
-          </a:p>
-        </p:txBody>
-      </p:sp>
-      <p:sp>
-        <p:nvSpPr>
-          <p:cNvPr id="13" name="Rounded Rectangle 12"/>
-          <p:cNvSpPr/>
-          <p:nvPr/>
-        </p:nvSpPr>
-        <p:spPr>
-          <a:xfrm>
-            <a:off x="457200" y="2615184"/>
-            <a:ext cx="11277295" cy="566928"/>
-          </a:xfrm>
-          <a:prstGeom prst="roundRect">
-            <a:avLst>
-              <a:gd name="adj" fmla="val 12000"/>
-            </a:avLst>
-          </a:prstGeom>
-          <a:solidFill>
-            <a:srgbClr val="F2F2F2"/>
-          </a:solidFill>
-          <a:ln>
-            <a:noFill/>
-          </a:ln>
-        </p:spPr>
-        <p:style>
-          <a:lnRef idx="1">
-            <a:schemeClr val="accent1"/>
-          </a:lnRef>
-          <a:fillRef idx="3">
-            <a:schemeClr val="accent1"/>
-          </a:fillRef>
-          <a:effectRef idx="2">
-            <a:schemeClr val="accent1"/>
-          </a:effectRef>
-          <a:fontRef idx="minor">
-            <a:schemeClr val="lt1"/>
-          </a:fontRef>
-        </p:style>
-        <p:txBody>
-          <a:bodyPr rtlCol="0" anchor="ctr"/>
-          <a:lstStyle/>
-          <a:p>
-            <a:pPr algn="ctr"/>
-          </a:p>
-        </p:txBody>
-      </p:sp>
-      <p:sp>
-        <p:nvSpPr>
-          <p:cNvPr id="14" name="Rectangle 13"/>
-          <p:cNvSpPr/>
-          <p:nvPr/>
-        </p:nvSpPr>
-        <p:spPr>
-          <a:xfrm>
-            <a:off x="640080" y="2761488"/>
-            <a:ext cx="274320" cy="274320"/>
-          </a:xfrm>
-          <a:prstGeom prst="rect">
-            <a:avLst/>
-          </a:prstGeom>
-          <a:solidFill>
-            <a:srgbClr val="FFFFFF"/>
-          </a:solidFill>
-          <a:ln>
-            <a:solidFill>
-              <a:srgbClr val="333333"/>
-            </a:solidFill>
-          </a:ln>
-        </p:spPr>
-        <p:style>
-          <a:lnRef idx="1">
-            <a:schemeClr val="accent1"/>
-          </a:lnRef>
-          <a:fillRef idx="3">
-            <a:schemeClr val="accent1"/>
-          </a:fillRef>
-          <a:effectRef idx="2">
-            <a:schemeClr val="accent1"/>
-          </a:effectRef>
-          <a:fontRef idx="minor">
-            <a:schemeClr val="lt1"/>
-          </a:fontRef>
-        </p:style>
-        <p:txBody>
-          <a:bodyPr rtlCol="0" anchor="ctr"/>
-          <a:lstStyle/>
-          <a:p>
-            <a:pPr algn="ctr"/>
-          </a:p>
-        </p:txBody>
-      </p:sp>
-      <p:sp>
-        <p:nvSpPr>
-          <p:cNvPr id="15" name="Rectangle 14"/>
-          <p:cNvSpPr/>
-          <p:nvPr/>
-        </p:nvSpPr>
-        <p:spPr>
-          <a:xfrm>
-            <a:off x="640080" y="2761488"/>
-            <a:ext cx="73152" cy="274320"/>
-          </a:xfrm>
-          <a:prstGeom prst="rect">
-            <a:avLst/>
-          </a:prstGeom>
-          <a:solidFill>
-            <a:srgbClr val="269CCB"/>
-          </a:solidFill>
-          <a:ln>
-            <a:noFill/>
-          </a:ln>
-        </p:spPr>
-        <p:style>
-          <a:lnRef idx="1">
-            <a:schemeClr val="accent1"/>
-          </a:lnRef>
-          <a:fillRef idx="3">
-            <a:schemeClr val="accent1"/>
-          </a:fillRef>
-          <a:effectRef idx="2">
-            <a:schemeClr val="accent1"/>
-          </a:effectRef>
-          <a:fontRef idx="minor">
-            <a:schemeClr val="lt1"/>
-          </a:fontRef>
-        </p:style>
-        <p:txBody>
-          <a:bodyPr rtlCol="0" anchor="ctr"/>
-          <a:lstStyle/>
-          <a:p>
-            <a:pPr algn="ctr"/>
-          </a:p>
-        </p:txBody>
-      </p:sp>
-      <p:sp>
-        <p:nvSpPr>
-          <p:cNvPr id="16" name="TextBox 15"/>
-          <p:cNvSpPr txBox="1"/>
-          <p:nvPr/>
-        </p:nvSpPr>
-        <p:spPr>
-          <a:xfrm>
-            <a:off x="1097280" y="2706624"/>
-            <a:ext cx="10362895" cy="402336"/>
-          </a:xfrm>
-          <a:prstGeom prst="rect">
-            <a:avLst/>
-          </a:prstGeom>
-          <a:noFill/>
-        </p:spPr>
-        <p:txBody>
-          <a:bodyPr wrap="square" anchor="ctr"/>
-          <a:lstStyle/>
-          <a:p>
-            <a:r>
-              <a:rPr sz="1500" b="0" i="0">
+              <a:t>–   En Huellitas, agendar una cita depende de la disponibilidad del veterinario y hoy eso se resuelve preguntando en voz alta al fondo del consultorio, sin ninguna regla escrita.</a:t>
+            </a:r>
+          </a:p>
+          <a:p>
+            <a:pPr>
+              <a:spcAft>
+                <a:spcPts val="800"/>
+              </a:spcAft>
+            </a:pPr>
+            <a:r>
+              <a:rPr sz="2000" b="0" i="0">
                 <a:solidFill>
                   <a:srgbClr val="333333"/>
                 </a:solidFill>
                 <a:latin typeface="Calibri"/>
               </a:rPr>
-              <a:t>En su diagrama de actividad se puede saber, mirando solo la calle, quien es responsable de cada paso y cual de esos pasos ocurre sin tocar el computador?</a:t>
-            </a:r>
-          </a:p>
-        </p:txBody>
-      </p:sp>
-      <p:sp>
-        <p:nvSpPr>
-          <p:cNvPr id="17" name="TextBox 16"/>
+              <a:t>–   El equipo tiende a dibujar cajas y flechas por intuicion, sin volver a mirar el flujo principal que ya habia escrito hace tres sesiones.</a:t>
+            </a:r>
+          </a:p>
+        </p:txBody>
+      </p:sp>
+      <p:sp>
+        <p:nvSpPr>
+          <p:cNvPr id="6" name="TextBox 5"/>
           <p:cNvSpPr txBox="1"/>
           <p:nvPr/>
         </p:nvSpPr>
@@ -7896,21 +6738,111 @@
                 </a:solidFill>
                 <a:latin typeface="Calibri"/>
               </a:rPr>
-              <a:t>Criterios de exito / entregable</a:t>
-            </a:r>
-          </a:p>
-        </p:txBody>
-      </p:sp>
-      <p:sp>
-        <p:nvSpPr>
-          <p:cNvPr id="5" name="TextBox 4"/>
+              <a:t>Taller PI — pasos guiados</a:t>
+            </a:r>
+          </a:p>
+        </p:txBody>
+      </p:sp>
+      <p:sp>
+        <p:nvSpPr>
+          <p:cNvPr id="5" name="Rounded Rectangle 4"/>
+          <p:cNvSpPr/>
+          <p:nvPr/>
+        </p:nvSpPr>
+        <p:spPr>
+          <a:xfrm>
+            <a:off x="457200" y="1234440"/>
+            <a:ext cx="11277295" cy="950976"/>
+          </a:xfrm>
+          <a:prstGeom prst="roundRect">
+            <a:avLst>
+              <a:gd name="adj" fmla="val 12000"/>
+            </a:avLst>
+          </a:prstGeom>
+          <a:solidFill>
+            <a:srgbClr val="F2F2F2"/>
+          </a:solidFill>
+          <a:ln>
+            <a:noFill/>
+          </a:ln>
+        </p:spPr>
+        <p:style>
+          <a:lnRef idx="1">
+            <a:schemeClr val="accent1"/>
+          </a:lnRef>
+          <a:fillRef idx="3">
+            <a:schemeClr val="accent1"/>
+          </a:fillRef>
+          <a:effectRef idx="2">
+            <a:schemeClr val="accent1"/>
+          </a:effectRef>
+          <a:fontRef idx="minor">
+            <a:schemeClr val="lt1"/>
+          </a:fontRef>
+        </p:style>
+        <p:txBody>
+          <a:bodyPr rtlCol="0" anchor="ctr"/>
+          <a:lstStyle/>
+          <a:p>
+            <a:pPr algn="ctr"/>
+          </a:p>
+        </p:txBody>
+      </p:sp>
+      <p:sp>
+        <p:nvSpPr>
+          <p:cNvPr id="6" name="Rounded Rectangle 5"/>
+          <p:cNvSpPr/>
+          <p:nvPr/>
+        </p:nvSpPr>
+        <p:spPr>
+          <a:xfrm>
+            <a:off x="594360" y="1490472"/>
+            <a:ext cx="438912" cy="438912"/>
+          </a:xfrm>
+          <a:prstGeom prst="roundRect">
+            <a:avLst>
+              <a:gd name="adj" fmla="val 12000"/>
+            </a:avLst>
+          </a:prstGeom>
+          <a:solidFill>
+            <a:srgbClr val="095292"/>
+          </a:solidFill>
+          <a:ln>
+            <a:noFill/>
+          </a:ln>
+        </p:spPr>
+        <p:style>
+          <a:lnRef idx="1">
+            <a:schemeClr val="accent1"/>
+          </a:lnRef>
+          <a:fillRef idx="3">
+            <a:schemeClr val="accent1"/>
+          </a:fillRef>
+          <a:effectRef idx="2">
+            <a:schemeClr val="accent1"/>
+          </a:effectRef>
+          <a:fontRef idx="minor">
+            <a:schemeClr val="lt1"/>
+          </a:fontRef>
+        </p:style>
+        <p:txBody>
+          <a:bodyPr rtlCol="0" anchor="ctr"/>
+          <a:lstStyle/>
+          <a:p>
+            <a:pPr algn="ctr"/>
+          </a:p>
+        </p:txBody>
+      </p:sp>
+      <p:sp>
+        <p:nvSpPr>
+          <p:cNvPr id="7" name="TextBox 6"/>
           <p:cNvSpPr txBox="1"/>
           <p:nvPr/>
         </p:nvSpPr>
         <p:spPr>
           <a:xfrm>
-            <a:off x="457200" y="1170432"/>
-            <a:ext cx="11277295" cy="5230368"/>
+            <a:off x="594360" y="1490472"/>
+            <a:ext cx="438912" cy="438912"/>
           </a:xfrm>
           <a:prstGeom prst="rect">
             <a:avLst/>
@@ -7918,219 +6850,677 @@
           <a:noFill/>
         </p:spPr>
         <p:txBody>
-          <a:bodyPr wrap="square">
-            <a:spAutoFit/>
-          </a:bodyPr>
-          <a:lstStyle/>
-          <a:p>
-            <a:pPr>
-              <a:spcAft>
-                <a:spcPts val="800"/>
-              </a:spcAft>
-            </a:pPr>
-            <a:r>
-              <a:rPr sz="2000" b="0" i="0">
-                <a:solidFill>
-                  <a:srgbClr val="333333"/>
-                </a:solidFill>
-                <a:latin typeface="Calibri"/>
-              </a:rPr>
-              <a:t>–   </a:t>
-            </a:r>
-            <a:r>
-              <a:rPr sz="2000" b="1" i="0">
-                <a:solidFill>
-                  <a:srgbClr val="333333"/>
-                </a:solidFill>
-                <a:latin typeface="Calibri"/>
-              </a:rPr>
-              <a:t>Entregable:</a:t>
-            </a:r>
-            <a:r>
-              <a:rPr sz="2000" b="0" i="0">
-                <a:solidFill>
-                  <a:srgbClr val="333333"/>
-                </a:solidFill>
-                <a:latin typeface="Calibri"/>
-              </a:rPr>
-              <a:t> Un PDF con el diagrama de secuencia de Agendar cita incluyendo el fragmento alt para horario ocupado, el diagrama de actividad del proceso de atencion con calles por rol, y la tabla que mapea cada mensaje del diagrama de secuencia a una operacion del diagrama de clases, subido a la plataforma del curso.</a:t>
-            </a:r>
-          </a:p>
-          <a:p>
-            <a:pPr>
-              <a:spcAft>
-                <a:spcPts val="800"/>
-              </a:spcAft>
-            </a:pPr>
-            <a:r>
-              <a:rPr sz="2000" b="0" i="0">
-                <a:solidFill>
-                  <a:srgbClr val="333333"/>
-                </a:solidFill>
-                <a:latin typeface="Calibri"/>
-              </a:rPr>
-              <a:t>–   </a:t>
-            </a:r>
-            <a:r>
-              <a:rPr sz="2000" b="1" i="0">
-                <a:solidFill>
-                  <a:srgbClr val="333333"/>
-                </a:solidFill>
-                <a:latin typeface="Calibri"/>
-              </a:rPr>
-              <a:t>Exito:</a:t>
-            </a:r>
-            <a:r>
-              <a:rPr sz="2000" b="0" i="0">
-                <a:solidFill>
-                  <a:srgbClr val="333333"/>
-                </a:solidFill>
-                <a:latin typeface="Calibri"/>
-              </a:rPr>
-              <a:t> El diagrama de secuencia reproduce el orden exacto del flujo principal de CU-04 y no inventa pasos que no esten en la especificacion.</a:t>
-            </a:r>
-          </a:p>
-          <a:p>
-            <a:pPr>
-              <a:spcAft>
-                <a:spcPts val="800"/>
-              </a:spcAft>
-            </a:pPr>
-            <a:r>
-              <a:rPr sz="2000" b="0" i="0">
-                <a:solidFill>
-                  <a:srgbClr val="333333"/>
-                </a:solidFill>
-                <a:latin typeface="Calibri"/>
-              </a:rPr>
-              <a:t>–   </a:t>
-            </a:r>
-            <a:r>
-              <a:rPr sz="2000" b="1" i="0">
-                <a:solidFill>
-                  <a:srgbClr val="333333"/>
-                </a:solidFill>
-                <a:latin typeface="Calibri"/>
-              </a:rPr>
-              <a:t>Exito:</a:t>
-            </a:r>
-            <a:r>
-              <a:rPr sz="2000" b="0" i="0">
-                <a:solidFill>
-                  <a:srgbClr val="333333"/>
-                </a:solidFill>
-                <a:latin typeface="Calibri"/>
-              </a:rPr>
-              <a:t> Todos los participantes del diagrama corresponden a actores legitimos o a clases existentes en el diagrama de clases, y aparecen las flechas de retorno con el dato que devuelven.</a:t>
-            </a:r>
-          </a:p>
-          <a:p>
-            <a:pPr>
-              <a:spcAft>
-                <a:spcPts val="800"/>
-              </a:spcAft>
-            </a:pPr>
-            <a:r>
-              <a:rPr sz="2000" b="0" i="0">
-                <a:solidFill>
-                  <a:srgbClr val="333333"/>
-                </a:solidFill>
-                <a:latin typeface="Calibri"/>
-              </a:rPr>
-              <a:t>–   </a:t>
-            </a:r>
-            <a:r>
-              <a:rPr sz="2000" b="1" i="0">
-                <a:solidFill>
-                  <a:srgbClr val="333333"/>
-                </a:solidFill>
-                <a:latin typeface="Calibri"/>
-              </a:rPr>
-              <a:t>Exito:</a:t>
-            </a:r>
-            <a:r>
-              <a:rPr sz="2000" b="0" i="0">
-                <a:solidFill>
-                  <a:srgbClr val="333333"/>
-                </a:solidFill>
-                <a:latin typeface="Calibri"/>
-              </a:rPr>
-              <a:t> Existe al menos un fragmento alt con sus dos condiciones de guarda escritas, coherente con un flujo alterno ya documentado.</a:t>
-            </a:r>
-          </a:p>
-          <a:p>
-            <a:pPr>
-              <a:spcAft>
-                <a:spcPts val="800"/>
-              </a:spcAft>
-            </a:pPr>
-            <a:r>
-              <a:rPr sz="2000" b="0" i="0">
-                <a:solidFill>
-                  <a:srgbClr val="333333"/>
-                </a:solidFill>
-                <a:latin typeface="Calibri"/>
-              </a:rPr>
-              <a:t>–   </a:t>
-            </a:r>
-            <a:r>
-              <a:rPr sz="2000" b="1" i="0">
-                <a:solidFill>
-                  <a:srgbClr val="333333"/>
-                </a:solidFill>
-                <a:latin typeface="Calibri"/>
-              </a:rPr>
-              <a:t>Exito:</a:t>
-            </a:r>
-            <a:r>
-              <a:rPr sz="2000" b="0" i="0">
-                <a:solidFill>
-                  <a:srgbClr val="333333"/>
-                </a:solidFill>
-                <a:latin typeface="Calibri"/>
-              </a:rPr>
-              <a:t> El diagrama de actividad tiene calles por rol, minimo dos decisiones con condiciones entre corchetes y una bifurcacion en paralelo, y la tabla de mapeo mensaje a operacion no tiene filas incompletas.</a:t>
-            </a:r>
-          </a:p>
-          <a:p>
-            <a:pPr>
-              <a:spcAft>
-                <a:spcPts val="800"/>
-              </a:spcAft>
-            </a:pPr>
-            <a:r>
-              <a:rPr sz="2000" b="0" i="0">
-                <a:solidFill>
-                  <a:srgbClr val="333333"/>
-                </a:solidFill>
-                <a:latin typeface="Calibri"/>
-              </a:rPr>
-              <a:t>–   </a:t>
-            </a:r>
-            <a:r>
-              <a:rPr sz="2000" b="1" i="0">
-                <a:solidFill>
-                  <a:srgbClr val="333333"/>
-                </a:solidFill>
-                <a:latin typeface="Calibri"/>
-              </a:rPr>
-              <a:t>Entrega en la plataforma del curso</a:t>
-            </a:r>
-            <a:r>
-              <a:rPr sz="2000" b="0" i="0">
-                <a:solidFill>
-                  <a:srgbClr val="333333"/>
-                </a:solidFill>
-                <a:latin typeface="Calibri"/>
-              </a:rPr>
-              <a:t> — en la fecha que indique el docente.</a:t>
-            </a:r>
-          </a:p>
-        </p:txBody>
-      </p:sp>
-      <p:sp>
-        <p:nvSpPr>
-          <p:cNvPr id="6" name="TextBox 5"/>
+          <a:bodyPr wrap="square" anchor="ctr"/>
+          <a:lstStyle/>
+          <a:p>
+            <a:pPr algn="ctr"/>
+            <a:r>
+              <a:rPr sz="1600" b="1" i="0">
+                <a:solidFill>
+                  <a:srgbClr val="FFFFFF"/>
+                </a:solidFill>
+                <a:latin typeface="Calibri"/>
+              </a:rPr>
+              <a:t>1</a:t>
+            </a:r>
+          </a:p>
+        </p:txBody>
+      </p:sp>
+      <p:sp>
+        <p:nvSpPr>
+          <p:cNvPr id="8" name="TextBox 7"/>
+          <p:cNvSpPr txBox="1"/>
+          <p:nvPr/>
+        </p:nvSpPr>
+        <p:spPr>
+          <a:xfrm>
+            <a:off x="1188720" y="1325880"/>
+            <a:ext cx="10271455" cy="786384"/>
+          </a:xfrm>
+          <a:prstGeom prst="rect">
+            <a:avLst/>
+          </a:prstGeom>
+          <a:noFill/>
+        </p:spPr>
+        <p:txBody>
+          <a:bodyPr wrap="square" anchor="ctr"/>
+          <a:lstStyle/>
+          <a:p>
+            <a:r>
+              <a:rPr sz="1400" b="1" i="0">
+                <a:solidFill>
+                  <a:srgbClr val="095292"/>
+                </a:solidFill>
+                <a:latin typeface="Calibri"/>
+              </a:rPr>
+              <a:t>Tomar el flujo principal escrito de CU-04 Agendar cita, y si todavia no esta especificado diligenciar primero la plantilla de la clase nueve, para luego numerar en el documento cual paso genera cual mensaje, de manera que quede una lista de entre seis y ocho mensajes antes de dibujar cualquier cosa.</a:t>
+            </a:r>
+          </a:p>
+        </p:txBody>
+      </p:sp>
+      <p:sp>
+        <p:nvSpPr>
+          <p:cNvPr id="9" name="Rounded Rectangle 8"/>
+          <p:cNvSpPr/>
+          <p:nvPr/>
+        </p:nvSpPr>
+        <p:spPr>
+          <a:xfrm>
+            <a:off x="457200" y="2276856"/>
+            <a:ext cx="11277295" cy="950976"/>
+          </a:xfrm>
+          <a:prstGeom prst="roundRect">
+            <a:avLst>
+              <a:gd name="adj" fmla="val 12000"/>
+            </a:avLst>
+          </a:prstGeom>
+          <a:solidFill>
+            <a:srgbClr val="E8F4FA"/>
+          </a:solidFill>
+          <a:ln>
+            <a:noFill/>
+          </a:ln>
+        </p:spPr>
+        <p:style>
+          <a:lnRef idx="1">
+            <a:schemeClr val="accent1"/>
+          </a:lnRef>
+          <a:fillRef idx="3">
+            <a:schemeClr val="accent1"/>
+          </a:fillRef>
+          <a:effectRef idx="2">
+            <a:schemeClr val="accent1"/>
+          </a:effectRef>
+          <a:fontRef idx="minor">
+            <a:schemeClr val="lt1"/>
+          </a:fontRef>
+        </p:style>
+        <p:txBody>
+          <a:bodyPr rtlCol="0" anchor="ctr"/>
+          <a:lstStyle/>
+          <a:p>
+            <a:pPr algn="ctr"/>
+          </a:p>
+        </p:txBody>
+      </p:sp>
+      <p:sp>
+        <p:nvSpPr>
+          <p:cNvPr id="10" name="Rounded Rectangle 9"/>
+          <p:cNvSpPr/>
+          <p:nvPr/>
+        </p:nvSpPr>
+        <p:spPr>
+          <a:xfrm>
+            <a:off x="594360" y="2532888"/>
+            <a:ext cx="438912" cy="438912"/>
+          </a:xfrm>
+          <a:prstGeom prst="roundRect">
+            <a:avLst>
+              <a:gd name="adj" fmla="val 12000"/>
+            </a:avLst>
+          </a:prstGeom>
+          <a:solidFill>
+            <a:srgbClr val="095292"/>
+          </a:solidFill>
+          <a:ln>
+            <a:noFill/>
+          </a:ln>
+        </p:spPr>
+        <p:style>
+          <a:lnRef idx="1">
+            <a:schemeClr val="accent1"/>
+          </a:lnRef>
+          <a:fillRef idx="3">
+            <a:schemeClr val="accent1"/>
+          </a:fillRef>
+          <a:effectRef idx="2">
+            <a:schemeClr val="accent1"/>
+          </a:effectRef>
+          <a:fontRef idx="minor">
+            <a:schemeClr val="lt1"/>
+          </a:fontRef>
+        </p:style>
+        <p:txBody>
+          <a:bodyPr rtlCol="0" anchor="ctr"/>
+          <a:lstStyle/>
+          <a:p>
+            <a:pPr algn="ctr"/>
+          </a:p>
+        </p:txBody>
+      </p:sp>
+      <p:sp>
+        <p:nvSpPr>
+          <p:cNvPr id="11" name="TextBox 10"/>
+          <p:cNvSpPr txBox="1"/>
+          <p:nvPr/>
+        </p:nvSpPr>
+        <p:spPr>
+          <a:xfrm>
+            <a:off x="594360" y="2532888"/>
+            <a:ext cx="438912" cy="438912"/>
+          </a:xfrm>
+          <a:prstGeom prst="rect">
+            <a:avLst/>
+          </a:prstGeom>
+          <a:noFill/>
+        </p:spPr>
+        <p:txBody>
+          <a:bodyPr wrap="square" anchor="ctr"/>
+          <a:lstStyle/>
+          <a:p>
+            <a:pPr algn="ctr"/>
+            <a:r>
+              <a:rPr sz="1600" b="1" i="0">
+                <a:solidFill>
+                  <a:srgbClr val="FFFFFF"/>
+                </a:solidFill>
+                <a:latin typeface="Calibri"/>
+              </a:rPr>
+              <a:t>2</a:t>
+            </a:r>
+          </a:p>
+        </p:txBody>
+      </p:sp>
+      <p:sp>
+        <p:nvSpPr>
+          <p:cNvPr id="12" name="TextBox 11"/>
+          <p:cNvSpPr txBox="1"/>
+          <p:nvPr/>
+        </p:nvSpPr>
+        <p:spPr>
+          <a:xfrm>
+            <a:off x="1188720" y="2368296"/>
+            <a:ext cx="10271455" cy="786384"/>
+          </a:xfrm>
+          <a:prstGeom prst="rect">
+            <a:avLst/>
+          </a:prstGeom>
+          <a:noFill/>
+        </p:spPr>
+        <p:txBody>
+          <a:bodyPr wrap="square" anchor="ctr"/>
+          <a:lstStyle/>
+          <a:p>
+            <a:r>
+              <a:rPr sz="1400" b="1" i="0">
+                <a:solidFill>
+                  <a:srgbClr val="095292"/>
+                </a:solidFill>
+                <a:latin typeface="Calibri"/>
+              </a:rPr>
+              <a:t>Dibujar el diagrama de secuencia en Mermaid Live Editor o draw.io con la recepcionista como actor y minimo tres participantes que correspondan a clases reales del diagrama de clases de VetCare, incluyendo las flechas de retorno con el dato que devuelven.</a:t>
+            </a:r>
+          </a:p>
+        </p:txBody>
+      </p:sp>
+      <p:sp>
+        <p:nvSpPr>
+          <p:cNvPr id="13" name="Rounded Rectangle 12"/>
+          <p:cNvSpPr/>
+          <p:nvPr/>
+        </p:nvSpPr>
+        <p:spPr>
+          <a:xfrm>
+            <a:off x="457200" y="3319272"/>
+            <a:ext cx="11277295" cy="950976"/>
+          </a:xfrm>
+          <a:prstGeom prst="roundRect">
+            <a:avLst>
+              <a:gd name="adj" fmla="val 12000"/>
+            </a:avLst>
+          </a:prstGeom>
+          <a:solidFill>
+            <a:srgbClr val="F2F2F2"/>
+          </a:solidFill>
+          <a:ln>
+            <a:noFill/>
+          </a:ln>
+        </p:spPr>
+        <p:style>
+          <a:lnRef idx="1">
+            <a:schemeClr val="accent1"/>
+          </a:lnRef>
+          <a:fillRef idx="3">
+            <a:schemeClr val="accent1"/>
+          </a:fillRef>
+          <a:effectRef idx="2">
+            <a:schemeClr val="accent1"/>
+          </a:effectRef>
+          <a:fontRef idx="minor">
+            <a:schemeClr val="lt1"/>
+          </a:fontRef>
+        </p:style>
+        <p:txBody>
+          <a:bodyPr rtlCol="0" anchor="ctr"/>
+          <a:lstStyle/>
+          <a:p>
+            <a:pPr algn="ctr"/>
+          </a:p>
+        </p:txBody>
+      </p:sp>
+      <p:sp>
+        <p:nvSpPr>
+          <p:cNvPr id="14" name="Rounded Rectangle 13"/>
+          <p:cNvSpPr/>
+          <p:nvPr/>
+        </p:nvSpPr>
+        <p:spPr>
+          <a:xfrm>
+            <a:off x="594360" y="3575304"/>
+            <a:ext cx="438912" cy="438912"/>
+          </a:xfrm>
+          <a:prstGeom prst="roundRect">
+            <a:avLst>
+              <a:gd name="adj" fmla="val 12000"/>
+            </a:avLst>
+          </a:prstGeom>
+          <a:solidFill>
+            <a:srgbClr val="095292"/>
+          </a:solidFill>
+          <a:ln>
+            <a:noFill/>
+          </a:ln>
+        </p:spPr>
+        <p:style>
+          <a:lnRef idx="1">
+            <a:schemeClr val="accent1"/>
+          </a:lnRef>
+          <a:fillRef idx="3">
+            <a:schemeClr val="accent1"/>
+          </a:fillRef>
+          <a:effectRef idx="2">
+            <a:schemeClr val="accent1"/>
+          </a:effectRef>
+          <a:fontRef idx="minor">
+            <a:schemeClr val="lt1"/>
+          </a:fontRef>
+        </p:style>
+        <p:txBody>
+          <a:bodyPr rtlCol="0" anchor="ctr"/>
+          <a:lstStyle/>
+          <a:p>
+            <a:pPr algn="ctr"/>
+          </a:p>
+        </p:txBody>
+      </p:sp>
+      <p:sp>
+        <p:nvSpPr>
+          <p:cNvPr id="15" name="TextBox 14"/>
+          <p:cNvSpPr txBox="1"/>
+          <p:nvPr/>
+        </p:nvSpPr>
+        <p:spPr>
+          <a:xfrm>
+            <a:off x="594360" y="3575304"/>
+            <a:ext cx="438912" cy="438912"/>
+          </a:xfrm>
+          <a:prstGeom prst="rect">
+            <a:avLst/>
+          </a:prstGeom>
+          <a:noFill/>
+        </p:spPr>
+        <p:txBody>
+          <a:bodyPr wrap="square" anchor="ctr"/>
+          <a:lstStyle/>
+          <a:p>
+            <a:pPr algn="ctr"/>
+            <a:r>
+              <a:rPr sz="1600" b="1" i="0">
+                <a:solidFill>
+                  <a:srgbClr val="FFFFFF"/>
+                </a:solidFill>
+                <a:latin typeface="Calibri"/>
+              </a:rPr>
+              <a:t>3</a:t>
+            </a:r>
+          </a:p>
+        </p:txBody>
+      </p:sp>
+      <p:sp>
+        <p:nvSpPr>
+          <p:cNvPr id="16" name="TextBox 15"/>
+          <p:cNvSpPr txBox="1"/>
+          <p:nvPr/>
+        </p:nvSpPr>
+        <p:spPr>
+          <a:xfrm>
+            <a:off x="1188720" y="3410712"/>
+            <a:ext cx="10271455" cy="786384"/>
+          </a:xfrm>
+          <a:prstGeom prst="rect">
+            <a:avLst/>
+          </a:prstGeom>
+          <a:noFill/>
+        </p:spPr>
+        <p:txBody>
+          <a:bodyPr wrap="square" anchor="ctr"/>
+          <a:lstStyle/>
+          <a:p>
+            <a:r>
+              <a:rPr sz="1500" b="1" i="0">
+                <a:solidFill>
+                  <a:srgbClr val="095292"/>
+                </a:solidFill>
+                <a:latin typeface="Calibri"/>
+              </a:rPr>
+              <a:t>Agregar un fragmento alt que modele el horario ocupado con sus dos condiciones de guarda escritas, y verificar que el camino del else corresponda a un flujo alterno documentado en la especificacion del caso de uso.</a:t>
+            </a:r>
+          </a:p>
+        </p:txBody>
+      </p:sp>
+      <p:sp>
+        <p:nvSpPr>
+          <p:cNvPr id="17" name="Rounded Rectangle 16"/>
+          <p:cNvSpPr/>
+          <p:nvPr/>
+        </p:nvSpPr>
+        <p:spPr>
+          <a:xfrm>
+            <a:off x="457200" y="4361688"/>
+            <a:ext cx="11277295" cy="950976"/>
+          </a:xfrm>
+          <a:prstGeom prst="roundRect">
+            <a:avLst>
+              <a:gd name="adj" fmla="val 12000"/>
+            </a:avLst>
+          </a:prstGeom>
+          <a:solidFill>
+            <a:srgbClr val="E8F4FA"/>
+          </a:solidFill>
+          <a:ln>
+            <a:noFill/>
+          </a:ln>
+        </p:spPr>
+        <p:style>
+          <a:lnRef idx="1">
+            <a:schemeClr val="accent1"/>
+          </a:lnRef>
+          <a:fillRef idx="3">
+            <a:schemeClr val="accent1"/>
+          </a:fillRef>
+          <a:effectRef idx="2">
+            <a:schemeClr val="accent1"/>
+          </a:effectRef>
+          <a:fontRef idx="minor">
+            <a:schemeClr val="lt1"/>
+          </a:fontRef>
+        </p:style>
+        <p:txBody>
+          <a:bodyPr rtlCol="0" anchor="ctr"/>
+          <a:lstStyle/>
+          <a:p>
+            <a:pPr algn="ctr"/>
+          </a:p>
+        </p:txBody>
+      </p:sp>
+      <p:sp>
+        <p:nvSpPr>
+          <p:cNvPr id="18" name="Rounded Rectangle 17"/>
+          <p:cNvSpPr/>
+          <p:nvPr/>
+        </p:nvSpPr>
+        <p:spPr>
+          <a:xfrm>
+            <a:off x="594360" y="4617720"/>
+            <a:ext cx="438912" cy="438912"/>
+          </a:xfrm>
+          <a:prstGeom prst="roundRect">
+            <a:avLst>
+              <a:gd name="adj" fmla="val 12000"/>
+            </a:avLst>
+          </a:prstGeom>
+          <a:solidFill>
+            <a:srgbClr val="095292"/>
+          </a:solidFill>
+          <a:ln>
+            <a:noFill/>
+          </a:ln>
+        </p:spPr>
+        <p:style>
+          <a:lnRef idx="1">
+            <a:schemeClr val="accent1"/>
+          </a:lnRef>
+          <a:fillRef idx="3">
+            <a:schemeClr val="accent1"/>
+          </a:fillRef>
+          <a:effectRef idx="2">
+            <a:schemeClr val="accent1"/>
+          </a:effectRef>
+          <a:fontRef idx="minor">
+            <a:schemeClr val="lt1"/>
+          </a:fontRef>
+        </p:style>
+        <p:txBody>
+          <a:bodyPr rtlCol="0" anchor="ctr"/>
+          <a:lstStyle/>
+          <a:p>
+            <a:pPr algn="ctr"/>
+          </a:p>
+        </p:txBody>
+      </p:sp>
+      <p:sp>
+        <p:nvSpPr>
+          <p:cNvPr id="19" name="TextBox 18"/>
+          <p:cNvSpPr txBox="1"/>
+          <p:nvPr/>
+        </p:nvSpPr>
+        <p:spPr>
+          <a:xfrm>
+            <a:off x="594360" y="4617720"/>
+            <a:ext cx="438912" cy="438912"/>
+          </a:xfrm>
+          <a:prstGeom prst="rect">
+            <a:avLst/>
+          </a:prstGeom>
+          <a:noFill/>
+        </p:spPr>
+        <p:txBody>
+          <a:bodyPr wrap="square" anchor="ctr"/>
+          <a:lstStyle/>
+          <a:p>
+            <a:pPr algn="ctr"/>
+            <a:r>
+              <a:rPr sz="1600" b="1" i="0">
+                <a:solidFill>
+                  <a:srgbClr val="FFFFFF"/>
+                </a:solidFill>
+                <a:latin typeface="Calibri"/>
+              </a:rPr>
+              <a:t>4</a:t>
+            </a:r>
+          </a:p>
+        </p:txBody>
+      </p:sp>
+      <p:sp>
+        <p:nvSpPr>
+          <p:cNvPr id="20" name="TextBox 19"/>
+          <p:cNvSpPr txBox="1"/>
+          <p:nvPr/>
+        </p:nvSpPr>
+        <p:spPr>
+          <a:xfrm>
+            <a:off x="1188720" y="4453128"/>
+            <a:ext cx="10271455" cy="786384"/>
+          </a:xfrm>
+          <a:prstGeom prst="rect">
+            <a:avLst/>
+          </a:prstGeom>
+          <a:noFill/>
+        </p:spPr>
+        <p:txBody>
+          <a:bodyPr wrap="square" anchor="ctr"/>
+          <a:lstStyle/>
+          <a:p>
+            <a:r>
+              <a:rPr sz="1500" b="1" i="0">
+                <a:solidFill>
+                  <a:srgbClr val="095292"/>
+                </a:solidFill>
+                <a:latin typeface="Calibri"/>
+              </a:rPr>
+              <a:t>Construir la tabla de mapeo mensaje a operacion con tres columnas, mensaje, clase destinataria y operacion que debe existir, y agregar al diagrama de clases toda operacion que hoy falte; ninguna fila puede quedar con la clase en blanco.</a:t>
+            </a:r>
+          </a:p>
+        </p:txBody>
+      </p:sp>
+      <p:sp>
+        <p:nvSpPr>
+          <p:cNvPr id="21" name="Rounded Rectangle 20"/>
+          <p:cNvSpPr/>
+          <p:nvPr/>
+        </p:nvSpPr>
+        <p:spPr>
+          <a:xfrm>
+            <a:off x="457200" y="5404104"/>
+            <a:ext cx="11277295" cy="950976"/>
+          </a:xfrm>
+          <a:prstGeom prst="roundRect">
+            <a:avLst>
+              <a:gd name="adj" fmla="val 12000"/>
+            </a:avLst>
+          </a:prstGeom>
+          <a:solidFill>
+            <a:srgbClr val="F2F2F2"/>
+          </a:solidFill>
+          <a:ln>
+            <a:noFill/>
+          </a:ln>
+        </p:spPr>
+        <p:style>
+          <a:lnRef idx="1">
+            <a:schemeClr val="accent1"/>
+          </a:lnRef>
+          <a:fillRef idx="3">
+            <a:schemeClr val="accent1"/>
+          </a:fillRef>
+          <a:effectRef idx="2">
+            <a:schemeClr val="accent1"/>
+          </a:effectRef>
+          <a:fontRef idx="minor">
+            <a:schemeClr val="lt1"/>
+          </a:fontRef>
+        </p:style>
+        <p:txBody>
+          <a:bodyPr rtlCol="0" anchor="ctr"/>
+          <a:lstStyle/>
+          <a:p>
+            <a:pPr algn="ctr"/>
+          </a:p>
+        </p:txBody>
+      </p:sp>
+      <p:sp>
+        <p:nvSpPr>
+          <p:cNvPr id="22" name="Rounded Rectangle 21"/>
+          <p:cNvSpPr/>
+          <p:nvPr/>
+        </p:nvSpPr>
+        <p:spPr>
+          <a:xfrm>
+            <a:off x="594360" y="5660136"/>
+            <a:ext cx="438912" cy="438912"/>
+          </a:xfrm>
+          <a:prstGeom prst="roundRect">
+            <a:avLst>
+              <a:gd name="adj" fmla="val 12000"/>
+            </a:avLst>
+          </a:prstGeom>
+          <a:solidFill>
+            <a:srgbClr val="095292"/>
+          </a:solidFill>
+          <a:ln>
+            <a:noFill/>
+          </a:ln>
+        </p:spPr>
+        <p:style>
+          <a:lnRef idx="1">
+            <a:schemeClr val="accent1"/>
+          </a:lnRef>
+          <a:fillRef idx="3">
+            <a:schemeClr val="accent1"/>
+          </a:fillRef>
+          <a:effectRef idx="2">
+            <a:schemeClr val="accent1"/>
+          </a:effectRef>
+          <a:fontRef idx="minor">
+            <a:schemeClr val="lt1"/>
+          </a:fontRef>
+        </p:style>
+        <p:txBody>
+          <a:bodyPr rtlCol="0" anchor="ctr"/>
+          <a:lstStyle/>
+          <a:p>
+            <a:pPr algn="ctr"/>
+          </a:p>
+        </p:txBody>
+      </p:sp>
+      <p:sp>
+        <p:nvSpPr>
+          <p:cNvPr id="23" name="TextBox 22"/>
+          <p:cNvSpPr txBox="1"/>
+          <p:nvPr/>
+        </p:nvSpPr>
+        <p:spPr>
+          <a:xfrm>
+            <a:off x="594360" y="5660136"/>
+            <a:ext cx="438912" cy="438912"/>
+          </a:xfrm>
+          <a:prstGeom prst="rect">
+            <a:avLst/>
+          </a:prstGeom>
+          <a:noFill/>
+        </p:spPr>
+        <p:txBody>
+          <a:bodyPr wrap="square" anchor="ctr"/>
+          <a:lstStyle/>
+          <a:p>
+            <a:pPr algn="ctr"/>
+            <a:r>
+              <a:rPr sz="1600" b="1" i="0">
+                <a:solidFill>
+                  <a:srgbClr val="FFFFFF"/>
+                </a:solidFill>
+                <a:latin typeface="Calibri"/>
+              </a:rPr>
+              <a:t>5</a:t>
+            </a:r>
+          </a:p>
+        </p:txBody>
+      </p:sp>
+      <p:sp>
+        <p:nvSpPr>
+          <p:cNvPr id="24" name="TextBox 23"/>
+          <p:cNvSpPr txBox="1"/>
+          <p:nvPr/>
+        </p:nvSpPr>
+        <p:spPr>
+          <a:xfrm>
+            <a:off x="1188720" y="5495544"/>
+            <a:ext cx="10271455" cy="786384"/>
+          </a:xfrm>
+          <a:prstGeom prst="rect">
+            <a:avLst/>
+          </a:prstGeom>
+          <a:noFill/>
+        </p:spPr>
+        <p:txBody>
+          <a:bodyPr wrap="square" anchor="ctr"/>
+          <a:lstStyle/>
+          <a:p>
+            <a:r>
+              <a:rPr sz="1400" b="1" i="0">
+                <a:solidFill>
+                  <a:srgbClr val="095292"/>
+                </a:solidFill>
+                <a:latin typeface="Calibri"/>
+              </a:rPr>
+              <a:t>Dibujar el diagrama de actividad del proceso de atencion en el consultorio con cuatro calles (Propietario, Recepcionista, Veterinario y Sistema VetCare), con minimo dos nodos de decision y una bifurcacion en paralelo, y exportar todo a PDF para subirlo a la plataforma del curso.</a:t>
+            </a:r>
+          </a:p>
+        </p:txBody>
+      </p:sp>
+      <p:sp>
+        <p:nvSpPr>
+          <p:cNvPr id="25" name="TextBox 24"/>
           <p:cNvSpPr txBox="1"/>
           <p:nvPr/>
         </p:nvSpPr>
@@ -8304,7 +7694,7 @@
                 </a:solidFill>
                 <a:latin typeface="Calibri"/>
               </a:rPr>
-              <a:t>Para el PI esta semana</a:t>
+              <a:t>Antes de entregar — autochequeo</a:t>
             </a:r>
           </a:p>
         </p:txBody>
@@ -8318,7 +7708,7 @@
         <p:spPr>
           <a:xfrm>
             <a:off x="457200" y="1261872"/>
-            <a:ext cx="11277295" cy="1051560"/>
+            <a:ext cx="11277295" cy="566928"/>
           </a:xfrm>
           <a:prstGeom prst="roundRect">
             <a:avLst>
@@ -8326,7 +7716,7 @@
             </a:avLst>
           </a:prstGeom>
           <a:solidFill>
-            <a:srgbClr val="E8F4FA"/>
+            <a:srgbClr val="F2F2F2"/>
           </a:solidFill>
           <a:ln>
             <a:noFill/>
@@ -8362,8 +7752,53 @@
         </p:nvSpPr>
         <p:spPr>
           <a:xfrm>
-            <a:off x="457200" y="1261872"/>
-            <a:ext cx="128016" cy="1051560"/>
+            <a:off x="640080" y="1408175"/>
+            <a:ext cx="274320" cy="274320"/>
+          </a:xfrm>
+          <a:prstGeom prst="rect">
+            <a:avLst/>
+          </a:prstGeom>
+          <a:solidFill>
+            <a:srgbClr val="FFFFFF"/>
+          </a:solidFill>
+          <a:ln>
+            <a:solidFill>
+              <a:srgbClr val="333333"/>
+            </a:solidFill>
+          </a:ln>
+        </p:spPr>
+        <p:style>
+          <a:lnRef idx="1">
+            <a:schemeClr val="accent1"/>
+          </a:lnRef>
+          <a:fillRef idx="3">
+            <a:schemeClr val="accent1"/>
+          </a:fillRef>
+          <a:effectRef idx="2">
+            <a:schemeClr val="accent1"/>
+          </a:effectRef>
+          <a:fontRef idx="minor">
+            <a:schemeClr val="lt1"/>
+          </a:fontRef>
+        </p:style>
+        <p:txBody>
+          <a:bodyPr rtlCol="0" anchor="ctr"/>
+          <a:lstStyle/>
+          <a:p>
+            <a:pPr algn="ctr"/>
+          </a:p>
+        </p:txBody>
+      </p:sp>
+      <p:sp>
+        <p:nvSpPr>
+          <p:cNvPr id="7" name="Rectangle 6"/>
+          <p:cNvSpPr/>
+          <p:nvPr/>
+        </p:nvSpPr>
+        <p:spPr>
+          <a:xfrm>
+            <a:off x="640080" y="1408175"/>
+            <a:ext cx="73152" cy="274320"/>
           </a:xfrm>
           <a:prstGeom prst="rect">
             <a:avLst/>
@@ -8399,14 +7834,14 @@
       </p:sp>
       <p:sp>
         <p:nvSpPr>
-          <p:cNvPr id="7" name="TextBox 6"/>
+          <p:cNvPr id="8" name="TextBox 7"/>
           <p:cNvSpPr txBox="1"/>
           <p:nvPr/>
         </p:nvSpPr>
         <p:spPr>
           <a:xfrm>
-            <a:off x="777240" y="1399031"/>
-            <a:ext cx="10774375" cy="822959"/>
+            <a:off x="1097280" y="1353312"/>
+            <a:ext cx="10362895" cy="402336"/>
           </a:xfrm>
           <a:prstGeom prst="rect">
             <a:avLst/>
@@ -8414,49 +7849,31 @@
           <a:noFill/>
         </p:spPr>
         <p:txBody>
-          <a:bodyPr wrap="square">
-            <a:spAutoFit/>
-          </a:bodyPr>
-          <a:lstStyle/>
-          <a:p>
-            <a:r>
-              <a:rPr sz="1200" b="1" i="0">
-                <a:solidFill>
-                  <a:srgbClr val="269CCB"/>
-                </a:solidFill>
-                <a:latin typeface="Calibri"/>
-              </a:rPr>
-              <a:t>Info</a:t>
-            </a:r>
-          </a:p>
-          <a:p>
-            <a:pPr>
-              <a:spcBef>
-                <a:spcPts val="400"/>
-              </a:spcBef>
-            </a:pPr>
-            <a:r>
-              <a:rPr sz="1400" b="0" i="0">
+          <a:bodyPr wrap="square" anchor="ctr"/>
+          <a:lstStyle/>
+          <a:p>
+            <a:r>
+              <a:rPr sz="1500" b="0" i="0">
                 <a:solidFill>
                   <a:srgbClr val="333333"/>
                 </a:solidFill>
                 <a:latin typeface="Calibri"/>
               </a:rPr>
-              <a:t>Hito: Queda modelada la dinamica de VetCare: el diagrama de secuencia del caso de uso Agendar cita y el diagrama de actividad del proceso de atencion en el consultorio.</a:t>
-            </a:r>
-          </a:p>
-        </p:txBody>
-      </p:sp>
-      <p:sp>
-        <p:nvSpPr>
-          <p:cNvPr id="8" name="Rounded Rectangle 7"/>
+              <a:t>Si sigue las flechas de su diagrama de arriba hacia abajo, obtiene exactamente el mismo relato que ya escribio en el flujo principal del caso de uso?</a:t>
+            </a:r>
+          </a:p>
+        </p:txBody>
+      </p:sp>
+      <p:sp>
+        <p:nvSpPr>
+          <p:cNvPr id="9" name="Rounded Rectangle 8"/>
           <p:cNvSpPr/>
           <p:nvPr/>
         </p:nvSpPr>
         <p:spPr>
           <a:xfrm>
-            <a:off x="457200" y="2478024"/>
-            <a:ext cx="11277295" cy="1051560"/>
+            <a:off x="457200" y="1938528"/>
+            <a:ext cx="11277295" cy="566928"/>
           </a:xfrm>
           <a:prstGeom prst="roundRect">
             <a:avLst>
@@ -8464,7 +7881,7 @@
             </a:avLst>
           </a:prstGeom>
           <a:solidFill>
-            <a:srgbClr val="FFF8E1"/>
+            <a:srgbClr val="F2F2F2"/>
           </a:solidFill>
           <a:ln>
             <a:noFill/>
@@ -8494,23 +7911,25 @@
       </p:sp>
       <p:sp>
         <p:nvSpPr>
-          <p:cNvPr id="9" name="Rectangle 8"/>
+          <p:cNvPr id="10" name="Rectangle 9"/>
           <p:cNvSpPr/>
           <p:nvPr/>
         </p:nvSpPr>
         <p:spPr>
           <a:xfrm>
-            <a:off x="457200" y="2478024"/>
-            <a:ext cx="128016" cy="1051560"/>
+            <a:off x="640080" y="2084832"/>
+            <a:ext cx="274320" cy="274320"/>
           </a:xfrm>
           <a:prstGeom prst="rect">
             <a:avLst/>
           </a:prstGeom>
           <a:solidFill>
-            <a:srgbClr val="FFD000"/>
+            <a:srgbClr val="FFFFFF"/>
           </a:solidFill>
           <a:ln>
-            <a:noFill/>
+            <a:solidFill>
+              <a:srgbClr val="333333"/>
+            </a:solidFill>
           </a:ln>
         </p:spPr>
         <p:style>
@@ -8537,72 +7956,20 @@
       </p:sp>
       <p:sp>
         <p:nvSpPr>
-          <p:cNvPr id="10" name="TextBox 9"/>
-          <p:cNvSpPr txBox="1"/>
-          <p:nvPr/>
-        </p:nvSpPr>
-        <p:spPr>
-          <a:xfrm>
-            <a:off x="777240" y="2615184"/>
-            <a:ext cx="10774375" cy="822959"/>
-          </a:xfrm>
-          <a:prstGeom prst="rect">
-            <a:avLst/>
-          </a:prstGeom>
-          <a:noFill/>
-        </p:spPr>
-        <p:txBody>
-          <a:bodyPr wrap="square">
-            <a:spAutoFit/>
-          </a:bodyPr>
-          <a:lstStyle/>
-          <a:p>
-            <a:r>
-              <a:rPr sz="1200" b="1" i="0">
-                <a:solidFill>
-                  <a:srgbClr val="FFD000"/>
-                </a:solidFill>
-                <a:latin typeface="Calibri"/>
-              </a:rPr>
-              <a:t>Aclaración</a:t>
-            </a:r>
-          </a:p>
-          <a:p>
-            <a:pPr>
-              <a:spcBef>
-                <a:spcPts val="400"/>
-              </a:spcBef>
-            </a:pPr>
-            <a:r>
-              <a:rPr sz="1400" b="0" i="0">
-                <a:solidFill>
-                  <a:srgbClr val="333333"/>
-                </a:solidFill>
-                <a:latin typeface="Calibri"/>
-              </a:rPr>
-              <a:t>Enunciado completo: Clases/Proyecto Integrador/ (VetCare).</a:t>
-            </a:r>
-          </a:p>
-        </p:txBody>
-      </p:sp>
-      <p:sp>
-        <p:nvSpPr>
-          <p:cNvPr id="11" name="Rounded Rectangle 10"/>
+          <p:cNvPr id="11" name="Rectangle 10"/>
           <p:cNvSpPr/>
           <p:nvPr/>
         </p:nvSpPr>
         <p:spPr>
           <a:xfrm>
-            <a:off x="457200" y="3694176"/>
-            <a:ext cx="11277295" cy="1051560"/>
-          </a:xfrm>
-          <a:prstGeom prst="roundRect">
-            <a:avLst>
-              <a:gd name="adj" fmla="val 12000"/>
-            </a:avLst>
+            <a:off x="640080" y="2084832"/>
+            <a:ext cx="73152" cy="274320"/>
+          </a:xfrm>
+          <a:prstGeom prst="rect">
+            <a:avLst/>
           </a:prstGeom>
           <a:solidFill>
-            <a:srgbClr val="FBE4E4"/>
+            <a:srgbClr val="269CCB"/>
           </a:solidFill>
           <a:ln>
             <a:noFill/>
@@ -8632,20 +7999,54 @@
       </p:sp>
       <p:sp>
         <p:nvSpPr>
-          <p:cNvPr id="12" name="Rectangle 11"/>
+          <p:cNvPr id="12" name="TextBox 11"/>
+          <p:cNvSpPr txBox="1"/>
+          <p:nvPr/>
+        </p:nvSpPr>
+        <p:spPr>
+          <a:xfrm>
+            <a:off x="1097280" y="2029968"/>
+            <a:ext cx="10362895" cy="402336"/>
+          </a:xfrm>
+          <a:prstGeom prst="rect">
+            <a:avLst/>
+          </a:prstGeom>
+          <a:noFill/>
+        </p:spPr>
+        <p:txBody>
+          <a:bodyPr wrap="square" anchor="ctr"/>
+          <a:lstStyle/>
+          <a:p>
+            <a:r>
+              <a:rPr sz="1500" b="0" i="0">
+                <a:solidFill>
+                  <a:srgbClr val="333333"/>
+                </a:solidFill>
+                <a:latin typeface="Calibri"/>
+              </a:rPr>
+              <a:t>Cada participante de su diagrama existe como clase en el modelo, o dibujo cajas como Base de datos y Sistema que nadie puede implementar?</a:t>
+            </a:r>
+          </a:p>
+        </p:txBody>
+      </p:sp>
+      <p:sp>
+        <p:nvSpPr>
+          <p:cNvPr id="13" name="Rounded Rectangle 12"/>
           <p:cNvSpPr/>
           <p:nvPr/>
         </p:nvSpPr>
         <p:spPr>
           <a:xfrm>
-            <a:off x="457200" y="3694176"/>
-            <a:ext cx="128016" cy="1051560"/>
-          </a:xfrm>
-          <a:prstGeom prst="rect">
-            <a:avLst/>
+            <a:off x="457200" y="2615184"/>
+            <a:ext cx="11277295" cy="566928"/>
+          </a:xfrm>
+          <a:prstGeom prst="roundRect">
+            <a:avLst>
+              <a:gd name="adj" fmla="val 12000"/>
+            </a:avLst>
           </a:prstGeom>
           <a:solidFill>
-            <a:srgbClr val="A02030"/>
+            <a:srgbClr val="F2F2F2"/>
           </a:solidFill>
           <a:ln>
             <a:noFill/>
@@ -8675,14 +8076,102 @@
       </p:sp>
       <p:sp>
         <p:nvSpPr>
-          <p:cNvPr id="13" name="TextBox 12"/>
+          <p:cNvPr id="14" name="Rectangle 13"/>
+          <p:cNvSpPr/>
+          <p:nvPr/>
+        </p:nvSpPr>
+        <p:spPr>
+          <a:xfrm>
+            <a:off x="640080" y="2761488"/>
+            <a:ext cx="274320" cy="274320"/>
+          </a:xfrm>
+          <a:prstGeom prst="rect">
+            <a:avLst/>
+          </a:prstGeom>
+          <a:solidFill>
+            <a:srgbClr val="FFFFFF"/>
+          </a:solidFill>
+          <a:ln>
+            <a:solidFill>
+              <a:srgbClr val="333333"/>
+            </a:solidFill>
+          </a:ln>
+        </p:spPr>
+        <p:style>
+          <a:lnRef idx="1">
+            <a:schemeClr val="accent1"/>
+          </a:lnRef>
+          <a:fillRef idx="3">
+            <a:schemeClr val="accent1"/>
+          </a:fillRef>
+          <a:effectRef idx="2">
+            <a:schemeClr val="accent1"/>
+          </a:effectRef>
+          <a:fontRef idx="minor">
+            <a:schemeClr val="lt1"/>
+          </a:fontRef>
+        </p:style>
+        <p:txBody>
+          <a:bodyPr rtlCol="0" anchor="ctr"/>
+          <a:lstStyle/>
+          <a:p>
+            <a:pPr algn="ctr"/>
+          </a:p>
+        </p:txBody>
+      </p:sp>
+      <p:sp>
+        <p:nvSpPr>
+          <p:cNvPr id="15" name="Rectangle 14"/>
+          <p:cNvSpPr/>
+          <p:nvPr/>
+        </p:nvSpPr>
+        <p:spPr>
+          <a:xfrm>
+            <a:off x="640080" y="2761488"/>
+            <a:ext cx="73152" cy="274320"/>
+          </a:xfrm>
+          <a:prstGeom prst="rect">
+            <a:avLst/>
+          </a:prstGeom>
+          <a:solidFill>
+            <a:srgbClr val="269CCB"/>
+          </a:solidFill>
+          <a:ln>
+            <a:noFill/>
+          </a:ln>
+        </p:spPr>
+        <p:style>
+          <a:lnRef idx="1">
+            <a:schemeClr val="accent1"/>
+          </a:lnRef>
+          <a:fillRef idx="3">
+            <a:schemeClr val="accent1"/>
+          </a:fillRef>
+          <a:effectRef idx="2">
+            <a:schemeClr val="accent1"/>
+          </a:effectRef>
+          <a:fontRef idx="minor">
+            <a:schemeClr val="lt1"/>
+          </a:fontRef>
+        </p:style>
+        <p:txBody>
+          <a:bodyPr rtlCol="0" anchor="ctr"/>
+          <a:lstStyle/>
+          <a:p>
+            <a:pPr algn="ctr"/>
+          </a:p>
+        </p:txBody>
+      </p:sp>
+      <p:sp>
+        <p:nvSpPr>
+          <p:cNvPr id="16" name="TextBox 15"/>
           <p:cNvSpPr txBox="1"/>
           <p:nvPr/>
         </p:nvSpPr>
         <p:spPr>
           <a:xfrm>
-            <a:off x="777240" y="3831336"/>
-            <a:ext cx="10774375" cy="822959"/>
+            <a:off x="1097280" y="2706624"/>
+            <a:ext cx="10362895" cy="402336"/>
           </a:xfrm>
           <a:prstGeom prst="rect">
             <a:avLst/>
@@ -8690,42 +8179,24 @@
           <a:noFill/>
         </p:spPr>
         <p:txBody>
-          <a:bodyPr wrap="square">
-            <a:spAutoFit/>
-          </a:bodyPr>
-          <a:lstStyle/>
-          <a:p>
-            <a:r>
-              <a:rPr sz="1200" b="1" i="0">
-                <a:solidFill>
-                  <a:srgbClr val="A02030"/>
-                </a:solidFill>
-                <a:latin typeface="Calibri"/>
-              </a:rPr>
-              <a:t>Atención</a:t>
-            </a:r>
-          </a:p>
-          <a:p>
-            <a:pPr>
-              <a:spcBef>
-                <a:spcPts val="400"/>
-              </a:spcBef>
-            </a:pPr>
-            <a:r>
-              <a:rPr sz="1400" b="0" i="0">
+          <a:bodyPr wrap="square" anchor="ctr"/>
+          <a:lstStyle/>
+          <a:p>
+            <a:r>
+              <a:rPr sz="1500" b="0" i="0">
                 <a:solidFill>
                   <a:srgbClr val="333333"/>
                 </a:solidFill>
                 <a:latin typeface="Calibri"/>
               </a:rPr>
-              <a:t>Entrega del taller, si el docente lo asigna · en la fecha que indique el docente.</a:t>
-            </a:r>
-          </a:p>
-        </p:txBody>
-      </p:sp>
-      <p:sp>
-        <p:nvSpPr>
-          <p:cNvPr id="14" name="TextBox 13"/>
+              <a:t>En su diagrama de actividad se puede saber, mirando solo la calle, quien es responsable de cada paso y cual de esos pasos ocurre sin tocar el computador?</a:t>
+            </a:r>
+          </a:p>
+        </p:txBody>
+      </p:sp>
+      <p:sp>
+        <p:nvSpPr>
+          <p:cNvPr id="17" name="TextBox 16"/>
           <p:cNvSpPr txBox="1"/>
           <p:nvPr/>
         </p:nvSpPr>
@@ -9124,6 +8595,1009 @@
         <p:spPr>
           <a:xfrm>
             <a:off x="0" y="0"/>
+            <a:ext cx="12191695" cy="960120"/>
+          </a:xfrm>
+          <a:prstGeom prst="rect">
+            <a:avLst/>
+          </a:prstGeom>
+          <a:solidFill>
+            <a:srgbClr val="095292"/>
+          </a:solidFill>
+          <a:ln>
+            <a:noFill/>
+          </a:ln>
+        </p:spPr>
+        <p:style>
+          <a:lnRef idx="1">
+            <a:schemeClr val="accent1"/>
+          </a:lnRef>
+          <a:fillRef idx="3">
+            <a:schemeClr val="accent1"/>
+          </a:fillRef>
+          <a:effectRef idx="2">
+            <a:schemeClr val="accent1"/>
+          </a:effectRef>
+          <a:fontRef idx="minor">
+            <a:schemeClr val="lt1"/>
+          </a:fontRef>
+        </p:style>
+        <p:txBody>
+          <a:bodyPr rtlCol="0" anchor="ctr"/>
+          <a:lstStyle/>
+          <a:p>
+            <a:pPr algn="ctr"/>
+          </a:p>
+        </p:txBody>
+      </p:sp>
+      <p:sp>
+        <p:nvSpPr>
+          <p:cNvPr id="3" name="Rectangle 2"/>
+          <p:cNvSpPr/>
+          <p:nvPr/>
+        </p:nvSpPr>
+        <p:spPr>
+          <a:xfrm>
+            <a:off x="0" y="960120"/>
+            <a:ext cx="12191695" cy="41148"/>
+          </a:xfrm>
+          <a:prstGeom prst="rect">
+            <a:avLst/>
+          </a:prstGeom>
+          <a:solidFill>
+            <a:srgbClr val="FFD000"/>
+          </a:solidFill>
+          <a:ln>
+            <a:noFill/>
+          </a:ln>
+        </p:spPr>
+        <p:style>
+          <a:lnRef idx="1">
+            <a:schemeClr val="accent1"/>
+          </a:lnRef>
+          <a:fillRef idx="3">
+            <a:schemeClr val="accent1"/>
+          </a:fillRef>
+          <a:effectRef idx="2">
+            <a:schemeClr val="accent1"/>
+          </a:effectRef>
+          <a:fontRef idx="minor">
+            <a:schemeClr val="lt1"/>
+          </a:fontRef>
+        </p:style>
+        <p:txBody>
+          <a:bodyPr rtlCol="0" anchor="ctr"/>
+          <a:lstStyle/>
+          <a:p>
+            <a:pPr algn="ctr"/>
+          </a:p>
+        </p:txBody>
+      </p:sp>
+      <p:sp>
+        <p:nvSpPr>
+          <p:cNvPr id="4" name="TextBox 3"/>
+          <p:cNvSpPr txBox="1"/>
+          <p:nvPr/>
+        </p:nvSpPr>
+        <p:spPr>
+          <a:xfrm>
+            <a:off x="457200" y="164592"/>
+            <a:ext cx="11277295" cy="502920"/>
+          </a:xfrm>
+          <a:prstGeom prst="rect">
+            <a:avLst/>
+          </a:prstGeom>
+          <a:noFill/>
+        </p:spPr>
+        <p:txBody>
+          <a:bodyPr wrap="square">
+            <a:spAutoFit/>
+          </a:bodyPr>
+          <a:lstStyle/>
+          <a:p>
+            <a:r>
+              <a:rPr sz="2600" b="1" i="0">
+                <a:solidFill>
+                  <a:srgbClr val="FFFFFF"/>
+                </a:solidFill>
+                <a:latin typeface="Calibri"/>
+              </a:rPr>
+              <a:t>Criterios de exito / entregable</a:t>
+            </a:r>
+          </a:p>
+        </p:txBody>
+      </p:sp>
+      <p:sp>
+        <p:nvSpPr>
+          <p:cNvPr id="5" name="TextBox 4"/>
+          <p:cNvSpPr txBox="1"/>
+          <p:nvPr/>
+        </p:nvSpPr>
+        <p:spPr>
+          <a:xfrm>
+            <a:off x="457200" y="1170432"/>
+            <a:ext cx="11277295" cy="5230368"/>
+          </a:xfrm>
+          <a:prstGeom prst="rect">
+            <a:avLst/>
+          </a:prstGeom>
+          <a:noFill/>
+        </p:spPr>
+        <p:txBody>
+          <a:bodyPr wrap="square">
+            <a:spAutoFit/>
+          </a:bodyPr>
+          <a:lstStyle/>
+          <a:p>
+            <a:pPr>
+              <a:spcAft>
+                <a:spcPts val="800"/>
+              </a:spcAft>
+            </a:pPr>
+            <a:r>
+              <a:rPr sz="2000" b="0" i="0">
+                <a:solidFill>
+                  <a:srgbClr val="333333"/>
+                </a:solidFill>
+                <a:latin typeface="Calibri"/>
+              </a:rPr>
+              <a:t>–   </a:t>
+            </a:r>
+            <a:r>
+              <a:rPr sz="2000" b="1" i="0">
+                <a:solidFill>
+                  <a:srgbClr val="333333"/>
+                </a:solidFill>
+                <a:latin typeface="Calibri"/>
+              </a:rPr>
+              <a:t>Entregable:</a:t>
+            </a:r>
+            <a:r>
+              <a:rPr sz="2000" b="0" i="0">
+                <a:solidFill>
+                  <a:srgbClr val="333333"/>
+                </a:solidFill>
+                <a:latin typeface="Calibri"/>
+              </a:rPr>
+              <a:t> Un PDF con el diagrama de secuencia de Agendar cita incluyendo el fragmento alt para horario ocupado, el diagrama de actividad del proceso de atencion con calles por rol, y la tabla que mapea cada mensaje del diagrama de secuencia a una operacion del diagrama de clases, subido a la plataforma del curso.</a:t>
+            </a:r>
+          </a:p>
+          <a:p>
+            <a:pPr>
+              <a:spcAft>
+                <a:spcPts val="800"/>
+              </a:spcAft>
+            </a:pPr>
+            <a:r>
+              <a:rPr sz="2000" b="0" i="0">
+                <a:solidFill>
+                  <a:srgbClr val="333333"/>
+                </a:solidFill>
+                <a:latin typeface="Calibri"/>
+              </a:rPr>
+              <a:t>–   </a:t>
+            </a:r>
+            <a:r>
+              <a:rPr sz="2000" b="1" i="0">
+                <a:solidFill>
+                  <a:srgbClr val="333333"/>
+                </a:solidFill>
+                <a:latin typeface="Calibri"/>
+              </a:rPr>
+              <a:t>Exito:</a:t>
+            </a:r>
+            <a:r>
+              <a:rPr sz="2000" b="0" i="0">
+                <a:solidFill>
+                  <a:srgbClr val="333333"/>
+                </a:solidFill>
+                <a:latin typeface="Calibri"/>
+              </a:rPr>
+              <a:t> El diagrama de secuencia reproduce el orden exacto del flujo principal de CU-04 y no inventa pasos que no esten en la especificacion.</a:t>
+            </a:r>
+          </a:p>
+          <a:p>
+            <a:pPr>
+              <a:spcAft>
+                <a:spcPts val="800"/>
+              </a:spcAft>
+            </a:pPr>
+            <a:r>
+              <a:rPr sz="2000" b="0" i="0">
+                <a:solidFill>
+                  <a:srgbClr val="333333"/>
+                </a:solidFill>
+                <a:latin typeface="Calibri"/>
+              </a:rPr>
+              <a:t>–   </a:t>
+            </a:r>
+            <a:r>
+              <a:rPr sz="2000" b="1" i="0">
+                <a:solidFill>
+                  <a:srgbClr val="333333"/>
+                </a:solidFill>
+                <a:latin typeface="Calibri"/>
+              </a:rPr>
+              <a:t>Exito:</a:t>
+            </a:r>
+            <a:r>
+              <a:rPr sz="2000" b="0" i="0">
+                <a:solidFill>
+                  <a:srgbClr val="333333"/>
+                </a:solidFill>
+                <a:latin typeface="Calibri"/>
+              </a:rPr>
+              <a:t> Todos los participantes del diagrama corresponden a actores legitimos o a clases existentes en el diagrama de clases, y aparecen las flechas de retorno con el dato que devuelven.</a:t>
+            </a:r>
+          </a:p>
+          <a:p>
+            <a:pPr>
+              <a:spcAft>
+                <a:spcPts val="800"/>
+              </a:spcAft>
+            </a:pPr>
+            <a:r>
+              <a:rPr sz="2000" b="0" i="0">
+                <a:solidFill>
+                  <a:srgbClr val="333333"/>
+                </a:solidFill>
+                <a:latin typeface="Calibri"/>
+              </a:rPr>
+              <a:t>–   </a:t>
+            </a:r>
+            <a:r>
+              <a:rPr sz="2000" b="1" i="0">
+                <a:solidFill>
+                  <a:srgbClr val="333333"/>
+                </a:solidFill>
+                <a:latin typeface="Calibri"/>
+              </a:rPr>
+              <a:t>Exito:</a:t>
+            </a:r>
+            <a:r>
+              <a:rPr sz="2000" b="0" i="0">
+                <a:solidFill>
+                  <a:srgbClr val="333333"/>
+                </a:solidFill>
+                <a:latin typeface="Calibri"/>
+              </a:rPr>
+              <a:t> Existe al menos un fragmento alt con sus dos condiciones de guarda escritas, coherente con un flujo alterno ya documentado.</a:t>
+            </a:r>
+          </a:p>
+          <a:p>
+            <a:pPr>
+              <a:spcAft>
+                <a:spcPts val="800"/>
+              </a:spcAft>
+            </a:pPr>
+            <a:r>
+              <a:rPr sz="2000" b="0" i="0">
+                <a:solidFill>
+                  <a:srgbClr val="333333"/>
+                </a:solidFill>
+                <a:latin typeface="Calibri"/>
+              </a:rPr>
+              <a:t>–   </a:t>
+            </a:r>
+            <a:r>
+              <a:rPr sz="2000" b="1" i="0">
+                <a:solidFill>
+                  <a:srgbClr val="333333"/>
+                </a:solidFill>
+                <a:latin typeface="Calibri"/>
+              </a:rPr>
+              <a:t>Exito:</a:t>
+            </a:r>
+            <a:r>
+              <a:rPr sz="2000" b="0" i="0">
+                <a:solidFill>
+                  <a:srgbClr val="333333"/>
+                </a:solidFill>
+                <a:latin typeface="Calibri"/>
+              </a:rPr>
+              <a:t> El diagrama de actividad tiene calles por rol, minimo dos decisiones con condiciones entre corchetes y una bifurcacion en paralelo, y la tabla de mapeo mensaje a operacion no tiene filas incompletas.</a:t>
+            </a:r>
+          </a:p>
+          <a:p>
+            <a:pPr>
+              <a:spcAft>
+                <a:spcPts val="800"/>
+              </a:spcAft>
+            </a:pPr>
+            <a:r>
+              <a:rPr sz="2000" b="0" i="0">
+                <a:solidFill>
+                  <a:srgbClr val="333333"/>
+                </a:solidFill>
+                <a:latin typeface="Calibri"/>
+              </a:rPr>
+              <a:t>–   </a:t>
+            </a:r>
+            <a:r>
+              <a:rPr sz="2000" b="1" i="0">
+                <a:solidFill>
+                  <a:srgbClr val="333333"/>
+                </a:solidFill>
+                <a:latin typeface="Calibri"/>
+              </a:rPr>
+              <a:t>Entrega en la plataforma del curso</a:t>
+            </a:r>
+            <a:r>
+              <a:rPr sz="2000" b="0" i="0">
+                <a:solidFill>
+                  <a:srgbClr val="333333"/>
+                </a:solidFill>
+                <a:latin typeface="Calibri"/>
+              </a:rPr>
+              <a:t> — en la fecha que indique el docente.</a:t>
+            </a:r>
+          </a:p>
+        </p:txBody>
+      </p:sp>
+      <p:sp>
+        <p:nvSpPr>
+          <p:cNvPr id="6" name="TextBox 5"/>
+          <p:cNvSpPr txBox="1"/>
+          <p:nvPr/>
+        </p:nvSpPr>
+        <p:spPr>
+          <a:xfrm>
+            <a:off x="11185855" y="6473952"/>
+            <a:ext cx="640080" cy="274320"/>
+          </a:xfrm>
+          <a:prstGeom prst="rect">
+            <a:avLst/>
+          </a:prstGeom>
+          <a:noFill/>
+        </p:spPr>
+        <p:txBody>
+          <a:bodyPr wrap="square">
+            <a:spAutoFit/>
+          </a:bodyPr>
+          <a:lstStyle/>
+          <a:p>
+            <a:pPr algn="r"/>
+            <a:r>
+              <a:rPr sz="1100" b="0" i="0">
+                <a:solidFill>
+                  <a:srgbClr val="666666"/>
+                </a:solidFill>
+                <a:latin typeface="Calibri"/>
+              </a:rPr>
+              <a:t>20</a:t>
+            </a:r>
+          </a:p>
+        </p:txBody>
+      </p:sp>
+    </p:spTree>
+  </p:cSld>
+  <p:clrMapOvr>
+    <a:masterClrMapping/>
+  </p:clrMapOvr>
+</p:sld>
+</file>
+
+<file path=ppt/slides/slide21.xml><?xml version="1.0" encoding="utf-8"?>
+<p:sld xmlns:a="http://schemas.openxmlformats.org/drawingml/2006/main" xmlns:p="http://schemas.openxmlformats.org/presentationml/2006/main" xmlns:r="http://schemas.openxmlformats.org/officeDocument/2006/relationships">
+  <p:cSld>
+    <p:bg>
+      <p:bgPr>
+        <a:solidFill>
+          <a:srgbClr val="FFFFFF"/>
+        </a:solidFill>
+        <a:effectLst/>
+      </p:bgPr>
+    </p:bg>
+    <p:spTree>
+      <p:nvGrpSpPr>
+        <p:cNvPr id="1" name=""/>
+        <p:cNvGrpSpPr/>
+        <p:nvPr/>
+      </p:nvGrpSpPr>
+      <p:grpSpPr/>
+      <p:sp>
+        <p:nvSpPr>
+          <p:cNvPr id="2" name="Rectangle 1"/>
+          <p:cNvSpPr/>
+          <p:nvPr/>
+        </p:nvSpPr>
+        <p:spPr>
+          <a:xfrm>
+            <a:off x="0" y="0"/>
+            <a:ext cx="12191695" cy="960120"/>
+          </a:xfrm>
+          <a:prstGeom prst="rect">
+            <a:avLst/>
+          </a:prstGeom>
+          <a:solidFill>
+            <a:srgbClr val="095292"/>
+          </a:solidFill>
+          <a:ln>
+            <a:noFill/>
+          </a:ln>
+        </p:spPr>
+        <p:style>
+          <a:lnRef idx="1">
+            <a:schemeClr val="accent1"/>
+          </a:lnRef>
+          <a:fillRef idx="3">
+            <a:schemeClr val="accent1"/>
+          </a:fillRef>
+          <a:effectRef idx="2">
+            <a:schemeClr val="accent1"/>
+          </a:effectRef>
+          <a:fontRef idx="minor">
+            <a:schemeClr val="lt1"/>
+          </a:fontRef>
+        </p:style>
+        <p:txBody>
+          <a:bodyPr rtlCol="0" anchor="ctr"/>
+          <a:lstStyle/>
+          <a:p>
+            <a:pPr algn="ctr"/>
+          </a:p>
+        </p:txBody>
+      </p:sp>
+      <p:sp>
+        <p:nvSpPr>
+          <p:cNvPr id="3" name="Rectangle 2"/>
+          <p:cNvSpPr/>
+          <p:nvPr/>
+        </p:nvSpPr>
+        <p:spPr>
+          <a:xfrm>
+            <a:off x="0" y="960120"/>
+            <a:ext cx="12191695" cy="41148"/>
+          </a:xfrm>
+          <a:prstGeom prst="rect">
+            <a:avLst/>
+          </a:prstGeom>
+          <a:solidFill>
+            <a:srgbClr val="FFD000"/>
+          </a:solidFill>
+          <a:ln>
+            <a:noFill/>
+          </a:ln>
+        </p:spPr>
+        <p:style>
+          <a:lnRef idx="1">
+            <a:schemeClr val="accent1"/>
+          </a:lnRef>
+          <a:fillRef idx="3">
+            <a:schemeClr val="accent1"/>
+          </a:fillRef>
+          <a:effectRef idx="2">
+            <a:schemeClr val="accent1"/>
+          </a:effectRef>
+          <a:fontRef idx="minor">
+            <a:schemeClr val="lt1"/>
+          </a:fontRef>
+        </p:style>
+        <p:txBody>
+          <a:bodyPr rtlCol="0" anchor="ctr"/>
+          <a:lstStyle/>
+          <a:p>
+            <a:pPr algn="ctr"/>
+          </a:p>
+        </p:txBody>
+      </p:sp>
+      <p:sp>
+        <p:nvSpPr>
+          <p:cNvPr id="4" name="TextBox 3"/>
+          <p:cNvSpPr txBox="1"/>
+          <p:nvPr/>
+        </p:nvSpPr>
+        <p:spPr>
+          <a:xfrm>
+            <a:off x="457200" y="164592"/>
+            <a:ext cx="11277295" cy="502920"/>
+          </a:xfrm>
+          <a:prstGeom prst="rect">
+            <a:avLst/>
+          </a:prstGeom>
+          <a:noFill/>
+        </p:spPr>
+        <p:txBody>
+          <a:bodyPr wrap="square">
+            <a:spAutoFit/>
+          </a:bodyPr>
+          <a:lstStyle/>
+          <a:p>
+            <a:r>
+              <a:rPr sz="2600" b="1" i="0">
+                <a:solidFill>
+                  <a:srgbClr val="FFFFFF"/>
+                </a:solidFill>
+                <a:latin typeface="Calibri"/>
+              </a:rPr>
+              <a:t>Para el PI esta semana</a:t>
+            </a:r>
+          </a:p>
+        </p:txBody>
+      </p:sp>
+      <p:sp>
+        <p:nvSpPr>
+          <p:cNvPr id="5" name="Rounded Rectangle 4"/>
+          <p:cNvSpPr/>
+          <p:nvPr/>
+        </p:nvSpPr>
+        <p:spPr>
+          <a:xfrm>
+            <a:off x="457200" y="1261872"/>
+            <a:ext cx="11277295" cy="1051560"/>
+          </a:xfrm>
+          <a:prstGeom prst="roundRect">
+            <a:avLst>
+              <a:gd name="adj" fmla="val 12000"/>
+            </a:avLst>
+          </a:prstGeom>
+          <a:solidFill>
+            <a:srgbClr val="E8F4FA"/>
+          </a:solidFill>
+          <a:ln>
+            <a:noFill/>
+          </a:ln>
+        </p:spPr>
+        <p:style>
+          <a:lnRef idx="1">
+            <a:schemeClr val="accent1"/>
+          </a:lnRef>
+          <a:fillRef idx="3">
+            <a:schemeClr val="accent1"/>
+          </a:fillRef>
+          <a:effectRef idx="2">
+            <a:schemeClr val="accent1"/>
+          </a:effectRef>
+          <a:fontRef idx="minor">
+            <a:schemeClr val="lt1"/>
+          </a:fontRef>
+        </p:style>
+        <p:txBody>
+          <a:bodyPr rtlCol="0" anchor="ctr"/>
+          <a:lstStyle/>
+          <a:p>
+            <a:pPr algn="ctr"/>
+          </a:p>
+        </p:txBody>
+      </p:sp>
+      <p:sp>
+        <p:nvSpPr>
+          <p:cNvPr id="6" name="Rectangle 5"/>
+          <p:cNvSpPr/>
+          <p:nvPr/>
+        </p:nvSpPr>
+        <p:spPr>
+          <a:xfrm>
+            <a:off x="457200" y="1261872"/>
+            <a:ext cx="128016" cy="1051560"/>
+          </a:xfrm>
+          <a:prstGeom prst="rect">
+            <a:avLst/>
+          </a:prstGeom>
+          <a:solidFill>
+            <a:srgbClr val="269CCB"/>
+          </a:solidFill>
+          <a:ln>
+            <a:noFill/>
+          </a:ln>
+        </p:spPr>
+        <p:style>
+          <a:lnRef idx="1">
+            <a:schemeClr val="accent1"/>
+          </a:lnRef>
+          <a:fillRef idx="3">
+            <a:schemeClr val="accent1"/>
+          </a:fillRef>
+          <a:effectRef idx="2">
+            <a:schemeClr val="accent1"/>
+          </a:effectRef>
+          <a:fontRef idx="minor">
+            <a:schemeClr val="lt1"/>
+          </a:fontRef>
+        </p:style>
+        <p:txBody>
+          <a:bodyPr rtlCol="0" anchor="ctr"/>
+          <a:lstStyle/>
+          <a:p>
+            <a:pPr algn="ctr"/>
+          </a:p>
+        </p:txBody>
+      </p:sp>
+      <p:sp>
+        <p:nvSpPr>
+          <p:cNvPr id="7" name="TextBox 6"/>
+          <p:cNvSpPr txBox="1"/>
+          <p:nvPr/>
+        </p:nvSpPr>
+        <p:spPr>
+          <a:xfrm>
+            <a:off x="777240" y="1399031"/>
+            <a:ext cx="10774375" cy="822959"/>
+          </a:xfrm>
+          <a:prstGeom prst="rect">
+            <a:avLst/>
+          </a:prstGeom>
+          <a:noFill/>
+        </p:spPr>
+        <p:txBody>
+          <a:bodyPr wrap="square">
+            <a:spAutoFit/>
+          </a:bodyPr>
+          <a:lstStyle/>
+          <a:p>
+            <a:r>
+              <a:rPr sz="1200" b="1" i="0">
+                <a:solidFill>
+                  <a:srgbClr val="269CCB"/>
+                </a:solidFill>
+                <a:latin typeface="Calibri"/>
+              </a:rPr>
+              <a:t>Info</a:t>
+            </a:r>
+          </a:p>
+          <a:p>
+            <a:pPr>
+              <a:spcBef>
+                <a:spcPts val="400"/>
+              </a:spcBef>
+            </a:pPr>
+            <a:r>
+              <a:rPr sz="1400" b="0" i="0">
+                <a:solidFill>
+                  <a:srgbClr val="333333"/>
+                </a:solidFill>
+                <a:latin typeface="Calibri"/>
+              </a:rPr>
+              <a:t>Hito: Queda modelada la dinamica de VetCare: el diagrama de secuencia del caso de uso Agendar cita y el diagrama de actividad del proceso de atencion en el consultorio.</a:t>
+            </a:r>
+          </a:p>
+        </p:txBody>
+      </p:sp>
+      <p:sp>
+        <p:nvSpPr>
+          <p:cNvPr id="8" name="Rounded Rectangle 7"/>
+          <p:cNvSpPr/>
+          <p:nvPr/>
+        </p:nvSpPr>
+        <p:spPr>
+          <a:xfrm>
+            <a:off x="457200" y="2478024"/>
+            <a:ext cx="11277295" cy="1051560"/>
+          </a:xfrm>
+          <a:prstGeom prst="roundRect">
+            <a:avLst>
+              <a:gd name="adj" fmla="val 12000"/>
+            </a:avLst>
+          </a:prstGeom>
+          <a:solidFill>
+            <a:srgbClr val="FFF8E1"/>
+          </a:solidFill>
+          <a:ln>
+            <a:noFill/>
+          </a:ln>
+        </p:spPr>
+        <p:style>
+          <a:lnRef idx="1">
+            <a:schemeClr val="accent1"/>
+          </a:lnRef>
+          <a:fillRef idx="3">
+            <a:schemeClr val="accent1"/>
+          </a:fillRef>
+          <a:effectRef idx="2">
+            <a:schemeClr val="accent1"/>
+          </a:effectRef>
+          <a:fontRef idx="minor">
+            <a:schemeClr val="lt1"/>
+          </a:fontRef>
+        </p:style>
+        <p:txBody>
+          <a:bodyPr rtlCol="0" anchor="ctr"/>
+          <a:lstStyle/>
+          <a:p>
+            <a:pPr algn="ctr"/>
+          </a:p>
+        </p:txBody>
+      </p:sp>
+      <p:sp>
+        <p:nvSpPr>
+          <p:cNvPr id="9" name="Rectangle 8"/>
+          <p:cNvSpPr/>
+          <p:nvPr/>
+        </p:nvSpPr>
+        <p:spPr>
+          <a:xfrm>
+            <a:off x="457200" y="2478024"/>
+            <a:ext cx="128016" cy="1051560"/>
+          </a:xfrm>
+          <a:prstGeom prst="rect">
+            <a:avLst/>
+          </a:prstGeom>
+          <a:solidFill>
+            <a:srgbClr val="FFD000"/>
+          </a:solidFill>
+          <a:ln>
+            <a:noFill/>
+          </a:ln>
+        </p:spPr>
+        <p:style>
+          <a:lnRef idx="1">
+            <a:schemeClr val="accent1"/>
+          </a:lnRef>
+          <a:fillRef idx="3">
+            <a:schemeClr val="accent1"/>
+          </a:fillRef>
+          <a:effectRef idx="2">
+            <a:schemeClr val="accent1"/>
+          </a:effectRef>
+          <a:fontRef idx="minor">
+            <a:schemeClr val="lt1"/>
+          </a:fontRef>
+        </p:style>
+        <p:txBody>
+          <a:bodyPr rtlCol="0" anchor="ctr"/>
+          <a:lstStyle/>
+          <a:p>
+            <a:pPr algn="ctr"/>
+          </a:p>
+        </p:txBody>
+      </p:sp>
+      <p:sp>
+        <p:nvSpPr>
+          <p:cNvPr id="10" name="TextBox 9"/>
+          <p:cNvSpPr txBox="1"/>
+          <p:nvPr/>
+        </p:nvSpPr>
+        <p:spPr>
+          <a:xfrm>
+            <a:off x="777240" y="2615184"/>
+            <a:ext cx="10774375" cy="822959"/>
+          </a:xfrm>
+          <a:prstGeom prst="rect">
+            <a:avLst/>
+          </a:prstGeom>
+          <a:noFill/>
+        </p:spPr>
+        <p:txBody>
+          <a:bodyPr wrap="square">
+            <a:spAutoFit/>
+          </a:bodyPr>
+          <a:lstStyle/>
+          <a:p>
+            <a:r>
+              <a:rPr sz="1200" b="1" i="0">
+                <a:solidFill>
+                  <a:srgbClr val="FFD000"/>
+                </a:solidFill>
+                <a:latin typeface="Calibri"/>
+              </a:rPr>
+              <a:t>Aclaración</a:t>
+            </a:r>
+          </a:p>
+          <a:p>
+            <a:pPr>
+              <a:spcBef>
+                <a:spcPts val="400"/>
+              </a:spcBef>
+            </a:pPr>
+            <a:r>
+              <a:rPr sz="1400" b="0" i="0">
+                <a:solidFill>
+                  <a:srgbClr val="333333"/>
+                </a:solidFill>
+                <a:latin typeface="Calibri"/>
+              </a:rPr>
+              <a:t>Enunciado completo: Clases/Proyecto Integrador/ (VetCare).</a:t>
+            </a:r>
+          </a:p>
+        </p:txBody>
+      </p:sp>
+      <p:sp>
+        <p:nvSpPr>
+          <p:cNvPr id="11" name="Rounded Rectangle 10"/>
+          <p:cNvSpPr/>
+          <p:nvPr/>
+        </p:nvSpPr>
+        <p:spPr>
+          <a:xfrm>
+            <a:off x="457200" y="3694176"/>
+            <a:ext cx="11277295" cy="1051560"/>
+          </a:xfrm>
+          <a:prstGeom prst="roundRect">
+            <a:avLst>
+              <a:gd name="adj" fmla="val 12000"/>
+            </a:avLst>
+          </a:prstGeom>
+          <a:solidFill>
+            <a:srgbClr val="FBE4E4"/>
+          </a:solidFill>
+          <a:ln>
+            <a:noFill/>
+          </a:ln>
+        </p:spPr>
+        <p:style>
+          <a:lnRef idx="1">
+            <a:schemeClr val="accent1"/>
+          </a:lnRef>
+          <a:fillRef idx="3">
+            <a:schemeClr val="accent1"/>
+          </a:fillRef>
+          <a:effectRef idx="2">
+            <a:schemeClr val="accent1"/>
+          </a:effectRef>
+          <a:fontRef idx="minor">
+            <a:schemeClr val="lt1"/>
+          </a:fontRef>
+        </p:style>
+        <p:txBody>
+          <a:bodyPr rtlCol="0" anchor="ctr"/>
+          <a:lstStyle/>
+          <a:p>
+            <a:pPr algn="ctr"/>
+          </a:p>
+        </p:txBody>
+      </p:sp>
+      <p:sp>
+        <p:nvSpPr>
+          <p:cNvPr id="12" name="Rectangle 11"/>
+          <p:cNvSpPr/>
+          <p:nvPr/>
+        </p:nvSpPr>
+        <p:spPr>
+          <a:xfrm>
+            <a:off x="457200" y="3694176"/>
+            <a:ext cx="128016" cy="1051560"/>
+          </a:xfrm>
+          <a:prstGeom prst="rect">
+            <a:avLst/>
+          </a:prstGeom>
+          <a:solidFill>
+            <a:srgbClr val="A02030"/>
+          </a:solidFill>
+          <a:ln>
+            <a:noFill/>
+          </a:ln>
+        </p:spPr>
+        <p:style>
+          <a:lnRef idx="1">
+            <a:schemeClr val="accent1"/>
+          </a:lnRef>
+          <a:fillRef idx="3">
+            <a:schemeClr val="accent1"/>
+          </a:fillRef>
+          <a:effectRef idx="2">
+            <a:schemeClr val="accent1"/>
+          </a:effectRef>
+          <a:fontRef idx="minor">
+            <a:schemeClr val="lt1"/>
+          </a:fontRef>
+        </p:style>
+        <p:txBody>
+          <a:bodyPr rtlCol="0" anchor="ctr"/>
+          <a:lstStyle/>
+          <a:p>
+            <a:pPr algn="ctr"/>
+          </a:p>
+        </p:txBody>
+      </p:sp>
+      <p:sp>
+        <p:nvSpPr>
+          <p:cNvPr id="13" name="TextBox 12"/>
+          <p:cNvSpPr txBox="1"/>
+          <p:nvPr/>
+        </p:nvSpPr>
+        <p:spPr>
+          <a:xfrm>
+            <a:off x="777240" y="3831336"/>
+            <a:ext cx="10774375" cy="822959"/>
+          </a:xfrm>
+          <a:prstGeom prst="rect">
+            <a:avLst/>
+          </a:prstGeom>
+          <a:noFill/>
+        </p:spPr>
+        <p:txBody>
+          <a:bodyPr wrap="square">
+            <a:spAutoFit/>
+          </a:bodyPr>
+          <a:lstStyle/>
+          <a:p>
+            <a:r>
+              <a:rPr sz="1200" b="1" i="0">
+                <a:solidFill>
+                  <a:srgbClr val="A02030"/>
+                </a:solidFill>
+                <a:latin typeface="Calibri"/>
+              </a:rPr>
+              <a:t>Atención</a:t>
+            </a:r>
+          </a:p>
+          <a:p>
+            <a:pPr>
+              <a:spcBef>
+                <a:spcPts val="400"/>
+              </a:spcBef>
+            </a:pPr>
+            <a:r>
+              <a:rPr sz="1400" b="0" i="0">
+                <a:solidFill>
+                  <a:srgbClr val="333333"/>
+                </a:solidFill>
+                <a:latin typeface="Calibri"/>
+              </a:rPr>
+              <a:t>Entrega del taller, si el docente lo asigna · en la fecha que indique el docente.</a:t>
+            </a:r>
+          </a:p>
+        </p:txBody>
+      </p:sp>
+      <p:sp>
+        <p:nvSpPr>
+          <p:cNvPr id="14" name="TextBox 13"/>
+          <p:cNvSpPr txBox="1"/>
+          <p:nvPr/>
+        </p:nvSpPr>
+        <p:spPr>
+          <a:xfrm>
+            <a:off x="11185855" y="6473952"/>
+            <a:ext cx="640080" cy="274320"/>
+          </a:xfrm>
+          <a:prstGeom prst="rect">
+            <a:avLst/>
+          </a:prstGeom>
+          <a:noFill/>
+        </p:spPr>
+        <p:txBody>
+          <a:bodyPr wrap="square">
+            <a:spAutoFit/>
+          </a:bodyPr>
+          <a:lstStyle/>
+          <a:p>
+            <a:pPr algn="r"/>
+            <a:r>
+              <a:rPr sz="1100" b="0" i="0">
+                <a:solidFill>
+                  <a:srgbClr val="666666"/>
+                </a:solidFill>
+                <a:latin typeface="Calibri"/>
+              </a:rPr>
+              <a:t>21</a:t>
+            </a:r>
+          </a:p>
+        </p:txBody>
+      </p:sp>
+    </p:spTree>
+  </p:cSld>
+  <p:clrMapOvr>
+    <a:masterClrMapping/>
+  </p:clrMapOvr>
+</p:sld>
+</file>
+
+<file path=ppt/slides/slide22.xml><?xml version="1.0" encoding="utf-8"?>
+<p:sld xmlns:a="http://schemas.openxmlformats.org/drawingml/2006/main" xmlns:p="http://schemas.openxmlformats.org/presentationml/2006/main" xmlns:r="http://schemas.openxmlformats.org/officeDocument/2006/relationships">
+  <p:cSld>
+    <p:bg>
+      <p:bgPr>
+        <a:solidFill>
+          <a:srgbClr val="FFFFFF"/>
+        </a:solidFill>
+        <a:effectLst/>
+      </p:bgPr>
+    </p:bg>
+    <p:spTree>
+      <p:nvGrpSpPr>
+        <p:cNvPr id="1" name=""/>
+        <p:cNvGrpSpPr/>
+        <p:nvPr/>
+      </p:nvGrpSpPr>
+      <p:grpSpPr/>
+      <p:sp>
+        <p:nvSpPr>
+          <p:cNvPr id="2" name="Rectangle 1"/>
+          <p:cNvSpPr/>
+          <p:nvPr/>
+        </p:nvSpPr>
+        <p:spPr>
+          <a:xfrm>
+            <a:off x="0" y="0"/>
             <a:ext cx="12191695" cy="164592"/>
           </a:xfrm>
           <a:prstGeom prst="rect">
@@ -10369,22 +10843,6 @@
                 </a:solidFill>
                 <a:latin typeface="Calibri"/>
               </a:rPr>
-              <a:t>–   Lo que ninguno de los dos muestra es la conversacion interna del sistema en el momento exacto en que eso ocurre.</a:t>
-            </a:r>
-          </a:p>
-          <a:p>
-            <a:pPr>
-              <a:spcAft>
-                <a:spcPts val="800"/>
-              </a:spcAft>
-            </a:pPr>
-            <a:r>
-              <a:rPr sz="2000" b="0" i="0">
-                <a:solidFill>
-                  <a:srgbClr val="333333"/>
-                </a:solidFill>
-                <a:latin typeface="Calibri"/>
-              </a:rPr>
               <a:t>–   Para eso existe el diagrama de secuencia, que es un modelo del tiempo: arriba se dibujan los participantes, de cada uno baja una linea de vida y el tiempo transcurre hacia abajo, de modo que el orden vertical de las flechas es el orden real de los eventos.</a:t>
             </a:r>
           </a:p>
@@ -10621,22 +11079,6 @@
                 </a:solidFill>
                 <a:latin typeface="Calibri"/>
               </a:rPr>
-              <a:t>–   Sobre la linea de vida se dibujan barras de activacion que muestran durante cuanto tiempo ese objeto esta trabajando.</a:t>
-            </a:r>
-          </a:p>
-          <a:p>
-            <a:pPr>
-              <a:spcAft>
-                <a:spcPts val="800"/>
-              </a:spcAft>
-            </a:pPr>
-            <a:r>
-              <a:rPr sz="2000" b="0" i="0">
-                <a:solidFill>
-                  <a:srgbClr val="333333"/>
-                </a:solidFill>
-                <a:latin typeface="Calibri"/>
-              </a:rPr>
               <a:t>–   En VetCare, agendar una cita se ve como una cadena corta y clara: la recepcionista le habla a la pantalla de agenda, la pantalla le habla al control de agenda</a:t>
             </a:r>
           </a:p>
@@ -10892,22 +11334,6 @@
               <a:t>–   Sus elementos son nodo inicial, acciones, nodos de decision con condiciones escritas entre corchetes, nodos de union, barras de bifurcacion y sincronizacion para el trabajo que ocurre en paralelo, y nodo final.</a:t>
             </a:r>
           </a:p>
-          <a:p>
-            <a:pPr>
-              <a:spcAft>
-                <a:spcPts val="800"/>
-              </a:spcAft>
-            </a:pPr>
-            <a:r>
-              <a:rPr sz="2000" b="0" i="0">
-                <a:solidFill>
-                  <a:srgbClr val="333333"/>
-                </a:solidFill>
-                <a:latin typeface="Calibri"/>
-              </a:rPr>
-              <a:t>–   La herramienta que lo vuelve realmente util en un proyecto como VetCare son las particiones o calles: una franja por cada rol, de modo que al mirar el dibujo se sabe de un vistazo que hace el Propietario</a:t>
-            </a:r>
-          </a:p>
         </p:txBody>
       </p:sp>
       <p:sp>
@@ -11125,7 +11551,7 @@
                 </a:solidFill>
                 <a:latin typeface="Calibri"/>
               </a:rPr>
-              <a:t>–   Que hace la Recepcionista, que hace el Veterinario y que hace el sistema.</a:t>
+              <a:t>–   La herramienta que lo vuelve realmente util en un proyecto como VetCare son las particiones o calles: una franja por cada rol, de modo que al mirar el dibujo se sabe de un vistazo que hace el Propietario</a:t>
             </a:r>
           </a:p>
           <a:p>
@@ -11141,23 +11567,7 @@
                 </a:solidFill>
                 <a:latin typeface="Calibri"/>
               </a:rPr>
-              <a:t>–   Eso permite modelar el proceso completo de atencion en Huellitas: el propietario llega y pregunta, la recepcionista verifica la cita, si no la tiene se decide entre esperar o reagendar</a:t>
-            </a:r>
-          </a:p>
-          <a:p>
-            <a:pPr>
-              <a:spcAft>
-                <a:spcPts val="800"/>
-              </a:spcAft>
-            </a:pPr>
-            <a:r>
-              <a:rPr sz="2000" b="0" i="0">
-                <a:solidFill>
-                  <a:srgbClr val="333333"/>
-                </a:solidFill>
-                <a:latin typeface="Calibri"/>
-              </a:rPr>
-              <a:t>–   El veterinario atiende, registra la consulta y si formula medicamentos el flujo se abre en dos ramas paralelas, una de facturacion y otra de programacion del control.</a:t>
+              <a:t>–   Que hace la Recepcionista, que hace el Veterinario y que hace el sistema.</a:t>
             </a:r>
           </a:p>
           <a:p>
@@ -11354,7 +11764,7 @@
                 </a:solidFill>
                 <a:latin typeface="Calibri"/>
               </a:rPr>
-              <a:t>La pregunta practica es cuando usar cada uno, y la respuesta se decide...</a:t>
+              <a:t>La pregunta practica es cuando usar cada uno, y la respuesta se decide... (1/2)</a:t>
             </a:r>
           </a:p>
         </p:txBody>
@@ -11387,7 +11797,7 @@
               </a:spcAft>
             </a:pPr>
             <a:r>
-              <a:rPr sz="1900" b="0" i="0">
+              <a:rPr sz="2000" b="0" i="0">
                 <a:solidFill>
                   <a:srgbClr val="333333"/>
                 </a:solidFill>
@@ -11403,7 +11813,7 @@
               </a:spcAft>
             </a:pPr>
             <a:r>
-              <a:rPr sz="1900" b="0" i="0">
+              <a:rPr sz="2000" b="0" i="0">
                 <a:solidFill>
                   <a:srgbClr val="333333"/>
                 </a:solidFill>
@@ -11419,7 +11829,7 @@
               </a:spcAft>
             </a:pPr>
             <a:r>
-              <a:rPr sz="1900" b="0" i="0">
+              <a:rPr sz="2000" b="0" i="0">
                 <a:solidFill>
                   <a:srgbClr val="333333"/>
                 </a:solidFill>
@@ -11435,7 +11845,7 @@
               </a:spcAft>
             </a:pPr>
             <a:r>
-              <a:rPr sz="1900" b="0" i="0">
+              <a:rPr sz="2000" b="0" i="0">
                 <a:solidFill>
                   <a:srgbClr val="333333"/>
                 </a:solidFill>
@@ -11451,45 +11861,13 @@
               </a:spcAft>
             </a:pPr>
             <a:r>
-              <a:rPr sz="1900" b="0" i="0">
+              <a:rPr sz="2000" b="0" i="0">
                 <a:solidFill>
                   <a:srgbClr val="333333"/>
                 </a:solidFill>
                 <a:latin typeface="Calibri"/>
               </a:rPr>
               <a:t>–   Porque admite pasos manuales, decisiones del negocio y actores humanos que no son objetos de software.</a:t>
-            </a:r>
-          </a:p>
-          <a:p>
-            <a:pPr>
-              <a:spcAft>
-                <a:spcPts val="800"/>
-              </a:spcAft>
-            </a:pPr>
-            <a:r>
-              <a:rPr sz="1900" b="0" i="0">
-                <a:solidFill>
-                  <a:srgbClr val="333333"/>
-                </a:solidFill>
-                <a:latin typeface="Calibri"/>
-              </a:rPr>
-              <a:t>–   Una regla practica para el aula: el diagrama de secuencia se dibuja para un caso de uso y suele cubrir su flujo principal; el diagrama de actividad se dibuja para un proceso de negocio que puede atravesar varios casos de uso.</a:t>
-            </a:r>
-          </a:p>
-          <a:p>
-            <a:pPr>
-              <a:spcAft>
-                <a:spcPts val="800"/>
-              </a:spcAft>
-            </a:pPr>
-            <a:r>
-              <a:rPr sz="1900" b="0" i="0">
-                <a:solidFill>
-                  <a:srgbClr val="333333"/>
-                </a:solidFill>
-                <a:latin typeface="Calibri"/>
-              </a:rPr>
-              <a:t>–   En VetCare, CU-04 Agendar cita se modela con secuencia; la atencion completa desde que el propietario entra por la puerta hasta que sale con la factura se modela con actividad, porque incluye conversaciones y esperas que ningun objeto del sistema ejecuta.</a:t>
             </a:r>
           </a:p>
         </p:txBody>
@@ -11670,7 +12048,7 @@
                 </a:solidFill>
                 <a:latin typeface="Calibri"/>
               </a:rPr>
-              <a:t>Estos diagramas no se inventan desde cero: se derivan de lo que ya esta...</a:t>
+              <a:t>La pregunta practica es cuando usar cada uno, y la respuesta se decide... (2/2)</a:t>
             </a:r>
           </a:p>
         </p:txBody>
@@ -11709,7 +12087,7 @@
                 </a:solidFill>
                 <a:latin typeface="Calibri"/>
               </a:rPr>
-              <a:t>–   Estos diagramas no se inventan desde cero: se derivan de lo que ya esta escrito, y ahi esta la parte que separa a un estudiante que entendio de uno que solo dibujo.</a:t>
+              <a:t>–   Una regla practica para el aula: el diagrama de secuencia se dibuja para un caso de uso y suele cubrir su flujo principal; el diagrama de actividad se dibuja para un proceso de negocio que puede atravesar varios casos de uso.</a:t>
             </a:r>
           </a:p>
           <a:p>
@@ -11725,87 +12103,7 @@
                 </a:solidFill>
                 <a:latin typeface="Calibri"/>
               </a:rPr>
-              <a:t>–   Cada paso del flujo principal del caso de uso se convierte en uno o varios mensajes del diagrama de secuencia, en el mismo orden y con los mismos nombres del glosario canonico que se fijo en la auditoria de la clase once.</a:t>
-            </a:r>
-          </a:p>
-          <a:p>
-            <a:pPr>
-              <a:spcAft>
-                <a:spcPts val="800"/>
-              </a:spcAft>
-            </a:pPr>
-            <a:r>
-              <a:rPr sz="2000" b="0" i="0">
-                <a:solidFill>
-                  <a:srgbClr val="333333"/>
-                </a:solidFill>
-                <a:latin typeface="Calibri"/>
-              </a:rPr>
-              <a:t>–   Si el paso 2 de CU-04 dice que el sistema verifica la disponibilidad del veterinario para esa fecha, entonces debe existir un mensaje llamado consultarDisponibilidad dirigido a algun participante</a:t>
-            </a:r>
-          </a:p>
-          <a:p>
-            <a:pPr>
-              <a:spcAft>
-                <a:spcPts val="800"/>
-              </a:spcAft>
-            </a:pPr>
-            <a:r>
-              <a:rPr sz="2000" b="0" i="0">
-                <a:solidFill>
-                  <a:srgbClr val="333333"/>
-                </a:solidFill>
-                <a:latin typeface="Calibri"/>
-              </a:rPr>
-              <a:t>–   Y ese participante debe ser una clase que exista en el diagrama de clases.</a:t>
-            </a:r>
-          </a:p>
-          <a:p>
-            <a:pPr>
-              <a:spcAft>
-                <a:spcPts val="800"/>
-              </a:spcAft>
-            </a:pPr>
-            <a:r>
-              <a:rPr sz="2000" b="0" i="0">
-                <a:solidFill>
-                  <a:srgbClr val="333333"/>
-                </a:solidFill>
-                <a:latin typeface="Calibri"/>
-              </a:rPr>
-              <a:t>–   Aqui aparece el hallazgo tipico y valiosisimo: al dibujar la secuencia el equipo descubre que envio un mensaje a una clase que no tiene esa operacion, o peor, a una clase que no existe.</a:t>
-            </a:r>
-          </a:p>
-          <a:p>
-            <a:pPr>
-              <a:spcAft>
-                <a:spcPts val="800"/>
-              </a:spcAft>
-            </a:pPr>
-            <a:r>
-              <a:rPr sz="2000" b="0" i="0">
-                <a:solidFill>
-                  <a:srgbClr val="333333"/>
-                </a:solidFill>
-                <a:latin typeface="Calibri"/>
-              </a:rPr>
-              <a:t>–   Eso no es un fracaso del diagrama de secuencia, es su mayor utilidad, porque es la unica manera barata de detectar que el modelo estatico estaba incompleto.</a:t>
-            </a:r>
-          </a:p>
-          <a:p>
-            <a:pPr>
-              <a:spcAft>
-                <a:spcPts val="800"/>
-              </a:spcAft>
-            </a:pPr>
-            <a:r>
-              <a:rPr sz="2000" b="0" i="0">
-                <a:solidFill>
-                  <a:srgbClr val="333333"/>
-                </a:solidFill>
-                <a:latin typeface="Calibri"/>
-              </a:rPr>
-              <a:t>–   Por eso el entregable de hoy incluye la tabla de mapeo mensaje a operacion: obliga a cerrar el circulo entre lo dinamico y lo estatico.</a:t>
+              <a:t>–   En VetCare, CU-04 Agendar cita se modela con secuencia; la atencion completa desde que el propietario entra por la puerta hasta que sale con la factura se modela con actividad, porque incluye conversaciones y esperas que ningun objeto del sistema ejecuta.</a:t>
             </a:r>
           </a:p>
         </p:txBody>

--- a/Seminario de Sistemas/Clases/Clase 12 - Diagramas UML avanzados/Presentacion.pptx
+++ b/Seminario de Sistemas/Clases/Clase 12 - Diagramas UML avanzados/Presentacion.pptx
@@ -27,6 +27,9 @@
     <p:sldId id="275" r:id="rId26"/>
     <p:sldId id="276" r:id="rId27"/>
     <p:sldId id="277" r:id="rId28"/>
+    <p:sldId id="278" r:id="rId29"/>
+    <p:sldId id="279" r:id="rId30"/>
+    <p:sldId id="280" r:id="rId31"/>
   </p:sldIdLst>
   <p:sldSz cx="12191695" cy="6858000" type="screen4x3"/>
   <p:notesSz cx="6858000" cy="9144000"/>
@@ -4415,7 +4418,7 @@
                 </a:solidFill>
                 <a:latin typeface="Calibri"/>
               </a:rPr>
-              <a:t>Secuencia de CU-04 Agendar cita en sintaxis Mermaid</a:t>
+              <a:t>El diagrama de secuencia en Mermaid</a:t>
             </a:r>
           </a:p>
         </p:txBody>
@@ -4429,7 +4432,7 @@
         <p:spPr>
           <a:xfrm>
             <a:off x="457200" y="1261872"/>
-            <a:ext cx="11277295" cy="4773168"/>
+            <a:ext cx="11277295" cy="5093208"/>
           </a:xfrm>
           <a:prstGeom prst="roundRect">
             <a:avLst>
@@ -4549,7 +4552,7 @@
         <p:spPr>
           <a:xfrm>
             <a:off x="777240" y="1719072"/>
-            <a:ext cx="5181447" cy="4133087"/>
+            <a:ext cx="10637215" cy="4453128"/>
           </a:xfrm>
           <a:prstGeom prst="rect">
             <a:avLst/>
@@ -4564,11 +4567,11 @@
           <a:p>
             <a:pPr>
               <a:spcAft>
-                <a:spcPts val="400"/>
+                <a:spcPts val="342"/>
               </a:spcAft>
             </a:pPr>
             <a:r>
-              <a:rPr sz="1400" b="0" i="0">
+              <a:rPr sz="1200" b="0" i="0">
                 <a:solidFill>
                   <a:srgbClr val="FFFFFF"/>
                 </a:solidFill>
@@ -4580,354 +4583,280 @@
           <a:p>
             <a:pPr>
               <a:spcAft>
-                <a:spcPts val="400"/>
+                <a:spcPts val="342"/>
               </a:spcAft>
             </a:pPr>
             <a:r>
-              <a:rPr sz="1400" b="0" i="0">
+              <a:rPr sz="1200" b="0" i="0">
                 <a:solidFill>
                   <a:srgbClr val="FFFFFF"/>
                 </a:solidFill>
                 <a:latin typeface="Calibri"/>
               </a:rPr>
-              <a:t>    actor Recepcionista</a:t>
+              <a:t>  autonumber</a:t>
             </a:r>
           </a:p>
           <a:p>
             <a:pPr>
               <a:spcAft>
-                <a:spcPts val="400"/>
+                <a:spcPts val="342"/>
               </a:spcAft>
             </a:pPr>
             <a:r>
-              <a:rPr sz="1400" b="0" i="0">
+              <a:rPr sz="1200" b="0" i="0">
                 <a:solidFill>
                   <a:srgbClr val="FFFFFF"/>
                 </a:solidFill>
                 <a:latin typeface="Calibri"/>
               </a:rPr>
-              <a:t>    participant UI as :PantallaAgenda</a:t>
+              <a:t>  actor R as Recepcionista</a:t>
             </a:r>
           </a:p>
           <a:p>
             <a:pPr>
               <a:spcAft>
-                <a:spcPts val="400"/>
+                <a:spcPts val="342"/>
               </a:spcAft>
             </a:pPr>
             <a:r>
-              <a:rPr sz="1400" b="0" i="0">
+              <a:rPr sz="1200" b="0" i="0">
                 <a:solidFill>
                   <a:srgbClr val="FFFFFF"/>
                 </a:solidFill>
                 <a:latin typeface="Calibri"/>
               </a:rPr>
-              <a:t>    participant CTRL as :ControlAgenda</a:t>
+              <a:t>  participant UI as Pantalla Agendar</a:t>
             </a:r>
           </a:p>
           <a:p>
             <a:pPr>
               <a:spcAft>
-                <a:spcPts val="400"/>
+                <a:spcPts val="342"/>
               </a:spcAft>
             </a:pPr>
             <a:r>
-              <a:rPr sz="1400" b="0" i="0">
+              <a:rPr sz="1200" b="0" i="0">
                 <a:solidFill>
                   <a:srgbClr val="FFFFFF"/>
                 </a:solidFill>
                 <a:latin typeface="Calibri"/>
               </a:rPr>
-              <a:t>    participant REPM as :RepositorioMascotas</a:t>
+              <a:t>  participant S as ServicioCita</a:t>
             </a:r>
           </a:p>
           <a:p>
             <a:pPr>
               <a:spcAft>
-                <a:spcPts val="400"/>
+                <a:spcPts val="342"/>
               </a:spcAft>
             </a:pPr>
             <a:r>
-              <a:rPr sz="1400" b="0" i="0">
+              <a:rPr sz="1200" b="0" i="0">
                 <a:solidFill>
                   <a:srgbClr val="FFFFFF"/>
                 </a:solidFill>
                 <a:latin typeface="Calibri"/>
               </a:rPr>
-              <a:t>    participant REPC as :RepositorioCitas</a:t>
+              <a:t>  participant M as RepositorioMascota</a:t>
             </a:r>
           </a:p>
           <a:p>
             <a:pPr>
               <a:spcAft>
-                <a:spcPts val="400"/>
+                <a:spcPts val="342"/>
               </a:spcAft>
             </a:pPr>
             <a:r>
-              <a:rPr sz="1400" b="0" i="0">
+              <a:rPr sz="1200" b="0" i="0">
                 <a:solidFill>
                   <a:srgbClr val="FFFFFF"/>
                 </a:solidFill>
                 <a:latin typeface="Calibri"/>
               </a:rPr>
-              <a:t>    Recepcionista-&gt;&gt;UI: solicitarAgendamiento(codigoMascota, fecha)</a:t>
+              <a:t>  participant C as RepositorioCita</a:t>
             </a:r>
           </a:p>
           <a:p>
             <a:pPr>
               <a:spcAft>
-                <a:spcPts val="400"/>
+                <a:spcPts val="342"/>
               </a:spcAft>
             </a:pPr>
             <a:r>
-              <a:rPr sz="1400" b="0" i="0">
+              <a:rPr sz="1200" b="0" i="0">
                 <a:solidFill>
                   <a:srgbClr val="FFFFFF"/>
                 </a:solidFill>
                 <a:latin typeface="Calibri"/>
               </a:rPr>
-              <a:t>    UI-&gt;&gt;CTRL: agendarCita(codigoMascota, fecha, idVeterinario)</a:t>
+              <a:t/>
             </a:r>
           </a:p>
           <a:p>
             <a:pPr>
               <a:spcAft>
-                <a:spcPts val="400"/>
+                <a:spcPts val="342"/>
               </a:spcAft>
             </a:pPr>
             <a:r>
-              <a:rPr sz="1400" b="0" i="0">
+              <a:rPr sz="1200" b="0" i="0">
                 <a:solidFill>
                   <a:srgbClr val="FFFFFF"/>
                 </a:solidFill>
                 <a:latin typeface="Calibri"/>
               </a:rPr>
-              <a:t>    CTRL-&gt;&gt;REPM: existePorCodigo(codigoMascota)</a:t>
+              <a:t>  R-&gt;&gt;UI: solicita agendar</a:t>
             </a:r>
           </a:p>
           <a:p>
             <a:pPr>
               <a:spcAft>
-                <a:spcPts val="400"/>
+                <a:spcPts val="342"/>
               </a:spcAft>
             </a:pPr>
             <a:r>
-              <a:rPr sz="1400" b="0" i="0">
+              <a:rPr sz="1200" b="0" i="0">
                 <a:solidFill>
                   <a:srgbClr val="FFFFFF"/>
                 </a:solidFill>
                 <a:latin typeface="Calibri"/>
               </a:rPr>
-              <a:t>    REPM--&gt;&gt;CTRL: mascota</a:t>
-            </a:r>
-          </a:p>
-        </p:txBody>
-      </p:sp>
-      <p:sp>
-        <p:nvSpPr>
-          <p:cNvPr id="9" name="TextBox 8"/>
-          <p:cNvSpPr txBox="1"/>
-          <p:nvPr/>
-        </p:nvSpPr>
-        <p:spPr>
-          <a:xfrm>
-            <a:off x="6233007" y="1719072"/>
-            <a:ext cx="5181447" cy="4133087"/>
-          </a:xfrm>
-          <a:prstGeom prst="rect">
-            <a:avLst/>
-          </a:prstGeom>
-          <a:noFill/>
-        </p:spPr>
-        <p:txBody>
-          <a:bodyPr wrap="square">
-            <a:spAutoFit/>
-          </a:bodyPr>
-          <a:lstStyle/>
+              <a:t>  UI-&gt;&gt;S: agendar(idMascota, fechaHora)</a:t>
+            </a:r>
+          </a:p>
           <a:p>
             <a:pPr>
               <a:spcAft>
-                <a:spcPts val="400"/>
+                <a:spcPts val="342"/>
               </a:spcAft>
             </a:pPr>
             <a:r>
-              <a:rPr sz="1400" b="0" i="0">
+              <a:rPr sz="1200" b="0" i="0">
                 <a:solidFill>
                   <a:srgbClr val="FFFFFF"/>
                 </a:solidFill>
                 <a:latin typeface="Calibri"/>
               </a:rPr>
-              <a:t>    CTRL-&gt;&gt;REPC: consultarDisponibilidad(idVeterinario, fecha)</a:t>
+              <a:t>  S-&gt;&gt;M: estaActiva(idMascota)</a:t>
             </a:r>
           </a:p>
           <a:p>
             <a:pPr>
               <a:spcAft>
-                <a:spcPts val="400"/>
+                <a:spcPts val="342"/>
               </a:spcAft>
             </a:pPr>
             <a:r>
-              <a:rPr sz="1400" b="0" i="0">
+              <a:rPr sz="1200" b="0" i="0">
                 <a:solidFill>
                   <a:srgbClr val="FFFFFF"/>
                 </a:solidFill>
                 <a:latin typeface="Calibri"/>
               </a:rPr>
-              <a:t>    REPC--&gt;&gt;CTRL: horariosLibres</a:t>
+              <a:t>  M--&gt;&gt;S: true</a:t>
             </a:r>
           </a:p>
           <a:p>
             <a:pPr>
               <a:spcAft>
-                <a:spcPts val="400"/>
+                <a:spcPts val="342"/>
               </a:spcAft>
             </a:pPr>
             <a:r>
-              <a:rPr sz="1400" b="0" i="0">
+              <a:rPr sz="1200" b="0" i="0">
                 <a:solidFill>
                   <a:srgbClr val="FFFFFF"/>
                 </a:solidFill>
                 <a:latin typeface="Calibri"/>
               </a:rPr>
-              <a:t>    alt hay horario libre</a:t>
+              <a:t>  S-&gt;&gt;C: existeEnFranja(idVet, fechaHora)</a:t>
             </a:r>
           </a:p>
           <a:p>
             <a:pPr>
               <a:spcAft>
-                <a:spcPts val="400"/>
+                <a:spcPts val="342"/>
               </a:spcAft>
             </a:pPr>
             <a:r>
-              <a:rPr sz="1400" b="0" i="0">
+              <a:rPr sz="1200" b="0" i="0">
                 <a:solidFill>
                   <a:srgbClr val="FFFFFF"/>
                 </a:solidFill>
                 <a:latin typeface="Calibri"/>
               </a:rPr>
-              <a:t>        CTRL-&gt;&gt;REPC: guardarCita(cita)</a:t>
+              <a:t>  C--&gt;&gt;S: false</a:t>
             </a:r>
           </a:p>
           <a:p>
             <a:pPr>
               <a:spcAft>
-                <a:spcPts val="400"/>
+                <a:spcPts val="342"/>
               </a:spcAft>
             </a:pPr>
             <a:r>
-              <a:rPr sz="1400" b="0" i="0">
+              <a:rPr sz="1200" b="0" i="0">
                 <a:solidFill>
                   <a:srgbClr val="FFFFFF"/>
                 </a:solidFill>
                 <a:latin typeface="Calibri"/>
               </a:rPr>
-              <a:t>        REPC--&gt;&gt;CTRL: idCita</a:t>
+              <a:t>  S-&gt;&gt;C: guardar(cita)</a:t>
             </a:r>
           </a:p>
           <a:p>
             <a:pPr>
               <a:spcAft>
-                <a:spcPts val="400"/>
+                <a:spcPts val="342"/>
               </a:spcAft>
             </a:pPr>
             <a:r>
-              <a:rPr sz="1400" b="0" i="0">
+              <a:rPr sz="1200" b="0" i="0">
                 <a:solidFill>
                   <a:srgbClr val="FFFFFF"/>
                 </a:solidFill>
                 <a:latin typeface="Calibri"/>
               </a:rPr>
-              <a:t>        CTRL--&gt;&gt;UI: confirmacion(idCita)</a:t>
+              <a:t>  C--&gt;&gt;S: idCita</a:t>
             </a:r>
           </a:p>
           <a:p>
             <a:pPr>
               <a:spcAft>
-                <a:spcPts val="400"/>
+                <a:spcPts val="342"/>
               </a:spcAft>
             </a:pPr>
             <a:r>
-              <a:rPr sz="1400" b="0" i="0">
+              <a:rPr sz="1200" b="0" i="0">
                 <a:solidFill>
                   <a:srgbClr val="FFFFFF"/>
                 </a:solidFill>
                 <a:latin typeface="Calibri"/>
               </a:rPr>
-              <a:t>    else no hay horario libre</a:t>
+              <a:t>  S--&gt;&gt;UI: PROGRAMADA (idCita)</a:t>
             </a:r>
           </a:p>
           <a:p>
             <a:pPr>
               <a:spcAft>
-                <a:spcPts val="400"/>
+                <a:spcPts val="342"/>
               </a:spcAft>
             </a:pPr>
             <a:r>
-              <a:rPr sz="1400" b="0" i="0">
+              <a:rPr sz="1200" b="0" i="0">
                 <a:solidFill>
                   <a:srgbClr val="FFFFFF"/>
                 </a:solidFill>
                 <a:latin typeface="Calibri"/>
               </a:rPr>
-              <a:t>        CTRL--&gt;&gt;UI: alternativas(dia siguiente)</a:t>
-            </a:r>
-          </a:p>
-          <a:p>
-            <a:pPr>
-              <a:spcAft>
-                <a:spcPts val="400"/>
-              </a:spcAft>
-            </a:pPr>
-            <a:r>
-              <a:rPr sz="1400" b="0" i="0">
-                <a:solidFill>
-                  <a:srgbClr val="FFFFFF"/>
-                </a:solidFill>
-                <a:latin typeface="Calibri"/>
-              </a:rPr>
-              <a:t>    end</a:t>
-            </a:r>
-          </a:p>
-        </p:txBody>
-      </p:sp>
-      <p:sp>
-        <p:nvSpPr>
-          <p:cNvPr id="10" name="TextBox 9"/>
-          <p:cNvSpPr txBox="1"/>
-          <p:nvPr/>
-        </p:nvSpPr>
-        <p:spPr>
-          <a:xfrm>
-            <a:off x="457200" y="6080760"/>
-            <a:ext cx="11277295" cy="320040"/>
-          </a:xfrm>
-          <a:prstGeom prst="rect">
-            <a:avLst/>
-          </a:prstGeom>
-          <a:noFill/>
-        </p:spPr>
-        <p:txBody>
-          <a:bodyPr wrap="square">
-            <a:spAutoFit/>
-          </a:bodyPr>
-          <a:lstStyle/>
-          <a:p>
-            <a:pPr algn="ctr"/>
-            <a:r>
-              <a:rPr sz="1200" b="0" i="1">
-                <a:solidFill>
-                  <a:srgbClr val="666666"/>
-                </a:solidFill>
-                <a:latin typeface="Calibri"/>
-              </a:rPr>
-              <a:t>Cada flecha tiene que corresponder a una operacion existente en el diagrama de clases: si no existe, o falta la operacion o sobra la flecha.</a:t>
-            </a:r>
-          </a:p>
-        </p:txBody>
-      </p:sp>
-      <p:sp>
-        <p:nvSpPr>
-          <p:cNvPr id="11" name="TextBox 10"/>
+              <a:t>  UI--&gt;&gt;R: confirmacion</a:t>
+            </a:r>
+          </a:p>
+        </p:txBody>
+      </p:sp>
+      <p:sp>
+        <p:nvSpPr>
+          <p:cNvPr id="9" name="TextBox 8"/>
           <p:cNvSpPr txBox="1"/>
           <p:nvPr/>
         </p:nvSpPr>
@@ -5101,21 +5030,141 @@
                 </a:solidFill>
                 <a:latin typeface="Calibri"/>
               </a:rPr>
-              <a:t>Demo del dia</a:t>
-            </a:r>
-          </a:p>
-        </p:txBody>
-      </p:sp>
-      <p:sp>
-        <p:nvSpPr>
-          <p:cNvPr id="5" name="TextBox 4"/>
+              <a:t>El diagrama de actividad, con decision y carriles</a:t>
+            </a:r>
+          </a:p>
+        </p:txBody>
+      </p:sp>
+      <p:sp>
+        <p:nvSpPr>
+          <p:cNvPr id="5" name="Rounded Rectangle 4"/>
+          <p:cNvSpPr/>
+          <p:nvPr/>
+        </p:nvSpPr>
+        <p:spPr>
+          <a:xfrm>
+            <a:off x="457200" y="1261872"/>
+            <a:ext cx="11277295" cy="5093208"/>
+          </a:xfrm>
+          <a:prstGeom prst="roundRect">
+            <a:avLst>
+              <a:gd name="adj" fmla="val 12000"/>
+            </a:avLst>
+          </a:prstGeom>
+          <a:solidFill>
+            <a:srgbClr val="1E2A38"/>
+          </a:solidFill>
+          <a:ln>
+            <a:noFill/>
+          </a:ln>
+        </p:spPr>
+        <p:style>
+          <a:lnRef idx="1">
+            <a:schemeClr val="accent1"/>
+          </a:lnRef>
+          <a:fillRef idx="3">
+            <a:schemeClr val="accent1"/>
+          </a:fillRef>
+          <a:effectRef idx="2">
+            <a:schemeClr val="accent1"/>
+          </a:effectRef>
+          <a:fontRef idx="minor">
+            <a:schemeClr val="lt1"/>
+          </a:fontRef>
+        </p:style>
+        <p:txBody>
+          <a:bodyPr rtlCol="0" anchor="ctr"/>
+          <a:lstStyle/>
+          <a:p>
+            <a:pPr algn="ctr"/>
+          </a:p>
+        </p:txBody>
+      </p:sp>
+      <p:sp>
+        <p:nvSpPr>
+          <p:cNvPr id="6" name="Rectangle 5"/>
+          <p:cNvSpPr/>
+          <p:nvPr/>
+        </p:nvSpPr>
+        <p:spPr>
+          <a:xfrm>
+            <a:off x="457200" y="1261872"/>
+            <a:ext cx="11277295" cy="320040"/>
+          </a:xfrm>
+          <a:prstGeom prst="rect">
+            <a:avLst/>
+          </a:prstGeom>
+          <a:solidFill>
+            <a:srgbClr val="095292"/>
+          </a:solidFill>
+          <a:ln>
+            <a:noFill/>
+          </a:ln>
+        </p:spPr>
+        <p:style>
+          <a:lnRef idx="1">
+            <a:schemeClr val="accent1"/>
+          </a:lnRef>
+          <a:fillRef idx="3">
+            <a:schemeClr val="accent1"/>
+          </a:fillRef>
+          <a:effectRef idx="2">
+            <a:schemeClr val="accent1"/>
+          </a:effectRef>
+          <a:fontRef idx="minor">
+            <a:schemeClr val="lt1"/>
+          </a:fontRef>
+        </p:style>
+        <p:txBody>
+          <a:bodyPr rtlCol="0" anchor="ctr"/>
+          <a:lstStyle/>
+          <a:p>
+            <a:pPr algn="ctr"/>
+          </a:p>
+        </p:txBody>
+      </p:sp>
+      <p:sp>
+        <p:nvSpPr>
+          <p:cNvPr id="7" name="TextBox 6"/>
           <p:cNvSpPr txBox="1"/>
           <p:nvPr/>
         </p:nvSpPr>
         <p:spPr>
           <a:xfrm>
-            <a:off x="457200" y="1170432"/>
-            <a:ext cx="11277295" cy="5230368"/>
+            <a:off x="685800" y="1307592"/>
+            <a:ext cx="10820095" cy="256032"/>
+          </a:xfrm>
+          <a:prstGeom prst="rect">
+            <a:avLst/>
+          </a:prstGeom>
+          <a:noFill/>
+        </p:spPr>
+        <p:txBody>
+          <a:bodyPr wrap="square" anchor="ctr"/>
+          <a:lstStyle/>
+          <a:p>
+            <a:r>
+              <a:rPr sz="1000" b="1" i="0">
+                <a:solidFill>
+                  <a:srgbClr val="269CCB"/>
+                </a:solidFill>
+                <a:latin typeface="Calibri"/>
+              </a:rPr>
+              <a:t>● ● ●</a:t>
+            </a:r>
+          </a:p>
+        </p:txBody>
+      </p:sp>
+      <p:sp>
+        <p:nvSpPr>
+          <p:cNvPr id="8" name="TextBox 7"/>
+          <p:cNvSpPr txBox="1"/>
+          <p:nvPr/>
+        </p:nvSpPr>
+        <p:spPr>
+          <a:xfrm>
+            <a:off x="777240" y="1719072"/>
+            <a:ext cx="10637215" cy="4453128"/>
           </a:xfrm>
           <a:prstGeom prst="rect">
             <a:avLst/>
@@ -5130,92 +5179,200 @@
           <a:p>
             <a:pPr>
               <a:spcAft>
-                <a:spcPts val="800"/>
+                <a:spcPts val="400"/>
               </a:spcAft>
             </a:pPr>
             <a:r>
-              <a:rPr sz="2000" b="0" i="0">
-                <a:solidFill>
-                  <a:srgbClr val="333333"/>
-                </a:solidFill>
-                <a:latin typeface="Calibri"/>
-              </a:rPr>
-              <a:t>–   </a:t>
-            </a:r>
-            <a:r>
-              <a:rPr sz="2000" b="1" i="0">
-                <a:solidFill>
-                  <a:srgbClr val="333333"/>
-                </a:solidFill>
-                <a:latin typeface="Calibri"/>
-              </a:rPr>
-              <a:t>Herramienta:</a:t>
-            </a:r>
-            <a:r>
-              <a:rPr sz="2000" b="0" i="0">
-                <a:solidFill>
-                  <a:srgbClr val="333333"/>
-                </a:solidFill>
-                <a:latin typeface="Calibri"/>
-              </a:rPr>
-              <a:t> draw.io · Mermaid Live Editor</a:t>
+              <a:rPr sz="1400" b="0" i="0">
+                <a:solidFill>
+                  <a:srgbClr val="FFFFFF"/>
+                </a:solidFill>
+                <a:latin typeface="Calibri"/>
+              </a:rPr>
+              <a:t>flowchart TB</a:t>
             </a:r>
           </a:p>
           <a:p>
             <a:pPr>
               <a:spcAft>
-                <a:spcPts val="800"/>
+                <a:spcPts val="400"/>
               </a:spcAft>
             </a:pPr>
             <a:r>
-              <a:rPr sz="2000" b="0" i="0">
-                <a:solidFill>
-                  <a:srgbClr val="333333"/>
-                </a:solidFill>
-                <a:latin typeface="Calibri"/>
-              </a:rPr>
-              <a:t>–   </a:t>
-            </a:r>
-            <a:r>
-              <a:rPr sz="2000" b="1" i="0">
-                <a:solidFill>
-                  <a:srgbClr val="333333"/>
-                </a:solidFill>
-                <a:latin typeface="Calibri"/>
-              </a:rPr>
-              <a:t>Demo:</a:t>
-            </a:r>
-            <a:r>
-              <a:rPr sz="2000" b="0" i="0">
-                <a:solidFill>
-                  <a:srgbClr val="333333"/>
-                </a:solidFill>
-                <a:latin typeface="Calibri"/>
-              </a:rPr>
-              <a:t> El docente toma el flujo principal ya escrito de CU-04 Agendar cita y lo convierte linea por linea en mensajes de un diagrama de secuencia en Mermaid, mostrando en vivo que cada mensaje necesita una clase dueña que lo pueda responder.</a:t>
+              <a:rPr sz="1400" b="0" i="0">
+                <a:solidFill>
+                  <a:srgbClr val="FFFFFF"/>
+                </a:solidFill>
+                <a:latin typeface="Calibri"/>
+              </a:rPr>
+              <a:t>  ini([Inicio]) --&gt; llega[La mascota llega a consulta]</a:t>
             </a:r>
           </a:p>
           <a:p>
             <a:pPr>
               <a:spcAft>
-                <a:spcPts val="800"/>
+                <a:spcPts val="400"/>
               </a:spcAft>
             </a:pPr>
             <a:r>
-              <a:rPr sz="2000" b="0" i="0">
-                <a:solidFill>
-                  <a:srgbClr val="333333"/>
-                </a:solidFill>
-                <a:latin typeface="Calibri"/>
-              </a:rPr>
-              <a:t>–   Mismo dominio VetCare — no otro ejemplo. Aqui se diseña, no se programa.</a:t>
-            </a:r>
-          </a:p>
-        </p:txBody>
-      </p:sp>
-      <p:sp>
-        <p:nvSpPr>
-          <p:cNvPr id="6" name="TextBox 5"/>
+              <a:rPr sz="1400" b="0" i="0">
+                <a:solidFill>
+                  <a:srgbClr val="FFFFFF"/>
+                </a:solidFill>
+                <a:latin typeface="Calibri"/>
+              </a:rPr>
+              <a:t>  llega --&gt; tiene{Tiene cita&lt;br/&gt;programada?}</a:t>
+            </a:r>
+          </a:p>
+          <a:p>
+            <a:pPr>
+              <a:spcAft>
+                <a:spcPts val="400"/>
+              </a:spcAft>
+            </a:pPr>
+            <a:r>
+              <a:rPr sz="1400" b="0" i="0">
+                <a:solidFill>
+                  <a:srgbClr val="FFFFFF"/>
+                </a:solidFill>
+                <a:latin typeface="Calibri"/>
+              </a:rPr>
+              <a:t>  tiene --&gt;|Si| atiende[Registrar consulta]</a:t>
+            </a:r>
+          </a:p>
+          <a:p>
+            <a:pPr>
+              <a:spcAft>
+                <a:spcPts val="400"/>
+              </a:spcAft>
+            </a:pPr>
+            <a:r>
+              <a:rPr sz="1400" b="0" i="0">
+                <a:solidFill>
+                  <a:srgbClr val="FFFFFF"/>
+                </a:solidFill>
+                <a:latin typeface="Calibri"/>
+              </a:rPr>
+              <a:t>  tiene --&gt;|No| urg{Es urgencia?}</a:t>
+            </a:r>
+          </a:p>
+          <a:p>
+            <a:pPr>
+              <a:spcAft>
+                <a:spcPts val="400"/>
+              </a:spcAft>
+            </a:pPr>
+            <a:r>
+              <a:rPr sz="1400" b="0" i="0">
+                <a:solidFill>
+                  <a:srgbClr val="FFFFFF"/>
+                </a:solidFill>
+                <a:latin typeface="Calibri"/>
+              </a:rPr>
+              <a:t>  urg --&gt;|Si| crear[Crear cita de urgencia] --&gt; atiende</a:t>
+            </a:r>
+          </a:p>
+          <a:p>
+            <a:pPr>
+              <a:spcAft>
+                <a:spcPts val="400"/>
+              </a:spcAft>
+            </a:pPr>
+            <a:r>
+              <a:rPr sz="1400" b="0" i="0">
+                <a:solidFill>
+                  <a:srgbClr val="FFFFFF"/>
+                </a:solidFill>
+                <a:latin typeface="Calibri"/>
+              </a:rPr>
+              <a:t>  urg --&gt;|No| agendar[Agendar para otro dia] --&gt; fin([Fin])</a:t>
+            </a:r>
+          </a:p>
+          <a:p>
+            <a:pPr>
+              <a:spcAft>
+                <a:spcPts val="400"/>
+              </a:spcAft>
+            </a:pPr>
+            <a:r>
+              <a:rPr sz="1400" b="0" i="0">
+                <a:solidFill>
+                  <a:srgbClr val="FFFFFF"/>
+                </a:solidFill>
+                <a:latin typeface="Calibri"/>
+              </a:rPr>
+              <a:t>  atiende --&gt; receta[Emitir receta e insumos]</a:t>
+            </a:r>
+          </a:p>
+          <a:p>
+            <a:pPr>
+              <a:spcAft>
+                <a:spcPts val="400"/>
+              </a:spcAft>
+            </a:pPr>
+            <a:r>
+              <a:rPr sz="1400" b="0" i="0">
+                <a:solidFill>
+                  <a:srgbClr val="FFFFFF"/>
+                </a:solidFill>
+                <a:latin typeface="Calibri"/>
+              </a:rPr>
+              <a:t>  receta --&gt; fin</a:t>
+            </a:r>
+          </a:p>
+          <a:p>
+            <a:pPr>
+              <a:spcAft>
+                <a:spcPts val="400"/>
+              </a:spcAft>
+            </a:pPr>
+            <a:r>
+              <a:rPr sz="1400" b="0" i="0">
+                <a:solidFill>
+                  <a:srgbClr val="FFFFFF"/>
+                </a:solidFill>
+                <a:latin typeface="Calibri"/>
+              </a:rPr>
+              <a:t/>
+            </a:r>
+          </a:p>
+          <a:p>
+            <a:pPr>
+              <a:spcAft>
+                <a:spcPts val="400"/>
+              </a:spcAft>
+            </a:pPr>
+            <a:r>
+              <a:rPr sz="1400" b="0" i="0">
+                <a:solidFill>
+                  <a:srgbClr val="FFFFFF"/>
+                </a:solidFill>
+                <a:latin typeface="Calibri"/>
+              </a:rPr>
+              <a:t>%% Cada rombo tiene que tener TODAS sus salidas rotuladas. Un rombo con</a:t>
+            </a:r>
+          </a:p>
+          <a:p>
+            <a:pPr>
+              <a:spcAft>
+                <a:spcPts val="400"/>
+              </a:spcAft>
+            </a:pPr>
+            <a:r>
+              <a:rPr sz="1400" b="0" i="0">
+                <a:solidFill>
+                  <a:srgbClr val="FFFFFF"/>
+                </a:solidFill>
+                <a:latin typeface="Calibri"/>
+              </a:rPr>
+              <a:t>%% una sola flecha de salida no es una decision: es un paso.</a:t>
+            </a:r>
+          </a:p>
+        </p:txBody>
+      </p:sp>
+      <p:sp>
+        <p:nvSpPr>
+          <p:cNvPr id="9" name="TextBox 8"/>
           <p:cNvSpPr txBox="1"/>
           <p:nvPr/>
         </p:nvSpPr>
@@ -5283,7 +5440,7 @@
         <p:spPr>
           <a:xfrm>
             <a:off x="0" y="0"/>
-            <a:ext cx="12191695" cy="1170432"/>
+            <a:ext cx="12191695" cy="960120"/>
           </a:xfrm>
           <a:prstGeom prst="rect">
             <a:avLst/>
@@ -5325,7 +5482,7 @@
         </p:nvSpPr>
         <p:spPr>
           <a:xfrm>
-            <a:off x="0" y="1170432"/>
+            <a:off x="0" y="960120"/>
             <a:ext cx="12191695" cy="41148"/>
           </a:xfrm>
           <a:prstGeom prst="rect">
@@ -5369,7 +5526,7 @@
         <p:spPr>
           <a:xfrm>
             <a:off x="457200" y="164592"/>
-            <a:ext cx="11277295" cy="384048"/>
+            <a:ext cx="11277295" cy="502920"/>
           </a:xfrm>
           <a:prstGeom prst="rect">
             <a:avLst/>
@@ -5389,55 +5546,21 @@
                 </a:solidFill>
                 <a:latin typeface="Calibri"/>
               </a:rPr>
-              <a:t>Herramientas de hoy</a:t>
-            </a:r>
-          </a:p>
-        </p:txBody>
-      </p:sp>
-      <p:sp>
-        <p:nvSpPr>
-          <p:cNvPr id="5" name="TextBox 4"/>
-          <p:cNvSpPr txBox="1"/>
-          <p:nvPr/>
-        </p:nvSpPr>
-        <p:spPr>
-          <a:xfrm>
-            <a:off x="457200" y="566928"/>
-            <a:ext cx="11277295" cy="411480"/>
-          </a:xfrm>
-          <a:prstGeom prst="rect">
-            <a:avLst/>
-          </a:prstGeom>
-          <a:noFill/>
-        </p:spPr>
-        <p:txBody>
-          <a:bodyPr wrap="square">
-            <a:spAutoFit/>
-          </a:bodyPr>
-          <a:lstStyle/>
-          <a:p>
-            <a:r>
-              <a:rPr sz="1400" b="0" i="0">
-                <a:solidFill>
-                  <a:srgbClr val="B8D8EE"/>
-                </a:solidFill>
-                <a:latin typeface="Calibri"/>
-              </a:rPr>
-              <a:t>Gratis · funcionan en el navegador</a:t>
-            </a:r>
-          </a:p>
-        </p:txBody>
-      </p:sp>
-      <p:sp>
-        <p:nvSpPr>
-          <p:cNvPr id="6" name="Rounded Rectangle 5"/>
+              <a:t>La tabla de mapeo mensaje a operacion</a:t>
+            </a:r>
+          </a:p>
+        </p:txBody>
+      </p:sp>
+      <p:sp>
+        <p:nvSpPr>
+          <p:cNvPr id="5" name="Rounded Rectangle 4"/>
           <p:cNvSpPr/>
           <p:nvPr/>
         </p:nvSpPr>
         <p:spPr>
           <a:xfrm>
-            <a:off x="457200" y="1591056"/>
-            <a:ext cx="3624986" cy="2331720"/>
+            <a:off x="457200" y="1261872"/>
+            <a:ext cx="11277295" cy="5093208"/>
           </a:xfrm>
           <a:prstGeom prst="roundRect">
             <a:avLst>
@@ -5445,7 +5568,7 @@
             </a:avLst>
           </a:prstGeom>
           <a:solidFill>
-            <a:srgbClr val="F2F2F2"/>
+            <a:srgbClr val="1E2A38"/>
           </a:solidFill>
           <a:ln>
             <a:noFill/>
@@ -5475,14 +5598,14 @@
       </p:sp>
       <p:sp>
         <p:nvSpPr>
-          <p:cNvPr id="7" name="Rectangle 6"/>
+          <p:cNvPr id="6" name="Rectangle 5"/>
           <p:cNvSpPr/>
           <p:nvPr/>
         </p:nvSpPr>
         <p:spPr>
           <a:xfrm>
-            <a:off x="457200" y="1591056"/>
-            <a:ext cx="3624986" cy="64008"/>
+            <a:off x="457200" y="1261872"/>
+            <a:ext cx="11277295" cy="320040"/>
           </a:xfrm>
           <a:prstGeom prst="rect">
             <a:avLst/>
@@ -5518,81 +5641,14 @@
       </p:sp>
       <p:sp>
         <p:nvSpPr>
-          <p:cNvPr id="8" name="Rectangle 7"/>
-          <p:cNvSpPr/>
-          <p:nvPr/>
-        </p:nvSpPr>
-        <p:spPr>
-          <a:xfrm>
-            <a:off x="457200" y="1655064"/>
-            <a:ext cx="3624986" cy="27432"/>
-          </a:xfrm>
-          <a:prstGeom prst="rect">
-            <a:avLst/>
-          </a:prstGeom>
-          <a:solidFill>
-            <a:srgbClr val="FFD000"/>
-          </a:solidFill>
-          <a:ln>
-            <a:noFill/>
-          </a:ln>
-        </p:spPr>
-        <p:style>
-          <a:lnRef idx="1">
-            <a:schemeClr val="accent1"/>
-          </a:lnRef>
-          <a:fillRef idx="3">
-            <a:schemeClr val="accent1"/>
-          </a:fillRef>
-          <a:effectRef idx="2">
-            <a:schemeClr val="accent1"/>
-          </a:effectRef>
-          <a:fontRef idx="minor">
-            <a:schemeClr val="lt1"/>
-          </a:fontRef>
-        </p:style>
-        <p:txBody>
-          <a:bodyPr rtlCol="0" anchor="ctr"/>
-          <a:lstStyle/>
-          <a:p>
-            <a:pPr algn="ctr"/>
-          </a:p>
-        </p:txBody>
-      </p:sp>
-      <p:pic>
-        <p:nvPicPr>
-          <p:cNvPr id="9" name="Picture 8" descr="drawio.png"/>
-          <p:cNvPicPr>
-            <a:picLocks noChangeAspect="1"/>
-          </p:cNvPicPr>
-          <p:nvPr/>
-        </p:nvPicPr>
-        <p:blipFill>
-          <a:blip r:embed="rId2"/>
-          <a:stretch>
-            <a:fillRect/>
-          </a:stretch>
-        </p:blipFill>
-        <p:spPr>
-          <a:xfrm>
-            <a:off x="1643329" y="1847087"/>
-            <a:ext cx="1252728" cy="1252728"/>
-          </a:xfrm>
-          <a:prstGeom prst="rect">
-            <a:avLst/>
-          </a:prstGeom>
-        </p:spPr>
-      </p:pic>
-      <p:sp>
-        <p:nvSpPr>
-          <p:cNvPr id="10" name="TextBox 9"/>
+          <p:cNvPr id="7" name="TextBox 6"/>
           <p:cNvSpPr txBox="1"/>
           <p:nvPr/>
         </p:nvSpPr>
         <p:spPr>
           <a:xfrm>
-            <a:off x="530352" y="3191256"/>
-            <a:ext cx="3478682" cy="621792"/>
+            <a:off x="685800" y="1307592"/>
+            <a:ext cx="10820095" cy="256032"/>
           </a:xfrm>
           <a:prstGeom prst="rect">
             <a:avLst/>
@@ -5600,449 +5656,207 @@
           <a:noFill/>
         </p:spPr>
         <p:txBody>
-          <a:bodyPr wrap="square" anchor="t"/>
-          <a:lstStyle/>
-          <a:p>
-            <a:pPr algn="ctr"/>
-            <a:r>
-              <a:rPr sz="1300" b="1" i="0">
-                <a:solidFill>
-                  <a:srgbClr val="095292"/>
-                </a:solidFill>
-                <a:latin typeface="Calibri"/>
-              </a:rPr>
-              <a:t>Draw.Io</a:t>
-            </a:r>
-          </a:p>
-          <a:p>
-            <a:pPr algn="ctr">
-              <a:spcBef>
-                <a:spcPts val="200"/>
-              </a:spcBef>
+          <a:bodyPr wrap="square" anchor="ctr"/>
+          <a:lstStyle/>
+          <a:p>
+            <a:r>
+              <a:rPr sz="1000" b="1" i="0">
+                <a:solidFill>
+                  <a:srgbClr val="269CCB"/>
+                </a:solidFill>
+                <a:latin typeface="Calibri"/>
+              </a:rPr>
+              <a:t>● ● ●</a:t>
+            </a:r>
+          </a:p>
+        </p:txBody>
+      </p:sp>
+      <p:sp>
+        <p:nvSpPr>
+          <p:cNvPr id="8" name="TextBox 7"/>
+          <p:cNvSpPr txBox="1"/>
+          <p:nvPr/>
+        </p:nvSpPr>
+        <p:spPr>
+          <a:xfrm>
+            <a:off x="777240" y="1719072"/>
+            <a:ext cx="10637215" cy="4453128"/>
+          </a:xfrm>
+          <a:prstGeom prst="rect">
+            <a:avLst/>
+          </a:prstGeom>
+          <a:noFill/>
+        </p:spPr>
+        <p:txBody>
+          <a:bodyPr wrap="square">
+            <a:spAutoFit/>
+          </a:bodyPr>
+          <a:lstStyle/>
+          <a:p>
+            <a:pPr>
+              <a:spcAft>
+                <a:spcPts val="400"/>
+              </a:spcAft>
             </a:pPr>
             <a:r>
-              <a:rPr sz="1000" b="0" i="0">
-                <a:solidFill>
-                  <a:srgbClr val="666666"/>
-                </a:solidFill>
-                <a:latin typeface="Calibri"/>
-              </a:rPr>
-              <a:t>Diagramas UML y de contexto</a:t>
-            </a:r>
-          </a:p>
-        </p:txBody>
-      </p:sp>
-      <p:sp>
-        <p:nvSpPr>
-          <p:cNvPr id="11" name="Rounded Rectangle 10"/>
-          <p:cNvSpPr/>
-          <p:nvPr/>
-        </p:nvSpPr>
-        <p:spPr>
-          <a:xfrm>
-            <a:off x="4283354" y="1591056"/>
-            <a:ext cx="3624986" cy="2331720"/>
-          </a:xfrm>
-          <a:prstGeom prst="roundRect">
-            <a:avLst>
-              <a:gd name="adj" fmla="val 12000"/>
-            </a:avLst>
-          </a:prstGeom>
-          <a:solidFill>
-            <a:srgbClr val="F2F2F2"/>
-          </a:solidFill>
-          <a:ln>
-            <a:noFill/>
-          </a:ln>
-        </p:spPr>
-        <p:style>
-          <a:lnRef idx="1">
-            <a:schemeClr val="accent1"/>
-          </a:lnRef>
-          <a:fillRef idx="3">
-            <a:schemeClr val="accent1"/>
-          </a:fillRef>
-          <a:effectRef idx="2">
-            <a:schemeClr val="accent1"/>
-          </a:effectRef>
-          <a:fontRef idx="minor">
-            <a:schemeClr val="lt1"/>
-          </a:fontRef>
-        </p:style>
-        <p:txBody>
-          <a:bodyPr rtlCol="0" anchor="ctr"/>
-          <a:lstStyle/>
-          <a:p>
-            <a:pPr algn="ctr"/>
-          </a:p>
-        </p:txBody>
-      </p:sp>
-      <p:sp>
-        <p:nvSpPr>
-          <p:cNvPr id="12" name="Rectangle 11"/>
-          <p:cNvSpPr/>
-          <p:nvPr/>
-        </p:nvSpPr>
-        <p:spPr>
-          <a:xfrm>
-            <a:off x="4283354" y="1591056"/>
-            <a:ext cx="3624986" cy="64008"/>
-          </a:xfrm>
-          <a:prstGeom prst="rect">
-            <a:avLst/>
-          </a:prstGeom>
-          <a:solidFill>
-            <a:srgbClr val="095292"/>
-          </a:solidFill>
-          <a:ln>
-            <a:noFill/>
-          </a:ln>
-        </p:spPr>
-        <p:style>
-          <a:lnRef idx="1">
-            <a:schemeClr val="accent1"/>
-          </a:lnRef>
-          <a:fillRef idx="3">
-            <a:schemeClr val="accent1"/>
-          </a:fillRef>
-          <a:effectRef idx="2">
-            <a:schemeClr val="accent1"/>
-          </a:effectRef>
-          <a:fontRef idx="minor">
-            <a:schemeClr val="lt1"/>
-          </a:fontRef>
-        </p:style>
-        <p:txBody>
-          <a:bodyPr rtlCol="0" anchor="ctr"/>
-          <a:lstStyle/>
-          <a:p>
-            <a:pPr algn="ctr"/>
-          </a:p>
-        </p:txBody>
-      </p:sp>
-      <p:sp>
-        <p:nvSpPr>
-          <p:cNvPr id="13" name="Rectangle 12"/>
-          <p:cNvSpPr/>
-          <p:nvPr/>
-        </p:nvSpPr>
-        <p:spPr>
-          <a:xfrm>
-            <a:off x="4283354" y="1655064"/>
-            <a:ext cx="3624986" cy="27432"/>
-          </a:xfrm>
-          <a:prstGeom prst="rect">
-            <a:avLst/>
-          </a:prstGeom>
-          <a:solidFill>
-            <a:srgbClr val="FFD000"/>
-          </a:solidFill>
-          <a:ln>
-            <a:noFill/>
-          </a:ln>
-        </p:spPr>
-        <p:style>
-          <a:lnRef idx="1">
-            <a:schemeClr val="accent1"/>
-          </a:lnRef>
-          <a:fillRef idx="3">
-            <a:schemeClr val="accent1"/>
-          </a:fillRef>
-          <a:effectRef idx="2">
-            <a:schemeClr val="accent1"/>
-          </a:effectRef>
-          <a:fontRef idx="minor">
-            <a:schemeClr val="lt1"/>
-          </a:fontRef>
-        </p:style>
-        <p:txBody>
-          <a:bodyPr rtlCol="0" anchor="ctr"/>
-          <a:lstStyle/>
-          <a:p>
-            <a:pPr algn="ctr"/>
-          </a:p>
-        </p:txBody>
-      </p:sp>
-      <p:pic>
-        <p:nvPicPr>
-          <p:cNvPr id="14" name="Picture 13" descr="mermaid.png"/>
-          <p:cNvPicPr>
-            <a:picLocks noChangeAspect="1"/>
-          </p:cNvPicPr>
-          <p:nvPr/>
-        </p:nvPicPr>
-        <p:blipFill>
-          <a:blip r:embed="rId3"/>
-          <a:stretch>
-            <a:fillRect/>
-          </a:stretch>
-        </p:blipFill>
-        <p:spPr>
-          <a:xfrm>
-            <a:off x="5469483" y="1847087"/>
-            <a:ext cx="1252728" cy="1252728"/>
-          </a:xfrm>
-          <a:prstGeom prst="rect">
-            <a:avLst/>
-          </a:prstGeom>
-        </p:spPr>
-      </p:pic>
-      <p:sp>
-        <p:nvSpPr>
-          <p:cNvPr id="15" name="TextBox 14"/>
-          <p:cNvSpPr txBox="1"/>
-          <p:nvPr/>
-        </p:nvSpPr>
-        <p:spPr>
-          <a:xfrm>
-            <a:off x="4356506" y="3191256"/>
-            <a:ext cx="3478682" cy="621792"/>
-          </a:xfrm>
-          <a:prstGeom prst="rect">
-            <a:avLst/>
-          </a:prstGeom>
-          <a:noFill/>
-        </p:spPr>
-        <p:txBody>
-          <a:bodyPr wrap="square" anchor="t"/>
-          <a:lstStyle/>
-          <a:p>
-            <a:pPr algn="ctr"/>
-            <a:r>
-              <a:rPr sz="1300" b="1" i="0">
-                <a:solidFill>
-                  <a:srgbClr val="095292"/>
-                </a:solidFill>
-                <a:latin typeface="Calibri"/>
-              </a:rPr>
-              <a:t>Mermaid</a:t>
-            </a:r>
-          </a:p>
-          <a:p>
-            <a:pPr algn="ctr">
-              <a:spcBef>
-                <a:spcPts val="200"/>
-              </a:spcBef>
+              <a:rPr sz="1400" b="0" i="0">
+                <a:solidFill>
+                  <a:srgbClr val="FFFFFF"/>
+                </a:solidFill>
+                <a:latin typeface="Calibri"/>
+              </a:rPr>
+              <a:t>| Mensaje del diagrama        | Clase receptora      | Operacion              |</a:t>
+            </a:r>
+          </a:p>
+          <a:p>
+            <a:pPr>
+              <a:spcAft>
+                <a:spcPts val="400"/>
+              </a:spcAft>
             </a:pPr>
             <a:r>
-              <a:rPr sz="1000" b="0" i="0">
-                <a:solidFill>
-                  <a:srgbClr val="666666"/>
-                </a:solidFill>
-                <a:latin typeface="Calibri"/>
-              </a:rPr>
-              <a:t>Diagramas como texto versionable</a:t>
-            </a:r>
-          </a:p>
-        </p:txBody>
-      </p:sp>
-      <p:sp>
-        <p:nvSpPr>
-          <p:cNvPr id="16" name="Rounded Rectangle 15"/>
-          <p:cNvSpPr/>
-          <p:nvPr/>
-        </p:nvSpPr>
-        <p:spPr>
-          <a:xfrm>
-            <a:off x="8109508" y="1591056"/>
-            <a:ext cx="3624986" cy="2331720"/>
-          </a:xfrm>
-          <a:prstGeom prst="roundRect">
-            <a:avLst>
-              <a:gd name="adj" fmla="val 12000"/>
-            </a:avLst>
-          </a:prstGeom>
-          <a:solidFill>
-            <a:srgbClr val="F2F2F2"/>
-          </a:solidFill>
-          <a:ln>
-            <a:noFill/>
-          </a:ln>
-        </p:spPr>
-        <p:style>
-          <a:lnRef idx="1">
-            <a:schemeClr val="accent1"/>
-          </a:lnRef>
-          <a:fillRef idx="3">
-            <a:schemeClr val="accent1"/>
-          </a:fillRef>
-          <a:effectRef idx="2">
-            <a:schemeClr val="accent1"/>
-          </a:effectRef>
-          <a:fontRef idx="minor">
-            <a:schemeClr val="lt1"/>
-          </a:fontRef>
-        </p:style>
-        <p:txBody>
-          <a:bodyPr rtlCol="0" anchor="ctr"/>
-          <a:lstStyle/>
-          <a:p>
-            <a:pPr algn="ctr"/>
-          </a:p>
-        </p:txBody>
-      </p:sp>
-      <p:sp>
-        <p:nvSpPr>
-          <p:cNvPr id="17" name="Rectangle 16"/>
-          <p:cNvSpPr/>
-          <p:nvPr/>
-        </p:nvSpPr>
-        <p:spPr>
-          <a:xfrm>
-            <a:off x="8109508" y="1591056"/>
-            <a:ext cx="3624986" cy="64008"/>
-          </a:xfrm>
-          <a:prstGeom prst="rect">
-            <a:avLst/>
-          </a:prstGeom>
-          <a:solidFill>
-            <a:srgbClr val="095292"/>
-          </a:solidFill>
-          <a:ln>
-            <a:noFill/>
-          </a:ln>
-        </p:spPr>
-        <p:style>
-          <a:lnRef idx="1">
-            <a:schemeClr val="accent1"/>
-          </a:lnRef>
-          <a:fillRef idx="3">
-            <a:schemeClr val="accent1"/>
-          </a:fillRef>
-          <a:effectRef idx="2">
-            <a:schemeClr val="accent1"/>
-          </a:effectRef>
-          <a:fontRef idx="minor">
-            <a:schemeClr val="lt1"/>
-          </a:fontRef>
-        </p:style>
-        <p:txBody>
-          <a:bodyPr rtlCol="0" anchor="ctr"/>
-          <a:lstStyle/>
-          <a:p>
-            <a:pPr algn="ctr"/>
-          </a:p>
-        </p:txBody>
-      </p:sp>
-      <p:sp>
-        <p:nvSpPr>
-          <p:cNvPr id="18" name="Rectangle 17"/>
-          <p:cNvSpPr/>
-          <p:nvPr/>
-        </p:nvSpPr>
-        <p:spPr>
-          <a:xfrm>
-            <a:off x="8109508" y="1655064"/>
-            <a:ext cx="3624986" cy="27432"/>
-          </a:xfrm>
-          <a:prstGeom prst="rect">
-            <a:avLst/>
-          </a:prstGeom>
-          <a:solidFill>
-            <a:srgbClr val="FFD000"/>
-          </a:solidFill>
-          <a:ln>
-            <a:noFill/>
-          </a:ln>
-        </p:spPr>
-        <p:style>
-          <a:lnRef idx="1">
-            <a:schemeClr val="accent1"/>
-          </a:lnRef>
-          <a:fillRef idx="3">
-            <a:schemeClr val="accent1"/>
-          </a:fillRef>
-          <a:effectRef idx="2">
-            <a:schemeClr val="accent1"/>
-          </a:effectRef>
-          <a:fontRef idx="minor">
-            <a:schemeClr val="lt1"/>
-          </a:fontRef>
-        </p:style>
-        <p:txBody>
-          <a:bodyPr rtlCol="0" anchor="ctr"/>
-          <a:lstStyle/>
-          <a:p>
-            <a:pPr algn="ctr"/>
-          </a:p>
-        </p:txBody>
-      </p:sp>
-      <p:pic>
-        <p:nvPicPr>
-          <p:cNvPr id="19" name="Picture 18" descr="examlab.png"/>
-          <p:cNvPicPr>
-            <a:picLocks noChangeAspect="1"/>
-          </p:cNvPicPr>
-          <p:nvPr/>
-        </p:nvPicPr>
-        <p:blipFill>
-          <a:blip r:embed="rId4"/>
-          <a:stretch>
-            <a:fillRect/>
-          </a:stretch>
-        </p:blipFill>
-        <p:spPr>
-          <a:xfrm>
-            <a:off x="9295638" y="1847087"/>
-            <a:ext cx="1252728" cy="1252728"/>
-          </a:xfrm>
-          <a:prstGeom prst="rect">
-            <a:avLst/>
-          </a:prstGeom>
-        </p:spPr>
-      </p:pic>
-      <p:sp>
-        <p:nvSpPr>
-          <p:cNvPr id="20" name="TextBox 19"/>
-          <p:cNvSpPr txBox="1"/>
-          <p:nvPr/>
-        </p:nvSpPr>
-        <p:spPr>
-          <a:xfrm>
-            <a:off x="8182660" y="3191256"/>
-            <a:ext cx="3478682" cy="621792"/>
-          </a:xfrm>
-          <a:prstGeom prst="rect">
-            <a:avLst/>
-          </a:prstGeom>
-          <a:noFill/>
-        </p:spPr>
-        <p:txBody>
-          <a:bodyPr wrap="square" anchor="t"/>
-          <a:lstStyle/>
-          <a:p>
-            <a:pPr algn="ctr"/>
-            <a:r>
-              <a:rPr sz="1300" b="1" i="0">
-                <a:solidFill>
-                  <a:srgbClr val="095292"/>
-                </a:solidFill>
-                <a:latin typeface="Calibri"/>
-              </a:rPr>
-              <a:t>la plataforma del curso</a:t>
-            </a:r>
-          </a:p>
-          <a:p>
-            <a:pPr algn="ctr">
-              <a:spcBef>
-                <a:spcPts val="200"/>
-              </a:spcBef>
+              <a:rPr sz="1400" b="0" i="0">
+                <a:solidFill>
+                  <a:srgbClr val="FFFFFF"/>
+                </a:solidFill>
+                <a:latin typeface="Calibri"/>
+              </a:rPr>
+              <a:t>|-----------------------------|----------------------|------------------------|</a:t>
+            </a:r>
+          </a:p>
+          <a:p>
+            <a:pPr>
+              <a:spcAft>
+                <a:spcPts val="400"/>
+              </a:spcAft>
             </a:pPr>
             <a:r>
-              <a:rPr sz="1000" b="0" i="0">
-                <a:solidFill>
-                  <a:srgbClr val="666666"/>
-                </a:solidFill>
-                <a:latin typeface="Calibri"/>
-              </a:rPr>
-              <a:t>Entrega del taller · en la fecha que indique el docente</a:t>
-            </a:r>
-          </a:p>
-        </p:txBody>
-      </p:sp>
-      <p:sp>
-        <p:nvSpPr>
-          <p:cNvPr id="21" name="TextBox 20"/>
+              <a:rPr sz="1400" b="0" i="0">
+                <a:solidFill>
+                  <a:srgbClr val="FFFFFF"/>
+                </a:solidFill>
+                <a:latin typeface="Calibri"/>
+              </a:rPr>
+              <a:t>| agendar(idMascota, fecha)   | ServicioCita         | +agendar(int, Date)    |</a:t>
+            </a:r>
+          </a:p>
+          <a:p>
+            <a:pPr>
+              <a:spcAft>
+                <a:spcPts val="400"/>
+              </a:spcAft>
+            </a:pPr>
+            <a:r>
+              <a:rPr sz="1400" b="0" i="0">
+                <a:solidFill>
+                  <a:srgbClr val="FFFFFF"/>
+                </a:solidFill>
+                <a:latin typeface="Calibri"/>
+              </a:rPr>
+              <a:t>| estaActiva(idMascota)       | RepositorioMascota   | +estaActiva(int): bool |</a:t>
+            </a:r>
+          </a:p>
+          <a:p>
+            <a:pPr>
+              <a:spcAft>
+                <a:spcPts val="400"/>
+              </a:spcAft>
+            </a:pPr>
+            <a:r>
+              <a:rPr sz="1400" b="0" i="0">
+                <a:solidFill>
+                  <a:srgbClr val="FFFFFF"/>
+                </a:solidFill>
+                <a:latin typeface="Calibri"/>
+              </a:rPr>
+              <a:t>| existeEnFranja(idVet, f)    | RepositorioCita      | +existeEnFranja(...)   |</a:t>
+            </a:r>
+          </a:p>
+          <a:p>
+            <a:pPr>
+              <a:spcAft>
+                <a:spcPts val="400"/>
+              </a:spcAft>
+            </a:pPr>
+            <a:r>
+              <a:rPr sz="1400" b="0" i="0">
+                <a:solidFill>
+                  <a:srgbClr val="FFFFFF"/>
+                </a:solidFill>
+                <a:latin typeface="Calibri"/>
+              </a:rPr>
+              <a:t>| guardar(cita)               | RepositorioCita      | +guardar(Cita): int    |</a:t>
+            </a:r>
+          </a:p>
+          <a:p>
+            <a:pPr>
+              <a:spcAft>
+                <a:spcPts val="400"/>
+              </a:spcAft>
+            </a:pPr>
+            <a:r>
+              <a:rPr sz="1400" b="0" i="0">
+                <a:solidFill>
+                  <a:srgbClr val="FFFFFF"/>
+                </a:solidFill>
+                <a:latin typeface="Calibri"/>
+              </a:rPr>
+              <a:t/>
+            </a:r>
+          </a:p>
+          <a:p>
+            <a:pPr>
+              <a:spcAft>
+                <a:spcPts val="400"/>
+              </a:spcAft>
+            </a:pPr>
+            <a:r>
+              <a:rPr sz="1400" b="0" i="0">
+                <a:solidFill>
+                  <a:srgbClr val="FFFFFF"/>
+                </a:solidFill>
+                <a:latin typeface="Calibri"/>
+              </a:rPr>
+              <a:t>-- Cada mensaje de la secuencia TIENE que existir como operacion en el</a:t>
+            </a:r>
+          </a:p>
+          <a:p>
+            <a:pPr>
+              <a:spcAft>
+                <a:spcPts val="400"/>
+              </a:spcAft>
+            </a:pPr>
+            <a:r>
+              <a:rPr sz="1400" b="0" i="0">
+                <a:solidFill>
+                  <a:srgbClr val="FFFFFF"/>
+                </a:solidFill>
+                <a:latin typeface="Calibri"/>
+              </a:rPr>
+              <a:t>-- diagrama de clases de la Clase 8. Si no esta, o falta la operacion o</a:t>
+            </a:r>
+          </a:p>
+          <a:p>
+            <a:pPr>
+              <a:spcAft>
+                <a:spcPts val="400"/>
+              </a:spcAft>
+            </a:pPr>
+            <a:r>
+              <a:rPr sz="1400" b="0" i="0">
+                <a:solidFill>
+                  <a:srgbClr val="FFFFFF"/>
+                </a:solidFill>
+                <a:latin typeface="Calibri"/>
+              </a:rPr>
+              <a:t>-- el mensaje esta de mas: los dos diagramas describen el mismo sistema.</a:t>
+            </a:r>
+          </a:p>
+        </p:txBody>
+      </p:sp>
+      <p:sp>
+        <p:nvSpPr>
+          <p:cNvPr id="9" name="TextBox 8"/>
           <p:cNvSpPr txBox="1"/>
           <p:nvPr/>
         </p:nvSpPr>
@@ -6216,21 +6030,141 @@
                 </a:solidFill>
                 <a:latin typeface="Calibri"/>
               </a:rPr>
-              <a:t>Taller PI — por que importa</a:t>
-            </a:r>
-          </a:p>
-        </p:txBody>
-      </p:sp>
-      <p:sp>
-        <p:nvSpPr>
-          <p:cNvPr id="5" name="TextBox 4"/>
+              <a:t>Secuencia de CU-04 Agendar cita en sintaxis Mermaid</a:t>
+            </a:r>
+          </a:p>
+        </p:txBody>
+      </p:sp>
+      <p:sp>
+        <p:nvSpPr>
+          <p:cNvPr id="5" name="Rounded Rectangle 4"/>
+          <p:cNvSpPr/>
+          <p:nvPr/>
+        </p:nvSpPr>
+        <p:spPr>
+          <a:xfrm>
+            <a:off x="457200" y="1261872"/>
+            <a:ext cx="11277295" cy="4773168"/>
+          </a:xfrm>
+          <a:prstGeom prst="roundRect">
+            <a:avLst>
+              <a:gd name="adj" fmla="val 12000"/>
+            </a:avLst>
+          </a:prstGeom>
+          <a:solidFill>
+            <a:srgbClr val="1E2A38"/>
+          </a:solidFill>
+          <a:ln>
+            <a:noFill/>
+          </a:ln>
+        </p:spPr>
+        <p:style>
+          <a:lnRef idx="1">
+            <a:schemeClr val="accent1"/>
+          </a:lnRef>
+          <a:fillRef idx="3">
+            <a:schemeClr val="accent1"/>
+          </a:fillRef>
+          <a:effectRef idx="2">
+            <a:schemeClr val="accent1"/>
+          </a:effectRef>
+          <a:fontRef idx="minor">
+            <a:schemeClr val="lt1"/>
+          </a:fontRef>
+        </p:style>
+        <p:txBody>
+          <a:bodyPr rtlCol="0" anchor="ctr"/>
+          <a:lstStyle/>
+          <a:p>
+            <a:pPr algn="ctr"/>
+          </a:p>
+        </p:txBody>
+      </p:sp>
+      <p:sp>
+        <p:nvSpPr>
+          <p:cNvPr id="6" name="Rectangle 5"/>
+          <p:cNvSpPr/>
+          <p:nvPr/>
+        </p:nvSpPr>
+        <p:spPr>
+          <a:xfrm>
+            <a:off x="457200" y="1261872"/>
+            <a:ext cx="11277295" cy="320040"/>
+          </a:xfrm>
+          <a:prstGeom prst="rect">
+            <a:avLst/>
+          </a:prstGeom>
+          <a:solidFill>
+            <a:srgbClr val="095292"/>
+          </a:solidFill>
+          <a:ln>
+            <a:noFill/>
+          </a:ln>
+        </p:spPr>
+        <p:style>
+          <a:lnRef idx="1">
+            <a:schemeClr val="accent1"/>
+          </a:lnRef>
+          <a:fillRef idx="3">
+            <a:schemeClr val="accent1"/>
+          </a:fillRef>
+          <a:effectRef idx="2">
+            <a:schemeClr val="accent1"/>
+          </a:effectRef>
+          <a:fontRef idx="minor">
+            <a:schemeClr val="lt1"/>
+          </a:fontRef>
+        </p:style>
+        <p:txBody>
+          <a:bodyPr rtlCol="0" anchor="ctr"/>
+          <a:lstStyle/>
+          <a:p>
+            <a:pPr algn="ctr"/>
+          </a:p>
+        </p:txBody>
+      </p:sp>
+      <p:sp>
+        <p:nvSpPr>
+          <p:cNvPr id="7" name="TextBox 6"/>
           <p:cNvSpPr txBox="1"/>
           <p:nvPr/>
         </p:nvSpPr>
         <p:spPr>
           <a:xfrm>
-            <a:off x="457200" y="1170432"/>
-            <a:ext cx="11277295" cy="5230368"/>
+            <a:off x="685800" y="1307592"/>
+            <a:ext cx="10820095" cy="256032"/>
+          </a:xfrm>
+          <a:prstGeom prst="rect">
+            <a:avLst/>
+          </a:prstGeom>
+          <a:noFill/>
+        </p:spPr>
+        <p:txBody>
+          <a:bodyPr wrap="square" anchor="ctr"/>
+          <a:lstStyle/>
+          <a:p>
+            <a:r>
+              <a:rPr sz="1000" b="1" i="0">
+                <a:solidFill>
+                  <a:srgbClr val="269CCB"/>
+                </a:solidFill>
+                <a:latin typeface="Calibri"/>
+              </a:rPr>
+              <a:t>● ● ●</a:t>
+            </a:r>
+          </a:p>
+        </p:txBody>
+      </p:sp>
+      <p:sp>
+        <p:nvSpPr>
+          <p:cNvPr id="8" name="TextBox 7"/>
+          <p:cNvSpPr txBox="1"/>
+          <p:nvPr/>
+        </p:nvSpPr>
+        <p:spPr>
+          <a:xfrm>
+            <a:off x="777240" y="1719072"/>
+            <a:ext cx="5181447" cy="4133087"/>
           </a:xfrm>
           <a:prstGeom prst="rect">
             <a:avLst/>
@@ -6245,74 +6179,370 @@
           <a:p>
             <a:pPr>
               <a:spcAft>
-                <a:spcPts val="800"/>
+                <a:spcPts val="400"/>
               </a:spcAft>
             </a:pPr>
             <a:r>
-              <a:rPr sz="2000" b="0" i="0">
-                <a:solidFill>
-                  <a:srgbClr val="333333"/>
-                </a:solidFill>
-                <a:latin typeface="Calibri"/>
-              </a:rPr>
-              <a:t>–   </a:t>
-            </a:r>
-            <a:r>
-              <a:rPr sz="2000" b="1" i="0">
-                <a:solidFill>
-                  <a:srgbClr val="333333"/>
-                </a:solidFill>
-                <a:latin typeface="Calibri"/>
-              </a:rPr>
-              <a:t>Por que importa al PI:</a:t>
-            </a:r>
-            <a:r>
-              <a:rPr sz="2000" b="0" i="0">
-                <a:solidFill>
-                  <a:srgbClr val="333333"/>
-                </a:solidFill>
-                <a:latin typeface="Calibri"/>
-              </a:rPr>
-              <a:t> los casos de uso dicen que hace VetCare y el diagrama de clases dice de que esta hecho, pero solo los diagramas de secuencia y actividad muestran como colaboran las piezas en el tiempo, que es lo que necesita quien vaya a construirlo.</a:t>
+              <a:rPr sz="1400" b="0" i="0">
+                <a:solidFill>
+                  <a:srgbClr val="FFFFFF"/>
+                </a:solidFill>
+                <a:latin typeface="Calibri"/>
+              </a:rPr>
+              <a:t>sequenceDiagram</a:t>
             </a:r>
           </a:p>
           <a:p>
             <a:pPr>
               <a:spcAft>
-                <a:spcPts val="800"/>
+                <a:spcPts val="400"/>
               </a:spcAft>
             </a:pPr>
             <a:r>
-              <a:rPr sz="2000" b="0" i="0">
-                <a:solidFill>
-                  <a:srgbClr val="333333"/>
-                </a:solidFill>
-                <a:latin typeface="Calibri"/>
-              </a:rPr>
-              <a:t>–   Dibujar la secuencia es la forma mas barata de descubrir que al diagrama de clases le faltan operaciones, porque cada flecha exige un dueño que la pueda responder.</a:t>
+              <a:rPr sz="1400" b="0" i="0">
+                <a:solidFill>
+                  <a:srgbClr val="FFFFFF"/>
+                </a:solidFill>
+                <a:latin typeface="Calibri"/>
+              </a:rPr>
+              <a:t>    actor Recepcionista</a:t>
             </a:r>
           </a:p>
           <a:p>
             <a:pPr>
               <a:spcAft>
-                <a:spcPts val="800"/>
+                <a:spcPts val="400"/>
               </a:spcAft>
             </a:pPr>
             <a:r>
-              <a:rPr sz="2000" b="0" i="0">
-                <a:solidFill>
-                  <a:srgbClr val="333333"/>
-                </a:solidFill>
-                <a:latin typeface="Calibri"/>
-              </a:rPr>
-              <a:t>–   El diagrama de actividad es el unico artefacto del paquete que muestra el trabajo humano de la clinica Huellitas, incluidas las esperas y las decisiones que ocurren fuera del computador.</a:t>
-            </a:r>
-          </a:p>
-        </p:txBody>
-      </p:sp>
-      <p:sp>
-        <p:nvSpPr>
-          <p:cNvPr id="6" name="TextBox 5"/>
+              <a:rPr sz="1400" b="0" i="0">
+                <a:solidFill>
+                  <a:srgbClr val="FFFFFF"/>
+                </a:solidFill>
+                <a:latin typeface="Calibri"/>
+              </a:rPr>
+              <a:t>    participant UI as :PantallaAgenda</a:t>
+            </a:r>
+          </a:p>
+          <a:p>
+            <a:pPr>
+              <a:spcAft>
+                <a:spcPts val="400"/>
+              </a:spcAft>
+            </a:pPr>
+            <a:r>
+              <a:rPr sz="1400" b="0" i="0">
+                <a:solidFill>
+                  <a:srgbClr val="FFFFFF"/>
+                </a:solidFill>
+                <a:latin typeface="Calibri"/>
+              </a:rPr>
+              <a:t>    participant CTRL as :ControlAgenda</a:t>
+            </a:r>
+          </a:p>
+          <a:p>
+            <a:pPr>
+              <a:spcAft>
+                <a:spcPts val="400"/>
+              </a:spcAft>
+            </a:pPr>
+            <a:r>
+              <a:rPr sz="1400" b="0" i="0">
+                <a:solidFill>
+                  <a:srgbClr val="FFFFFF"/>
+                </a:solidFill>
+                <a:latin typeface="Calibri"/>
+              </a:rPr>
+              <a:t>    participant REPM as :RepositorioMascotas</a:t>
+            </a:r>
+          </a:p>
+          <a:p>
+            <a:pPr>
+              <a:spcAft>
+                <a:spcPts val="400"/>
+              </a:spcAft>
+            </a:pPr>
+            <a:r>
+              <a:rPr sz="1400" b="0" i="0">
+                <a:solidFill>
+                  <a:srgbClr val="FFFFFF"/>
+                </a:solidFill>
+                <a:latin typeface="Calibri"/>
+              </a:rPr>
+              <a:t>    participant REPC as :RepositorioCitas</a:t>
+            </a:r>
+          </a:p>
+          <a:p>
+            <a:pPr>
+              <a:spcAft>
+                <a:spcPts val="400"/>
+              </a:spcAft>
+            </a:pPr>
+            <a:r>
+              <a:rPr sz="1400" b="0" i="0">
+                <a:solidFill>
+                  <a:srgbClr val="FFFFFF"/>
+                </a:solidFill>
+                <a:latin typeface="Calibri"/>
+              </a:rPr>
+              <a:t>    Recepcionista-&gt;&gt;UI: solicitarAgendamiento(codigoMascota, fecha)</a:t>
+            </a:r>
+          </a:p>
+          <a:p>
+            <a:pPr>
+              <a:spcAft>
+                <a:spcPts val="400"/>
+              </a:spcAft>
+            </a:pPr>
+            <a:r>
+              <a:rPr sz="1400" b="0" i="0">
+                <a:solidFill>
+                  <a:srgbClr val="FFFFFF"/>
+                </a:solidFill>
+                <a:latin typeface="Calibri"/>
+              </a:rPr>
+              <a:t>    UI-&gt;&gt;CTRL: agendarCita(codigoMascota, fecha, idVeterinario)</a:t>
+            </a:r>
+          </a:p>
+          <a:p>
+            <a:pPr>
+              <a:spcAft>
+                <a:spcPts val="400"/>
+              </a:spcAft>
+            </a:pPr>
+            <a:r>
+              <a:rPr sz="1400" b="0" i="0">
+                <a:solidFill>
+                  <a:srgbClr val="FFFFFF"/>
+                </a:solidFill>
+                <a:latin typeface="Calibri"/>
+              </a:rPr>
+              <a:t>    CTRL-&gt;&gt;REPM: existePorCodigo(codigoMascota)</a:t>
+            </a:r>
+          </a:p>
+          <a:p>
+            <a:pPr>
+              <a:spcAft>
+                <a:spcPts val="400"/>
+              </a:spcAft>
+            </a:pPr>
+            <a:r>
+              <a:rPr sz="1400" b="0" i="0">
+                <a:solidFill>
+                  <a:srgbClr val="FFFFFF"/>
+                </a:solidFill>
+                <a:latin typeface="Calibri"/>
+              </a:rPr>
+              <a:t>    REPM--&gt;&gt;CTRL: mascota</a:t>
+            </a:r>
+          </a:p>
+        </p:txBody>
+      </p:sp>
+      <p:sp>
+        <p:nvSpPr>
+          <p:cNvPr id="9" name="TextBox 8"/>
+          <p:cNvSpPr txBox="1"/>
+          <p:nvPr/>
+        </p:nvSpPr>
+        <p:spPr>
+          <a:xfrm>
+            <a:off x="6233007" y="1719072"/>
+            <a:ext cx="5181447" cy="4133087"/>
+          </a:xfrm>
+          <a:prstGeom prst="rect">
+            <a:avLst/>
+          </a:prstGeom>
+          <a:noFill/>
+        </p:spPr>
+        <p:txBody>
+          <a:bodyPr wrap="square">
+            <a:spAutoFit/>
+          </a:bodyPr>
+          <a:lstStyle/>
+          <a:p>
+            <a:pPr>
+              <a:spcAft>
+                <a:spcPts val="400"/>
+              </a:spcAft>
+            </a:pPr>
+            <a:r>
+              <a:rPr sz="1400" b="0" i="0">
+                <a:solidFill>
+                  <a:srgbClr val="FFFFFF"/>
+                </a:solidFill>
+                <a:latin typeface="Calibri"/>
+              </a:rPr>
+              <a:t>    CTRL-&gt;&gt;REPC: consultarDisponibilidad(idVeterinario, fecha)</a:t>
+            </a:r>
+          </a:p>
+          <a:p>
+            <a:pPr>
+              <a:spcAft>
+                <a:spcPts val="400"/>
+              </a:spcAft>
+            </a:pPr>
+            <a:r>
+              <a:rPr sz="1400" b="0" i="0">
+                <a:solidFill>
+                  <a:srgbClr val="FFFFFF"/>
+                </a:solidFill>
+                <a:latin typeface="Calibri"/>
+              </a:rPr>
+              <a:t>    REPC--&gt;&gt;CTRL: horariosLibres</a:t>
+            </a:r>
+          </a:p>
+          <a:p>
+            <a:pPr>
+              <a:spcAft>
+                <a:spcPts val="400"/>
+              </a:spcAft>
+            </a:pPr>
+            <a:r>
+              <a:rPr sz="1400" b="0" i="0">
+                <a:solidFill>
+                  <a:srgbClr val="FFFFFF"/>
+                </a:solidFill>
+                <a:latin typeface="Calibri"/>
+              </a:rPr>
+              <a:t>    alt hay horario libre</a:t>
+            </a:r>
+          </a:p>
+          <a:p>
+            <a:pPr>
+              <a:spcAft>
+                <a:spcPts val="400"/>
+              </a:spcAft>
+            </a:pPr>
+            <a:r>
+              <a:rPr sz="1400" b="0" i="0">
+                <a:solidFill>
+                  <a:srgbClr val="FFFFFF"/>
+                </a:solidFill>
+                <a:latin typeface="Calibri"/>
+              </a:rPr>
+              <a:t>        CTRL-&gt;&gt;REPC: guardarCita(cita)</a:t>
+            </a:r>
+          </a:p>
+          <a:p>
+            <a:pPr>
+              <a:spcAft>
+                <a:spcPts val="400"/>
+              </a:spcAft>
+            </a:pPr>
+            <a:r>
+              <a:rPr sz="1400" b="0" i="0">
+                <a:solidFill>
+                  <a:srgbClr val="FFFFFF"/>
+                </a:solidFill>
+                <a:latin typeface="Calibri"/>
+              </a:rPr>
+              <a:t>        REPC--&gt;&gt;CTRL: idCita</a:t>
+            </a:r>
+          </a:p>
+          <a:p>
+            <a:pPr>
+              <a:spcAft>
+                <a:spcPts val="400"/>
+              </a:spcAft>
+            </a:pPr>
+            <a:r>
+              <a:rPr sz="1400" b="0" i="0">
+                <a:solidFill>
+                  <a:srgbClr val="FFFFFF"/>
+                </a:solidFill>
+                <a:latin typeface="Calibri"/>
+              </a:rPr>
+              <a:t>        CTRL--&gt;&gt;UI: confirmacion(idCita)</a:t>
+            </a:r>
+          </a:p>
+          <a:p>
+            <a:pPr>
+              <a:spcAft>
+                <a:spcPts val="400"/>
+              </a:spcAft>
+            </a:pPr>
+            <a:r>
+              <a:rPr sz="1400" b="0" i="0">
+                <a:solidFill>
+                  <a:srgbClr val="FFFFFF"/>
+                </a:solidFill>
+                <a:latin typeface="Calibri"/>
+              </a:rPr>
+              <a:t>    else no hay horario libre</a:t>
+            </a:r>
+          </a:p>
+          <a:p>
+            <a:pPr>
+              <a:spcAft>
+                <a:spcPts val="400"/>
+              </a:spcAft>
+            </a:pPr>
+            <a:r>
+              <a:rPr sz="1400" b="0" i="0">
+                <a:solidFill>
+                  <a:srgbClr val="FFFFFF"/>
+                </a:solidFill>
+                <a:latin typeface="Calibri"/>
+              </a:rPr>
+              <a:t>        CTRL--&gt;&gt;UI: alternativas(dia siguiente)</a:t>
+            </a:r>
+          </a:p>
+          <a:p>
+            <a:pPr>
+              <a:spcAft>
+                <a:spcPts val="400"/>
+              </a:spcAft>
+            </a:pPr>
+            <a:r>
+              <a:rPr sz="1400" b="0" i="0">
+                <a:solidFill>
+                  <a:srgbClr val="FFFFFF"/>
+                </a:solidFill>
+                <a:latin typeface="Calibri"/>
+              </a:rPr>
+              <a:t>    end</a:t>
+            </a:r>
+          </a:p>
+        </p:txBody>
+      </p:sp>
+      <p:sp>
+        <p:nvSpPr>
+          <p:cNvPr id="10" name="TextBox 9"/>
+          <p:cNvSpPr txBox="1"/>
+          <p:nvPr/>
+        </p:nvSpPr>
+        <p:spPr>
+          <a:xfrm>
+            <a:off x="457200" y="6080760"/>
+            <a:ext cx="11277295" cy="320040"/>
+          </a:xfrm>
+          <a:prstGeom prst="rect">
+            <a:avLst/>
+          </a:prstGeom>
+          <a:noFill/>
+        </p:spPr>
+        <p:txBody>
+          <a:bodyPr wrap="square">
+            <a:spAutoFit/>
+          </a:bodyPr>
+          <a:lstStyle/>
+          <a:p>
+            <a:pPr algn="ctr"/>
+            <a:r>
+              <a:rPr sz="1200" b="0" i="1">
+                <a:solidFill>
+                  <a:srgbClr val="666666"/>
+                </a:solidFill>
+                <a:latin typeface="Calibri"/>
+              </a:rPr>
+              <a:t>Cada flecha tiene que corresponder a una operacion existente en el diagrama de clases: si no existe, o falta la operacion o sobra la flecha.</a:t>
+            </a:r>
+          </a:p>
+        </p:txBody>
+      </p:sp>
+      <p:sp>
+        <p:nvSpPr>
+          <p:cNvPr id="11" name="TextBox 10"/>
           <p:cNvSpPr txBox="1"/>
           <p:nvPr/>
         </p:nvSpPr>
@@ -6486,7 +6716,7 @@
                 </a:solidFill>
                 <a:latin typeface="Calibri"/>
               </a:rPr>
-              <a:t>Taller PI — punto de partida</a:t>
+              <a:t>Demo del dia</a:t>
             </a:r>
           </a:p>
         </p:txBody>
@@ -6525,7 +6755,25 @@
                 </a:solidFill>
                 <a:latin typeface="Calibri"/>
               </a:rPr>
-              <a:t>–   VetCare ya tiene casos de uso especificados y un diagrama de clases con multiplicidades, pero ningun documento explica el orden en que los objetos se comunican para cumplir un caso de uso.</a:t>
+              <a:t>–   </a:t>
+            </a:r>
+            <a:r>
+              <a:rPr sz="2000" b="1" i="0">
+                <a:solidFill>
+                  <a:srgbClr val="333333"/>
+                </a:solidFill>
+                <a:latin typeface="Calibri"/>
+              </a:rPr>
+              <a:t>Herramienta:</a:t>
+            </a:r>
+            <a:r>
+              <a:rPr sz="2000" b="0" i="0">
+                <a:solidFill>
+                  <a:srgbClr val="333333"/>
+                </a:solidFill>
+                <a:latin typeface="Calibri"/>
+              </a:rPr>
+              <a:t> draw.io · Mermaid Live Editor</a:t>
             </a:r>
           </a:p>
           <a:p>
@@ -6541,7 +6789,25 @@
                 </a:solidFill>
                 <a:latin typeface="Calibri"/>
               </a:rPr>
-              <a:t>–   En Huellitas, agendar una cita depende de la disponibilidad del veterinario y hoy eso se resuelve preguntando en voz alta al fondo del consultorio, sin ninguna regla escrita.</a:t>
+              <a:t>–   </a:t>
+            </a:r>
+            <a:r>
+              <a:rPr sz="2000" b="1" i="0">
+                <a:solidFill>
+                  <a:srgbClr val="333333"/>
+                </a:solidFill>
+                <a:latin typeface="Calibri"/>
+              </a:rPr>
+              <a:t>Demo:</a:t>
+            </a:r>
+            <a:r>
+              <a:rPr sz="2000" b="0" i="0">
+                <a:solidFill>
+                  <a:srgbClr val="333333"/>
+                </a:solidFill>
+                <a:latin typeface="Calibri"/>
+              </a:rPr>
+              <a:t> El docente toma el flujo principal ya escrito de CU-04 Agendar cita y lo convierte linea por linea en mensajes de un diagrama de secuencia en Mermaid, mostrando en vivo que cada mensaje necesita una clase dueña que lo pueda responder.</a:t>
             </a:r>
           </a:p>
           <a:p>
@@ -6557,7 +6823,7 @@
                 </a:solidFill>
                 <a:latin typeface="Calibri"/>
               </a:rPr>
-              <a:t>–   El equipo tiende a dibujar cajas y flechas por intuicion, sin volver a mirar el flujo principal que ya habia escrito hace tres sesiones.</a:t>
+              <a:t>–   Mismo dominio VetCare — no otro ejemplo. Aqui se diseña, no se programa.</a:t>
             </a:r>
           </a:p>
         </p:txBody>
@@ -6632,7 +6898,7 @@
         <p:spPr>
           <a:xfrm>
             <a:off x="0" y="0"/>
-            <a:ext cx="12191695" cy="960120"/>
+            <a:ext cx="12191695" cy="1170432"/>
           </a:xfrm>
           <a:prstGeom prst="rect">
             <a:avLst/>
@@ -6674,7 +6940,7 @@
         </p:nvSpPr>
         <p:spPr>
           <a:xfrm>
-            <a:off x="0" y="960120"/>
+            <a:off x="0" y="1170432"/>
             <a:ext cx="12191695" cy="41148"/>
           </a:xfrm>
           <a:prstGeom prst="rect">
@@ -6718,7 +6984,7 @@
         <p:spPr>
           <a:xfrm>
             <a:off x="457200" y="164592"/>
-            <a:ext cx="11277295" cy="502920"/>
+            <a:ext cx="11277295" cy="384048"/>
           </a:xfrm>
           <a:prstGeom prst="rect">
             <a:avLst/>
@@ -6738,21 +7004,55 @@
                 </a:solidFill>
                 <a:latin typeface="Calibri"/>
               </a:rPr>
-              <a:t>Taller PI — pasos guiados</a:t>
-            </a:r>
-          </a:p>
-        </p:txBody>
-      </p:sp>
-      <p:sp>
-        <p:nvSpPr>
-          <p:cNvPr id="5" name="Rounded Rectangle 4"/>
+              <a:t>Herramientas de hoy</a:t>
+            </a:r>
+          </a:p>
+        </p:txBody>
+      </p:sp>
+      <p:sp>
+        <p:nvSpPr>
+          <p:cNvPr id="5" name="TextBox 4"/>
+          <p:cNvSpPr txBox="1"/>
+          <p:nvPr/>
+        </p:nvSpPr>
+        <p:spPr>
+          <a:xfrm>
+            <a:off x="457200" y="566928"/>
+            <a:ext cx="11277295" cy="411480"/>
+          </a:xfrm>
+          <a:prstGeom prst="rect">
+            <a:avLst/>
+          </a:prstGeom>
+          <a:noFill/>
+        </p:spPr>
+        <p:txBody>
+          <a:bodyPr wrap="square">
+            <a:spAutoFit/>
+          </a:bodyPr>
+          <a:lstStyle/>
+          <a:p>
+            <a:r>
+              <a:rPr sz="1400" b="0" i="0">
+                <a:solidFill>
+                  <a:srgbClr val="B8D8EE"/>
+                </a:solidFill>
+                <a:latin typeface="Calibri"/>
+              </a:rPr>
+              <a:t>Gratis · funcionan en el navegador</a:t>
+            </a:r>
+          </a:p>
+        </p:txBody>
+      </p:sp>
+      <p:sp>
+        <p:nvSpPr>
+          <p:cNvPr id="6" name="Rounded Rectangle 5"/>
           <p:cNvSpPr/>
           <p:nvPr/>
         </p:nvSpPr>
         <p:spPr>
           <a:xfrm>
-            <a:off x="457200" y="1234440"/>
-            <a:ext cx="11277295" cy="950976"/>
+            <a:off x="457200" y="1591056"/>
+            <a:ext cx="3624986" cy="2331720"/>
           </a:xfrm>
           <a:prstGeom prst="roundRect">
             <a:avLst>
@@ -6790,19 +7090,17 @@
       </p:sp>
       <p:sp>
         <p:nvSpPr>
-          <p:cNvPr id="6" name="Rounded Rectangle 5"/>
+          <p:cNvPr id="7" name="Rectangle 6"/>
           <p:cNvSpPr/>
           <p:nvPr/>
         </p:nvSpPr>
         <p:spPr>
           <a:xfrm>
-            <a:off x="594360" y="1490472"/>
-            <a:ext cx="438912" cy="438912"/>
-          </a:xfrm>
-          <a:prstGeom prst="roundRect">
-            <a:avLst>
-              <a:gd name="adj" fmla="val 12000"/>
-            </a:avLst>
+            <a:off x="457200" y="1591056"/>
+            <a:ext cx="3624986" cy="64008"/>
+          </a:xfrm>
+          <a:prstGeom prst="rect">
+            <a:avLst/>
           </a:prstGeom>
           <a:solidFill>
             <a:srgbClr val="095292"/>
@@ -6835,87 +7133,20 @@
       </p:sp>
       <p:sp>
         <p:nvSpPr>
-          <p:cNvPr id="7" name="TextBox 6"/>
-          <p:cNvSpPr txBox="1"/>
-          <p:nvPr/>
-        </p:nvSpPr>
-        <p:spPr>
-          <a:xfrm>
-            <a:off x="594360" y="1490472"/>
-            <a:ext cx="438912" cy="438912"/>
-          </a:xfrm>
-          <a:prstGeom prst="rect">
-            <a:avLst/>
-          </a:prstGeom>
-          <a:noFill/>
-        </p:spPr>
-        <p:txBody>
-          <a:bodyPr wrap="square" anchor="ctr"/>
-          <a:lstStyle/>
-          <a:p>
-            <a:pPr algn="ctr"/>
-            <a:r>
-              <a:rPr sz="1600" b="1" i="0">
-                <a:solidFill>
-                  <a:srgbClr val="FFFFFF"/>
-                </a:solidFill>
-                <a:latin typeface="Calibri"/>
-              </a:rPr>
-              <a:t>1</a:t>
-            </a:r>
-          </a:p>
-        </p:txBody>
-      </p:sp>
-      <p:sp>
-        <p:nvSpPr>
-          <p:cNvPr id="8" name="TextBox 7"/>
-          <p:cNvSpPr txBox="1"/>
-          <p:nvPr/>
-        </p:nvSpPr>
-        <p:spPr>
-          <a:xfrm>
-            <a:off x="1188720" y="1325880"/>
-            <a:ext cx="10271455" cy="786384"/>
-          </a:xfrm>
-          <a:prstGeom prst="rect">
-            <a:avLst/>
-          </a:prstGeom>
-          <a:noFill/>
-        </p:spPr>
-        <p:txBody>
-          <a:bodyPr wrap="square" anchor="ctr"/>
-          <a:lstStyle/>
-          <a:p>
-            <a:r>
-              <a:rPr sz="1400" b="1" i="0">
-                <a:solidFill>
-                  <a:srgbClr val="095292"/>
-                </a:solidFill>
-                <a:latin typeface="Calibri"/>
-              </a:rPr>
-              <a:t>Tomar el flujo principal escrito de CU-04 Agendar cita, y si todavia no esta especificado diligenciar primero la plantilla de la clase nueve, para luego numerar en el documento cual paso genera cual mensaje, de manera que quede una lista de entre seis y ocho mensajes antes de dibujar cualquier cosa.</a:t>
-            </a:r>
-          </a:p>
-        </p:txBody>
-      </p:sp>
-      <p:sp>
-        <p:nvSpPr>
-          <p:cNvPr id="9" name="Rounded Rectangle 8"/>
+          <p:cNvPr id="8" name="Rectangle 7"/>
           <p:cNvSpPr/>
           <p:nvPr/>
         </p:nvSpPr>
         <p:spPr>
           <a:xfrm>
-            <a:off x="457200" y="2276856"/>
-            <a:ext cx="11277295" cy="950976"/>
-          </a:xfrm>
-          <a:prstGeom prst="roundRect">
-            <a:avLst>
-              <a:gd name="adj" fmla="val 12000"/>
-            </a:avLst>
+            <a:off x="457200" y="1655064"/>
+            <a:ext cx="3624986" cy="27432"/>
+          </a:xfrm>
+          <a:prstGeom prst="rect">
+            <a:avLst/>
           </a:prstGeom>
           <a:solidFill>
-            <a:srgbClr val="E8F4FA"/>
+            <a:srgbClr val="FFD000"/>
           </a:solidFill>
           <a:ln>
             <a:noFill/>
@@ -6943,21 +7174,137 @@
           </a:p>
         </p:txBody>
       </p:sp>
-      <p:sp>
-        <p:nvSpPr>
-          <p:cNvPr id="10" name="Rounded Rectangle 9"/>
+      <p:pic>
+        <p:nvPicPr>
+          <p:cNvPr id="9" name="Picture 8" descr="drawio.png"/>
+          <p:cNvPicPr>
+            <a:picLocks noChangeAspect="1"/>
+          </p:cNvPicPr>
+          <p:nvPr/>
+        </p:nvPicPr>
+        <p:blipFill>
+          <a:blip r:embed="rId2"/>
+          <a:stretch>
+            <a:fillRect/>
+          </a:stretch>
+        </p:blipFill>
+        <p:spPr>
+          <a:xfrm>
+            <a:off x="1643329" y="1847087"/>
+            <a:ext cx="1252728" cy="1252728"/>
+          </a:xfrm>
+          <a:prstGeom prst="rect">
+            <a:avLst/>
+          </a:prstGeom>
+        </p:spPr>
+      </p:pic>
+      <p:sp>
+        <p:nvSpPr>
+          <p:cNvPr id="10" name="TextBox 9"/>
+          <p:cNvSpPr txBox="1"/>
+          <p:nvPr/>
+        </p:nvSpPr>
+        <p:spPr>
+          <a:xfrm>
+            <a:off x="530352" y="3191256"/>
+            <a:ext cx="3478682" cy="621792"/>
+          </a:xfrm>
+          <a:prstGeom prst="rect">
+            <a:avLst/>
+          </a:prstGeom>
+          <a:noFill/>
+        </p:spPr>
+        <p:txBody>
+          <a:bodyPr wrap="square" anchor="t"/>
+          <a:lstStyle/>
+          <a:p>
+            <a:pPr algn="ctr"/>
+            <a:r>
+              <a:rPr sz="1300" b="1" i="0">
+                <a:solidFill>
+                  <a:srgbClr val="095292"/>
+                </a:solidFill>
+                <a:latin typeface="Calibri"/>
+              </a:rPr>
+              <a:t>Draw.Io</a:t>
+            </a:r>
+          </a:p>
+          <a:p>
+            <a:pPr algn="ctr">
+              <a:spcBef>
+                <a:spcPts val="200"/>
+              </a:spcBef>
+            </a:pPr>
+            <a:r>
+              <a:rPr sz="1000" b="0" i="0">
+                <a:solidFill>
+                  <a:srgbClr val="666666"/>
+                </a:solidFill>
+                <a:latin typeface="Calibri"/>
+              </a:rPr>
+              <a:t>Diagramas UML y de contexto</a:t>
+            </a:r>
+          </a:p>
+        </p:txBody>
+      </p:sp>
+      <p:sp>
+        <p:nvSpPr>
+          <p:cNvPr id="11" name="Rounded Rectangle 10"/>
           <p:cNvSpPr/>
           <p:nvPr/>
         </p:nvSpPr>
         <p:spPr>
           <a:xfrm>
-            <a:off x="594360" y="2532888"/>
-            <a:ext cx="438912" cy="438912"/>
+            <a:off x="4283354" y="1591056"/>
+            <a:ext cx="3624986" cy="2331720"/>
           </a:xfrm>
           <a:prstGeom prst="roundRect">
             <a:avLst>
               <a:gd name="adj" fmla="val 12000"/>
             </a:avLst>
+          </a:prstGeom>
+          <a:solidFill>
+            <a:srgbClr val="F2F2F2"/>
+          </a:solidFill>
+          <a:ln>
+            <a:noFill/>
+          </a:ln>
+        </p:spPr>
+        <p:style>
+          <a:lnRef idx="1">
+            <a:schemeClr val="accent1"/>
+          </a:lnRef>
+          <a:fillRef idx="3">
+            <a:schemeClr val="accent1"/>
+          </a:fillRef>
+          <a:effectRef idx="2">
+            <a:schemeClr val="accent1"/>
+          </a:effectRef>
+          <a:fontRef idx="minor">
+            <a:schemeClr val="lt1"/>
+          </a:fontRef>
+        </p:style>
+        <p:txBody>
+          <a:bodyPr rtlCol="0" anchor="ctr"/>
+          <a:lstStyle/>
+          <a:p>
+            <a:pPr algn="ctr"/>
+          </a:p>
+        </p:txBody>
+      </p:sp>
+      <p:sp>
+        <p:nvSpPr>
+          <p:cNvPr id="12" name="Rectangle 11"/>
+          <p:cNvSpPr/>
+          <p:nvPr/>
+        </p:nvSpPr>
+        <p:spPr>
+          <a:xfrm>
+            <a:off x="4283354" y="1591056"/>
+            <a:ext cx="3624986" cy="64008"/>
+          </a:xfrm>
+          <a:prstGeom prst="rect">
+            <a:avLst/>
           </a:prstGeom>
           <a:solidFill>
             <a:srgbClr val="095292"/>
@@ -6990,14 +7337,81 @@
       </p:sp>
       <p:sp>
         <p:nvSpPr>
-          <p:cNvPr id="11" name="TextBox 10"/>
+          <p:cNvPr id="13" name="Rectangle 12"/>
+          <p:cNvSpPr/>
+          <p:nvPr/>
+        </p:nvSpPr>
+        <p:spPr>
+          <a:xfrm>
+            <a:off x="4283354" y="1655064"/>
+            <a:ext cx="3624986" cy="27432"/>
+          </a:xfrm>
+          <a:prstGeom prst="rect">
+            <a:avLst/>
+          </a:prstGeom>
+          <a:solidFill>
+            <a:srgbClr val="FFD000"/>
+          </a:solidFill>
+          <a:ln>
+            <a:noFill/>
+          </a:ln>
+        </p:spPr>
+        <p:style>
+          <a:lnRef idx="1">
+            <a:schemeClr val="accent1"/>
+          </a:lnRef>
+          <a:fillRef idx="3">
+            <a:schemeClr val="accent1"/>
+          </a:fillRef>
+          <a:effectRef idx="2">
+            <a:schemeClr val="accent1"/>
+          </a:effectRef>
+          <a:fontRef idx="minor">
+            <a:schemeClr val="lt1"/>
+          </a:fontRef>
+        </p:style>
+        <p:txBody>
+          <a:bodyPr rtlCol="0" anchor="ctr"/>
+          <a:lstStyle/>
+          <a:p>
+            <a:pPr algn="ctr"/>
+          </a:p>
+        </p:txBody>
+      </p:sp>
+      <p:pic>
+        <p:nvPicPr>
+          <p:cNvPr id="14" name="Picture 13" descr="mermaid.png"/>
+          <p:cNvPicPr>
+            <a:picLocks noChangeAspect="1"/>
+          </p:cNvPicPr>
+          <p:nvPr/>
+        </p:nvPicPr>
+        <p:blipFill>
+          <a:blip r:embed="rId3"/>
+          <a:stretch>
+            <a:fillRect/>
+          </a:stretch>
+        </p:blipFill>
+        <p:spPr>
+          <a:xfrm>
+            <a:off x="5469483" y="1847087"/>
+            <a:ext cx="1252728" cy="1252728"/>
+          </a:xfrm>
+          <a:prstGeom prst="rect">
+            <a:avLst/>
+          </a:prstGeom>
+        </p:spPr>
+      </p:pic>
+      <p:sp>
+        <p:nvSpPr>
+          <p:cNvPr id="15" name="TextBox 14"/>
           <p:cNvSpPr txBox="1"/>
           <p:nvPr/>
         </p:nvSpPr>
         <p:spPr>
           <a:xfrm>
-            <a:off x="594360" y="2532888"/>
-            <a:ext cx="438912" cy="438912"/>
+            <a:off x="4356506" y="3191256"/>
+            <a:ext cx="3478682" cy="621792"/>
           </a:xfrm>
           <a:prstGeom prst="rect">
             <a:avLst/>
@@ -7005,64 +7419,48 @@
           <a:noFill/>
         </p:spPr>
         <p:txBody>
-          <a:bodyPr wrap="square" anchor="ctr"/>
+          <a:bodyPr wrap="square" anchor="t"/>
           <a:lstStyle/>
           <a:p>
             <a:pPr algn="ctr"/>
             <a:r>
-              <a:rPr sz="1600" b="1" i="0">
-                <a:solidFill>
-                  <a:srgbClr val="FFFFFF"/>
-                </a:solidFill>
-                <a:latin typeface="Calibri"/>
-              </a:rPr>
-              <a:t>2</a:t>
-            </a:r>
-          </a:p>
-        </p:txBody>
-      </p:sp>
-      <p:sp>
-        <p:nvSpPr>
-          <p:cNvPr id="12" name="TextBox 11"/>
-          <p:cNvSpPr txBox="1"/>
-          <p:nvPr/>
-        </p:nvSpPr>
-        <p:spPr>
-          <a:xfrm>
-            <a:off x="1188720" y="2368296"/>
-            <a:ext cx="10271455" cy="786384"/>
-          </a:xfrm>
-          <a:prstGeom prst="rect">
-            <a:avLst/>
-          </a:prstGeom>
-          <a:noFill/>
-        </p:spPr>
-        <p:txBody>
-          <a:bodyPr wrap="square" anchor="ctr"/>
-          <a:lstStyle/>
-          <a:p>
-            <a:r>
-              <a:rPr sz="1400" b="1" i="0">
+              <a:rPr sz="1300" b="1" i="0">
                 <a:solidFill>
                   <a:srgbClr val="095292"/>
                 </a:solidFill>
                 <a:latin typeface="Calibri"/>
               </a:rPr>
-              <a:t>Dibujar el diagrama de secuencia en Mermaid Live Editor o draw.io con la recepcionista como actor y minimo tres participantes que correspondan a clases reales del diagrama de clases de VetCare, incluyendo las flechas de retorno con el dato que devuelven.</a:t>
-            </a:r>
-          </a:p>
-        </p:txBody>
-      </p:sp>
-      <p:sp>
-        <p:nvSpPr>
-          <p:cNvPr id="13" name="Rounded Rectangle 12"/>
+              <a:t>Mermaid</a:t>
+            </a:r>
+          </a:p>
+          <a:p>
+            <a:pPr algn="ctr">
+              <a:spcBef>
+                <a:spcPts val="200"/>
+              </a:spcBef>
+            </a:pPr>
+            <a:r>
+              <a:rPr sz="1000" b="0" i="0">
+                <a:solidFill>
+                  <a:srgbClr val="666666"/>
+                </a:solidFill>
+                <a:latin typeface="Calibri"/>
+              </a:rPr>
+              <a:t>Diagramas como texto versionable</a:t>
+            </a:r>
+          </a:p>
+        </p:txBody>
+      </p:sp>
+      <p:sp>
+        <p:nvSpPr>
+          <p:cNvPr id="16" name="Rounded Rectangle 15"/>
           <p:cNvSpPr/>
           <p:nvPr/>
         </p:nvSpPr>
         <p:spPr>
           <a:xfrm>
-            <a:off x="457200" y="3319272"/>
-            <a:ext cx="11277295" cy="950976"/>
+            <a:off x="8109508" y="1591056"/>
+            <a:ext cx="3624986" cy="2331720"/>
           </a:xfrm>
           <a:prstGeom prst="roundRect">
             <a:avLst>
@@ -7100,19 +7498,17 @@
       </p:sp>
       <p:sp>
         <p:nvSpPr>
-          <p:cNvPr id="14" name="Rounded Rectangle 13"/>
+          <p:cNvPr id="17" name="Rectangle 16"/>
           <p:cNvSpPr/>
           <p:nvPr/>
         </p:nvSpPr>
         <p:spPr>
           <a:xfrm>
-            <a:off x="594360" y="3575304"/>
-            <a:ext cx="438912" cy="438912"/>
-          </a:xfrm>
-          <a:prstGeom prst="roundRect">
-            <a:avLst>
-              <a:gd name="adj" fmla="val 12000"/>
-            </a:avLst>
+            <a:off x="8109508" y="1591056"/>
+            <a:ext cx="3624986" cy="64008"/>
+          </a:xfrm>
+          <a:prstGeom prst="rect">
+            <a:avLst/>
           </a:prstGeom>
           <a:solidFill>
             <a:srgbClr val="095292"/>
@@ -7145,87 +7541,20 @@
       </p:sp>
       <p:sp>
         <p:nvSpPr>
-          <p:cNvPr id="15" name="TextBox 14"/>
-          <p:cNvSpPr txBox="1"/>
-          <p:nvPr/>
-        </p:nvSpPr>
-        <p:spPr>
-          <a:xfrm>
-            <a:off x="594360" y="3575304"/>
-            <a:ext cx="438912" cy="438912"/>
-          </a:xfrm>
-          <a:prstGeom prst="rect">
-            <a:avLst/>
-          </a:prstGeom>
-          <a:noFill/>
-        </p:spPr>
-        <p:txBody>
-          <a:bodyPr wrap="square" anchor="ctr"/>
-          <a:lstStyle/>
-          <a:p>
-            <a:pPr algn="ctr"/>
-            <a:r>
-              <a:rPr sz="1600" b="1" i="0">
-                <a:solidFill>
-                  <a:srgbClr val="FFFFFF"/>
-                </a:solidFill>
-                <a:latin typeface="Calibri"/>
-              </a:rPr>
-              <a:t>3</a:t>
-            </a:r>
-          </a:p>
-        </p:txBody>
-      </p:sp>
-      <p:sp>
-        <p:nvSpPr>
-          <p:cNvPr id="16" name="TextBox 15"/>
-          <p:cNvSpPr txBox="1"/>
-          <p:nvPr/>
-        </p:nvSpPr>
-        <p:spPr>
-          <a:xfrm>
-            <a:off x="1188720" y="3410712"/>
-            <a:ext cx="10271455" cy="786384"/>
-          </a:xfrm>
-          <a:prstGeom prst="rect">
-            <a:avLst/>
-          </a:prstGeom>
-          <a:noFill/>
-        </p:spPr>
-        <p:txBody>
-          <a:bodyPr wrap="square" anchor="ctr"/>
-          <a:lstStyle/>
-          <a:p>
-            <a:r>
-              <a:rPr sz="1500" b="1" i="0">
-                <a:solidFill>
-                  <a:srgbClr val="095292"/>
-                </a:solidFill>
-                <a:latin typeface="Calibri"/>
-              </a:rPr>
-              <a:t>Agregar un fragmento alt que modele el horario ocupado con sus dos condiciones de guarda escritas, y verificar que el camino del else corresponda a un flujo alterno documentado en la especificacion del caso de uso.</a:t>
-            </a:r>
-          </a:p>
-        </p:txBody>
-      </p:sp>
-      <p:sp>
-        <p:nvSpPr>
-          <p:cNvPr id="17" name="Rounded Rectangle 16"/>
+          <p:cNvPr id="18" name="Rectangle 17"/>
           <p:cNvSpPr/>
           <p:nvPr/>
         </p:nvSpPr>
         <p:spPr>
           <a:xfrm>
-            <a:off x="457200" y="4361688"/>
-            <a:ext cx="11277295" cy="950976"/>
-          </a:xfrm>
-          <a:prstGeom prst="roundRect">
-            <a:avLst>
-              <a:gd name="adj" fmla="val 12000"/>
-            </a:avLst>
+            <a:off x="8109508" y="1655064"/>
+            <a:ext cx="3624986" cy="27432"/>
+          </a:xfrm>
+          <a:prstGeom prst="rect">
+            <a:avLst/>
           </a:prstGeom>
           <a:solidFill>
-            <a:srgbClr val="E8F4FA"/>
+            <a:srgbClr val="FFD000"/>
           </a:solidFill>
           <a:ln>
             <a:noFill/>
@@ -7253,84 +7582,30 @@
           </a:p>
         </p:txBody>
       </p:sp>
-      <p:sp>
-        <p:nvSpPr>
-          <p:cNvPr id="18" name="Rounded Rectangle 17"/>
-          <p:cNvSpPr/>
-          <p:nvPr/>
-        </p:nvSpPr>
-        <p:spPr>
-          <a:xfrm>
-            <a:off x="594360" y="4617720"/>
-            <a:ext cx="438912" cy="438912"/>
-          </a:xfrm>
-          <a:prstGeom prst="roundRect">
-            <a:avLst>
-              <a:gd name="adj" fmla="val 12000"/>
-            </a:avLst>
-          </a:prstGeom>
-          <a:solidFill>
-            <a:srgbClr val="095292"/>
-          </a:solidFill>
-          <a:ln>
-            <a:noFill/>
-          </a:ln>
-        </p:spPr>
-        <p:style>
-          <a:lnRef idx="1">
-            <a:schemeClr val="accent1"/>
-          </a:lnRef>
-          <a:fillRef idx="3">
-            <a:schemeClr val="accent1"/>
-          </a:fillRef>
-          <a:effectRef idx="2">
-            <a:schemeClr val="accent1"/>
-          </a:effectRef>
-          <a:fontRef idx="minor">
-            <a:schemeClr val="lt1"/>
-          </a:fontRef>
-        </p:style>
-        <p:txBody>
-          <a:bodyPr rtlCol="0" anchor="ctr"/>
-          <a:lstStyle/>
-          <a:p>
-            <a:pPr algn="ctr"/>
-          </a:p>
-        </p:txBody>
-      </p:sp>
-      <p:sp>
-        <p:nvSpPr>
-          <p:cNvPr id="19" name="TextBox 18"/>
-          <p:cNvSpPr txBox="1"/>
-          <p:nvPr/>
-        </p:nvSpPr>
-        <p:spPr>
-          <a:xfrm>
-            <a:off x="594360" y="4617720"/>
-            <a:ext cx="438912" cy="438912"/>
-          </a:xfrm>
-          <a:prstGeom prst="rect">
-            <a:avLst/>
-          </a:prstGeom>
-          <a:noFill/>
-        </p:spPr>
-        <p:txBody>
-          <a:bodyPr wrap="square" anchor="ctr"/>
-          <a:lstStyle/>
-          <a:p>
-            <a:pPr algn="ctr"/>
-            <a:r>
-              <a:rPr sz="1600" b="1" i="0">
-                <a:solidFill>
-                  <a:srgbClr val="FFFFFF"/>
-                </a:solidFill>
-                <a:latin typeface="Calibri"/>
-              </a:rPr>
-              <a:t>4</a:t>
-            </a:r>
-          </a:p>
-        </p:txBody>
-      </p:sp>
+      <p:pic>
+        <p:nvPicPr>
+          <p:cNvPr id="19" name="Picture 18" descr="examlab.png"/>
+          <p:cNvPicPr>
+            <a:picLocks noChangeAspect="1"/>
+          </p:cNvPicPr>
+          <p:nvPr/>
+        </p:nvPicPr>
+        <p:blipFill>
+          <a:blip r:embed="rId4"/>
+          <a:stretch>
+            <a:fillRect/>
+          </a:stretch>
+        </p:blipFill>
+        <p:spPr>
+          <a:xfrm>
+            <a:off x="9295638" y="1847087"/>
+            <a:ext cx="1252728" cy="1252728"/>
+          </a:xfrm>
+          <a:prstGeom prst="rect">
+            <a:avLst/>
+          </a:prstGeom>
+        </p:spPr>
+      </p:pic>
       <p:sp>
         <p:nvSpPr>
           <p:cNvPr id="20" name="TextBox 19"/>
@@ -7339,8 +7614,8 @@
         </p:nvSpPr>
         <p:spPr>
           <a:xfrm>
-            <a:off x="1188720" y="4453128"/>
-            <a:ext cx="10271455" cy="786384"/>
+            <a:off x="8182660" y="3191256"/>
+            <a:ext cx="3478682" cy="621792"/>
           </a:xfrm>
           <a:prstGeom prst="rect">
             <a:avLst/>
@@ -7348,179 +7623,41 @@
           <a:noFill/>
         </p:spPr>
         <p:txBody>
-          <a:bodyPr wrap="square" anchor="ctr"/>
-          <a:lstStyle/>
-          <a:p>
-            <a:r>
-              <a:rPr sz="1500" b="1" i="0">
+          <a:bodyPr wrap="square" anchor="t"/>
+          <a:lstStyle/>
+          <a:p>
+            <a:pPr algn="ctr"/>
+            <a:r>
+              <a:rPr sz="1300" b="1" i="0">
                 <a:solidFill>
                   <a:srgbClr val="095292"/>
                 </a:solidFill>
                 <a:latin typeface="Calibri"/>
               </a:rPr>
-              <a:t>Construir la tabla de mapeo mensaje a operacion con tres columnas, mensaje, clase destinataria y operacion que debe existir, y agregar al diagrama de clases toda operacion que hoy falte; ninguna fila puede quedar con la clase en blanco.</a:t>
-            </a:r>
-          </a:p>
-        </p:txBody>
-      </p:sp>
-      <p:sp>
-        <p:nvSpPr>
-          <p:cNvPr id="21" name="Rounded Rectangle 20"/>
-          <p:cNvSpPr/>
-          <p:nvPr/>
-        </p:nvSpPr>
-        <p:spPr>
-          <a:xfrm>
-            <a:off x="457200" y="5404104"/>
-            <a:ext cx="11277295" cy="950976"/>
-          </a:xfrm>
-          <a:prstGeom prst="roundRect">
-            <a:avLst>
-              <a:gd name="adj" fmla="val 12000"/>
-            </a:avLst>
-          </a:prstGeom>
-          <a:solidFill>
-            <a:srgbClr val="F2F2F2"/>
-          </a:solidFill>
-          <a:ln>
-            <a:noFill/>
-          </a:ln>
-        </p:spPr>
-        <p:style>
-          <a:lnRef idx="1">
-            <a:schemeClr val="accent1"/>
-          </a:lnRef>
-          <a:fillRef idx="3">
-            <a:schemeClr val="accent1"/>
-          </a:fillRef>
-          <a:effectRef idx="2">
-            <a:schemeClr val="accent1"/>
-          </a:effectRef>
-          <a:fontRef idx="minor">
-            <a:schemeClr val="lt1"/>
-          </a:fontRef>
-        </p:style>
-        <p:txBody>
-          <a:bodyPr rtlCol="0" anchor="ctr"/>
-          <a:lstStyle/>
-          <a:p>
-            <a:pPr algn="ctr"/>
-          </a:p>
-        </p:txBody>
-      </p:sp>
-      <p:sp>
-        <p:nvSpPr>
-          <p:cNvPr id="22" name="Rounded Rectangle 21"/>
-          <p:cNvSpPr/>
-          <p:nvPr/>
-        </p:nvSpPr>
-        <p:spPr>
-          <a:xfrm>
-            <a:off x="594360" y="5660136"/>
-            <a:ext cx="438912" cy="438912"/>
-          </a:xfrm>
-          <a:prstGeom prst="roundRect">
-            <a:avLst>
-              <a:gd name="adj" fmla="val 12000"/>
-            </a:avLst>
-          </a:prstGeom>
-          <a:solidFill>
-            <a:srgbClr val="095292"/>
-          </a:solidFill>
-          <a:ln>
-            <a:noFill/>
-          </a:ln>
-        </p:spPr>
-        <p:style>
-          <a:lnRef idx="1">
-            <a:schemeClr val="accent1"/>
-          </a:lnRef>
-          <a:fillRef idx="3">
-            <a:schemeClr val="accent1"/>
-          </a:fillRef>
-          <a:effectRef idx="2">
-            <a:schemeClr val="accent1"/>
-          </a:effectRef>
-          <a:fontRef idx="minor">
-            <a:schemeClr val="lt1"/>
-          </a:fontRef>
-        </p:style>
-        <p:txBody>
-          <a:bodyPr rtlCol="0" anchor="ctr"/>
-          <a:lstStyle/>
-          <a:p>
-            <a:pPr algn="ctr"/>
-          </a:p>
-        </p:txBody>
-      </p:sp>
-      <p:sp>
-        <p:nvSpPr>
-          <p:cNvPr id="23" name="TextBox 22"/>
-          <p:cNvSpPr txBox="1"/>
-          <p:nvPr/>
-        </p:nvSpPr>
-        <p:spPr>
-          <a:xfrm>
-            <a:off x="594360" y="5660136"/>
-            <a:ext cx="438912" cy="438912"/>
-          </a:xfrm>
-          <a:prstGeom prst="rect">
-            <a:avLst/>
-          </a:prstGeom>
-          <a:noFill/>
-        </p:spPr>
-        <p:txBody>
-          <a:bodyPr wrap="square" anchor="ctr"/>
-          <a:lstStyle/>
-          <a:p>
-            <a:pPr algn="ctr"/>
-            <a:r>
-              <a:rPr sz="1600" b="1" i="0">
-                <a:solidFill>
-                  <a:srgbClr val="FFFFFF"/>
-                </a:solidFill>
-                <a:latin typeface="Calibri"/>
-              </a:rPr>
-              <a:t>5</a:t>
-            </a:r>
-          </a:p>
-        </p:txBody>
-      </p:sp>
-      <p:sp>
-        <p:nvSpPr>
-          <p:cNvPr id="24" name="TextBox 23"/>
-          <p:cNvSpPr txBox="1"/>
-          <p:nvPr/>
-        </p:nvSpPr>
-        <p:spPr>
-          <a:xfrm>
-            <a:off x="1188720" y="5495544"/>
-            <a:ext cx="10271455" cy="786384"/>
-          </a:xfrm>
-          <a:prstGeom prst="rect">
-            <a:avLst/>
-          </a:prstGeom>
-          <a:noFill/>
-        </p:spPr>
-        <p:txBody>
-          <a:bodyPr wrap="square" anchor="ctr"/>
-          <a:lstStyle/>
-          <a:p>
-            <a:r>
-              <a:rPr sz="1400" b="1" i="0">
-                <a:solidFill>
-                  <a:srgbClr val="095292"/>
-                </a:solidFill>
-                <a:latin typeface="Calibri"/>
-              </a:rPr>
-              <a:t>Dibujar el diagrama de actividad del proceso de atencion en el consultorio con cuatro calles (Propietario, Recepcionista, Veterinario y Sistema VetCare), con minimo dos nodos de decision y una bifurcacion en paralelo, y exportar todo a PDF para subirlo a la plataforma del curso.</a:t>
-            </a:r>
-          </a:p>
-        </p:txBody>
-      </p:sp>
-      <p:sp>
-        <p:nvSpPr>
-          <p:cNvPr id="25" name="TextBox 24"/>
+              <a:t>la plataforma del curso</a:t>
+            </a:r>
+          </a:p>
+          <a:p>
+            <a:pPr algn="ctr">
+              <a:spcBef>
+                <a:spcPts val="200"/>
+              </a:spcBef>
+            </a:pPr>
+            <a:r>
+              <a:rPr sz="1000" b="0" i="0">
+                <a:solidFill>
+                  <a:srgbClr val="666666"/>
+                </a:solidFill>
+                <a:latin typeface="Calibri"/>
+              </a:rPr>
+              <a:t>Entrega del taller · en la fecha que indique el docente</a:t>
+            </a:r>
+          </a:p>
+        </p:txBody>
+      </p:sp>
+      <p:sp>
+        <p:nvSpPr>
+          <p:cNvPr id="21" name="TextBox 20"/>
           <p:cNvSpPr txBox="1"/>
           <p:nvPr/>
         </p:nvSpPr>
@@ -7694,154 +7831,21 @@
                 </a:solidFill>
                 <a:latin typeface="Calibri"/>
               </a:rPr>
-              <a:t>Antes de entregar — autochequeo</a:t>
-            </a:r>
-          </a:p>
-        </p:txBody>
-      </p:sp>
-      <p:sp>
-        <p:nvSpPr>
-          <p:cNvPr id="5" name="Rounded Rectangle 4"/>
-          <p:cNvSpPr/>
-          <p:nvPr/>
-        </p:nvSpPr>
-        <p:spPr>
-          <a:xfrm>
-            <a:off x="457200" y="1261872"/>
-            <a:ext cx="11277295" cy="566928"/>
-          </a:xfrm>
-          <a:prstGeom prst="roundRect">
-            <a:avLst>
-              <a:gd name="adj" fmla="val 12000"/>
-            </a:avLst>
-          </a:prstGeom>
-          <a:solidFill>
-            <a:srgbClr val="F2F2F2"/>
-          </a:solidFill>
-          <a:ln>
-            <a:noFill/>
-          </a:ln>
-        </p:spPr>
-        <p:style>
-          <a:lnRef idx="1">
-            <a:schemeClr val="accent1"/>
-          </a:lnRef>
-          <a:fillRef idx="3">
-            <a:schemeClr val="accent1"/>
-          </a:fillRef>
-          <a:effectRef idx="2">
-            <a:schemeClr val="accent1"/>
-          </a:effectRef>
-          <a:fontRef idx="minor">
-            <a:schemeClr val="lt1"/>
-          </a:fontRef>
-        </p:style>
-        <p:txBody>
-          <a:bodyPr rtlCol="0" anchor="ctr"/>
-          <a:lstStyle/>
-          <a:p>
-            <a:pPr algn="ctr"/>
-          </a:p>
-        </p:txBody>
-      </p:sp>
-      <p:sp>
-        <p:nvSpPr>
-          <p:cNvPr id="6" name="Rectangle 5"/>
-          <p:cNvSpPr/>
-          <p:nvPr/>
-        </p:nvSpPr>
-        <p:spPr>
-          <a:xfrm>
-            <a:off x="640080" y="1408175"/>
-            <a:ext cx="274320" cy="274320"/>
-          </a:xfrm>
-          <a:prstGeom prst="rect">
-            <a:avLst/>
-          </a:prstGeom>
-          <a:solidFill>
-            <a:srgbClr val="FFFFFF"/>
-          </a:solidFill>
-          <a:ln>
-            <a:solidFill>
-              <a:srgbClr val="333333"/>
-            </a:solidFill>
-          </a:ln>
-        </p:spPr>
-        <p:style>
-          <a:lnRef idx="1">
-            <a:schemeClr val="accent1"/>
-          </a:lnRef>
-          <a:fillRef idx="3">
-            <a:schemeClr val="accent1"/>
-          </a:fillRef>
-          <a:effectRef idx="2">
-            <a:schemeClr val="accent1"/>
-          </a:effectRef>
-          <a:fontRef idx="minor">
-            <a:schemeClr val="lt1"/>
-          </a:fontRef>
-        </p:style>
-        <p:txBody>
-          <a:bodyPr rtlCol="0" anchor="ctr"/>
-          <a:lstStyle/>
-          <a:p>
-            <a:pPr algn="ctr"/>
-          </a:p>
-        </p:txBody>
-      </p:sp>
-      <p:sp>
-        <p:nvSpPr>
-          <p:cNvPr id="7" name="Rectangle 6"/>
-          <p:cNvSpPr/>
-          <p:nvPr/>
-        </p:nvSpPr>
-        <p:spPr>
-          <a:xfrm>
-            <a:off x="640080" y="1408175"/>
-            <a:ext cx="73152" cy="274320"/>
-          </a:xfrm>
-          <a:prstGeom prst="rect">
-            <a:avLst/>
-          </a:prstGeom>
-          <a:solidFill>
-            <a:srgbClr val="269CCB"/>
-          </a:solidFill>
-          <a:ln>
-            <a:noFill/>
-          </a:ln>
-        </p:spPr>
-        <p:style>
-          <a:lnRef idx="1">
-            <a:schemeClr val="accent1"/>
-          </a:lnRef>
-          <a:fillRef idx="3">
-            <a:schemeClr val="accent1"/>
-          </a:fillRef>
-          <a:effectRef idx="2">
-            <a:schemeClr val="accent1"/>
-          </a:effectRef>
-          <a:fontRef idx="minor">
-            <a:schemeClr val="lt1"/>
-          </a:fontRef>
-        </p:style>
-        <p:txBody>
-          <a:bodyPr rtlCol="0" anchor="ctr"/>
-          <a:lstStyle/>
-          <a:p>
-            <a:pPr algn="ctr"/>
-          </a:p>
-        </p:txBody>
-      </p:sp>
-      <p:sp>
-        <p:nvSpPr>
-          <p:cNvPr id="8" name="TextBox 7"/>
+              <a:t>Taller PI — por que importa</a:t>
+            </a:r>
+          </a:p>
+        </p:txBody>
+      </p:sp>
+      <p:sp>
+        <p:nvSpPr>
+          <p:cNvPr id="5" name="TextBox 4"/>
           <p:cNvSpPr txBox="1"/>
           <p:nvPr/>
         </p:nvSpPr>
         <p:spPr>
           <a:xfrm>
-            <a:off x="1097280" y="1353312"/>
-            <a:ext cx="10362895" cy="402336"/>
+            <a:off x="457200" y="1170432"/>
+            <a:ext cx="11277295" cy="5230368"/>
           </a:xfrm>
           <a:prstGeom prst="rect">
             <a:avLst/>
@@ -7849,354 +7853,81 @@
           <a:noFill/>
         </p:spPr>
         <p:txBody>
-          <a:bodyPr wrap="square" anchor="ctr"/>
-          <a:lstStyle/>
-          <a:p>
-            <a:r>
-              <a:rPr sz="1500" b="0" i="0">
+          <a:bodyPr wrap="square">
+            <a:spAutoFit/>
+          </a:bodyPr>
+          <a:lstStyle/>
+          <a:p>
+            <a:pPr>
+              <a:spcAft>
+                <a:spcPts val="800"/>
+              </a:spcAft>
+            </a:pPr>
+            <a:r>
+              <a:rPr sz="2000" b="0" i="0">
                 <a:solidFill>
                   <a:srgbClr val="333333"/>
                 </a:solidFill>
                 <a:latin typeface="Calibri"/>
               </a:rPr>
-              <a:t>Si sigue las flechas de su diagrama de arriba hacia abajo, obtiene exactamente el mismo relato que ya escribio en el flujo principal del caso de uso?</a:t>
-            </a:r>
-          </a:p>
-        </p:txBody>
-      </p:sp>
-      <p:sp>
-        <p:nvSpPr>
-          <p:cNvPr id="9" name="Rounded Rectangle 8"/>
-          <p:cNvSpPr/>
-          <p:nvPr/>
-        </p:nvSpPr>
-        <p:spPr>
-          <a:xfrm>
-            <a:off x="457200" y="1938528"/>
-            <a:ext cx="11277295" cy="566928"/>
-          </a:xfrm>
-          <a:prstGeom prst="roundRect">
-            <a:avLst>
-              <a:gd name="adj" fmla="val 12000"/>
-            </a:avLst>
-          </a:prstGeom>
-          <a:solidFill>
-            <a:srgbClr val="F2F2F2"/>
-          </a:solidFill>
-          <a:ln>
-            <a:noFill/>
-          </a:ln>
-        </p:spPr>
-        <p:style>
-          <a:lnRef idx="1">
-            <a:schemeClr val="accent1"/>
-          </a:lnRef>
-          <a:fillRef idx="3">
-            <a:schemeClr val="accent1"/>
-          </a:fillRef>
-          <a:effectRef idx="2">
-            <a:schemeClr val="accent1"/>
-          </a:effectRef>
-          <a:fontRef idx="minor">
-            <a:schemeClr val="lt1"/>
-          </a:fontRef>
-        </p:style>
-        <p:txBody>
-          <a:bodyPr rtlCol="0" anchor="ctr"/>
-          <a:lstStyle/>
-          <a:p>
-            <a:pPr algn="ctr"/>
-          </a:p>
-        </p:txBody>
-      </p:sp>
-      <p:sp>
-        <p:nvSpPr>
-          <p:cNvPr id="10" name="Rectangle 9"/>
-          <p:cNvSpPr/>
-          <p:nvPr/>
-        </p:nvSpPr>
-        <p:spPr>
-          <a:xfrm>
-            <a:off x="640080" y="2084832"/>
-            <a:ext cx="274320" cy="274320"/>
-          </a:xfrm>
-          <a:prstGeom prst="rect">
-            <a:avLst/>
-          </a:prstGeom>
-          <a:solidFill>
-            <a:srgbClr val="FFFFFF"/>
-          </a:solidFill>
-          <a:ln>
-            <a:solidFill>
-              <a:srgbClr val="333333"/>
-            </a:solidFill>
-          </a:ln>
-        </p:spPr>
-        <p:style>
-          <a:lnRef idx="1">
-            <a:schemeClr val="accent1"/>
-          </a:lnRef>
-          <a:fillRef idx="3">
-            <a:schemeClr val="accent1"/>
-          </a:fillRef>
-          <a:effectRef idx="2">
-            <a:schemeClr val="accent1"/>
-          </a:effectRef>
-          <a:fontRef idx="minor">
-            <a:schemeClr val="lt1"/>
-          </a:fontRef>
-        </p:style>
-        <p:txBody>
-          <a:bodyPr rtlCol="0" anchor="ctr"/>
-          <a:lstStyle/>
-          <a:p>
-            <a:pPr algn="ctr"/>
-          </a:p>
-        </p:txBody>
-      </p:sp>
-      <p:sp>
-        <p:nvSpPr>
-          <p:cNvPr id="11" name="Rectangle 10"/>
-          <p:cNvSpPr/>
-          <p:nvPr/>
-        </p:nvSpPr>
-        <p:spPr>
-          <a:xfrm>
-            <a:off x="640080" y="2084832"/>
-            <a:ext cx="73152" cy="274320"/>
-          </a:xfrm>
-          <a:prstGeom prst="rect">
-            <a:avLst/>
-          </a:prstGeom>
-          <a:solidFill>
-            <a:srgbClr val="269CCB"/>
-          </a:solidFill>
-          <a:ln>
-            <a:noFill/>
-          </a:ln>
-        </p:spPr>
-        <p:style>
-          <a:lnRef idx="1">
-            <a:schemeClr val="accent1"/>
-          </a:lnRef>
-          <a:fillRef idx="3">
-            <a:schemeClr val="accent1"/>
-          </a:fillRef>
-          <a:effectRef idx="2">
-            <a:schemeClr val="accent1"/>
-          </a:effectRef>
-          <a:fontRef idx="minor">
-            <a:schemeClr val="lt1"/>
-          </a:fontRef>
-        </p:style>
-        <p:txBody>
-          <a:bodyPr rtlCol="0" anchor="ctr"/>
-          <a:lstStyle/>
-          <a:p>
-            <a:pPr algn="ctr"/>
-          </a:p>
-        </p:txBody>
-      </p:sp>
-      <p:sp>
-        <p:nvSpPr>
-          <p:cNvPr id="12" name="TextBox 11"/>
-          <p:cNvSpPr txBox="1"/>
-          <p:nvPr/>
-        </p:nvSpPr>
-        <p:spPr>
-          <a:xfrm>
-            <a:off x="1097280" y="2029968"/>
-            <a:ext cx="10362895" cy="402336"/>
-          </a:xfrm>
-          <a:prstGeom prst="rect">
-            <a:avLst/>
-          </a:prstGeom>
-          <a:noFill/>
-        </p:spPr>
-        <p:txBody>
-          <a:bodyPr wrap="square" anchor="ctr"/>
-          <a:lstStyle/>
-          <a:p>
-            <a:r>
-              <a:rPr sz="1500" b="0" i="0">
+              <a:t>–   </a:t>
+            </a:r>
+            <a:r>
+              <a:rPr sz="2000" b="1" i="0">
                 <a:solidFill>
                   <a:srgbClr val="333333"/>
                 </a:solidFill>
                 <a:latin typeface="Calibri"/>
               </a:rPr>
-              <a:t>Cada participante de su diagrama existe como clase en el modelo, o dibujo cajas como Base de datos y Sistema que nadie puede implementar?</a:t>
-            </a:r>
-          </a:p>
-        </p:txBody>
-      </p:sp>
-      <p:sp>
-        <p:nvSpPr>
-          <p:cNvPr id="13" name="Rounded Rectangle 12"/>
-          <p:cNvSpPr/>
-          <p:nvPr/>
-        </p:nvSpPr>
-        <p:spPr>
-          <a:xfrm>
-            <a:off x="457200" y="2615184"/>
-            <a:ext cx="11277295" cy="566928"/>
-          </a:xfrm>
-          <a:prstGeom prst="roundRect">
-            <a:avLst>
-              <a:gd name="adj" fmla="val 12000"/>
-            </a:avLst>
-          </a:prstGeom>
-          <a:solidFill>
-            <a:srgbClr val="F2F2F2"/>
-          </a:solidFill>
-          <a:ln>
-            <a:noFill/>
-          </a:ln>
-        </p:spPr>
-        <p:style>
-          <a:lnRef idx="1">
-            <a:schemeClr val="accent1"/>
-          </a:lnRef>
-          <a:fillRef idx="3">
-            <a:schemeClr val="accent1"/>
-          </a:fillRef>
-          <a:effectRef idx="2">
-            <a:schemeClr val="accent1"/>
-          </a:effectRef>
-          <a:fontRef idx="minor">
-            <a:schemeClr val="lt1"/>
-          </a:fontRef>
-        </p:style>
-        <p:txBody>
-          <a:bodyPr rtlCol="0" anchor="ctr"/>
-          <a:lstStyle/>
-          <a:p>
-            <a:pPr algn="ctr"/>
-          </a:p>
-        </p:txBody>
-      </p:sp>
-      <p:sp>
-        <p:nvSpPr>
-          <p:cNvPr id="14" name="Rectangle 13"/>
-          <p:cNvSpPr/>
-          <p:nvPr/>
-        </p:nvSpPr>
-        <p:spPr>
-          <a:xfrm>
-            <a:off x="640080" y="2761488"/>
-            <a:ext cx="274320" cy="274320"/>
-          </a:xfrm>
-          <a:prstGeom prst="rect">
-            <a:avLst/>
-          </a:prstGeom>
-          <a:solidFill>
-            <a:srgbClr val="FFFFFF"/>
-          </a:solidFill>
-          <a:ln>
-            <a:solidFill>
-              <a:srgbClr val="333333"/>
-            </a:solidFill>
-          </a:ln>
-        </p:spPr>
-        <p:style>
-          <a:lnRef idx="1">
-            <a:schemeClr val="accent1"/>
-          </a:lnRef>
-          <a:fillRef idx="3">
-            <a:schemeClr val="accent1"/>
-          </a:fillRef>
-          <a:effectRef idx="2">
-            <a:schemeClr val="accent1"/>
-          </a:effectRef>
-          <a:fontRef idx="minor">
-            <a:schemeClr val="lt1"/>
-          </a:fontRef>
-        </p:style>
-        <p:txBody>
-          <a:bodyPr rtlCol="0" anchor="ctr"/>
-          <a:lstStyle/>
-          <a:p>
-            <a:pPr algn="ctr"/>
-          </a:p>
-        </p:txBody>
-      </p:sp>
-      <p:sp>
-        <p:nvSpPr>
-          <p:cNvPr id="15" name="Rectangle 14"/>
-          <p:cNvSpPr/>
-          <p:nvPr/>
-        </p:nvSpPr>
-        <p:spPr>
-          <a:xfrm>
-            <a:off x="640080" y="2761488"/>
-            <a:ext cx="73152" cy="274320"/>
-          </a:xfrm>
-          <a:prstGeom prst="rect">
-            <a:avLst/>
-          </a:prstGeom>
-          <a:solidFill>
-            <a:srgbClr val="269CCB"/>
-          </a:solidFill>
-          <a:ln>
-            <a:noFill/>
-          </a:ln>
-        </p:spPr>
-        <p:style>
-          <a:lnRef idx="1">
-            <a:schemeClr val="accent1"/>
-          </a:lnRef>
-          <a:fillRef idx="3">
-            <a:schemeClr val="accent1"/>
-          </a:fillRef>
-          <a:effectRef idx="2">
-            <a:schemeClr val="accent1"/>
-          </a:effectRef>
-          <a:fontRef idx="minor">
-            <a:schemeClr val="lt1"/>
-          </a:fontRef>
-        </p:style>
-        <p:txBody>
-          <a:bodyPr rtlCol="0" anchor="ctr"/>
-          <a:lstStyle/>
-          <a:p>
-            <a:pPr algn="ctr"/>
-          </a:p>
-        </p:txBody>
-      </p:sp>
-      <p:sp>
-        <p:nvSpPr>
-          <p:cNvPr id="16" name="TextBox 15"/>
-          <p:cNvSpPr txBox="1"/>
-          <p:nvPr/>
-        </p:nvSpPr>
-        <p:spPr>
-          <a:xfrm>
-            <a:off x="1097280" y="2706624"/>
-            <a:ext cx="10362895" cy="402336"/>
-          </a:xfrm>
-          <a:prstGeom prst="rect">
-            <a:avLst/>
-          </a:prstGeom>
-          <a:noFill/>
-        </p:spPr>
-        <p:txBody>
-          <a:bodyPr wrap="square" anchor="ctr"/>
-          <a:lstStyle/>
-          <a:p>
-            <a:r>
-              <a:rPr sz="1500" b="0" i="0">
+              <a:t>Por que importa al PI:</a:t>
+            </a:r>
+            <a:r>
+              <a:rPr sz="2000" b="0" i="0">
                 <a:solidFill>
                   <a:srgbClr val="333333"/>
                 </a:solidFill>
                 <a:latin typeface="Calibri"/>
               </a:rPr>
-              <a:t>En su diagrama de actividad se puede saber, mirando solo la calle, quien es responsable de cada paso y cual de esos pasos ocurre sin tocar el computador?</a:t>
-            </a:r>
-          </a:p>
-        </p:txBody>
-      </p:sp>
-      <p:sp>
-        <p:nvSpPr>
-          <p:cNvPr id="17" name="TextBox 16"/>
+              <a:t> los casos de uso dicen que hace VetCare y el diagrama de clases dice de que esta hecho, pero solo los diagramas de secuencia y actividad muestran como colaboran las piezas en el tiempo, que es lo que necesita quien vaya a construirlo.</a:t>
+            </a:r>
+          </a:p>
+          <a:p>
+            <a:pPr>
+              <a:spcAft>
+                <a:spcPts val="800"/>
+              </a:spcAft>
+            </a:pPr>
+            <a:r>
+              <a:rPr sz="2000" b="0" i="0">
+                <a:solidFill>
+                  <a:srgbClr val="333333"/>
+                </a:solidFill>
+                <a:latin typeface="Calibri"/>
+              </a:rPr>
+              <a:t>–   Dibujar la secuencia es la forma mas barata de descubrir que al diagrama de clases le faltan operaciones, porque cada flecha exige un dueño que la pueda responder.</a:t>
+            </a:r>
+          </a:p>
+          <a:p>
+            <a:pPr>
+              <a:spcAft>
+                <a:spcPts val="800"/>
+              </a:spcAft>
+            </a:pPr>
+            <a:r>
+              <a:rPr sz="2000" b="0" i="0">
+                <a:solidFill>
+                  <a:srgbClr val="333333"/>
+                </a:solidFill>
+                <a:latin typeface="Calibri"/>
+              </a:rPr>
+              <a:t>–   El diagrama de actividad es el unico artefacto del paquete que muestra el trabajo humano de la clinica Huellitas, incluidas las esperas y las decisiones que ocurren fuera del computador.</a:t>
+            </a:r>
+          </a:p>
+        </p:txBody>
+      </p:sp>
+      <p:sp>
+        <p:nvSpPr>
+          <p:cNvPr id="6" name="TextBox 5"/>
           <p:cNvSpPr txBox="1"/>
           <p:nvPr/>
         </p:nvSpPr>
@@ -8701,7 +8432,7 @@
                 </a:solidFill>
                 <a:latin typeface="Calibri"/>
               </a:rPr>
-              <a:t>Criterios de exito / entregable</a:t>
+              <a:t>Taller PI — punto de partida</a:t>
             </a:r>
           </a:p>
         </p:txBody>
@@ -8740,25 +8471,7 @@
                 </a:solidFill>
                 <a:latin typeface="Calibri"/>
               </a:rPr>
-              <a:t>–   </a:t>
-            </a:r>
-            <a:r>
-              <a:rPr sz="2000" b="1" i="0">
-                <a:solidFill>
-                  <a:srgbClr val="333333"/>
-                </a:solidFill>
-                <a:latin typeface="Calibri"/>
-              </a:rPr>
-              <a:t>Entregable:</a:t>
-            </a:r>
-            <a:r>
-              <a:rPr sz="2000" b="0" i="0">
-                <a:solidFill>
-                  <a:srgbClr val="333333"/>
-                </a:solidFill>
-                <a:latin typeface="Calibri"/>
-              </a:rPr>
-              <a:t> Un PDF con el diagrama de secuencia de Agendar cita incluyendo el fragmento alt para horario ocupado, el diagrama de actividad del proceso de atencion con calles por rol, y la tabla que mapea cada mensaje del diagrama de secuencia a una operacion del diagrama de clases, subido a la plataforma del curso.</a:t>
+              <a:t>–   VetCare ya tiene casos de uso especificados y un diagrama de clases con multiplicidades, pero ningun documento explica el orden en que los objetos se comunican para cumplir un caso de uso.</a:t>
             </a:r>
           </a:p>
           <a:p>
@@ -8774,25 +8487,7 @@
                 </a:solidFill>
                 <a:latin typeface="Calibri"/>
               </a:rPr>
-              <a:t>–   </a:t>
-            </a:r>
-            <a:r>
-              <a:rPr sz="2000" b="1" i="0">
-                <a:solidFill>
-                  <a:srgbClr val="333333"/>
-                </a:solidFill>
-                <a:latin typeface="Calibri"/>
-              </a:rPr>
-              <a:t>Exito:</a:t>
-            </a:r>
-            <a:r>
-              <a:rPr sz="2000" b="0" i="0">
-                <a:solidFill>
-                  <a:srgbClr val="333333"/>
-                </a:solidFill>
-                <a:latin typeface="Calibri"/>
-              </a:rPr>
-              <a:t> El diagrama de secuencia reproduce el orden exacto del flujo principal de CU-04 y no inventa pasos que no esten en la especificacion.</a:t>
+              <a:t>–   En Huellitas, agendar una cita depende de la disponibilidad del veterinario y hoy eso se resuelve preguntando en voz alta al fondo del consultorio, sin ninguna regla escrita.</a:t>
             </a:r>
           </a:p>
           <a:p>
@@ -8808,127 +8503,7 @@
                 </a:solidFill>
                 <a:latin typeface="Calibri"/>
               </a:rPr>
-              <a:t>–   </a:t>
-            </a:r>
-            <a:r>
-              <a:rPr sz="2000" b="1" i="0">
-                <a:solidFill>
-                  <a:srgbClr val="333333"/>
-                </a:solidFill>
-                <a:latin typeface="Calibri"/>
-              </a:rPr>
-              <a:t>Exito:</a:t>
-            </a:r>
-            <a:r>
-              <a:rPr sz="2000" b="0" i="0">
-                <a:solidFill>
-                  <a:srgbClr val="333333"/>
-                </a:solidFill>
-                <a:latin typeface="Calibri"/>
-              </a:rPr>
-              <a:t> Todos los participantes del diagrama corresponden a actores legitimos o a clases existentes en el diagrama de clases, y aparecen las flechas de retorno con el dato que devuelven.</a:t>
-            </a:r>
-          </a:p>
-          <a:p>
-            <a:pPr>
-              <a:spcAft>
-                <a:spcPts val="800"/>
-              </a:spcAft>
-            </a:pPr>
-            <a:r>
-              <a:rPr sz="2000" b="0" i="0">
-                <a:solidFill>
-                  <a:srgbClr val="333333"/>
-                </a:solidFill>
-                <a:latin typeface="Calibri"/>
-              </a:rPr>
-              <a:t>–   </a:t>
-            </a:r>
-            <a:r>
-              <a:rPr sz="2000" b="1" i="0">
-                <a:solidFill>
-                  <a:srgbClr val="333333"/>
-                </a:solidFill>
-                <a:latin typeface="Calibri"/>
-              </a:rPr>
-              <a:t>Exito:</a:t>
-            </a:r>
-            <a:r>
-              <a:rPr sz="2000" b="0" i="0">
-                <a:solidFill>
-                  <a:srgbClr val="333333"/>
-                </a:solidFill>
-                <a:latin typeface="Calibri"/>
-              </a:rPr>
-              <a:t> Existe al menos un fragmento alt con sus dos condiciones de guarda escritas, coherente con un flujo alterno ya documentado.</a:t>
-            </a:r>
-          </a:p>
-          <a:p>
-            <a:pPr>
-              <a:spcAft>
-                <a:spcPts val="800"/>
-              </a:spcAft>
-            </a:pPr>
-            <a:r>
-              <a:rPr sz="2000" b="0" i="0">
-                <a:solidFill>
-                  <a:srgbClr val="333333"/>
-                </a:solidFill>
-                <a:latin typeface="Calibri"/>
-              </a:rPr>
-              <a:t>–   </a:t>
-            </a:r>
-            <a:r>
-              <a:rPr sz="2000" b="1" i="0">
-                <a:solidFill>
-                  <a:srgbClr val="333333"/>
-                </a:solidFill>
-                <a:latin typeface="Calibri"/>
-              </a:rPr>
-              <a:t>Exito:</a:t>
-            </a:r>
-            <a:r>
-              <a:rPr sz="2000" b="0" i="0">
-                <a:solidFill>
-                  <a:srgbClr val="333333"/>
-                </a:solidFill>
-                <a:latin typeface="Calibri"/>
-              </a:rPr>
-              <a:t> El diagrama de actividad tiene calles por rol, minimo dos decisiones con condiciones entre corchetes y una bifurcacion en paralelo, y la tabla de mapeo mensaje a operacion no tiene filas incompletas.</a:t>
-            </a:r>
-          </a:p>
-          <a:p>
-            <a:pPr>
-              <a:spcAft>
-                <a:spcPts val="800"/>
-              </a:spcAft>
-            </a:pPr>
-            <a:r>
-              <a:rPr sz="2000" b="0" i="0">
-                <a:solidFill>
-                  <a:srgbClr val="333333"/>
-                </a:solidFill>
-                <a:latin typeface="Calibri"/>
-              </a:rPr>
-              <a:t>–   </a:t>
-            </a:r>
-            <a:r>
-              <a:rPr sz="2000" b="1" i="0">
-                <a:solidFill>
-                  <a:srgbClr val="333333"/>
-                </a:solidFill>
-                <a:latin typeface="Calibri"/>
-              </a:rPr>
-              <a:t>Entrega en la plataforma del curso</a:t>
-            </a:r>
-            <a:r>
-              <a:rPr sz="2000" b="0" i="0">
-                <a:solidFill>
-                  <a:srgbClr val="333333"/>
-                </a:solidFill>
-                <a:latin typeface="Calibri"/>
-              </a:rPr>
-              <a:t> — en la fecha que indique el docente.</a:t>
+              <a:t>–   El equipo tiende a dibujar cajas y flechas por intuicion, sin volver a mirar el flujo principal que ya habia escrito hace tres sesiones.</a:t>
             </a:r>
           </a:p>
         </p:txBody>
@@ -9109,7 +8684,7 @@
                 </a:solidFill>
                 <a:latin typeface="Calibri"/>
               </a:rPr>
-              <a:t>Para el PI esta semana</a:t>
+              <a:t>Taller PI — pasos guiados</a:t>
             </a:r>
           </a:p>
         </p:txBody>
@@ -9122,8 +8697,163 @@
         </p:nvSpPr>
         <p:spPr>
           <a:xfrm>
-            <a:off x="457200" y="1261872"/>
-            <a:ext cx="11277295" cy="1051560"/>
+            <a:off x="457200" y="1234440"/>
+            <a:ext cx="11277295" cy="950976"/>
+          </a:xfrm>
+          <a:prstGeom prst="roundRect">
+            <a:avLst>
+              <a:gd name="adj" fmla="val 12000"/>
+            </a:avLst>
+          </a:prstGeom>
+          <a:solidFill>
+            <a:srgbClr val="F2F2F2"/>
+          </a:solidFill>
+          <a:ln>
+            <a:noFill/>
+          </a:ln>
+        </p:spPr>
+        <p:style>
+          <a:lnRef idx="1">
+            <a:schemeClr val="accent1"/>
+          </a:lnRef>
+          <a:fillRef idx="3">
+            <a:schemeClr val="accent1"/>
+          </a:fillRef>
+          <a:effectRef idx="2">
+            <a:schemeClr val="accent1"/>
+          </a:effectRef>
+          <a:fontRef idx="minor">
+            <a:schemeClr val="lt1"/>
+          </a:fontRef>
+        </p:style>
+        <p:txBody>
+          <a:bodyPr rtlCol="0" anchor="ctr"/>
+          <a:lstStyle/>
+          <a:p>
+            <a:pPr algn="ctr"/>
+          </a:p>
+        </p:txBody>
+      </p:sp>
+      <p:sp>
+        <p:nvSpPr>
+          <p:cNvPr id="6" name="Rounded Rectangle 5"/>
+          <p:cNvSpPr/>
+          <p:nvPr/>
+        </p:nvSpPr>
+        <p:spPr>
+          <a:xfrm>
+            <a:off x="594360" y="1490472"/>
+            <a:ext cx="438912" cy="438912"/>
+          </a:xfrm>
+          <a:prstGeom prst="roundRect">
+            <a:avLst>
+              <a:gd name="adj" fmla="val 12000"/>
+            </a:avLst>
+          </a:prstGeom>
+          <a:solidFill>
+            <a:srgbClr val="095292"/>
+          </a:solidFill>
+          <a:ln>
+            <a:noFill/>
+          </a:ln>
+        </p:spPr>
+        <p:style>
+          <a:lnRef idx="1">
+            <a:schemeClr val="accent1"/>
+          </a:lnRef>
+          <a:fillRef idx="3">
+            <a:schemeClr val="accent1"/>
+          </a:fillRef>
+          <a:effectRef idx="2">
+            <a:schemeClr val="accent1"/>
+          </a:effectRef>
+          <a:fontRef idx="minor">
+            <a:schemeClr val="lt1"/>
+          </a:fontRef>
+        </p:style>
+        <p:txBody>
+          <a:bodyPr rtlCol="0" anchor="ctr"/>
+          <a:lstStyle/>
+          <a:p>
+            <a:pPr algn="ctr"/>
+          </a:p>
+        </p:txBody>
+      </p:sp>
+      <p:sp>
+        <p:nvSpPr>
+          <p:cNvPr id="7" name="TextBox 6"/>
+          <p:cNvSpPr txBox="1"/>
+          <p:nvPr/>
+        </p:nvSpPr>
+        <p:spPr>
+          <a:xfrm>
+            <a:off x="594360" y="1490472"/>
+            <a:ext cx="438912" cy="438912"/>
+          </a:xfrm>
+          <a:prstGeom prst="rect">
+            <a:avLst/>
+          </a:prstGeom>
+          <a:noFill/>
+        </p:spPr>
+        <p:txBody>
+          <a:bodyPr wrap="square" anchor="ctr"/>
+          <a:lstStyle/>
+          <a:p>
+            <a:pPr algn="ctr"/>
+            <a:r>
+              <a:rPr sz="1600" b="1" i="0">
+                <a:solidFill>
+                  <a:srgbClr val="FFFFFF"/>
+                </a:solidFill>
+                <a:latin typeface="Calibri"/>
+              </a:rPr>
+              <a:t>1</a:t>
+            </a:r>
+          </a:p>
+        </p:txBody>
+      </p:sp>
+      <p:sp>
+        <p:nvSpPr>
+          <p:cNvPr id="8" name="TextBox 7"/>
+          <p:cNvSpPr txBox="1"/>
+          <p:nvPr/>
+        </p:nvSpPr>
+        <p:spPr>
+          <a:xfrm>
+            <a:off x="1188720" y="1325880"/>
+            <a:ext cx="10271455" cy="786384"/>
+          </a:xfrm>
+          <a:prstGeom prst="rect">
+            <a:avLst/>
+          </a:prstGeom>
+          <a:noFill/>
+        </p:spPr>
+        <p:txBody>
+          <a:bodyPr wrap="square" anchor="ctr"/>
+          <a:lstStyle/>
+          <a:p>
+            <a:r>
+              <a:rPr sz="1400" b="1" i="0">
+                <a:solidFill>
+                  <a:srgbClr val="095292"/>
+                </a:solidFill>
+                <a:latin typeface="Calibri"/>
+              </a:rPr>
+              <a:t>Tomar el flujo principal escrito de CU-04 Agendar cita, y si todavia no esta especificado diligenciar primero la plantilla de la clase nueve, para luego numerar en el documento cual paso genera cual mensaje, de manera que quede una lista de entre seis y ocho mensajes antes de dibujar cualquier cosa.</a:t>
+            </a:r>
+          </a:p>
+        </p:txBody>
+      </p:sp>
+      <p:sp>
+        <p:nvSpPr>
+          <p:cNvPr id="9" name="Rounded Rectangle 8"/>
+          <p:cNvSpPr/>
+          <p:nvPr/>
+        </p:nvSpPr>
+        <p:spPr>
+          <a:xfrm>
+            <a:off x="457200" y="2276856"/>
+            <a:ext cx="11277295" cy="950976"/>
           </a:xfrm>
           <a:prstGeom prst="roundRect">
             <a:avLst>
@@ -9161,20 +8891,22 @@
       </p:sp>
       <p:sp>
         <p:nvSpPr>
-          <p:cNvPr id="6" name="Rectangle 5"/>
+          <p:cNvPr id="10" name="Rounded Rectangle 9"/>
           <p:cNvSpPr/>
           <p:nvPr/>
         </p:nvSpPr>
         <p:spPr>
           <a:xfrm>
-            <a:off x="457200" y="1261872"/>
-            <a:ext cx="128016" cy="1051560"/>
-          </a:xfrm>
-          <a:prstGeom prst="rect">
-            <a:avLst/>
+            <a:off x="594360" y="2532888"/>
+            <a:ext cx="438912" cy="438912"/>
+          </a:xfrm>
+          <a:prstGeom prst="roundRect">
+            <a:avLst>
+              <a:gd name="adj" fmla="val 12000"/>
+            </a:avLst>
           </a:prstGeom>
           <a:solidFill>
-            <a:srgbClr val="269CCB"/>
+            <a:srgbClr val="095292"/>
           </a:solidFill>
           <a:ln>
             <a:noFill/>
@@ -9204,14 +8936,14 @@
       </p:sp>
       <p:sp>
         <p:nvSpPr>
-          <p:cNvPr id="7" name="TextBox 6"/>
+          <p:cNvPr id="11" name="TextBox 10"/>
           <p:cNvSpPr txBox="1"/>
           <p:nvPr/>
         </p:nvSpPr>
         <p:spPr>
           <a:xfrm>
-            <a:off x="777240" y="1399031"/>
-            <a:ext cx="10774375" cy="822959"/>
+            <a:off x="594360" y="2532888"/>
+            <a:ext cx="438912" cy="438912"/>
           </a:xfrm>
           <a:prstGeom prst="rect">
             <a:avLst/>
@@ -9219,49 +8951,64 @@
           <a:noFill/>
         </p:spPr>
         <p:txBody>
-          <a:bodyPr wrap="square">
-            <a:spAutoFit/>
-          </a:bodyPr>
-          <a:lstStyle/>
-          <a:p>
-            <a:r>
-              <a:rPr sz="1200" b="1" i="0">
-                <a:solidFill>
-                  <a:srgbClr val="269CCB"/>
-                </a:solidFill>
-                <a:latin typeface="Calibri"/>
-              </a:rPr>
-              <a:t>Info</a:t>
-            </a:r>
-          </a:p>
-          <a:p>
-            <a:pPr>
-              <a:spcBef>
-                <a:spcPts val="400"/>
-              </a:spcBef>
-            </a:pPr>
-            <a:r>
-              <a:rPr sz="1400" b="0" i="0">
-                <a:solidFill>
-                  <a:srgbClr val="333333"/>
-                </a:solidFill>
-                <a:latin typeface="Calibri"/>
-              </a:rPr>
-              <a:t>Hito: Queda modelada la dinamica de VetCare: el diagrama de secuencia del caso de uso Agendar cita y el diagrama de actividad del proceso de atencion en el consultorio.</a:t>
-            </a:r>
-          </a:p>
-        </p:txBody>
-      </p:sp>
-      <p:sp>
-        <p:nvSpPr>
-          <p:cNvPr id="8" name="Rounded Rectangle 7"/>
+          <a:bodyPr wrap="square" anchor="ctr"/>
+          <a:lstStyle/>
+          <a:p>
+            <a:pPr algn="ctr"/>
+            <a:r>
+              <a:rPr sz="1600" b="1" i="0">
+                <a:solidFill>
+                  <a:srgbClr val="FFFFFF"/>
+                </a:solidFill>
+                <a:latin typeface="Calibri"/>
+              </a:rPr>
+              <a:t>2</a:t>
+            </a:r>
+          </a:p>
+        </p:txBody>
+      </p:sp>
+      <p:sp>
+        <p:nvSpPr>
+          <p:cNvPr id="12" name="TextBox 11"/>
+          <p:cNvSpPr txBox="1"/>
+          <p:nvPr/>
+        </p:nvSpPr>
+        <p:spPr>
+          <a:xfrm>
+            <a:off x="1188720" y="2368296"/>
+            <a:ext cx="10271455" cy="786384"/>
+          </a:xfrm>
+          <a:prstGeom prst="rect">
+            <a:avLst/>
+          </a:prstGeom>
+          <a:noFill/>
+        </p:spPr>
+        <p:txBody>
+          <a:bodyPr wrap="square" anchor="ctr"/>
+          <a:lstStyle/>
+          <a:p>
+            <a:r>
+              <a:rPr sz="1400" b="1" i="0">
+                <a:solidFill>
+                  <a:srgbClr val="095292"/>
+                </a:solidFill>
+                <a:latin typeface="Calibri"/>
+              </a:rPr>
+              <a:t>Dibujar el diagrama de secuencia en Mermaid Live Editor o draw.io con la recepcionista como actor y minimo tres participantes que correspondan a clases reales del diagrama de clases de VetCare, incluyendo las flechas de retorno con el dato que devuelven.</a:t>
+            </a:r>
+          </a:p>
+        </p:txBody>
+      </p:sp>
+      <p:sp>
+        <p:nvSpPr>
+          <p:cNvPr id="13" name="Rounded Rectangle 12"/>
           <p:cNvSpPr/>
           <p:nvPr/>
         </p:nvSpPr>
         <p:spPr>
           <a:xfrm>
-            <a:off x="457200" y="2478024"/>
-            <a:ext cx="11277295" cy="1051560"/>
+            <a:off x="457200" y="3319272"/>
+            <a:ext cx="11277295" cy="950976"/>
           </a:xfrm>
           <a:prstGeom prst="roundRect">
             <a:avLst>
@@ -9269,7 +9016,7 @@
             </a:avLst>
           </a:prstGeom>
           <a:solidFill>
-            <a:srgbClr val="FFF8E1"/>
+            <a:srgbClr val="F2F2F2"/>
           </a:solidFill>
           <a:ln>
             <a:noFill/>
@@ -9299,20 +9046,22 @@
       </p:sp>
       <p:sp>
         <p:nvSpPr>
-          <p:cNvPr id="9" name="Rectangle 8"/>
+          <p:cNvPr id="14" name="Rounded Rectangle 13"/>
           <p:cNvSpPr/>
           <p:nvPr/>
         </p:nvSpPr>
         <p:spPr>
           <a:xfrm>
-            <a:off x="457200" y="2478024"/>
-            <a:ext cx="128016" cy="1051560"/>
-          </a:xfrm>
-          <a:prstGeom prst="rect">
-            <a:avLst/>
+            <a:off x="594360" y="3575304"/>
+            <a:ext cx="438912" cy="438912"/>
+          </a:xfrm>
+          <a:prstGeom prst="roundRect">
+            <a:avLst>
+              <a:gd name="adj" fmla="val 12000"/>
+            </a:avLst>
           </a:prstGeom>
           <a:solidFill>
-            <a:srgbClr val="FFD000"/>
+            <a:srgbClr val="095292"/>
           </a:solidFill>
           <a:ln>
             <a:noFill/>
@@ -9342,14 +9091,14 @@
       </p:sp>
       <p:sp>
         <p:nvSpPr>
-          <p:cNvPr id="10" name="TextBox 9"/>
+          <p:cNvPr id="15" name="TextBox 14"/>
           <p:cNvSpPr txBox="1"/>
           <p:nvPr/>
         </p:nvSpPr>
         <p:spPr>
           <a:xfrm>
-            <a:off x="777240" y="2615184"/>
-            <a:ext cx="10774375" cy="822959"/>
+            <a:off x="594360" y="3575304"/>
+            <a:ext cx="438912" cy="438912"/>
           </a:xfrm>
           <a:prstGeom prst="rect">
             <a:avLst/>
@@ -9357,49 +9106,64 @@
           <a:noFill/>
         </p:spPr>
         <p:txBody>
-          <a:bodyPr wrap="square">
-            <a:spAutoFit/>
-          </a:bodyPr>
-          <a:lstStyle/>
-          <a:p>
-            <a:r>
-              <a:rPr sz="1200" b="1" i="0">
-                <a:solidFill>
-                  <a:srgbClr val="FFD000"/>
-                </a:solidFill>
-                <a:latin typeface="Calibri"/>
-              </a:rPr>
-              <a:t>Aclaración</a:t>
-            </a:r>
-          </a:p>
-          <a:p>
-            <a:pPr>
-              <a:spcBef>
-                <a:spcPts val="400"/>
-              </a:spcBef>
-            </a:pPr>
-            <a:r>
-              <a:rPr sz="1400" b="0" i="0">
-                <a:solidFill>
-                  <a:srgbClr val="333333"/>
-                </a:solidFill>
-                <a:latin typeface="Calibri"/>
-              </a:rPr>
-              <a:t>Enunciado completo: Clases/Proyecto Integrador/ (VetCare).</a:t>
-            </a:r>
-          </a:p>
-        </p:txBody>
-      </p:sp>
-      <p:sp>
-        <p:nvSpPr>
-          <p:cNvPr id="11" name="Rounded Rectangle 10"/>
+          <a:bodyPr wrap="square" anchor="ctr"/>
+          <a:lstStyle/>
+          <a:p>
+            <a:pPr algn="ctr"/>
+            <a:r>
+              <a:rPr sz="1600" b="1" i="0">
+                <a:solidFill>
+                  <a:srgbClr val="FFFFFF"/>
+                </a:solidFill>
+                <a:latin typeface="Calibri"/>
+              </a:rPr>
+              <a:t>3</a:t>
+            </a:r>
+          </a:p>
+        </p:txBody>
+      </p:sp>
+      <p:sp>
+        <p:nvSpPr>
+          <p:cNvPr id="16" name="TextBox 15"/>
+          <p:cNvSpPr txBox="1"/>
+          <p:nvPr/>
+        </p:nvSpPr>
+        <p:spPr>
+          <a:xfrm>
+            <a:off x="1188720" y="3410712"/>
+            <a:ext cx="10271455" cy="786384"/>
+          </a:xfrm>
+          <a:prstGeom prst="rect">
+            <a:avLst/>
+          </a:prstGeom>
+          <a:noFill/>
+        </p:spPr>
+        <p:txBody>
+          <a:bodyPr wrap="square" anchor="ctr"/>
+          <a:lstStyle/>
+          <a:p>
+            <a:r>
+              <a:rPr sz="1500" b="1" i="0">
+                <a:solidFill>
+                  <a:srgbClr val="095292"/>
+                </a:solidFill>
+                <a:latin typeface="Calibri"/>
+              </a:rPr>
+              <a:t>Agregar un fragmento alt que modele el horario ocupado con sus dos condiciones de guarda escritas, y verificar que el camino del else corresponda a un flujo alterno documentado en la especificacion del caso de uso.</a:t>
+            </a:r>
+          </a:p>
+        </p:txBody>
+      </p:sp>
+      <p:sp>
+        <p:nvSpPr>
+          <p:cNvPr id="17" name="Rounded Rectangle 16"/>
           <p:cNvSpPr/>
           <p:nvPr/>
         </p:nvSpPr>
         <p:spPr>
           <a:xfrm>
-            <a:off x="457200" y="3694176"/>
-            <a:ext cx="11277295" cy="1051560"/>
+            <a:off x="457200" y="4361688"/>
+            <a:ext cx="11277295" cy="950976"/>
           </a:xfrm>
           <a:prstGeom prst="roundRect">
             <a:avLst>
@@ -9407,7 +9171,7 @@
             </a:avLst>
           </a:prstGeom>
           <a:solidFill>
-            <a:srgbClr val="FBE4E4"/>
+            <a:srgbClr val="E8F4FA"/>
           </a:solidFill>
           <a:ln>
             <a:noFill/>
@@ -9437,20 +9201,22 @@
       </p:sp>
       <p:sp>
         <p:nvSpPr>
-          <p:cNvPr id="12" name="Rectangle 11"/>
+          <p:cNvPr id="18" name="Rounded Rectangle 17"/>
           <p:cNvSpPr/>
           <p:nvPr/>
         </p:nvSpPr>
         <p:spPr>
           <a:xfrm>
-            <a:off x="457200" y="3694176"/>
-            <a:ext cx="128016" cy="1051560"/>
-          </a:xfrm>
-          <a:prstGeom prst="rect">
-            <a:avLst/>
+            <a:off x="594360" y="4617720"/>
+            <a:ext cx="438912" cy="438912"/>
+          </a:xfrm>
+          <a:prstGeom prst="roundRect">
+            <a:avLst>
+              <a:gd name="adj" fmla="val 12000"/>
+            </a:avLst>
           </a:prstGeom>
           <a:solidFill>
-            <a:srgbClr val="A02030"/>
+            <a:srgbClr val="095292"/>
           </a:solidFill>
           <a:ln>
             <a:noFill/>
@@ -9480,14 +9246,14 @@
       </p:sp>
       <p:sp>
         <p:nvSpPr>
-          <p:cNvPr id="13" name="TextBox 12"/>
+          <p:cNvPr id="19" name="TextBox 18"/>
           <p:cNvSpPr txBox="1"/>
           <p:nvPr/>
         </p:nvSpPr>
         <p:spPr>
           <a:xfrm>
-            <a:off x="777240" y="3831336"/>
-            <a:ext cx="10774375" cy="822959"/>
+            <a:off x="594360" y="4617720"/>
+            <a:ext cx="438912" cy="438912"/>
           </a:xfrm>
           <a:prstGeom prst="rect">
             <a:avLst/>
@@ -9495,42 +9261,212 @@
           <a:noFill/>
         </p:spPr>
         <p:txBody>
-          <a:bodyPr wrap="square">
-            <a:spAutoFit/>
-          </a:bodyPr>
-          <a:lstStyle/>
-          <a:p>
-            <a:r>
-              <a:rPr sz="1200" b="1" i="0">
-                <a:solidFill>
-                  <a:srgbClr val="A02030"/>
-                </a:solidFill>
-                <a:latin typeface="Calibri"/>
-              </a:rPr>
-              <a:t>Atención</a:t>
-            </a:r>
-          </a:p>
-          <a:p>
-            <a:pPr>
-              <a:spcBef>
-                <a:spcPts val="400"/>
-              </a:spcBef>
-            </a:pPr>
-            <a:r>
-              <a:rPr sz="1400" b="0" i="0">
-                <a:solidFill>
-                  <a:srgbClr val="333333"/>
-                </a:solidFill>
-                <a:latin typeface="Calibri"/>
-              </a:rPr>
-              <a:t>Entrega del taller, si el docente lo asigna · en la fecha que indique el docente.</a:t>
-            </a:r>
-          </a:p>
-        </p:txBody>
-      </p:sp>
-      <p:sp>
-        <p:nvSpPr>
-          <p:cNvPr id="14" name="TextBox 13"/>
+          <a:bodyPr wrap="square" anchor="ctr"/>
+          <a:lstStyle/>
+          <a:p>
+            <a:pPr algn="ctr"/>
+            <a:r>
+              <a:rPr sz="1600" b="1" i="0">
+                <a:solidFill>
+                  <a:srgbClr val="FFFFFF"/>
+                </a:solidFill>
+                <a:latin typeface="Calibri"/>
+              </a:rPr>
+              <a:t>4</a:t>
+            </a:r>
+          </a:p>
+        </p:txBody>
+      </p:sp>
+      <p:sp>
+        <p:nvSpPr>
+          <p:cNvPr id="20" name="TextBox 19"/>
+          <p:cNvSpPr txBox="1"/>
+          <p:nvPr/>
+        </p:nvSpPr>
+        <p:spPr>
+          <a:xfrm>
+            <a:off x="1188720" y="4453128"/>
+            <a:ext cx="10271455" cy="786384"/>
+          </a:xfrm>
+          <a:prstGeom prst="rect">
+            <a:avLst/>
+          </a:prstGeom>
+          <a:noFill/>
+        </p:spPr>
+        <p:txBody>
+          <a:bodyPr wrap="square" anchor="ctr"/>
+          <a:lstStyle/>
+          <a:p>
+            <a:r>
+              <a:rPr sz="1500" b="1" i="0">
+                <a:solidFill>
+                  <a:srgbClr val="095292"/>
+                </a:solidFill>
+                <a:latin typeface="Calibri"/>
+              </a:rPr>
+              <a:t>Construir la tabla de mapeo mensaje a operacion con tres columnas, mensaje, clase destinataria y operacion que debe existir, y agregar al diagrama de clases toda operacion que hoy falte; ninguna fila puede quedar con la clase en blanco.</a:t>
+            </a:r>
+          </a:p>
+        </p:txBody>
+      </p:sp>
+      <p:sp>
+        <p:nvSpPr>
+          <p:cNvPr id="21" name="Rounded Rectangle 20"/>
+          <p:cNvSpPr/>
+          <p:nvPr/>
+        </p:nvSpPr>
+        <p:spPr>
+          <a:xfrm>
+            <a:off x="457200" y="5404104"/>
+            <a:ext cx="11277295" cy="950976"/>
+          </a:xfrm>
+          <a:prstGeom prst="roundRect">
+            <a:avLst>
+              <a:gd name="adj" fmla="val 12000"/>
+            </a:avLst>
+          </a:prstGeom>
+          <a:solidFill>
+            <a:srgbClr val="F2F2F2"/>
+          </a:solidFill>
+          <a:ln>
+            <a:noFill/>
+          </a:ln>
+        </p:spPr>
+        <p:style>
+          <a:lnRef idx="1">
+            <a:schemeClr val="accent1"/>
+          </a:lnRef>
+          <a:fillRef idx="3">
+            <a:schemeClr val="accent1"/>
+          </a:fillRef>
+          <a:effectRef idx="2">
+            <a:schemeClr val="accent1"/>
+          </a:effectRef>
+          <a:fontRef idx="minor">
+            <a:schemeClr val="lt1"/>
+          </a:fontRef>
+        </p:style>
+        <p:txBody>
+          <a:bodyPr rtlCol="0" anchor="ctr"/>
+          <a:lstStyle/>
+          <a:p>
+            <a:pPr algn="ctr"/>
+          </a:p>
+        </p:txBody>
+      </p:sp>
+      <p:sp>
+        <p:nvSpPr>
+          <p:cNvPr id="22" name="Rounded Rectangle 21"/>
+          <p:cNvSpPr/>
+          <p:nvPr/>
+        </p:nvSpPr>
+        <p:spPr>
+          <a:xfrm>
+            <a:off x="594360" y="5660136"/>
+            <a:ext cx="438912" cy="438912"/>
+          </a:xfrm>
+          <a:prstGeom prst="roundRect">
+            <a:avLst>
+              <a:gd name="adj" fmla="val 12000"/>
+            </a:avLst>
+          </a:prstGeom>
+          <a:solidFill>
+            <a:srgbClr val="095292"/>
+          </a:solidFill>
+          <a:ln>
+            <a:noFill/>
+          </a:ln>
+        </p:spPr>
+        <p:style>
+          <a:lnRef idx="1">
+            <a:schemeClr val="accent1"/>
+          </a:lnRef>
+          <a:fillRef idx="3">
+            <a:schemeClr val="accent1"/>
+          </a:fillRef>
+          <a:effectRef idx="2">
+            <a:schemeClr val="accent1"/>
+          </a:effectRef>
+          <a:fontRef idx="minor">
+            <a:schemeClr val="lt1"/>
+          </a:fontRef>
+        </p:style>
+        <p:txBody>
+          <a:bodyPr rtlCol="0" anchor="ctr"/>
+          <a:lstStyle/>
+          <a:p>
+            <a:pPr algn="ctr"/>
+          </a:p>
+        </p:txBody>
+      </p:sp>
+      <p:sp>
+        <p:nvSpPr>
+          <p:cNvPr id="23" name="TextBox 22"/>
+          <p:cNvSpPr txBox="1"/>
+          <p:nvPr/>
+        </p:nvSpPr>
+        <p:spPr>
+          <a:xfrm>
+            <a:off x="594360" y="5660136"/>
+            <a:ext cx="438912" cy="438912"/>
+          </a:xfrm>
+          <a:prstGeom prst="rect">
+            <a:avLst/>
+          </a:prstGeom>
+          <a:noFill/>
+        </p:spPr>
+        <p:txBody>
+          <a:bodyPr wrap="square" anchor="ctr"/>
+          <a:lstStyle/>
+          <a:p>
+            <a:pPr algn="ctr"/>
+            <a:r>
+              <a:rPr sz="1600" b="1" i="0">
+                <a:solidFill>
+                  <a:srgbClr val="FFFFFF"/>
+                </a:solidFill>
+                <a:latin typeface="Calibri"/>
+              </a:rPr>
+              <a:t>5</a:t>
+            </a:r>
+          </a:p>
+        </p:txBody>
+      </p:sp>
+      <p:sp>
+        <p:nvSpPr>
+          <p:cNvPr id="24" name="TextBox 23"/>
+          <p:cNvSpPr txBox="1"/>
+          <p:nvPr/>
+        </p:nvSpPr>
+        <p:spPr>
+          <a:xfrm>
+            <a:off x="1188720" y="5495544"/>
+            <a:ext cx="10271455" cy="786384"/>
+          </a:xfrm>
+          <a:prstGeom prst="rect">
+            <a:avLst/>
+          </a:prstGeom>
+          <a:noFill/>
+        </p:spPr>
+        <p:txBody>
+          <a:bodyPr wrap="square" anchor="ctr"/>
+          <a:lstStyle/>
+          <a:p>
+            <a:r>
+              <a:rPr sz="1400" b="1" i="0">
+                <a:solidFill>
+                  <a:srgbClr val="095292"/>
+                </a:solidFill>
+                <a:latin typeface="Calibri"/>
+              </a:rPr>
+              <a:t>Dibujar el diagrama de actividad del proceso de atencion en el consultorio con cuatro calles (Propietario, Recepcionista, Veterinario y Sistema VetCare), con minimo dos nodos de decision y una bifurcacion en paralelo, y exportar todo a PDF para subirlo a la plataforma del curso.</a:t>
+            </a:r>
+          </a:p>
+        </p:txBody>
+      </p:sp>
+      <p:sp>
+        <p:nvSpPr>
+          <p:cNvPr id="25" name="TextBox 24"/>
           <p:cNvSpPr txBox="1"/>
           <p:nvPr/>
         </p:nvSpPr>
@@ -9572,6 +9508,1685 @@
 </file>
 
 <file path=ppt/slides/slide22.xml><?xml version="1.0" encoding="utf-8"?>
+<p:sld xmlns:a="http://schemas.openxmlformats.org/drawingml/2006/main" xmlns:p="http://schemas.openxmlformats.org/presentationml/2006/main" xmlns:r="http://schemas.openxmlformats.org/officeDocument/2006/relationships">
+  <p:cSld>
+    <p:bg>
+      <p:bgPr>
+        <a:solidFill>
+          <a:srgbClr val="FFFFFF"/>
+        </a:solidFill>
+        <a:effectLst/>
+      </p:bgPr>
+    </p:bg>
+    <p:spTree>
+      <p:nvGrpSpPr>
+        <p:cNvPr id="1" name=""/>
+        <p:cNvGrpSpPr/>
+        <p:nvPr/>
+      </p:nvGrpSpPr>
+      <p:grpSpPr/>
+      <p:sp>
+        <p:nvSpPr>
+          <p:cNvPr id="2" name="Rectangle 1"/>
+          <p:cNvSpPr/>
+          <p:nvPr/>
+        </p:nvSpPr>
+        <p:spPr>
+          <a:xfrm>
+            <a:off x="0" y="0"/>
+            <a:ext cx="12191695" cy="960120"/>
+          </a:xfrm>
+          <a:prstGeom prst="rect">
+            <a:avLst/>
+          </a:prstGeom>
+          <a:solidFill>
+            <a:srgbClr val="095292"/>
+          </a:solidFill>
+          <a:ln>
+            <a:noFill/>
+          </a:ln>
+        </p:spPr>
+        <p:style>
+          <a:lnRef idx="1">
+            <a:schemeClr val="accent1"/>
+          </a:lnRef>
+          <a:fillRef idx="3">
+            <a:schemeClr val="accent1"/>
+          </a:fillRef>
+          <a:effectRef idx="2">
+            <a:schemeClr val="accent1"/>
+          </a:effectRef>
+          <a:fontRef idx="minor">
+            <a:schemeClr val="lt1"/>
+          </a:fontRef>
+        </p:style>
+        <p:txBody>
+          <a:bodyPr rtlCol="0" anchor="ctr"/>
+          <a:lstStyle/>
+          <a:p>
+            <a:pPr algn="ctr"/>
+          </a:p>
+        </p:txBody>
+      </p:sp>
+      <p:sp>
+        <p:nvSpPr>
+          <p:cNvPr id="3" name="Rectangle 2"/>
+          <p:cNvSpPr/>
+          <p:nvPr/>
+        </p:nvSpPr>
+        <p:spPr>
+          <a:xfrm>
+            <a:off x="0" y="960120"/>
+            <a:ext cx="12191695" cy="41148"/>
+          </a:xfrm>
+          <a:prstGeom prst="rect">
+            <a:avLst/>
+          </a:prstGeom>
+          <a:solidFill>
+            <a:srgbClr val="FFD000"/>
+          </a:solidFill>
+          <a:ln>
+            <a:noFill/>
+          </a:ln>
+        </p:spPr>
+        <p:style>
+          <a:lnRef idx="1">
+            <a:schemeClr val="accent1"/>
+          </a:lnRef>
+          <a:fillRef idx="3">
+            <a:schemeClr val="accent1"/>
+          </a:fillRef>
+          <a:effectRef idx="2">
+            <a:schemeClr val="accent1"/>
+          </a:effectRef>
+          <a:fontRef idx="minor">
+            <a:schemeClr val="lt1"/>
+          </a:fontRef>
+        </p:style>
+        <p:txBody>
+          <a:bodyPr rtlCol="0" anchor="ctr"/>
+          <a:lstStyle/>
+          <a:p>
+            <a:pPr algn="ctr"/>
+          </a:p>
+        </p:txBody>
+      </p:sp>
+      <p:sp>
+        <p:nvSpPr>
+          <p:cNvPr id="4" name="TextBox 3"/>
+          <p:cNvSpPr txBox="1"/>
+          <p:nvPr/>
+        </p:nvSpPr>
+        <p:spPr>
+          <a:xfrm>
+            <a:off x="457200" y="164592"/>
+            <a:ext cx="11277295" cy="502920"/>
+          </a:xfrm>
+          <a:prstGeom prst="rect">
+            <a:avLst/>
+          </a:prstGeom>
+          <a:noFill/>
+        </p:spPr>
+        <p:txBody>
+          <a:bodyPr wrap="square">
+            <a:spAutoFit/>
+          </a:bodyPr>
+          <a:lstStyle/>
+          <a:p>
+            <a:r>
+              <a:rPr sz="2600" b="1" i="0">
+                <a:solidFill>
+                  <a:srgbClr val="FFFFFF"/>
+                </a:solidFill>
+                <a:latin typeface="Calibri"/>
+              </a:rPr>
+              <a:t>Antes de entregar — autochequeo</a:t>
+            </a:r>
+          </a:p>
+        </p:txBody>
+      </p:sp>
+      <p:sp>
+        <p:nvSpPr>
+          <p:cNvPr id="5" name="Rounded Rectangle 4"/>
+          <p:cNvSpPr/>
+          <p:nvPr/>
+        </p:nvSpPr>
+        <p:spPr>
+          <a:xfrm>
+            <a:off x="457200" y="1261872"/>
+            <a:ext cx="11277295" cy="566928"/>
+          </a:xfrm>
+          <a:prstGeom prst="roundRect">
+            <a:avLst>
+              <a:gd name="adj" fmla="val 12000"/>
+            </a:avLst>
+          </a:prstGeom>
+          <a:solidFill>
+            <a:srgbClr val="F2F2F2"/>
+          </a:solidFill>
+          <a:ln>
+            <a:noFill/>
+          </a:ln>
+        </p:spPr>
+        <p:style>
+          <a:lnRef idx="1">
+            <a:schemeClr val="accent1"/>
+          </a:lnRef>
+          <a:fillRef idx="3">
+            <a:schemeClr val="accent1"/>
+          </a:fillRef>
+          <a:effectRef idx="2">
+            <a:schemeClr val="accent1"/>
+          </a:effectRef>
+          <a:fontRef idx="minor">
+            <a:schemeClr val="lt1"/>
+          </a:fontRef>
+        </p:style>
+        <p:txBody>
+          <a:bodyPr rtlCol="0" anchor="ctr"/>
+          <a:lstStyle/>
+          <a:p>
+            <a:pPr algn="ctr"/>
+          </a:p>
+        </p:txBody>
+      </p:sp>
+      <p:sp>
+        <p:nvSpPr>
+          <p:cNvPr id="6" name="Rectangle 5"/>
+          <p:cNvSpPr/>
+          <p:nvPr/>
+        </p:nvSpPr>
+        <p:spPr>
+          <a:xfrm>
+            <a:off x="640080" y="1408175"/>
+            <a:ext cx="274320" cy="274320"/>
+          </a:xfrm>
+          <a:prstGeom prst="rect">
+            <a:avLst/>
+          </a:prstGeom>
+          <a:solidFill>
+            <a:srgbClr val="FFFFFF"/>
+          </a:solidFill>
+          <a:ln>
+            <a:solidFill>
+              <a:srgbClr val="333333"/>
+            </a:solidFill>
+          </a:ln>
+        </p:spPr>
+        <p:style>
+          <a:lnRef idx="1">
+            <a:schemeClr val="accent1"/>
+          </a:lnRef>
+          <a:fillRef idx="3">
+            <a:schemeClr val="accent1"/>
+          </a:fillRef>
+          <a:effectRef idx="2">
+            <a:schemeClr val="accent1"/>
+          </a:effectRef>
+          <a:fontRef idx="minor">
+            <a:schemeClr val="lt1"/>
+          </a:fontRef>
+        </p:style>
+        <p:txBody>
+          <a:bodyPr rtlCol="0" anchor="ctr"/>
+          <a:lstStyle/>
+          <a:p>
+            <a:pPr algn="ctr"/>
+          </a:p>
+        </p:txBody>
+      </p:sp>
+      <p:sp>
+        <p:nvSpPr>
+          <p:cNvPr id="7" name="Rectangle 6"/>
+          <p:cNvSpPr/>
+          <p:nvPr/>
+        </p:nvSpPr>
+        <p:spPr>
+          <a:xfrm>
+            <a:off x="640080" y="1408175"/>
+            <a:ext cx="73152" cy="274320"/>
+          </a:xfrm>
+          <a:prstGeom prst="rect">
+            <a:avLst/>
+          </a:prstGeom>
+          <a:solidFill>
+            <a:srgbClr val="269CCB"/>
+          </a:solidFill>
+          <a:ln>
+            <a:noFill/>
+          </a:ln>
+        </p:spPr>
+        <p:style>
+          <a:lnRef idx="1">
+            <a:schemeClr val="accent1"/>
+          </a:lnRef>
+          <a:fillRef idx="3">
+            <a:schemeClr val="accent1"/>
+          </a:fillRef>
+          <a:effectRef idx="2">
+            <a:schemeClr val="accent1"/>
+          </a:effectRef>
+          <a:fontRef idx="minor">
+            <a:schemeClr val="lt1"/>
+          </a:fontRef>
+        </p:style>
+        <p:txBody>
+          <a:bodyPr rtlCol="0" anchor="ctr"/>
+          <a:lstStyle/>
+          <a:p>
+            <a:pPr algn="ctr"/>
+          </a:p>
+        </p:txBody>
+      </p:sp>
+      <p:sp>
+        <p:nvSpPr>
+          <p:cNvPr id="8" name="TextBox 7"/>
+          <p:cNvSpPr txBox="1"/>
+          <p:nvPr/>
+        </p:nvSpPr>
+        <p:spPr>
+          <a:xfrm>
+            <a:off x="1097280" y="1353312"/>
+            <a:ext cx="10362895" cy="402336"/>
+          </a:xfrm>
+          <a:prstGeom prst="rect">
+            <a:avLst/>
+          </a:prstGeom>
+          <a:noFill/>
+        </p:spPr>
+        <p:txBody>
+          <a:bodyPr wrap="square" anchor="ctr"/>
+          <a:lstStyle/>
+          <a:p>
+            <a:r>
+              <a:rPr sz="1500" b="0" i="0">
+                <a:solidFill>
+                  <a:srgbClr val="333333"/>
+                </a:solidFill>
+                <a:latin typeface="Calibri"/>
+              </a:rPr>
+              <a:t>Si sigue las flechas de su diagrama de arriba hacia abajo, obtiene exactamente el mismo relato que ya escribio en el flujo principal del caso de uso?</a:t>
+            </a:r>
+          </a:p>
+        </p:txBody>
+      </p:sp>
+      <p:sp>
+        <p:nvSpPr>
+          <p:cNvPr id="9" name="Rounded Rectangle 8"/>
+          <p:cNvSpPr/>
+          <p:nvPr/>
+        </p:nvSpPr>
+        <p:spPr>
+          <a:xfrm>
+            <a:off x="457200" y="1938528"/>
+            <a:ext cx="11277295" cy="566928"/>
+          </a:xfrm>
+          <a:prstGeom prst="roundRect">
+            <a:avLst>
+              <a:gd name="adj" fmla="val 12000"/>
+            </a:avLst>
+          </a:prstGeom>
+          <a:solidFill>
+            <a:srgbClr val="F2F2F2"/>
+          </a:solidFill>
+          <a:ln>
+            <a:noFill/>
+          </a:ln>
+        </p:spPr>
+        <p:style>
+          <a:lnRef idx="1">
+            <a:schemeClr val="accent1"/>
+          </a:lnRef>
+          <a:fillRef idx="3">
+            <a:schemeClr val="accent1"/>
+          </a:fillRef>
+          <a:effectRef idx="2">
+            <a:schemeClr val="accent1"/>
+          </a:effectRef>
+          <a:fontRef idx="minor">
+            <a:schemeClr val="lt1"/>
+          </a:fontRef>
+        </p:style>
+        <p:txBody>
+          <a:bodyPr rtlCol="0" anchor="ctr"/>
+          <a:lstStyle/>
+          <a:p>
+            <a:pPr algn="ctr"/>
+          </a:p>
+        </p:txBody>
+      </p:sp>
+      <p:sp>
+        <p:nvSpPr>
+          <p:cNvPr id="10" name="Rectangle 9"/>
+          <p:cNvSpPr/>
+          <p:nvPr/>
+        </p:nvSpPr>
+        <p:spPr>
+          <a:xfrm>
+            <a:off x="640080" y="2084832"/>
+            <a:ext cx="274320" cy="274320"/>
+          </a:xfrm>
+          <a:prstGeom prst="rect">
+            <a:avLst/>
+          </a:prstGeom>
+          <a:solidFill>
+            <a:srgbClr val="FFFFFF"/>
+          </a:solidFill>
+          <a:ln>
+            <a:solidFill>
+              <a:srgbClr val="333333"/>
+            </a:solidFill>
+          </a:ln>
+        </p:spPr>
+        <p:style>
+          <a:lnRef idx="1">
+            <a:schemeClr val="accent1"/>
+          </a:lnRef>
+          <a:fillRef idx="3">
+            <a:schemeClr val="accent1"/>
+          </a:fillRef>
+          <a:effectRef idx="2">
+            <a:schemeClr val="accent1"/>
+          </a:effectRef>
+          <a:fontRef idx="minor">
+            <a:schemeClr val="lt1"/>
+          </a:fontRef>
+        </p:style>
+        <p:txBody>
+          <a:bodyPr rtlCol="0" anchor="ctr"/>
+          <a:lstStyle/>
+          <a:p>
+            <a:pPr algn="ctr"/>
+          </a:p>
+        </p:txBody>
+      </p:sp>
+      <p:sp>
+        <p:nvSpPr>
+          <p:cNvPr id="11" name="Rectangle 10"/>
+          <p:cNvSpPr/>
+          <p:nvPr/>
+        </p:nvSpPr>
+        <p:spPr>
+          <a:xfrm>
+            <a:off x="640080" y="2084832"/>
+            <a:ext cx="73152" cy="274320"/>
+          </a:xfrm>
+          <a:prstGeom prst="rect">
+            <a:avLst/>
+          </a:prstGeom>
+          <a:solidFill>
+            <a:srgbClr val="269CCB"/>
+          </a:solidFill>
+          <a:ln>
+            <a:noFill/>
+          </a:ln>
+        </p:spPr>
+        <p:style>
+          <a:lnRef idx="1">
+            <a:schemeClr val="accent1"/>
+          </a:lnRef>
+          <a:fillRef idx="3">
+            <a:schemeClr val="accent1"/>
+          </a:fillRef>
+          <a:effectRef idx="2">
+            <a:schemeClr val="accent1"/>
+          </a:effectRef>
+          <a:fontRef idx="minor">
+            <a:schemeClr val="lt1"/>
+          </a:fontRef>
+        </p:style>
+        <p:txBody>
+          <a:bodyPr rtlCol="0" anchor="ctr"/>
+          <a:lstStyle/>
+          <a:p>
+            <a:pPr algn="ctr"/>
+          </a:p>
+        </p:txBody>
+      </p:sp>
+      <p:sp>
+        <p:nvSpPr>
+          <p:cNvPr id="12" name="TextBox 11"/>
+          <p:cNvSpPr txBox="1"/>
+          <p:nvPr/>
+        </p:nvSpPr>
+        <p:spPr>
+          <a:xfrm>
+            <a:off x="1097280" y="2029968"/>
+            <a:ext cx="10362895" cy="402336"/>
+          </a:xfrm>
+          <a:prstGeom prst="rect">
+            <a:avLst/>
+          </a:prstGeom>
+          <a:noFill/>
+        </p:spPr>
+        <p:txBody>
+          <a:bodyPr wrap="square" anchor="ctr"/>
+          <a:lstStyle/>
+          <a:p>
+            <a:r>
+              <a:rPr sz="1500" b="0" i="0">
+                <a:solidFill>
+                  <a:srgbClr val="333333"/>
+                </a:solidFill>
+                <a:latin typeface="Calibri"/>
+              </a:rPr>
+              <a:t>Cada participante de su diagrama existe como clase en el modelo, o dibujo cajas como Base de datos y Sistema que nadie puede implementar?</a:t>
+            </a:r>
+          </a:p>
+        </p:txBody>
+      </p:sp>
+      <p:sp>
+        <p:nvSpPr>
+          <p:cNvPr id="13" name="Rounded Rectangle 12"/>
+          <p:cNvSpPr/>
+          <p:nvPr/>
+        </p:nvSpPr>
+        <p:spPr>
+          <a:xfrm>
+            <a:off x="457200" y="2615184"/>
+            <a:ext cx="11277295" cy="566928"/>
+          </a:xfrm>
+          <a:prstGeom prst="roundRect">
+            <a:avLst>
+              <a:gd name="adj" fmla="val 12000"/>
+            </a:avLst>
+          </a:prstGeom>
+          <a:solidFill>
+            <a:srgbClr val="F2F2F2"/>
+          </a:solidFill>
+          <a:ln>
+            <a:noFill/>
+          </a:ln>
+        </p:spPr>
+        <p:style>
+          <a:lnRef idx="1">
+            <a:schemeClr val="accent1"/>
+          </a:lnRef>
+          <a:fillRef idx="3">
+            <a:schemeClr val="accent1"/>
+          </a:fillRef>
+          <a:effectRef idx="2">
+            <a:schemeClr val="accent1"/>
+          </a:effectRef>
+          <a:fontRef idx="minor">
+            <a:schemeClr val="lt1"/>
+          </a:fontRef>
+        </p:style>
+        <p:txBody>
+          <a:bodyPr rtlCol="0" anchor="ctr"/>
+          <a:lstStyle/>
+          <a:p>
+            <a:pPr algn="ctr"/>
+          </a:p>
+        </p:txBody>
+      </p:sp>
+      <p:sp>
+        <p:nvSpPr>
+          <p:cNvPr id="14" name="Rectangle 13"/>
+          <p:cNvSpPr/>
+          <p:nvPr/>
+        </p:nvSpPr>
+        <p:spPr>
+          <a:xfrm>
+            <a:off x="640080" y="2761488"/>
+            <a:ext cx="274320" cy="274320"/>
+          </a:xfrm>
+          <a:prstGeom prst="rect">
+            <a:avLst/>
+          </a:prstGeom>
+          <a:solidFill>
+            <a:srgbClr val="FFFFFF"/>
+          </a:solidFill>
+          <a:ln>
+            <a:solidFill>
+              <a:srgbClr val="333333"/>
+            </a:solidFill>
+          </a:ln>
+        </p:spPr>
+        <p:style>
+          <a:lnRef idx="1">
+            <a:schemeClr val="accent1"/>
+          </a:lnRef>
+          <a:fillRef idx="3">
+            <a:schemeClr val="accent1"/>
+          </a:fillRef>
+          <a:effectRef idx="2">
+            <a:schemeClr val="accent1"/>
+          </a:effectRef>
+          <a:fontRef idx="minor">
+            <a:schemeClr val="lt1"/>
+          </a:fontRef>
+        </p:style>
+        <p:txBody>
+          <a:bodyPr rtlCol="0" anchor="ctr"/>
+          <a:lstStyle/>
+          <a:p>
+            <a:pPr algn="ctr"/>
+          </a:p>
+        </p:txBody>
+      </p:sp>
+      <p:sp>
+        <p:nvSpPr>
+          <p:cNvPr id="15" name="Rectangle 14"/>
+          <p:cNvSpPr/>
+          <p:nvPr/>
+        </p:nvSpPr>
+        <p:spPr>
+          <a:xfrm>
+            <a:off x="640080" y="2761488"/>
+            <a:ext cx="73152" cy="274320"/>
+          </a:xfrm>
+          <a:prstGeom prst="rect">
+            <a:avLst/>
+          </a:prstGeom>
+          <a:solidFill>
+            <a:srgbClr val="269CCB"/>
+          </a:solidFill>
+          <a:ln>
+            <a:noFill/>
+          </a:ln>
+        </p:spPr>
+        <p:style>
+          <a:lnRef idx="1">
+            <a:schemeClr val="accent1"/>
+          </a:lnRef>
+          <a:fillRef idx="3">
+            <a:schemeClr val="accent1"/>
+          </a:fillRef>
+          <a:effectRef idx="2">
+            <a:schemeClr val="accent1"/>
+          </a:effectRef>
+          <a:fontRef idx="minor">
+            <a:schemeClr val="lt1"/>
+          </a:fontRef>
+        </p:style>
+        <p:txBody>
+          <a:bodyPr rtlCol="0" anchor="ctr"/>
+          <a:lstStyle/>
+          <a:p>
+            <a:pPr algn="ctr"/>
+          </a:p>
+        </p:txBody>
+      </p:sp>
+      <p:sp>
+        <p:nvSpPr>
+          <p:cNvPr id="16" name="TextBox 15"/>
+          <p:cNvSpPr txBox="1"/>
+          <p:nvPr/>
+        </p:nvSpPr>
+        <p:spPr>
+          <a:xfrm>
+            <a:off x="1097280" y="2706624"/>
+            <a:ext cx="10362895" cy="402336"/>
+          </a:xfrm>
+          <a:prstGeom prst="rect">
+            <a:avLst/>
+          </a:prstGeom>
+          <a:noFill/>
+        </p:spPr>
+        <p:txBody>
+          <a:bodyPr wrap="square" anchor="ctr"/>
+          <a:lstStyle/>
+          <a:p>
+            <a:r>
+              <a:rPr sz="1500" b="0" i="0">
+                <a:solidFill>
+                  <a:srgbClr val="333333"/>
+                </a:solidFill>
+                <a:latin typeface="Calibri"/>
+              </a:rPr>
+              <a:t>En su diagrama de actividad se puede saber, mirando solo la calle, quien es responsable de cada paso y cual de esos pasos ocurre sin tocar el computador?</a:t>
+            </a:r>
+          </a:p>
+        </p:txBody>
+      </p:sp>
+      <p:sp>
+        <p:nvSpPr>
+          <p:cNvPr id="17" name="TextBox 16"/>
+          <p:cNvSpPr txBox="1"/>
+          <p:nvPr/>
+        </p:nvSpPr>
+        <p:spPr>
+          <a:xfrm>
+            <a:off x="11185855" y="6473952"/>
+            <a:ext cx="640080" cy="274320"/>
+          </a:xfrm>
+          <a:prstGeom prst="rect">
+            <a:avLst/>
+          </a:prstGeom>
+          <a:noFill/>
+        </p:spPr>
+        <p:txBody>
+          <a:bodyPr wrap="square">
+            <a:spAutoFit/>
+          </a:bodyPr>
+          <a:lstStyle/>
+          <a:p>
+            <a:pPr algn="r"/>
+            <a:r>
+              <a:rPr sz="1100" b="0" i="0">
+                <a:solidFill>
+                  <a:srgbClr val="666666"/>
+                </a:solidFill>
+                <a:latin typeface="Calibri"/>
+              </a:rPr>
+              <a:t>22</a:t>
+            </a:r>
+          </a:p>
+        </p:txBody>
+      </p:sp>
+    </p:spTree>
+  </p:cSld>
+  <p:clrMapOvr>
+    <a:masterClrMapping/>
+  </p:clrMapOvr>
+</p:sld>
+</file>
+
+<file path=ppt/slides/slide23.xml><?xml version="1.0" encoding="utf-8"?>
+<p:sld xmlns:a="http://schemas.openxmlformats.org/drawingml/2006/main" xmlns:p="http://schemas.openxmlformats.org/presentationml/2006/main" xmlns:r="http://schemas.openxmlformats.org/officeDocument/2006/relationships">
+  <p:cSld>
+    <p:bg>
+      <p:bgPr>
+        <a:solidFill>
+          <a:srgbClr val="FFFFFF"/>
+        </a:solidFill>
+        <a:effectLst/>
+      </p:bgPr>
+    </p:bg>
+    <p:spTree>
+      <p:nvGrpSpPr>
+        <p:cNvPr id="1" name=""/>
+        <p:cNvGrpSpPr/>
+        <p:nvPr/>
+      </p:nvGrpSpPr>
+      <p:grpSpPr/>
+      <p:sp>
+        <p:nvSpPr>
+          <p:cNvPr id="2" name="Rectangle 1"/>
+          <p:cNvSpPr/>
+          <p:nvPr/>
+        </p:nvSpPr>
+        <p:spPr>
+          <a:xfrm>
+            <a:off x="0" y="0"/>
+            <a:ext cx="12191695" cy="960120"/>
+          </a:xfrm>
+          <a:prstGeom prst="rect">
+            <a:avLst/>
+          </a:prstGeom>
+          <a:solidFill>
+            <a:srgbClr val="095292"/>
+          </a:solidFill>
+          <a:ln>
+            <a:noFill/>
+          </a:ln>
+        </p:spPr>
+        <p:style>
+          <a:lnRef idx="1">
+            <a:schemeClr val="accent1"/>
+          </a:lnRef>
+          <a:fillRef idx="3">
+            <a:schemeClr val="accent1"/>
+          </a:fillRef>
+          <a:effectRef idx="2">
+            <a:schemeClr val="accent1"/>
+          </a:effectRef>
+          <a:fontRef idx="minor">
+            <a:schemeClr val="lt1"/>
+          </a:fontRef>
+        </p:style>
+        <p:txBody>
+          <a:bodyPr rtlCol="0" anchor="ctr"/>
+          <a:lstStyle/>
+          <a:p>
+            <a:pPr algn="ctr"/>
+          </a:p>
+        </p:txBody>
+      </p:sp>
+      <p:sp>
+        <p:nvSpPr>
+          <p:cNvPr id="3" name="Rectangle 2"/>
+          <p:cNvSpPr/>
+          <p:nvPr/>
+        </p:nvSpPr>
+        <p:spPr>
+          <a:xfrm>
+            <a:off x="0" y="960120"/>
+            <a:ext cx="12191695" cy="41148"/>
+          </a:xfrm>
+          <a:prstGeom prst="rect">
+            <a:avLst/>
+          </a:prstGeom>
+          <a:solidFill>
+            <a:srgbClr val="FFD000"/>
+          </a:solidFill>
+          <a:ln>
+            <a:noFill/>
+          </a:ln>
+        </p:spPr>
+        <p:style>
+          <a:lnRef idx="1">
+            <a:schemeClr val="accent1"/>
+          </a:lnRef>
+          <a:fillRef idx="3">
+            <a:schemeClr val="accent1"/>
+          </a:fillRef>
+          <a:effectRef idx="2">
+            <a:schemeClr val="accent1"/>
+          </a:effectRef>
+          <a:fontRef idx="minor">
+            <a:schemeClr val="lt1"/>
+          </a:fontRef>
+        </p:style>
+        <p:txBody>
+          <a:bodyPr rtlCol="0" anchor="ctr"/>
+          <a:lstStyle/>
+          <a:p>
+            <a:pPr algn="ctr"/>
+          </a:p>
+        </p:txBody>
+      </p:sp>
+      <p:sp>
+        <p:nvSpPr>
+          <p:cNvPr id="4" name="TextBox 3"/>
+          <p:cNvSpPr txBox="1"/>
+          <p:nvPr/>
+        </p:nvSpPr>
+        <p:spPr>
+          <a:xfrm>
+            <a:off x="457200" y="164592"/>
+            <a:ext cx="11277295" cy="502920"/>
+          </a:xfrm>
+          <a:prstGeom prst="rect">
+            <a:avLst/>
+          </a:prstGeom>
+          <a:noFill/>
+        </p:spPr>
+        <p:txBody>
+          <a:bodyPr wrap="square">
+            <a:spAutoFit/>
+          </a:bodyPr>
+          <a:lstStyle/>
+          <a:p>
+            <a:r>
+              <a:rPr sz="2600" b="1" i="0">
+                <a:solidFill>
+                  <a:srgbClr val="FFFFFF"/>
+                </a:solidFill>
+                <a:latin typeface="Calibri"/>
+              </a:rPr>
+              <a:t>Criterios de exito / entregable</a:t>
+            </a:r>
+          </a:p>
+        </p:txBody>
+      </p:sp>
+      <p:sp>
+        <p:nvSpPr>
+          <p:cNvPr id="5" name="TextBox 4"/>
+          <p:cNvSpPr txBox="1"/>
+          <p:nvPr/>
+        </p:nvSpPr>
+        <p:spPr>
+          <a:xfrm>
+            <a:off x="457200" y="1170432"/>
+            <a:ext cx="11277295" cy="5230368"/>
+          </a:xfrm>
+          <a:prstGeom prst="rect">
+            <a:avLst/>
+          </a:prstGeom>
+          <a:noFill/>
+        </p:spPr>
+        <p:txBody>
+          <a:bodyPr wrap="square">
+            <a:spAutoFit/>
+          </a:bodyPr>
+          <a:lstStyle/>
+          <a:p>
+            <a:pPr>
+              <a:spcAft>
+                <a:spcPts val="800"/>
+              </a:spcAft>
+            </a:pPr>
+            <a:r>
+              <a:rPr sz="2000" b="0" i="0">
+                <a:solidFill>
+                  <a:srgbClr val="333333"/>
+                </a:solidFill>
+                <a:latin typeface="Calibri"/>
+              </a:rPr>
+              <a:t>–   </a:t>
+            </a:r>
+            <a:r>
+              <a:rPr sz="2000" b="1" i="0">
+                <a:solidFill>
+                  <a:srgbClr val="333333"/>
+                </a:solidFill>
+                <a:latin typeface="Calibri"/>
+              </a:rPr>
+              <a:t>Entregable:</a:t>
+            </a:r>
+            <a:r>
+              <a:rPr sz="2000" b="0" i="0">
+                <a:solidFill>
+                  <a:srgbClr val="333333"/>
+                </a:solidFill>
+                <a:latin typeface="Calibri"/>
+              </a:rPr>
+              <a:t> Un PDF con el diagrama de secuencia de Agendar cita incluyendo el fragmento alt para horario ocupado, el diagrama de actividad del proceso de atencion con calles por rol, y la tabla que mapea cada mensaje del diagrama de secuencia a una operacion del diagrama de clases, subido a la plataforma del curso.</a:t>
+            </a:r>
+          </a:p>
+          <a:p>
+            <a:pPr>
+              <a:spcAft>
+                <a:spcPts val="800"/>
+              </a:spcAft>
+            </a:pPr>
+            <a:r>
+              <a:rPr sz="2000" b="0" i="0">
+                <a:solidFill>
+                  <a:srgbClr val="333333"/>
+                </a:solidFill>
+                <a:latin typeface="Calibri"/>
+              </a:rPr>
+              <a:t>–   </a:t>
+            </a:r>
+            <a:r>
+              <a:rPr sz="2000" b="1" i="0">
+                <a:solidFill>
+                  <a:srgbClr val="333333"/>
+                </a:solidFill>
+                <a:latin typeface="Calibri"/>
+              </a:rPr>
+              <a:t>Exito:</a:t>
+            </a:r>
+            <a:r>
+              <a:rPr sz="2000" b="0" i="0">
+                <a:solidFill>
+                  <a:srgbClr val="333333"/>
+                </a:solidFill>
+                <a:latin typeface="Calibri"/>
+              </a:rPr>
+              <a:t> El diagrama de secuencia reproduce el orden exacto del flujo principal de CU-04 y no inventa pasos que no esten en la especificacion.</a:t>
+            </a:r>
+          </a:p>
+          <a:p>
+            <a:pPr>
+              <a:spcAft>
+                <a:spcPts val="800"/>
+              </a:spcAft>
+            </a:pPr>
+            <a:r>
+              <a:rPr sz="2000" b="0" i="0">
+                <a:solidFill>
+                  <a:srgbClr val="333333"/>
+                </a:solidFill>
+                <a:latin typeface="Calibri"/>
+              </a:rPr>
+              <a:t>–   </a:t>
+            </a:r>
+            <a:r>
+              <a:rPr sz="2000" b="1" i="0">
+                <a:solidFill>
+                  <a:srgbClr val="333333"/>
+                </a:solidFill>
+                <a:latin typeface="Calibri"/>
+              </a:rPr>
+              <a:t>Exito:</a:t>
+            </a:r>
+            <a:r>
+              <a:rPr sz="2000" b="0" i="0">
+                <a:solidFill>
+                  <a:srgbClr val="333333"/>
+                </a:solidFill>
+                <a:latin typeface="Calibri"/>
+              </a:rPr>
+              <a:t> Todos los participantes del diagrama corresponden a actores legitimos o a clases existentes en el diagrama de clases, y aparecen las flechas de retorno con el dato que devuelven.</a:t>
+            </a:r>
+          </a:p>
+          <a:p>
+            <a:pPr>
+              <a:spcAft>
+                <a:spcPts val="800"/>
+              </a:spcAft>
+            </a:pPr>
+            <a:r>
+              <a:rPr sz="2000" b="0" i="0">
+                <a:solidFill>
+                  <a:srgbClr val="333333"/>
+                </a:solidFill>
+                <a:latin typeface="Calibri"/>
+              </a:rPr>
+              <a:t>–   </a:t>
+            </a:r>
+            <a:r>
+              <a:rPr sz="2000" b="1" i="0">
+                <a:solidFill>
+                  <a:srgbClr val="333333"/>
+                </a:solidFill>
+                <a:latin typeface="Calibri"/>
+              </a:rPr>
+              <a:t>Exito:</a:t>
+            </a:r>
+            <a:r>
+              <a:rPr sz="2000" b="0" i="0">
+                <a:solidFill>
+                  <a:srgbClr val="333333"/>
+                </a:solidFill>
+                <a:latin typeface="Calibri"/>
+              </a:rPr>
+              <a:t> Existe al menos un fragmento alt con sus dos condiciones de guarda escritas, coherente con un flujo alterno ya documentado.</a:t>
+            </a:r>
+          </a:p>
+          <a:p>
+            <a:pPr>
+              <a:spcAft>
+                <a:spcPts val="800"/>
+              </a:spcAft>
+            </a:pPr>
+            <a:r>
+              <a:rPr sz="2000" b="0" i="0">
+                <a:solidFill>
+                  <a:srgbClr val="333333"/>
+                </a:solidFill>
+                <a:latin typeface="Calibri"/>
+              </a:rPr>
+              <a:t>–   </a:t>
+            </a:r>
+            <a:r>
+              <a:rPr sz="2000" b="1" i="0">
+                <a:solidFill>
+                  <a:srgbClr val="333333"/>
+                </a:solidFill>
+                <a:latin typeface="Calibri"/>
+              </a:rPr>
+              <a:t>Exito:</a:t>
+            </a:r>
+            <a:r>
+              <a:rPr sz="2000" b="0" i="0">
+                <a:solidFill>
+                  <a:srgbClr val="333333"/>
+                </a:solidFill>
+                <a:latin typeface="Calibri"/>
+              </a:rPr>
+              <a:t> El diagrama de actividad tiene calles por rol, minimo dos decisiones con condiciones entre corchetes y una bifurcacion en paralelo, y la tabla de mapeo mensaje a operacion no tiene filas incompletas.</a:t>
+            </a:r>
+          </a:p>
+          <a:p>
+            <a:pPr>
+              <a:spcAft>
+                <a:spcPts val="800"/>
+              </a:spcAft>
+            </a:pPr>
+            <a:r>
+              <a:rPr sz="2000" b="0" i="0">
+                <a:solidFill>
+                  <a:srgbClr val="333333"/>
+                </a:solidFill>
+                <a:latin typeface="Calibri"/>
+              </a:rPr>
+              <a:t>–   </a:t>
+            </a:r>
+            <a:r>
+              <a:rPr sz="2000" b="1" i="0">
+                <a:solidFill>
+                  <a:srgbClr val="333333"/>
+                </a:solidFill>
+                <a:latin typeface="Calibri"/>
+              </a:rPr>
+              <a:t>Entrega en la plataforma del curso</a:t>
+            </a:r>
+            <a:r>
+              <a:rPr sz="2000" b="0" i="0">
+                <a:solidFill>
+                  <a:srgbClr val="333333"/>
+                </a:solidFill>
+                <a:latin typeface="Calibri"/>
+              </a:rPr>
+              <a:t> — en la fecha que indique el docente.</a:t>
+            </a:r>
+          </a:p>
+        </p:txBody>
+      </p:sp>
+      <p:sp>
+        <p:nvSpPr>
+          <p:cNvPr id="6" name="TextBox 5"/>
+          <p:cNvSpPr txBox="1"/>
+          <p:nvPr/>
+        </p:nvSpPr>
+        <p:spPr>
+          <a:xfrm>
+            <a:off x="11185855" y="6473952"/>
+            <a:ext cx="640080" cy="274320"/>
+          </a:xfrm>
+          <a:prstGeom prst="rect">
+            <a:avLst/>
+          </a:prstGeom>
+          <a:noFill/>
+        </p:spPr>
+        <p:txBody>
+          <a:bodyPr wrap="square">
+            <a:spAutoFit/>
+          </a:bodyPr>
+          <a:lstStyle/>
+          <a:p>
+            <a:pPr algn="r"/>
+            <a:r>
+              <a:rPr sz="1100" b="0" i="0">
+                <a:solidFill>
+                  <a:srgbClr val="666666"/>
+                </a:solidFill>
+                <a:latin typeface="Calibri"/>
+              </a:rPr>
+              <a:t>23</a:t>
+            </a:r>
+          </a:p>
+        </p:txBody>
+      </p:sp>
+    </p:spTree>
+  </p:cSld>
+  <p:clrMapOvr>
+    <a:masterClrMapping/>
+  </p:clrMapOvr>
+</p:sld>
+</file>
+
+<file path=ppt/slides/slide24.xml><?xml version="1.0" encoding="utf-8"?>
+<p:sld xmlns:a="http://schemas.openxmlformats.org/drawingml/2006/main" xmlns:p="http://schemas.openxmlformats.org/presentationml/2006/main" xmlns:r="http://schemas.openxmlformats.org/officeDocument/2006/relationships">
+  <p:cSld>
+    <p:bg>
+      <p:bgPr>
+        <a:solidFill>
+          <a:srgbClr val="FFFFFF"/>
+        </a:solidFill>
+        <a:effectLst/>
+      </p:bgPr>
+    </p:bg>
+    <p:spTree>
+      <p:nvGrpSpPr>
+        <p:cNvPr id="1" name=""/>
+        <p:cNvGrpSpPr/>
+        <p:nvPr/>
+      </p:nvGrpSpPr>
+      <p:grpSpPr/>
+      <p:sp>
+        <p:nvSpPr>
+          <p:cNvPr id="2" name="Rectangle 1"/>
+          <p:cNvSpPr/>
+          <p:nvPr/>
+        </p:nvSpPr>
+        <p:spPr>
+          <a:xfrm>
+            <a:off x="0" y="0"/>
+            <a:ext cx="12191695" cy="960120"/>
+          </a:xfrm>
+          <a:prstGeom prst="rect">
+            <a:avLst/>
+          </a:prstGeom>
+          <a:solidFill>
+            <a:srgbClr val="095292"/>
+          </a:solidFill>
+          <a:ln>
+            <a:noFill/>
+          </a:ln>
+        </p:spPr>
+        <p:style>
+          <a:lnRef idx="1">
+            <a:schemeClr val="accent1"/>
+          </a:lnRef>
+          <a:fillRef idx="3">
+            <a:schemeClr val="accent1"/>
+          </a:fillRef>
+          <a:effectRef idx="2">
+            <a:schemeClr val="accent1"/>
+          </a:effectRef>
+          <a:fontRef idx="minor">
+            <a:schemeClr val="lt1"/>
+          </a:fontRef>
+        </p:style>
+        <p:txBody>
+          <a:bodyPr rtlCol="0" anchor="ctr"/>
+          <a:lstStyle/>
+          <a:p>
+            <a:pPr algn="ctr"/>
+          </a:p>
+        </p:txBody>
+      </p:sp>
+      <p:sp>
+        <p:nvSpPr>
+          <p:cNvPr id="3" name="Rectangle 2"/>
+          <p:cNvSpPr/>
+          <p:nvPr/>
+        </p:nvSpPr>
+        <p:spPr>
+          <a:xfrm>
+            <a:off x="0" y="960120"/>
+            <a:ext cx="12191695" cy="41148"/>
+          </a:xfrm>
+          <a:prstGeom prst="rect">
+            <a:avLst/>
+          </a:prstGeom>
+          <a:solidFill>
+            <a:srgbClr val="FFD000"/>
+          </a:solidFill>
+          <a:ln>
+            <a:noFill/>
+          </a:ln>
+        </p:spPr>
+        <p:style>
+          <a:lnRef idx="1">
+            <a:schemeClr val="accent1"/>
+          </a:lnRef>
+          <a:fillRef idx="3">
+            <a:schemeClr val="accent1"/>
+          </a:fillRef>
+          <a:effectRef idx="2">
+            <a:schemeClr val="accent1"/>
+          </a:effectRef>
+          <a:fontRef idx="minor">
+            <a:schemeClr val="lt1"/>
+          </a:fontRef>
+        </p:style>
+        <p:txBody>
+          <a:bodyPr rtlCol="0" anchor="ctr"/>
+          <a:lstStyle/>
+          <a:p>
+            <a:pPr algn="ctr"/>
+          </a:p>
+        </p:txBody>
+      </p:sp>
+      <p:sp>
+        <p:nvSpPr>
+          <p:cNvPr id="4" name="TextBox 3"/>
+          <p:cNvSpPr txBox="1"/>
+          <p:nvPr/>
+        </p:nvSpPr>
+        <p:spPr>
+          <a:xfrm>
+            <a:off x="457200" y="164592"/>
+            <a:ext cx="11277295" cy="502920"/>
+          </a:xfrm>
+          <a:prstGeom prst="rect">
+            <a:avLst/>
+          </a:prstGeom>
+          <a:noFill/>
+        </p:spPr>
+        <p:txBody>
+          <a:bodyPr wrap="square">
+            <a:spAutoFit/>
+          </a:bodyPr>
+          <a:lstStyle/>
+          <a:p>
+            <a:r>
+              <a:rPr sz="2600" b="1" i="0">
+                <a:solidFill>
+                  <a:srgbClr val="FFFFFF"/>
+                </a:solidFill>
+                <a:latin typeface="Calibri"/>
+              </a:rPr>
+              <a:t>Para el PI esta semana</a:t>
+            </a:r>
+          </a:p>
+        </p:txBody>
+      </p:sp>
+      <p:sp>
+        <p:nvSpPr>
+          <p:cNvPr id="5" name="Rounded Rectangle 4"/>
+          <p:cNvSpPr/>
+          <p:nvPr/>
+        </p:nvSpPr>
+        <p:spPr>
+          <a:xfrm>
+            <a:off x="457200" y="1261872"/>
+            <a:ext cx="11277295" cy="1051560"/>
+          </a:xfrm>
+          <a:prstGeom prst="roundRect">
+            <a:avLst>
+              <a:gd name="adj" fmla="val 12000"/>
+            </a:avLst>
+          </a:prstGeom>
+          <a:solidFill>
+            <a:srgbClr val="E8F4FA"/>
+          </a:solidFill>
+          <a:ln>
+            <a:noFill/>
+          </a:ln>
+        </p:spPr>
+        <p:style>
+          <a:lnRef idx="1">
+            <a:schemeClr val="accent1"/>
+          </a:lnRef>
+          <a:fillRef idx="3">
+            <a:schemeClr val="accent1"/>
+          </a:fillRef>
+          <a:effectRef idx="2">
+            <a:schemeClr val="accent1"/>
+          </a:effectRef>
+          <a:fontRef idx="minor">
+            <a:schemeClr val="lt1"/>
+          </a:fontRef>
+        </p:style>
+        <p:txBody>
+          <a:bodyPr rtlCol="0" anchor="ctr"/>
+          <a:lstStyle/>
+          <a:p>
+            <a:pPr algn="ctr"/>
+          </a:p>
+        </p:txBody>
+      </p:sp>
+      <p:sp>
+        <p:nvSpPr>
+          <p:cNvPr id="6" name="Rectangle 5"/>
+          <p:cNvSpPr/>
+          <p:nvPr/>
+        </p:nvSpPr>
+        <p:spPr>
+          <a:xfrm>
+            <a:off x="457200" y="1261872"/>
+            <a:ext cx="128016" cy="1051560"/>
+          </a:xfrm>
+          <a:prstGeom prst="rect">
+            <a:avLst/>
+          </a:prstGeom>
+          <a:solidFill>
+            <a:srgbClr val="269CCB"/>
+          </a:solidFill>
+          <a:ln>
+            <a:noFill/>
+          </a:ln>
+        </p:spPr>
+        <p:style>
+          <a:lnRef idx="1">
+            <a:schemeClr val="accent1"/>
+          </a:lnRef>
+          <a:fillRef idx="3">
+            <a:schemeClr val="accent1"/>
+          </a:fillRef>
+          <a:effectRef idx="2">
+            <a:schemeClr val="accent1"/>
+          </a:effectRef>
+          <a:fontRef idx="minor">
+            <a:schemeClr val="lt1"/>
+          </a:fontRef>
+        </p:style>
+        <p:txBody>
+          <a:bodyPr rtlCol="0" anchor="ctr"/>
+          <a:lstStyle/>
+          <a:p>
+            <a:pPr algn="ctr"/>
+          </a:p>
+        </p:txBody>
+      </p:sp>
+      <p:sp>
+        <p:nvSpPr>
+          <p:cNvPr id="7" name="TextBox 6"/>
+          <p:cNvSpPr txBox="1"/>
+          <p:nvPr/>
+        </p:nvSpPr>
+        <p:spPr>
+          <a:xfrm>
+            <a:off x="777240" y="1399031"/>
+            <a:ext cx="10774375" cy="822959"/>
+          </a:xfrm>
+          <a:prstGeom prst="rect">
+            <a:avLst/>
+          </a:prstGeom>
+          <a:noFill/>
+        </p:spPr>
+        <p:txBody>
+          <a:bodyPr wrap="square">
+            <a:spAutoFit/>
+          </a:bodyPr>
+          <a:lstStyle/>
+          <a:p>
+            <a:r>
+              <a:rPr sz="1200" b="1" i="0">
+                <a:solidFill>
+                  <a:srgbClr val="269CCB"/>
+                </a:solidFill>
+                <a:latin typeface="Calibri"/>
+              </a:rPr>
+              <a:t>Info</a:t>
+            </a:r>
+          </a:p>
+          <a:p>
+            <a:pPr>
+              <a:spcBef>
+                <a:spcPts val="400"/>
+              </a:spcBef>
+            </a:pPr>
+            <a:r>
+              <a:rPr sz="1400" b="0" i="0">
+                <a:solidFill>
+                  <a:srgbClr val="333333"/>
+                </a:solidFill>
+                <a:latin typeface="Calibri"/>
+              </a:rPr>
+              <a:t>Hito: Queda modelada la dinamica de VetCare: el diagrama de secuencia del caso de uso Agendar cita y el diagrama de actividad del proceso de atencion en el consultorio.</a:t>
+            </a:r>
+          </a:p>
+        </p:txBody>
+      </p:sp>
+      <p:sp>
+        <p:nvSpPr>
+          <p:cNvPr id="8" name="Rounded Rectangle 7"/>
+          <p:cNvSpPr/>
+          <p:nvPr/>
+        </p:nvSpPr>
+        <p:spPr>
+          <a:xfrm>
+            <a:off x="457200" y="2478024"/>
+            <a:ext cx="11277295" cy="1051560"/>
+          </a:xfrm>
+          <a:prstGeom prst="roundRect">
+            <a:avLst>
+              <a:gd name="adj" fmla="val 12000"/>
+            </a:avLst>
+          </a:prstGeom>
+          <a:solidFill>
+            <a:srgbClr val="FFF8E1"/>
+          </a:solidFill>
+          <a:ln>
+            <a:noFill/>
+          </a:ln>
+        </p:spPr>
+        <p:style>
+          <a:lnRef idx="1">
+            <a:schemeClr val="accent1"/>
+          </a:lnRef>
+          <a:fillRef idx="3">
+            <a:schemeClr val="accent1"/>
+          </a:fillRef>
+          <a:effectRef idx="2">
+            <a:schemeClr val="accent1"/>
+          </a:effectRef>
+          <a:fontRef idx="minor">
+            <a:schemeClr val="lt1"/>
+          </a:fontRef>
+        </p:style>
+        <p:txBody>
+          <a:bodyPr rtlCol="0" anchor="ctr"/>
+          <a:lstStyle/>
+          <a:p>
+            <a:pPr algn="ctr"/>
+          </a:p>
+        </p:txBody>
+      </p:sp>
+      <p:sp>
+        <p:nvSpPr>
+          <p:cNvPr id="9" name="Rectangle 8"/>
+          <p:cNvSpPr/>
+          <p:nvPr/>
+        </p:nvSpPr>
+        <p:spPr>
+          <a:xfrm>
+            <a:off x="457200" y="2478024"/>
+            <a:ext cx="128016" cy="1051560"/>
+          </a:xfrm>
+          <a:prstGeom prst="rect">
+            <a:avLst/>
+          </a:prstGeom>
+          <a:solidFill>
+            <a:srgbClr val="FFD000"/>
+          </a:solidFill>
+          <a:ln>
+            <a:noFill/>
+          </a:ln>
+        </p:spPr>
+        <p:style>
+          <a:lnRef idx="1">
+            <a:schemeClr val="accent1"/>
+          </a:lnRef>
+          <a:fillRef idx="3">
+            <a:schemeClr val="accent1"/>
+          </a:fillRef>
+          <a:effectRef idx="2">
+            <a:schemeClr val="accent1"/>
+          </a:effectRef>
+          <a:fontRef idx="minor">
+            <a:schemeClr val="lt1"/>
+          </a:fontRef>
+        </p:style>
+        <p:txBody>
+          <a:bodyPr rtlCol="0" anchor="ctr"/>
+          <a:lstStyle/>
+          <a:p>
+            <a:pPr algn="ctr"/>
+          </a:p>
+        </p:txBody>
+      </p:sp>
+      <p:sp>
+        <p:nvSpPr>
+          <p:cNvPr id="10" name="TextBox 9"/>
+          <p:cNvSpPr txBox="1"/>
+          <p:nvPr/>
+        </p:nvSpPr>
+        <p:spPr>
+          <a:xfrm>
+            <a:off x="777240" y="2615184"/>
+            <a:ext cx="10774375" cy="822959"/>
+          </a:xfrm>
+          <a:prstGeom prst="rect">
+            <a:avLst/>
+          </a:prstGeom>
+          <a:noFill/>
+        </p:spPr>
+        <p:txBody>
+          <a:bodyPr wrap="square">
+            <a:spAutoFit/>
+          </a:bodyPr>
+          <a:lstStyle/>
+          <a:p>
+            <a:r>
+              <a:rPr sz="1200" b="1" i="0">
+                <a:solidFill>
+                  <a:srgbClr val="FFD000"/>
+                </a:solidFill>
+                <a:latin typeface="Calibri"/>
+              </a:rPr>
+              <a:t>Aclaración</a:t>
+            </a:r>
+          </a:p>
+          <a:p>
+            <a:pPr>
+              <a:spcBef>
+                <a:spcPts val="400"/>
+              </a:spcBef>
+            </a:pPr>
+            <a:r>
+              <a:rPr sz="1400" b="0" i="0">
+                <a:solidFill>
+                  <a:srgbClr val="333333"/>
+                </a:solidFill>
+                <a:latin typeface="Calibri"/>
+              </a:rPr>
+              <a:t>Enunciado completo: Clases/Proyecto Integrador/ (VetCare).</a:t>
+            </a:r>
+          </a:p>
+        </p:txBody>
+      </p:sp>
+      <p:sp>
+        <p:nvSpPr>
+          <p:cNvPr id="11" name="Rounded Rectangle 10"/>
+          <p:cNvSpPr/>
+          <p:nvPr/>
+        </p:nvSpPr>
+        <p:spPr>
+          <a:xfrm>
+            <a:off x="457200" y="3694176"/>
+            <a:ext cx="11277295" cy="1051560"/>
+          </a:xfrm>
+          <a:prstGeom prst="roundRect">
+            <a:avLst>
+              <a:gd name="adj" fmla="val 12000"/>
+            </a:avLst>
+          </a:prstGeom>
+          <a:solidFill>
+            <a:srgbClr val="FBE4E4"/>
+          </a:solidFill>
+          <a:ln>
+            <a:noFill/>
+          </a:ln>
+        </p:spPr>
+        <p:style>
+          <a:lnRef idx="1">
+            <a:schemeClr val="accent1"/>
+          </a:lnRef>
+          <a:fillRef idx="3">
+            <a:schemeClr val="accent1"/>
+          </a:fillRef>
+          <a:effectRef idx="2">
+            <a:schemeClr val="accent1"/>
+          </a:effectRef>
+          <a:fontRef idx="minor">
+            <a:schemeClr val="lt1"/>
+          </a:fontRef>
+        </p:style>
+        <p:txBody>
+          <a:bodyPr rtlCol="0" anchor="ctr"/>
+          <a:lstStyle/>
+          <a:p>
+            <a:pPr algn="ctr"/>
+          </a:p>
+        </p:txBody>
+      </p:sp>
+      <p:sp>
+        <p:nvSpPr>
+          <p:cNvPr id="12" name="Rectangle 11"/>
+          <p:cNvSpPr/>
+          <p:nvPr/>
+        </p:nvSpPr>
+        <p:spPr>
+          <a:xfrm>
+            <a:off x="457200" y="3694176"/>
+            <a:ext cx="128016" cy="1051560"/>
+          </a:xfrm>
+          <a:prstGeom prst="rect">
+            <a:avLst/>
+          </a:prstGeom>
+          <a:solidFill>
+            <a:srgbClr val="A02030"/>
+          </a:solidFill>
+          <a:ln>
+            <a:noFill/>
+          </a:ln>
+        </p:spPr>
+        <p:style>
+          <a:lnRef idx="1">
+            <a:schemeClr val="accent1"/>
+          </a:lnRef>
+          <a:fillRef idx="3">
+            <a:schemeClr val="accent1"/>
+          </a:fillRef>
+          <a:effectRef idx="2">
+            <a:schemeClr val="accent1"/>
+          </a:effectRef>
+          <a:fontRef idx="minor">
+            <a:schemeClr val="lt1"/>
+          </a:fontRef>
+        </p:style>
+        <p:txBody>
+          <a:bodyPr rtlCol="0" anchor="ctr"/>
+          <a:lstStyle/>
+          <a:p>
+            <a:pPr algn="ctr"/>
+          </a:p>
+        </p:txBody>
+      </p:sp>
+      <p:sp>
+        <p:nvSpPr>
+          <p:cNvPr id="13" name="TextBox 12"/>
+          <p:cNvSpPr txBox="1"/>
+          <p:nvPr/>
+        </p:nvSpPr>
+        <p:spPr>
+          <a:xfrm>
+            <a:off x="777240" y="3831336"/>
+            <a:ext cx="10774375" cy="822959"/>
+          </a:xfrm>
+          <a:prstGeom prst="rect">
+            <a:avLst/>
+          </a:prstGeom>
+          <a:noFill/>
+        </p:spPr>
+        <p:txBody>
+          <a:bodyPr wrap="square">
+            <a:spAutoFit/>
+          </a:bodyPr>
+          <a:lstStyle/>
+          <a:p>
+            <a:r>
+              <a:rPr sz="1200" b="1" i="0">
+                <a:solidFill>
+                  <a:srgbClr val="A02030"/>
+                </a:solidFill>
+                <a:latin typeface="Calibri"/>
+              </a:rPr>
+              <a:t>Atención</a:t>
+            </a:r>
+          </a:p>
+          <a:p>
+            <a:pPr>
+              <a:spcBef>
+                <a:spcPts val="400"/>
+              </a:spcBef>
+            </a:pPr>
+            <a:r>
+              <a:rPr sz="1400" b="0" i="0">
+                <a:solidFill>
+                  <a:srgbClr val="333333"/>
+                </a:solidFill>
+                <a:latin typeface="Calibri"/>
+              </a:rPr>
+              <a:t>Entrega del taller, si el docente lo asigna · en la fecha que indique el docente.</a:t>
+            </a:r>
+          </a:p>
+        </p:txBody>
+      </p:sp>
+      <p:sp>
+        <p:nvSpPr>
+          <p:cNvPr id="14" name="TextBox 13"/>
+          <p:cNvSpPr txBox="1"/>
+          <p:nvPr/>
+        </p:nvSpPr>
+        <p:spPr>
+          <a:xfrm>
+            <a:off x="11185855" y="6473952"/>
+            <a:ext cx="640080" cy="274320"/>
+          </a:xfrm>
+          <a:prstGeom prst="rect">
+            <a:avLst/>
+          </a:prstGeom>
+          <a:noFill/>
+        </p:spPr>
+        <p:txBody>
+          <a:bodyPr wrap="square">
+            <a:spAutoFit/>
+          </a:bodyPr>
+          <a:lstStyle/>
+          <a:p>
+            <a:pPr algn="r"/>
+            <a:r>
+              <a:rPr sz="1100" b="0" i="0">
+                <a:solidFill>
+                  <a:srgbClr val="666666"/>
+                </a:solidFill>
+                <a:latin typeface="Calibri"/>
+              </a:rPr>
+              <a:t>24</a:t>
+            </a:r>
+          </a:p>
+        </p:txBody>
+      </p:sp>
+    </p:spTree>
+  </p:cSld>
+  <p:clrMapOvr>
+    <a:masterClrMapping/>
+  </p:clrMapOvr>
+</p:sld>
+</file>
+
+<file path=ppt/slides/slide25.xml><?xml version="1.0" encoding="utf-8"?>
 <p:sld xmlns:a="http://schemas.openxmlformats.org/drawingml/2006/main" xmlns:p="http://schemas.openxmlformats.org/presentationml/2006/main" xmlns:r="http://schemas.openxmlformats.org/officeDocument/2006/relationships">
   <p:cSld>
     <p:bg>

--- a/Seminario de Sistemas/Clases/Clase 12 - Diagramas UML avanzados/Presentacion.pptx
+++ b/Seminario de Sistemas/Clases/Clase 12 - Diagramas UML avanzados/Presentacion.pptx
@@ -9,27 +9,20 @@
     <p:sldId id="257" r:id="rId8"/>
     <p:sldId id="258" r:id="rId9"/>
     <p:sldId id="259" r:id="rId10"/>
-    <p:sldId id="260" r:id="rId11"/>
-    <p:sldId id="261" r:id="rId12"/>
-    <p:sldId id="262" r:id="rId13"/>
-    <p:sldId id="263" r:id="rId14"/>
-    <p:sldId id="264" r:id="rId15"/>
-    <p:sldId id="265" r:id="rId16"/>
-    <p:sldId id="266" r:id="rId17"/>
-    <p:sldId id="267" r:id="rId18"/>
-    <p:sldId id="268" r:id="rId19"/>
-    <p:sldId id="269" r:id="rId20"/>
-    <p:sldId id="270" r:id="rId21"/>
-    <p:sldId id="271" r:id="rId22"/>
-    <p:sldId id="272" r:id="rId23"/>
-    <p:sldId id="273" r:id="rId24"/>
-    <p:sldId id="274" r:id="rId25"/>
-    <p:sldId id="275" r:id="rId26"/>
-    <p:sldId id="276" r:id="rId27"/>
-    <p:sldId id="277" r:id="rId28"/>
-    <p:sldId id="278" r:id="rId29"/>
-    <p:sldId id="279" r:id="rId30"/>
-    <p:sldId id="280" r:id="rId31"/>
+    <p:sldId id="260" r:id="rId12"/>
+    <p:sldId id="261" r:id="rId13"/>
+    <p:sldId id="262" r:id="rId14"/>
+    <p:sldId id="263" r:id="rId15"/>
+    <p:sldId id="264" r:id="rId16"/>
+    <p:sldId id="265" r:id="rId17"/>
+    <p:sldId id="266" r:id="rId18"/>
+    <p:sldId id="267" r:id="rId19"/>
+    <p:sldId id="268" r:id="rId20"/>
+    <p:sldId id="269" r:id="rId21"/>
+    <p:sldId id="270" r:id="rId22"/>
+    <p:sldId id="271" r:id="rId23"/>
+    <p:sldId id="272" r:id="rId24"/>
+    <p:sldId id="273" r:id="rId25"/>
   </p:sldIdLst>
   <p:sldSz cx="12191695" cy="6858000" type="screen4x3"/>
   <p:notesSz cx="6858000" cy="9144000"/>
@@ -129,6 +122,584 @@
     </a:lvl9pPr>
   </p:defaultTextStyle>
 </p:presentation>
+</file>
+
+<file path=ppt/notesMasters/notesMaster1.xml><?xml version="1.0" encoding="utf-8"?>
+<p:notesMaster xmlns:a="http://schemas.openxmlformats.org/drawingml/2006/main" xmlns:p="http://schemas.openxmlformats.org/presentationml/2006/main" xmlns:r="http://schemas.openxmlformats.org/officeDocument/2006/relationships">
+  <p:cSld>
+    <p:bg>
+      <p:bgRef idx="1001">
+        <a:schemeClr val="bg1"/>
+      </p:bgRef>
+    </p:bg>
+    <p:spTree>
+      <p:nvGrpSpPr>
+        <p:cNvPr id="1" name=""/>
+        <p:cNvGrpSpPr/>
+        <p:nvPr/>
+      </p:nvGrpSpPr>
+      <p:grpSpPr>
+        <a:xfrm>
+          <a:off x="0" y="0"/>
+          <a:ext cx="0" cy="0"/>
+          <a:chOff x="0" y="0"/>
+          <a:chExt cx="0" cy="0"/>
+        </a:xfrm>
+      </p:grpSpPr>
+      <p:sp>
+        <p:nvSpPr>
+          <p:cNvPr id="2" name="Header Placeholder 1"/>
+          <p:cNvSpPr>
+            <a:spLocks noGrp="1"/>
+          </p:cNvSpPr>
+          <p:nvPr>
+            <p:ph type="hdr" sz="quarter"/>
+          </p:nvPr>
+        </p:nvSpPr>
+        <p:spPr>
+          <a:xfrm>
+            <a:off x="0" y="0"/>
+            <a:ext cx="2971800" cy="457200"/>
+          </a:xfrm>
+          <a:prstGeom prst="rect">
+            <a:avLst/>
+          </a:prstGeom>
+        </p:spPr>
+        <p:txBody>
+          <a:bodyPr vert="horz" lIns="91440" tIns="45720" rIns="91440" bIns="45720" rtlCol="0"/>
+          <a:lstStyle>
+            <a:lvl1pPr algn="l">
+              <a:defRPr sz="1200"/>
+            </a:lvl1pPr>
+          </a:lstStyle>
+          <a:p>
+            <a:endParaRPr lang="en-US"/>
+          </a:p>
+        </p:txBody>
+      </p:sp>
+      <p:sp>
+        <p:nvSpPr>
+          <p:cNvPr id="3" name="Date Placeholder 2"/>
+          <p:cNvSpPr>
+            <a:spLocks noGrp="1"/>
+          </p:cNvSpPr>
+          <p:nvPr>
+            <p:ph type="dt" idx="1"/>
+          </p:nvPr>
+        </p:nvSpPr>
+        <p:spPr>
+          <a:xfrm>
+            <a:off x="3884613" y="0"/>
+            <a:ext cx="2971800" cy="457200"/>
+          </a:xfrm>
+          <a:prstGeom prst="rect">
+            <a:avLst/>
+          </a:prstGeom>
+        </p:spPr>
+        <p:txBody>
+          <a:bodyPr vert="horz" lIns="91440" tIns="45720" rIns="91440" bIns="45720" rtlCol="0"/>
+          <a:lstStyle>
+            <a:lvl1pPr algn="r">
+              <a:defRPr sz="1200"/>
+            </a:lvl1pPr>
+          </a:lstStyle>
+          <a:p>
+            <a:fld id="{0F89C1C7-3DCD-1040-A9CF-14679D8B5DDD}" type="datetimeFigureOut">
+              <a:rPr lang="en-US" smtClean="0"/>
+              <a:t>10/17/16</a:t>
+            </a:fld>
+            <a:endParaRPr lang="en-US"/>
+          </a:p>
+        </p:txBody>
+      </p:sp>
+      <p:sp>
+        <p:nvSpPr>
+          <p:cNvPr id="4" name="Slide Image Placeholder 3"/>
+          <p:cNvSpPr>
+            <a:spLocks noGrp="1" noRot="1" noChangeAspect="1"/>
+          </p:cNvSpPr>
+          <p:nvPr>
+            <p:ph type="sldImg" idx="2"/>
+          </p:nvPr>
+        </p:nvSpPr>
+        <p:spPr>
+          <a:xfrm>
+            <a:off x="1143000" y="685800"/>
+            <a:ext cx="4572000" cy="3429000"/>
+          </a:xfrm>
+          <a:prstGeom prst="rect">
+            <a:avLst/>
+          </a:prstGeom>
+          <a:noFill/>
+          <a:ln w="12700">
+            <a:solidFill>
+              <a:prstClr val="black"/>
+            </a:solidFill>
+          </a:ln>
+        </p:spPr>
+        <p:txBody>
+          <a:bodyPr vert="horz" lIns="91440" tIns="45720" rIns="91440" bIns="45720" rtlCol="0" anchor="ctr"/>
+          <a:lstStyle/>
+          <a:p>
+            <a:endParaRPr lang="en-US"/>
+          </a:p>
+        </p:txBody>
+      </p:sp>
+      <p:sp>
+        <p:nvSpPr>
+          <p:cNvPr id="5" name="Notes Placeholder 4"/>
+          <p:cNvSpPr>
+            <a:spLocks noGrp="1"/>
+          </p:cNvSpPr>
+          <p:nvPr>
+            <p:ph type="body" sz="quarter" idx="3"/>
+          </p:nvPr>
+        </p:nvSpPr>
+        <p:spPr>
+          <a:xfrm>
+            <a:off x="685800" y="4343400"/>
+            <a:ext cx="5486400" cy="4114800"/>
+          </a:xfrm>
+          <a:prstGeom prst="rect">
+            <a:avLst/>
+          </a:prstGeom>
+        </p:spPr>
+        <p:txBody>
+          <a:bodyPr vert="horz" lIns="91440" tIns="45720" rIns="91440" bIns="45720" rtlCol="0"/>
+          <a:lstStyle/>
+          <a:p>
+            <a:pPr lvl="0"/>
+            <a:r>
+              <a:rPr lang="en-US" smtClean="0"/>
+              <a:t>Click to edit Master text styles</a:t>
+            </a:r>
+          </a:p>
+          <a:p>
+            <a:pPr lvl="1"/>
+            <a:r>
+              <a:rPr lang="en-US" smtClean="0"/>
+              <a:t>Second level</a:t>
+            </a:r>
+          </a:p>
+          <a:p>
+            <a:pPr lvl="2"/>
+            <a:r>
+              <a:rPr lang="en-US" smtClean="0"/>
+              <a:t>Third level</a:t>
+            </a:r>
+          </a:p>
+          <a:p>
+            <a:pPr lvl="3"/>
+            <a:r>
+              <a:rPr lang="en-US" smtClean="0"/>
+              <a:t>Fourth level</a:t>
+            </a:r>
+          </a:p>
+          <a:p>
+            <a:pPr lvl="4"/>
+            <a:r>
+              <a:rPr lang="en-US" smtClean="0"/>
+              <a:t>Fifth level</a:t>
+            </a:r>
+            <a:endParaRPr lang="en-US"/>
+          </a:p>
+        </p:txBody>
+      </p:sp>
+      <p:sp>
+        <p:nvSpPr>
+          <p:cNvPr id="6" name="Footer Placeholder 5"/>
+          <p:cNvSpPr>
+            <a:spLocks noGrp="1"/>
+          </p:cNvSpPr>
+          <p:nvPr>
+            <p:ph type="ftr" sz="quarter" idx="4"/>
+          </p:nvPr>
+        </p:nvSpPr>
+        <p:spPr>
+          <a:xfrm>
+            <a:off x="0" y="8685213"/>
+            <a:ext cx="2971800" cy="457200"/>
+          </a:xfrm>
+          <a:prstGeom prst="rect">
+            <a:avLst/>
+          </a:prstGeom>
+        </p:spPr>
+        <p:txBody>
+          <a:bodyPr vert="horz" lIns="91440" tIns="45720" rIns="91440" bIns="45720" rtlCol="0" anchor="b"/>
+          <a:lstStyle>
+            <a:lvl1pPr algn="l">
+              <a:defRPr sz="1200"/>
+            </a:lvl1pPr>
+          </a:lstStyle>
+          <a:p>
+            <a:endParaRPr lang="en-US"/>
+          </a:p>
+        </p:txBody>
+      </p:sp>
+      <p:sp>
+        <p:nvSpPr>
+          <p:cNvPr id="7" name="Slide Number Placeholder 6"/>
+          <p:cNvSpPr>
+            <a:spLocks noGrp="1"/>
+          </p:cNvSpPr>
+          <p:nvPr>
+            <p:ph type="sldNum" sz="quarter" idx="5"/>
+          </p:nvPr>
+        </p:nvSpPr>
+        <p:spPr>
+          <a:xfrm>
+            <a:off x="3884613" y="8685213"/>
+            <a:ext cx="2971800" cy="457200"/>
+          </a:xfrm>
+          <a:prstGeom prst="rect">
+            <a:avLst/>
+          </a:prstGeom>
+        </p:spPr>
+        <p:txBody>
+          <a:bodyPr vert="horz" lIns="91440" tIns="45720" rIns="91440" bIns="45720" rtlCol="0" anchor="b"/>
+          <a:lstStyle>
+            <a:lvl1pPr algn="r">
+              <a:defRPr sz="1200"/>
+            </a:lvl1pPr>
+          </a:lstStyle>
+          <a:p>
+            <a:fld id="{BB5E49A5-4136-284D-997B-48E1D791AD67}" type="slidenum">
+              <a:rPr lang="en-US" smtClean="0"/>
+              <a:t>‹#›</a:t>
+            </a:fld>
+            <a:endParaRPr lang="en-US"/>
+          </a:p>
+        </p:txBody>
+      </p:sp>
+    </p:spTree>
+    <p:extLst>
+      <p:ext uri="{BB962C8B-B14F-4D97-AF65-F5344CB8AC3E}">
+        <p14:creationId xmlns:p14="http://schemas.microsoft.com/office/powerpoint/2010/main" val="2623252185"/>
+      </p:ext>
+    </p:extLst>
+  </p:cSld>
+  <p:clrMap bg1="lt1" tx1="dk1" bg2="lt2" tx2="dk2" accent1="accent1" accent2="accent2" accent3="accent3" accent4="accent4" accent5="accent5" accent6="accent6" hlink="hlink" folHlink="folHlink"/>
+  <p:notesStyle>
+    <a:lvl1pPr marL="0" algn="l" defTabSz="457200" rtl="0" eaLnBrk="1" latinLnBrk="0" hangingPunct="1">
+      <a:defRPr sz="1200" kern="1200">
+        <a:solidFill>
+          <a:schemeClr val="tx1"/>
+        </a:solidFill>
+        <a:latin typeface="+mn-lt"/>
+        <a:ea typeface="+mn-ea"/>
+        <a:cs typeface="+mn-cs"/>
+      </a:defRPr>
+    </a:lvl1pPr>
+    <a:lvl2pPr marL="457200" algn="l" defTabSz="457200" rtl="0" eaLnBrk="1" latinLnBrk="0" hangingPunct="1">
+      <a:defRPr sz="1200" kern="1200">
+        <a:solidFill>
+          <a:schemeClr val="tx1"/>
+        </a:solidFill>
+        <a:latin typeface="+mn-lt"/>
+        <a:ea typeface="+mn-ea"/>
+        <a:cs typeface="+mn-cs"/>
+      </a:defRPr>
+    </a:lvl2pPr>
+    <a:lvl3pPr marL="914400" algn="l" defTabSz="457200" rtl="0" eaLnBrk="1" latinLnBrk="0" hangingPunct="1">
+      <a:defRPr sz="1200" kern="1200">
+        <a:solidFill>
+          <a:schemeClr val="tx1"/>
+        </a:solidFill>
+        <a:latin typeface="+mn-lt"/>
+        <a:ea typeface="+mn-ea"/>
+        <a:cs typeface="+mn-cs"/>
+      </a:defRPr>
+    </a:lvl3pPr>
+    <a:lvl4pPr marL="1371600" algn="l" defTabSz="457200" rtl="0" eaLnBrk="1" latinLnBrk="0" hangingPunct="1">
+      <a:defRPr sz="1200" kern="1200">
+        <a:solidFill>
+          <a:schemeClr val="tx1"/>
+        </a:solidFill>
+        <a:latin typeface="+mn-lt"/>
+        <a:ea typeface="+mn-ea"/>
+        <a:cs typeface="+mn-cs"/>
+      </a:defRPr>
+    </a:lvl4pPr>
+    <a:lvl5pPr marL="1828800" algn="l" defTabSz="457200" rtl="0" eaLnBrk="1" latinLnBrk="0" hangingPunct="1">
+      <a:defRPr sz="1200" kern="1200">
+        <a:solidFill>
+          <a:schemeClr val="tx1"/>
+        </a:solidFill>
+        <a:latin typeface="+mn-lt"/>
+        <a:ea typeface="+mn-ea"/>
+        <a:cs typeface="+mn-cs"/>
+      </a:defRPr>
+    </a:lvl5pPr>
+    <a:lvl6pPr marL="2286000" algn="l" defTabSz="457200" rtl="0" eaLnBrk="1" latinLnBrk="0" hangingPunct="1">
+      <a:defRPr sz="1200" kern="1200">
+        <a:solidFill>
+          <a:schemeClr val="tx1"/>
+        </a:solidFill>
+        <a:latin typeface="+mn-lt"/>
+        <a:ea typeface="+mn-ea"/>
+        <a:cs typeface="+mn-cs"/>
+      </a:defRPr>
+    </a:lvl6pPr>
+    <a:lvl7pPr marL="2743200" algn="l" defTabSz="457200" rtl="0" eaLnBrk="1" latinLnBrk="0" hangingPunct="1">
+      <a:defRPr sz="1200" kern="1200">
+        <a:solidFill>
+          <a:schemeClr val="tx1"/>
+        </a:solidFill>
+        <a:latin typeface="+mn-lt"/>
+        <a:ea typeface="+mn-ea"/>
+        <a:cs typeface="+mn-cs"/>
+      </a:defRPr>
+    </a:lvl7pPr>
+    <a:lvl8pPr marL="3200400" algn="l" defTabSz="457200" rtl="0" eaLnBrk="1" latinLnBrk="0" hangingPunct="1">
+      <a:defRPr sz="1200" kern="1200">
+        <a:solidFill>
+          <a:schemeClr val="tx1"/>
+        </a:solidFill>
+        <a:latin typeface="+mn-lt"/>
+        <a:ea typeface="+mn-ea"/>
+        <a:cs typeface="+mn-cs"/>
+      </a:defRPr>
+    </a:lvl8pPr>
+    <a:lvl9pPr marL="3657600" algn="l" defTabSz="457200" rtl="0" eaLnBrk="1" latinLnBrk="0" hangingPunct="1">
+      <a:defRPr sz="1200" kern="1200">
+        <a:solidFill>
+          <a:schemeClr val="tx1"/>
+        </a:solidFill>
+        <a:latin typeface="+mn-lt"/>
+        <a:ea typeface="+mn-ea"/>
+        <a:cs typeface="+mn-cs"/>
+      </a:defRPr>
+    </a:lvl9pPr>
+  </p:notesStyle>
+</p:notesMaster>
+</file>
+
+<file path=ppt/notesSlides/notesSlide1.xml><?xml version="1.0" encoding="utf-8"?>
+<p:notes xmlns:a="http://schemas.openxmlformats.org/drawingml/2006/main" xmlns:p="http://schemas.openxmlformats.org/presentationml/2006/main" xmlns:r="http://schemas.openxmlformats.org/officeDocument/2006/relationships">
+  <p:cSld>
+    <p:spTree>
+      <p:nvGrpSpPr>
+        <p:cNvPr id="1" name=""/>
+        <p:cNvGrpSpPr/>
+        <p:nvPr/>
+      </p:nvGrpSpPr>
+      <p:grpSpPr>
+        <a:xfrm>
+          <a:off x="0" y="0"/>
+          <a:ext cx="0" cy="0"/>
+          <a:chOff x="0" y="0"/>
+          <a:chExt cx="0" cy="0"/>
+        </a:xfrm>
+      </p:grpSpPr>
+      <p:sp>
+        <p:nvSpPr>
+          <p:cNvPr id="2" name="Slide Image Placeholder 1"/>
+          <p:cNvSpPr>
+            <a:spLocks noGrp="1"/>
+          </p:cNvSpPr>
+          <p:nvPr>
+            <p:ph type="sldImg" idx="2"/>
+          </p:nvPr>
+        </p:nvSpPr>
+        <p:spPr/>
+      </p:sp>
+      <p:sp>
+        <p:nvSpPr>
+          <p:cNvPr id="3" name="Notes Placeholder 2"/>
+          <p:cNvSpPr>
+            <a:spLocks noGrp="1"/>
+          </p:cNvSpPr>
+          <p:nvPr>
+            <p:ph type="body" idx="3" sz="quarter"/>
+          </p:nvPr>
+        </p:nvSpPr>
+        <p:spPr/>
+        <p:txBody>
+          <a:bodyPr/>
+          <a:lstStyle/>
+          <a:p>
+            <a:r>
+              <a:t>Lo que ninguno de los dos muestra es la conversacion interna del sistema en el momento exacto en que eso ocurre.</a:t>
+            </a:r>
+          </a:p>
+          <a:p/>
+          <a:p>
+            <a:r>
+              <a:t>Sobre la linea de vida se dibujan barras de activacion que muestran durante cuanto tiempo ese objeto esta trabajando.</a:t>
+            </a:r>
+          </a:p>
+        </p:txBody>
+      </p:sp>
+      <p:sp>
+        <p:nvSpPr>
+          <p:cNvPr id="4" name="Slide Number Placeholder 3"/>
+          <p:cNvSpPr>
+            <a:spLocks noGrp="1"/>
+          </p:cNvSpPr>
+          <p:nvPr>
+            <p:ph type="sldNum" idx="5" sz="quarter"/>
+          </p:nvPr>
+        </p:nvSpPr>
+        <p:spPr/>
+      </p:sp>
+    </p:spTree>
+  </p:cSld>
+  <p:clrMapOvr>
+    <a:masterClrMapping/>
+  </p:clrMapOvr>
+</p:notes>
+</file>
+
+<file path=ppt/notesSlides/notesSlide2.xml><?xml version="1.0" encoding="utf-8"?>
+<p:notes xmlns:a="http://schemas.openxmlformats.org/drawingml/2006/main" xmlns:p="http://schemas.openxmlformats.org/presentationml/2006/main" xmlns:r="http://schemas.openxmlformats.org/officeDocument/2006/relationships">
+  <p:cSld>
+    <p:spTree>
+      <p:nvGrpSpPr>
+        <p:cNvPr id="1" name=""/>
+        <p:cNvGrpSpPr/>
+        <p:nvPr/>
+      </p:nvGrpSpPr>
+      <p:grpSpPr>
+        <a:xfrm>
+          <a:off x="0" y="0"/>
+          <a:ext cx="0" cy="0"/>
+          <a:chOff x="0" y="0"/>
+          <a:chExt cx="0" cy="0"/>
+        </a:xfrm>
+      </p:grpSpPr>
+      <p:sp>
+        <p:nvSpPr>
+          <p:cNvPr id="2" name="Slide Image Placeholder 1"/>
+          <p:cNvSpPr>
+            <a:spLocks noGrp="1"/>
+          </p:cNvSpPr>
+          <p:nvPr>
+            <p:ph type="sldImg" idx="2"/>
+          </p:nvPr>
+        </p:nvSpPr>
+        <p:spPr/>
+      </p:sp>
+      <p:sp>
+        <p:nvSpPr>
+          <p:cNvPr id="3" name="Notes Placeholder 2"/>
+          <p:cNvSpPr>
+            <a:spLocks noGrp="1"/>
+          </p:cNvSpPr>
+          <p:nvPr>
+            <p:ph type="body" idx="3" sz="quarter"/>
+          </p:nvPr>
+        </p:nvSpPr>
+        <p:spPr/>
+        <p:txBody>
+          <a:bodyPr/>
+          <a:lstStyle/>
+          <a:p>
+            <a:r>
+              <a:t>Eso permite modelar el proceso completo de atencion en Huellitas: el propietario llega y pregunta, la recepcionista verifica la cita, si no la tiene se decide entre esperar o reagendar, el veterinario atiende, registra la consulta y si formula medicamentos el flujo se abre en dos ramas paralelas, una de facturacion y otra de programacion del control.</a:t>
+            </a:r>
+          </a:p>
+        </p:txBody>
+      </p:sp>
+      <p:sp>
+        <p:nvSpPr>
+          <p:cNvPr id="4" name="Slide Number Placeholder 3"/>
+          <p:cNvSpPr>
+            <a:spLocks noGrp="1"/>
+          </p:cNvSpPr>
+          <p:nvPr>
+            <p:ph type="sldNum" idx="5" sz="quarter"/>
+          </p:nvPr>
+        </p:nvSpPr>
+        <p:spPr/>
+      </p:sp>
+    </p:spTree>
+  </p:cSld>
+  <p:clrMapOvr>
+    <a:masterClrMapping/>
+  </p:clrMapOvr>
+</p:notes>
+</file>
+
+<file path=ppt/notesSlides/notesSlide3.xml><?xml version="1.0" encoding="utf-8"?>
+<p:notes xmlns:a="http://schemas.openxmlformats.org/drawingml/2006/main" xmlns:p="http://schemas.openxmlformats.org/presentationml/2006/main" xmlns:r="http://schemas.openxmlformats.org/officeDocument/2006/relationships">
+  <p:cSld>
+    <p:spTree>
+      <p:nvGrpSpPr>
+        <p:cNvPr id="1" name=""/>
+        <p:cNvGrpSpPr/>
+        <p:nvPr/>
+      </p:nvGrpSpPr>
+      <p:grpSpPr>
+        <a:xfrm>
+          <a:off x="0" y="0"/>
+          <a:ext cx="0" cy="0"/>
+          <a:chOff x="0" y="0"/>
+          <a:chExt cx="0" cy="0"/>
+        </a:xfrm>
+      </p:grpSpPr>
+      <p:sp>
+        <p:nvSpPr>
+          <p:cNvPr id="2" name="Slide Image Placeholder 1"/>
+          <p:cNvSpPr>
+            <a:spLocks noGrp="1"/>
+          </p:cNvSpPr>
+          <p:nvPr>
+            <p:ph type="sldImg" idx="2"/>
+          </p:nvPr>
+        </p:nvSpPr>
+        <p:spPr/>
+      </p:sp>
+      <p:sp>
+        <p:nvSpPr>
+          <p:cNvPr id="3" name="Notes Placeholder 2"/>
+          <p:cNvSpPr>
+            <a:spLocks noGrp="1"/>
+          </p:cNvSpPr>
+          <p:nvPr>
+            <p:ph type="body" idx="3" sz="quarter"/>
+          </p:nvPr>
+        </p:nvSpPr>
+        <p:spPr/>
+        <p:txBody>
+          <a:bodyPr/>
+          <a:lstStyle/>
+          <a:p>
+            <a:r>
+              <a:t>Cada paso del flujo principal del caso de uso se convierte en uno o varios mensajes del diagrama de secuencia, en el mismo orden y con los mismos nombres del glosario canonico que se fijo en la auditoria de la clase once.</a:t>
+            </a:r>
+          </a:p>
+          <a:p/>
+          <a:p>
+            <a:r>
+              <a:t>Eso no es un fracaso del diagrama de secuencia, es su mayor utilidad, porque es la unica manera barata de detectar que el modelo estatico estaba incompleto.</a:t>
+            </a:r>
+          </a:p>
+          <a:p/>
+          <a:p>
+            <a:r>
+              <a:t>Por eso el entregable de hoy incluye la tabla de mapeo mensaje a operacion: obliga a cerrar el circulo entre lo dinamico y lo estatico.</a:t>
+            </a:r>
+          </a:p>
+        </p:txBody>
+      </p:sp>
+      <p:sp>
+        <p:nvSpPr>
+          <p:cNvPr id="4" name="Slide Number Placeholder 3"/>
+          <p:cNvSpPr>
+            <a:spLocks noGrp="1"/>
+          </p:cNvSpPr>
+          <p:nvPr>
+            <p:ph type="sldNum" idx="5" sz="quarter"/>
+          </p:nvPr>
+        </p:nvSpPr>
+        <p:spPr/>
+      </p:sp>
+    </p:spTree>
+  </p:cSld>
+  <p:clrMapOvr>
+    <a:masterClrMapping/>
+  </p:clrMapOvr>
+</p:notes>
 </file>
 
 <file path=ppt/slideLayouts/slideLayout1.xml><?xml version="1.0" encoding="utf-8"?>
@@ -6898,13 +7469,13 @@
         <p:spPr>
           <a:xfrm>
             <a:off x="0" y="0"/>
-            <a:ext cx="12191695" cy="1170432"/>
+            <a:ext cx="12191695" cy="164592"/>
           </a:xfrm>
           <a:prstGeom prst="rect">
             <a:avLst/>
           </a:prstGeom>
           <a:solidFill>
-            <a:srgbClr val="095292"/>
+            <a:srgbClr val="269CCB"/>
           </a:solidFill>
           <a:ln>
             <a:noFill/>
@@ -6932,251 +7503,9 @@
           </a:p>
         </p:txBody>
       </p:sp>
-      <p:sp>
-        <p:nvSpPr>
-          <p:cNvPr id="3" name="Rectangle 2"/>
-          <p:cNvSpPr/>
-          <p:nvPr/>
-        </p:nvSpPr>
-        <p:spPr>
-          <a:xfrm>
-            <a:off x="0" y="1170432"/>
-            <a:ext cx="12191695" cy="41148"/>
-          </a:xfrm>
-          <a:prstGeom prst="rect">
-            <a:avLst/>
-          </a:prstGeom>
-          <a:solidFill>
-            <a:srgbClr val="FFD000"/>
-          </a:solidFill>
-          <a:ln>
-            <a:noFill/>
-          </a:ln>
-        </p:spPr>
-        <p:style>
-          <a:lnRef idx="1">
-            <a:schemeClr val="accent1"/>
-          </a:lnRef>
-          <a:fillRef idx="3">
-            <a:schemeClr val="accent1"/>
-          </a:fillRef>
-          <a:effectRef idx="2">
-            <a:schemeClr val="accent1"/>
-          </a:effectRef>
-          <a:fontRef idx="minor">
-            <a:schemeClr val="lt1"/>
-          </a:fontRef>
-        </p:style>
-        <p:txBody>
-          <a:bodyPr rtlCol="0" anchor="ctr"/>
-          <a:lstStyle/>
-          <a:p>
-            <a:pPr algn="ctr"/>
-          </a:p>
-        </p:txBody>
-      </p:sp>
-      <p:sp>
-        <p:nvSpPr>
-          <p:cNvPr id="4" name="TextBox 3"/>
-          <p:cNvSpPr txBox="1"/>
-          <p:nvPr/>
-        </p:nvSpPr>
-        <p:spPr>
-          <a:xfrm>
-            <a:off x="457200" y="164592"/>
-            <a:ext cx="11277295" cy="384048"/>
-          </a:xfrm>
-          <a:prstGeom prst="rect">
-            <a:avLst/>
-          </a:prstGeom>
-          <a:noFill/>
-        </p:spPr>
-        <p:txBody>
-          <a:bodyPr wrap="square">
-            <a:spAutoFit/>
-          </a:bodyPr>
-          <a:lstStyle/>
-          <a:p>
-            <a:r>
-              <a:rPr sz="2600" b="1" i="0">
-                <a:solidFill>
-                  <a:srgbClr val="FFFFFF"/>
-                </a:solidFill>
-                <a:latin typeface="Calibri"/>
-              </a:rPr>
-              <a:t>Herramientas de hoy</a:t>
-            </a:r>
-          </a:p>
-        </p:txBody>
-      </p:sp>
-      <p:sp>
-        <p:nvSpPr>
-          <p:cNvPr id="5" name="TextBox 4"/>
-          <p:cNvSpPr txBox="1"/>
-          <p:nvPr/>
-        </p:nvSpPr>
-        <p:spPr>
-          <a:xfrm>
-            <a:off x="457200" y="566928"/>
-            <a:ext cx="11277295" cy="411480"/>
-          </a:xfrm>
-          <a:prstGeom prst="rect">
-            <a:avLst/>
-          </a:prstGeom>
-          <a:noFill/>
-        </p:spPr>
-        <p:txBody>
-          <a:bodyPr wrap="square">
-            <a:spAutoFit/>
-          </a:bodyPr>
-          <a:lstStyle/>
-          <a:p>
-            <a:r>
-              <a:rPr sz="1400" b="0" i="0">
-                <a:solidFill>
-                  <a:srgbClr val="B8D8EE"/>
-                </a:solidFill>
-                <a:latin typeface="Calibri"/>
-              </a:rPr>
-              <a:t>Gratis · funcionan en el navegador</a:t>
-            </a:r>
-          </a:p>
-        </p:txBody>
-      </p:sp>
-      <p:sp>
-        <p:nvSpPr>
-          <p:cNvPr id="6" name="Rounded Rectangle 5"/>
-          <p:cNvSpPr/>
-          <p:nvPr/>
-        </p:nvSpPr>
-        <p:spPr>
-          <a:xfrm>
-            <a:off x="457200" y="1591056"/>
-            <a:ext cx="3624986" cy="2331720"/>
-          </a:xfrm>
-          <a:prstGeom prst="roundRect">
-            <a:avLst>
-              <a:gd name="adj" fmla="val 12000"/>
-            </a:avLst>
-          </a:prstGeom>
-          <a:solidFill>
-            <a:srgbClr val="F2F2F2"/>
-          </a:solidFill>
-          <a:ln>
-            <a:noFill/>
-          </a:ln>
-        </p:spPr>
-        <p:style>
-          <a:lnRef idx="1">
-            <a:schemeClr val="accent1"/>
-          </a:lnRef>
-          <a:fillRef idx="3">
-            <a:schemeClr val="accent1"/>
-          </a:fillRef>
-          <a:effectRef idx="2">
-            <a:schemeClr val="accent1"/>
-          </a:effectRef>
-          <a:fontRef idx="minor">
-            <a:schemeClr val="lt1"/>
-          </a:fontRef>
-        </p:style>
-        <p:txBody>
-          <a:bodyPr rtlCol="0" anchor="ctr"/>
-          <a:lstStyle/>
-          <a:p>
-            <a:pPr algn="ctr"/>
-          </a:p>
-        </p:txBody>
-      </p:sp>
-      <p:sp>
-        <p:nvSpPr>
-          <p:cNvPr id="7" name="Rectangle 6"/>
-          <p:cNvSpPr/>
-          <p:nvPr/>
-        </p:nvSpPr>
-        <p:spPr>
-          <a:xfrm>
-            <a:off x="457200" y="1591056"/>
-            <a:ext cx="3624986" cy="64008"/>
-          </a:xfrm>
-          <a:prstGeom prst="rect">
-            <a:avLst/>
-          </a:prstGeom>
-          <a:solidFill>
-            <a:srgbClr val="095292"/>
-          </a:solidFill>
-          <a:ln>
-            <a:noFill/>
-          </a:ln>
-        </p:spPr>
-        <p:style>
-          <a:lnRef idx="1">
-            <a:schemeClr val="accent1"/>
-          </a:lnRef>
-          <a:fillRef idx="3">
-            <a:schemeClr val="accent1"/>
-          </a:fillRef>
-          <a:effectRef idx="2">
-            <a:schemeClr val="accent1"/>
-          </a:effectRef>
-          <a:fontRef idx="minor">
-            <a:schemeClr val="lt1"/>
-          </a:fontRef>
-        </p:style>
-        <p:txBody>
-          <a:bodyPr rtlCol="0" anchor="ctr"/>
-          <a:lstStyle/>
-          <a:p>
-            <a:pPr algn="ctr"/>
-          </a:p>
-        </p:txBody>
-      </p:sp>
-      <p:sp>
-        <p:nvSpPr>
-          <p:cNvPr id="8" name="Rectangle 7"/>
-          <p:cNvSpPr/>
-          <p:nvPr/>
-        </p:nvSpPr>
-        <p:spPr>
-          <a:xfrm>
-            <a:off x="457200" y="1655064"/>
-            <a:ext cx="3624986" cy="27432"/>
-          </a:xfrm>
-          <a:prstGeom prst="rect">
-            <a:avLst/>
-          </a:prstGeom>
-          <a:solidFill>
-            <a:srgbClr val="FFD000"/>
-          </a:solidFill>
-          <a:ln>
-            <a:noFill/>
-          </a:ln>
-        </p:spPr>
-        <p:style>
-          <a:lnRef idx="1">
-            <a:schemeClr val="accent1"/>
-          </a:lnRef>
-          <a:fillRef idx="3">
-            <a:schemeClr val="accent1"/>
-          </a:fillRef>
-          <a:effectRef idx="2">
-            <a:schemeClr val="accent1"/>
-          </a:effectRef>
-          <a:fontRef idx="minor">
-            <a:schemeClr val="lt1"/>
-          </a:fontRef>
-        </p:style>
-        <p:txBody>
-          <a:bodyPr rtlCol="0" anchor="ctr"/>
-          <a:lstStyle/>
-          <a:p>
-            <a:pPr algn="ctr"/>
-          </a:p>
-        </p:txBody>
-      </p:sp>
       <p:pic>
         <p:nvPicPr>
-          <p:cNvPr id="9" name="Picture 8" descr="drawio.png"/>
+          <p:cNvPr id="3" name="Picture 2" descr="logo_uniajc_color.png"/>
           <p:cNvPicPr>
             <a:picLocks noChangeAspect="1"/>
           </p:cNvPicPr>
@@ -7190,8 +7519,8 @@
         </p:blipFill>
         <p:spPr>
           <a:xfrm>
-            <a:off x="1643329" y="1847087"/>
-            <a:ext cx="1252728" cy="1252728"/>
+            <a:off x="10271455" y="5998464"/>
+            <a:ext cx="1463040" cy="643233"/>
           </a:xfrm>
           <a:prstGeom prst="rect">
             <a:avLst/>
@@ -7200,14 +7529,14 @@
       </p:pic>
       <p:sp>
         <p:nvSpPr>
-          <p:cNvPr id="10" name="TextBox 9"/>
+          <p:cNvPr id="4" name="TextBox 3"/>
           <p:cNvSpPr txBox="1"/>
           <p:nvPr/>
         </p:nvSpPr>
         <p:spPr>
           <a:xfrm>
-            <a:off x="530352" y="3191256"/>
-            <a:ext cx="3478682" cy="621792"/>
+            <a:off x="457200" y="1737360"/>
+            <a:ext cx="11277295" cy="1097280"/>
           </a:xfrm>
           <a:prstGeom prst="rect">
             <a:avLst/>
@@ -7215,456 +7544,32 @@
           <a:noFill/>
         </p:spPr>
         <p:txBody>
-          <a:bodyPr wrap="square" anchor="t"/>
+          <a:bodyPr wrap="square" anchor="ctr"/>
           <a:lstStyle/>
           <a:p>
             <a:pPr algn="ctr"/>
             <a:r>
-              <a:rPr sz="1300" b="1" i="0">
+              <a:rPr sz="3400" b="1" i="0">
                 <a:solidFill>
                   <a:srgbClr val="095292"/>
                 </a:solidFill>
                 <a:latin typeface="Calibri"/>
               </a:rPr>
-              <a:t>Draw.Io</a:t>
-            </a:r>
-          </a:p>
-          <a:p>
-            <a:pPr algn="ctr">
-              <a:spcBef>
-                <a:spcPts val="200"/>
-              </a:spcBef>
-            </a:pPr>
-            <a:r>
-              <a:rPr sz="1000" b="0" i="0">
-                <a:solidFill>
-                  <a:srgbClr val="666666"/>
-                </a:solidFill>
-                <a:latin typeface="Calibri"/>
-              </a:rPr>
-              <a:t>Diagramas UML y de contexto</a:t>
-            </a:r>
-          </a:p>
-        </p:txBody>
-      </p:sp>
-      <p:sp>
-        <p:nvSpPr>
-          <p:cNvPr id="11" name="Rounded Rectangle 10"/>
-          <p:cNvSpPr/>
-          <p:nvPr/>
-        </p:nvSpPr>
-        <p:spPr>
-          <a:xfrm>
-            <a:off x="4283354" y="1591056"/>
-            <a:ext cx="3624986" cy="2331720"/>
-          </a:xfrm>
-          <a:prstGeom prst="roundRect">
-            <a:avLst>
-              <a:gd name="adj" fmla="val 12000"/>
-            </a:avLst>
-          </a:prstGeom>
-          <a:solidFill>
-            <a:srgbClr val="F2F2F2"/>
-          </a:solidFill>
-          <a:ln>
-            <a:noFill/>
-          </a:ln>
-        </p:spPr>
-        <p:style>
-          <a:lnRef idx="1">
-            <a:schemeClr val="accent1"/>
-          </a:lnRef>
-          <a:fillRef idx="3">
-            <a:schemeClr val="accent1"/>
-          </a:fillRef>
-          <a:effectRef idx="2">
-            <a:schemeClr val="accent1"/>
-          </a:effectRef>
-          <a:fontRef idx="minor">
-            <a:schemeClr val="lt1"/>
-          </a:fontRef>
-        </p:style>
-        <p:txBody>
-          <a:bodyPr rtlCol="0" anchor="ctr"/>
-          <a:lstStyle/>
-          <a:p>
-            <a:pPr algn="ctr"/>
-          </a:p>
-        </p:txBody>
-      </p:sp>
-      <p:sp>
-        <p:nvSpPr>
-          <p:cNvPr id="12" name="Rectangle 11"/>
-          <p:cNvSpPr/>
-          <p:nvPr/>
-        </p:nvSpPr>
-        <p:spPr>
-          <a:xfrm>
-            <a:off x="4283354" y="1591056"/>
-            <a:ext cx="3624986" cy="64008"/>
-          </a:xfrm>
-          <a:prstGeom prst="rect">
-            <a:avLst/>
-          </a:prstGeom>
-          <a:solidFill>
-            <a:srgbClr val="095292"/>
-          </a:solidFill>
-          <a:ln>
-            <a:noFill/>
-          </a:ln>
-        </p:spPr>
-        <p:style>
-          <a:lnRef idx="1">
-            <a:schemeClr val="accent1"/>
-          </a:lnRef>
-          <a:fillRef idx="3">
-            <a:schemeClr val="accent1"/>
-          </a:fillRef>
-          <a:effectRef idx="2">
-            <a:schemeClr val="accent1"/>
-          </a:effectRef>
-          <a:fontRef idx="minor">
-            <a:schemeClr val="lt1"/>
-          </a:fontRef>
-        </p:style>
-        <p:txBody>
-          <a:bodyPr rtlCol="0" anchor="ctr"/>
-          <a:lstStyle/>
-          <a:p>
-            <a:pPr algn="ctr"/>
-          </a:p>
-        </p:txBody>
-      </p:sp>
-      <p:sp>
-        <p:nvSpPr>
-          <p:cNvPr id="13" name="Rectangle 12"/>
-          <p:cNvSpPr/>
-          <p:nvPr/>
-        </p:nvSpPr>
-        <p:spPr>
-          <a:xfrm>
-            <a:off x="4283354" y="1655064"/>
-            <a:ext cx="3624986" cy="27432"/>
-          </a:xfrm>
-          <a:prstGeom prst="rect">
-            <a:avLst/>
-          </a:prstGeom>
-          <a:solidFill>
-            <a:srgbClr val="FFD000"/>
-          </a:solidFill>
-          <a:ln>
-            <a:noFill/>
-          </a:ln>
-        </p:spPr>
-        <p:style>
-          <a:lnRef idx="1">
-            <a:schemeClr val="accent1"/>
-          </a:lnRef>
-          <a:fillRef idx="3">
-            <a:schemeClr val="accent1"/>
-          </a:fillRef>
-          <a:effectRef idx="2">
-            <a:schemeClr val="accent1"/>
-          </a:effectRef>
-          <a:fontRef idx="minor">
-            <a:schemeClr val="lt1"/>
-          </a:fontRef>
-        </p:style>
-        <p:txBody>
-          <a:bodyPr rtlCol="0" anchor="ctr"/>
-          <a:lstStyle/>
-          <a:p>
-            <a:pPr algn="ctr"/>
-          </a:p>
-        </p:txBody>
-      </p:sp>
-      <p:pic>
-        <p:nvPicPr>
-          <p:cNvPr id="14" name="Picture 13" descr="mermaid.png"/>
-          <p:cNvPicPr>
-            <a:picLocks noChangeAspect="1"/>
-          </p:cNvPicPr>
-          <p:nvPr/>
-        </p:nvPicPr>
-        <p:blipFill>
-          <a:blip r:embed="rId3"/>
-          <a:stretch>
-            <a:fillRect/>
-          </a:stretch>
-        </p:blipFill>
-        <p:spPr>
-          <a:xfrm>
-            <a:off x="5469483" y="1847087"/>
-            <a:ext cx="1252728" cy="1252728"/>
-          </a:xfrm>
-          <a:prstGeom prst="rect">
-            <a:avLst/>
-          </a:prstGeom>
-        </p:spPr>
-      </p:pic>
-      <p:sp>
-        <p:nvSpPr>
-          <p:cNvPr id="15" name="TextBox 14"/>
+              <a:t>Clase 12 · Diagramas UML avanzados</a:t>
+            </a:r>
+          </a:p>
+        </p:txBody>
+      </p:sp>
+      <p:sp>
+        <p:nvSpPr>
+          <p:cNvPr id="5" name="TextBox 4"/>
           <p:cNvSpPr txBox="1"/>
           <p:nvPr/>
         </p:nvSpPr>
         <p:spPr>
           <a:xfrm>
-            <a:off x="4356506" y="3191256"/>
-            <a:ext cx="3478682" cy="621792"/>
-          </a:xfrm>
-          <a:prstGeom prst="rect">
-            <a:avLst/>
-          </a:prstGeom>
-          <a:noFill/>
-        </p:spPr>
-        <p:txBody>
-          <a:bodyPr wrap="square" anchor="t"/>
-          <a:lstStyle/>
-          <a:p>
-            <a:pPr algn="ctr"/>
-            <a:r>
-              <a:rPr sz="1300" b="1" i="0">
-                <a:solidFill>
-                  <a:srgbClr val="095292"/>
-                </a:solidFill>
-                <a:latin typeface="Calibri"/>
-              </a:rPr>
-              <a:t>Mermaid</a:t>
-            </a:r>
-          </a:p>
-          <a:p>
-            <a:pPr algn="ctr">
-              <a:spcBef>
-                <a:spcPts val="200"/>
-              </a:spcBef>
-            </a:pPr>
-            <a:r>
-              <a:rPr sz="1000" b="0" i="0">
-                <a:solidFill>
-                  <a:srgbClr val="666666"/>
-                </a:solidFill>
-                <a:latin typeface="Calibri"/>
-              </a:rPr>
-              <a:t>Diagramas como texto versionable</a:t>
-            </a:r>
-          </a:p>
-        </p:txBody>
-      </p:sp>
-      <p:sp>
-        <p:nvSpPr>
-          <p:cNvPr id="16" name="Rounded Rectangle 15"/>
-          <p:cNvSpPr/>
-          <p:nvPr/>
-        </p:nvSpPr>
-        <p:spPr>
-          <a:xfrm>
-            <a:off x="8109508" y="1591056"/>
-            <a:ext cx="3624986" cy="2331720"/>
-          </a:xfrm>
-          <a:prstGeom prst="roundRect">
-            <a:avLst>
-              <a:gd name="adj" fmla="val 12000"/>
-            </a:avLst>
-          </a:prstGeom>
-          <a:solidFill>
-            <a:srgbClr val="F2F2F2"/>
-          </a:solidFill>
-          <a:ln>
-            <a:noFill/>
-          </a:ln>
-        </p:spPr>
-        <p:style>
-          <a:lnRef idx="1">
-            <a:schemeClr val="accent1"/>
-          </a:lnRef>
-          <a:fillRef idx="3">
-            <a:schemeClr val="accent1"/>
-          </a:fillRef>
-          <a:effectRef idx="2">
-            <a:schemeClr val="accent1"/>
-          </a:effectRef>
-          <a:fontRef idx="minor">
-            <a:schemeClr val="lt1"/>
-          </a:fontRef>
-        </p:style>
-        <p:txBody>
-          <a:bodyPr rtlCol="0" anchor="ctr"/>
-          <a:lstStyle/>
-          <a:p>
-            <a:pPr algn="ctr"/>
-          </a:p>
-        </p:txBody>
-      </p:sp>
-      <p:sp>
-        <p:nvSpPr>
-          <p:cNvPr id="17" name="Rectangle 16"/>
-          <p:cNvSpPr/>
-          <p:nvPr/>
-        </p:nvSpPr>
-        <p:spPr>
-          <a:xfrm>
-            <a:off x="8109508" y="1591056"/>
-            <a:ext cx="3624986" cy="64008"/>
-          </a:xfrm>
-          <a:prstGeom prst="rect">
-            <a:avLst/>
-          </a:prstGeom>
-          <a:solidFill>
-            <a:srgbClr val="095292"/>
-          </a:solidFill>
-          <a:ln>
-            <a:noFill/>
-          </a:ln>
-        </p:spPr>
-        <p:style>
-          <a:lnRef idx="1">
-            <a:schemeClr val="accent1"/>
-          </a:lnRef>
-          <a:fillRef idx="3">
-            <a:schemeClr val="accent1"/>
-          </a:fillRef>
-          <a:effectRef idx="2">
-            <a:schemeClr val="accent1"/>
-          </a:effectRef>
-          <a:fontRef idx="minor">
-            <a:schemeClr val="lt1"/>
-          </a:fontRef>
-        </p:style>
-        <p:txBody>
-          <a:bodyPr rtlCol="0" anchor="ctr"/>
-          <a:lstStyle/>
-          <a:p>
-            <a:pPr algn="ctr"/>
-          </a:p>
-        </p:txBody>
-      </p:sp>
-      <p:sp>
-        <p:nvSpPr>
-          <p:cNvPr id="18" name="Rectangle 17"/>
-          <p:cNvSpPr/>
-          <p:nvPr/>
-        </p:nvSpPr>
-        <p:spPr>
-          <a:xfrm>
-            <a:off x="8109508" y="1655064"/>
-            <a:ext cx="3624986" cy="27432"/>
-          </a:xfrm>
-          <a:prstGeom prst="rect">
-            <a:avLst/>
-          </a:prstGeom>
-          <a:solidFill>
-            <a:srgbClr val="FFD000"/>
-          </a:solidFill>
-          <a:ln>
-            <a:noFill/>
-          </a:ln>
-        </p:spPr>
-        <p:style>
-          <a:lnRef idx="1">
-            <a:schemeClr val="accent1"/>
-          </a:lnRef>
-          <a:fillRef idx="3">
-            <a:schemeClr val="accent1"/>
-          </a:fillRef>
-          <a:effectRef idx="2">
-            <a:schemeClr val="accent1"/>
-          </a:effectRef>
-          <a:fontRef idx="minor">
-            <a:schemeClr val="lt1"/>
-          </a:fontRef>
-        </p:style>
-        <p:txBody>
-          <a:bodyPr rtlCol="0" anchor="ctr"/>
-          <a:lstStyle/>
-          <a:p>
-            <a:pPr algn="ctr"/>
-          </a:p>
-        </p:txBody>
-      </p:sp>
-      <p:pic>
-        <p:nvPicPr>
-          <p:cNvPr id="19" name="Picture 18" descr="examlab.png"/>
-          <p:cNvPicPr>
-            <a:picLocks noChangeAspect="1"/>
-          </p:cNvPicPr>
-          <p:nvPr/>
-        </p:nvPicPr>
-        <p:blipFill>
-          <a:blip r:embed="rId4"/>
-          <a:stretch>
-            <a:fillRect/>
-          </a:stretch>
-        </p:blipFill>
-        <p:spPr>
-          <a:xfrm>
-            <a:off x="9295638" y="1847087"/>
-            <a:ext cx="1252728" cy="1252728"/>
-          </a:xfrm>
-          <a:prstGeom prst="rect">
-            <a:avLst/>
-          </a:prstGeom>
-        </p:spPr>
-      </p:pic>
-      <p:sp>
-        <p:nvSpPr>
-          <p:cNvPr id="20" name="TextBox 19"/>
-          <p:cNvSpPr txBox="1"/>
-          <p:nvPr/>
-        </p:nvSpPr>
-        <p:spPr>
-          <a:xfrm>
-            <a:off x="8182660" y="3191256"/>
-            <a:ext cx="3478682" cy="621792"/>
-          </a:xfrm>
-          <a:prstGeom prst="rect">
-            <a:avLst/>
-          </a:prstGeom>
-          <a:noFill/>
-        </p:spPr>
-        <p:txBody>
-          <a:bodyPr wrap="square" anchor="t"/>
-          <a:lstStyle/>
-          <a:p>
-            <a:pPr algn="ctr"/>
-            <a:r>
-              <a:rPr sz="1300" b="1" i="0">
-                <a:solidFill>
-                  <a:srgbClr val="095292"/>
-                </a:solidFill>
-                <a:latin typeface="Calibri"/>
-              </a:rPr>
-              <a:t>la plataforma del curso</a:t>
-            </a:r>
-          </a:p>
-          <a:p>
-            <a:pPr algn="ctr">
-              <a:spcBef>
-                <a:spcPts val="200"/>
-              </a:spcBef>
-            </a:pPr>
-            <a:r>
-              <a:rPr sz="1000" b="0" i="0">
-                <a:solidFill>
-                  <a:srgbClr val="666666"/>
-                </a:solidFill>
-                <a:latin typeface="Calibri"/>
-              </a:rPr>
-              <a:t>Entrega del taller · en la fecha que indique el docente</a:t>
-            </a:r>
-          </a:p>
-        </p:txBody>
-      </p:sp>
-      <p:sp>
-        <p:nvSpPr>
-          <p:cNvPr id="21" name="TextBox 20"/>
-          <p:cNvSpPr txBox="1"/>
-          <p:nvPr/>
-        </p:nvSpPr>
-        <p:spPr>
-          <a:xfrm>
-            <a:off x="11185855" y="6473952"/>
-            <a:ext cx="640080" cy="274320"/>
+            <a:off x="457200" y="3017520"/>
+            <a:ext cx="11277295" cy="1645920"/>
           </a:xfrm>
           <a:prstGeom prst="rect">
             <a:avLst/>
@@ -7677,141 +7582,65 @@
           </a:bodyPr>
           <a:lstStyle/>
           <a:p>
-            <a:pPr algn="r"/>
-            <a:r>
-              <a:rPr sz="1100" b="0" i="0">
-                <a:solidFill>
-                  <a:srgbClr val="666666"/>
-                </a:solidFill>
-                <a:latin typeface="Calibri"/>
-              </a:rPr>
-              <a:t>18</a:t>
-            </a:r>
-          </a:p>
-        </p:txBody>
-      </p:sp>
-    </p:spTree>
-  </p:cSld>
-  <p:clrMapOvr>
-    <a:masterClrMapping/>
-  </p:clrMapOvr>
-</p:sld>
-</file>
-
-<file path=ppt/slides/slide19.xml><?xml version="1.0" encoding="utf-8"?>
-<p:sld xmlns:a="http://schemas.openxmlformats.org/drawingml/2006/main" xmlns:p="http://schemas.openxmlformats.org/presentationml/2006/main" xmlns:r="http://schemas.openxmlformats.org/officeDocument/2006/relationships">
-  <p:cSld>
-    <p:bg>
-      <p:bgPr>
-        <a:solidFill>
-          <a:srgbClr val="FFFFFF"/>
-        </a:solidFill>
-        <a:effectLst/>
-      </p:bgPr>
-    </p:bg>
-    <p:spTree>
-      <p:nvGrpSpPr>
-        <p:cNvPr id="1" name=""/>
-        <p:cNvGrpSpPr/>
-        <p:nvPr/>
-      </p:nvGrpSpPr>
-      <p:grpSpPr/>
-      <p:sp>
-        <p:nvSpPr>
-          <p:cNvPr id="2" name="Rectangle 1"/>
-          <p:cNvSpPr/>
-          <p:nvPr/>
-        </p:nvSpPr>
-        <p:spPr>
-          <a:xfrm>
-            <a:off x="0" y="0"/>
-            <a:ext cx="12191695" cy="960120"/>
-          </a:xfrm>
-          <a:prstGeom prst="rect">
-            <a:avLst/>
-          </a:prstGeom>
-          <a:solidFill>
-            <a:srgbClr val="095292"/>
-          </a:solidFill>
-          <a:ln>
-            <a:noFill/>
-          </a:ln>
-        </p:spPr>
-        <p:style>
-          <a:lnRef idx="1">
-            <a:schemeClr val="accent1"/>
-          </a:lnRef>
-          <a:fillRef idx="3">
-            <a:schemeClr val="accent1"/>
-          </a:fillRef>
-          <a:effectRef idx="2">
-            <a:schemeClr val="accent1"/>
-          </a:effectRef>
-          <a:fontRef idx="minor">
-            <a:schemeClr val="lt1"/>
-          </a:fontRef>
-        </p:style>
-        <p:txBody>
-          <a:bodyPr rtlCol="0" anchor="ctr"/>
-          <a:lstStyle/>
-          <a:p>
-            <a:pPr algn="ctr"/>
-          </a:p>
-        </p:txBody>
-      </p:sp>
-      <p:sp>
-        <p:nvSpPr>
-          <p:cNvPr id="3" name="Rectangle 2"/>
-          <p:cNvSpPr/>
-          <p:nvPr/>
-        </p:nvSpPr>
-        <p:spPr>
-          <a:xfrm>
-            <a:off x="0" y="960120"/>
-            <a:ext cx="12191695" cy="41148"/>
-          </a:xfrm>
-          <a:prstGeom prst="rect">
-            <a:avLst/>
-          </a:prstGeom>
-          <a:solidFill>
-            <a:srgbClr val="FFD000"/>
-          </a:solidFill>
-          <a:ln>
-            <a:noFill/>
-          </a:ln>
-        </p:spPr>
-        <p:style>
-          <a:lnRef idx="1">
-            <a:schemeClr val="accent1"/>
-          </a:lnRef>
-          <a:fillRef idx="3">
-            <a:schemeClr val="accent1"/>
-          </a:fillRef>
-          <a:effectRef idx="2">
-            <a:schemeClr val="accent1"/>
-          </a:effectRef>
-          <a:fontRef idx="minor">
-            <a:schemeClr val="lt1"/>
-          </a:fontRef>
-        </p:style>
-        <p:txBody>
-          <a:bodyPr rtlCol="0" anchor="ctr"/>
-          <a:lstStyle/>
-          <a:p>
-            <a:pPr algn="ctr"/>
-          </a:p>
-        </p:txBody>
-      </p:sp>
-      <p:sp>
-        <p:nvSpPr>
-          <p:cNvPr id="4" name="TextBox 3"/>
+            <a:pPr algn="ctr">
+              <a:spcAft>
+                <a:spcPts val="600"/>
+              </a:spcAft>
+            </a:pPr>
+            <a:r>
+              <a:rPr sz="1600" b="0" i="0">
+                <a:solidFill>
+                  <a:srgbClr val="333333"/>
+                </a:solidFill>
+                <a:latin typeface="Calibri"/>
+              </a:rPr>
+              <a:t>Secuencia: quien le habla a quien. Actividad: en que orden ocurre el trabajo</a:t>
+            </a:r>
+          </a:p>
+          <a:p>
+            <a:pPr algn="ctr">
+              <a:spcAft>
+                <a:spcPts val="600"/>
+              </a:spcAft>
+            </a:pPr>
+            <a:r>
+              <a:rPr sz="1600" b="0" i="0">
+                <a:solidFill>
+                  <a:srgbClr val="333333"/>
+                </a:solidFill>
+                <a:latin typeface="Calibri"/>
+              </a:rPr>
+              <a:t>Repasen las laminas de teoria: cada concepto esta completo</a:t>
+            </a:r>
+          </a:p>
+          <a:p>
+            <a:pPr algn="ctr">
+              <a:spcAft>
+                <a:spcPts val="600"/>
+              </a:spcAft>
+            </a:pPr>
+            <a:r>
+              <a:rPr sz="1600" b="0" i="0">
+                <a:solidFill>
+                  <a:srgbClr val="333333"/>
+                </a:solidFill>
+                <a:latin typeface="Calibri"/>
+              </a:rPr>
+              <a:t>Siguiente clase: continuamos con el siguiente tema</a:t>
+            </a:r>
+          </a:p>
+        </p:txBody>
+      </p:sp>
+      <p:sp>
+        <p:nvSpPr>
+          <p:cNvPr id="6" name="TextBox 5"/>
           <p:cNvSpPr txBox="1"/>
           <p:nvPr/>
         </p:nvSpPr>
         <p:spPr>
           <a:xfrm>
-            <a:off x="457200" y="164592"/>
-            <a:ext cx="11277295" cy="502920"/>
+            <a:off x="457200" y="4754880"/>
+            <a:ext cx="11277295" cy="640080"/>
           </a:xfrm>
           <a:prstGeom prst="rect">
             <a:avLst/>
@@ -7824,138 +7653,15 @@
           </a:bodyPr>
           <a:lstStyle/>
           <a:p>
-            <a:r>
-              <a:rPr sz="2600" b="1" i="0">
-                <a:solidFill>
-                  <a:srgbClr val="FFFFFF"/>
-                </a:solidFill>
-                <a:latin typeface="Calibri"/>
-              </a:rPr>
-              <a:t>Taller PI — por que importa</a:t>
-            </a:r>
-          </a:p>
-        </p:txBody>
-      </p:sp>
-      <p:sp>
-        <p:nvSpPr>
-          <p:cNvPr id="5" name="TextBox 4"/>
-          <p:cNvSpPr txBox="1"/>
-          <p:nvPr/>
-        </p:nvSpPr>
-        <p:spPr>
-          <a:xfrm>
-            <a:off x="457200" y="1170432"/>
-            <a:ext cx="11277295" cy="5230368"/>
-          </a:xfrm>
-          <a:prstGeom prst="rect">
-            <a:avLst/>
-          </a:prstGeom>
-          <a:noFill/>
-        </p:spPr>
-        <p:txBody>
-          <a:bodyPr wrap="square">
-            <a:spAutoFit/>
-          </a:bodyPr>
-          <a:lstStyle/>
-          <a:p>
-            <a:pPr>
-              <a:spcAft>
-                <a:spcPts val="800"/>
-              </a:spcAft>
-            </a:pPr>
-            <a:r>
-              <a:rPr sz="2000" b="0" i="0">
-                <a:solidFill>
-                  <a:srgbClr val="333333"/>
-                </a:solidFill>
-                <a:latin typeface="Calibri"/>
-              </a:rPr>
-              <a:t>–   </a:t>
-            </a:r>
+            <a:pPr algn="ctr"/>
             <a:r>
               <a:rPr sz="2000" b="1" i="0">
                 <a:solidFill>
-                  <a:srgbClr val="333333"/>
-                </a:solidFill>
-                <a:latin typeface="Calibri"/>
-              </a:rPr>
-              <a:t>Por que importa al PI:</a:t>
-            </a:r>
-            <a:r>
-              <a:rPr sz="2000" b="0" i="0">
-                <a:solidFill>
-                  <a:srgbClr val="333333"/>
-                </a:solidFill>
-                <a:latin typeface="Calibri"/>
-              </a:rPr>
-              <a:t> los casos de uso dicen que hace VetCare y el diagrama de clases dice de que esta hecho, pero solo los diagramas de secuencia y actividad muestran como colaboran las piezas en el tiempo, que es lo que necesita quien vaya a construirlo.</a:t>
-            </a:r>
-          </a:p>
-          <a:p>
-            <a:pPr>
-              <a:spcAft>
-                <a:spcPts val="800"/>
-              </a:spcAft>
-            </a:pPr>
-            <a:r>
-              <a:rPr sz="2000" b="0" i="0">
-                <a:solidFill>
-                  <a:srgbClr val="333333"/>
-                </a:solidFill>
-                <a:latin typeface="Calibri"/>
-              </a:rPr>
-              <a:t>–   Dibujar la secuencia es la forma mas barata de descubrir que al diagrama de clases le faltan operaciones, porque cada flecha exige un dueño que la pueda responder.</a:t>
-            </a:r>
-          </a:p>
-          <a:p>
-            <a:pPr>
-              <a:spcAft>
-                <a:spcPts val="800"/>
-              </a:spcAft>
-            </a:pPr>
-            <a:r>
-              <a:rPr sz="2000" b="0" i="0">
-                <a:solidFill>
-                  <a:srgbClr val="333333"/>
-                </a:solidFill>
-                <a:latin typeface="Calibri"/>
-              </a:rPr>
-              <a:t>–   El diagrama de actividad es el unico artefacto del paquete que muestra el trabajo humano de la clinica Huellitas, incluidas las esperas y las decisiones que ocurren fuera del computador.</a:t>
-            </a:r>
-          </a:p>
-        </p:txBody>
-      </p:sp>
-      <p:sp>
-        <p:nvSpPr>
-          <p:cNvPr id="6" name="TextBox 5"/>
-          <p:cNvSpPr txBox="1"/>
-          <p:nvPr/>
-        </p:nvSpPr>
-        <p:spPr>
-          <a:xfrm>
-            <a:off x="11185855" y="6473952"/>
-            <a:ext cx="640080" cy="274320"/>
-          </a:xfrm>
-          <a:prstGeom prst="rect">
-            <a:avLst/>
-          </a:prstGeom>
-          <a:noFill/>
-        </p:spPr>
-        <p:txBody>
-          <a:bodyPr wrap="square">
-            <a:spAutoFit/>
-          </a:bodyPr>
-          <a:lstStyle/>
-          <a:p>
-            <a:pPr algn="r"/>
-            <a:r>
-              <a:rPr sz="1100" b="0" i="0">
-                <a:solidFill>
-                  <a:srgbClr val="666666"/>
-                </a:solidFill>
-                <a:latin typeface="Calibri"/>
-              </a:rPr>
-              <a:t>19</a:t>
+                  <a:srgbClr val="269CCB"/>
+                </a:solidFill>
+                <a:latin typeface="Calibri"/>
+              </a:rPr>
+              <a:t>Teoria al servicio del diseño</a:t>
             </a:r>
           </a:p>
         </p:txBody>
@@ -8101,7 +7807,7 @@
                 </a:solidFill>
                 <a:latin typeface="Calibri"/>
               </a:rPr>
-              <a:t>Encuadre de hoy · Objetivo del PI</a:t>
+              <a:t>Encuadre de hoy</a:t>
             </a:r>
           </a:p>
         </p:txBody>
@@ -8149,7 +7855,7 @@
                 </a:solidFill>
                 <a:latin typeface="Calibri"/>
               </a:rPr>
-              <a:t>Hoy avanzamos VetCare en:</a:t>
+              <a:t>Tema:</a:t>
             </a:r>
             <a:r>
               <a:rPr sz="2000" b="0" i="0">
@@ -8158,7 +7864,7 @@
                 </a:solidFill>
                 <a:latin typeface="Calibri"/>
               </a:rPr>
-              <a:t> Queda modelada la dinamica de VetCare: el diagrama de secuencia del caso de uso Agendar cita y el diagrama de actividad del proceso de atencion en el consultorio.</a:t>
+              <a:t> Diagramas UML avanzados</a:t>
             </a:r>
           </a:p>
           <a:p>
@@ -8174,34 +7880,7 @@
                 </a:solidFill>
                 <a:latin typeface="Calibri"/>
               </a:rPr>
-              <a:t>–   Herramienta: </a:t>
-            </a:r>
-            <a:r>
-              <a:rPr sz="2000" b="1" i="0">
-                <a:solidFill>
-                  <a:srgbClr val="333333"/>
-                </a:solidFill>
-                <a:latin typeface="Calibri"/>
-              </a:rPr>
-              <a:t>draw.io · Mermaid Live Editor</a:t>
-            </a:r>
-            <a:r>
-              <a:rPr sz="2000" b="0" i="0">
-                <a:solidFill>
-                  <a:srgbClr val="333333"/>
-                </a:solidFill>
-                <a:latin typeface="Calibri"/>
-              </a:rPr>
-              <a:t> · Bloque </a:t>
-            </a:r>
-            <a:r>
-              <a:rPr sz="2000" b="1" i="0">
-                <a:solidFill>
-                  <a:srgbClr val="333333"/>
-                </a:solidFill>
-                <a:latin typeface="Calibri"/>
-              </a:rPr>
-              <a:t>120 min</a:t>
+              <a:t>–   Secuencia: quien le habla a quien. Actividad: en que orden ocurre el trabajo</a:t>
             </a:r>
           </a:p>
           <a:p>
@@ -8217,7 +7896,7 @@
                 </a:solidFill>
                 <a:latin typeface="Calibri"/>
               </a:rPr>
-              <a:t>–   </a:t>
+              <a:t>–   Herramienta del tema: </a:t>
             </a:r>
             <a:r>
               <a:rPr sz="2000" b="1" i="0">
@@ -8226,7 +7905,7 @@
                 </a:solidFill>
                 <a:latin typeface="Calibri"/>
               </a:rPr>
-              <a:t>Entregable de hoy:</a:t>
+              <a:t>draw.io · Mermaid Live Editor</a:t>
             </a:r>
             <a:r>
               <a:rPr sz="2000" b="0" i="0">
@@ -8235,7 +7914,16 @@
                 </a:solidFill>
                 <a:latin typeface="Calibri"/>
               </a:rPr>
-              <a:t> Un PDF con el diagrama de secuencia de Agendar cita incluyendo el fragmento alt para horario ocupado, el diagrama de actividad del proceso de atencion con calles por rol, y la tabla que mapea cada mensaje del diagrama de secuencia a una operacion del diagrama de clases, subido a la plataforma del curso.</a:t>
+              <a:t> · Bloque </a:t>
+            </a:r>
+            <a:r>
+              <a:rPr sz="2000" b="1" i="0">
+                <a:solidFill>
+                  <a:srgbClr val="333333"/>
+                </a:solidFill>
+                <a:latin typeface="Calibri"/>
+              </a:rPr>
+              <a:t>120 min</a:t>
             </a:r>
           </a:p>
           <a:p>
@@ -8251,7 +7939,7 @@
                 </a:solidFill>
                 <a:latin typeface="Calibri"/>
               </a:rPr>
-              <a:t>–   La teoria esta al servicio del producto: al salir, VetCare avanzo.</a:t>
+              <a:t>–   Ejemplo de toda la clase: VetCare, el sistema de la clinica «Huellitas».</a:t>
             </a:r>
           </a:p>
         </p:txBody>
@@ -8287,3125 +7975,6 @@
                 <a:latin typeface="Calibri"/>
               </a:rPr>
               <a:t>2</a:t>
-            </a:r>
-          </a:p>
-        </p:txBody>
-      </p:sp>
-    </p:spTree>
-  </p:cSld>
-  <p:clrMapOvr>
-    <a:masterClrMapping/>
-  </p:clrMapOvr>
-</p:sld>
-</file>
-
-<file path=ppt/slides/slide20.xml><?xml version="1.0" encoding="utf-8"?>
-<p:sld xmlns:a="http://schemas.openxmlformats.org/drawingml/2006/main" xmlns:p="http://schemas.openxmlformats.org/presentationml/2006/main" xmlns:r="http://schemas.openxmlformats.org/officeDocument/2006/relationships">
-  <p:cSld>
-    <p:bg>
-      <p:bgPr>
-        <a:solidFill>
-          <a:srgbClr val="FFFFFF"/>
-        </a:solidFill>
-        <a:effectLst/>
-      </p:bgPr>
-    </p:bg>
-    <p:spTree>
-      <p:nvGrpSpPr>
-        <p:cNvPr id="1" name=""/>
-        <p:cNvGrpSpPr/>
-        <p:nvPr/>
-      </p:nvGrpSpPr>
-      <p:grpSpPr/>
-      <p:sp>
-        <p:nvSpPr>
-          <p:cNvPr id="2" name="Rectangle 1"/>
-          <p:cNvSpPr/>
-          <p:nvPr/>
-        </p:nvSpPr>
-        <p:spPr>
-          <a:xfrm>
-            <a:off x="0" y="0"/>
-            <a:ext cx="12191695" cy="960120"/>
-          </a:xfrm>
-          <a:prstGeom prst="rect">
-            <a:avLst/>
-          </a:prstGeom>
-          <a:solidFill>
-            <a:srgbClr val="095292"/>
-          </a:solidFill>
-          <a:ln>
-            <a:noFill/>
-          </a:ln>
-        </p:spPr>
-        <p:style>
-          <a:lnRef idx="1">
-            <a:schemeClr val="accent1"/>
-          </a:lnRef>
-          <a:fillRef idx="3">
-            <a:schemeClr val="accent1"/>
-          </a:fillRef>
-          <a:effectRef idx="2">
-            <a:schemeClr val="accent1"/>
-          </a:effectRef>
-          <a:fontRef idx="minor">
-            <a:schemeClr val="lt1"/>
-          </a:fontRef>
-        </p:style>
-        <p:txBody>
-          <a:bodyPr rtlCol="0" anchor="ctr"/>
-          <a:lstStyle/>
-          <a:p>
-            <a:pPr algn="ctr"/>
-          </a:p>
-        </p:txBody>
-      </p:sp>
-      <p:sp>
-        <p:nvSpPr>
-          <p:cNvPr id="3" name="Rectangle 2"/>
-          <p:cNvSpPr/>
-          <p:nvPr/>
-        </p:nvSpPr>
-        <p:spPr>
-          <a:xfrm>
-            <a:off x="0" y="960120"/>
-            <a:ext cx="12191695" cy="41148"/>
-          </a:xfrm>
-          <a:prstGeom prst="rect">
-            <a:avLst/>
-          </a:prstGeom>
-          <a:solidFill>
-            <a:srgbClr val="FFD000"/>
-          </a:solidFill>
-          <a:ln>
-            <a:noFill/>
-          </a:ln>
-        </p:spPr>
-        <p:style>
-          <a:lnRef idx="1">
-            <a:schemeClr val="accent1"/>
-          </a:lnRef>
-          <a:fillRef idx="3">
-            <a:schemeClr val="accent1"/>
-          </a:fillRef>
-          <a:effectRef idx="2">
-            <a:schemeClr val="accent1"/>
-          </a:effectRef>
-          <a:fontRef idx="minor">
-            <a:schemeClr val="lt1"/>
-          </a:fontRef>
-        </p:style>
-        <p:txBody>
-          <a:bodyPr rtlCol="0" anchor="ctr"/>
-          <a:lstStyle/>
-          <a:p>
-            <a:pPr algn="ctr"/>
-          </a:p>
-        </p:txBody>
-      </p:sp>
-      <p:sp>
-        <p:nvSpPr>
-          <p:cNvPr id="4" name="TextBox 3"/>
-          <p:cNvSpPr txBox="1"/>
-          <p:nvPr/>
-        </p:nvSpPr>
-        <p:spPr>
-          <a:xfrm>
-            <a:off x="457200" y="164592"/>
-            <a:ext cx="11277295" cy="502920"/>
-          </a:xfrm>
-          <a:prstGeom prst="rect">
-            <a:avLst/>
-          </a:prstGeom>
-          <a:noFill/>
-        </p:spPr>
-        <p:txBody>
-          <a:bodyPr wrap="square">
-            <a:spAutoFit/>
-          </a:bodyPr>
-          <a:lstStyle/>
-          <a:p>
-            <a:r>
-              <a:rPr sz="2600" b="1" i="0">
-                <a:solidFill>
-                  <a:srgbClr val="FFFFFF"/>
-                </a:solidFill>
-                <a:latin typeface="Calibri"/>
-              </a:rPr>
-              <a:t>Taller PI — punto de partida</a:t>
-            </a:r>
-          </a:p>
-        </p:txBody>
-      </p:sp>
-      <p:sp>
-        <p:nvSpPr>
-          <p:cNvPr id="5" name="TextBox 4"/>
-          <p:cNvSpPr txBox="1"/>
-          <p:nvPr/>
-        </p:nvSpPr>
-        <p:spPr>
-          <a:xfrm>
-            <a:off x="457200" y="1170432"/>
-            <a:ext cx="11277295" cy="5230368"/>
-          </a:xfrm>
-          <a:prstGeom prst="rect">
-            <a:avLst/>
-          </a:prstGeom>
-          <a:noFill/>
-        </p:spPr>
-        <p:txBody>
-          <a:bodyPr wrap="square">
-            <a:spAutoFit/>
-          </a:bodyPr>
-          <a:lstStyle/>
-          <a:p>
-            <a:pPr>
-              <a:spcAft>
-                <a:spcPts val="800"/>
-              </a:spcAft>
-            </a:pPr>
-            <a:r>
-              <a:rPr sz="2000" b="0" i="0">
-                <a:solidFill>
-                  <a:srgbClr val="333333"/>
-                </a:solidFill>
-                <a:latin typeface="Calibri"/>
-              </a:rPr>
-              <a:t>–   VetCare ya tiene casos de uso especificados y un diagrama de clases con multiplicidades, pero ningun documento explica el orden en que los objetos se comunican para cumplir un caso de uso.</a:t>
-            </a:r>
-          </a:p>
-          <a:p>
-            <a:pPr>
-              <a:spcAft>
-                <a:spcPts val="800"/>
-              </a:spcAft>
-            </a:pPr>
-            <a:r>
-              <a:rPr sz="2000" b="0" i="0">
-                <a:solidFill>
-                  <a:srgbClr val="333333"/>
-                </a:solidFill>
-                <a:latin typeface="Calibri"/>
-              </a:rPr>
-              <a:t>–   En Huellitas, agendar una cita depende de la disponibilidad del veterinario y hoy eso se resuelve preguntando en voz alta al fondo del consultorio, sin ninguna regla escrita.</a:t>
-            </a:r>
-          </a:p>
-          <a:p>
-            <a:pPr>
-              <a:spcAft>
-                <a:spcPts val="800"/>
-              </a:spcAft>
-            </a:pPr>
-            <a:r>
-              <a:rPr sz="2000" b="0" i="0">
-                <a:solidFill>
-                  <a:srgbClr val="333333"/>
-                </a:solidFill>
-                <a:latin typeface="Calibri"/>
-              </a:rPr>
-              <a:t>–   El equipo tiende a dibujar cajas y flechas por intuicion, sin volver a mirar el flujo principal que ya habia escrito hace tres sesiones.</a:t>
-            </a:r>
-          </a:p>
-        </p:txBody>
-      </p:sp>
-      <p:sp>
-        <p:nvSpPr>
-          <p:cNvPr id="6" name="TextBox 5"/>
-          <p:cNvSpPr txBox="1"/>
-          <p:nvPr/>
-        </p:nvSpPr>
-        <p:spPr>
-          <a:xfrm>
-            <a:off x="11185855" y="6473952"/>
-            <a:ext cx="640080" cy="274320"/>
-          </a:xfrm>
-          <a:prstGeom prst="rect">
-            <a:avLst/>
-          </a:prstGeom>
-          <a:noFill/>
-        </p:spPr>
-        <p:txBody>
-          <a:bodyPr wrap="square">
-            <a:spAutoFit/>
-          </a:bodyPr>
-          <a:lstStyle/>
-          <a:p>
-            <a:pPr algn="r"/>
-            <a:r>
-              <a:rPr sz="1100" b="0" i="0">
-                <a:solidFill>
-                  <a:srgbClr val="666666"/>
-                </a:solidFill>
-                <a:latin typeface="Calibri"/>
-              </a:rPr>
-              <a:t>20</a:t>
-            </a:r>
-          </a:p>
-        </p:txBody>
-      </p:sp>
-    </p:spTree>
-  </p:cSld>
-  <p:clrMapOvr>
-    <a:masterClrMapping/>
-  </p:clrMapOvr>
-</p:sld>
-</file>
-
-<file path=ppt/slides/slide21.xml><?xml version="1.0" encoding="utf-8"?>
-<p:sld xmlns:a="http://schemas.openxmlformats.org/drawingml/2006/main" xmlns:p="http://schemas.openxmlformats.org/presentationml/2006/main" xmlns:r="http://schemas.openxmlformats.org/officeDocument/2006/relationships">
-  <p:cSld>
-    <p:bg>
-      <p:bgPr>
-        <a:solidFill>
-          <a:srgbClr val="FFFFFF"/>
-        </a:solidFill>
-        <a:effectLst/>
-      </p:bgPr>
-    </p:bg>
-    <p:spTree>
-      <p:nvGrpSpPr>
-        <p:cNvPr id="1" name=""/>
-        <p:cNvGrpSpPr/>
-        <p:nvPr/>
-      </p:nvGrpSpPr>
-      <p:grpSpPr/>
-      <p:sp>
-        <p:nvSpPr>
-          <p:cNvPr id="2" name="Rectangle 1"/>
-          <p:cNvSpPr/>
-          <p:nvPr/>
-        </p:nvSpPr>
-        <p:spPr>
-          <a:xfrm>
-            <a:off x="0" y="0"/>
-            <a:ext cx="12191695" cy="960120"/>
-          </a:xfrm>
-          <a:prstGeom prst="rect">
-            <a:avLst/>
-          </a:prstGeom>
-          <a:solidFill>
-            <a:srgbClr val="095292"/>
-          </a:solidFill>
-          <a:ln>
-            <a:noFill/>
-          </a:ln>
-        </p:spPr>
-        <p:style>
-          <a:lnRef idx="1">
-            <a:schemeClr val="accent1"/>
-          </a:lnRef>
-          <a:fillRef idx="3">
-            <a:schemeClr val="accent1"/>
-          </a:fillRef>
-          <a:effectRef idx="2">
-            <a:schemeClr val="accent1"/>
-          </a:effectRef>
-          <a:fontRef idx="minor">
-            <a:schemeClr val="lt1"/>
-          </a:fontRef>
-        </p:style>
-        <p:txBody>
-          <a:bodyPr rtlCol="0" anchor="ctr"/>
-          <a:lstStyle/>
-          <a:p>
-            <a:pPr algn="ctr"/>
-          </a:p>
-        </p:txBody>
-      </p:sp>
-      <p:sp>
-        <p:nvSpPr>
-          <p:cNvPr id="3" name="Rectangle 2"/>
-          <p:cNvSpPr/>
-          <p:nvPr/>
-        </p:nvSpPr>
-        <p:spPr>
-          <a:xfrm>
-            <a:off x="0" y="960120"/>
-            <a:ext cx="12191695" cy="41148"/>
-          </a:xfrm>
-          <a:prstGeom prst="rect">
-            <a:avLst/>
-          </a:prstGeom>
-          <a:solidFill>
-            <a:srgbClr val="FFD000"/>
-          </a:solidFill>
-          <a:ln>
-            <a:noFill/>
-          </a:ln>
-        </p:spPr>
-        <p:style>
-          <a:lnRef idx="1">
-            <a:schemeClr val="accent1"/>
-          </a:lnRef>
-          <a:fillRef idx="3">
-            <a:schemeClr val="accent1"/>
-          </a:fillRef>
-          <a:effectRef idx="2">
-            <a:schemeClr val="accent1"/>
-          </a:effectRef>
-          <a:fontRef idx="minor">
-            <a:schemeClr val="lt1"/>
-          </a:fontRef>
-        </p:style>
-        <p:txBody>
-          <a:bodyPr rtlCol="0" anchor="ctr"/>
-          <a:lstStyle/>
-          <a:p>
-            <a:pPr algn="ctr"/>
-          </a:p>
-        </p:txBody>
-      </p:sp>
-      <p:sp>
-        <p:nvSpPr>
-          <p:cNvPr id="4" name="TextBox 3"/>
-          <p:cNvSpPr txBox="1"/>
-          <p:nvPr/>
-        </p:nvSpPr>
-        <p:spPr>
-          <a:xfrm>
-            <a:off x="457200" y="164592"/>
-            <a:ext cx="11277295" cy="502920"/>
-          </a:xfrm>
-          <a:prstGeom prst="rect">
-            <a:avLst/>
-          </a:prstGeom>
-          <a:noFill/>
-        </p:spPr>
-        <p:txBody>
-          <a:bodyPr wrap="square">
-            <a:spAutoFit/>
-          </a:bodyPr>
-          <a:lstStyle/>
-          <a:p>
-            <a:r>
-              <a:rPr sz="2600" b="1" i="0">
-                <a:solidFill>
-                  <a:srgbClr val="FFFFFF"/>
-                </a:solidFill>
-                <a:latin typeface="Calibri"/>
-              </a:rPr>
-              <a:t>Taller PI — pasos guiados</a:t>
-            </a:r>
-          </a:p>
-        </p:txBody>
-      </p:sp>
-      <p:sp>
-        <p:nvSpPr>
-          <p:cNvPr id="5" name="Rounded Rectangle 4"/>
-          <p:cNvSpPr/>
-          <p:nvPr/>
-        </p:nvSpPr>
-        <p:spPr>
-          <a:xfrm>
-            <a:off x="457200" y="1234440"/>
-            <a:ext cx="11277295" cy="950976"/>
-          </a:xfrm>
-          <a:prstGeom prst="roundRect">
-            <a:avLst>
-              <a:gd name="adj" fmla="val 12000"/>
-            </a:avLst>
-          </a:prstGeom>
-          <a:solidFill>
-            <a:srgbClr val="F2F2F2"/>
-          </a:solidFill>
-          <a:ln>
-            <a:noFill/>
-          </a:ln>
-        </p:spPr>
-        <p:style>
-          <a:lnRef idx="1">
-            <a:schemeClr val="accent1"/>
-          </a:lnRef>
-          <a:fillRef idx="3">
-            <a:schemeClr val="accent1"/>
-          </a:fillRef>
-          <a:effectRef idx="2">
-            <a:schemeClr val="accent1"/>
-          </a:effectRef>
-          <a:fontRef idx="minor">
-            <a:schemeClr val="lt1"/>
-          </a:fontRef>
-        </p:style>
-        <p:txBody>
-          <a:bodyPr rtlCol="0" anchor="ctr"/>
-          <a:lstStyle/>
-          <a:p>
-            <a:pPr algn="ctr"/>
-          </a:p>
-        </p:txBody>
-      </p:sp>
-      <p:sp>
-        <p:nvSpPr>
-          <p:cNvPr id="6" name="Rounded Rectangle 5"/>
-          <p:cNvSpPr/>
-          <p:nvPr/>
-        </p:nvSpPr>
-        <p:spPr>
-          <a:xfrm>
-            <a:off x="594360" y="1490472"/>
-            <a:ext cx="438912" cy="438912"/>
-          </a:xfrm>
-          <a:prstGeom prst="roundRect">
-            <a:avLst>
-              <a:gd name="adj" fmla="val 12000"/>
-            </a:avLst>
-          </a:prstGeom>
-          <a:solidFill>
-            <a:srgbClr val="095292"/>
-          </a:solidFill>
-          <a:ln>
-            <a:noFill/>
-          </a:ln>
-        </p:spPr>
-        <p:style>
-          <a:lnRef idx="1">
-            <a:schemeClr val="accent1"/>
-          </a:lnRef>
-          <a:fillRef idx="3">
-            <a:schemeClr val="accent1"/>
-          </a:fillRef>
-          <a:effectRef idx="2">
-            <a:schemeClr val="accent1"/>
-          </a:effectRef>
-          <a:fontRef idx="minor">
-            <a:schemeClr val="lt1"/>
-          </a:fontRef>
-        </p:style>
-        <p:txBody>
-          <a:bodyPr rtlCol="0" anchor="ctr"/>
-          <a:lstStyle/>
-          <a:p>
-            <a:pPr algn="ctr"/>
-          </a:p>
-        </p:txBody>
-      </p:sp>
-      <p:sp>
-        <p:nvSpPr>
-          <p:cNvPr id="7" name="TextBox 6"/>
-          <p:cNvSpPr txBox="1"/>
-          <p:nvPr/>
-        </p:nvSpPr>
-        <p:spPr>
-          <a:xfrm>
-            <a:off x="594360" y="1490472"/>
-            <a:ext cx="438912" cy="438912"/>
-          </a:xfrm>
-          <a:prstGeom prst="rect">
-            <a:avLst/>
-          </a:prstGeom>
-          <a:noFill/>
-        </p:spPr>
-        <p:txBody>
-          <a:bodyPr wrap="square" anchor="ctr"/>
-          <a:lstStyle/>
-          <a:p>
-            <a:pPr algn="ctr"/>
-            <a:r>
-              <a:rPr sz="1600" b="1" i="0">
-                <a:solidFill>
-                  <a:srgbClr val="FFFFFF"/>
-                </a:solidFill>
-                <a:latin typeface="Calibri"/>
-              </a:rPr>
-              <a:t>1</a:t>
-            </a:r>
-          </a:p>
-        </p:txBody>
-      </p:sp>
-      <p:sp>
-        <p:nvSpPr>
-          <p:cNvPr id="8" name="TextBox 7"/>
-          <p:cNvSpPr txBox="1"/>
-          <p:nvPr/>
-        </p:nvSpPr>
-        <p:spPr>
-          <a:xfrm>
-            <a:off x="1188720" y="1325880"/>
-            <a:ext cx="10271455" cy="786384"/>
-          </a:xfrm>
-          <a:prstGeom prst="rect">
-            <a:avLst/>
-          </a:prstGeom>
-          <a:noFill/>
-        </p:spPr>
-        <p:txBody>
-          <a:bodyPr wrap="square" anchor="ctr"/>
-          <a:lstStyle/>
-          <a:p>
-            <a:r>
-              <a:rPr sz="1400" b="1" i="0">
-                <a:solidFill>
-                  <a:srgbClr val="095292"/>
-                </a:solidFill>
-                <a:latin typeface="Calibri"/>
-              </a:rPr>
-              <a:t>Tomar el flujo principal escrito de CU-04 Agendar cita, y si todavia no esta especificado diligenciar primero la plantilla de la clase nueve, para luego numerar en el documento cual paso genera cual mensaje, de manera que quede una lista de entre seis y ocho mensajes antes de dibujar cualquier cosa.</a:t>
-            </a:r>
-          </a:p>
-        </p:txBody>
-      </p:sp>
-      <p:sp>
-        <p:nvSpPr>
-          <p:cNvPr id="9" name="Rounded Rectangle 8"/>
-          <p:cNvSpPr/>
-          <p:nvPr/>
-        </p:nvSpPr>
-        <p:spPr>
-          <a:xfrm>
-            <a:off x="457200" y="2276856"/>
-            <a:ext cx="11277295" cy="950976"/>
-          </a:xfrm>
-          <a:prstGeom prst="roundRect">
-            <a:avLst>
-              <a:gd name="adj" fmla="val 12000"/>
-            </a:avLst>
-          </a:prstGeom>
-          <a:solidFill>
-            <a:srgbClr val="E8F4FA"/>
-          </a:solidFill>
-          <a:ln>
-            <a:noFill/>
-          </a:ln>
-        </p:spPr>
-        <p:style>
-          <a:lnRef idx="1">
-            <a:schemeClr val="accent1"/>
-          </a:lnRef>
-          <a:fillRef idx="3">
-            <a:schemeClr val="accent1"/>
-          </a:fillRef>
-          <a:effectRef idx="2">
-            <a:schemeClr val="accent1"/>
-          </a:effectRef>
-          <a:fontRef idx="minor">
-            <a:schemeClr val="lt1"/>
-          </a:fontRef>
-        </p:style>
-        <p:txBody>
-          <a:bodyPr rtlCol="0" anchor="ctr"/>
-          <a:lstStyle/>
-          <a:p>
-            <a:pPr algn="ctr"/>
-          </a:p>
-        </p:txBody>
-      </p:sp>
-      <p:sp>
-        <p:nvSpPr>
-          <p:cNvPr id="10" name="Rounded Rectangle 9"/>
-          <p:cNvSpPr/>
-          <p:nvPr/>
-        </p:nvSpPr>
-        <p:spPr>
-          <a:xfrm>
-            <a:off x="594360" y="2532888"/>
-            <a:ext cx="438912" cy="438912"/>
-          </a:xfrm>
-          <a:prstGeom prst="roundRect">
-            <a:avLst>
-              <a:gd name="adj" fmla="val 12000"/>
-            </a:avLst>
-          </a:prstGeom>
-          <a:solidFill>
-            <a:srgbClr val="095292"/>
-          </a:solidFill>
-          <a:ln>
-            <a:noFill/>
-          </a:ln>
-        </p:spPr>
-        <p:style>
-          <a:lnRef idx="1">
-            <a:schemeClr val="accent1"/>
-          </a:lnRef>
-          <a:fillRef idx="3">
-            <a:schemeClr val="accent1"/>
-          </a:fillRef>
-          <a:effectRef idx="2">
-            <a:schemeClr val="accent1"/>
-          </a:effectRef>
-          <a:fontRef idx="minor">
-            <a:schemeClr val="lt1"/>
-          </a:fontRef>
-        </p:style>
-        <p:txBody>
-          <a:bodyPr rtlCol="0" anchor="ctr"/>
-          <a:lstStyle/>
-          <a:p>
-            <a:pPr algn="ctr"/>
-          </a:p>
-        </p:txBody>
-      </p:sp>
-      <p:sp>
-        <p:nvSpPr>
-          <p:cNvPr id="11" name="TextBox 10"/>
-          <p:cNvSpPr txBox="1"/>
-          <p:nvPr/>
-        </p:nvSpPr>
-        <p:spPr>
-          <a:xfrm>
-            <a:off x="594360" y="2532888"/>
-            <a:ext cx="438912" cy="438912"/>
-          </a:xfrm>
-          <a:prstGeom prst="rect">
-            <a:avLst/>
-          </a:prstGeom>
-          <a:noFill/>
-        </p:spPr>
-        <p:txBody>
-          <a:bodyPr wrap="square" anchor="ctr"/>
-          <a:lstStyle/>
-          <a:p>
-            <a:pPr algn="ctr"/>
-            <a:r>
-              <a:rPr sz="1600" b="1" i="0">
-                <a:solidFill>
-                  <a:srgbClr val="FFFFFF"/>
-                </a:solidFill>
-                <a:latin typeface="Calibri"/>
-              </a:rPr>
-              <a:t>2</a:t>
-            </a:r>
-          </a:p>
-        </p:txBody>
-      </p:sp>
-      <p:sp>
-        <p:nvSpPr>
-          <p:cNvPr id="12" name="TextBox 11"/>
-          <p:cNvSpPr txBox="1"/>
-          <p:nvPr/>
-        </p:nvSpPr>
-        <p:spPr>
-          <a:xfrm>
-            <a:off x="1188720" y="2368296"/>
-            <a:ext cx="10271455" cy="786384"/>
-          </a:xfrm>
-          <a:prstGeom prst="rect">
-            <a:avLst/>
-          </a:prstGeom>
-          <a:noFill/>
-        </p:spPr>
-        <p:txBody>
-          <a:bodyPr wrap="square" anchor="ctr"/>
-          <a:lstStyle/>
-          <a:p>
-            <a:r>
-              <a:rPr sz="1400" b="1" i="0">
-                <a:solidFill>
-                  <a:srgbClr val="095292"/>
-                </a:solidFill>
-                <a:latin typeface="Calibri"/>
-              </a:rPr>
-              <a:t>Dibujar el diagrama de secuencia en Mermaid Live Editor o draw.io con la recepcionista como actor y minimo tres participantes que correspondan a clases reales del diagrama de clases de VetCare, incluyendo las flechas de retorno con el dato que devuelven.</a:t>
-            </a:r>
-          </a:p>
-        </p:txBody>
-      </p:sp>
-      <p:sp>
-        <p:nvSpPr>
-          <p:cNvPr id="13" name="Rounded Rectangle 12"/>
-          <p:cNvSpPr/>
-          <p:nvPr/>
-        </p:nvSpPr>
-        <p:spPr>
-          <a:xfrm>
-            <a:off x="457200" y="3319272"/>
-            <a:ext cx="11277295" cy="950976"/>
-          </a:xfrm>
-          <a:prstGeom prst="roundRect">
-            <a:avLst>
-              <a:gd name="adj" fmla="val 12000"/>
-            </a:avLst>
-          </a:prstGeom>
-          <a:solidFill>
-            <a:srgbClr val="F2F2F2"/>
-          </a:solidFill>
-          <a:ln>
-            <a:noFill/>
-          </a:ln>
-        </p:spPr>
-        <p:style>
-          <a:lnRef idx="1">
-            <a:schemeClr val="accent1"/>
-          </a:lnRef>
-          <a:fillRef idx="3">
-            <a:schemeClr val="accent1"/>
-          </a:fillRef>
-          <a:effectRef idx="2">
-            <a:schemeClr val="accent1"/>
-          </a:effectRef>
-          <a:fontRef idx="minor">
-            <a:schemeClr val="lt1"/>
-          </a:fontRef>
-        </p:style>
-        <p:txBody>
-          <a:bodyPr rtlCol="0" anchor="ctr"/>
-          <a:lstStyle/>
-          <a:p>
-            <a:pPr algn="ctr"/>
-          </a:p>
-        </p:txBody>
-      </p:sp>
-      <p:sp>
-        <p:nvSpPr>
-          <p:cNvPr id="14" name="Rounded Rectangle 13"/>
-          <p:cNvSpPr/>
-          <p:nvPr/>
-        </p:nvSpPr>
-        <p:spPr>
-          <a:xfrm>
-            <a:off x="594360" y="3575304"/>
-            <a:ext cx="438912" cy="438912"/>
-          </a:xfrm>
-          <a:prstGeom prst="roundRect">
-            <a:avLst>
-              <a:gd name="adj" fmla="val 12000"/>
-            </a:avLst>
-          </a:prstGeom>
-          <a:solidFill>
-            <a:srgbClr val="095292"/>
-          </a:solidFill>
-          <a:ln>
-            <a:noFill/>
-          </a:ln>
-        </p:spPr>
-        <p:style>
-          <a:lnRef idx="1">
-            <a:schemeClr val="accent1"/>
-          </a:lnRef>
-          <a:fillRef idx="3">
-            <a:schemeClr val="accent1"/>
-          </a:fillRef>
-          <a:effectRef idx="2">
-            <a:schemeClr val="accent1"/>
-          </a:effectRef>
-          <a:fontRef idx="minor">
-            <a:schemeClr val="lt1"/>
-          </a:fontRef>
-        </p:style>
-        <p:txBody>
-          <a:bodyPr rtlCol="0" anchor="ctr"/>
-          <a:lstStyle/>
-          <a:p>
-            <a:pPr algn="ctr"/>
-          </a:p>
-        </p:txBody>
-      </p:sp>
-      <p:sp>
-        <p:nvSpPr>
-          <p:cNvPr id="15" name="TextBox 14"/>
-          <p:cNvSpPr txBox="1"/>
-          <p:nvPr/>
-        </p:nvSpPr>
-        <p:spPr>
-          <a:xfrm>
-            <a:off x="594360" y="3575304"/>
-            <a:ext cx="438912" cy="438912"/>
-          </a:xfrm>
-          <a:prstGeom prst="rect">
-            <a:avLst/>
-          </a:prstGeom>
-          <a:noFill/>
-        </p:spPr>
-        <p:txBody>
-          <a:bodyPr wrap="square" anchor="ctr"/>
-          <a:lstStyle/>
-          <a:p>
-            <a:pPr algn="ctr"/>
-            <a:r>
-              <a:rPr sz="1600" b="1" i="0">
-                <a:solidFill>
-                  <a:srgbClr val="FFFFFF"/>
-                </a:solidFill>
-                <a:latin typeface="Calibri"/>
-              </a:rPr>
-              <a:t>3</a:t>
-            </a:r>
-          </a:p>
-        </p:txBody>
-      </p:sp>
-      <p:sp>
-        <p:nvSpPr>
-          <p:cNvPr id="16" name="TextBox 15"/>
-          <p:cNvSpPr txBox="1"/>
-          <p:nvPr/>
-        </p:nvSpPr>
-        <p:spPr>
-          <a:xfrm>
-            <a:off x="1188720" y="3410712"/>
-            <a:ext cx="10271455" cy="786384"/>
-          </a:xfrm>
-          <a:prstGeom prst="rect">
-            <a:avLst/>
-          </a:prstGeom>
-          <a:noFill/>
-        </p:spPr>
-        <p:txBody>
-          <a:bodyPr wrap="square" anchor="ctr"/>
-          <a:lstStyle/>
-          <a:p>
-            <a:r>
-              <a:rPr sz="1500" b="1" i="0">
-                <a:solidFill>
-                  <a:srgbClr val="095292"/>
-                </a:solidFill>
-                <a:latin typeface="Calibri"/>
-              </a:rPr>
-              <a:t>Agregar un fragmento alt que modele el horario ocupado con sus dos condiciones de guarda escritas, y verificar que el camino del else corresponda a un flujo alterno documentado en la especificacion del caso de uso.</a:t>
-            </a:r>
-          </a:p>
-        </p:txBody>
-      </p:sp>
-      <p:sp>
-        <p:nvSpPr>
-          <p:cNvPr id="17" name="Rounded Rectangle 16"/>
-          <p:cNvSpPr/>
-          <p:nvPr/>
-        </p:nvSpPr>
-        <p:spPr>
-          <a:xfrm>
-            <a:off x="457200" y="4361688"/>
-            <a:ext cx="11277295" cy="950976"/>
-          </a:xfrm>
-          <a:prstGeom prst="roundRect">
-            <a:avLst>
-              <a:gd name="adj" fmla="val 12000"/>
-            </a:avLst>
-          </a:prstGeom>
-          <a:solidFill>
-            <a:srgbClr val="E8F4FA"/>
-          </a:solidFill>
-          <a:ln>
-            <a:noFill/>
-          </a:ln>
-        </p:spPr>
-        <p:style>
-          <a:lnRef idx="1">
-            <a:schemeClr val="accent1"/>
-          </a:lnRef>
-          <a:fillRef idx="3">
-            <a:schemeClr val="accent1"/>
-          </a:fillRef>
-          <a:effectRef idx="2">
-            <a:schemeClr val="accent1"/>
-          </a:effectRef>
-          <a:fontRef idx="minor">
-            <a:schemeClr val="lt1"/>
-          </a:fontRef>
-        </p:style>
-        <p:txBody>
-          <a:bodyPr rtlCol="0" anchor="ctr"/>
-          <a:lstStyle/>
-          <a:p>
-            <a:pPr algn="ctr"/>
-          </a:p>
-        </p:txBody>
-      </p:sp>
-      <p:sp>
-        <p:nvSpPr>
-          <p:cNvPr id="18" name="Rounded Rectangle 17"/>
-          <p:cNvSpPr/>
-          <p:nvPr/>
-        </p:nvSpPr>
-        <p:spPr>
-          <a:xfrm>
-            <a:off x="594360" y="4617720"/>
-            <a:ext cx="438912" cy="438912"/>
-          </a:xfrm>
-          <a:prstGeom prst="roundRect">
-            <a:avLst>
-              <a:gd name="adj" fmla="val 12000"/>
-            </a:avLst>
-          </a:prstGeom>
-          <a:solidFill>
-            <a:srgbClr val="095292"/>
-          </a:solidFill>
-          <a:ln>
-            <a:noFill/>
-          </a:ln>
-        </p:spPr>
-        <p:style>
-          <a:lnRef idx="1">
-            <a:schemeClr val="accent1"/>
-          </a:lnRef>
-          <a:fillRef idx="3">
-            <a:schemeClr val="accent1"/>
-          </a:fillRef>
-          <a:effectRef idx="2">
-            <a:schemeClr val="accent1"/>
-          </a:effectRef>
-          <a:fontRef idx="minor">
-            <a:schemeClr val="lt1"/>
-          </a:fontRef>
-        </p:style>
-        <p:txBody>
-          <a:bodyPr rtlCol="0" anchor="ctr"/>
-          <a:lstStyle/>
-          <a:p>
-            <a:pPr algn="ctr"/>
-          </a:p>
-        </p:txBody>
-      </p:sp>
-      <p:sp>
-        <p:nvSpPr>
-          <p:cNvPr id="19" name="TextBox 18"/>
-          <p:cNvSpPr txBox="1"/>
-          <p:nvPr/>
-        </p:nvSpPr>
-        <p:spPr>
-          <a:xfrm>
-            <a:off x="594360" y="4617720"/>
-            <a:ext cx="438912" cy="438912"/>
-          </a:xfrm>
-          <a:prstGeom prst="rect">
-            <a:avLst/>
-          </a:prstGeom>
-          <a:noFill/>
-        </p:spPr>
-        <p:txBody>
-          <a:bodyPr wrap="square" anchor="ctr"/>
-          <a:lstStyle/>
-          <a:p>
-            <a:pPr algn="ctr"/>
-            <a:r>
-              <a:rPr sz="1600" b="1" i="0">
-                <a:solidFill>
-                  <a:srgbClr val="FFFFFF"/>
-                </a:solidFill>
-                <a:latin typeface="Calibri"/>
-              </a:rPr>
-              <a:t>4</a:t>
-            </a:r>
-          </a:p>
-        </p:txBody>
-      </p:sp>
-      <p:sp>
-        <p:nvSpPr>
-          <p:cNvPr id="20" name="TextBox 19"/>
-          <p:cNvSpPr txBox="1"/>
-          <p:nvPr/>
-        </p:nvSpPr>
-        <p:spPr>
-          <a:xfrm>
-            <a:off x="1188720" y="4453128"/>
-            <a:ext cx="10271455" cy="786384"/>
-          </a:xfrm>
-          <a:prstGeom prst="rect">
-            <a:avLst/>
-          </a:prstGeom>
-          <a:noFill/>
-        </p:spPr>
-        <p:txBody>
-          <a:bodyPr wrap="square" anchor="ctr"/>
-          <a:lstStyle/>
-          <a:p>
-            <a:r>
-              <a:rPr sz="1500" b="1" i="0">
-                <a:solidFill>
-                  <a:srgbClr val="095292"/>
-                </a:solidFill>
-                <a:latin typeface="Calibri"/>
-              </a:rPr>
-              <a:t>Construir la tabla de mapeo mensaje a operacion con tres columnas, mensaje, clase destinataria y operacion que debe existir, y agregar al diagrama de clases toda operacion que hoy falte; ninguna fila puede quedar con la clase en blanco.</a:t>
-            </a:r>
-          </a:p>
-        </p:txBody>
-      </p:sp>
-      <p:sp>
-        <p:nvSpPr>
-          <p:cNvPr id="21" name="Rounded Rectangle 20"/>
-          <p:cNvSpPr/>
-          <p:nvPr/>
-        </p:nvSpPr>
-        <p:spPr>
-          <a:xfrm>
-            <a:off x="457200" y="5404104"/>
-            <a:ext cx="11277295" cy="950976"/>
-          </a:xfrm>
-          <a:prstGeom prst="roundRect">
-            <a:avLst>
-              <a:gd name="adj" fmla="val 12000"/>
-            </a:avLst>
-          </a:prstGeom>
-          <a:solidFill>
-            <a:srgbClr val="F2F2F2"/>
-          </a:solidFill>
-          <a:ln>
-            <a:noFill/>
-          </a:ln>
-        </p:spPr>
-        <p:style>
-          <a:lnRef idx="1">
-            <a:schemeClr val="accent1"/>
-          </a:lnRef>
-          <a:fillRef idx="3">
-            <a:schemeClr val="accent1"/>
-          </a:fillRef>
-          <a:effectRef idx="2">
-            <a:schemeClr val="accent1"/>
-          </a:effectRef>
-          <a:fontRef idx="minor">
-            <a:schemeClr val="lt1"/>
-          </a:fontRef>
-        </p:style>
-        <p:txBody>
-          <a:bodyPr rtlCol="0" anchor="ctr"/>
-          <a:lstStyle/>
-          <a:p>
-            <a:pPr algn="ctr"/>
-          </a:p>
-        </p:txBody>
-      </p:sp>
-      <p:sp>
-        <p:nvSpPr>
-          <p:cNvPr id="22" name="Rounded Rectangle 21"/>
-          <p:cNvSpPr/>
-          <p:nvPr/>
-        </p:nvSpPr>
-        <p:spPr>
-          <a:xfrm>
-            <a:off x="594360" y="5660136"/>
-            <a:ext cx="438912" cy="438912"/>
-          </a:xfrm>
-          <a:prstGeom prst="roundRect">
-            <a:avLst>
-              <a:gd name="adj" fmla="val 12000"/>
-            </a:avLst>
-          </a:prstGeom>
-          <a:solidFill>
-            <a:srgbClr val="095292"/>
-          </a:solidFill>
-          <a:ln>
-            <a:noFill/>
-          </a:ln>
-        </p:spPr>
-        <p:style>
-          <a:lnRef idx="1">
-            <a:schemeClr val="accent1"/>
-          </a:lnRef>
-          <a:fillRef idx="3">
-            <a:schemeClr val="accent1"/>
-          </a:fillRef>
-          <a:effectRef idx="2">
-            <a:schemeClr val="accent1"/>
-          </a:effectRef>
-          <a:fontRef idx="minor">
-            <a:schemeClr val="lt1"/>
-          </a:fontRef>
-        </p:style>
-        <p:txBody>
-          <a:bodyPr rtlCol="0" anchor="ctr"/>
-          <a:lstStyle/>
-          <a:p>
-            <a:pPr algn="ctr"/>
-          </a:p>
-        </p:txBody>
-      </p:sp>
-      <p:sp>
-        <p:nvSpPr>
-          <p:cNvPr id="23" name="TextBox 22"/>
-          <p:cNvSpPr txBox="1"/>
-          <p:nvPr/>
-        </p:nvSpPr>
-        <p:spPr>
-          <a:xfrm>
-            <a:off x="594360" y="5660136"/>
-            <a:ext cx="438912" cy="438912"/>
-          </a:xfrm>
-          <a:prstGeom prst="rect">
-            <a:avLst/>
-          </a:prstGeom>
-          <a:noFill/>
-        </p:spPr>
-        <p:txBody>
-          <a:bodyPr wrap="square" anchor="ctr"/>
-          <a:lstStyle/>
-          <a:p>
-            <a:pPr algn="ctr"/>
-            <a:r>
-              <a:rPr sz="1600" b="1" i="0">
-                <a:solidFill>
-                  <a:srgbClr val="FFFFFF"/>
-                </a:solidFill>
-                <a:latin typeface="Calibri"/>
-              </a:rPr>
-              <a:t>5</a:t>
-            </a:r>
-          </a:p>
-        </p:txBody>
-      </p:sp>
-      <p:sp>
-        <p:nvSpPr>
-          <p:cNvPr id="24" name="TextBox 23"/>
-          <p:cNvSpPr txBox="1"/>
-          <p:nvPr/>
-        </p:nvSpPr>
-        <p:spPr>
-          <a:xfrm>
-            <a:off x="1188720" y="5495544"/>
-            <a:ext cx="10271455" cy="786384"/>
-          </a:xfrm>
-          <a:prstGeom prst="rect">
-            <a:avLst/>
-          </a:prstGeom>
-          <a:noFill/>
-        </p:spPr>
-        <p:txBody>
-          <a:bodyPr wrap="square" anchor="ctr"/>
-          <a:lstStyle/>
-          <a:p>
-            <a:r>
-              <a:rPr sz="1400" b="1" i="0">
-                <a:solidFill>
-                  <a:srgbClr val="095292"/>
-                </a:solidFill>
-                <a:latin typeface="Calibri"/>
-              </a:rPr>
-              <a:t>Dibujar el diagrama de actividad del proceso de atencion en el consultorio con cuatro calles (Propietario, Recepcionista, Veterinario y Sistema VetCare), con minimo dos nodos de decision y una bifurcacion en paralelo, y exportar todo a PDF para subirlo a la plataforma del curso.</a:t>
-            </a:r>
-          </a:p>
-        </p:txBody>
-      </p:sp>
-      <p:sp>
-        <p:nvSpPr>
-          <p:cNvPr id="25" name="TextBox 24"/>
-          <p:cNvSpPr txBox="1"/>
-          <p:nvPr/>
-        </p:nvSpPr>
-        <p:spPr>
-          <a:xfrm>
-            <a:off x="11185855" y="6473952"/>
-            <a:ext cx="640080" cy="274320"/>
-          </a:xfrm>
-          <a:prstGeom prst="rect">
-            <a:avLst/>
-          </a:prstGeom>
-          <a:noFill/>
-        </p:spPr>
-        <p:txBody>
-          <a:bodyPr wrap="square">
-            <a:spAutoFit/>
-          </a:bodyPr>
-          <a:lstStyle/>
-          <a:p>
-            <a:pPr algn="r"/>
-            <a:r>
-              <a:rPr sz="1100" b="0" i="0">
-                <a:solidFill>
-                  <a:srgbClr val="666666"/>
-                </a:solidFill>
-                <a:latin typeface="Calibri"/>
-              </a:rPr>
-              <a:t>21</a:t>
-            </a:r>
-          </a:p>
-        </p:txBody>
-      </p:sp>
-    </p:spTree>
-  </p:cSld>
-  <p:clrMapOvr>
-    <a:masterClrMapping/>
-  </p:clrMapOvr>
-</p:sld>
-</file>
-
-<file path=ppt/slides/slide22.xml><?xml version="1.0" encoding="utf-8"?>
-<p:sld xmlns:a="http://schemas.openxmlformats.org/drawingml/2006/main" xmlns:p="http://schemas.openxmlformats.org/presentationml/2006/main" xmlns:r="http://schemas.openxmlformats.org/officeDocument/2006/relationships">
-  <p:cSld>
-    <p:bg>
-      <p:bgPr>
-        <a:solidFill>
-          <a:srgbClr val="FFFFFF"/>
-        </a:solidFill>
-        <a:effectLst/>
-      </p:bgPr>
-    </p:bg>
-    <p:spTree>
-      <p:nvGrpSpPr>
-        <p:cNvPr id="1" name=""/>
-        <p:cNvGrpSpPr/>
-        <p:nvPr/>
-      </p:nvGrpSpPr>
-      <p:grpSpPr/>
-      <p:sp>
-        <p:nvSpPr>
-          <p:cNvPr id="2" name="Rectangle 1"/>
-          <p:cNvSpPr/>
-          <p:nvPr/>
-        </p:nvSpPr>
-        <p:spPr>
-          <a:xfrm>
-            <a:off x="0" y="0"/>
-            <a:ext cx="12191695" cy="960120"/>
-          </a:xfrm>
-          <a:prstGeom prst="rect">
-            <a:avLst/>
-          </a:prstGeom>
-          <a:solidFill>
-            <a:srgbClr val="095292"/>
-          </a:solidFill>
-          <a:ln>
-            <a:noFill/>
-          </a:ln>
-        </p:spPr>
-        <p:style>
-          <a:lnRef idx="1">
-            <a:schemeClr val="accent1"/>
-          </a:lnRef>
-          <a:fillRef idx="3">
-            <a:schemeClr val="accent1"/>
-          </a:fillRef>
-          <a:effectRef idx="2">
-            <a:schemeClr val="accent1"/>
-          </a:effectRef>
-          <a:fontRef idx="minor">
-            <a:schemeClr val="lt1"/>
-          </a:fontRef>
-        </p:style>
-        <p:txBody>
-          <a:bodyPr rtlCol="0" anchor="ctr"/>
-          <a:lstStyle/>
-          <a:p>
-            <a:pPr algn="ctr"/>
-          </a:p>
-        </p:txBody>
-      </p:sp>
-      <p:sp>
-        <p:nvSpPr>
-          <p:cNvPr id="3" name="Rectangle 2"/>
-          <p:cNvSpPr/>
-          <p:nvPr/>
-        </p:nvSpPr>
-        <p:spPr>
-          <a:xfrm>
-            <a:off x="0" y="960120"/>
-            <a:ext cx="12191695" cy="41148"/>
-          </a:xfrm>
-          <a:prstGeom prst="rect">
-            <a:avLst/>
-          </a:prstGeom>
-          <a:solidFill>
-            <a:srgbClr val="FFD000"/>
-          </a:solidFill>
-          <a:ln>
-            <a:noFill/>
-          </a:ln>
-        </p:spPr>
-        <p:style>
-          <a:lnRef idx="1">
-            <a:schemeClr val="accent1"/>
-          </a:lnRef>
-          <a:fillRef idx="3">
-            <a:schemeClr val="accent1"/>
-          </a:fillRef>
-          <a:effectRef idx="2">
-            <a:schemeClr val="accent1"/>
-          </a:effectRef>
-          <a:fontRef idx="minor">
-            <a:schemeClr val="lt1"/>
-          </a:fontRef>
-        </p:style>
-        <p:txBody>
-          <a:bodyPr rtlCol="0" anchor="ctr"/>
-          <a:lstStyle/>
-          <a:p>
-            <a:pPr algn="ctr"/>
-          </a:p>
-        </p:txBody>
-      </p:sp>
-      <p:sp>
-        <p:nvSpPr>
-          <p:cNvPr id="4" name="TextBox 3"/>
-          <p:cNvSpPr txBox="1"/>
-          <p:nvPr/>
-        </p:nvSpPr>
-        <p:spPr>
-          <a:xfrm>
-            <a:off x="457200" y="164592"/>
-            <a:ext cx="11277295" cy="502920"/>
-          </a:xfrm>
-          <a:prstGeom prst="rect">
-            <a:avLst/>
-          </a:prstGeom>
-          <a:noFill/>
-        </p:spPr>
-        <p:txBody>
-          <a:bodyPr wrap="square">
-            <a:spAutoFit/>
-          </a:bodyPr>
-          <a:lstStyle/>
-          <a:p>
-            <a:r>
-              <a:rPr sz="2600" b="1" i="0">
-                <a:solidFill>
-                  <a:srgbClr val="FFFFFF"/>
-                </a:solidFill>
-                <a:latin typeface="Calibri"/>
-              </a:rPr>
-              <a:t>Antes de entregar — autochequeo</a:t>
-            </a:r>
-          </a:p>
-        </p:txBody>
-      </p:sp>
-      <p:sp>
-        <p:nvSpPr>
-          <p:cNvPr id="5" name="Rounded Rectangle 4"/>
-          <p:cNvSpPr/>
-          <p:nvPr/>
-        </p:nvSpPr>
-        <p:spPr>
-          <a:xfrm>
-            <a:off x="457200" y="1261872"/>
-            <a:ext cx="11277295" cy="566928"/>
-          </a:xfrm>
-          <a:prstGeom prst="roundRect">
-            <a:avLst>
-              <a:gd name="adj" fmla="val 12000"/>
-            </a:avLst>
-          </a:prstGeom>
-          <a:solidFill>
-            <a:srgbClr val="F2F2F2"/>
-          </a:solidFill>
-          <a:ln>
-            <a:noFill/>
-          </a:ln>
-        </p:spPr>
-        <p:style>
-          <a:lnRef idx="1">
-            <a:schemeClr val="accent1"/>
-          </a:lnRef>
-          <a:fillRef idx="3">
-            <a:schemeClr val="accent1"/>
-          </a:fillRef>
-          <a:effectRef idx="2">
-            <a:schemeClr val="accent1"/>
-          </a:effectRef>
-          <a:fontRef idx="minor">
-            <a:schemeClr val="lt1"/>
-          </a:fontRef>
-        </p:style>
-        <p:txBody>
-          <a:bodyPr rtlCol="0" anchor="ctr"/>
-          <a:lstStyle/>
-          <a:p>
-            <a:pPr algn="ctr"/>
-          </a:p>
-        </p:txBody>
-      </p:sp>
-      <p:sp>
-        <p:nvSpPr>
-          <p:cNvPr id="6" name="Rectangle 5"/>
-          <p:cNvSpPr/>
-          <p:nvPr/>
-        </p:nvSpPr>
-        <p:spPr>
-          <a:xfrm>
-            <a:off x="640080" y="1408175"/>
-            <a:ext cx="274320" cy="274320"/>
-          </a:xfrm>
-          <a:prstGeom prst="rect">
-            <a:avLst/>
-          </a:prstGeom>
-          <a:solidFill>
-            <a:srgbClr val="FFFFFF"/>
-          </a:solidFill>
-          <a:ln>
-            <a:solidFill>
-              <a:srgbClr val="333333"/>
-            </a:solidFill>
-          </a:ln>
-        </p:spPr>
-        <p:style>
-          <a:lnRef idx="1">
-            <a:schemeClr val="accent1"/>
-          </a:lnRef>
-          <a:fillRef idx="3">
-            <a:schemeClr val="accent1"/>
-          </a:fillRef>
-          <a:effectRef idx="2">
-            <a:schemeClr val="accent1"/>
-          </a:effectRef>
-          <a:fontRef idx="minor">
-            <a:schemeClr val="lt1"/>
-          </a:fontRef>
-        </p:style>
-        <p:txBody>
-          <a:bodyPr rtlCol="0" anchor="ctr"/>
-          <a:lstStyle/>
-          <a:p>
-            <a:pPr algn="ctr"/>
-          </a:p>
-        </p:txBody>
-      </p:sp>
-      <p:sp>
-        <p:nvSpPr>
-          <p:cNvPr id="7" name="Rectangle 6"/>
-          <p:cNvSpPr/>
-          <p:nvPr/>
-        </p:nvSpPr>
-        <p:spPr>
-          <a:xfrm>
-            <a:off x="640080" y="1408175"/>
-            <a:ext cx="73152" cy="274320"/>
-          </a:xfrm>
-          <a:prstGeom prst="rect">
-            <a:avLst/>
-          </a:prstGeom>
-          <a:solidFill>
-            <a:srgbClr val="269CCB"/>
-          </a:solidFill>
-          <a:ln>
-            <a:noFill/>
-          </a:ln>
-        </p:spPr>
-        <p:style>
-          <a:lnRef idx="1">
-            <a:schemeClr val="accent1"/>
-          </a:lnRef>
-          <a:fillRef idx="3">
-            <a:schemeClr val="accent1"/>
-          </a:fillRef>
-          <a:effectRef idx="2">
-            <a:schemeClr val="accent1"/>
-          </a:effectRef>
-          <a:fontRef idx="minor">
-            <a:schemeClr val="lt1"/>
-          </a:fontRef>
-        </p:style>
-        <p:txBody>
-          <a:bodyPr rtlCol="0" anchor="ctr"/>
-          <a:lstStyle/>
-          <a:p>
-            <a:pPr algn="ctr"/>
-          </a:p>
-        </p:txBody>
-      </p:sp>
-      <p:sp>
-        <p:nvSpPr>
-          <p:cNvPr id="8" name="TextBox 7"/>
-          <p:cNvSpPr txBox="1"/>
-          <p:nvPr/>
-        </p:nvSpPr>
-        <p:spPr>
-          <a:xfrm>
-            <a:off x="1097280" y="1353312"/>
-            <a:ext cx="10362895" cy="402336"/>
-          </a:xfrm>
-          <a:prstGeom prst="rect">
-            <a:avLst/>
-          </a:prstGeom>
-          <a:noFill/>
-        </p:spPr>
-        <p:txBody>
-          <a:bodyPr wrap="square" anchor="ctr"/>
-          <a:lstStyle/>
-          <a:p>
-            <a:r>
-              <a:rPr sz="1500" b="0" i="0">
-                <a:solidFill>
-                  <a:srgbClr val="333333"/>
-                </a:solidFill>
-                <a:latin typeface="Calibri"/>
-              </a:rPr>
-              <a:t>Si sigue las flechas de su diagrama de arriba hacia abajo, obtiene exactamente el mismo relato que ya escribio en el flujo principal del caso de uso?</a:t>
-            </a:r>
-          </a:p>
-        </p:txBody>
-      </p:sp>
-      <p:sp>
-        <p:nvSpPr>
-          <p:cNvPr id="9" name="Rounded Rectangle 8"/>
-          <p:cNvSpPr/>
-          <p:nvPr/>
-        </p:nvSpPr>
-        <p:spPr>
-          <a:xfrm>
-            <a:off x="457200" y="1938528"/>
-            <a:ext cx="11277295" cy="566928"/>
-          </a:xfrm>
-          <a:prstGeom prst="roundRect">
-            <a:avLst>
-              <a:gd name="adj" fmla="val 12000"/>
-            </a:avLst>
-          </a:prstGeom>
-          <a:solidFill>
-            <a:srgbClr val="F2F2F2"/>
-          </a:solidFill>
-          <a:ln>
-            <a:noFill/>
-          </a:ln>
-        </p:spPr>
-        <p:style>
-          <a:lnRef idx="1">
-            <a:schemeClr val="accent1"/>
-          </a:lnRef>
-          <a:fillRef idx="3">
-            <a:schemeClr val="accent1"/>
-          </a:fillRef>
-          <a:effectRef idx="2">
-            <a:schemeClr val="accent1"/>
-          </a:effectRef>
-          <a:fontRef idx="minor">
-            <a:schemeClr val="lt1"/>
-          </a:fontRef>
-        </p:style>
-        <p:txBody>
-          <a:bodyPr rtlCol="0" anchor="ctr"/>
-          <a:lstStyle/>
-          <a:p>
-            <a:pPr algn="ctr"/>
-          </a:p>
-        </p:txBody>
-      </p:sp>
-      <p:sp>
-        <p:nvSpPr>
-          <p:cNvPr id="10" name="Rectangle 9"/>
-          <p:cNvSpPr/>
-          <p:nvPr/>
-        </p:nvSpPr>
-        <p:spPr>
-          <a:xfrm>
-            <a:off x="640080" y="2084832"/>
-            <a:ext cx="274320" cy="274320"/>
-          </a:xfrm>
-          <a:prstGeom prst="rect">
-            <a:avLst/>
-          </a:prstGeom>
-          <a:solidFill>
-            <a:srgbClr val="FFFFFF"/>
-          </a:solidFill>
-          <a:ln>
-            <a:solidFill>
-              <a:srgbClr val="333333"/>
-            </a:solidFill>
-          </a:ln>
-        </p:spPr>
-        <p:style>
-          <a:lnRef idx="1">
-            <a:schemeClr val="accent1"/>
-          </a:lnRef>
-          <a:fillRef idx="3">
-            <a:schemeClr val="accent1"/>
-          </a:fillRef>
-          <a:effectRef idx="2">
-            <a:schemeClr val="accent1"/>
-          </a:effectRef>
-          <a:fontRef idx="minor">
-            <a:schemeClr val="lt1"/>
-          </a:fontRef>
-        </p:style>
-        <p:txBody>
-          <a:bodyPr rtlCol="0" anchor="ctr"/>
-          <a:lstStyle/>
-          <a:p>
-            <a:pPr algn="ctr"/>
-          </a:p>
-        </p:txBody>
-      </p:sp>
-      <p:sp>
-        <p:nvSpPr>
-          <p:cNvPr id="11" name="Rectangle 10"/>
-          <p:cNvSpPr/>
-          <p:nvPr/>
-        </p:nvSpPr>
-        <p:spPr>
-          <a:xfrm>
-            <a:off x="640080" y="2084832"/>
-            <a:ext cx="73152" cy="274320"/>
-          </a:xfrm>
-          <a:prstGeom prst="rect">
-            <a:avLst/>
-          </a:prstGeom>
-          <a:solidFill>
-            <a:srgbClr val="269CCB"/>
-          </a:solidFill>
-          <a:ln>
-            <a:noFill/>
-          </a:ln>
-        </p:spPr>
-        <p:style>
-          <a:lnRef idx="1">
-            <a:schemeClr val="accent1"/>
-          </a:lnRef>
-          <a:fillRef idx="3">
-            <a:schemeClr val="accent1"/>
-          </a:fillRef>
-          <a:effectRef idx="2">
-            <a:schemeClr val="accent1"/>
-          </a:effectRef>
-          <a:fontRef idx="minor">
-            <a:schemeClr val="lt1"/>
-          </a:fontRef>
-        </p:style>
-        <p:txBody>
-          <a:bodyPr rtlCol="0" anchor="ctr"/>
-          <a:lstStyle/>
-          <a:p>
-            <a:pPr algn="ctr"/>
-          </a:p>
-        </p:txBody>
-      </p:sp>
-      <p:sp>
-        <p:nvSpPr>
-          <p:cNvPr id="12" name="TextBox 11"/>
-          <p:cNvSpPr txBox="1"/>
-          <p:nvPr/>
-        </p:nvSpPr>
-        <p:spPr>
-          <a:xfrm>
-            <a:off x="1097280" y="2029968"/>
-            <a:ext cx="10362895" cy="402336"/>
-          </a:xfrm>
-          <a:prstGeom prst="rect">
-            <a:avLst/>
-          </a:prstGeom>
-          <a:noFill/>
-        </p:spPr>
-        <p:txBody>
-          <a:bodyPr wrap="square" anchor="ctr"/>
-          <a:lstStyle/>
-          <a:p>
-            <a:r>
-              <a:rPr sz="1500" b="0" i="0">
-                <a:solidFill>
-                  <a:srgbClr val="333333"/>
-                </a:solidFill>
-                <a:latin typeface="Calibri"/>
-              </a:rPr>
-              <a:t>Cada participante de su diagrama existe como clase en el modelo, o dibujo cajas como Base de datos y Sistema que nadie puede implementar?</a:t>
-            </a:r>
-          </a:p>
-        </p:txBody>
-      </p:sp>
-      <p:sp>
-        <p:nvSpPr>
-          <p:cNvPr id="13" name="Rounded Rectangle 12"/>
-          <p:cNvSpPr/>
-          <p:nvPr/>
-        </p:nvSpPr>
-        <p:spPr>
-          <a:xfrm>
-            <a:off x="457200" y="2615184"/>
-            <a:ext cx="11277295" cy="566928"/>
-          </a:xfrm>
-          <a:prstGeom prst="roundRect">
-            <a:avLst>
-              <a:gd name="adj" fmla="val 12000"/>
-            </a:avLst>
-          </a:prstGeom>
-          <a:solidFill>
-            <a:srgbClr val="F2F2F2"/>
-          </a:solidFill>
-          <a:ln>
-            <a:noFill/>
-          </a:ln>
-        </p:spPr>
-        <p:style>
-          <a:lnRef idx="1">
-            <a:schemeClr val="accent1"/>
-          </a:lnRef>
-          <a:fillRef idx="3">
-            <a:schemeClr val="accent1"/>
-          </a:fillRef>
-          <a:effectRef idx="2">
-            <a:schemeClr val="accent1"/>
-          </a:effectRef>
-          <a:fontRef idx="minor">
-            <a:schemeClr val="lt1"/>
-          </a:fontRef>
-        </p:style>
-        <p:txBody>
-          <a:bodyPr rtlCol="0" anchor="ctr"/>
-          <a:lstStyle/>
-          <a:p>
-            <a:pPr algn="ctr"/>
-          </a:p>
-        </p:txBody>
-      </p:sp>
-      <p:sp>
-        <p:nvSpPr>
-          <p:cNvPr id="14" name="Rectangle 13"/>
-          <p:cNvSpPr/>
-          <p:nvPr/>
-        </p:nvSpPr>
-        <p:spPr>
-          <a:xfrm>
-            <a:off x="640080" y="2761488"/>
-            <a:ext cx="274320" cy="274320"/>
-          </a:xfrm>
-          <a:prstGeom prst="rect">
-            <a:avLst/>
-          </a:prstGeom>
-          <a:solidFill>
-            <a:srgbClr val="FFFFFF"/>
-          </a:solidFill>
-          <a:ln>
-            <a:solidFill>
-              <a:srgbClr val="333333"/>
-            </a:solidFill>
-          </a:ln>
-        </p:spPr>
-        <p:style>
-          <a:lnRef idx="1">
-            <a:schemeClr val="accent1"/>
-          </a:lnRef>
-          <a:fillRef idx="3">
-            <a:schemeClr val="accent1"/>
-          </a:fillRef>
-          <a:effectRef idx="2">
-            <a:schemeClr val="accent1"/>
-          </a:effectRef>
-          <a:fontRef idx="minor">
-            <a:schemeClr val="lt1"/>
-          </a:fontRef>
-        </p:style>
-        <p:txBody>
-          <a:bodyPr rtlCol="0" anchor="ctr"/>
-          <a:lstStyle/>
-          <a:p>
-            <a:pPr algn="ctr"/>
-          </a:p>
-        </p:txBody>
-      </p:sp>
-      <p:sp>
-        <p:nvSpPr>
-          <p:cNvPr id="15" name="Rectangle 14"/>
-          <p:cNvSpPr/>
-          <p:nvPr/>
-        </p:nvSpPr>
-        <p:spPr>
-          <a:xfrm>
-            <a:off x="640080" y="2761488"/>
-            <a:ext cx="73152" cy="274320"/>
-          </a:xfrm>
-          <a:prstGeom prst="rect">
-            <a:avLst/>
-          </a:prstGeom>
-          <a:solidFill>
-            <a:srgbClr val="269CCB"/>
-          </a:solidFill>
-          <a:ln>
-            <a:noFill/>
-          </a:ln>
-        </p:spPr>
-        <p:style>
-          <a:lnRef idx="1">
-            <a:schemeClr val="accent1"/>
-          </a:lnRef>
-          <a:fillRef idx="3">
-            <a:schemeClr val="accent1"/>
-          </a:fillRef>
-          <a:effectRef idx="2">
-            <a:schemeClr val="accent1"/>
-          </a:effectRef>
-          <a:fontRef idx="minor">
-            <a:schemeClr val="lt1"/>
-          </a:fontRef>
-        </p:style>
-        <p:txBody>
-          <a:bodyPr rtlCol="0" anchor="ctr"/>
-          <a:lstStyle/>
-          <a:p>
-            <a:pPr algn="ctr"/>
-          </a:p>
-        </p:txBody>
-      </p:sp>
-      <p:sp>
-        <p:nvSpPr>
-          <p:cNvPr id="16" name="TextBox 15"/>
-          <p:cNvSpPr txBox="1"/>
-          <p:nvPr/>
-        </p:nvSpPr>
-        <p:spPr>
-          <a:xfrm>
-            <a:off x="1097280" y="2706624"/>
-            <a:ext cx="10362895" cy="402336"/>
-          </a:xfrm>
-          <a:prstGeom prst="rect">
-            <a:avLst/>
-          </a:prstGeom>
-          <a:noFill/>
-        </p:spPr>
-        <p:txBody>
-          <a:bodyPr wrap="square" anchor="ctr"/>
-          <a:lstStyle/>
-          <a:p>
-            <a:r>
-              <a:rPr sz="1500" b="0" i="0">
-                <a:solidFill>
-                  <a:srgbClr val="333333"/>
-                </a:solidFill>
-                <a:latin typeface="Calibri"/>
-              </a:rPr>
-              <a:t>En su diagrama de actividad se puede saber, mirando solo la calle, quien es responsable de cada paso y cual de esos pasos ocurre sin tocar el computador?</a:t>
-            </a:r>
-          </a:p>
-        </p:txBody>
-      </p:sp>
-      <p:sp>
-        <p:nvSpPr>
-          <p:cNvPr id="17" name="TextBox 16"/>
-          <p:cNvSpPr txBox="1"/>
-          <p:nvPr/>
-        </p:nvSpPr>
-        <p:spPr>
-          <a:xfrm>
-            <a:off x="11185855" y="6473952"/>
-            <a:ext cx="640080" cy="274320"/>
-          </a:xfrm>
-          <a:prstGeom prst="rect">
-            <a:avLst/>
-          </a:prstGeom>
-          <a:noFill/>
-        </p:spPr>
-        <p:txBody>
-          <a:bodyPr wrap="square">
-            <a:spAutoFit/>
-          </a:bodyPr>
-          <a:lstStyle/>
-          <a:p>
-            <a:pPr algn="r"/>
-            <a:r>
-              <a:rPr sz="1100" b="0" i="0">
-                <a:solidFill>
-                  <a:srgbClr val="666666"/>
-                </a:solidFill>
-                <a:latin typeface="Calibri"/>
-              </a:rPr>
-              <a:t>22</a:t>
-            </a:r>
-          </a:p>
-        </p:txBody>
-      </p:sp>
-    </p:spTree>
-  </p:cSld>
-  <p:clrMapOvr>
-    <a:masterClrMapping/>
-  </p:clrMapOvr>
-</p:sld>
-</file>
-
-<file path=ppt/slides/slide23.xml><?xml version="1.0" encoding="utf-8"?>
-<p:sld xmlns:a="http://schemas.openxmlformats.org/drawingml/2006/main" xmlns:p="http://schemas.openxmlformats.org/presentationml/2006/main" xmlns:r="http://schemas.openxmlformats.org/officeDocument/2006/relationships">
-  <p:cSld>
-    <p:bg>
-      <p:bgPr>
-        <a:solidFill>
-          <a:srgbClr val="FFFFFF"/>
-        </a:solidFill>
-        <a:effectLst/>
-      </p:bgPr>
-    </p:bg>
-    <p:spTree>
-      <p:nvGrpSpPr>
-        <p:cNvPr id="1" name=""/>
-        <p:cNvGrpSpPr/>
-        <p:nvPr/>
-      </p:nvGrpSpPr>
-      <p:grpSpPr/>
-      <p:sp>
-        <p:nvSpPr>
-          <p:cNvPr id="2" name="Rectangle 1"/>
-          <p:cNvSpPr/>
-          <p:nvPr/>
-        </p:nvSpPr>
-        <p:spPr>
-          <a:xfrm>
-            <a:off x="0" y="0"/>
-            <a:ext cx="12191695" cy="960120"/>
-          </a:xfrm>
-          <a:prstGeom prst="rect">
-            <a:avLst/>
-          </a:prstGeom>
-          <a:solidFill>
-            <a:srgbClr val="095292"/>
-          </a:solidFill>
-          <a:ln>
-            <a:noFill/>
-          </a:ln>
-        </p:spPr>
-        <p:style>
-          <a:lnRef idx="1">
-            <a:schemeClr val="accent1"/>
-          </a:lnRef>
-          <a:fillRef idx="3">
-            <a:schemeClr val="accent1"/>
-          </a:fillRef>
-          <a:effectRef idx="2">
-            <a:schemeClr val="accent1"/>
-          </a:effectRef>
-          <a:fontRef idx="minor">
-            <a:schemeClr val="lt1"/>
-          </a:fontRef>
-        </p:style>
-        <p:txBody>
-          <a:bodyPr rtlCol="0" anchor="ctr"/>
-          <a:lstStyle/>
-          <a:p>
-            <a:pPr algn="ctr"/>
-          </a:p>
-        </p:txBody>
-      </p:sp>
-      <p:sp>
-        <p:nvSpPr>
-          <p:cNvPr id="3" name="Rectangle 2"/>
-          <p:cNvSpPr/>
-          <p:nvPr/>
-        </p:nvSpPr>
-        <p:spPr>
-          <a:xfrm>
-            <a:off x="0" y="960120"/>
-            <a:ext cx="12191695" cy="41148"/>
-          </a:xfrm>
-          <a:prstGeom prst="rect">
-            <a:avLst/>
-          </a:prstGeom>
-          <a:solidFill>
-            <a:srgbClr val="FFD000"/>
-          </a:solidFill>
-          <a:ln>
-            <a:noFill/>
-          </a:ln>
-        </p:spPr>
-        <p:style>
-          <a:lnRef idx="1">
-            <a:schemeClr val="accent1"/>
-          </a:lnRef>
-          <a:fillRef idx="3">
-            <a:schemeClr val="accent1"/>
-          </a:fillRef>
-          <a:effectRef idx="2">
-            <a:schemeClr val="accent1"/>
-          </a:effectRef>
-          <a:fontRef idx="minor">
-            <a:schemeClr val="lt1"/>
-          </a:fontRef>
-        </p:style>
-        <p:txBody>
-          <a:bodyPr rtlCol="0" anchor="ctr"/>
-          <a:lstStyle/>
-          <a:p>
-            <a:pPr algn="ctr"/>
-          </a:p>
-        </p:txBody>
-      </p:sp>
-      <p:sp>
-        <p:nvSpPr>
-          <p:cNvPr id="4" name="TextBox 3"/>
-          <p:cNvSpPr txBox="1"/>
-          <p:nvPr/>
-        </p:nvSpPr>
-        <p:spPr>
-          <a:xfrm>
-            <a:off x="457200" y="164592"/>
-            <a:ext cx="11277295" cy="502920"/>
-          </a:xfrm>
-          <a:prstGeom prst="rect">
-            <a:avLst/>
-          </a:prstGeom>
-          <a:noFill/>
-        </p:spPr>
-        <p:txBody>
-          <a:bodyPr wrap="square">
-            <a:spAutoFit/>
-          </a:bodyPr>
-          <a:lstStyle/>
-          <a:p>
-            <a:r>
-              <a:rPr sz="2600" b="1" i="0">
-                <a:solidFill>
-                  <a:srgbClr val="FFFFFF"/>
-                </a:solidFill>
-                <a:latin typeface="Calibri"/>
-              </a:rPr>
-              <a:t>Criterios de exito / entregable</a:t>
-            </a:r>
-          </a:p>
-        </p:txBody>
-      </p:sp>
-      <p:sp>
-        <p:nvSpPr>
-          <p:cNvPr id="5" name="TextBox 4"/>
-          <p:cNvSpPr txBox="1"/>
-          <p:nvPr/>
-        </p:nvSpPr>
-        <p:spPr>
-          <a:xfrm>
-            <a:off x="457200" y="1170432"/>
-            <a:ext cx="11277295" cy="5230368"/>
-          </a:xfrm>
-          <a:prstGeom prst="rect">
-            <a:avLst/>
-          </a:prstGeom>
-          <a:noFill/>
-        </p:spPr>
-        <p:txBody>
-          <a:bodyPr wrap="square">
-            <a:spAutoFit/>
-          </a:bodyPr>
-          <a:lstStyle/>
-          <a:p>
-            <a:pPr>
-              <a:spcAft>
-                <a:spcPts val="800"/>
-              </a:spcAft>
-            </a:pPr>
-            <a:r>
-              <a:rPr sz="2000" b="0" i="0">
-                <a:solidFill>
-                  <a:srgbClr val="333333"/>
-                </a:solidFill>
-                <a:latin typeface="Calibri"/>
-              </a:rPr>
-              <a:t>–   </a:t>
-            </a:r>
-            <a:r>
-              <a:rPr sz="2000" b="1" i="0">
-                <a:solidFill>
-                  <a:srgbClr val="333333"/>
-                </a:solidFill>
-                <a:latin typeface="Calibri"/>
-              </a:rPr>
-              <a:t>Entregable:</a:t>
-            </a:r>
-            <a:r>
-              <a:rPr sz="2000" b="0" i="0">
-                <a:solidFill>
-                  <a:srgbClr val="333333"/>
-                </a:solidFill>
-                <a:latin typeface="Calibri"/>
-              </a:rPr>
-              <a:t> Un PDF con el diagrama de secuencia de Agendar cita incluyendo el fragmento alt para horario ocupado, el diagrama de actividad del proceso de atencion con calles por rol, y la tabla que mapea cada mensaje del diagrama de secuencia a una operacion del diagrama de clases, subido a la plataforma del curso.</a:t>
-            </a:r>
-          </a:p>
-          <a:p>
-            <a:pPr>
-              <a:spcAft>
-                <a:spcPts val="800"/>
-              </a:spcAft>
-            </a:pPr>
-            <a:r>
-              <a:rPr sz="2000" b="0" i="0">
-                <a:solidFill>
-                  <a:srgbClr val="333333"/>
-                </a:solidFill>
-                <a:latin typeface="Calibri"/>
-              </a:rPr>
-              <a:t>–   </a:t>
-            </a:r>
-            <a:r>
-              <a:rPr sz="2000" b="1" i="0">
-                <a:solidFill>
-                  <a:srgbClr val="333333"/>
-                </a:solidFill>
-                <a:latin typeface="Calibri"/>
-              </a:rPr>
-              <a:t>Exito:</a:t>
-            </a:r>
-            <a:r>
-              <a:rPr sz="2000" b="0" i="0">
-                <a:solidFill>
-                  <a:srgbClr val="333333"/>
-                </a:solidFill>
-                <a:latin typeface="Calibri"/>
-              </a:rPr>
-              <a:t> El diagrama de secuencia reproduce el orden exacto del flujo principal de CU-04 y no inventa pasos que no esten en la especificacion.</a:t>
-            </a:r>
-          </a:p>
-          <a:p>
-            <a:pPr>
-              <a:spcAft>
-                <a:spcPts val="800"/>
-              </a:spcAft>
-            </a:pPr>
-            <a:r>
-              <a:rPr sz="2000" b="0" i="0">
-                <a:solidFill>
-                  <a:srgbClr val="333333"/>
-                </a:solidFill>
-                <a:latin typeface="Calibri"/>
-              </a:rPr>
-              <a:t>–   </a:t>
-            </a:r>
-            <a:r>
-              <a:rPr sz="2000" b="1" i="0">
-                <a:solidFill>
-                  <a:srgbClr val="333333"/>
-                </a:solidFill>
-                <a:latin typeface="Calibri"/>
-              </a:rPr>
-              <a:t>Exito:</a:t>
-            </a:r>
-            <a:r>
-              <a:rPr sz="2000" b="0" i="0">
-                <a:solidFill>
-                  <a:srgbClr val="333333"/>
-                </a:solidFill>
-                <a:latin typeface="Calibri"/>
-              </a:rPr>
-              <a:t> Todos los participantes del diagrama corresponden a actores legitimos o a clases existentes en el diagrama de clases, y aparecen las flechas de retorno con el dato que devuelven.</a:t>
-            </a:r>
-          </a:p>
-          <a:p>
-            <a:pPr>
-              <a:spcAft>
-                <a:spcPts val="800"/>
-              </a:spcAft>
-            </a:pPr>
-            <a:r>
-              <a:rPr sz="2000" b="0" i="0">
-                <a:solidFill>
-                  <a:srgbClr val="333333"/>
-                </a:solidFill>
-                <a:latin typeface="Calibri"/>
-              </a:rPr>
-              <a:t>–   </a:t>
-            </a:r>
-            <a:r>
-              <a:rPr sz="2000" b="1" i="0">
-                <a:solidFill>
-                  <a:srgbClr val="333333"/>
-                </a:solidFill>
-                <a:latin typeface="Calibri"/>
-              </a:rPr>
-              <a:t>Exito:</a:t>
-            </a:r>
-            <a:r>
-              <a:rPr sz="2000" b="0" i="0">
-                <a:solidFill>
-                  <a:srgbClr val="333333"/>
-                </a:solidFill>
-                <a:latin typeface="Calibri"/>
-              </a:rPr>
-              <a:t> Existe al menos un fragmento alt con sus dos condiciones de guarda escritas, coherente con un flujo alterno ya documentado.</a:t>
-            </a:r>
-          </a:p>
-          <a:p>
-            <a:pPr>
-              <a:spcAft>
-                <a:spcPts val="800"/>
-              </a:spcAft>
-            </a:pPr>
-            <a:r>
-              <a:rPr sz="2000" b="0" i="0">
-                <a:solidFill>
-                  <a:srgbClr val="333333"/>
-                </a:solidFill>
-                <a:latin typeface="Calibri"/>
-              </a:rPr>
-              <a:t>–   </a:t>
-            </a:r>
-            <a:r>
-              <a:rPr sz="2000" b="1" i="0">
-                <a:solidFill>
-                  <a:srgbClr val="333333"/>
-                </a:solidFill>
-                <a:latin typeface="Calibri"/>
-              </a:rPr>
-              <a:t>Exito:</a:t>
-            </a:r>
-            <a:r>
-              <a:rPr sz="2000" b="0" i="0">
-                <a:solidFill>
-                  <a:srgbClr val="333333"/>
-                </a:solidFill>
-                <a:latin typeface="Calibri"/>
-              </a:rPr>
-              <a:t> El diagrama de actividad tiene calles por rol, minimo dos decisiones con condiciones entre corchetes y una bifurcacion en paralelo, y la tabla de mapeo mensaje a operacion no tiene filas incompletas.</a:t>
-            </a:r>
-          </a:p>
-          <a:p>
-            <a:pPr>
-              <a:spcAft>
-                <a:spcPts val="800"/>
-              </a:spcAft>
-            </a:pPr>
-            <a:r>
-              <a:rPr sz="2000" b="0" i="0">
-                <a:solidFill>
-                  <a:srgbClr val="333333"/>
-                </a:solidFill>
-                <a:latin typeface="Calibri"/>
-              </a:rPr>
-              <a:t>–   </a:t>
-            </a:r>
-            <a:r>
-              <a:rPr sz="2000" b="1" i="0">
-                <a:solidFill>
-                  <a:srgbClr val="333333"/>
-                </a:solidFill>
-                <a:latin typeface="Calibri"/>
-              </a:rPr>
-              <a:t>Entrega en la plataforma del curso</a:t>
-            </a:r>
-            <a:r>
-              <a:rPr sz="2000" b="0" i="0">
-                <a:solidFill>
-                  <a:srgbClr val="333333"/>
-                </a:solidFill>
-                <a:latin typeface="Calibri"/>
-              </a:rPr>
-              <a:t> — en la fecha que indique el docente.</a:t>
-            </a:r>
-          </a:p>
-        </p:txBody>
-      </p:sp>
-      <p:sp>
-        <p:nvSpPr>
-          <p:cNvPr id="6" name="TextBox 5"/>
-          <p:cNvSpPr txBox="1"/>
-          <p:nvPr/>
-        </p:nvSpPr>
-        <p:spPr>
-          <a:xfrm>
-            <a:off x="11185855" y="6473952"/>
-            <a:ext cx="640080" cy="274320"/>
-          </a:xfrm>
-          <a:prstGeom prst="rect">
-            <a:avLst/>
-          </a:prstGeom>
-          <a:noFill/>
-        </p:spPr>
-        <p:txBody>
-          <a:bodyPr wrap="square">
-            <a:spAutoFit/>
-          </a:bodyPr>
-          <a:lstStyle/>
-          <a:p>
-            <a:pPr algn="r"/>
-            <a:r>
-              <a:rPr sz="1100" b="0" i="0">
-                <a:solidFill>
-                  <a:srgbClr val="666666"/>
-                </a:solidFill>
-                <a:latin typeface="Calibri"/>
-              </a:rPr>
-              <a:t>23</a:t>
-            </a:r>
-          </a:p>
-        </p:txBody>
-      </p:sp>
-    </p:spTree>
-  </p:cSld>
-  <p:clrMapOvr>
-    <a:masterClrMapping/>
-  </p:clrMapOvr>
-</p:sld>
-</file>
-
-<file path=ppt/slides/slide24.xml><?xml version="1.0" encoding="utf-8"?>
-<p:sld xmlns:a="http://schemas.openxmlformats.org/drawingml/2006/main" xmlns:p="http://schemas.openxmlformats.org/presentationml/2006/main" xmlns:r="http://schemas.openxmlformats.org/officeDocument/2006/relationships">
-  <p:cSld>
-    <p:bg>
-      <p:bgPr>
-        <a:solidFill>
-          <a:srgbClr val="FFFFFF"/>
-        </a:solidFill>
-        <a:effectLst/>
-      </p:bgPr>
-    </p:bg>
-    <p:spTree>
-      <p:nvGrpSpPr>
-        <p:cNvPr id="1" name=""/>
-        <p:cNvGrpSpPr/>
-        <p:nvPr/>
-      </p:nvGrpSpPr>
-      <p:grpSpPr/>
-      <p:sp>
-        <p:nvSpPr>
-          <p:cNvPr id="2" name="Rectangle 1"/>
-          <p:cNvSpPr/>
-          <p:nvPr/>
-        </p:nvSpPr>
-        <p:spPr>
-          <a:xfrm>
-            <a:off x="0" y="0"/>
-            <a:ext cx="12191695" cy="960120"/>
-          </a:xfrm>
-          <a:prstGeom prst="rect">
-            <a:avLst/>
-          </a:prstGeom>
-          <a:solidFill>
-            <a:srgbClr val="095292"/>
-          </a:solidFill>
-          <a:ln>
-            <a:noFill/>
-          </a:ln>
-        </p:spPr>
-        <p:style>
-          <a:lnRef idx="1">
-            <a:schemeClr val="accent1"/>
-          </a:lnRef>
-          <a:fillRef idx="3">
-            <a:schemeClr val="accent1"/>
-          </a:fillRef>
-          <a:effectRef idx="2">
-            <a:schemeClr val="accent1"/>
-          </a:effectRef>
-          <a:fontRef idx="minor">
-            <a:schemeClr val="lt1"/>
-          </a:fontRef>
-        </p:style>
-        <p:txBody>
-          <a:bodyPr rtlCol="0" anchor="ctr"/>
-          <a:lstStyle/>
-          <a:p>
-            <a:pPr algn="ctr"/>
-          </a:p>
-        </p:txBody>
-      </p:sp>
-      <p:sp>
-        <p:nvSpPr>
-          <p:cNvPr id="3" name="Rectangle 2"/>
-          <p:cNvSpPr/>
-          <p:nvPr/>
-        </p:nvSpPr>
-        <p:spPr>
-          <a:xfrm>
-            <a:off x="0" y="960120"/>
-            <a:ext cx="12191695" cy="41148"/>
-          </a:xfrm>
-          <a:prstGeom prst="rect">
-            <a:avLst/>
-          </a:prstGeom>
-          <a:solidFill>
-            <a:srgbClr val="FFD000"/>
-          </a:solidFill>
-          <a:ln>
-            <a:noFill/>
-          </a:ln>
-        </p:spPr>
-        <p:style>
-          <a:lnRef idx="1">
-            <a:schemeClr val="accent1"/>
-          </a:lnRef>
-          <a:fillRef idx="3">
-            <a:schemeClr val="accent1"/>
-          </a:fillRef>
-          <a:effectRef idx="2">
-            <a:schemeClr val="accent1"/>
-          </a:effectRef>
-          <a:fontRef idx="minor">
-            <a:schemeClr val="lt1"/>
-          </a:fontRef>
-        </p:style>
-        <p:txBody>
-          <a:bodyPr rtlCol="0" anchor="ctr"/>
-          <a:lstStyle/>
-          <a:p>
-            <a:pPr algn="ctr"/>
-          </a:p>
-        </p:txBody>
-      </p:sp>
-      <p:sp>
-        <p:nvSpPr>
-          <p:cNvPr id="4" name="TextBox 3"/>
-          <p:cNvSpPr txBox="1"/>
-          <p:nvPr/>
-        </p:nvSpPr>
-        <p:spPr>
-          <a:xfrm>
-            <a:off x="457200" y="164592"/>
-            <a:ext cx="11277295" cy="502920"/>
-          </a:xfrm>
-          <a:prstGeom prst="rect">
-            <a:avLst/>
-          </a:prstGeom>
-          <a:noFill/>
-        </p:spPr>
-        <p:txBody>
-          <a:bodyPr wrap="square">
-            <a:spAutoFit/>
-          </a:bodyPr>
-          <a:lstStyle/>
-          <a:p>
-            <a:r>
-              <a:rPr sz="2600" b="1" i="0">
-                <a:solidFill>
-                  <a:srgbClr val="FFFFFF"/>
-                </a:solidFill>
-                <a:latin typeface="Calibri"/>
-              </a:rPr>
-              <a:t>Para el PI esta semana</a:t>
-            </a:r>
-          </a:p>
-        </p:txBody>
-      </p:sp>
-      <p:sp>
-        <p:nvSpPr>
-          <p:cNvPr id="5" name="Rounded Rectangle 4"/>
-          <p:cNvSpPr/>
-          <p:nvPr/>
-        </p:nvSpPr>
-        <p:spPr>
-          <a:xfrm>
-            <a:off x="457200" y="1261872"/>
-            <a:ext cx="11277295" cy="1051560"/>
-          </a:xfrm>
-          <a:prstGeom prst="roundRect">
-            <a:avLst>
-              <a:gd name="adj" fmla="val 12000"/>
-            </a:avLst>
-          </a:prstGeom>
-          <a:solidFill>
-            <a:srgbClr val="E8F4FA"/>
-          </a:solidFill>
-          <a:ln>
-            <a:noFill/>
-          </a:ln>
-        </p:spPr>
-        <p:style>
-          <a:lnRef idx="1">
-            <a:schemeClr val="accent1"/>
-          </a:lnRef>
-          <a:fillRef idx="3">
-            <a:schemeClr val="accent1"/>
-          </a:fillRef>
-          <a:effectRef idx="2">
-            <a:schemeClr val="accent1"/>
-          </a:effectRef>
-          <a:fontRef idx="minor">
-            <a:schemeClr val="lt1"/>
-          </a:fontRef>
-        </p:style>
-        <p:txBody>
-          <a:bodyPr rtlCol="0" anchor="ctr"/>
-          <a:lstStyle/>
-          <a:p>
-            <a:pPr algn="ctr"/>
-          </a:p>
-        </p:txBody>
-      </p:sp>
-      <p:sp>
-        <p:nvSpPr>
-          <p:cNvPr id="6" name="Rectangle 5"/>
-          <p:cNvSpPr/>
-          <p:nvPr/>
-        </p:nvSpPr>
-        <p:spPr>
-          <a:xfrm>
-            <a:off x="457200" y="1261872"/>
-            <a:ext cx="128016" cy="1051560"/>
-          </a:xfrm>
-          <a:prstGeom prst="rect">
-            <a:avLst/>
-          </a:prstGeom>
-          <a:solidFill>
-            <a:srgbClr val="269CCB"/>
-          </a:solidFill>
-          <a:ln>
-            <a:noFill/>
-          </a:ln>
-        </p:spPr>
-        <p:style>
-          <a:lnRef idx="1">
-            <a:schemeClr val="accent1"/>
-          </a:lnRef>
-          <a:fillRef idx="3">
-            <a:schemeClr val="accent1"/>
-          </a:fillRef>
-          <a:effectRef idx="2">
-            <a:schemeClr val="accent1"/>
-          </a:effectRef>
-          <a:fontRef idx="minor">
-            <a:schemeClr val="lt1"/>
-          </a:fontRef>
-        </p:style>
-        <p:txBody>
-          <a:bodyPr rtlCol="0" anchor="ctr"/>
-          <a:lstStyle/>
-          <a:p>
-            <a:pPr algn="ctr"/>
-          </a:p>
-        </p:txBody>
-      </p:sp>
-      <p:sp>
-        <p:nvSpPr>
-          <p:cNvPr id="7" name="TextBox 6"/>
-          <p:cNvSpPr txBox="1"/>
-          <p:nvPr/>
-        </p:nvSpPr>
-        <p:spPr>
-          <a:xfrm>
-            <a:off x="777240" y="1399031"/>
-            <a:ext cx="10774375" cy="822959"/>
-          </a:xfrm>
-          <a:prstGeom prst="rect">
-            <a:avLst/>
-          </a:prstGeom>
-          <a:noFill/>
-        </p:spPr>
-        <p:txBody>
-          <a:bodyPr wrap="square">
-            <a:spAutoFit/>
-          </a:bodyPr>
-          <a:lstStyle/>
-          <a:p>
-            <a:r>
-              <a:rPr sz="1200" b="1" i="0">
-                <a:solidFill>
-                  <a:srgbClr val="269CCB"/>
-                </a:solidFill>
-                <a:latin typeface="Calibri"/>
-              </a:rPr>
-              <a:t>Info</a:t>
-            </a:r>
-          </a:p>
-          <a:p>
-            <a:pPr>
-              <a:spcBef>
-                <a:spcPts val="400"/>
-              </a:spcBef>
-            </a:pPr>
-            <a:r>
-              <a:rPr sz="1400" b="0" i="0">
-                <a:solidFill>
-                  <a:srgbClr val="333333"/>
-                </a:solidFill>
-                <a:latin typeface="Calibri"/>
-              </a:rPr>
-              <a:t>Hito: Queda modelada la dinamica de VetCare: el diagrama de secuencia del caso de uso Agendar cita y el diagrama de actividad del proceso de atencion en el consultorio.</a:t>
-            </a:r>
-          </a:p>
-        </p:txBody>
-      </p:sp>
-      <p:sp>
-        <p:nvSpPr>
-          <p:cNvPr id="8" name="Rounded Rectangle 7"/>
-          <p:cNvSpPr/>
-          <p:nvPr/>
-        </p:nvSpPr>
-        <p:spPr>
-          <a:xfrm>
-            <a:off x="457200" y="2478024"/>
-            <a:ext cx="11277295" cy="1051560"/>
-          </a:xfrm>
-          <a:prstGeom prst="roundRect">
-            <a:avLst>
-              <a:gd name="adj" fmla="val 12000"/>
-            </a:avLst>
-          </a:prstGeom>
-          <a:solidFill>
-            <a:srgbClr val="FFF8E1"/>
-          </a:solidFill>
-          <a:ln>
-            <a:noFill/>
-          </a:ln>
-        </p:spPr>
-        <p:style>
-          <a:lnRef idx="1">
-            <a:schemeClr val="accent1"/>
-          </a:lnRef>
-          <a:fillRef idx="3">
-            <a:schemeClr val="accent1"/>
-          </a:fillRef>
-          <a:effectRef idx="2">
-            <a:schemeClr val="accent1"/>
-          </a:effectRef>
-          <a:fontRef idx="minor">
-            <a:schemeClr val="lt1"/>
-          </a:fontRef>
-        </p:style>
-        <p:txBody>
-          <a:bodyPr rtlCol="0" anchor="ctr"/>
-          <a:lstStyle/>
-          <a:p>
-            <a:pPr algn="ctr"/>
-          </a:p>
-        </p:txBody>
-      </p:sp>
-      <p:sp>
-        <p:nvSpPr>
-          <p:cNvPr id="9" name="Rectangle 8"/>
-          <p:cNvSpPr/>
-          <p:nvPr/>
-        </p:nvSpPr>
-        <p:spPr>
-          <a:xfrm>
-            <a:off x="457200" y="2478024"/>
-            <a:ext cx="128016" cy="1051560"/>
-          </a:xfrm>
-          <a:prstGeom prst="rect">
-            <a:avLst/>
-          </a:prstGeom>
-          <a:solidFill>
-            <a:srgbClr val="FFD000"/>
-          </a:solidFill>
-          <a:ln>
-            <a:noFill/>
-          </a:ln>
-        </p:spPr>
-        <p:style>
-          <a:lnRef idx="1">
-            <a:schemeClr val="accent1"/>
-          </a:lnRef>
-          <a:fillRef idx="3">
-            <a:schemeClr val="accent1"/>
-          </a:fillRef>
-          <a:effectRef idx="2">
-            <a:schemeClr val="accent1"/>
-          </a:effectRef>
-          <a:fontRef idx="minor">
-            <a:schemeClr val="lt1"/>
-          </a:fontRef>
-        </p:style>
-        <p:txBody>
-          <a:bodyPr rtlCol="0" anchor="ctr"/>
-          <a:lstStyle/>
-          <a:p>
-            <a:pPr algn="ctr"/>
-          </a:p>
-        </p:txBody>
-      </p:sp>
-      <p:sp>
-        <p:nvSpPr>
-          <p:cNvPr id="10" name="TextBox 9"/>
-          <p:cNvSpPr txBox="1"/>
-          <p:nvPr/>
-        </p:nvSpPr>
-        <p:spPr>
-          <a:xfrm>
-            <a:off x="777240" y="2615184"/>
-            <a:ext cx="10774375" cy="822959"/>
-          </a:xfrm>
-          <a:prstGeom prst="rect">
-            <a:avLst/>
-          </a:prstGeom>
-          <a:noFill/>
-        </p:spPr>
-        <p:txBody>
-          <a:bodyPr wrap="square">
-            <a:spAutoFit/>
-          </a:bodyPr>
-          <a:lstStyle/>
-          <a:p>
-            <a:r>
-              <a:rPr sz="1200" b="1" i="0">
-                <a:solidFill>
-                  <a:srgbClr val="FFD000"/>
-                </a:solidFill>
-                <a:latin typeface="Calibri"/>
-              </a:rPr>
-              <a:t>Aclaración</a:t>
-            </a:r>
-          </a:p>
-          <a:p>
-            <a:pPr>
-              <a:spcBef>
-                <a:spcPts val="400"/>
-              </a:spcBef>
-            </a:pPr>
-            <a:r>
-              <a:rPr sz="1400" b="0" i="0">
-                <a:solidFill>
-                  <a:srgbClr val="333333"/>
-                </a:solidFill>
-                <a:latin typeface="Calibri"/>
-              </a:rPr>
-              <a:t>Enunciado completo: Clases/Proyecto Integrador/ (VetCare).</a:t>
-            </a:r>
-          </a:p>
-        </p:txBody>
-      </p:sp>
-      <p:sp>
-        <p:nvSpPr>
-          <p:cNvPr id="11" name="Rounded Rectangle 10"/>
-          <p:cNvSpPr/>
-          <p:nvPr/>
-        </p:nvSpPr>
-        <p:spPr>
-          <a:xfrm>
-            <a:off x="457200" y="3694176"/>
-            <a:ext cx="11277295" cy="1051560"/>
-          </a:xfrm>
-          <a:prstGeom prst="roundRect">
-            <a:avLst>
-              <a:gd name="adj" fmla="val 12000"/>
-            </a:avLst>
-          </a:prstGeom>
-          <a:solidFill>
-            <a:srgbClr val="FBE4E4"/>
-          </a:solidFill>
-          <a:ln>
-            <a:noFill/>
-          </a:ln>
-        </p:spPr>
-        <p:style>
-          <a:lnRef idx="1">
-            <a:schemeClr val="accent1"/>
-          </a:lnRef>
-          <a:fillRef idx="3">
-            <a:schemeClr val="accent1"/>
-          </a:fillRef>
-          <a:effectRef idx="2">
-            <a:schemeClr val="accent1"/>
-          </a:effectRef>
-          <a:fontRef idx="minor">
-            <a:schemeClr val="lt1"/>
-          </a:fontRef>
-        </p:style>
-        <p:txBody>
-          <a:bodyPr rtlCol="0" anchor="ctr"/>
-          <a:lstStyle/>
-          <a:p>
-            <a:pPr algn="ctr"/>
-          </a:p>
-        </p:txBody>
-      </p:sp>
-      <p:sp>
-        <p:nvSpPr>
-          <p:cNvPr id="12" name="Rectangle 11"/>
-          <p:cNvSpPr/>
-          <p:nvPr/>
-        </p:nvSpPr>
-        <p:spPr>
-          <a:xfrm>
-            <a:off x="457200" y="3694176"/>
-            <a:ext cx="128016" cy="1051560"/>
-          </a:xfrm>
-          <a:prstGeom prst="rect">
-            <a:avLst/>
-          </a:prstGeom>
-          <a:solidFill>
-            <a:srgbClr val="A02030"/>
-          </a:solidFill>
-          <a:ln>
-            <a:noFill/>
-          </a:ln>
-        </p:spPr>
-        <p:style>
-          <a:lnRef idx="1">
-            <a:schemeClr val="accent1"/>
-          </a:lnRef>
-          <a:fillRef idx="3">
-            <a:schemeClr val="accent1"/>
-          </a:fillRef>
-          <a:effectRef idx="2">
-            <a:schemeClr val="accent1"/>
-          </a:effectRef>
-          <a:fontRef idx="minor">
-            <a:schemeClr val="lt1"/>
-          </a:fontRef>
-        </p:style>
-        <p:txBody>
-          <a:bodyPr rtlCol="0" anchor="ctr"/>
-          <a:lstStyle/>
-          <a:p>
-            <a:pPr algn="ctr"/>
-          </a:p>
-        </p:txBody>
-      </p:sp>
-      <p:sp>
-        <p:nvSpPr>
-          <p:cNvPr id="13" name="TextBox 12"/>
-          <p:cNvSpPr txBox="1"/>
-          <p:nvPr/>
-        </p:nvSpPr>
-        <p:spPr>
-          <a:xfrm>
-            <a:off x="777240" y="3831336"/>
-            <a:ext cx="10774375" cy="822959"/>
-          </a:xfrm>
-          <a:prstGeom prst="rect">
-            <a:avLst/>
-          </a:prstGeom>
-          <a:noFill/>
-        </p:spPr>
-        <p:txBody>
-          <a:bodyPr wrap="square">
-            <a:spAutoFit/>
-          </a:bodyPr>
-          <a:lstStyle/>
-          <a:p>
-            <a:r>
-              <a:rPr sz="1200" b="1" i="0">
-                <a:solidFill>
-                  <a:srgbClr val="A02030"/>
-                </a:solidFill>
-                <a:latin typeface="Calibri"/>
-              </a:rPr>
-              <a:t>Atención</a:t>
-            </a:r>
-          </a:p>
-          <a:p>
-            <a:pPr>
-              <a:spcBef>
-                <a:spcPts val="400"/>
-              </a:spcBef>
-            </a:pPr>
-            <a:r>
-              <a:rPr sz="1400" b="0" i="0">
-                <a:solidFill>
-                  <a:srgbClr val="333333"/>
-                </a:solidFill>
-                <a:latin typeface="Calibri"/>
-              </a:rPr>
-              <a:t>Entrega del taller, si el docente lo asigna · en la fecha que indique el docente.</a:t>
-            </a:r>
-          </a:p>
-        </p:txBody>
-      </p:sp>
-      <p:sp>
-        <p:nvSpPr>
-          <p:cNvPr id="14" name="TextBox 13"/>
-          <p:cNvSpPr txBox="1"/>
-          <p:nvPr/>
-        </p:nvSpPr>
-        <p:spPr>
-          <a:xfrm>
-            <a:off x="11185855" y="6473952"/>
-            <a:ext cx="640080" cy="274320"/>
-          </a:xfrm>
-          <a:prstGeom prst="rect">
-            <a:avLst/>
-          </a:prstGeom>
-          <a:noFill/>
-        </p:spPr>
-        <p:txBody>
-          <a:bodyPr wrap="square">
-            <a:spAutoFit/>
-          </a:bodyPr>
-          <a:lstStyle/>
-          <a:p>
-            <a:pPr algn="r"/>
-            <a:r>
-              <a:rPr sz="1100" b="0" i="0">
-                <a:solidFill>
-                  <a:srgbClr val="666666"/>
-                </a:solidFill>
-                <a:latin typeface="Calibri"/>
-              </a:rPr>
-              <a:t>24</a:t>
-            </a:r>
-          </a:p>
-        </p:txBody>
-      </p:sp>
-    </p:spTree>
-  </p:cSld>
-  <p:clrMapOvr>
-    <a:masterClrMapping/>
-  </p:clrMapOvr>
-</p:sld>
-</file>
-
-<file path=ppt/slides/slide25.xml><?xml version="1.0" encoding="utf-8"?>
-<p:sld xmlns:a="http://schemas.openxmlformats.org/drawingml/2006/main" xmlns:p="http://schemas.openxmlformats.org/presentationml/2006/main" xmlns:r="http://schemas.openxmlformats.org/officeDocument/2006/relationships">
-  <p:cSld>
-    <p:bg>
-      <p:bgPr>
-        <a:solidFill>
-          <a:srgbClr val="FFFFFF"/>
-        </a:solidFill>
-        <a:effectLst/>
-      </p:bgPr>
-    </p:bg>
-    <p:spTree>
-      <p:nvGrpSpPr>
-        <p:cNvPr id="1" name=""/>
-        <p:cNvGrpSpPr/>
-        <p:nvPr/>
-      </p:nvGrpSpPr>
-      <p:grpSpPr/>
-      <p:sp>
-        <p:nvSpPr>
-          <p:cNvPr id="2" name="Rectangle 1"/>
-          <p:cNvSpPr/>
-          <p:nvPr/>
-        </p:nvSpPr>
-        <p:spPr>
-          <a:xfrm>
-            <a:off x="0" y="0"/>
-            <a:ext cx="12191695" cy="164592"/>
-          </a:xfrm>
-          <a:prstGeom prst="rect">
-            <a:avLst/>
-          </a:prstGeom>
-          <a:solidFill>
-            <a:srgbClr val="269CCB"/>
-          </a:solidFill>
-          <a:ln>
-            <a:noFill/>
-          </a:ln>
-        </p:spPr>
-        <p:style>
-          <a:lnRef idx="1">
-            <a:schemeClr val="accent1"/>
-          </a:lnRef>
-          <a:fillRef idx="3">
-            <a:schemeClr val="accent1"/>
-          </a:fillRef>
-          <a:effectRef idx="2">
-            <a:schemeClr val="accent1"/>
-          </a:effectRef>
-          <a:fontRef idx="minor">
-            <a:schemeClr val="lt1"/>
-          </a:fontRef>
-        </p:style>
-        <p:txBody>
-          <a:bodyPr rtlCol="0" anchor="ctr"/>
-          <a:lstStyle/>
-          <a:p>
-            <a:pPr algn="ctr"/>
-          </a:p>
-        </p:txBody>
-      </p:sp>
-      <p:pic>
-        <p:nvPicPr>
-          <p:cNvPr id="3" name="Picture 2" descr="logo_uniajc_color.png"/>
-          <p:cNvPicPr>
-            <a:picLocks noChangeAspect="1"/>
-          </p:cNvPicPr>
-          <p:nvPr/>
-        </p:nvPicPr>
-        <p:blipFill>
-          <a:blip r:embed="rId2"/>
-          <a:stretch>
-            <a:fillRect/>
-          </a:stretch>
-        </p:blipFill>
-        <p:spPr>
-          <a:xfrm>
-            <a:off x="10271455" y="5998464"/>
-            <a:ext cx="1463040" cy="643233"/>
-          </a:xfrm>
-          <a:prstGeom prst="rect">
-            <a:avLst/>
-          </a:prstGeom>
-        </p:spPr>
-      </p:pic>
-      <p:sp>
-        <p:nvSpPr>
-          <p:cNvPr id="4" name="TextBox 3"/>
-          <p:cNvSpPr txBox="1"/>
-          <p:nvPr/>
-        </p:nvSpPr>
-        <p:spPr>
-          <a:xfrm>
-            <a:off x="457200" y="1737360"/>
-            <a:ext cx="11277295" cy="1097280"/>
-          </a:xfrm>
-          <a:prstGeom prst="rect">
-            <a:avLst/>
-          </a:prstGeom>
-          <a:noFill/>
-        </p:spPr>
-        <p:txBody>
-          <a:bodyPr wrap="square" anchor="ctr"/>
-          <a:lstStyle/>
-          <a:p>
-            <a:pPr algn="ctr"/>
-            <a:r>
-              <a:rPr sz="3400" b="1" i="0">
-                <a:solidFill>
-                  <a:srgbClr val="095292"/>
-                </a:solidFill>
-                <a:latin typeface="Calibri"/>
-              </a:rPr>
-              <a:t>Clase 12 · VetCare avanza</a:t>
-            </a:r>
-          </a:p>
-        </p:txBody>
-      </p:sp>
-      <p:sp>
-        <p:nvSpPr>
-          <p:cNvPr id="5" name="TextBox 4"/>
-          <p:cNvSpPr txBox="1"/>
-          <p:nvPr/>
-        </p:nvSpPr>
-        <p:spPr>
-          <a:xfrm>
-            <a:off x="457200" y="3017520"/>
-            <a:ext cx="11277295" cy="1645920"/>
-          </a:xfrm>
-          <a:prstGeom prst="rect">
-            <a:avLst/>
-          </a:prstGeom>
-          <a:noFill/>
-        </p:spPr>
-        <p:txBody>
-          <a:bodyPr wrap="square">
-            <a:spAutoFit/>
-          </a:bodyPr>
-          <a:lstStyle/>
-          <a:p>
-            <a:pPr algn="ctr">
-              <a:spcAft>
-                <a:spcPts val="600"/>
-              </a:spcAft>
-            </a:pPr>
-            <a:r>
-              <a:rPr sz="1600" b="0" i="0">
-                <a:solidFill>
-                  <a:srgbClr val="333333"/>
-                </a:solidFill>
-                <a:latin typeface="Calibri"/>
-              </a:rPr>
-              <a:t>Queda modelada la dinamica de VetCare: el diagrama de secuencia del caso de uso Agendar cita y el diagrama de actividad del proceso de atencion en el consultorio.</a:t>
-            </a:r>
-          </a:p>
-          <a:p>
-            <a:pPr algn="ctr">
-              <a:spcAft>
-                <a:spcPts val="600"/>
-              </a:spcAft>
-            </a:pPr>
-            <a:r>
-              <a:rPr sz="1600" b="0" i="0">
-                <a:solidFill>
-                  <a:srgbClr val="333333"/>
-                </a:solidFill>
-                <a:latin typeface="Calibri"/>
-              </a:rPr>
-              <a:t>Entregable: Un PDF con el diagrama de secuencia de Agendar cita incluyendo el fragmento alt para horario ocupado, el diagrama de actividad del proceso de atencion con calles por rol, y la tabla que mapea cada mensaje del diagrama de secuencia a una operacion del diagrama de clases, subido a la plataforma del curso.</a:t>
-            </a:r>
-          </a:p>
-          <a:p>
-            <a:pPr algn="ctr">
-              <a:spcAft>
-                <a:spcPts val="600"/>
-              </a:spcAft>
-            </a:pPr>
-            <a:r>
-              <a:rPr sz="1600" b="0" i="0">
-                <a:solidFill>
-                  <a:srgbClr val="333333"/>
-                </a:solidFill>
-                <a:latin typeface="Calibri"/>
-              </a:rPr>
-              <a:t>Siguiente clase: continuamos el hilo del PI</a:t>
-            </a:r>
-          </a:p>
-        </p:txBody>
-      </p:sp>
-      <p:sp>
-        <p:nvSpPr>
-          <p:cNvPr id="6" name="TextBox 5"/>
-          <p:cNvSpPr txBox="1"/>
-          <p:nvPr/>
-        </p:nvSpPr>
-        <p:spPr>
-          <a:xfrm>
-            <a:off x="457200" y="4754880"/>
-            <a:ext cx="11277295" cy="640080"/>
-          </a:xfrm>
-          <a:prstGeom prst="rect">
-            <a:avLst/>
-          </a:prstGeom>
-          <a:noFill/>
-        </p:spPr>
-        <p:txBody>
-          <a:bodyPr wrap="square">
-            <a:spAutoFit/>
-          </a:bodyPr>
-          <a:lstStyle/>
-          <a:p>
-            <a:pPr algn="ctr"/>
-            <a:r>
-              <a:rPr sz="2000" b="1" i="0">
-                <a:solidFill>
-                  <a:srgbClr val="269CCB"/>
-                </a:solidFill>
-                <a:latin typeface="Calibri"/>
-              </a:rPr>
-              <a:t>Teoria al servicio del proyecto</a:t>
             </a:r>
           </a:p>
         </p:txBody>
@@ -11709,7 +8278,7 @@
                 </a:solidFill>
                 <a:latin typeface="Calibri"/>
               </a:rPr>
-              <a:t>Encuadre y repaso del avance</a:t>
+              <a:t>Encuadre y repaso</a:t>
             </a:r>
           </a:p>
         </p:txBody>
@@ -12054,7 +8623,7 @@
                 </a:solidFill>
                 <a:latin typeface="Calibri"/>
               </a:rPr>
-              <a:t>Taller guiado = avance del PI</a:t>
+              <a:t>Practica (opcional, guia en la carpeta)</a:t>
             </a:r>
           </a:p>
         </p:txBody>
@@ -12169,7 +8738,7 @@
                 </a:solidFill>
                 <a:latin typeface="Calibri"/>
               </a:rPr>
-              <a:t>Criterios de exito y cierre</a:t>
+              <a:t>Sintesis y cierre</a:t>
             </a:r>
           </a:p>
         </p:txBody>
@@ -14084,4 +10653,324 @@
   </a:objectDefaults>
   <a:extraClrSchemeLst/>
 </a:theme>
+</file>
+
+<file path=ppt/theme/theme2.xml><?xml version="1.0" encoding="utf-8"?>
+<a:theme xmlns:a="http://schemas.openxmlformats.org/drawingml/2006/main" name="Office Theme">
+  <a:themeElements>
+    <a:clrScheme name="Office">
+      <a:dk1>
+        <a:sysClr val="windowText" lastClr="000000"/>
+      </a:dk1>
+      <a:lt1>
+        <a:sysClr val="window" lastClr="FFFFFF"/>
+      </a:lt1>
+      <a:dk2>
+        <a:srgbClr val="1F497D"/>
+      </a:dk2>
+      <a:lt2>
+        <a:srgbClr val="EEECE1"/>
+      </a:lt2>
+      <a:accent1>
+        <a:srgbClr val="4F81BD"/>
+      </a:accent1>
+      <a:accent2>
+        <a:srgbClr val="C0504D"/>
+      </a:accent2>
+      <a:accent3>
+        <a:srgbClr val="9BBB59"/>
+      </a:accent3>
+      <a:accent4>
+        <a:srgbClr val="8064A2"/>
+      </a:accent4>
+      <a:accent5>
+        <a:srgbClr val="4BACC6"/>
+      </a:accent5>
+      <a:accent6>
+        <a:srgbClr val="F79646"/>
+      </a:accent6>
+      <a:hlink>
+        <a:srgbClr val="0000FF"/>
+      </a:hlink>
+      <a:folHlink>
+        <a:srgbClr val="800080"/>
+      </a:folHlink>
+    </a:clrScheme>
+    <a:fontScheme name="Office">
+      <a:majorFont>
+        <a:latin typeface="Calibri"/>
+        <a:ea typeface=""/>
+        <a:cs typeface=""/>
+        <a:font script="Jpan" typeface="ＭＳ Ｐゴシック"/>
+        <a:font script="Hang" typeface="맑은 고딕"/>
+        <a:font script="Hans" typeface="宋体"/>
+        <a:font script="Hant" typeface="新細明體"/>
+        <a:font script="Arab" typeface="Times New Roman"/>
+        <a:font script="Hebr" typeface="Times New Roman"/>
+        <a:font script="Thai" typeface="Angsana New"/>
+        <a:font script="Ethi" typeface="Nyala"/>
+        <a:font script="Beng" typeface="Vrinda"/>
+        <a:font script="Gujr" typeface="Shruti"/>
+        <a:font script="Khmr" typeface="MoolBoran"/>
+        <a:font script="Knda" typeface="Tunga"/>
+        <a:font script="Guru" typeface="Raavi"/>
+        <a:font script="Cans" typeface="Euphemia"/>
+        <a:font script="Cher" typeface="Plantagenet Cherokee"/>
+        <a:font script="Yiii" typeface="Microsoft Yi Baiti"/>
+        <a:font script="Tibt" typeface="Microsoft Himalaya"/>
+        <a:font script="Thaa" typeface="MV Boli"/>
+        <a:font script="Deva" typeface="Mangal"/>
+        <a:font script="Telu" typeface="Gautami"/>
+        <a:font script="Taml" typeface="Latha"/>
+        <a:font script="Syrc" typeface="Estrangelo Edessa"/>
+        <a:font script="Orya" typeface="Kalinga"/>
+        <a:font script="Mlym" typeface="Kartika"/>
+        <a:font script="Laoo" typeface="DokChampa"/>
+        <a:font script="Sinh" typeface="Iskoola Pota"/>
+        <a:font script="Mong" typeface="Mongolian Baiti"/>
+        <a:font script="Viet" typeface="Times New Roman"/>
+        <a:font script="Uigh" typeface="Microsoft Uighur"/>
+        <a:font script="Geor" typeface="Sylfaen"/>
+      </a:majorFont>
+      <a:minorFont>
+        <a:latin typeface="Calibri"/>
+        <a:ea typeface=""/>
+        <a:cs typeface=""/>
+        <a:font script="Jpan" typeface="ＭＳ Ｐゴシック"/>
+        <a:font script="Hang" typeface="맑은 고딕"/>
+        <a:font script="Hans" typeface="宋体"/>
+        <a:font script="Hant" typeface="新細明體"/>
+        <a:font script="Arab" typeface="Arial"/>
+        <a:font script="Hebr" typeface="Arial"/>
+        <a:font script="Thai" typeface="Cordia New"/>
+        <a:font script="Ethi" typeface="Nyala"/>
+        <a:font script="Beng" typeface="Vrinda"/>
+        <a:font script="Gujr" typeface="Shruti"/>
+        <a:font script="Khmr" typeface="DaunPenh"/>
+        <a:font script="Knda" typeface="Tunga"/>
+        <a:font script="Guru" typeface="Raavi"/>
+        <a:font script="Cans" typeface="Euphemia"/>
+        <a:font script="Cher" typeface="Plantagenet Cherokee"/>
+        <a:font script="Yiii" typeface="Microsoft Yi Baiti"/>
+        <a:font script="Tibt" typeface="Microsoft Himalaya"/>
+        <a:font script="Thaa" typeface="MV Boli"/>
+        <a:font script="Deva" typeface="Mangal"/>
+        <a:font script="Telu" typeface="Gautami"/>
+        <a:font script="Taml" typeface="Latha"/>
+        <a:font script="Syrc" typeface="Estrangelo Edessa"/>
+        <a:font script="Orya" typeface="Kalinga"/>
+        <a:font script="Mlym" typeface="Kartika"/>
+        <a:font script="Laoo" typeface="DokChampa"/>
+        <a:font script="Sinh" typeface="Iskoola Pota"/>
+        <a:font script="Mong" typeface="Mongolian Baiti"/>
+        <a:font script="Viet" typeface="Arial"/>
+        <a:font script="Uigh" typeface="Microsoft Uighur"/>
+        <a:font script="Geor" typeface="Sylfaen"/>
+      </a:minorFont>
+    </a:fontScheme>
+    <a:fmtScheme name="Office">
+      <a:fillStyleLst>
+        <a:solidFill>
+          <a:schemeClr val="phClr"/>
+        </a:solidFill>
+        <a:gradFill rotWithShape="1">
+          <a:gsLst>
+            <a:gs pos="0">
+              <a:schemeClr val="phClr">
+                <a:tint val="50000"/>
+                <a:satMod val="300000"/>
+              </a:schemeClr>
+            </a:gs>
+            <a:gs pos="35000">
+              <a:schemeClr val="phClr">
+                <a:tint val="37000"/>
+                <a:satMod val="300000"/>
+              </a:schemeClr>
+            </a:gs>
+            <a:gs pos="100000">
+              <a:schemeClr val="phClr">
+                <a:tint val="15000"/>
+                <a:satMod val="350000"/>
+              </a:schemeClr>
+            </a:gs>
+          </a:gsLst>
+          <a:lin ang="16200000" scaled="1"/>
+        </a:gradFill>
+        <a:gradFill rotWithShape="1">
+          <a:gsLst>
+            <a:gs pos="0">
+              <a:schemeClr val="phClr">
+                <a:tint val="100000"/>
+                <a:shade val="100000"/>
+                <a:satMod val="130000"/>
+              </a:schemeClr>
+            </a:gs>
+            <a:gs pos="100000">
+              <a:schemeClr val="phClr">
+                <a:tint val="50000"/>
+                <a:shade val="100000"/>
+                <a:satMod val="350000"/>
+              </a:schemeClr>
+            </a:gs>
+          </a:gsLst>
+          <a:lin ang="16200000" scaled="0"/>
+        </a:gradFill>
+      </a:fillStyleLst>
+      <a:lnStyleLst>
+        <a:ln w="9525" cap="flat" cmpd="sng" algn="ctr">
+          <a:solidFill>
+            <a:schemeClr val="phClr">
+              <a:shade val="95000"/>
+              <a:satMod val="105000"/>
+            </a:schemeClr>
+          </a:solidFill>
+          <a:prstDash val="solid"/>
+        </a:ln>
+        <a:ln w="25400" cap="flat" cmpd="sng" algn="ctr">
+          <a:solidFill>
+            <a:schemeClr val="phClr"/>
+          </a:solidFill>
+          <a:prstDash val="solid"/>
+        </a:ln>
+        <a:ln w="38100" cap="flat" cmpd="sng" algn="ctr">
+          <a:solidFill>
+            <a:schemeClr val="phClr"/>
+          </a:solidFill>
+          <a:prstDash val="solid"/>
+        </a:ln>
+      </a:lnStyleLst>
+      <a:effectStyleLst>
+        <a:effectStyle>
+          <a:effectLst>
+            <a:outerShdw blurRad="40000" dist="20000" dir="5400000" rotWithShape="0">
+              <a:srgbClr val="000000">
+                <a:alpha val="38000"/>
+              </a:srgbClr>
+            </a:outerShdw>
+          </a:effectLst>
+        </a:effectStyle>
+        <a:effectStyle>
+          <a:effectLst>
+            <a:outerShdw blurRad="40000" dist="23000" dir="5400000" rotWithShape="0">
+              <a:srgbClr val="000000">
+                <a:alpha val="35000"/>
+              </a:srgbClr>
+            </a:outerShdw>
+          </a:effectLst>
+        </a:effectStyle>
+        <a:effectStyle>
+          <a:effectLst>
+            <a:outerShdw blurRad="40000" dist="23000" dir="5400000" rotWithShape="0">
+              <a:srgbClr val="000000">
+                <a:alpha val="35000"/>
+              </a:srgbClr>
+            </a:outerShdw>
+          </a:effectLst>
+          <a:scene3d>
+            <a:camera prst="orthographicFront">
+              <a:rot lat="0" lon="0" rev="0"/>
+            </a:camera>
+            <a:lightRig rig="threePt" dir="t">
+              <a:rot lat="0" lon="0" rev="1200000"/>
+            </a:lightRig>
+          </a:scene3d>
+          <a:sp3d>
+            <a:bevelT w="63500" h="25400"/>
+          </a:sp3d>
+        </a:effectStyle>
+      </a:effectStyleLst>
+      <a:bgFillStyleLst>
+        <a:solidFill>
+          <a:schemeClr val="phClr"/>
+        </a:solidFill>
+        <a:gradFill rotWithShape="1">
+          <a:gsLst>
+            <a:gs pos="0">
+              <a:schemeClr val="phClr">
+                <a:tint val="40000"/>
+                <a:satMod val="350000"/>
+              </a:schemeClr>
+            </a:gs>
+            <a:gs pos="40000">
+              <a:schemeClr val="phClr">
+                <a:tint val="45000"/>
+                <a:shade val="99000"/>
+                <a:satMod val="350000"/>
+              </a:schemeClr>
+            </a:gs>
+            <a:gs pos="100000">
+              <a:schemeClr val="phClr">
+                <a:shade val="20000"/>
+                <a:satMod val="255000"/>
+              </a:schemeClr>
+            </a:gs>
+          </a:gsLst>
+          <a:path path="circle">
+            <a:fillToRect l="50000" t="-80000" r="50000" b="180000"/>
+          </a:path>
+        </a:gradFill>
+        <a:gradFill rotWithShape="1">
+          <a:gsLst>
+            <a:gs pos="0">
+              <a:schemeClr val="phClr">
+                <a:tint val="80000"/>
+                <a:satMod val="300000"/>
+              </a:schemeClr>
+            </a:gs>
+            <a:gs pos="100000">
+              <a:schemeClr val="phClr">
+                <a:shade val="30000"/>
+                <a:satMod val="200000"/>
+              </a:schemeClr>
+            </a:gs>
+          </a:gsLst>
+          <a:path path="circle">
+            <a:fillToRect l="50000" t="50000" r="50000" b="50000"/>
+          </a:path>
+        </a:gradFill>
+      </a:bgFillStyleLst>
+    </a:fmtScheme>
+  </a:themeElements>
+  <a:objectDefaults>
+    <a:spDef>
+      <a:spPr/>
+      <a:bodyPr/>
+      <a:lstStyle/>
+      <a:style>
+        <a:lnRef idx="1">
+          <a:schemeClr val="accent1"/>
+        </a:lnRef>
+        <a:fillRef idx="3">
+          <a:schemeClr val="accent1"/>
+        </a:fillRef>
+        <a:effectRef idx="2">
+          <a:schemeClr val="accent1"/>
+        </a:effectRef>
+        <a:fontRef idx="minor">
+          <a:schemeClr val="lt1"/>
+        </a:fontRef>
+      </a:style>
+    </a:spDef>
+    <a:lnDef>
+      <a:spPr/>
+      <a:bodyPr/>
+      <a:lstStyle/>
+      <a:style>
+        <a:lnRef idx="2">
+          <a:schemeClr val="accent1"/>
+        </a:lnRef>
+        <a:fillRef idx="0">
+          <a:schemeClr val="accent1"/>
+        </a:fillRef>
+        <a:effectRef idx="1">
+          <a:schemeClr val="accent1"/>
+        </a:effectRef>
+        <a:fontRef idx="minor">
+          <a:schemeClr val="tx1"/>
+        </a:fontRef>
+      </a:style>
+    </a:lnDef>
+  </a:objectDefaults>
+  <a:extraClrSchemeLst/>
+</a:theme>
 </file>
--- a/Seminario de Sistemas/Clases/Clase 12 - Diagramas UML avanzados/Presentacion.pptx
+++ b/Seminario de Sistemas/Clases/Clase 12 - Diagramas UML avanzados/Presentacion.pptx
@@ -595,7 +595,7 @@
           <a:lstStyle/>
           <a:p>
             <a:r>
-              <a:t>Eso permite modelar el proceso completo de atencion en Huellitas: el propietario llega y pregunta, la recepcionista verifica la cita, si no la tiene se decide entre esperar o reagendar, el veterinario atiende, registra la consulta y si formula medicamentos el flujo se abre en dos ramas paralelas, una de facturacion y otra de programacion del control.</a:t>
+              <a:t>Eso permite modelar el proceso completo de atencion en la clinica: el propietario llega y pregunta, la recepcionista verifica la cita, si no la tiene se decide entre esperar o reagendar, el veterinario atiende, registra la consulta y si formula medicamentos el flujo se abre en dos ramas paralelas, una de facturacion y otra de programacion del control.</a:t>
             </a:r>
           </a:p>
         </p:txBody>
@@ -677,7 +677,7 @@
           <a:p/>
           <a:p>
             <a:r>
-              <a:t>Por eso el entregable de hoy incluye la tabla de mapeo mensaje a operacion: obliga a cerrar el circulo entre lo dinamico y lo estatico.</a:t>
+              <a:t>Por eso el artefacto de hoy incluye la tabla de mapeo mensaje a operacion: obliga a cerrar el circulo entre lo dinamico y lo estatico.</a:t>
             </a:r>
           </a:p>
         </p:txBody>
@@ -4540,7 +4540,7 @@
                 </a:solidFill>
                 <a:latin typeface="Calibri"/>
               </a:rPr>
-              <a:t>–   Y es el que usamos en VetCare para el horario ocupado: si hay disponibilidad se guarda la cita y se confirma, si no la hay el sistema ofrece alternativas del dia siguiente.</a:t>
+              <a:t>–   Y es el que usamos en el sistema de la clinica para el horario ocupado: si hay disponibilidad se guarda la cita y se confirma, si no la hay el sistema ofrece alternativas del dia siguiente.</a:t>
             </a:r>
           </a:p>
           <a:p>
@@ -7394,7 +7394,7 @@
                 </a:solidFill>
                 <a:latin typeface="Calibri"/>
               </a:rPr>
-              <a:t>–   Mismo dominio VetCare — no otro ejemplo. Aqui se diseña, no se programa.</a:t>
+              <a:t>–   Mismo dominio: la clinica veterinaria — no otro ejemplo. Aqui se diseña, no se programa.</a:t>
             </a:r>
           </a:p>
         </p:txBody>
@@ -7939,7 +7939,7 @@
                 </a:solidFill>
                 <a:latin typeface="Calibri"/>
               </a:rPr>
-              <a:t>–   Ejemplo de toda la clase: VetCare, el sistema de la clinica «Huellitas».</a:t>
+              <a:t>–   Ejemplo de toda la clase: el sistema de una clinica veterinaria.</a:t>
             </a:r>
           </a:p>
         </p:txBody>
@@ -8508,7 +8508,7 @@
                 </a:solidFill>
                 <a:latin typeface="Calibri"/>
               </a:rPr>
-              <a:t>Demo en vivo sobre VetCare</a:t>
+              <a:t>Demo en vivo sobre la clinica</a:t>
             </a:r>
           </a:p>
         </p:txBody>
@@ -8972,7 +8972,7 @@
                 </a:solidFill>
                 <a:latin typeface="Calibri"/>
               </a:rPr>
-              <a:t>Hasta ahora todos los modelos de VetCare han sido estaticos: el... (1/2)</a:t>
+              <a:t>Hasta ahora todos los modelos del sistema de la clinica han sido... (1/2)</a:t>
             </a:r>
           </a:p>
         </p:txBody>
@@ -9011,7 +9011,7 @@
                 </a:solidFill>
                 <a:latin typeface="Calibri"/>
               </a:rPr>
-              <a:t>–   Hasta ahora todos los modelos de VetCare han sido estaticos: el diagrama de clases dice que existe una clase Cita con sus atributos, y la especificacion de caso de uso dice que la recepcionista agenda.</a:t>
+              <a:t>–   Hasta ahora todos los modelos del sistema de la clinica han sido estaticos: el diagrama de clases dice que existe una clase Cita con sus atributos, y la especificacion de caso de uso dice que la recepcionista agenda.</a:t>
             </a:r>
           </a:p>
           <a:p>
@@ -9224,7 +9224,7 @@
                 </a:solidFill>
                 <a:latin typeface="Calibri"/>
               </a:rPr>
-              <a:t>Hasta ahora todos los modelos de VetCare han sido estaticos: el... (2/2)</a:t>
+              <a:t>Hasta ahora todos los modelos del sistema de la clinica han sido... (2/2)</a:t>
             </a:r>
           </a:p>
         </p:txBody>
@@ -9263,7 +9263,7 @@
                 </a:solidFill>
                 <a:latin typeface="Calibri"/>
               </a:rPr>
-              <a:t>–   En VetCare, agendar una cita se ve como una cadena corta y clara: la recepcionista le habla a la pantalla de agenda, la pantalla le habla al control de agenda</a:t>
+              <a:t>–   En el sistema de la clinica, agendar una cita se ve como una cadena corta y clara: la recepcionista le habla a la pantalla de agenda, la pantalla le habla al control de agenda</a:t>
             </a:r>
           </a:p>
           <a:p>
@@ -9735,7 +9735,7 @@
                 </a:solidFill>
                 <a:latin typeface="Calibri"/>
               </a:rPr>
-              <a:t>–   La herramienta que lo vuelve realmente util en un proyecto como VetCare son las particiones o calles: una franja por cada rol, de modo que al mirar el dibujo se sabe de un vistazo que hace el Propietario</a:t>
+              <a:t>–   La herramienta que lo vuelve realmente util en un proyecto como el de la clinica son las particiones o calles: una franja por cada rol, de modo que al mirar el dibujo se sabe de un vistazo que hace el Propietario</a:t>
             </a:r>
           </a:p>
           <a:p>
@@ -10287,7 +10287,23 @@
                 </a:solidFill>
                 <a:latin typeface="Calibri"/>
               </a:rPr>
-              <a:t>–   En VetCare, CU-04 Agendar cita se modela con secuencia; la atencion completa desde que el propietario entra por la puerta hasta que sale con la factura se modela con actividad, porque incluye conversaciones y esperas que ningun objeto del sistema ejecuta.</a:t>
+              <a:t>–   En el sistema de la clinica, CU-04 Agendar cita se modela con secuencia; la atencion completa desde que el propietario entra por la puerta hasta que sale con la factura se modela con actividad</a:t>
+            </a:r>
+          </a:p>
+          <a:p>
+            <a:pPr>
+              <a:spcAft>
+                <a:spcPts val="800"/>
+              </a:spcAft>
+            </a:pPr>
+            <a:r>
+              <a:rPr sz="2000" b="0" i="0">
+                <a:solidFill>
+                  <a:srgbClr val="333333"/>
+                </a:solidFill>
+                <a:latin typeface="Calibri"/>
+              </a:rPr>
+              <a:t>–   Porque incluye conversaciones y esperas que ningun objeto del sistema ejecuta.</a:t>
             </a:r>
           </a:p>
         </p:txBody>

--- a/Seminario de Sistemas/Clases/Clase 12 - Diagramas UML avanzados/Presentacion.pptx
+++ b/Seminario de Sistemas/Clases/Clase 12 - Diagramas UML avanzados/Presentacion.pptx
@@ -4540,7 +4540,7 @@
                 </a:solidFill>
                 <a:latin typeface="Calibri"/>
               </a:rPr>
-              <a:t>–   Y es el que usamos en el sistema de la clinica para el horario ocupado: si hay disponibilidad se guarda la cita y se confirma, si no la hay el sistema ofrece alternativas del dia siguiente.</a:t>
+              <a:t>–   Y es el que usamos en la clinica para el horario ocupado: si hay disponibilidad se guarda la cita y se confirma, si no la hay el sistema ofrece alternativas del dia siguiente.</a:t>
             </a:r>
           </a:p>
           <a:p>
@@ -7378,7 +7378,7 @@
                 </a:solidFill>
                 <a:latin typeface="Calibri"/>
               </a:rPr>
-              <a:t> El docente toma el flujo principal ya escrito de CU-04 Agendar cita y lo convierte linea por linea en mensajes de un diagrama de secuencia en Mermaid, mostrando en vivo que cada mensaje necesita una clase dueña que lo pueda responder.</a:t>
+              <a:t> Se toma el flujo principal ya escrito de CU-04 Agendar cita y lo convierte linea por linea en mensajes de un diagrama de secuencia en Mermaid, mostrando en vivo que cada mensaje necesita una clase dueña que lo pueda responder.</a:t>
             </a:r>
           </a:p>
           <a:p>
@@ -8972,7 +8972,7 @@
                 </a:solidFill>
                 <a:latin typeface="Calibri"/>
               </a:rPr>
-              <a:t>Hasta ahora todos los modelos del sistema de la clinica han sido... (1/2)</a:t>
+              <a:t>Hasta ahora todos los modelos de la clinica han sido estaticos: el... (1/2)</a:t>
             </a:r>
           </a:p>
         </p:txBody>
@@ -9011,7 +9011,7 @@
                 </a:solidFill>
                 <a:latin typeface="Calibri"/>
               </a:rPr>
-              <a:t>–   Hasta ahora todos los modelos del sistema de la clinica han sido estaticos: el diagrama de clases dice que existe una clase Cita con sus atributos, y la especificacion de caso de uso dice que la recepcionista agenda.</a:t>
+              <a:t>–   Hasta ahora todos los modelos de la clinica han sido estaticos: el diagrama de clases dice que existe una clase Cita con sus atributos, y la especificacion de caso de uso dice que la recepcionista agenda.</a:t>
             </a:r>
           </a:p>
           <a:p>
@@ -9224,7 +9224,7 @@
                 </a:solidFill>
                 <a:latin typeface="Calibri"/>
               </a:rPr>
-              <a:t>Hasta ahora todos los modelos del sistema de la clinica han sido... (2/2)</a:t>
+              <a:t>Hasta ahora todos los modelos de la clinica han sido estaticos: el... (2/2)</a:t>
             </a:r>
           </a:p>
         </p:txBody>
@@ -9263,7 +9263,7 @@
                 </a:solidFill>
                 <a:latin typeface="Calibri"/>
               </a:rPr>
-              <a:t>–   En el sistema de la clinica, agendar una cita se ve como una cadena corta y clara: la recepcionista le habla a la pantalla de agenda, la pantalla le habla al control de agenda</a:t>
+              <a:t>–   En la clinica, agendar una cita se ve como una cadena corta y clara: la recepcionista le habla a la pantalla de agenda, la pantalla le habla al control de agenda</a:t>
             </a:r>
           </a:p>
           <a:p>
@@ -10287,23 +10287,7 @@
                 </a:solidFill>
                 <a:latin typeface="Calibri"/>
               </a:rPr>
-              <a:t>–   En el sistema de la clinica, CU-04 Agendar cita se modela con secuencia; la atencion completa desde que el propietario entra por la puerta hasta que sale con la factura se modela con actividad</a:t>
-            </a:r>
-          </a:p>
-          <a:p>
-            <a:pPr>
-              <a:spcAft>
-                <a:spcPts val="800"/>
-              </a:spcAft>
-            </a:pPr>
-            <a:r>
-              <a:rPr sz="2000" b="0" i="0">
-                <a:solidFill>
-                  <a:srgbClr val="333333"/>
-                </a:solidFill>
-                <a:latin typeface="Calibri"/>
-              </a:rPr>
-              <a:t>–   Porque incluye conversaciones y esperas que ningun objeto del sistema ejecuta.</a:t>
+              <a:t>–   En la clinica, CU-04 Agendar cita se modela con secuencia; la atencion completa desde que el propietario entra por la puerta hasta que sale con la factura se modela con actividad, porque incluye conversaciones y esperas que ningun objeto del sistema ejecuta.</a:t>
             </a:r>
           </a:p>
         </p:txBody>

--- a/Seminario de Sistemas/Clases/Clase 12 - Diagramas UML avanzados/Presentacion.pptx
+++ b/Seminario de Sistemas/Clases/Clase 12 - Diagramas UML avanzados/Presentacion.pptx
@@ -1018,94 +1018,6 @@
           <a:p>
             <a:r>
               <a:t>La practica sana es dibujar el camino feliz completo mas uno o dos fragmentos que representen las decisiones criticas del negocio, y dejar el resto documentado en el texto de la especificacion, que para eso existe.</a:t>
-            </a:r>
-          </a:p>
-        </p:txBody>
-      </p:sp>
-      <p:sp>
-        <p:nvSpPr>
-          <p:cNvPr id="4" name="Slide Number Placeholder 3"/>
-          <p:cNvSpPr>
-            <a:spLocks noGrp="1"/>
-          </p:cNvSpPr>
-          <p:nvPr>
-            <p:ph type="sldNum" idx="5" sz="quarter"/>
-          </p:nvPr>
-        </p:nvSpPr>
-        <p:spPr/>
-      </p:sp>
-    </p:spTree>
-  </p:cSld>
-  <p:clrMapOvr>
-    <a:masterClrMapping/>
-  </p:clrMapOvr>
-</p:notes>
-</file>
-
-<file path=ppt/notesSlides/notesSlide6.xml><?xml version="1.0" encoding="utf-8"?>
-<p:notes xmlns:a="http://schemas.openxmlformats.org/drawingml/2006/main" xmlns:p="http://schemas.openxmlformats.org/presentationml/2006/main" xmlns:r="http://schemas.openxmlformats.org/officeDocument/2006/relationships">
-  <p:cSld>
-    <p:spTree>
-      <p:nvGrpSpPr>
-        <p:cNvPr id="1" name=""/>
-        <p:cNvGrpSpPr/>
-        <p:nvPr/>
-      </p:nvGrpSpPr>
-      <p:grpSpPr>
-        <a:xfrm>
-          <a:off x="0" y="0"/>
-          <a:ext cx="0" cy="0"/>
-          <a:chOff x="0" y="0"/>
-          <a:chExt cx="0" cy="0"/>
-        </a:xfrm>
-      </p:grpSpPr>
-      <p:sp>
-        <p:nvSpPr>
-          <p:cNvPr id="2" name="Slide Image Placeholder 1"/>
-          <p:cNvSpPr>
-            <a:spLocks noGrp="1"/>
-          </p:cNvSpPr>
-          <p:nvPr>
-            <p:ph type="sldImg" idx="2"/>
-          </p:nvPr>
-        </p:nvSpPr>
-        <p:spPr/>
-      </p:sp>
-      <p:sp>
-        <p:nvSpPr>
-          <p:cNvPr id="3" name="Notes Placeholder 2"/>
-          <p:cNvSpPr>
-            <a:spLocks noGrp="1"/>
-          </p:cNvSpPr>
-          <p:nvPr>
-            <p:ph type="body" idx="3" sz="quarter"/>
-          </p:nvPr>
-        </p:nvSpPr>
-        <p:spPr/>
-        <p:txBody>
-          <a:bodyPr/>
-          <a:lstStyle/>
-          <a:p>
-            <a:r>
-              <a:t>TEXTO COMPLETO DE LA LÁMINA (se proyecta resumido):</a:t>
-            </a:r>
-          </a:p>
-          <a:p/>
-          <a:p>
-            <a:r>
-              <a:t>Herramienta: draw.io · Mermaid Live Editor</a:t>
-            </a:r>
-          </a:p>
-          <a:p/>
-          <a:p>
-            <a:r>
-              <a:t>Demo: Se toma el flujo principal ya escrito de CU-04 Agendar cita y lo convierte linea por linea en mensajes de un diagrama de secuencia en Mermaid, mostrando en vivo que cada mensaje necesita una clase dueña que lo pueda responder.</a:t>
-            </a:r>
-          </a:p>
-          <a:p/>
-          <a:p>
-            <a:r>
-              <a:t>Mismo dominio: la clinica veterinaria — no otro ejemplo. Aqui se diseña, no se programa.</a:t>
             </a:r>
           </a:p>
         </p:txBody>
@@ -6823,118 +6735,14 @@
       </p:sp>
       <p:sp>
         <p:nvSpPr>
-          <p:cNvPr id="5" name="Rounded Rectangle 4"/>
-          <p:cNvSpPr/>
-          <p:nvPr/>
-        </p:nvSpPr>
-        <p:spPr>
-          <a:xfrm>
-            <a:off x="5797149" y="1573813"/>
-            <a:ext cx="6010497" cy="4057845"/>
-          </a:xfrm>
-          <a:prstGeom prst="roundRect">
-            <a:avLst>
-              <a:gd name="adj" fmla="val 4000"/>
-            </a:avLst>
-          </a:prstGeom>
-          <a:solidFill>
-            <a:srgbClr val="E8EEF4"/>
-          </a:solidFill>
-          <a:ln>
-            <a:noFill/>
-          </a:ln>
-        </p:spPr>
-        <p:style>
-          <a:lnRef idx="1">
-            <a:schemeClr val="accent1"/>
-          </a:lnRef>
-          <a:fillRef idx="3">
-            <a:schemeClr val="accent1"/>
-          </a:fillRef>
-          <a:effectRef idx="2">
-            <a:schemeClr val="accent1"/>
-          </a:effectRef>
-          <a:fontRef idx="minor">
-            <a:schemeClr val="lt1"/>
-          </a:fontRef>
-        </p:style>
-        <p:txBody>
-          <a:bodyPr rtlCol="0" anchor="ctr"/>
-          <a:lstStyle/>
-          <a:p>
-            <a:pPr algn="ctr"/>
-          </a:p>
-        </p:txBody>
-      </p:sp>
-      <p:pic>
-        <p:nvPicPr>
-          <p:cNvPr id="6" name="Picture 5" descr="laptop-code-live-demo.jpg"/>
-          <p:cNvPicPr>
-            <a:picLocks noChangeAspect="1"/>
-          </p:cNvPicPr>
-          <p:nvPr/>
-        </p:nvPicPr>
-        <p:blipFill>
-          <a:blip r:embed="rId2"/>
-          <a:stretch>
-            <a:fillRect/>
-          </a:stretch>
-        </p:blipFill>
-        <p:spPr>
-          <a:xfrm>
-            <a:off x="5870301" y="1646965"/>
-            <a:ext cx="5864193" cy="3911541"/>
-          </a:xfrm>
-          <a:prstGeom prst="rect">
-            <a:avLst/>
-          </a:prstGeom>
-        </p:spPr>
-      </p:pic>
-      <p:sp>
-        <p:nvSpPr>
-          <p:cNvPr id="7" name="TextBox 6"/>
+          <p:cNvPr id="5" name="TextBox 4"/>
           <p:cNvSpPr txBox="1"/>
           <p:nvPr/>
         </p:nvSpPr>
         <p:spPr>
           <a:xfrm>
-            <a:off x="5870301" y="5961888"/>
-            <a:ext cx="5864193" cy="320040"/>
-          </a:xfrm>
-          <a:prstGeom prst="rect">
-            <a:avLst/>
-          </a:prstGeom>
-          <a:noFill/>
-        </p:spPr>
-        <p:txBody>
-          <a:bodyPr wrap="square">
-            <a:spAutoFit/>
-          </a:bodyPr>
-          <a:lstStyle/>
-          <a:p>
-            <a:pPr algn="ctr"/>
-            <a:r>
-              <a:rPr sz="1100" b="0" i="1">
-                <a:solidFill>
-                  <a:srgbClr val="666666"/>
-                </a:solidFill>
-                <a:latin typeface="Calibri"/>
-              </a:rPr>
-              <a:t>Foto: olia danilevich · Pexels</a:t>
-            </a:r>
-          </a:p>
-        </p:txBody>
-      </p:sp>
-      <p:sp>
-        <p:nvSpPr>
-          <p:cNvPr id="8" name="TextBox 7"/>
-          <p:cNvSpPr txBox="1"/>
-          <p:nvPr/>
-        </p:nvSpPr>
-        <p:spPr>
-          <a:xfrm>
-            <a:off x="457200" y="1353312"/>
-            <a:ext cx="5093061" cy="5047488"/>
+            <a:off x="457200" y="1170432"/>
+            <a:ext cx="11277295" cy="5230368"/>
           </a:xfrm>
           <a:prstGeom prst="rect">
             <a:avLst/>
@@ -7004,6 +6812,15 @@
               </a:rPr>
               <a:t>Demo:</a:t>
             </a:r>
+            <a:r>
+              <a:rPr sz="2000" b="0" i="0">
+                <a:solidFill>
+                  <a:srgbClr val="333333"/>
+                </a:solidFill>
+                <a:latin typeface="Calibri"/>
+              </a:rPr>
+              <a:t> Se toma el flujo principal ya escrito de CU-04 Agendar cita y lo convierte linea por linea en mensajes de un diagrama de secuencia en Mermaid, mostrando en vivo que cada mensaje necesita una clase dueña que lo pueda responder.</a:t>
+            </a:r>
           </a:p>
           <a:p>
             <a:pPr>
@@ -7025,7 +6842,7 @@
       </p:sp>
       <p:sp>
         <p:nvSpPr>
-          <p:cNvPr id="9" name="TextBox 8"/>
+          <p:cNvPr id="6" name="TextBox 5"/>
           <p:cNvSpPr txBox="1"/>
           <p:nvPr/>
         </p:nvSpPr>
@@ -7438,118 +7255,14 @@
       </p:sp>
       <p:sp>
         <p:nvSpPr>
-          <p:cNvPr id="5" name="Rounded Rectangle 4"/>
-          <p:cNvSpPr/>
-          <p:nvPr/>
-        </p:nvSpPr>
-        <p:spPr>
-          <a:xfrm>
-            <a:off x="5797149" y="1573813"/>
-            <a:ext cx="6010497" cy="4057845"/>
-          </a:xfrm>
-          <a:prstGeom prst="roundRect">
-            <a:avLst>
-              <a:gd name="adj" fmla="val 4000"/>
-            </a:avLst>
-          </a:prstGeom>
-          <a:solidFill>
-            <a:srgbClr val="E8EEF4"/>
-          </a:solidFill>
-          <a:ln>
-            <a:noFill/>
-          </a:ln>
-        </p:spPr>
-        <p:style>
-          <a:lnRef idx="1">
-            <a:schemeClr val="accent1"/>
-          </a:lnRef>
-          <a:fillRef idx="3">
-            <a:schemeClr val="accent1"/>
-          </a:fillRef>
-          <a:effectRef idx="2">
-            <a:schemeClr val="accent1"/>
-          </a:effectRef>
-          <a:fontRef idx="minor">
-            <a:schemeClr val="lt1"/>
-          </a:fontRef>
-        </p:style>
-        <p:txBody>
-          <a:bodyPr rtlCol="0" anchor="ctr"/>
-          <a:lstStyle/>
-          <a:p>
-            <a:pPr algn="ctr"/>
-          </a:p>
-        </p:txBody>
-      </p:sp>
-      <p:pic>
-        <p:nvPicPr>
-          <p:cNvPr id="6" name="Picture 5" descr="notebook-planning-desk-coffee.jpg"/>
-          <p:cNvPicPr>
-            <a:picLocks noChangeAspect="1"/>
-          </p:cNvPicPr>
-          <p:nvPr/>
-        </p:nvPicPr>
-        <p:blipFill>
-          <a:blip r:embed="rId2"/>
-          <a:stretch>
-            <a:fillRect/>
-          </a:stretch>
-        </p:blipFill>
-        <p:spPr>
-          <a:xfrm>
-            <a:off x="5870301" y="1646965"/>
-            <a:ext cx="5864193" cy="3911541"/>
-          </a:xfrm>
-          <a:prstGeom prst="rect">
-            <a:avLst/>
-          </a:prstGeom>
-        </p:spPr>
-      </p:pic>
-      <p:sp>
-        <p:nvSpPr>
-          <p:cNvPr id="7" name="TextBox 6"/>
+          <p:cNvPr id="5" name="TextBox 4"/>
           <p:cNvSpPr txBox="1"/>
           <p:nvPr/>
         </p:nvSpPr>
         <p:spPr>
           <a:xfrm>
-            <a:off x="5870301" y="5961888"/>
-            <a:ext cx="5864193" cy="320040"/>
-          </a:xfrm>
-          <a:prstGeom prst="rect">
-            <a:avLst/>
-          </a:prstGeom>
-          <a:noFill/>
-        </p:spPr>
-        <p:txBody>
-          <a:bodyPr wrap="square">
-            <a:spAutoFit/>
-          </a:bodyPr>
-          <a:lstStyle/>
-          <a:p>
-            <a:pPr algn="ctr"/>
-            <a:r>
-              <a:rPr sz="1100" b="0" i="1">
-                <a:solidFill>
-                  <a:srgbClr val="666666"/>
-                </a:solidFill>
-                <a:latin typeface="Calibri"/>
-              </a:rPr>
-              <a:t>Foto: Cup of  Couple · Pexels</a:t>
-            </a:r>
-          </a:p>
-        </p:txBody>
-      </p:sp>
-      <p:sp>
-        <p:nvSpPr>
-          <p:cNvPr id="8" name="TextBox 7"/>
-          <p:cNvSpPr txBox="1"/>
-          <p:nvPr/>
-        </p:nvSpPr>
-        <p:spPr>
-          <a:xfrm>
-            <a:off x="457200" y="1353312"/>
-            <a:ext cx="5093061" cy="5047488"/>
+            <a:off x="457200" y="1170432"/>
+            <a:ext cx="11277295" cy="5230368"/>
           </a:xfrm>
           <a:prstGeom prst="rect">
             <a:avLst/>
@@ -7674,7 +7387,7 @@
       </p:sp>
       <p:sp>
         <p:nvSpPr>
-          <p:cNvPr id="9" name="TextBox 8"/>
+          <p:cNvPr id="6" name="TextBox 5"/>
           <p:cNvSpPr txBox="1"/>
           <p:nvPr/>
         </p:nvSpPr>

--- a/Seminario de Sistemas/Clases/Clase 12 - Diagramas UML avanzados/Presentacion.pptx
+++ b/Seminario de Sistemas/Clases/Clase 12 - Diagramas UML avanzados/Presentacion.pptx
@@ -1018,6 +1018,94 @@
           <a:p>
             <a:r>
               <a:t>La practica sana es dibujar el camino feliz completo mas uno o dos fragmentos que representen las decisiones criticas del negocio, y dejar el resto documentado en el texto de la especificacion, que para eso existe.</a:t>
+            </a:r>
+          </a:p>
+        </p:txBody>
+      </p:sp>
+      <p:sp>
+        <p:nvSpPr>
+          <p:cNvPr id="4" name="Slide Number Placeholder 3"/>
+          <p:cNvSpPr>
+            <a:spLocks noGrp="1"/>
+          </p:cNvSpPr>
+          <p:nvPr>
+            <p:ph type="sldNum" idx="5" sz="quarter"/>
+          </p:nvPr>
+        </p:nvSpPr>
+        <p:spPr/>
+      </p:sp>
+    </p:spTree>
+  </p:cSld>
+  <p:clrMapOvr>
+    <a:masterClrMapping/>
+  </p:clrMapOvr>
+</p:notes>
+</file>
+
+<file path=ppt/notesSlides/notesSlide6.xml><?xml version="1.0" encoding="utf-8"?>
+<p:notes xmlns:a="http://schemas.openxmlformats.org/drawingml/2006/main" xmlns:p="http://schemas.openxmlformats.org/presentationml/2006/main" xmlns:r="http://schemas.openxmlformats.org/officeDocument/2006/relationships">
+  <p:cSld>
+    <p:spTree>
+      <p:nvGrpSpPr>
+        <p:cNvPr id="1" name=""/>
+        <p:cNvGrpSpPr/>
+        <p:nvPr/>
+      </p:nvGrpSpPr>
+      <p:grpSpPr>
+        <a:xfrm>
+          <a:off x="0" y="0"/>
+          <a:ext cx="0" cy="0"/>
+          <a:chOff x="0" y="0"/>
+          <a:chExt cx="0" cy="0"/>
+        </a:xfrm>
+      </p:grpSpPr>
+      <p:sp>
+        <p:nvSpPr>
+          <p:cNvPr id="2" name="Slide Image Placeholder 1"/>
+          <p:cNvSpPr>
+            <a:spLocks noGrp="1"/>
+          </p:cNvSpPr>
+          <p:nvPr>
+            <p:ph type="sldImg" idx="2"/>
+          </p:nvPr>
+        </p:nvSpPr>
+        <p:spPr/>
+      </p:sp>
+      <p:sp>
+        <p:nvSpPr>
+          <p:cNvPr id="3" name="Notes Placeholder 2"/>
+          <p:cNvSpPr>
+            <a:spLocks noGrp="1"/>
+          </p:cNvSpPr>
+          <p:nvPr>
+            <p:ph type="body" idx="3" sz="quarter"/>
+          </p:nvPr>
+        </p:nvSpPr>
+        <p:spPr/>
+        <p:txBody>
+          <a:bodyPr/>
+          <a:lstStyle/>
+          <a:p>
+            <a:r>
+              <a:t>TEXTO COMPLETO DE LA LÁMINA (se proyecta resumido):</a:t>
+            </a:r>
+          </a:p>
+          <a:p/>
+          <a:p>
+            <a:r>
+              <a:t>Herramienta: draw.io · Mermaid Live Editor</a:t>
+            </a:r>
+          </a:p>
+          <a:p/>
+          <a:p>
+            <a:r>
+              <a:t>Demo: Se toma el flujo principal ya escrito de CU-04 Agendar cita y lo convierte linea por linea en mensajes de un diagrama de secuencia en Mermaid, mostrando en vivo que cada mensaje necesita una clase dueña que lo pueda responder.</a:t>
+            </a:r>
+          </a:p>
+          <a:p/>
+          <a:p>
+            <a:r>
+              <a:t>Mismo dominio: la clinica veterinaria — no otro ejemplo. Aqui se diseña, no se programa.</a:t>
             </a:r>
           </a:p>
         </p:txBody>
@@ -6735,14 +6823,83 @@
       </p:sp>
       <p:sp>
         <p:nvSpPr>
-          <p:cNvPr id="5" name="TextBox 4"/>
+          <p:cNvPr id="5" name="Rounded Rectangle 4"/>
+          <p:cNvSpPr/>
+          <p:nvPr/>
+        </p:nvSpPr>
+        <p:spPr>
+          <a:xfrm>
+            <a:off x="5797149" y="1343926"/>
+            <a:ext cx="6010497" cy="4837658"/>
+          </a:xfrm>
+          <a:prstGeom prst="roundRect">
+            <a:avLst>
+              <a:gd name="adj" fmla="val 4000"/>
+            </a:avLst>
+          </a:prstGeom>
+          <a:solidFill>
+            <a:srgbClr val="E8EEF4"/>
+          </a:solidFill>
+          <a:ln>
+            <a:noFill/>
+          </a:ln>
+        </p:spPr>
+        <p:style>
+          <a:lnRef idx="1">
+            <a:schemeClr val="accent1"/>
+          </a:lnRef>
+          <a:fillRef idx="3">
+            <a:schemeClr val="accent1"/>
+          </a:fillRef>
+          <a:effectRef idx="2">
+            <a:schemeClr val="accent1"/>
+          </a:effectRef>
+          <a:fontRef idx="minor">
+            <a:schemeClr val="lt1"/>
+          </a:fontRef>
+        </p:style>
+        <p:txBody>
+          <a:bodyPr rtlCol="0" anchor="ctr"/>
+          <a:lstStyle/>
+          <a:p>
+            <a:pPr algn="ctr"/>
+          </a:p>
+        </p:txBody>
+      </p:sp>
+      <p:pic>
+        <p:nvPicPr>
+          <p:cNvPr id="6" name="Picture 5" descr="ilus-demo-paso1.png"/>
+          <p:cNvPicPr>
+            <a:picLocks noChangeAspect="1"/>
+          </p:cNvPicPr>
+          <p:nvPr/>
+        </p:nvPicPr>
+        <p:blipFill>
+          <a:blip r:embed="rId2"/>
+          <a:stretch>
+            <a:fillRect/>
+          </a:stretch>
+        </p:blipFill>
+        <p:spPr>
+          <a:xfrm>
+            <a:off x="5870301" y="1417078"/>
+            <a:ext cx="5864193" cy="4691354"/>
+          </a:xfrm>
+          <a:prstGeom prst="rect">
+            <a:avLst/>
+          </a:prstGeom>
+        </p:spPr>
+      </p:pic>
+      <p:sp>
+        <p:nvSpPr>
+          <p:cNvPr id="7" name="TextBox 6"/>
           <p:cNvSpPr txBox="1"/>
           <p:nvPr/>
         </p:nvSpPr>
         <p:spPr>
           <a:xfrm>
-            <a:off x="457200" y="1170432"/>
-            <a:ext cx="11277295" cy="5230368"/>
+            <a:off x="457200" y="1353312"/>
+            <a:ext cx="5093061" cy="5047488"/>
           </a:xfrm>
           <a:prstGeom prst="rect">
             <a:avLst/>
@@ -6819,7 +6976,7 @@
                 </a:solidFill>
                 <a:latin typeface="Calibri"/>
               </a:rPr>
-              <a:t> Se toma el flujo principal ya escrito de CU-04 Agendar cita y lo convierte linea por linea en mensajes de un diagrama de secuencia en Mermaid, mostrando en vivo que cada mensaje necesita una clase dueña que lo pueda responder.</a:t>
+              <a:t> Se toma el flujo principal ya escrito de CU-04 Agendar cita y lo convierte linea por linea en mensajes de un diagrama de secuencia en…</a:t>
             </a:r>
           </a:p>
           <a:p>
@@ -6842,7 +6999,7 @@
       </p:sp>
       <p:sp>
         <p:nvSpPr>
-          <p:cNvPr id="6" name="TextBox 5"/>
+          <p:cNvPr id="8" name="TextBox 7"/>
           <p:cNvSpPr txBox="1"/>
           <p:nvPr/>
         </p:nvSpPr>

--- a/Seminario de Sistemas/Clases/Clase 12 - Diagramas UML avanzados/Presentacion.pptx
+++ b/Seminario de Sistemas/Clases/Clase 12 - Diagramas UML avanzados/Presentacion.pptx
@@ -5199,7 +5199,7 @@
         <p:spPr>
           <a:xfrm>
             <a:off x="457200" y="1261872"/>
-            <a:ext cx="11277295" cy="4182625"/>
+            <a:ext cx="11277295" cy="3593514"/>
           </a:xfrm>
           <a:prstGeom prst="roundRect">
             <a:avLst>
@@ -5448,8 +5448,8 @@
         </p:nvSpPr>
         <p:spPr>
           <a:xfrm>
-            <a:off x="1188720" y="1719072"/>
-            <a:ext cx="10271455" cy="3588265"/>
+            <a:off x="685800" y="1719072"/>
+            <a:ext cx="502920" cy="2999154"/>
           </a:xfrm>
           <a:prstGeom prst="rect">
             <a:avLst/>
@@ -5462,13 +5462,180 @@
           </a:bodyPr>
           <a:lstStyle/>
           <a:p>
+            <a:pPr algn="r">
+              <a:spcAft>
+                <a:spcPts val="385"/>
+              </a:spcAft>
+            </a:pPr>
+            <a:r>
+              <a:rPr sz="1800" i="0" b="0">
+                <a:solidFill>
+                  <a:srgbClr val="858585"/>
+                </a:solidFill>
+                <a:latin typeface="Consolas"/>
+              </a:rPr>
+              <a:t>1</a:t>
+            </a:r>
+          </a:p>
+          <a:p>
+            <a:pPr algn="r">
+              <a:spcAft>
+                <a:spcPts val="385"/>
+              </a:spcAft>
+            </a:pPr>
+            <a:r>
+              <a:rPr sz="1800" i="0" b="0">
+                <a:solidFill>
+                  <a:srgbClr val="858585"/>
+                </a:solidFill>
+                <a:latin typeface="Consolas"/>
+              </a:rPr>
+              <a:t>2</a:t>
+            </a:r>
+          </a:p>
+          <a:p>
+            <a:pPr algn="r">
+              <a:spcAft>
+                <a:spcPts val="385"/>
+              </a:spcAft>
+            </a:pPr>
+            <a:r>
+              <a:rPr sz="1800" i="0" b="0">
+                <a:solidFill>
+                  <a:srgbClr val="858585"/>
+                </a:solidFill>
+                <a:latin typeface="Consolas"/>
+              </a:rPr>
+              <a:t>3</a:t>
+            </a:r>
+          </a:p>
+          <a:p>
+            <a:pPr algn="r">
+              <a:spcAft>
+                <a:spcPts val="385"/>
+              </a:spcAft>
+            </a:pPr>
+            <a:r>
+              <a:rPr sz="1800" i="0" b="0">
+                <a:solidFill>
+                  <a:srgbClr val="858585"/>
+                </a:solidFill>
+                <a:latin typeface="Consolas"/>
+              </a:rPr>
+              <a:t>4</a:t>
+            </a:r>
+          </a:p>
+          <a:p>
+            <a:pPr algn="r">
+              <a:spcAft>
+                <a:spcPts val="385"/>
+              </a:spcAft>
+            </a:pPr>
+            <a:r>
+              <a:rPr sz="1800" i="0" b="0">
+                <a:solidFill>
+                  <a:srgbClr val="858585"/>
+                </a:solidFill>
+                <a:latin typeface="Consolas"/>
+              </a:rPr>
+              <a:t>5</a:t>
+            </a:r>
+          </a:p>
+          <a:p>
+            <a:pPr algn="r">
+              <a:spcAft>
+                <a:spcPts val="385"/>
+              </a:spcAft>
+            </a:pPr>
+            <a:r>
+              <a:rPr sz="1800" i="0" b="0">
+                <a:solidFill>
+                  <a:srgbClr val="858585"/>
+                </a:solidFill>
+                <a:latin typeface="Consolas"/>
+              </a:rPr>
+              <a:t>6</a:t>
+            </a:r>
+          </a:p>
+          <a:p>
+            <a:pPr algn="r">
+              <a:spcAft>
+                <a:spcPts val="385"/>
+              </a:spcAft>
+            </a:pPr>
+            <a:r>
+              <a:rPr sz="1800" i="0" b="0">
+                <a:solidFill>
+                  <a:srgbClr val="858585"/>
+                </a:solidFill>
+                <a:latin typeface="Consolas"/>
+              </a:rPr>
+              <a:t>7</a:t>
+            </a:r>
+          </a:p>
+          <a:p>
+            <a:pPr algn="r">
+              <a:spcAft>
+                <a:spcPts val="385"/>
+              </a:spcAft>
+            </a:pPr>
+            <a:r>
+              <a:rPr sz="1800" i="0" b="0">
+                <a:solidFill>
+                  <a:srgbClr val="858585"/>
+                </a:solidFill>
+                <a:latin typeface="Consolas"/>
+              </a:rPr>
+              <a:t>8</a:t>
+            </a:r>
+          </a:p>
+          <a:p>
+            <a:pPr algn="r">
+              <a:spcAft>
+                <a:spcPts val="385"/>
+              </a:spcAft>
+            </a:pPr>
+            <a:r>
+              <a:rPr sz="1800" i="0" b="0">
+                <a:solidFill>
+                  <a:srgbClr val="858585"/>
+                </a:solidFill>
+                <a:latin typeface="Consolas"/>
+              </a:rPr>
+              <a:t>9</a:t>
+            </a:r>
+          </a:p>
+        </p:txBody>
+      </p:sp>
+      <p:sp>
+        <p:nvSpPr>
+          <p:cNvPr id="12" name="TextBox 11"/>
+          <p:cNvSpPr txBox="1"/>
+          <p:nvPr/>
+        </p:nvSpPr>
+        <p:spPr>
+          <a:xfrm>
+            <a:off x="1188720" y="1719072"/>
+            <a:ext cx="10271455" cy="2999154"/>
+          </a:xfrm>
+          <a:prstGeom prst="rect">
+            <a:avLst/>
+          </a:prstGeom>
+          <a:noFill/>
+        </p:spPr>
+        <p:txBody>
+          <a:bodyPr wrap="square">
+            <a:spAutoFit/>
+          </a:bodyPr>
+          <a:lstStyle/>
+          <a:p>
             <a:pPr>
               <a:spcAft>
-                <a:spcPts val="428"/>
+                <a:spcPts val="385"/>
               </a:spcAft>
             </a:pPr>
             <a:r>
-              <a:rPr sz="2000" i="0" b="0">
+              <a:rPr sz="1800" i="0" b="0">
                 <a:solidFill>
                   <a:srgbClr val="D4D4D4"/>
                 </a:solidFill>
@@ -5477,7 +5644,7 @@
               <a:t>| </a:t>
             </a:r>
             <a:r>
-              <a:rPr sz="2000" i="0" b="0">
+              <a:rPr sz="1800" i="0" b="0">
                 <a:solidFill>
                   <a:srgbClr val="D4D4D4"/>
                 </a:solidFill>
@@ -5486,7 +5653,7 @@
               <a:t>Mensaje</a:t>
             </a:r>
             <a:r>
-              <a:rPr sz="2000" i="0" b="0">
+              <a:rPr sz="1800" i="0" b="0">
                 <a:solidFill>
                   <a:srgbClr val="D4D4D4"/>
                 </a:solidFill>
@@ -5495,7 +5662,7 @@
               <a:t>            | </a:t>
             </a:r>
             <a:r>
-              <a:rPr sz="2000" i="0" b="0">
+              <a:rPr sz="1800" i="0" b="0">
                 <a:solidFill>
                   <a:srgbClr val="D4D4D4"/>
                 </a:solidFill>
@@ -5504,7 +5671,7 @@
               <a:t>Clase</a:t>
             </a:r>
             <a:r>
-              <a:rPr sz="2000" i="0" b="0">
+              <a:rPr sz="1800" i="0" b="0">
                 <a:solidFill>
                   <a:srgbClr val="D4D4D4"/>
                 </a:solidFill>
@@ -5513,7 +5680,7 @@
               <a:t> </a:t>
             </a:r>
             <a:r>
-              <a:rPr sz="2000" i="0" b="0">
+              <a:rPr sz="1800" i="0" b="0">
                 <a:solidFill>
                   <a:srgbClr val="D4D4D4"/>
                 </a:solidFill>
@@ -5522,7 +5689,7 @@
               <a:t>receptora</a:t>
             </a:r>
             <a:r>
-              <a:rPr sz="2000" i="0" b="0">
+              <a:rPr sz="1800" i="0" b="0">
                 <a:solidFill>
                   <a:srgbClr val="D4D4D4"/>
                 </a:solidFill>
@@ -5531,7 +5698,7 @@
               <a:t>    | </a:t>
             </a:r>
             <a:r>
-              <a:rPr sz="2000" i="0" b="0">
+              <a:rPr sz="1800" i="0" b="0">
                 <a:solidFill>
                   <a:srgbClr val="D4D4D4"/>
                 </a:solidFill>
@@ -5540,7 +5707,7 @@
               <a:t>Operacion</a:t>
             </a:r>
             <a:r>
-              <a:rPr sz="2000" i="0" b="0">
+              <a:rPr sz="1800" i="0" b="0">
                 <a:solidFill>
                   <a:srgbClr val="D4D4D4"/>
                 </a:solidFill>
@@ -5552,11 +5719,11 @@
           <a:p>
             <a:pPr>
               <a:spcAft>
-                <a:spcPts val="428"/>
+                <a:spcPts val="385"/>
               </a:spcAft>
             </a:pPr>
             <a:r>
-              <a:rPr sz="2000" i="0" b="0">
+              <a:rPr sz="1800" i="0" b="0">
                 <a:solidFill>
                   <a:srgbClr val="D4D4D4"/>
                 </a:solidFill>
@@ -5565,7 +5732,7 @@
               <a:t>|------------------</a:t>
             </a:r>
             <a:r>
-              <a:rPr sz="2000" i="0" b="0">
+              <a:rPr sz="1800" i="0" b="0">
                 <a:solidFill>
                   <a:srgbClr val="D4D4D4"/>
                 </a:solidFill>
@@ -5577,11 +5744,11 @@
           <a:p>
             <a:pPr>
               <a:spcAft>
-                <a:spcPts val="428"/>
+                <a:spcPts val="385"/>
               </a:spcAft>
             </a:pPr>
             <a:r>
-              <a:rPr sz="2000" i="0" b="0">
+              <a:rPr sz="1800" i="0" b="0">
                 <a:solidFill>
                   <a:srgbClr val="D4D4D4"/>
                 </a:solidFill>
@@ -5590,7 +5757,7 @@
               <a:t>| </a:t>
             </a:r>
             <a:r>
-              <a:rPr sz="2000" i="0" b="0">
+              <a:rPr sz="1800" i="0" b="0">
                 <a:solidFill>
                   <a:srgbClr val="DCDCAA"/>
                 </a:solidFill>
@@ -5599,7 +5766,7 @@
               <a:t>agendar</a:t>
             </a:r>
             <a:r>
-              <a:rPr sz="2000" i="0" b="0">
+              <a:rPr sz="1800" i="0" b="0">
                 <a:solidFill>
                   <a:srgbClr val="D4D4D4"/>
                 </a:solidFill>
@@ -5608,7 +5775,7 @@
               <a:t>(</a:t>
             </a:r>
             <a:r>
-              <a:rPr sz="2000" i="0" b="0">
+              <a:rPr sz="1800" i="0" b="0">
                 <a:solidFill>
                   <a:srgbClr val="D4D4D4"/>
                 </a:solidFill>
@@ -5617,7 +5784,7 @@
               <a:t>m</a:t>
             </a:r>
             <a:r>
-              <a:rPr sz="2000" i="0" b="0">
+              <a:rPr sz="1800" i="0" b="0">
                 <a:solidFill>
                   <a:srgbClr val="D4D4D4"/>
                 </a:solidFill>
@@ -5626,7 +5793,7 @@
               <a:t>, </a:t>
             </a:r>
             <a:r>
-              <a:rPr sz="2000" i="0" b="0">
+              <a:rPr sz="1800" i="0" b="0">
                 <a:solidFill>
                   <a:srgbClr val="D4D4D4"/>
                 </a:solidFill>
@@ -5635,7 +5802,7 @@
               <a:t>f</a:t>
             </a:r>
             <a:r>
-              <a:rPr sz="2000" i="0" b="0">
+              <a:rPr sz="1800" i="0" b="0">
                 <a:solidFill>
                   <a:srgbClr val="D4D4D4"/>
                 </a:solidFill>
@@ -5644,7 +5811,7 @@
               <a:t>)      | </a:t>
             </a:r>
             <a:r>
-              <a:rPr sz="2000" i="0" b="0">
+              <a:rPr sz="1800" i="0" b="0">
                 <a:solidFill>
                   <a:srgbClr val="D4D4D4"/>
                 </a:solidFill>
@@ -5653,7 +5820,7 @@
               <a:t>ServicioCita</a:t>
             </a:r>
             <a:r>
-              <a:rPr sz="2000" i="0" b="0">
+              <a:rPr sz="1800" i="0" b="0">
                 <a:solidFill>
                   <a:srgbClr val="D4D4D4"/>
                 </a:solidFill>
@@ -5662,7 +5829,7 @@
               <a:t>       | +</a:t>
             </a:r>
             <a:r>
-              <a:rPr sz="2000" i="0" b="0">
+              <a:rPr sz="1800" i="0" b="0">
                 <a:solidFill>
                   <a:srgbClr val="DCDCAA"/>
                 </a:solidFill>
@@ -5671,7 +5838,7 @@
               <a:t>agendar</a:t>
             </a:r>
             <a:r>
-              <a:rPr sz="2000" i="0" b="0">
+              <a:rPr sz="1800" i="0" b="0">
                 <a:solidFill>
                   <a:srgbClr val="D4D4D4"/>
                 </a:solidFill>
@@ -5680,7 +5847,7 @@
               <a:t>(</a:t>
             </a:r>
             <a:r>
-              <a:rPr sz="2000" i="0" b="0">
+              <a:rPr sz="1800" i="0" b="0">
                 <a:solidFill>
                   <a:srgbClr val="D4D4D4"/>
                 </a:solidFill>
@@ -5689,7 +5856,7 @@
               <a:t>int</a:t>
             </a:r>
             <a:r>
-              <a:rPr sz="2000" i="0" b="0">
+              <a:rPr sz="1800" i="0" b="0">
                 <a:solidFill>
                   <a:srgbClr val="D4D4D4"/>
                 </a:solidFill>
@@ -5698,7 +5865,7 @@
               <a:t>, </a:t>
             </a:r>
             <a:r>
-              <a:rPr sz="2000" i="0" b="0">
+              <a:rPr sz="1800" i="0" b="0">
                 <a:solidFill>
                   <a:srgbClr val="D4D4D4"/>
                 </a:solidFill>
@@ -5707,7 +5874,7 @@
               <a:t>Date</a:t>
             </a:r>
             <a:r>
-              <a:rPr sz="2000" i="0" b="0">
+              <a:rPr sz="1800" i="0" b="0">
                 <a:solidFill>
                   <a:srgbClr val="D4D4D4"/>
                 </a:solidFill>
@@ -5719,11 +5886,11 @@
           <a:p>
             <a:pPr>
               <a:spcAft>
-                <a:spcPts val="428"/>
+                <a:spcPts val="385"/>
               </a:spcAft>
             </a:pPr>
             <a:r>
-              <a:rPr sz="2000" i="0" b="0">
+              <a:rPr sz="1800" i="0" b="0">
                 <a:solidFill>
                   <a:srgbClr val="D4D4D4"/>
                 </a:solidFill>
@@ -5732,7 +5899,7 @@
               <a:t>| </a:t>
             </a:r>
             <a:r>
-              <a:rPr sz="2000" i="0" b="0">
+              <a:rPr sz="1800" i="0" b="0">
                 <a:solidFill>
                   <a:srgbClr val="DCDCAA"/>
                 </a:solidFill>
@@ -5741,7 +5908,7 @@
               <a:t>estaActiva</a:t>
             </a:r>
             <a:r>
-              <a:rPr sz="2000" i="0" b="0">
+              <a:rPr sz="1800" i="0" b="0">
                 <a:solidFill>
                   <a:srgbClr val="D4D4D4"/>
                 </a:solidFill>
@@ -5750,7 +5917,7 @@
               <a:t>(</a:t>
             </a:r>
             <a:r>
-              <a:rPr sz="2000" i="0" b="0">
+              <a:rPr sz="1800" i="0" b="0">
                 <a:solidFill>
                   <a:srgbClr val="D4D4D4"/>
                 </a:solidFill>
@@ -5759,7 +5926,7 @@
               <a:t>m</a:t>
             </a:r>
             <a:r>
-              <a:rPr sz="2000" i="0" b="0">
+              <a:rPr sz="1800" i="0" b="0">
                 <a:solidFill>
                   <a:srgbClr val="D4D4D4"/>
                 </a:solidFill>
@@ -5768,7 +5935,7 @@
               <a:t>)      | </a:t>
             </a:r>
             <a:r>
-              <a:rPr sz="2000" i="0" b="0">
+              <a:rPr sz="1800" i="0" b="0">
                 <a:solidFill>
                   <a:srgbClr val="D4D4D4"/>
                 </a:solidFill>
@@ -5777,7 +5944,7 @@
               <a:t>RepositorioMascota</a:t>
             </a:r>
             <a:r>
-              <a:rPr sz="2000" i="0" b="0">
+              <a:rPr sz="1800" i="0" b="0">
                 <a:solidFill>
                   <a:srgbClr val="D4D4D4"/>
                 </a:solidFill>
@@ -5786,7 +5953,7 @@
               <a:t> | +</a:t>
             </a:r>
             <a:r>
-              <a:rPr sz="2000" i="0" b="0">
+              <a:rPr sz="1800" i="0" b="0">
                 <a:solidFill>
                   <a:srgbClr val="DCDCAA"/>
                 </a:solidFill>
@@ -5795,7 +5962,7 @@
               <a:t>estaActiva</a:t>
             </a:r>
             <a:r>
-              <a:rPr sz="2000" i="0" b="0">
+              <a:rPr sz="1800" i="0" b="0">
                 <a:solidFill>
                   <a:srgbClr val="D4D4D4"/>
                 </a:solidFill>
@@ -5804,7 +5971,7 @@
               <a:t>(</a:t>
             </a:r>
             <a:r>
-              <a:rPr sz="2000" i="0" b="0">
+              <a:rPr sz="1800" i="0" b="0">
                 <a:solidFill>
                   <a:srgbClr val="D4D4D4"/>
                 </a:solidFill>
@@ -5813,7 +5980,7 @@
               <a:t>int</a:t>
             </a:r>
             <a:r>
-              <a:rPr sz="2000" i="0" b="0">
+              <a:rPr sz="1800" i="0" b="0">
                 <a:solidFill>
                   <a:srgbClr val="D4D4D4"/>
                 </a:solidFill>
@@ -5825,11 +5992,11 @@
           <a:p>
             <a:pPr>
               <a:spcAft>
-                <a:spcPts val="428"/>
+                <a:spcPts val="385"/>
               </a:spcAft>
             </a:pPr>
             <a:r>
-              <a:rPr sz="2000" i="0" b="0">
+              <a:rPr sz="1800" i="0" b="0">
                 <a:solidFill>
                   <a:srgbClr val="D4D4D4"/>
                 </a:solidFill>
@@ -5838,7 +6005,7 @@
               <a:t>| </a:t>
             </a:r>
             <a:r>
-              <a:rPr sz="2000" i="0" b="0">
+              <a:rPr sz="1800" i="0" b="0">
                 <a:solidFill>
                   <a:srgbClr val="DCDCAA"/>
                 </a:solidFill>
@@ -5847,7 +6014,7 @@
               <a:t>existeEnFranja</a:t>
             </a:r>
             <a:r>
-              <a:rPr sz="2000" i="0" b="0">
+              <a:rPr sz="1800" i="0" b="0">
                 <a:solidFill>
                   <a:srgbClr val="D4D4D4"/>
                 </a:solidFill>
@@ -5856,7 +6023,7 @@
               <a:t>(</a:t>
             </a:r>
             <a:r>
-              <a:rPr sz="2000" i="0" b="0">
+              <a:rPr sz="1800" i="0" b="0">
                 <a:solidFill>
                   <a:srgbClr val="D4D4D4"/>
                 </a:solidFill>
@@ -5865,7 +6032,7 @@
               <a:t>v</a:t>
             </a:r>
             <a:r>
-              <a:rPr sz="2000" i="0" b="0">
+              <a:rPr sz="1800" i="0" b="0">
                 <a:solidFill>
                   <a:srgbClr val="D4D4D4"/>
                 </a:solidFill>
@@ -5874,7 +6041,7 @@
               <a:t>,</a:t>
             </a:r>
             <a:r>
-              <a:rPr sz="2000" i="0" b="0">
+              <a:rPr sz="1800" i="0" b="0">
                 <a:solidFill>
                   <a:srgbClr val="D4D4D4"/>
                 </a:solidFill>
@@ -5883,7 +6050,7 @@
               <a:t>f</a:t>
             </a:r>
             <a:r>
-              <a:rPr sz="2000" i="0" b="0">
+              <a:rPr sz="1800" i="0" b="0">
                 <a:solidFill>
                   <a:srgbClr val="D4D4D4"/>
                 </a:solidFill>
@@ -5892,7 +6059,7 @@
               <a:t>)| </a:t>
             </a:r>
             <a:r>
-              <a:rPr sz="2000" i="0" b="0">
+              <a:rPr sz="1800" i="0" b="0">
                 <a:solidFill>
                   <a:srgbClr val="D4D4D4"/>
                 </a:solidFill>
@@ -5901,7 +6068,7 @@
               <a:t>RepositorioCita</a:t>
             </a:r>
             <a:r>
-              <a:rPr sz="2000" i="0" b="0">
+              <a:rPr sz="1800" i="0" b="0">
                 <a:solidFill>
                   <a:srgbClr val="D4D4D4"/>
                 </a:solidFill>
@@ -5910,7 +6077,7 @@
               <a:t>    | +</a:t>
             </a:r>
             <a:r>
-              <a:rPr sz="2000" i="0" b="0">
+              <a:rPr sz="1800" i="0" b="0">
                 <a:solidFill>
                   <a:srgbClr val="DCDCAA"/>
                 </a:solidFill>
@@ -5919,7 +6086,7 @@
               <a:t>existeEnFranja</a:t>
             </a:r>
             <a:r>
-              <a:rPr sz="2000" i="0" b="0">
+              <a:rPr sz="1800" i="0" b="0">
                 <a:solidFill>
                   <a:srgbClr val="D4D4D4"/>
                 </a:solidFill>
@@ -5931,11 +6098,11 @@
           <a:p>
             <a:pPr>
               <a:spcAft>
-                <a:spcPts val="428"/>
+                <a:spcPts val="385"/>
               </a:spcAft>
             </a:pPr>
             <a:r>
-              <a:rPr sz="2000" i="0" b="0">
+              <a:rPr sz="1800" i="0" b="0">
                 <a:solidFill>
                   <a:srgbClr val="D4D4D4"/>
                 </a:solidFill>
@@ -5944,7 +6111,7 @@
               <a:t>| </a:t>
             </a:r>
             <a:r>
-              <a:rPr sz="2000" i="0" b="0">
+              <a:rPr sz="1800" i="0" b="0">
                 <a:solidFill>
                   <a:srgbClr val="DCDCAA"/>
                 </a:solidFill>
@@ -5953,7 +6120,7 @@
               <a:t>guardar</a:t>
             </a:r>
             <a:r>
-              <a:rPr sz="2000" i="0" b="0">
+              <a:rPr sz="1800" i="0" b="0">
                 <a:solidFill>
                   <a:srgbClr val="D4D4D4"/>
                 </a:solidFill>
@@ -5962,7 +6129,7 @@
               <a:t>(</a:t>
             </a:r>
             <a:r>
-              <a:rPr sz="2000" i="0" b="0">
+              <a:rPr sz="1800" i="0" b="0">
                 <a:solidFill>
                   <a:srgbClr val="D4D4D4"/>
                 </a:solidFill>
@@ -5971,7 +6138,7 @@
               <a:t>cita</a:t>
             </a:r>
             <a:r>
-              <a:rPr sz="2000" i="0" b="0">
+              <a:rPr sz="1800" i="0" b="0">
                 <a:solidFill>
                   <a:srgbClr val="D4D4D4"/>
                 </a:solidFill>
@@ -5980,7 +6147,7 @@
               <a:t>)      | </a:t>
             </a:r>
             <a:r>
-              <a:rPr sz="2000" i="0" b="0">
+              <a:rPr sz="1800" i="0" b="0">
                 <a:solidFill>
                   <a:srgbClr val="D4D4D4"/>
                 </a:solidFill>
@@ -5989,7 +6156,7 @@
               <a:t>RepositorioCita</a:t>
             </a:r>
             <a:r>
-              <a:rPr sz="2000" i="0" b="0">
+              <a:rPr sz="1800" i="0" b="0">
                 <a:solidFill>
                   <a:srgbClr val="D4D4D4"/>
                 </a:solidFill>
@@ -5998,7 +6165,7 @@
               <a:t>    | +</a:t>
             </a:r>
             <a:r>
-              <a:rPr sz="2000" i="0" b="0">
+              <a:rPr sz="1800" i="0" b="0">
                 <a:solidFill>
                   <a:srgbClr val="DCDCAA"/>
                 </a:solidFill>
@@ -6007,7 +6174,7 @@
               <a:t>guardar</a:t>
             </a:r>
             <a:r>
-              <a:rPr sz="2000" i="0" b="0">
+              <a:rPr sz="1800" i="0" b="0">
                 <a:solidFill>
                   <a:srgbClr val="D4D4D4"/>
                 </a:solidFill>
@@ -6016,7 +6183,7 @@
               <a:t>(</a:t>
             </a:r>
             <a:r>
-              <a:rPr sz="2000" i="0" b="0">
+              <a:rPr sz="1800" i="0" b="0">
                 <a:solidFill>
                   <a:srgbClr val="D4D4D4"/>
                 </a:solidFill>
@@ -6025,7 +6192,7 @@
               <a:t>Cita</a:t>
             </a:r>
             <a:r>
-              <a:rPr sz="2000" i="0" b="0">
+              <a:rPr sz="1800" i="0" b="0">
                 <a:solidFill>
                   <a:srgbClr val="D4D4D4"/>
                 </a:solidFill>
@@ -6037,11 +6204,11 @@
           <a:p>
             <a:pPr>
               <a:spcAft>
-                <a:spcPts val="428"/>
+                <a:spcPts val="385"/>
               </a:spcAft>
             </a:pPr>
             <a:r>
-              <a:rPr sz="2000" i="0" b="0">
+              <a:rPr sz="1800" i="0" b="0">
                 <a:solidFill>
                   <a:srgbClr val="D4D4D4"/>
                 </a:solidFill>
@@ -6053,11 +6220,11 @@
           <a:p>
             <a:pPr>
               <a:spcAft>
-                <a:spcPts val="428"/>
+                <a:spcPts val="385"/>
               </a:spcAft>
             </a:pPr>
             <a:r>
-              <a:rPr sz="2000" i="0" b="0">
+              <a:rPr sz="1800" i="0" b="0">
                 <a:solidFill>
                   <a:srgbClr val="D4D4D4"/>
                 </a:solidFill>
@@ -6069,11 +6236,11 @@
           <a:p>
             <a:pPr>
               <a:spcAft>
-                <a:spcPts val="428"/>
+                <a:spcPts val="385"/>
               </a:spcAft>
             </a:pPr>
             <a:r>
-              <a:rPr sz="2000" i="0" b="0">
+              <a:rPr sz="1800" i="0" b="0">
                 <a:solidFill>
                   <a:srgbClr val="D4D4D4"/>
                 </a:solidFill>
@@ -6086,7 +6253,7 @@
       </p:sp>
       <p:sp>
         <p:nvSpPr>
-          <p:cNvPr id="12" name="TextBox 11"/>
+          <p:cNvPr id="13" name="TextBox 12"/>
           <p:cNvSpPr txBox="1"/>
           <p:nvPr/>
         </p:nvSpPr>
@@ -9140,7 +9307,7 @@
         <p:spPr>
           <a:xfrm>
             <a:off x="457200" y="1261872"/>
-            <a:ext cx="11277295" cy="5052625"/>
+            <a:ext cx="6991923" cy="5052625"/>
           </a:xfrm>
           <a:prstGeom prst="roundRect">
             <a:avLst>
@@ -9185,7 +9352,7 @@
         <p:spPr>
           <a:xfrm>
             <a:off x="457200" y="1261872"/>
-            <a:ext cx="11277295" cy="365760"/>
+            <a:ext cx="6991923" cy="365760"/>
           </a:xfrm>
           <a:prstGeom prst="rect">
             <a:avLst/>
@@ -9357,7 +9524,7 @@
         <p:spPr>
           <a:xfrm>
             <a:off x="1371600" y="1298448"/>
-            <a:ext cx="10180015" cy="292608"/>
+            <a:ext cx="5894643" cy="292608"/>
           </a:xfrm>
           <a:prstGeom prst="rect">
             <a:avLst/>
@@ -9701,7 +9868,7 @@
         <p:spPr>
           <a:xfrm>
             <a:off x="1188720" y="1719072"/>
-            <a:ext cx="10271455" cy="4458265"/>
+            <a:ext cx="5986083" cy="4458265"/>
           </a:xfrm>
           <a:prstGeom prst="rect">
             <a:avLst/>
@@ -10986,7 +11153,111 @@
       </p:sp>
       <p:sp>
         <p:nvSpPr>
-          <p:cNvPr id="13" name="TextBox 12"/>
+          <p:cNvPr id="13" name="Rounded Rectangle 12"/>
+          <p:cNvSpPr/>
+          <p:nvPr/>
+        </p:nvSpPr>
+        <p:spPr>
+          <a:xfrm>
+            <a:off x="7668579" y="1261872"/>
+            <a:ext cx="4120780" cy="3318569"/>
+          </a:xfrm>
+          <a:prstGeom prst="roundRect">
+            <a:avLst>
+              <a:gd name="adj" fmla="val 4000"/>
+            </a:avLst>
+          </a:prstGeom>
+          <a:solidFill>
+            <a:srgbClr val="E8EEF4"/>
+          </a:solidFill>
+          <a:ln>
+            <a:noFill/>
+          </a:ln>
+        </p:spPr>
+        <p:style>
+          <a:lnRef idx="1">
+            <a:schemeClr val="accent1"/>
+          </a:lnRef>
+          <a:fillRef idx="3">
+            <a:schemeClr val="accent1"/>
+          </a:fillRef>
+          <a:effectRef idx="2">
+            <a:schemeClr val="accent1"/>
+          </a:effectRef>
+          <a:fontRef idx="minor">
+            <a:schemeClr val="lt1"/>
+          </a:fontRef>
+        </p:style>
+        <p:txBody>
+          <a:bodyPr rtlCol="0" anchor="ctr"/>
+          <a:lstStyle/>
+          <a:p>
+            <a:pPr algn="ctr"/>
+          </a:p>
+        </p:txBody>
+      </p:sp>
+      <p:pic>
+        <p:nvPicPr>
+          <p:cNvPr id="14" name="Picture 13" descr="dg-secuencia-paso1.png"/>
+          <p:cNvPicPr>
+            <a:picLocks noChangeAspect="1"/>
+          </p:cNvPicPr>
+          <p:nvPr/>
+        </p:nvPicPr>
+        <p:blipFill>
+          <a:blip r:embed="rId2"/>
+          <a:stretch>
+            <a:fillRect/>
+          </a:stretch>
+        </p:blipFill>
+        <p:spPr>
+          <a:xfrm>
+            <a:off x="7723443" y="1316736"/>
+            <a:ext cx="4011052" cy="3208841"/>
+          </a:xfrm>
+          <a:prstGeom prst="rect">
+            <a:avLst/>
+          </a:prstGeom>
+        </p:spPr>
+      </p:pic>
+      <p:sp>
+        <p:nvSpPr>
+          <p:cNvPr id="15" name="TextBox 14"/>
+          <p:cNvSpPr txBox="1"/>
+          <p:nvPr/>
+        </p:nvSpPr>
+        <p:spPr>
+          <a:xfrm>
+            <a:off x="7723443" y="4580441"/>
+            <a:ext cx="4011052" cy="320040"/>
+          </a:xfrm>
+          <a:prstGeom prst="rect">
+            <a:avLst/>
+          </a:prstGeom>
+          <a:noFill/>
+        </p:spPr>
+        <p:txBody>
+          <a:bodyPr wrap="square">
+            <a:spAutoFit/>
+          </a:bodyPr>
+          <a:lstStyle/>
+          <a:p>
+            <a:pPr algn="ctr"/>
+            <a:r>
+              <a:rPr sz="1200" b="0" i="1">
+                <a:solidFill>
+                  <a:srgbClr val="666666"/>
+                </a:solidFill>
+                <a:latin typeface="Calibri"/>
+              </a:rPr>
+              <a:t>Lo que dibuja este código</a:t>
+            </a:r>
+          </a:p>
+        </p:txBody>
+      </p:sp>
+      <p:sp>
+        <p:nvSpPr>
+          <p:cNvPr id="16" name="TextBox 15"/>
           <p:cNvSpPr txBox="1"/>
           <p:nvPr/>
         </p:nvSpPr>
@@ -11174,7 +11445,7 @@
         <p:spPr>
           <a:xfrm>
             <a:off x="457200" y="1261872"/>
-            <a:ext cx="11277295" cy="4703152"/>
+            <a:ext cx="6991923" cy="4703152"/>
           </a:xfrm>
           <a:prstGeom prst="roundRect">
             <a:avLst>
@@ -11219,7 +11490,7 @@
         <p:spPr>
           <a:xfrm>
             <a:off x="457200" y="1261872"/>
-            <a:ext cx="11277295" cy="365760"/>
+            <a:ext cx="6991923" cy="365760"/>
           </a:xfrm>
           <a:prstGeom prst="rect">
             <a:avLst/>
@@ -11391,7 +11662,7 @@
         <p:spPr>
           <a:xfrm>
             <a:off x="1371600" y="1298448"/>
-            <a:ext cx="10180015" cy="292608"/>
+            <a:ext cx="5894643" cy="292608"/>
           </a:xfrm>
           <a:prstGeom prst="rect">
             <a:avLst/>
@@ -11751,7 +12022,7 @@
         <p:spPr>
           <a:xfrm>
             <a:off x="1188720" y="1719072"/>
-            <a:ext cx="10271455" cy="4108792"/>
+            <a:ext cx="5986083" cy="4108792"/>
           </a:xfrm>
           <a:prstGeom prst="rect">
             <a:avLst/>
@@ -11792,7 +12063,7 @@
                 </a:solidFill>
                 <a:latin typeface="Consolas"/>
               </a:rPr>
-              <a:t>    </a:t>
+              <a:t>  </a:t>
             </a:r>
             <a:r>
               <a:rPr sz="1100" i="0" b="0">
@@ -11802,6 +12073,42 @@
                 <a:latin typeface="Consolas"/>
               </a:rPr>
               <a:t>actor</a:t>
+            </a:r>
+            <a:r>
+              <a:rPr sz="1100" i="0" b="0">
+                <a:solidFill>
+                  <a:srgbClr val="D4D4D4"/>
+                </a:solidFill>
+                <a:latin typeface="Consolas"/>
+              </a:rPr>
+              <a:t> </a:t>
+            </a:r>
+            <a:r>
+              <a:rPr sz="1100" i="0" b="0">
+                <a:solidFill>
+                  <a:srgbClr val="D4D4D4"/>
+                </a:solidFill>
+                <a:latin typeface="Consolas"/>
+              </a:rPr>
+              <a:t>R</a:t>
+            </a:r>
+            <a:r>
+              <a:rPr sz="1100" i="0" b="0">
+                <a:solidFill>
+                  <a:srgbClr val="D4D4D4"/>
+                </a:solidFill>
+                <a:latin typeface="Consolas"/>
+              </a:rPr>
+              <a:t> </a:t>
+            </a:r>
+            <a:r>
+              <a:rPr sz="1100" i="0" b="0">
+                <a:solidFill>
+                  <a:srgbClr val="D4D4D4"/>
+                </a:solidFill>
+                <a:latin typeface="Consolas"/>
+              </a:rPr>
+              <a:t>as</a:t>
             </a:r>
             <a:r>
               <a:rPr sz="1100" i="0" b="0">
@@ -11835,7 +12142,7 @@
                 </a:solidFill>
                 <a:latin typeface="Consolas"/>
               </a:rPr>
-              <a:t>    </a:t>
+              <a:t>  </a:t>
             </a:r>
             <a:r>
               <a:rPr sz="1100" i="0" b="0">
@@ -11914,7 +12221,7 @@
                 </a:solidFill>
                 <a:latin typeface="Consolas"/>
               </a:rPr>
-              <a:t>    </a:t>
+              <a:t>  </a:t>
             </a:r>
             <a:r>
               <a:rPr sz="1100" i="0" b="0">
@@ -11993,7 +12300,7 @@
                 </a:solidFill>
                 <a:latin typeface="Consolas"/>
               </a:rPr>
-              <a:t>    </a:t>
+              <a:t>  </a:t>
             </a:r>
             <a:r>
               <a:rPr sz="1100" i="0" b="0">
@@ -12072,7 +12379,7 @@
                 </a:solidFill>
                 <a:latin typeface="Consolas"/>
               </a:rPr>
-              <a:t>    </a:t>
+              <a:t>  </a:t>
             </a:r>
             <a:r>
               <a:rPr sz="1100" i="0" b="0">
@@ -12151,7 +12458,7 @@
                 </a:solidFill>
                 <a:latin typeface="Consolas"/>
               </a:rPr>
-              <a:t>    </a:t>
+              <a:t>  </a:t>
             </a:r>
             <a:r>
               <a:rPr sz="1100" i="0" b="0">
@@ -12160,7 +12467,7 @@
                 </a:solidFill>
                 <a:latin typeface="Consolas"/>
               </a:rPr>
-              <a:t>Recepcionista</a:t>
+              <a:t>R</a:t>
             </a:r>
             <a:r>
               <a:rPr sz="1100" i="0" b="0">
@@ -12257,7 +12564,7 @@
                 </a:solidFill>
                 <a:latin typeface="Consolas"/>
               </a:rPr>
-              <a:t>    </a:t>
+              <a:t>  </a:t>
             </a:r>
             <a:r>
               <a:rPr sz="1100" i="0" b="0">
@@ -12381,7 +12688,7 @@
                 </a:solidFill>
                 <a:latin typeface="Consolas"/>
               </a:rPr>
-              <a:t>    </a:t>
+              <a:t>  </a:t>
             </a:r>
             <a:r>
               <a:rPr sz="1100" i="0" b="0">
@@ -12469,7 +12776,7 @@
                 </a:solidFill>
                 <a:latin typeface="Consolas"/>
               </a:rPr>
-              <a:t>    </a:t>
+              <a:t>  </a:t>
             </a:r>
             <a:r>
               <a:rPr sz="1100" i="0" b="0">
@@ -12530,7 +12837,7 @@
                 </a:solidFill>
                 <a:latin typeface="Consolas"/>
               </a:rPr>
-              <a:t>    </a:t>
+              <a:t>  </a:t>
             </a:r>
             <a:r>
               <a:rPr sz="1100" i="0" b="0">
@@ -12636,7 +12943,7 @@
                 </a:solidFill>
                 <a:latin typeface="Consolas"/>
               </a:rPr>
-              <a:t>    </a:t>
+              <a:t>  </a:t>
             </a:r>
             <a:r>
               <a:rPr sz="1100" i="0" b="0">
@@ -12697,7 +13004,7 @@
                 </a:solidFill>
                 <a:latin typeface="Consolas"/>
               </a:rPr>
-              <a:t>    </a:t>
+              <a:t>  </a:t>
             </a:r>
             <a:r>
               <a:rPr sz="1100" i="0" b="0">
@@ -12776,7 +13083,7 @@
                 </a:solidFill>
                 <a:latin typeface="Consolas"/>
               </a:rPr>
-              <a:t>        </a:t>
+              <a:t>    </a:t>
             </a:r>
             <a:r>
               <a:rPr sz="1100" i="0" b="0">
@@ -12864,7 +13171,7 @@
                 </a:solidFill>
                 <a:latin typeface="Consolas"/>
               </a:rPr>
-              <a:t>        </a:t>
+              <a:t>    </a:t>
             </a:r>
             <a:r>
               <a:rPr sz="1100" i="0" b="0">
@@ -12925,7 +13232,7 @@
                 </a:solidFill>
                 <a:latin typeface="Consolas"/>
               </a:rPr>
-              <a:t>        </a:t>
+              <a:t>    </a:t>
             </a:r>
             <a:r>
               <a:rPr sz="1100" i="0" b="0">
@@ -13013,7 +13320,7 @@
                 </a:solidFill>
                 <a:latin typeface="Consolas"/>
               </a:rPr>
-              <a:t>    </a:t>
+              <a:t>  </a:t>
             </a:r>
             <a:r>
               <a:rPr sz="1100" i="0" b="0">
@@ -13110,7 +13417,7 @@
                 </a:solidFill>
                 <a:latin typeface="Consolas"/>
               </a:rPr>
-              <a:t>        </a:t>
+              <a:t>    </a:t>
             </a:r>
             <a:r>
               <a:rPr sz="1100" i="0" b="0">
@@ -13216,7 +13523,7 @@
                 </a:solidFill>
                 <a:latin typeface="Consolas"/>
               </a:rPr>
-              <a:t>    </a:t>
+              <a:t>  </a:t>
             </a:r>
             <a:r>
               <a:rPr sz="1100" i="0" b="0">
@@ -13232,14 +13539,83 @@
       </p:sp>
       <p:sp>
         <p:nvSpPr>
-          <p:cNvPr id="13" name="TextBox 12"/>
+          <p:cNvPr id="13" name="Rounded Rectangle 12"/>
+          <p:cNvSpPr/>
+          <p:nvPr/>
+        </p:nvSpPr>
+        <p:spPr>
+          <a:xfrm>
+            <a:off x="7668579" y="1261872"/>
+            <a:ext cx="4120780" cy="3318569"/>
+          </a:xfrm>
+          <a:prstGeom prst="roundRect">
+            <a:avLst>
+              <a:gd name="adj" fmla="val 4000"/>
+            </a:avLst>
+          </a:prstGeom>
+          <a:solidFill>
+            <a:srgbClr val="E8EEF4"/>
+          </a:solidFill>
+          <a:ln>
+            <a:noFill/>
+          </a:ln>
+        </p:spPr>
+        <p:style>
+          <a:lnRef idx="1">
+            <a:schemeClr val="accent1"/>
+          </a:lnRef>
+          <a:fillRef idx="3">
+            <a:schemeClr val="accent1"/>
+          </a:fillRef>
+          <a:effectRef idx="2">
+            <a:schemeClr val="accent1"/>
+          </a:effectRef>
+          <a:fontRef idx="minor">
+            <a:schemeClr val="lt1"/>
+          </a:fontRef>
+        </p:style>
+        <p:txBody>
+          <a:bodyPr rtlCol="0" anchor="ctr"/>
+          <a:lstStyle/>
+          <a:p>
+            <a:pPr algn="ctr"/>
+          </a:p>
+        </p:txBody>
+      </p:sp>
+      <p:pic>
+        <p:nvPicPr>
+          <p:cNvPr id="14" name="Picture 13" descr="dg-secuencia-cu04-paso1.png"/>
+          <p:cNvPicPr>
+            <a:picLocks noChangeAspect="1"/>
+          </p:cNvPicPr>
+          <p:nvPr/>
+        </p:nvPicPr>
+        <p:blipFill>
+          <a:blip r:embed="rId2"/>
+          <a:stretch>
+            <a:fillRect/>
+          </a:stretch>
+        </p:blipFill>
+        <p:spPr>
+          <a:xfrm>
+            <a:off x="7723443" y="1316736"/>
+            <a:ext cx="4011052" cy="3208841"/>
+          </a:xfrm>
+          <a:prstGeom prst="rect">
+            <a:avLst/>
+          </a:prstGeom>
+        </p:spPr>
+      </p:pic>
+      <p:sp>
+        <p:nvSpPr>
+          <p:cNvPr id="15" name="TextBox 14"/>
           <p:cNvSpPr txBox="1"/>
           <p:nvPr/>
         </p:nvSpPr>
         <p:spPr>
           <a:xfrm>
-            <a:off x="457200" y="6035040"/>
-            <a:ext cx="11277295" cy="365760"/>
+            <a:off x="7723443" y="4580441"/>
+            <a:ext cx="4011052" cy="320040"/>
           </a:xfrm>
           <a:prstGeom prst="rect">
             <a:avLst/>
@@ -13254,6 +13630,41 @@
           <a:p>
             <a:pPr algn="ctr"/>
             <a:r>
+              <a:rPr sz="1200" b="0" i="1">
+                <a:solidFill>
+                  <a:srgbClr val="666666"/>
+                </a:solidFill>
+                <a:latin typeface="Calibri"/>
+              </a:rPr>
+              <a:t>Lo que dibuja este código</a:t>
+            </a:r>
+          </a:p>
+        </p:txBody>
+      </p:sp>
+      <p:sp>
+        <p:nvSpPr>
+          <p:cNvPr id="16" name="TextBox 15"/>
+          <p:cNvSpPr txBox="1"/>
+          <p:nvPr/>
+        </p:nvSpPr>
+        <p:spPr>
+          <a:xfrm>
+            <a:off x="457200" y="6035040"/>
+            <a:ext cx="11277295" cy="365760"/>
+          </a:xfrm>
+          <a:prstGeom prst="rect">
+            <a:avLst/>
+          </a:prstGeom>
+          <a:noFill/>
+        </p:spPr>
+        <p:txBody>
+          <a:bodyPr wrap="square">
+            <a:spAutoFit/>
+          </a:bodyPr>
+          <a:lstStyle/>
+          <a:p>
+            <a:pPr algn="ctr"/>
+            <a:r>
               <a:rPr sz="1300" b="0" i="1">
                 <a:solidFill>
                   <a:srgbClr val="666666"/>
@@ -13267,7 +13678,7 @@
       </p:sp>
       <p:sp>
         <p:nvSpPr>
-          <p:cNvPr id="14" name="TextBox 13"/>
+          <p:cNvPr id="17" name="TextBox 16"/>
           <p:cNvSpPr txBox="1"/>
           <p:nvPr/>
         </p:nvSpPr>
@@ -14011,7 +14422,7 @@
         <p:spPr>
           <a:xfrm>
             <a:off x="457200" y="1261872"/>
-            <a:ext cx="11277295" cy="4917043"/>
+            <a:ext cx="6991923" cy="2895882"/>
           </a:xfrm>
           <a:prstGeom prst="roundRect">
             <a:avLst>
@@ -14056,7 +14467,7 @@
         <p:spPr>
           <a:xfrm>
             <a:off x="457200" y="1261872"/>
-            <a:ext cx="11277295" cy="365760"/>
+            <a:ext cx="6991923" cy="365760"/>
           </a:xfrm>
           <a:prstGeom prst="rect">
             <a:avLst/>
@@ -14228,7 +14639,7 @@
         <p:spPr>
           <a:xfrm>
             <a:off x="1371600" y="1298448"/>
-            <a:ext cx="10180015" cy="292608"/>
+            <a:ext cx="5894643" cy="292608"/>
           </a:xfrm>
           <a:prstGeom prst="rect">
             <a:avLst/>
@@ -14261,7 +14672,7 @@
         <p:spPr>
           <a:xfrm>
             <a:off x="685800" y="1719072"/>
-            <a:ext cx="502920" cy="4322683"/>
+            <a:ext cx="502920" cy="2301522"/>
           </a:xfrm>
           <a:prstGeom prst="rect">
             <a:avLst/>
@@ -14276,11 +14687,11 @@
           <a:p>
             <a:pPr algn="r">
               <a:spcAft>
-                <a:spcPts val="428"/>
+                <a:spcPts val="278"/>
               </a:spcAft>
             </a:pPr>
             <a:r>
-              <a:rPr sz="2000" i="0" b="0">
+              <a:rPr sz="1300" i="0" b="0">
                 <a:solidFill>
                   <a:srgbClr val="858585"/>
                 </a:solidFill>
@@ -14292,11 +14703,11 @@
           <a:p>
             <a:pPr algn="r">
               <a:spcAft>
-                <a:spcPts val="428"/>
+                <a:spcPts val="278"/>
               </a:spcAft>
             </a:pPr>
             <a:r>
-              <a:rPr sz="2000" i="0" b="0">
+              <a:rPr sz="1300" i="0" b="0">
                 <a:solidFill>
                   <a:srgbClr val="858585"/>
                 </a:solidFill>
@@ -14308,11 +14719,11 @@
           <a:p>
             <a:pPr algn="r">
               <a:spcAft>
-                <a:spcPts val="428"/>
+                <a:spcPts val="278"/>
               </a:spcAft>
             </a:pPr>
             <a:r>
-              <a:rPr sz="2000" i="0" b="0">
+              <a:rPr sz="1300" i="0" b="0">
                 <a:solidFill>
                   <a:srgbClr val="858585"/>
                 </a:solidFill>
@@ -14324,11 +14735,11 @@
           <a:p>
             <a:pPr algn="r">
               <a:spcAft>
-                <a:spcPts val="428"/>
+                <a:spcPts val="278"/>
               </a:spcAft>
             </a:pPr>
             <a:r>
-              <a:rPr sz="2000" i="0" b="0">
+              <a:rPr sz="1300" i="0" b="0">
                 <a:solidFill>
                   <a:srgbClr val="858585"/>
                 </a:solidFill>
@@ -14340,11 +14751,11 @@
           <a:p>
             <a:pPr algn="r">
               <a:spcAft>
-                <a:spcPts val="428"/>
+                <a:spcPts val="278"/>
               </a:spcAft>
             </a:pPr>
             <a:r>
-              <a:rPr sz="2000" i="0" b="0">
+              <a:rPr sz="1300" i="0" b="0">
                 <a:solidFill>
                   <a:srgbClr val="858585"/>
                 </a:solidFill>
@@ -14356,11 +14767,11 @@
           <a:p>
             <a:pPr algn="r">
               <a:spcAft>
-                <a:spcPts val="428"/>
+                <a:spcPts val="278"/>
               </a:spcAft>
             </a:pPr>
             <a:r>
-              <a:rPr sz="2000" i="0" b="0">
+              <a:rPr sz="1300" i="0" b="0">
                 <a:solidFill>
                   <a:srgbClr val="858585"/>
                 </a:solidFill>
@@ -14372,11 +14783,11 @@
           <a:p>
             <a:pPr algn="r">
               <a:spcAft>
-                <a:spcPts val="428"/>
+                <a:spcPts val="278"/>
               </a:spcAft>
             </a:pPr>
             <a:r>
-              <a:rPr sz="2000" i="0" b="0">
+              <a:rPr sz="1300" i="0" b="0">
                 <a:solidFill>
                   <a:srgbClr val="858585"/>
                 </a:solidFill>
@@ -14388,11 +14799,11 @@
           <a:p>
             <a:pPr algn="r">
               <a:spcAft>
-                <a:spcPts val="428"/>
+                <a:spcPts val="278"/>
               </a:spcAft>
             </a:pPr>
             <a:r>
-              <a:rPr sz="2000" i="0" b="0">
+              <a:rPr sz="1300" i="0" b="0">
                 <a:solidFill>
                   <a:srgbClr val="858585"/>
                 </a:solidFill>
@@ -14404,65 +14815,17 @@
           <a:p>
             <a:pPr algn="r">
               <a:spcAft>
-                <a:spcPts val="428"/>
+                <a:spcPts val="278"/>
               </a:spcAft>
             </a:pPr>
             <a:r>
-              <a:rPr sz="2000" i="0" b="0">
+              <a:rPr sz="1300" i="0" b="0">
                 <a:solidFill>
                   <a:srgbClr val="858585"/>
                 </a:solidFill>
                 <a:latin typeface="Consolas"/>
               </a:rPr>
               <a:t>9</a:t>
-            </a:r>
-          </a:p>
-          <a:p>
-            <a:pPr algn="r">
-              <a:spcAft>
-                <a:spcPts val="428"/>
-              </a:spcAft>
-            </a:pPr>
-            <a:r>
-              <a:rPr sz="2000" i="0" b="0">
-                <a:solidFill>
-                  <a:srgbClr val="858585"/>
-                </a:solidFill>
-                <a:latin typeface="Consolas"/>
-              </a:rPr>
-              <a:t>10</a:t>
-            </a:r>
-          </a:p>
-          <a:p>
-            <a:pPr algn="r">
-              <a:spcAft>
-                <a:spcPts val="428"/>
-              </a:spcAft>
-            </a:pPr>
-            <a:r>
-              <a:rPr sz="2000" i="0" b="0">
-                <a:solidFill>
-                  <a:srgbClr val="858585"/>
-                </a:solidFill>
-                <a:latin typeface="Consolas"/>
-              </a:rPr>
-              <a:t>11</a:t>
-            </a:r>
-          </a:p>
-          <a:p>
-            <a:pPr algn="r">
-              <a:spcAft>
-                <a:spcPts val="428"/>
-              </a:spcAft>
-            </a:pPr>
-            <a:r>
-              <a:rPr sz="2000" i="0" b="0">
-                <a:solidFill>
-                  <a:srgbClr val="858585"/>
-                </a:solidFill>
-                <a:latin typeface="Consolas"/>
-              </a:rPr>
-              <a:t>12</a:t>
             </a:r>
           </a:p>
         </p:txBody>
@@ -14476,7 +14839,7 @@
         <p:spPr>
           <a:xfrm>
             <a:off x="1188720" y="1719072"/>
-            <a:ext cx="10271455" cy="4322683"/>
+            <a:ext cx="5986083" cy="2301522"/>
           </a:xfrm>
           <a:prstGeom prst="rect">
             <a:avLst/>
@@ -14491,11 +14854,11 @@
           <a:p>
             <a:pPr>
               <a:spcAft>
-                <a:spcPts val="428"/>
+                <a:spcPts val="278"/>
               </a:spcAft>
             </a:pPr>
             <a:r>
-              <a:rPr sz="2000" i="0" b="0">
+              <a:rPr sz="1300" i="0" b="0">
                 <a:solidFill>
                   <a:srgbClr val="D4D4D4"/>
                 </a:solidFill>
@@ -14504,7 +14867,7 @@
               <a:t>flowchart</a:t>
             </a:r>
             <a:r>
-              <a:rPr sz="2000" i="0" b="0">
+              <a:rPr sz="1300" i="0" b="0">
                 <a:solidFill>
                   <a:srgbClr val="D4D4D4"/>
                 </a:solidFill>
@@ -14513,7 +14876,7 @@
               <a:t> </a:t>
             </a:r>
             <a:r>
-              <a:rPr sz="2000" i="0" b="0">
+              <a:rPr sz="1300" i="0" b="0">
                 <a:solidFill>
                   <a:srgbClr val="D4D4D4"/>
                 </a:solidFill>
@@ -14525,11 +14888,11 @@
           <a:p>
             <a:pPr>
               <a:spcAft>
-                <a:spcPts val="428"/>
+                <a:spcPts val="278"/>
               </a:spcAft>
             </a:pPr>
             <a:r>
-              <a:rPr sz="2000" i="0" b="0">
+              <a:rPr sz="1300" i="0" b="0">
                 <a:solidFill>
                   <a:srgbClr val="D4D4D4"/>
                 </a:solidFill>
@@ -14538,7 +14901,7 @@
               <a:t>  </a:t>
             </a:r>
             <a:r>
-              <a:rPr sz="2000" i="0" b="0">
+              <a:rPr sz="1300" i="0" b="0">
                 <a:solidFill>
                   <a:srgbClr val="DCDCAA"/>
                 </a:solidFill>
@@ -14547,7 +14910,7 @@
               <a:t>ini</a:t>
             </a:r>
             <a:r>
-              <a:rPr sz="2000" i="0" b="0">
+              <a:rPr sz="1300" i="0" b="0">
                 <a:solidFill>
                   <a:srgbClr val="D4D4D4"/>
                 </a:solidFill>
@@ -14556,7 +14919,7 @@
               <a:t>([</a:t>
             </a:r>
             <a:r>
-              <a:rPr sz="2000" i="0" b="0">
+              <a:rPr sz="1300" i="0" b="0">
                 <a:solidFill>
                   <a:srgbClr val="D4D4D4"/>
                 </a:solidFill>
@@ -14565,7 +14928,7 @@
               <a:t>Inicio</a:t>
             </a:r>
             <a:r>
-              <a:rPr sz="2000" i="0" b="0">
+              <a:rPr sz="1300" i="0" b="0">
                 <a:solidFill>
                   <a:srgbClr val="D4D4D4"/>
                 </a:solidFill>
@@ -14574,7 +14937,7 @@
               <a:t>]) --&gt; </a:t>
             </a:r>
             <a:r>
-              <a:rPr sz="2000" i="0" b="0">
+              <a:rPr sz="1300" i="0" b="0">
                 <a:solidFill>
                   <a:srgbClr val="D4D4D4"/>
                 </a:solidFill>
@@ -14583,7 +14946,7 @@
               <a:t>llega</a:t>
             </a:r>
             <a:r>
-              <a:rPr sz="2000" i="0" b="0">
+              <a:rPr sz="1300" i="0" b="0">
                 <a:solidFill>
                   <a:srgbClr val="D4D4D4"/>
                 </a:solidFill>
@@ -14592,7 +14955,7 @@
               <a:t>[</a:t>
             </a:r>
             <a:r>
-              <a:rPr sz="2000" i="0" b="0">
+              <a:rPr sz="1300" i="0" b="0">
                 <a:solidFill>
                   <a:srgbClr val="D4D4D4"/>
                 </a:solidFill>
@@ -14601,7 +14964,7 @@
               <a:t>La</a:t>
             </a:r>
             <a:r>
-              <a:rPr sz="2000" i="0" b="0">
+              <a:rPr sz="1300" i="0" b="0">
                 <a:solidFill>
                   <a:srgbClr val="D4D4D4"/>
                 </a:solidFill>
@@ -14610,7 +14973,7 @@
               <a:t> </a:t>
             </a:r>
             <a:r>
-              <a:rPr sz="2000" i="0" b="0">
+              <a:rPr sz="1300" i="0" b="0">
                 <a:solidFill>
                   <a:srgbClr val="D4D4D4"/>
                 </a:solidFill>
@@ -14619,7 +14982,7 @@
               <a:t>mascota</a:t>
             </a:r>
             <a:r>
-              <a:rPr sz="2000" i="0" b="0">
+              <a:rPr sz="1300" i="0" b="0">
                 <a:solidFill>
                   <a:srgbClr val="D4D4D4"/>
                 </a:solidFill>
@@ -14628,7 +14991,7 @@
               <a:t> </a:t>
             </a:r>
             <a:r>
-              <a:rPr sz="2000" i="0" b="0">
+              <a:rPr sz="1300" i="0" b="0">
                 <a:solidFill>
                   <a:srgbClr val="D4D4D4"/>
                 </a:solidFill>
@@ -14637,7 +15000,7 @@
               <a:t>llega</a:t>
             </a:r>
             <a:r>
-              <a:rPr sz="2000" i="0" b="0">
+              <a:rPr sz="1300" i="0" b="0">
                 <a:solidFill>
                   <a:srgbClr val="D4D4D4"/>
                 </a:solidFill>
@@ -14646,7 +15009,7 @@
               <a:t> </a:t>
             </a:r>
             <a:r>
-              <a:rPr sz="2000" i="0" b="0">
+              <a:rPr sz="1300" i="0" b="0">
                 <a:solidFill>
                   <a:srgbClr val="D4D4D4"/>
                 </a:solidFill>
@@ -14655,7 +15018,7 @@
               <a:t>a</a:t>
             </a:r>
             <a:r>
-              <a:rPr sz="2000" i="0" b="0">
+              <a:rPr sz="1300" i="0" b="0">
                 <a:solidFill>
                   <a:srgbClr val="D4D4D4"/>
                 </a:solidFill>
@@ -14664,7 +15027,7 @@
               <a:t> </a:t>
             </a:r>
             <a:r>
-              <a:rPr sz="2000" i="0" b="0">
+              <a:rPr sz="1300" i="0" b="0">
                 <a:solidFill>
                   <a:srgbClr val="D4D4D4"/>
                 </a:solidFill>
@@ -14673,7 +15036,7 @@
               <a:t>consulta</a:t>
             </a:r>
             <a:r>
-              <a:rPr sz="2000" i="0" b="0">
+              <a:rPr sz="1300" i="0" b="0">
                 <a:solidFill>
                   <a:srgbClr val="D4D4D4"/>
                 </a:solidFill>
@@ -14685,11 +15048,11 @@
           <a:p>
             <a:pPr>
               <a:spcAft>
-                <a:spcPts val="428"/>
+                <a:spcPts val="278"/>
               </a:spcAft>
             </a:pPr>
             <a:r>
-              <a:rPr sz="2000" i="0" b="0">
+              <a:rPr sz="1300" i="0" b="0">
                 <a:solidFill>
                   <a:srgbClr val="D4D4D4"/>
                 </a:solidFill>
@@ -14698,7 +15061,7 @@
               <a:t>  </a:t>
             </a:r>
             <a:r>
-              <a:rPr sz="2000" i="0" b="0">
+              <a:rPr sz="1300" i="0" b="0">
                 <a:solidFill>
                   <a:srgbClr val="D4D4D4"/>
                 </a:solidFill>
@@ -14707,7 +15070,7 @@
               <a:t>llega</a:t>
             </a:r>
             <a:r>
-              <a:rPr sz="2000" i="0" b="0">
+              <a:rPr sz="1300" i="0" b="0">
                 <a:solidFill>
                   <a:srgbClr val="D4D4D4"/>
                 </a:solidFill>
@@ -14716,7 +15079,7 @@
               <a:t> --&gt; </a:t>
             </a:r>
             <a:r>
-              <a:rPr sz="2000" i="0" b="0">
+              <a:rPr sz="1300" i="0" b="0">
                 <a:solidFill>
                   <a:srgbClr val="D4D4D4"/>
                 </a:solidFill>
@@ -14725,7 +15088,7 @@
               <a:t>tiene</a:t>
             </a:r>
             <a:r>
-              <a:rPr sz="2000" i="0" b="0">
+              <a:rPr sz="1300" i="0" b="0">
                 <a:solidFill>
                   <a:srgbClr val="D4D4D4"/>
                 </a:solidFill>
@@ -14734,7 +15097,7 @@
               <a:t>{</a:t>
             </a:r>
             <a:r>
-              <a:rPr sz="2000" i="0" b="0">
+              <a:rPr sz="1300" i="0" b="0">
                 <a:solidFill>
                   <a:srgbClr val="D4D4D4"/>
                 </a:solidFill>
@@ -14743,7 +15106,7 @@
               <a:t>Tiene</a:t>
             </a:r>
             <a:r>
-              <a:rPr sz="2000" i="0" b="0">
+              <a:rPr sz="1300" i="0" b="0">
                 <a:solidFill>
                   <a:srgbClr val="D4D4D4"/>
                 </a:solidFill>
@@ -14752,7 +15115,7 @@
               <a:t> </a:t>
             </a:r>
             <a:r>
-              <a:rPr sz="2000" i="0" b="0">
+              <a:rPr sz="1300" i="0" b="0">
                 <a:solidFill>
                   <a:srgbClr val="D4D4D4"/>
                 </a:solidFill>
@@ -14761,7 +15124,7 @@
               <a:t>cita</a:t>
             </a:r>
             <a:r>
-              <a:rPr sz="2000" i="0" b="0">
+              <a:rPr sz="1300" i="0" b="0">
                 <a:solidFill>
                   <a:srgbClr val="D4D4D4"/>
                 </a:solidFill>
@@ -14770,7 +15133,7 @@
               <a:t>&lt;</a:t>
             </a:r>
             <a:r>
-              <a:rPr sz="2000" i="0" b="0">
+              <a:rPr sz="1300" i="0" b="0">
                 <a:solidFill>
                   <a:srgbClr val="D4D4D4"/>
                 </a:solidFill>
@@ -14779,7 +15142,7 @@
               <a:t>br</a:t>
             </a:r>
             <a:r>
-              <a:rPr sz="2000" i="0" b="0">
+              <a:rPr sz="1300" i="0" b="0">
                 <a:solidFill>
                   <a:srgbClr val="D4D4D4"/>
                 </a:solidFill>
@@ -14788,7 +15151,7 @@
               <a:t>/&gt;</a:t>
             </a:r>
             <a:r>
-              <a:rPr sz="2000" i="0" b="0">
+              <a:rPr sz="1300" i="0" b="0">
                 <a:solidFill>
                   <a:srgbClr val="D4D4D4"/>
                 </a:solidFill>
@@ -14797,7 +15160,7 @@
               <a:t>programada</a:t>
             </a:r>
             <a:r>
-              <a:rPr sz="2000" i="0" b="0">
+              <a:rPr sz="1300" i="0" b="0">
                 <a:solidFill>
                   <a:srgbClr val="D4D4D4"/>
                 </a:solidFill>
@@ -14809,11 +15172,11 @@
           <a:p>
             <a:pPr>
               <a:spcAft>
-                <a:spcPts val="428"/>
+                <a:spcPts val="278"/>
               </a:spcAft>
             </a:pPr>
             <a:r>
-              <a:rPr sz="2000" i="0" b="0">
+              <a:rPr sz="1300" i="0" b="0">
                 <a:solidFill>
                   <a:srgbClr val="D4D4D4"/>
                 </a:solidFill>
@@ -14822,7 +15185,7 @@
               <a:t>  </a:t>
             </a:r>
             <a:r>
-              <a:rPr sz="2000" i="0" b="0">
+              <a:rPr sz="1300" i="0" b="0">
                 <a:solidFill>
                   <a:srgbClr val="D4D4D4"/>
                 </a:solidFill>
@@ -14831,7 +15194,7 @@
               <a:t>tiene</a:t>
             </a:r>
             <a:r>
-              <a:rPr sz="2000" i="0" b="0">
+              <a:rPr sz="1300" i="0" b="0">
                 <a:solidFill>
                   <a:srgbClr val="D4D4D4"/>
                 </a:solidFill>
@@ -14840,7 +15203,7 @@
               <a:t> --&gt;|</a:t>
             </a:r>
             <a:r>
-              <a:rPr sz="2000" i="0" b="0">
+              <a:rPr sz="1300" i="0" b="0">
                 <a:solidFill>
                   <a:srgbClr val="D4D4D4"/>
                 </a:solidFill>
@@ -14849,7 +15212,7 @@
               <a:t>Si</a:t>
             </a:r>
             <a:r>
-              <a:rPr sz="2000" i="0" b="0">
+              <a:rPr sz="1300" i="0" b="0">
                 <a:solidFill>
                   <a:srgbClr val="D4D4D4"/>
                 </a:solidFill>
@@ -14858,7 +15221,7 @@
               <a:t>| </a:t>
             </a:r>
             <a:r>
-              <a:rPr sz="2000" i="0" b="0">
+              <a:rPr sz="1300" i="0" b="0">
                 <a:solidFill>
                   <a:srgbClr val="D4D4D4"/>
                 </a:solidFill>
@@ -14867,7 +15230,7 @@
               <a:t>atiende</a:t>
             </a:r>
             <a:r>
-              <a:rPr sz="2000" i="0" b="0">
+              <a:rPr sz="1300" i="0" b="0">
                 <a:solidFill>
                   <a:srgbClr val="D4D4D4"/>
                 </a:solidFill>
@@ -14876,7 +15239,7 @@
               <a:t>[</a:t>
             </a:r>
             <a:r>
-              <a:rPr sz="2000" i="0" b="0">
+              <a:rPr sz="1300" i="0" b="0">
                 <a:solidFill>
                   <a:srgbClr val="D4D4D4"/>
                 </a:solidFill>
@@ -14885,7 +15248,7 @@
               <a:t>Registrar</a:t>
             </a:r>
             <a:r>
-              <a:rPr sz="2000" i="0" b="0">
+              <a:rPr sz="1300" i="0" b="0">
                 <a:solidFill>
                   <a:srgbClr val="D4D4D4"/>
                 </a:solidFill>
@@ -14894,7 +15257,7 @@
               <a:t> </a:t>
             </a:r>
             <a:r>
-              <a:rPr sz="2000" i="0" b="0">
+              <a:rPr sz="1300" i="0" b="0">
                 <a:solidFill>
                   <a:srgbClr val="D4D4D4"/>
                 </a:solidFill>
@@ -14903,7 +15266,7 @@
               <a:t>consulta</a:t>
             </a:r>
             <a:r>
-              <a:rPr sz="2000" i="0" b="0">
+              <a:rPr sz="1300" i="0" b="0">
                 <a:solidFill>
                   <a:srgbClr val="D4D4D4"/>
                 </a:solidFill>
@@ -14915,11 +15278,11 @@
           <a:p>
             <a:pPr>
               <a:spcAft>
-                <a:spcPts val="428"/>
+                <a:spcPts val="278"/>
               </a:spcAft>
             </a:pPr>
             <a:r>
-              <a:rPr sz="2000" i="0" b="0">
+              <a:rPr sz="1300" i="0" b="0">
                 <a:solidFill>
                   <a:srgbClr val="D4D4D4"/>
                 </a:solidFill>
@@ -14928,7 +15291,7 @@
               <a:t>  </a:t>
             </a:r>
             <a:r>
-              <a:rPr sz="2000" i="0" b="0">
+              <a:rPr sz="1300" i="0" b="0">
                 <a:solidFill>
                   <a:srgbClr val="D4D4D4"/>
                 </a:solidFill>
@@ -14937,7 +15300,7 @@
               <a:t>tiene</a:t>
             </a:r>
             <a:r>
-              <a:rPr sz="2000" i="0" b="0">
+              <a:rPr sz="1300" i="0" b="0">
                 <a:solidFill>
                   <a:srgbClr val="D4D4D4"/>
                 </a:solidFill>
@@ -14946,7 +15309,7 @@
               <a:t> --&gt;|</a:t>
             </a:r>
             <a:r>
-              <a:rPr sz="2000" i="0" b="0">
+              <a:rPr sz="1300" i="0" b="0">
                 <a:solidFill>
                   <a:srgbClr val="D4D4D4"/>
                 </a:solidFill>
@@ -14955,7 +15318,7 @@
               <a:t>No</a:t>
             </a:r>
             <a:r>
-              <a:rPr sz="2000" i="0" b="0">
+              <a:rPr sz="1300" i="0" b="0">
                 <a:solidFill>
                   <a:srgbClr val="D4D4D4"/>
                 </a:solidFill>
@@ -14964,7 +15327,7 @@
               <a:t>| </a:t>
             </a:r>
             <a:r>
-              <a:rPr sz="2000" i="0" b="0">
+              <a:rPr sz="1300" i="0" b="0">
                 <a:solidFill>
                   <a:srgbClr val="D4D4D4"/>
                 </a:solidFill>
@@ -14973,7 +15336,7 @@
               <a:t>urg</a:t>
             </a:r>
             <a:r>
-              <a:rPr sz="2000" i="0" b="0">
+              <a:rPr sz="1300" i="0" b="0">
                 <a:solidFill>
                   <a:srgbClr val="D4D4D4"/>
                 </a:solidFill>
@@ -14982,7 +15345,7 @@
               <a:t>{</a:t>
             </a:r>
             <a:r>
-              <a:rPr sz="2000" i="0" b="0">
+              <a:rPr sz="1300" i="0" b="0">
                 <a:solidFill>
                   <a:srgbClr val="D4D4D4"/>
                 </a:solidFill>
@@ -14991,7 +15354,7 @@
               <a:t>Es</a:t>
             </a:r>
             <a:r>
-              <a:rPr sz="2000" i="0" b="0">
+              <a:rPr sz="1300" i="0" b="0">
                 <a:solidFill>
                   <a:srgbClr val="D4D4D4"/>
                 </a:solidFill>
@@ -15000,7 +15363,7 @@
               <a:t> </a:t>
             </a:r>
             <a:r>
-              <a:rPr sz="2000" i="0" b="0">
+              <a:rPr sz="1300" i="0" b="0">
                 <a:solidFill>
                   <a:srgbClr val="D4D4D4"/>
                 </a:solidFill>
@@ -15009,7 +15372,7 @@
               <a:t>urgencia</a:t>
             </a:r>
             <a:r>
-              <a:rPr sz="2000" i="0" b="0">
+              <a:rPr sz="1300" i="0" b="0">
                 <a:solidFill>
                   <a:srgbClr val="D4D4D4"/>
                 </a:solidFill>
@@ -15021,11 +15384,11 @@
           <a:p>
             <a:pPr>
               <a:spcAft>
-                <a:spcPts val="428"/>
+                <a:spcPts val="278"/>
               </a:spcAft>
             </a:pPr>
             <a:r>
-              <a:rPr sz="2000" i="0" b="0">
+              <a:rPr sz="1300" i="0" b="0">
                 <a:solidFill>
                   <a:srgbClr val="D4D4D4"/>
                 </a:solidFill>
@@ -15034,7 +15397,7 @@
               <a:t>  </a:t>
             </a:r>
             <a:r>
-              <a:rPr sz="2000" i="0" b="0">
+              <a:rPr sz="1300" i="0" b="0">
                 <a:solidFill>
                   <a:srgbClr val="D4D4D4"/>
                 </a:solidFill>
@@ -15043,7 +15406,7 @@
               <a:t>urg</a:t>
             </a:r>
             <a:r>
-              <a:rPr sz="2000" i="0" b="0">
+              <a:rPr sz="1300" i="0" b="0">
                 <a:solidFill>
                   <a:srgbClr val="D4D4D4"/>
                 </a:solidFill>
@@ -15052,7 +15415,7 @@
               <a:t> --&gt;|</a:t>
             </a:r>
             <a:r>
-              <a:rPr sz="2000" i="0" b="0">
+              <a:rPr sz="1300" i="0" b="0">
                 <a:solidFill>
                   <a:srgbClr val="D4D4D4"/>
                 </a:solidFill>
@@ -15061,7 +15424,7 @@
               <a:t>Si</a:t>
             </a:r>
             <a:r>
-              <a:rPr sz="2000" i="0" b="0">
+              <a:rPr sz="1300" i="0" b="0">
                 <a:solidFill>
                   <a:srgbClr val="D4D4D4"/>
                 </a:solidFill>
@@ -15070,7 +15433,7 @@
               <a:t>| </a:t>
             </a:r>
             <a:r>
-              <a:rPr sz="2000" i="0" b="0">
+              <a:rPr sz="1300" i="0" b="0">
                 <a:solidFill>
                   <a:srgbClr val="D4D4D4"/>
                 </a:solidFill>
@@ -15079,7 +15442,7 @@
               <a:t>crear</a:t>
             </a:r>
             <a:r>
-              <a:rPr sz="2000" i="0" b="0">
+              <a:rPr sz="1300" i="0" b="0">
                 <a:solidFill>
                   <a:srgbClr val="D4D4D4"/>
                 </a:solidFill>
@@ -15088,7 +15451,7 @@
               <a:t>[</a:t>
             </a:r>
             <a:r>
-              <a:rPr sz="2000" i="0" b="0">
+              <a:rPr sz="1300" i="0" b="0">
                 <a:solidFill>
                   <a:srgbClr val="D4D4D4"/>
                 </a:solidFill>
@@ -15097,7 +15460,7 @@
               <a:t>Crear</a:t>
             </a:r>
             <a:r>
-              <a:rPr sz="2000" i="0" b="0">
+              <a:rPr sz="1300" i="0" b="0">
                 <a:solidFill>
                   <a:srgbClr val="D4D4D4"/>
                 </a:solidFill>
@@ -15106,7 +15469,7 @@
               <a:t> </a:t>
             </a:r>
             <a:r>
-              <a:rPr sz="2000" i="0" b="0">
+              <a:rPr sz="1300" i="0" b="0">
                 <a:solidFill>
                   <a:srgbClr val="D4D4D4"/>
                 </a:solidFill>
@@ -15115,7 +15478,7 @@
               <a:t>cita</a:t>
             </a:r>
             <a:r>
-              <a:rPr sz="2000" i="0" b="0">
+              <a:rPr sz="1300" i="0" b="0">
                 <a:solidFill>
                   <a:srgbClr val="D4D4D4"/>
                 </a:solidFill>
@@ -15124,7 +15487,7 @@
               <a:t> </a:t>
             </a:r>
             <a:r>
-              <a:rPr sz="2000" i="0" b="0">
+              <a:rPr sz="1300" i="0" b="0">
                 <a:solidFill>
                   <a:srgbClr val="D4D4D4"/>
                 </a:solidFill>
@@ -15133,7 +15496,7 @@
               <a:t>de</a:t>
             </a:r>
             <a:r>
-              <a:rPr sz="2000" i="0" b="0">
+              <a:rPr sz="1300" i="0" b="0">
                 <a:solidFill>
                   <a:srgbClr val="D4D4D4"/>
                 </a:solidFill>
@@ -15142,7 +15505,7 @@
               <a:t> </a:t>
             </a:r>
             <a:r>
-              <a:rPr sz="2000" i="0" b="0">
+              <a:rPr sz="1300" i="0" b="0">
                 <a:solidFill>
                   <a:srgbClr val="D4D4D4"/>
                 </a:solidFill>
@@ -15151,7 +15514,7 @@
               <a:t>urgencia</a:t>
             </a:r>
             <a:r>
-              <a:rPr sz="2000" i="0" b="0">
+              <a:rPr sz="1300" i="0" b="0">
                 <a:solidFill>
                   <a:srgbClr val="D4D4D4"/>
                 </a:solidFill>
@@ -15160,7 +15523,7 @@
               <a:t>] --&gt; </a:t>
             </a:r>
             <a:r>
-              <a:rPr sz="2000" i="0" b="0">
+              <a:rPr sz="1300" i="0" b="0">
                 <a:solidFill>
                   <a:srgbClr val="D4D4D4"/>
                 </a:solidFill>
@@ -15172,11 +15535,11 @@
           <a:p>
             <a:pPr>
               <a:spcAft>
-                <a:spcPts val="428"/>
+                <a:spcPts val="278"/>
               </a:spcAft>
             </a:pPr>
             <a:r>
-              <a:rPr sz="2000" i="0" b="0">
+              <a:rPr sz="1300" i="0" b="0">
                 <a:solidFill>
                   <a:srgbClr val="D4D4D4"/>
                 </a:solidFill>
@@ -15185,7 +15548,7 @@
               <a:t>  </a:t>
             </a:r>
             <a:r>
-              <a:rPr sz="2000" i="0" b="0">
+              <a:rPr sz="1300" i="0" b="0">
                 <a:solidFill>
                   <a:srgbClr val="D4D4D4"/>
                 </a:solidFill>
@@ -15194,7 +15557,7 @@
               <a:t>urg</a:t>
             </a:r>
             <a:r>
-              <a:rPr sz="2000" i="0" b="0">
+              <a:rPr sz="1300" i="0" b="0">
                 <a:solidFill>
                   <a:srgbClr val="D4D4D4"/>
                 </a:solidFill>
@@ -15203,7 +15566,7 @@
               <a:t> --&gt;|</a:t>
             </a:r>
             <a:r>
-              <a:rPr sz="2000" i="0" b="0">
+              <a:rPr sz="1300" i="0" b="0">
                 <a:solidFill>
                   <a:srgbClr val="D4D4D4"/>
                 </a:solidFill>
@@ -15212,7 +15575,7 @@
               <a:t>No</a:t>
             </a:r>
             <a:r>
-              <a:rPr sz="2000" i="0" b="0">
+              <a:rPr sz="1300" i="0" b="0">
                 <a:solidFill>
                   <a:srgbClr val="D4D4D4"/>
                 </a:solidFill>
@@ -15221,7 +15584,7 @@
               <a:t>| </a:t>
             </a:r>
             <a:r>
-              <a:rPr sz="2000" i="0" b="0">
+              <a:rPr sz="1300" i="0" b="0">
                 <a:solidFill>
                   <a:srgbClr val="D4D4D4"/>
                 </a:solidFill>
@@ -15230,7 +15593,7 @@
               <a:t>agendar</a:t>
             </a:r>
             <a:r>
-              <a:rPr sz="2000" i="0" b="0">
+              <a:rPr sz="1300" i="0" b="0">
                 <a:solidFill>
                   <a:srgbClr val="D4D4D4"/>
                 </a:solidFill>
@@ -15239,7 +15602,7 @@
               <a:t>[</a:t>
             </a:r>
             <a:r>
-              <a:rPr sz="2000" i="0" b="0">
+              <a:rPr sz="1300" i="0" b="0">
                 <a:solidFill>
                   <a:srgbClr val="D4D4D4"/>
                 </a:solidFill>
@@ -15248,7 +15611,7 @@
               <a:t>Agendar</a:t>
             </a:r>
             <a:r>
-              <a:rPr sz="2000" i="0" b="0">
+              <a:rPr sz="1300" i="0" b="0">
                 <a:solidFill>
                   <a:srgbClr val="D4D4D4"/>
                 </a:solidFill>
@@ -15257,7 +15620,7 @@
               <a:t> </a:t>
             </a:r>
             <a:r>
-              <a:rPr sz="2000" i="0" b="0">
+              <a:rPr sz="1300" i="0" b="0">
                 <a:solidFill>
                   <a:srgbClr val="D4D4D4"/>
                 </a:solidFill>
@@ -15266,7 +15629,7 @@
               <a:t>para</a:t>
             </a:r>
             <a:r>
-              <a:rPr sz="2000" i="0" b="0">
+              <a:rPr sz="1300" i="0" b="0">
                 <a:solidFill>
                   <a:srgbClr val="D4D4D4"/>
                 </a:solidFill>
@@ -15275,7 +15638,7 @@
               <a:t> </a:t>
             </a:r>
             <a:r>
-              <a:rPr sz="2000" i="0" b="0">
+              <a:rPr sz="1300" i="0" b="0">
                 <a:solidFill>
                   <a:srgbClr val="D4D4D4"/>
                 </a:solidFill>
@@ -15284,7 +15647,7 @@
               <a:t>otro</a:t>
             </a:r>
             <a:r>
-              <a:rPr sz="2000" i="0" b="0">
+              <a:rPr sz="1300" i="0" b="0">
                 <a:solidFill>
                   <a:srgbClr val="D4D4D4"/>
                 </a:solidFill>
@@ -15293,7 +15656,7 @@
               <a:t> </a:t>
             </a:r>
             <a:r>
-              <a:rPr sz="2000" i="0" b="0">
+              <a:rPr sz="1300" i="0" b="0">
                 <a:solidFill>
                   <a:srgbClr val="D4D4D4"/>
                 </a:solidFill>
@@ -15302,7 +15665,7 @@
               <a:t>dia</a:t>
             </a:r>
             <a:r>
-              <a:rPr sz="2000" i="0" b="0">
+              <a:rPr sz="1300" i="0" b="0">
                 <a:solidFill>
                   <a:srgbClr val="D4D4D4"/>
                 </a:solidFill>
@@ -15311,7 +15674,7 @@
               <a:t>] --&gt; </a:t>
             </a:r>
             <a:r>
-              <a:rPr sz="2000" i="0" b="0">
+              <a:rPr sz="1300" i="0" b="0">
                 <a:solidFill>
                   <a:srgbClr val="DCDCAA"/>
                 </a:solidFill>
@@ -15320,7 +15683,7 @@
               <a:t>fin</a:t>
             </a:r>
             <a:r>
-              <a:rPr sz="2000" i="0" b="0">
+              <a:rPr sz="1300" i="0" b="0">
                 <a:solidFill>
                   <a:srgbClr val="D4D4D4"/>
                 </a:solidFill>
@@ -15329,7 +15692,7 @@
               <a:t>([</a:t>
             </a:r>
             <a:r>
-              <a:rPr sz="2000" i="0" b="0">
+              <a:rPr sz="1300" i="0" b="0">
                 <a:solidFill>
                   <a:srgbClr val="D4D4D4"/>
                 </a:solidFill>
@@ -15338,7 +15701,7 @@
               <a:t>Fin</a:t>
             </a:r>
             <a:r>
-              <a:rPr sz="2000" i="0" b="0">
+              <a:rPr sz="1300" i="0" b="0">
                 <a:solidFill>
                   <a:srgbClr val="D4D4D4"/>
                 </a:solidFill>
@@ -15350,11 +15713,11 @@
           <a:p>
             <a:pPr>
               <a:spcAft>
-                <a:spcPts val="428"/>
+                <a:spcPts val="278"/>
               </a:spcAft>
             </a:pPr>
             <a:r>
-              <a:rPr sz="2000" i="0" b="0">
+              <a:rPr sz="1300" i="0" b="0">
                 <a:solidFill>
                   <a:srgbClr val="D4D4D4"/>
                 </a:solidFill>
@@ -15363,7 +15726,7 @@
               <a:t>  </a:t>
             </a:r>
             <a:r>
-              <a:rPr sz="2000" i="0" b="0">
+              <a:rPr sz="1300" i="0" b="0">
                 <a:solidFill>
                   <a:srgbClr val="D4D4D4"/>
                 </a:solidFill>
@@ -15372,7 +15735,7 @@
               <a:t>atiende</a:t>
             </a:r>
             <a:r>
-              <a:rPr sz="2000" i="0" b="0">
+              <a:rPr sz="1300" i="0" b="0">
                 <a:solidFill>
                   <a:srgbClr val="D4D4D4"/>
                 </a:solidFill>
@@ -15381,7 +15744,7 @@
               <a:t> --&gt; </a:t>
             </a:r>
             <a:r>
-              <a:rPr sz="2000" i="0" b="0">
+              <a:rPr sz="1300" i="0" b="0">
                 <a:solidFill>
                   <a:srgbClr val="D4D4D4"/>
                 </a:solidFill>
@@ -15390,7 +15753,7 @@
               <a:t>receta</a:t>
             </a:r>
             <a:r>
-              <a:rPr sz="2000" i="0" b="0">
+              <a:rPr sz="1300" i="0" b="0">
                 <a:solidFill>
                   <a:srgbClr val="D4D4D4"/>
                 </a:solidFill>
@@ -15399,7 +15762,7 @@
               <a:t>[</a:t>
             </a:r>
             <a:r>
-              <a:rPr sz="2000" i="0" b="0">
+              <a:rPr sz="1300" i="0" b="0">
                 <a:solidFill>
                   <a:srgbClr val="D4D4D4"/>
                 </a:solidFill>
@@ -15408,7 +15771,7 @@
               <a:t>Emitir</a:t>
             </a:r>
             <a:r>
-              <a:rPr sz="2000" i="0" b="0">
+              <a:rPr sz="1300" i="0" b="0">
                 <a:solidFill>
                   <a:srgbClr val="D4D4D4"/>
                 </a:solidFill>
@@ -15417,7 +15780,7 @@
               <a:t> </a:t>
             </a:r>
             <a:r>
-              <a:rPr sz="2000" i="0" b="0">
+              <a:rPr sz="1300" i="0" b="0">
                 <a:solidFill>
                   <a:srgbClr val="D4D4D4"/>
                 </a:solidFill>
@@ -15426,7 +15789,7 @@
               <a:t>receta</a:t>
             </a:r>
             <a:r>
-              <a:rPr sz="2000" i="0" b="0">
+              <a:rPr sz="1300" i="0" b="0">
                 <a:solidFill>
                   <a:srgbClr val="D4D4D4"/>
                 </a:solidFill>
@@ -15435,7 +15798,7 @@
               <a:t> </a:t>
             </a:r>
             <a:r>
-              <a:rPr sz="2000" i="0" b="0">
+              <a:rPr sz="1300" i="0" b="0">
                 <a:solidFill>
                   <a:srgbClr val="D4D4D4"/>
                 </a:solidFill>
@@ -15444,7 +15807,7 @@
               <a:t>e</a:t>
             </a:r>
             <a:r>
-              <a:rPr sz="2000" i="0" b="0">
+              <a:rPr sz="1300" i="0" b="0">
                 <a:solidFill>
                   <a:srgbClr val="D4D4D4"/>
                 </a:solidFill>
@@ -15453,7 +15816,7 @@
               <a:t> </a:t>
             </a:r>
             <a:r>
-              <a:rPr sz="2000" i="0" b="0">
+              <a:rPr sz="1300" i="0" b="0">
                 <a:solidFill>
                   <a:srgbClr val="D4D4D4"/>
                 </a:solidFill>
@@ -15462,7 +15825,7 @@
               <a:t>insumos</a:t>
             </a:r>
             <a:r>
-              <a:rPr sz="2000" i="0" b="0">
+              <a:rPr sz="1300" i="0" b="0">
                 <a:solidFill>
                   <a:srgbClr val="D4D4D4"/>
                 </a:solidFill>
@@ -15474,11 +15837,11 @@
           <a:p>
             <a:pPr>
               <a:spcAft>
-                <a:spcPts val="428"/>
+                <a:spcPts val="278"/>
               </a:spcAft>
             </a:pPr>
             <a:r>
-              <a:rPr sz="2000" i="0" b="0">
+              <a:rPr sz="1300" i="0" b="0">
                 <a:solidFill>
                   <a:srgbClr val="D4D4D4"/>
                 </a:solidFill>
@@ -15487,7 +15850,7 @@
               <a:t>  </a:t>
             </a:r>
             <a:r>
-              <a:rPr sz="2000" i="0" b="0">
+              <a:rPr sz="1300" i="0" b="0">
                 <a:solidFill>
                   <a:srgbClr val="D4D4D4"/>
                 </a:solidFill>
@@ -15496,7 +15859,7 @@
               <a:t>receta</a:t>
             </a:r>
             <a:r>
-              <a:rPr sz="2000" i="0" b="0">
+              <a:rPr sz="1300" i="0" b="0">
                 <a:solidFill>
                   <a:srgbClr val="D4D4D4"/>
                 </a:solidFill>
@@ -15505,7 +15868,7 @@
               <a:t> --&gt; </a:t>
             </a:r>
             <a:r>
-              <a:rPr sz="2000" i="0" b="0">
+              <a:rPr sz="1300" i="0" b="0">
                 <a:solidFill>
                   <a:srgbClr val="D4D4D4"/>
                 </a:solidFill>
@@ -15514,59 +15877,150 @@
               <a:t>fin</a:t>
             </a:r>
           </a:p>
-          <a:p>
-            <a:pPr>
-              <a:spcAft>
-                <a:spcPts val="428"/>
-              </a:spcAft>
-            </a:pPr>
-            <a:r>
-              <a:rPr sz="2000" i="0" b="0">
-                <a:solidFill>
-                  <a:srgbClr val="D4D4D4"/>
-                </a:solidFill>
-                <a:latin typeface="Consolas"/>
-              </a:rPr>
-              <a:t/>
-            </a:r>
-          </a:p>
-          <a:p>
-            <a:pPr>
-              <a:spcAft>
-                <a:spcPts val="428"/>
-              </a:spcAft>
-            </a:pPr>
-            <a:r>
-              <a:rPr sz="2000" i="1" b="0">
-                <a:solidFill>
-                  <a:srgbClr val="6A9955"/>
-                </a:solidFill>
-                <a:latin typeface="Consolas"/>
-              </a:rPr>
-              <a:t>%% Cada rombo tiene que tener TODAS sus salidas rotuladas. Un rombo con</a:t>
-            </a:r>
-          </a:p>
-          <a:p>
-            <a:pPr>
-              <a:spcAft>
-                <a:spcPts val="428"/>
-              </a:spcAft>
-            </a:pPr>
-            <a:r>
-              <a:rPr sz="2000" i="1" b="0">
-                <a:solidFill>
-                  <a:srgbClr val="6A9955"/>
-                </a:solidFill>
-                <a:latin typeface="Consolas"/>
-              </a:rPr>
-              <a:t>%% una sola flecha de salida no es una decision: es un paso.</a:t>
-            </a:r>
-          </a:p>
-        </p:txBody>
-      </p:sp>
-      <p:sp>
-        <p:nvSpPr>
-          <p:cNvPr id="13" name="TextBox 12"/>
+        </p:txBody>
+      </p:sp>
+      <p:sp>
+        <p:nvSpPr>
+          <p:cNvPr id="13" name="Rounded Rectangle 12"/>
+          <p:cNvSpPr/>
+          <p:nvPr/>
+        </p:nvSpPr>
+        <p:spPr>
+          <a:xfrm>
+            <a:off x="7668579" y="1261872"/>
+            <a:ext cx="4120780" cy="3318569"/>
+          </a:xfrm>
+          <a:prstGeom prst="roundRect">
+            <a:avLst>
+              <a:gd name="adj" fmla="val 4000"/>
+            </a:avLst>
+          </a:prstGeom>
+          <a:solidFill>
+            <a:srgbClr val="E8EEF4"/>
+          </a:solidFill>
+          <a:ln>
+            <a:noFill/>
+          </a:ln>
+        </p:spPr>
+        <p:style>
+          <a:lnRef idx="1">
+            <a:schemeClr val="accent1"/>
+          </a:lnRef>
+          <a:fillRef idx="3">
+            <a:schemeClr val="accent1"/>
+          </a:fillRef>
+          <a:effectRef idx="2">
+            <a:schemeClr val="accent1"/>
+          </a:effectRef>
+          <a:fontRef idx="minor">
+            <a:schemeClr val="lt1"/>
+          </a:fontRef>
+        </p:style>
+        <p:txBody>
+          <a:bodyPr rtlCol="0" anchor="ctr"/>
+          <a:lstStyle/>
+          <a:p>
+            <a:pPr algn="ctr"/>
+          </a:p>
+        </p:txBody>
+      </p:sp>
+      <p:pic>
+        <p:nvPicPr>
+          <p:cNvPr id="14" name="Picture 13" descr="dg-actividad-paso1.png"/>
+          <p:cNvPicPr>
+            <a:picLocks noChangeAspect="1"/>
+          </p:cNvPicPr>
+          <p:nvPr/>
+        </p:nvPicPr>
+        <p:blipFill>
+          <a:blip r:embed="rId2"/>
+          <a:stretch>
+            <a:fillRect/>
+          </a:stretch>
+        </p:blipFill>
+        <p:spPr>
+          <a:xfrm>
+            <a:off x="7723443" y="1316736"/>
+            <a:ext cx="4011052" cy="3208841"/>
+          </a:xfrm>
+          <a:prstGeom prst="rect">
+            <a:avLst/>
+          </a:prstGeom>
+        </p:spPr>
+      </p:pic>
+      <p:sp>
+        <p:nvSpPr>
+          <p:cNvPr id="15" name="TextBox 14"/>
+          <p:cNvSpPr txBox="1"/>
+          <p:nvPr/>
+        </p:nvSpPr>
+        <p:spPr>
+          <a:xfrm>
+            <a:off x="7723443" y="4580441"/>
+            <a:ext cx="4011052" cy="320040"/>
+          </a:xfrm>
+          <a:prstGeom prst="rect">
+            <a:avLst/>
+          </a:prstGeom>
+          <a:noFill/>
+        </p:spPr>
+        <p:txBody>
+          <a:bodyPr wrap="square">
+            <a:spAutoFit/>
+          </a:bodyPr>
+          <a:lstStyle/>
+          <a:p>
+            <a:pPr algn="ctr"/>
+            <a:r>
+              <a:rPr sz="1200" b="0" i="1">
+                <a:solidFill>
+                  <a:srgbClr val="666666"/>
+                </a:solidFill>
+                <a:latin typeface="Calibri"/>
+              </a:rPr>
+              <a:t>Lo que dibuja este código</a:t>
+            </a:r>
+          </a:p>
+        </p:txBody>
+      </p:sp>
+      <p:sp>
+        <p:nvSpPr>
+          <p:cNvPr id="16" name="TextBox 15"/>
+          <p:cNvSpPr txBox="1"/>
+          <p:nvPr/>
+        </p:nvSpPr>
+        <p:spPr>
+          <a:xfrm>
+            <a:off x="457200" y="6035040"/>
+            <a:ext cx="11277295" cy="365760"/>
+          </a:xfrm>
+          <a:prstGeom prst="rect">
+            <a:avLst/>
+          </a:prstGeom>
+          <a:noFill/>
+        </p:spPr>
+        <p:txBody>
+          <a:bodyPr wrap="square">
+            <a:spAutoFit/>
+          </a:bodyPr>
+          <a:lstStyle/>
+          <a:p>
+            <a:pPr algn="ctr"/>
+            <a:r>
+              <a:rPr sz="1300" b="0" i="1">
+                <a:solidFill>
+                  <a:srgbClr val="666666"/>
+                </a:solidFill>
+                <a:latin typeface="Calibri"/>
+              </a:rPr>
+              <a:t>Cada rombo lleva todas sus salidas rotuladas: un rombo con una sola salida no es una decision, es un paso.</a:t>
+            </a:r>
+          </a:p>
+        </p:txBody>
+      </p:sp>
+      <p:sp>
+        <p:nvSpPr>
+          <p:cNvPr id="17" name="TextBox 16"/>
           <p:cNvSpPr txBox="1"/>
           <p:nvPr/>
         </p:nvSpPr>
